--- a/pipeline/Trabalho - pipeline de dados.pptx
+++ b/pipeline/Trabalho - pipeline de dados.pptx
@@ -259,7 +259,7 @@
             <a:spLocks noGrp="1" noChangeArrowheads="1"/>
             <a:extLst>
               <a:ext uri="smNativeData">
-                <pr:smNativeData xmlns:pr="smNativeData" xmlns="smNativeData" val="SMDATA_15_mcIdaRMAAAAlAAAAZAAAAA0AAAAAkAAAAEgAAACQAAAASAAAAAAAAAAAAAAAAAAAAAEAAABQAAAAAAAAAAAA4D8AAAAAAADgPwAAAAAAAOA/AAAAAAAA4D8AAAAAAADgPwAAAAAAAOA/AAAAAAAA4D8AAAAAAADgPwAAAAAAAOA/AAAAAAAA4D8CAAAAjAAAAAAAAAAAAAAA////AP///wgAAAAAAAAAAAAAAAAAAAAAAAAAAAAAAAAAAAAAeAAAAAEAAABAAAAAAAAAAAAAAABaAAAAAAAAAAAAAAAAAAAAAAAAAAAAAAAAAAAAAAAAAAAAAAAAAAAAAAAAAAAAAAAAAAAAAAAAAAAAAAAAAAAAAAAAAAAAAAAAAAAAFAAAADwAAAAAAAAAAAAAAAAAAAAPAAAAAQAAACMAAAAjAAAAIwAAAB4AAAAAAAAAZAAAAGQAAAAAAAAAZAAAAGQAAAAVAAAAYAAAAAAAAAAAAAAADwAAACADAAAAAAAAAAAAAAEAAACgMgAAVgcAAKr4//8BAAAAf39/AAEAAABkAAAAAAAAABQAAABAHwAAAAAAACYAAAAAAAAAwOD//wAAAAAmAAAAZAAAABYAAABMAAAAAAAAAAAAAAAEAAAAAAAAAAEAAACZloMKAAAAACgAAAAoAAAAZAAAAGQAAAAAAAAAzMzMAAAAAABQAAAAUAAAAGQAAABkAAAAAAAAABcAAAAUAAAAAAAAAAAAAAD/fwAA/38AAAAAAAAJAAAABAAAAAAAAAAeAAAAaAAAAAAAAAAAAAAAAAAAAAAAAAAAAAAAECcAABAnAAAAAAAAAAAAAAAAAAAAAAAAAAAAAAAAAAAAAAAAAAAAABQAAAAAAAAAwMD/AAAAAABkAAAAMgAAAAAAAABkAAAAAAAAAH9/fwAKAAAAIgAAABgAAAAAAAAAAAAAAAAAAAAAAAAAAAAAAAAAAAAkAAAAJAAAAAAAAAAHAAAAAAAAAAAAAAAAAAAAAAAAAAAAAAAAAAAAf39/ACUAAABYAAAAAAAAAAAAAAAAAAAAAAAAAAAAAAAAAAAAAAAAAAAAAAAAAAAAAAAAAAAAAAA/AAAAAAAAAKCGAQAAAAAAAAAAAAAAAAAMAAAAAQAAAAAAAAAAAAAAAAAAAB8AAABUAAAA////AAAAAAEAAAAAAAAAAAAAAAAAAAAAAAAAAAAAAAAAAAAAAAAAAAAAAAB/f38AAAAAA8zMzADAwP8Af39/AAAAAAAAAAAAAAAAAAAAAAAAAAAAIQAAABgAAAAUAAAAAAAAAAAAAAAfEgAADgMAABAAAAAmAAAACAAAAD+PAAAAAAAA"/>
+                <pr:smNativeData xmlns:pr="smNativeData" xmlns="smNativeData" val="SMDATA_15_r8odaRMAAAAlAAAAZAAAAA0AAAAAkAAAAEgAAACQAAAASAAAAAAAAAAAAAAAAAAAAAEAAABQAAAAAAAAAAAA4D8AAAAAAADgPwAAAAAAAOA/AAAAAAAA4D8AAAAAAADgPwAAAAAAAOA/AAAAAAAA4D8AAAAAAADgPwAAAAAAAOA/AAAAAAAA4D8CAAAAjAAAAAAAAAAAAAAA////AP///wgAAAAAAAAAAAAAAAAAAAAAAAAAAAAAAAAAAAAAeAAAAAEAAABAAAAAAAAAAAAAAABaAAAAAAAAAAAAAAAAAAAAAAAAAAAAAAAAAAAAAAAAAAAAAAAAAAAAAAAAAAAAAAAAAAAAAAAAAAAAAAAAAAAAAAAAAAAAAAAAAAAAFAAAADwAAAAAAAAAAAAAAAAAAAAPAAAAAQAAACMAAAAjAAAAIwAAAB4AAAAAAAAAZAAAAGQAAAAAAAAAZAAAAGQAAAAVAAAAYAAAAAAAAAAAAAAADwAAACADAAAAAAAAAAAAAAEAAACgMgAAVgcAAKr4//8BAAAAf39/AAEAAABkAAAAAAAAABQAAABAHwAAAAAAACYAAAAAAAAAwOD//wAAAAAmAAAAZAAAABYAAABMAAAAAAAAAAAAAAAEAAAAAAAAAAEAAACZloMKAAAAACgAAAAoAAAAZAAAAGQAAAAAAAAAzMzMAAAAAABQAAAAUAAAAGQAAABkAAAAAAAAABcAAAAUAAAAAAAAAAAAAAD/fwAA/38AAAAAAAAJAAAABAAAAAAAAAAeAAAAaAAAAAAAAAAAAAAAAAAAAAAAAAAAAAAAECcAABAnAAAAAAAAAAAAAAAAAAAAAAAAAAAAAAAAAAAAAAAAAAAAABQAAAAAAAAAwMD/AAAAAABkAAAAMgAAAAAAAABkAAAAAAAAAH9/fwAKAAAAIgAAABgAAAAAAAAAAAAAAAAAAAAAAAAAAAAAAAAAAAAkAAAAJAAAAAAAAAAHAAAAAAAAAAAAAAAAAAAAAAAAAAAAAAAAAAAAf39/ACUAAABYAAAAAAAAAAAAAAAAAAAAAAAAAAAAAAAAAAAAAAAAAAAAAAAAAAAAAAAAAAAAAAA/AAAAAAAAAKCGAQAAAAAAAAAAAAAAAAAMAAAAAQAAAAAAAAAAAAAAAAAAAB8AAABUAAAA////AAAAAAEAAAAAAAAAAAAAAAAAAAAAAAAAAAAAAAAAAAAAAAAAAAAAAAB/f38AAAAAA8zMzADAwP8Af39/AAAAAAAAAAAAAAAAAAAAAAAAAAAAIQAAABgAAAAUAAAAAAAAAAAAAAAfEgAADgMAABAAAAAmAAAACAAAAD+PAAAAAAAA"/>
               </a:ext>
             </a:extLst>
           </p:cNvSpPr>
@@ -325,7 +325,7 @@
             <a:spLocks noGrp="1" noChangeArrowheads="1"/>
             <a:extLst>
               <a:ext uri="smNativeData">
-                <pr:smNativeData xmlns:pr="smNativeData" xmlns="smNativeData" val="SMDATA_15_mcIdaRMAAAAlAAAAZAAAAA0AAAAAkAAAAEgAAACQAAAASAAAAAAAAAAAAAAAAAAAAAEAAABQAAAAAAAAAAAA4D8AAAAAAADgPwAAAAAAAOA/AAAAAAAA4D8AAAAAAADgPwAAAAAAAOA/AAAAAAAA4D8AAAAAAADgPwAAAAAAAOA/AAAAAAAA4D8CAAAAjAAAAAAAAAAAAAAA////AP///wgAAAAAAAAAAAAAAAAAAAAAAAAAAAAAAAAAAAAAeAAAAAEAAABAAAAAAAAAAAAAAABaAAAAAAAAAAAAAAAAAAAAAAAAAAAAAAAAAAAAAAAAAAAAAAAAAAAAAAAAAAAAAAAAAAAAAAAAAAAAAAAAAAAAAAAAAAAAAAAAAAAAFAAAADwAAAAAAAAAAAAAAAAAAAAPAAAAAQAAACMAAAAjAAAAIwAAAB4AAAAAAAAAZAAAAGQAAAAAAAAAZAAAAGQAAAAVAAAAYAAAAAAAAAAAAAAADwAAACADAAAAAAAAAAAAAAEAAACgMgAAVgcAAKr4//8BAAAAf39/AAEAAABkAAAAAAAAABQAAABAHwAAAAAAACYAAAAAAAAAwOD//wAAAAAmAAAAZAAAABYAAABMAAAAAAAAAAAAAAAEAAAAAAAAAAEAAACZloMKAAAAACgAAAAoAAAAZAAAAGQAAAAAAAAAzMzMAAAAAABQAAAAUAAAAGQAAABkAAAAAAAAABcAAAAUAAAAAAAAAAAAAAD/fwAA/38AAAAAAAAJAAAABAAAANRo5IMeAAAAaAAAAAAAAAAAAAAAAAAAAAAAAAAAAAAAECcAABAnAAAAAAAAAAAAAAAAAAAAAAAAAAAAAAAAAAAAAAAAAAAAABQAAAAAAAAAwMD/AAAAAABkAAAAMgAAAAAAAABkAAAAAAAAAH9/fwAKAAAAIgAAABgAAAAAAAAAAAAAAAAAAAAAAAAAAAAAAAAAAAAkAAAAJAAAAAAAAAAHAAAAAAAAAAAAAAAAAAAAAAAAAAAAAAAAAAAAf39/ACUAAABYAAAAAAAAAAAAAAAAAAAAAAAAAAAAAAAAAAAAAAAAAAAAAAAAAAAAAAAAAAAAAAA/AAAAAAAAAKCGAQAAAAAAAAAAAAAAAAAMAAAAAQAAAAAAAAAAAAAAAAAAAB8AAABUAAAA////AAAAAAEAAAAAAAAAAAAAAAAAAAAAAAAAAAAAAAAAAAAAAAAAAAAAAAB/f38AAAAAA8zMzADAwP8Af39/AAAAAAAAAAAAAAAAAAAAAAAAAAAAIQAAABgAAAAUAAAAsBcAAAAAAADPKQAADgMAABAAAAAmAAAACAAAAD+PAAAAAAAA"/>
+                <pr:smNativeData xmlns:pr="smNativeData" xmlns="smNativeData" val="SMDATA_15_r8odaRMAAAAlAAAAZAAAAA0AAAAAkAAAAEgAAACQAAAASAAAAAAAAAAAAAAAAAAAAAEAAABQAAAAAAAAAAAA4D8AAAAAAADgPwAAAAAAAOA/AAAAAAAA4D8AAAAAAADgPwAAAAAAAOA/AAAAAAAA4D8AAAAAAADgPwAAAAAAAOA/AAAAAAAA4D8CAAAAjAAAAAAAAAAAAAAA////AP///wgAAAAAAAAAAAAAAAAAAAAAAAAAAAAAAAAAAAAAeAAAAAEAAABAAAAAAAAAAAAAAABaAAAAAAAAAAAAAAAAAAAAAAAAAAAAAAAAAAAAAAAAAAAAAAAAAAAAAAAAAAAAAAAAAAAAAAAAAAAAAAAAAAAAAAAAAAAAAAAAAAAAFAAAADwAAAAAAAAAAAAAAAAAAAAPAAAAAQAAACMAAAAjAAAAIwAAAB4AAAAAAAAAZAAAAGQAAAAAAAAAZAAAAGQAAAAVAAAAYAAAAAAAAAAAAAAADwAAACADAAAAAAAAAAAAAAEAAACgMgAAVgcAAKr4//8BAAAAf39/AAEAAABkAAAAAAAAABQAAABAHwAAAAAAACYAAAAAAAAAwOD//wAAAAAmAAAAZAAAABYAAABMAAAAAAAAAAAAAAAEAAAAAAAAAAEAAACZloMKAAAAACgAAAAoAAAAZAAAAGQAAAAAAAAAzMzMAAAAAABQAAAAUAAAAGQAAABkAAAAAAAAABcAAAAUAAAAAAAAAAAAAAD/fwAA/38AAAAAAAAJAAAABAAAANRo5IMeAAAAaAAAAAAAAAAAAAAAAAAAAAAAAAAAAAAAECcAABAnAAAAAAAAAAAAAAAAAAAAAAAAAAAAAAAAAAAAAAAAAAAAABQAAAAAAAAAwMD/AAAAAABkAAAAMgAAAAAAAABkAAAAAAAAAH9/fwAKAAAAIgAAABgAAAAAAAAAAAAAAAAAAAAAAAAAAAAAAAAAAAAkAAAAJAAAAAAAAAAHAAAAAAAAAAAAAAAAAAAAAAAAAAAAAAAAAAAAf39/ACUAAABYAAAAAAAAAAAAAAAAAAAAAAAAAAAAAAAAAAAAAAAAAAAAAAAAAAAAAAAAAAAAAAA/AAAAAAAAAKCGAQAAAAAAAAAAAAAAAAAMAAAAAQAAAAAAAAAAAAAAAAAAAB8AAABUAAAA////AAAAAAEAAAAAAAAAAAAAAAAAAAAAAAAAAAAAAAAAAAAAAAAAAAAAAAB/f38AAAAAA8zMzADAwP8Af39/AAAAAAAAAAAAAAAAAAAAAAAAAAAAIQAAABgAAAAUAAAAsBcAAAAAAADPKQAADgMAABAAAAAmAAAACAAAAD+PAAAAAAAA"/>
               </a:ext>
             </a:extLst>
           </p:cNvSpPr>
@@ -381,7 +381,7 @@
             <a:pPr>
               <a:defRPr lang="en-us"/>
             </a:pPr>
-            <a:fld id="{59DEC89C-D2B4-8B3E-FA66-246B86280C71}" type="datetime1">
+            <a:fld id="{413217AA-E4AC-67E1-E28A-12B459C41447}" type="datetime1">
               <a:t>10/25/2025</a:t>
             </a:fld>
           </a:p>
@@ -394,7 +394,7 @@
             <a:spLocks noGrp="1" noChangeArrowheads="1"/>
             <a:extLst>
               <a:ext uri="smNativeData">
-                <pr:smNativeData xmlns:pr="smNativeData" xmlns="smNativeData" val="SMDATA_15_mcIdaRMAAAAlAAAAZAAAAA0AAAAAkAAAAEgAAACQAAAASAAAAAAAAAACAAAAAAAAAAEAAABQAAAAAAAAAAAA4D8AAAAAAADgPwAAAAAAAOA/AAAAAAAA4D8AAAAAAADgPwAAAAAAAOA/AAAAAAAA4D8AAAAAAADgPwAAAAAAAOA/AAAAAAAA4D8CAAAAjAAAAAAAAAAAAAAA////AP///wgAAAAAAAAAAAAAAAAAAAAAAAAAAAAAAAAAAAAAeAAAAAEAAABAAAAAAAAAAAAAAABaAAAAAAAAAAAAAAAAAAAAAAAAAAAAAAAAAAAAAAAAAAAAAAAAAAAAAAAAAAAAAAAAAAAAAAAAAAAAAAAAAAAAAAAAAAAAAAAAAAAAFAAAADwAAAAAAAAAAAAAAAAAAAAPAAAAAQAAACMAAAAjAAAAIwAAAB4AAAAAAAAAZAAAAGQAAAAAAAAAZAAAAGQAAAAVAAAAYAAAAAAAAAAAAAAADwAAACADAAAAAAAAAAAAAAEAAACgMgAAVgcAAKr4//8BAAAAf39/AAEAAABkAAAAAAAAABQAAABAHwAAAAAAACYAAAAAAAAAwOD//wAAAAAmAAAAZAAAABYAAABMAAAAAAAAAAAAAAAEAAAAAAAAAAEAAACZloMKAAAAACgAAAAoAAAAZAAAAGQAAAAAAAAAzMzMAAAAAABQAAAAUAAAAGQAAABkAAAAAAAAABcAAAAUAAAAAAAAAAAAAAD/fwAA/38AAAAAAAAJAAAABAAAAAUABAAeAAAAaAAAAAAAAAAAAAAAAAAAAAAAAAAAAAAAECcAABAnAAAAAAAAAAAAAAAAAAAAAAAAAAAAAAAAAAAAAAAAAAAAABQAAAAAAAAAwMD/AAAAAABkAAAAMgAAAAAAAABkAAAAAAAAAH9/fwAKAAAAIgAAABgAAAAAAAAAAAAAAAAAAAAAAAAAAAAAAAAAAAAkAAAAJAAAAAAAAAAHAAAAAAAAAAAAAAAAAAAAAAAAAAAAAAAAAAAAf39/ACUAAABYAAAAAAAAAAAAAAAAAAAAAAAAAAAAAAAAAAAAAAAAAAAAAAAAAAAAAAAAAAAAAAA/AAAAAAAAAKCGAQAAAAAAAAAAAAAAAAAMAAAAAQAAAAAAAAAAAAAAAAAAAB8AAABUAAAA////AAAAAAEAAAAAAAAAAAAAAAAAAAAAAAAAAAAAAAAAAAAAAAAAAAAAAAB/f38AAAAAA8zMzADAwP8Af39/AAAAAAAAAAAAAAAAAAAAAAAAAAAAIQAAABgAAAAUAAAAAAAAAAA6AAAfEgAADj0AABAAAAAmAAAACAAAAL+PAAAAAAAA"/>
+                <pr:smNativeData xmlns:pr="smNativeData" xmlns="smNativeData" val="SMDATA_15_r8odaRMAAAAlAAAAZAAAAA0AAAAAkAAAAEgAAACQAAAASAAAAAAAAAACAAAAAAAAAAEAAABQAAAAAAAAAAAA4D8AAAAAAADgPwAAAAAAAOA/AAAAAAAA4D8AAAAAAADgPwAAAAAAAOA/AAAAAAAA4D8AAAAAAADgPwAAAAAAAOA/AAAAAAAA4D8CAAAAjAAAAAAAAAAAAAAA////AP///wgAAAAAAAAAAAAAAAAAAAAAAAAAAAAAAAAAAAAAeAAAAAEAAABAAAAAAAAAAAAAAABaAAAAAAAAAAAAAAAAAAAAAAAAAAAAAAAAAAAAAAAAAAAAAAAAAAAAAAAAAAAAAAAAAAAAAAAAAAAAAAAAAAAAAAAAAAAAAAAAAAAAFAAAADwAAAAAAAAAAAAAAAAAAAAPAAAAAQAAACMAAAAjAAAAIwAAAB4AAAAAAAAAZAAAAGQAAAAAAAAAZAAAAGQAAAAVAAAAYAAAAAAAAAAAAAAADwAAACADAAAAAAAAAAAAAAEAAACgMgAAVgcAAKr4//8BAAAAf39/AAEAAABkAAAAAAAAABQAAABAHwAAAAAAACYAAAAAAAAAwOD//wAAAAAmAAAAZAAAABYAAABMAAAAAAAAAAAAAAAEAAAAAAAAAAEAAACZloMKAAAAACgAAAAoAAAAZAAAAGQAAAAAAAAAzMzMAAAAAABQAAAAUAAAAGQAAABkAAAAAAAAABcAAAAUAAAAAAAAAAAAAAD/fwAA/38AAAAAAAAJAAAABAAAAAUABAAeAAAAaAAAAAAAAAAAAAAAAAAAAAAAAAAAAAAAECcAABAnAAAAAAAAAAAAAAAAAAAAAAAAAAAAAAAAAAAAAAAAAAAAABQAAAAAAAAAwMD/AAAAAABkAAAAMgAAAAAAAABkAAAAAAAAAH9/fwAKAAAAIgAAABgAAAAAAAAAAAAAAAAAAAAAAAAAAAAAAAAAAAAkAAAAJAAAAAAAAAAHAAAAAAAAAAAAAAAAAAAAAAAAAAAAAAAAAAAAf39/ACUAAABYAAAAAAAAAAAAAAAAAAAAAAAAAAAAAAAAAAAAAAAAAAAAAAAAAAAAAAAAAAAAAAA/AAAAAAAAAKCGAQAAAAAAAAAAAAAAAAAMAAAAAQAAAAAAAAAAAAAAAAAAAB8AAABUAAAA////AAAAAAEAAAAAAAAAAAAAAAAAAAAAAAAAAAAAAAAAAAAAAAAAAAAAAAB/f38AAAAAA8zMzADAwP8Af39/AAAAAAAAAAAAAAAAAAAAAAAAAAAAIQAAABgAAAAUAAAAAAAAAAA6AAAfEgAADj0AABAAAAAmAAAACAAAAL+PAAAAAAAA"/>
               </a:ext>
             </a:extLst>
           </p:cNvSpPr>
@@ -460,7 +460,7 @@
             <a:spLocks noGrp="1" noChangeArrowheads="1"/>
             <a:extLst>
               <a:ext uri="smNativeData">
-                <pr:smNativeData xmlns:pr="smNativeData" xmlns="smNativeData" val="SMDATA_15_mcIdaRMAAAAlAAAAZAAAAA0AAAAAkAAAAEgAAACQAAAASAAAAAAAAAACAAAAAAAAAAEAAABQAAAAAAAAAAAA4D8AAAAAAADgPwAAAAAAAOA/AAAAAAAA4D8AAAAAAADgPwAAAAAAAOA/AAAAAAAA4D8AAAAAAADgPwAAAAAAAOA/AAAAAAAA4D8CAAAAjAAAAAAAAAAAAAAA////AP///wgAAAAAAAAAAAAAAAAAAAAAAAAAAAAAAAAAAAAAeAAAAAEAAABAAAAAAAAAAAAAAABaAAAAAAAAAAAAAAAAAAAAAAAAAAAAAAAAAAAAAAAAAAAAAAAAAAAAAAAAAAAAAAAAAAAAAAAAAAAAAAAAAAAAAAAAAAAAAAAAAAAAFAAAADwAAAAAAAAAAAAAAAAAAAAPAAAAAQAAACMAAAAjAAAAIwAAAB4AAAAAAAAAZAAAAGQAAAAAAAAAZAAAAGQAAAAVAAAAYAAAAAAAAAAAAAAADwAAACADAAAAAAAAAAAAAAEAAACgMgAAVgcAAKr4//8BAAAAf39/AAEAAABkAAAAAAAAABQAAABAHwAAAAAAACYAAAAAAAAAwOD//wAAAAAmAAAAZAAAABYAAABMAAAAAAAAAAAAAAAEAAAAAAAAAAEAAACZloMKAAAAACgAAAAoAAAAZAAAAGQAAAAAAAAAzMzMAAAAAABQAAAAUAAAAGQAAABkAAAAAAAAABcAAAAUAAAAAAAAAAAAAAD/fwAA/38AAAAAAAAJAAAABAAAAAAFPQAeAAAAaAAAAAAAAAAAAAAAAAAAAAAAAAAAAAAAECcAABAnAAAAAAAAAAAAAAAAAAAAAAAAAAAAAAAAAAAAAAAAAAAAABQAAAAAAAAAwMD/AAAAAABkAAAAMgAAAAAAAABkAAAAAAAAAH9/fwAKAAAAIgAAABgAAAAAAAAAAAAAAAAAAAAAAAAAAAAAAAAAAAAkAAAAJAAAAAAAAAAHAAAAAAAAAAAAAAAAAAAAAAAAAAAAAAAAAAAAf39/ACUAAABYAAAAAAAAAAAAAAAAAAAAAAAAAAAAAAAAAAAAAAAAAAAAAAAAAAAAAAAAAAAAAAA/AAAAAAAAAKCGAQAAAAAAAAAAAAAAAAAMAAAAAQAAAAAAAAAAAAAAAAAAAB8AAABUAAAA////AAAAAAEAAAAAAAAAAAAAAAAAAAAAAAAAAAAAAAAAAAAAAAAAAAAAAAB/f38AAAAAA8zMzADAwP8Af39/AAAAAAAAAAAAAAAAAAAAAAAAAAAAIQAAABgAAAAUAAAAsBcAAAA6AADPKQAADj0AABAAAAAmAAAACAAAAL+PAAAAAAAA"/>
+                <pr:smNativeData xmlns:pr="smNativeData" xmlns="smNativeData" val="SMDATA_15_r8odaRMAAAAlAAAAZAAAAA0AAAAAkAAAAEgAAACQAAAASAAAAAAAAAACAAAAAAAAAAEAAABQAAAAAAAAAAAA4D8AAAAAAADgPwAAAAAAAOA/AAAAAAAA4D8AAAAAAADgPwAAAAAAAOA/AAAAAAAA4D8AAAAAAADgPwAAAAAAAOA/AAAAAAAA4D8CAAAAjAAAAAAAAAAAAAAA////AP///wgAAAAAAAAAAAAAAAAAAAAAAAAAAAAAAAAAAAAAeAAAAAEAAABAAAAAAAAAAAAAAABaAAAAAAAAAAAAAAAAAAAAAAAAAAAAAAAAAAAAAAAAAAAAAAAAAAAAAAAAAAAAAAAAAAAAAAAAAAAAAAAAAAAAAAAAAAAAAAAAAAAAFAAAADwAAAAAAAAAAAAAAAAAAAAPAAAAAQAAACMAAAAjAAAAIwAAAB4AAAAAAAAAZAAAAGQAAAAAAAAAZAAAAGQAAAAVAAAAYAAAAAAAAAAAAAAADwAAACADAAAAAAAAAAAAAAEAAACgMgAAVgcAAKr4//8BAAAAf39/AAEAAABkAAAAAAAAABQAAABAHwAAAAAAACYAAAAAAAAAwOD//wAAAAAmAAAAZAAAABYAAABMAAAAAAAAAAAAAAAEAAAAAAAAAAEAAACZloMKAAAAACgAAAAoAAAAZAAAAGQAAAAAAAAAzMzMAAAAAABQAAAAUAAAAGQAAABkAAAAAAAAABcAAAAUAAAAAAAAAAAAAAD/fwAA/38AAAAAAAAJAAAABAAAAAAFPQAeAAAAaAAAAAAAAAAAAAAAAAAAAAAAAAAAAAAAECcAABAnAAAAAAAAAAAAAAAAAAAAAAAAAAAAAAAAAAAAAAAAAAAAABQAAAAAAAAAwMD/AAAAAABkAAAAMgAAAAAAAABkAAAAAAAAAH9/fwAKAAAAIgAAABgAAAAAAAAAAAAAAAAAAAAAAAAAAAAAAAAAAAAkAAAAJAAAAAAAAAAHAAAAAAAAAAAAAAAAAAAAAAAAAAAAAAAAAAAAf39/ACUAAABYAAAAAAAAAAAAAAAAAAAAAAAAAAAAAAAAAAAAAAAAAAAAAAAAAAAAAAAAAAAAAAA/AAAAAAAAAKCGAQAAAAAAAAAAAAAAAAAMAAAAAQAAAAAAAAAAAAAAAAAAAB8AAABUAAAA////AAAAAAEAAAAAAAAAAAAAAAAAAAAAAAAAAAAAAAAAAAAAAAAAAAAAAAB/f38AAAAAA8zMzADAwP8Af39/AAAAAAAAAAAAAAAAAAAAAAAAAAAAIQAAABgAAAAUAAAAsBcAAAA6AADPKQAADj0AABAAAAAmAAAACAAAAL+PAAAAAAAA"/>
               </a:ext>
             </a:extLst>
           </p:cNvSpPr>
@@ -516,7 +516,7 @@
             <a:pPr>
               <a:defRPr lang="en-us"/>
             </a:pPr>
-            <a:fld id="{2430E1A7-E9C9-6517-8788-1F42AFC6714A}" type="slidenum">
+            <a:fld id="{700B9912-5C9D-5E6F-D3B3-AA3AD7FD25FF}" type="slidenum">
               <a:t>‹nº›</a:t>
             </a:fld>
           </a:p>
@@ -561,7 +561,7 @@
             <a:spLocks noGrp="1" noChangeArrowheads="1"/>
             <a:extLst>
               <a:ext uri="smNativeData">
-                <pr:smNativeData xmlns:pr="smNativeData" xmlns="smNativeData" val="SMDATA_15_mcIdaRMAAAAlAAAAZAAAAA0AAAAAkAAAAEgAAACQAAAASAAAAAAAAAAAAAAAAAAAAAEAAABQAAAAAAAAAAAA4D8AAAAAAADgPwAAAAAAAOA/AAAAAAAA4D8AAAAAAADgPwAAAAAAAOA/AAAAAAAA4D8AAAAAAADgPwAAAAAAAOA/AAAAAAAA4D8CAAAAjAAAAAAAAAAAAAAA////AP///wgAAAAAAAAAAAAAAAAAAAAAAAAAAAAAAAAAAAAAeAAAAAEAAABAAAAAAAAAAAAAAABaAAAAAAAAAAAAAAAAAAAAAAAAAAAAAAAAAAAAAAAAAAAAAAAAAAAAAAAAAAAAAAAAAAAAAAAAAAAAAAAAAAAAAAAAAAAAAAAAAAAAFAAAADwAAAAAAAAAAAAAAAAAAAAPAAAAAQAAACMAAAAjAAAAIwAAAB4AAAAAAAAAZAAAAGQAAAAAAAAAZAAAAGQAAAAVAAAAYAAAAAAAAAAAAAAADwAAACADAAAAAAAAAAAAAAEAAACgMgAAVgcAAKr4//8BAAAAf39/AAEAAABkAAAAAAAAABQAAABAHwAAAAAAACYAAAAAAAAAwOD//wAAAAAmAAAAZAAAABYAAABMAAAAAAAAAAAAAAAEAAAAAAAAAAEAAACZloMKAAAAACgAAAAoAAAAZAAAAGQAAAAAAAAAzMzMAAAAAABQAAAAUAAAAGQAAABkAAAAAAAAABcAAAAUAAAAAAAAAAAAAAD/fwAA/38AAAAAAAAJAAAABAAAAAAAAAAeAAAAaAAAAAAAAAAAAAAAAAAAAAAAAAAAAAAAECcAABAnAAAAAAAAAAAAAAAAAAAAAAAAAAAAAAAAAAAAAAAAAAAAABQAAAAAAAAAwMD/AAAAAABkAAAAMgAAAAAAAABkAAAAAAAAAH9/fwAKAAAAIgAAABgAAAAAAAAAAAAAAAAAAAAAAAAAAAAAAAAAAAAkAAAAJAAAAAAAAAAHAAAAAAAAAAAAAAAAAAAAAAAAAAAAAAAAAAAAf39/ACUAAABYAAAAAAAAAAAAAAAAAAAAAAAAAAAAAAAAAAAAAAAAAAAAAAAAAAAAAAAAAAAAAAA/AAAAAAAAAKCGAQAAAAAAAAAAAAAAAAAMAAAAAQAAAAAAAAAAAAAAAAAAAB8AAABUAAAA////AAAAAAEAAAAAAAAAAAAAAAAAAAAAAAAAAAAAAAAAAAAAAAAAAAAAAAB/f38AAAAAA8zMzADAwP8Af39/AAAAAAAAAAAAAAAAAAAAAAAAAAAAIQAAABgAAAAUAAAAAAAAAAAAAAAfEgAADgMAABAAAAAmAAAACAAAAD+PAAAAAAAA"/>
+                <pr:smNativeData xmlns:pr="smNativeData" xmlns="smNativeData" val="SMDATA_15_r8odaRMAAAAlAAAAZAAAAA0AAAAAkAAAAEgAAACQAAAASAAAAAAAAAAAAAAAAAAAAAEAAABQAAAAAAAAAAAA4D8AAAAAAADgPwAAAAAAAOA/AAAAAAAA4D8AAAAAAADgPwAAAAAAAOA/AAAAAAAA4D8AAAAAAADgPwAAAAAAAOA/AAAAAAAA4D8CAAAAjAAAAAAAAAAAAAAA////AP///wgAAAAAAAAAAAAAAAAAAAAAAAAAAAAAAAAAAAAAeAAAAAEAAABAAAAAAAAAAAAAAABaAAAAAAAAAAAAAAAAAAAAAAAAAAAAAAAAAAAAAAAAAAAAAAAAAAAAAAAAAAAAAAAAAAAAAAAAAAAAAAAAAAAAAAAAAAAAAAAAAAAAFAAAADwAAAAAAAAAAAAAAAAAAAAPAAAAAQAAACMAAAAjAAAAIwAAAB4AAAAAAAAAZAAAAGQAAAAAAAAAZAAAAGQAAAAVAAAAYAAAAAAAAAAAAAAADwAAACADAAAAAAAAAAAAAAEAAACgMgAAVgcAAKr4//8BAAAAf39/AAEAAABkAAAAAAAAABQAAABAHwAAAAAAACYAAAAAAAAAwOD//wAAAAAmAAAAZAAAABYAAABMAAAAAAAAAAAAAAAEAAAAAAAAAAEAAACZloMKAAAAACgAAAAoAAAAZAAAAGQAAAAAAAAAzMzMAAAAAABQAAAAUAAAAGQAAABkAAAAAAAAABcAAAAUAAAAAAAAAAAAAAD/fwAA/38AAAAAAAAJAAAABAAAAAAAAAAeAAAAaAAAAAAAAAAAAAAAAAAAAAAAAAAAAAAAECcAABAnAAAAAAAAAAAAAAAAAAAAAAAAAAAAAAAAAAAAAAAAAAAAABQAAAAAAAAAwMD/AAAAAABkAAAAMgAAAAAAAABkAAAAAAAAAH9/fwAKAAAAIgAAABgAAAAAAAAAAAAAAAAAAAAAAAAAAAAAAAAAAAAkAAAAJAAAAAAAAAAHAAAAAAAAAAAAAAAAAAAAAAAAAAAAAAAAAAAAf39/ACUAAABYAAAAAAAAAAAAAAAAAAAAAAAAAAAAAAAAAAAAAAAAAAAAAAAAAAAAAAAAAAAAAAA/AAAAAAAAAKCGAQAAAAAAAAAAAAAAAAAMAAAAAQAAAAAAAAAAAAAAAAAAAB8AAABUAAAA////AAAAAAEAAAAAAAAAAAAAAAAAAAAAAAAAAAAAAAAAAAAAAAAAAAAAAAB/f38AAAAAA8zMzADAwP8Af39/AAAAAAAAAAAAAAAAAAAAAAAAAAAAIQAAABgAAAAUAAAAAAAAAAAAAAAfEgAADgMAABAAAAAmAAAACAAAAD+PAAAAAAAA"/>
               </a:ext>
             </a:extLst>
           </p:cNvSpPr>
@@ -627,7 +627,7 @@
             <a:spLocks noGrp="1" noChangeArrowheads="1"/>
             <a:extLst>
               <a:ext uri="smNativeData">
-                <pr:smNativeData xmlns:pr="smNativeData" xmlns="smNativeData" val="SMDATA_15_mcIdaRMAAAAlAAAAZAAAAA0AAAAAkAAAAEgAAACQAAAASAAAAAAAAAAAAAAAAAAAAAEAAABQAAAAAAAAAAAA4D8AAAAAAADgPwAAAAAAAOA/AAAAAAAA4D8AAAAAAADgPwAAAAAAAOA/AAAAAAAA4D8AAAAAAADgPwAAAAAAAOA/AAAAAAAA4D8CAAAAjAAAAAAAAAAAAAAA////AP///wgAAAAAAAAAAAAAAAAAAAAAAAAAAAAAAAAAAAAAeAAAAAEAAABAAAAAAAAAAAAAAABaAAAAAAAAAAAAAAAAAAAAAAAAAAAAAAAAAAAAAAAAAAAAAAAAAAAAAAAAAAAAAAAAAAAAAAAAAAAAAAAAAAAAAAAAAAAAAAAAAAAAFAAAADwAAAAAAAAAAAAAAAAAAAAPAAAAAQAAACMAAAAjAAAAIwAAAB4AAAAAAAAAZAAAAGQAAAAAAAAAZAAAAGQAAAAVAAAAYAAAAAAAAAAAAAAADwAAACADAAAAAAAAAAAAAAEAAACgMgAAVgcAAKr4//8BAAAAf39/AAEAAABkAAAAAAAAABQAAABAHwAAAAAAACYAAAAAAAAAwOD//wAAAAAmAAAAZAAAABYAAABMAAAAAAAAAAAAAAAEAAAAAAAAAAEAAACZloMKAAAAACgAAAAoAAAAZAAAAGQAAAAAAAAAzMzMAAAAAABQAAAAUAAAAGQAAABkAAAAAAAAABcAAAAUAAAAAAAAAAAAAAD/fwAA/38AAAAAAAAJAAAABAAAAAAAAAAeAAAAaAAAAAAAAAAAAAAAAAAAAAAAAAAAAAAAECcAABAnAAAAAAAAAAAAAAAAAAAAAAAAAAAAAAAAAAAAAAAAAAAAABQAAAAAAAAAwMD/AAAAAABkAAAAMgAAAAAAAABkAAAAAAAAAH9/fwAKAAAAIgAAABgAAAAAAAAAAAAAAAAAAAAAAAAAAAAAAAAAAAAkAAAAJAAAAAAAAAAHAAAAAAAAAAAAAAAAAAAAAAAAAAAAAAAAAAAAf39/ACUAAABYAAAAAAAAAAAAAAAAAAAAAAAAAAAAAAAAAAAAAAAAAAAAAAAAAAAAAAAAAAAAAAA/AAAAAAAAAKCGAQAAAAAAAAAAAAAAAAAMAAAAAQAAAAAAAAAAAAAAAAAAAB8AAABUAAAA////AAAAAAEAAAAAAAAAAAAAAAAAAAAAAAAAAAAAAAAAAAAAAAAAAAAAAAB/f38AAAAAA8zMzADAwP8Af39/AAAAAAAAAAAAAAAAAAAAAAAAAAAAIQAAABgAAAAUAAAAsBcAAAAAAADPKQAADgMAABAAAAAmAAAACAAAAD+PAAAAAAAA"/>
+                <pr:smNativeData xmlns:pr="smNativeData" xmlns="smNativeData" val="SMDATA_15_r8odaRMAAAAlAAAAZAAAAA0AAAAAkAAAAEgAAACQAAAASAAAAAAAAAAAAAAAAAAAAAEAAABQAAAAAAAAAAAA4D8AAAAAAADgPwAAAAAAAOA/AAAAAAAA4D8AAAAAAADgPwAAAAAAAOA/AAAAAAAA4D8AAAAAAADgPwAAAAAAAOA/AAAAAAAA4D8CAAAAjAAAAAAAAAAAAAAA////AP///wgAAAAAAAAAAAAAAAAAAAAAAAAAAAAAAAAAAAAAeAAAAAEAAABAAAAAAAAAAAAAAABaAAAAAAAAAAAAAAAAAAAAAAAAAAAAAAAAAAAAAAAAAAAAAAAAAAAAAAAAAAAAAAAAAAAAAAAAAAAAAAAAAAAAAAAAAAAAAAAAAAAAFAAAADwAAAAAAAAAAAAAAAAAAAAPAAAAAQAAACMAAAAjAAAAIwAAAB4AAAAAAAAAZAAAAGQAAAAAAAAAZAAAAGQAAAAVAAAAYAAAAAAAAAAAAAAADwAAACADAAAAAAAAAAAAAAEAAACgMgAAVgcAAKr4//8BAAAAf39/AAEAAABkAAAAAAAAABQAAABAHwAAAAAAACYAAAAAAAAAwOD//wAAAAAmAAAAZAAAABYAAABMAAAAAAAAAAAAAAAEAAAAAAAAAAEAAACZloMKAAAAACgAAAAoAAAAZAAAAGQAAAAAAAAAzMzMAAAAAABQAAAAUAAAAGQAAABkAAAAAAAAABcAAAAUAAAAAAAAAAAAAAD/fwAA/38AAAAAAAAJAAAABAAAAAAAAAAeAAAAaAAAAAAAAAAAAAAAAAAAAAAAAAAAAAAAECcAABAnAAAAAAAAAAAAAAAAAAAAAAAAAAAAAAAAAAAAAAAAAAAAABQAAAAAAAAAwMD/AAAAAABkAAAAMgAAAAAAAABkAAAAAAAAAH9/fwAKAAAAIgAAABgAAAAAAAAAAAAAAAAAAAAAAAAAAAAAAAAAAAAkAAAAJAAAAAAAAAAHAAAAAAAAAAAAAAAAAAAAAAAAAAAAAAAAAAAAf39/ACUAAABYAAAAAAAAAAAAAAAAAAAAAAAAAAAAAAAAAAAAAAAAAAAAAAAAAAAAAAAAAAAAAAA/AAAAAAAAAKCGAQAAAAAAAAAAAAAAAAAMAAAAAQAAAAAAAAAAAAAAAAAAAB8AAABUAAAA////AAAAAAEAAAAAAAAAAAAAAAAAAAAAAAAAAAAAAAAAAAAAAAAAAAAAAAB/f38AAAAAA8zMzADAwP8Af39/AAAAAAAAAAAAAAAAAAAAAAAAAAAAIQAAABgAAAAUAAAAsBcAAAAAAADPKQAADgMAABAAAAAmAAAACAAAAD+PAAAAAAAA"/>
               </a:ext>
             </a:extLst>
           </p:cNvSpPr>
@@ -683,7 +683,7 @@
             <a:pPr>
               <a:defRPr lang="en-us"/>
             </a:pPr>
-            <a:fld id="{5EE6BD86-C8B3-B34B-FD5E-3E1EF3100B6B}" type="datetime1">
+            <a:fld id="{0B247329-67E6-7185-A89C-91D03DD25EC4}" type="datetime1">
               <a:t>10/25/2025</a:t>
             </a:fld>
           </a:p>
@@ -696,7 +696,7 @@
             <a:spLocks noGrp="1" noChangeArrowheads="1"/>
             <a:extLst>
               <a:ext uri="smNativeData">
-                <pr:smNativeData xmlns:pr="smNativeData" xmlns="smNativeData" val="SMDATA_15_mcIdaRMAAAAlAAAAZAAAAC0AAAAAkAAAAEgAAACQAAAASAAAAAAAAAABAAAAAAAAAAEAAABQAAAAAAAAAAAA4D8AAAAAAADgPwAAAAAAAOA/AAAAAAAA4D8AAAAAAADgPwAAAAAAAOA/AAAAAAAA4D8AAAAAAADgPwAAAAAAAOA/AAAAAAAA4D8CAAAAjAAAAAAAAAAAAAAA40oGDP///wgAAAAAAAAAAAAAAAAAAAAAAAAAAAAAAAAAAAAAZAAAAAEAAABAAAAAAAAAAAAAAAAAAAAAAAAAAAAAAAAAAAAAAAAAAAAAAAAAAAAAAAAAAAAAAAAAAAAAAAAAAAAAAAAAAAAAAAAAAAAAAAAAAAAAAAAAAAAAAAAAAAAAFAAAADwAAAABAAAAAAAAAAAAAAAUAAAAAQAAACMAAAAjAAAAIwAAAB4AAAAAAAAAZAAAAGQAAAAAAAAAZAAAAGQAAAAVAAAAYAAAAAAAAAAAAAAADwAAACADAAAAAAAAAAAAAAEAAACgMgAAVgcAAKr4//8BAAAAf39/AAEAAABkAAAAAAAAABQAAABAHwAAAAAAACYAAAAAAAAAwOD//wAAAAAmAAAAZAAAABYAAABMAAAAAAAAAAAAAAAEAAAAAAAAAAEAAACZloMKAAAAACgAAAAoAAAAZAAAAGQAAAAAAAAAzMzMAAAAAABQAAAAUAAAAGQAAABkAAAAAAAAABcAAAAUAAAAAAAAAAAAAAD/fwAA/38AAAAAAAAJAAAABAAAAAAAAAAeAAAAaAAAAAAAAAAAAAAAAAAAAAAAAAAAAAAAECcAABAnAAAAAAAAAAAAAAAAAAAAAAAAAAAAAAAAAAAAAAAAAAAAABQAAAAAAAAAwMD/AAAAAABkAAAAMgAAAAAAAABkAAAAAAAAAH9/fwAKAAAAIgAAABgAAAAAAAAAAAAAAAAAAAAAAAAAAAAAAAAAAAAkAAAAJAAAAAAAAAAHAAAAAAAAAAAAAAAAAAAAAAAAAAAAAAAAAAAAf39/ACUAAABYAAAAAAAAAAAAAAAAAAAAAAAAAAAAAAAAAAAAAAAAAAAAAAAAAAAAAAAAAAAAAAA/AAAAAAAAAKCGAQAAAAAAAAAAAAAAAAAMAAAAAQAAAAAAAAAAAAAAAAAAAB8AAABUAAAAAAAABQAAAAEAAAAAAAAAAAAAAAAAAAAAAAAAAAAAAAAAAAAAAAAAAAAAAAB/f38AAAAAA8zMzADAwP8Af39/AAAAAAAAAAAAAAAAAAAAAAAAAAAAIQAAABgAAAAUAAAApQUAAJUEAAAsJAAAexsAABAAAAAmAAAACAAAAL8PAAD/HwAA"/>
+                <pr:smNativeData xmlns:pr="smNativeData" xmlns="smNativeData" val="SMDATA_15_r8odaRMAAAAlAAAAZAAAAC0AAAAAkAAAAEgAAACQAAAASAAAAAAAAAABAAAAAAAAAAEAAABQAAAAAAAAAAAA4D8AAAAAAADgPwAAAAAAAOA/AAAAAAAA4D8AAAAAAADgPwAAAAAAAOA/AAAAAAAA4D8AAAAAAADgPwAAAAAAAOA/AAAAAAAA4D8CAAAAjAAAAAAAAAAAAAAA40oGDP///wgAAAAAAAAAAAAAAAAAAAAAAAAAAAAAAAAAAAAAZAAAAAEAAABAAAAAAAAAAAAAAAAAAAAAAAAAAAAAAAAAAAAAAAAAAAAAAAAAAAAAAAAAAAAAAAAAAAAAAAAAAAAAAAAAAAAAAAAAAAAAAAAAAAAAAAAAAAAAAAAAAAAAFAAAADwAAAABAAAAAAAAAAAAAAAUAAAAAQAAACMAAAAjAAAAIwAAAB4AAAAAAAAAZAAAAGQAAAAAAAAAZAAAAGQAAAAVAAAAYAAAAAAAAAAAAAAADwAAACADAAAAAAAAAAAAAAEAAACgMgAAVgcAAKr4//8BAAAAf39/AAEAAABkAAAAAAAAABQAAABAHwAAAAAAACYAAAAAAAAAwOD//wAAAAAmAAAAZAAAABYAAABMAAAAAAAAAAAAAAAEAAAAAAAAAAEAAACZloMKAAAAACgAAAAoAAAAZAAAAGQAAAAAAAAAzMzMAAAAAABQAAAAUAAAAGQAAABkAAAAAAAAABcAAAAUAAAAAAAAAAAAAAD/fwAA/38AAAAAAAAJAAAABAAAAAAAAAAeAAAAaAAAAAAAAAAAAAAAAAAAAAAAAAAAAAAAECcAABAnAAAAAAAAAAAAAAAAAAAAAAAAAAAAAAAAAAAAAAAAAAAAABQAAAAAAAAAwMD/AAAAAABkAAAAMgAAAAAAAABkAAAAAAAAAH9/fwAKAAAAIgAAABgAAAAAAAAAAAAAAAAAAAAAAAAAAAAAAAAAAAAkAAAAJAAAAAAAAAAHAAAAAAAAAAAAAAAAAAAAAAAAAAAAAAAAAAAAf39/ACUAAABYAAAAAAAAAAAAAAAAAAAAAAAAAAAAAAAAAAAAAAAAAAAAAAAAAAAAAAAAAAAAAAA/AAAAAAAAAKCGAQAAAAAAAAAAAAAAAAAMAAAAAQAAAAAAAAAAAAAAAAAAAB8AAABUAAAAAAAABQAAAAEAAAAAAAAAAAAAAAAAAAAAAAAAAAAAAAAAAAAAAAAAAAAAAAB/f38AAAAAA8zMzADAwP8Af39/AAAAAAAAAAAAAAAAAAAAAAAAAAAAIQAAABgAAAAUAAAApQUAAJUEAAAsJAAAexsAABAAAAAmAAAACAAAAL8PAAD/HwAA"/>
               </a:ext>
             </a:extLst>
           </p:cNvSpPr>
@@ -743,7 +743,7 @@
             <a:spLocks noGrp="1" noChangeArrowheads="1"/>
             <a:extLst>
               <a:ext uri="smNativeData">
-                <pr:smNativeData xmlns:pr="smNativeData" xmlns="smNativeData" val="SMDATA_15_mcIdaRMAAAAlAAAAZAAAAA0AAAAAkAAAAEgAAACQAAAASAAAAAAAAAAAAAAAAAAAAAEAAABQAAAAAAAAAAAA4D8AAAAAAADgPwAAAAAAAOA/AAAAAAAA4D8AAAAAAADgPwAAAAAAAOA/AAAAAAAA4D8AAAAAAADgPwAAAAAAAOA/AAAAAAAA4D8CAAAAjAAAAAAAAAAAAAAA////AP///wgAAAAAAAAAAAAAAAAAAAAAAAAAAAAAAAAAAAAAeAAAAAEAAABAAAAAAAAAAAAAAABaAAAAAAAAAAAAAAAAAAAAAAAAAAAAAAAAAAAAAAAAAAAAAAAAAAAAAAAAAAAAAAAAAAAAAAAAAAAAAAAAAAAAAAAAAAAAAAAAAAAAFAAAADwAAAAAAAAAAAAAAAAAAAAPAAAAAQAAACMAAAAjAAAAIwAAAB4AAAAAAAAAZAAAAGQAAAAAAAAAZAAAAGQAAAAVAAAAYAAAAAAAAAAAAAAADwAAACADAAAAAAAAAAAAAAEAAACgMgAAVgcAAKr4//8BAAAAf39/AAEAAABkAAAAAAAAABQAAABAHwAAAAAAACYAAAAAAAAAwOD//wAAAAAmAAAAZAAAABYAAABMAAAAAAAAAAAAAAAEAAAAAAAAAAEAAACZloMKAAAAACgAAAAoAAAAZAAAAGQAAAAAAAAAzMzMAAAAAABQAAAAUAAAAGQAAABkAAAAAAAAABcAAAAUAAAAAAAAAAAAAAD/fwAA/38AAAAAAAAJAAAABAAAAFmiCzYeAAAAaAAAAAAAAAAAAAAAAAAAAAAAAAAAAAAAECcAABAnAAAAAAAAAAAAAAAAAAAAAAAAAAAAAAAAAAAAAAAAAAAAABQAAAAAAAAAwMD/AAAAAABkAAAAMgAAAAAAAABkAAAAAAAAAH9/fwAKAAAAIgAAABgAAAAAAAAAAAAAAAAAAAAAAAAAAAAAAAAAAAAkAAAAJAAAAAAAAAAHAAAAAAAAAAAAAAAAAAAAAAAAAAAAAAAAAAAAf39/ACUAAABYAAAAAAAAAAAAAAAAAAAAAAAAAAAAAAAAAAAAAAAAAAAAAAAAAAAAAAAAAAAAAAA/AAAAAAAAAKCGAQAAAAAAAAAAAAAAAAAMAAAAAQAAAAAAAAAAAAAAAAAAAB8AAABUAAAA////AAAAAAEAAAAAAAAAAAAAAAAAAAAAAAAAAAAAAAAAAAAAAAAAAAAAAAB/f38AAAAAA8zMzADAwP8Af39/AAAAAAAAAAAAAAAAAAAAAAAAAAAAIQAAABgAAAAUAAAALwQAAAEdAACjJQAAfDgAABAAAAAmAAAACAAAAD8PAAD/HwAA"/>
+                <pr:smNativeData xmlns:pr="smNativeData" xmlns="smNativeData" val="SMDATA_15_r8odaRMAAAAlAAAAZAAAAA0AAAAAkAAAAEgAAACQAAAASAAAAAAAAAAAAAAAAAAAAAEAAABQAAAAAAAAAAAA4D8AAAAAAADgPwAAAAAAAOA/AAAAAAAA4D8AAAAAAADgPwAAAAAAAOA/AAAAAAAA4D8AAAAAAADgPwAAAAAAAOA/AAAAAAAA4D8CAAAAjAAAAAAAAAAAAAAA////AP///wgAAAAAAAAAAAAAAAAAAAAAAAAAAAAAAAAAAAAAeAAAAAEAAABAAAAAAAAAAAAAAABaAAAAAAAAAAAAAAAAAAAAAAAAAAAAAAAAAAAAAAAAAAAAAAAAAAAAAAAAAAAAAAAAAAAAAAAAAAAAAAAAAAAAAAAAAAAAAAAAAAAAFAAAADwAAAAAAAAAAAAAAAAAAAAPAAAAAQAAACMAAAAjAAAAIwAAAB4AAAAAAAAAZAAAAGQAAAAAAAAAZAAAAGQAAAAVAAAAYAAAAAAAAAAAAAAADwAAACADAAAAAAAAAAAAAAEAAACgMgAAVgcAAKr4//8BAAAAf39/AAEAAABkAAAAAAAAABQAAABAHwAAAAAAACYAAAAAAAAAwOD//wAAAAAmAAAAZAAAABYAAABMAAAAAAAAAAAAAAAEAAAAAAAAAAEAAACZloMKAAAAACgAAAAoAAAAZAAAAGQAAAAAAAAAzMzMAAAAAABQAAAAUAAAAGQAAABkAAAAAAAAABcAAAAUAAAAAAAAAAAAAAD/fwAA/38AAAAAAAAJAAAABAAAAFmiCzYeAAAAaAAAAAAAAAAAAAAAAAAAAAAAAAAAAAAAECcAABAnAAAAAAAAAAAAAAAAAAAAAAAAAAAAAAAAAAAAAAAAAAAAABQAAAAAAAAAwMD/AAAAAABkAAAAMgAAAAAAAABkAAAAAAAAAH9/fwAKAAAAIgAAABgAAAAAAAAAAAAAAAAAAAAAAAAAAAAAAAAAAAAkAAAAJAAAAAAAAAAHAAAAAAAAAAAAAAAAAAAAAAAAAAAAAAAAAAAAf39/ACUAAABYAAAAAAAAAAAAAAAAAAAAAAAAAAAAAAAAAAAAAAAAAAAAAAAAAAAAAAAAAAAAAAA/AAAAAAAAAKCGAQAAAAAAAAAAAAAAAAAMAAAAAQAAAAAAAAAAAAAAAAAAAB8AAABUAAAA////AAAAAAEAAAAAAAAAAAAAAAAAAAAAAAAAAAAAAAAAAAAAAAAAAAAAAAB/f38AAAAAA8zMzADAwP8Af39/AAAAAAAAAAAAAAAAAAAAAAAAAAAAIQAAABgAAAAUAAAALwQAAAEdAACjJQAAfDgAABAAAAAmAAAACAAAAD8PAAD/HwAA"/>
               </a:ext>
             </a:extLst>
           </p:cNvSpPr>
@@ -828,7 +828,7 @@
             <a:spLocks noGrp="1" noChangeArrowheads="1"/>
             <a:extLst>
               <a:ext uri="smNativeData">
-                <pr:smNativeData xmlns:pr="smNativeData" xmlns="smNativeData" val="SMDATA_15_mcIdaRMAAAAlAAAAZAAAAA0AAAAAkAAAAEgAAACQAAAASAAAAAAAAAACAAAAAAAAAAEAAABQAAAAAAAAAAAA4D8AAAAAAADgPwAAAAAAAOA/AAAAAAAA4D8AAAAAAADgPwAAAAAAAOA/AAAAAAAA4D8AAAAAAADgPwAAAAAAAOA/AAAAAAAA4D8CAAAAjAAAAAAAAAAAAAAA////AP///wgAAAAAAAAAAAAAAAAAAAAAAAAAAAAAAAAAAAAAeAAAAAEAAABAAAAAAAAAAAAAAABaAAAAAAAAAAAAAAAAAAAAAAAAAAAAAAAAAAAAAAAAAAAAAAAAAAAAAAAAAAAAAAAAAAAAAAAAAAAAAAAAAAAAAAAAAAAAAAAAAAAAFAAAADwAAAAAAAAAAAAAAAAAAAAPAAAAAQAAACMAAAAjAAAAIwAAAB4AAAAAAAAAZAAAAGQAAAAAAAAAZAAAAGQAAAAVAAAAYAAAAAAAAAAAAAAADwAAACADAAAAAAAAAAAAAAEAAACgMgAAVgcAAKr4//8BAAAAf39/AAEAAABkAAAAAAAAABQAAABAHwAAAAAAACYAAAAAAAAAwOD//wAAAAAmAAAAZAAAABYAAABMAAAAAAAAAAAAAAAEAAAAAAAAAAEAAACZloMKAAAAACgAAAAoAAAAZAAAAGQAAAAAAAAAzMzMAAAAAABQAAAAUAAAAGQAAABkAAAAAAAAABcAAAAUAAAAAAAAAAAAAAD/fwAA/38AAAAAAAAJAAAABAAAAJiDnkseAAAAaAAAAAAAAAAAAAAAAAAAAAAAAAAAAAAAECcAABAnAAAAAAAAAAAAAAAAAAAAAAAAAAAAAAAAAAAAAAAAAAAAABQAAAAAAAAAwMD/AAAAAABkAAAAMgAAAAAAAABkAAAAAAAAAH9/fwAKAAAAIgAAABgAAAAAAAAAAAAAAAAAAAAAAAAAAAAAAAAAAAAkAAAAJAAAAAAAAAAHAAAAAAAAAAAAAAAAAAAAAAAAAAAAAAAAAAAAf39/ACUAAABYAAAAAAAAAAAAAAAAAAAAAAAAAAAAAAAAAAAAAAAAAAAAAAAAAAAAAAAAAAAAAAA/AAAAAAAAAKCGAQAAAAAAAAAAAAAAAAAMAAAAAQAAAAAAAAAAAAAAAAAAAB8AAABUAAAA////AAAAAAEAAAAAAAAAAAAAAAAAAAAAAAAAAAAAAAAAAAAAAAAAAAAAAAB/f38AAAAAA8zMzADAwP8Af39/AAAAAAAAAAAAAAAAAAAAAAAAAAAAIQAAABgAAAAUAAAAAAAAAAA6AAAfEgAADj0AABAAAAAmAAAACAAAAL+PAAD/HwAA"/>
+                <pr:smNativeData xmlns:pr="smNativeData" xmlns="smNativeData" val="SMDATA_15_r8odaRMAAAAlAAAAZAAAAA0AAAAAkAAAAEgAAACQAAAASAAAAAAAAAACAAAAAAAAAAEAAABQAAAAAAAAAAAA4D8AAAAAAADgPwAAAAAAAOA/AAAAAAAA4D8AAAAAAADgPwAAAAAAAOA/AAAAAAAA4D8AAAAAAADgPwAAAAAAAOA/AAAAAAAA4D8CAAAAjAAAAAAAAAAAAAAA////AP///wgAAAAAAAAAAAAAAAAAAAAAAAAAAAAAAAAAAAAAeAAAAAEAAABAAAAAAAAAAAAAAABaAAAAAAAAAAAAAAAAAAAAAAAAAAAAAAAAAAAAAAAAAAAAAAAAAAAAAAAAAAAAAAAAAAAAAAAAAAAAAAAAAAAAAAAAAAAAAAAAAAAAFAAAADwAAAAAAAAAAAAAAAAAAAAPAAAAAQAAACMAAAAjAAAAIwAAAB4AAAAAAAAAZAAAAGQAAAAAAAAAZAAAAGQAAAAVAAAAYAAAAAAAAAAAAAAADwAAACADAAAAAAAAAAAAAAEAAACgMgAAVgcAAKr4//8BAAAAf39/AAEAAABkAAAAAAAAABQAAABAHwAAAAAAACYAAAAAAAAAwOD//wAAAAAmAAAAZAAAABYAAABMAAAAAAAAAAAAAAAEAAAAAAAAAAEAAACZloMKAAAAACgAAAAoAAAAZAAAAGQAAAAAAAAAzMzMAAAAAABQAAAAUAAAAGQAAABkAAAAAAAAABcAAAAUAAAAAAAAAAAAAAD/fwAA/38AAAAAAAAJAAAABAAAAJiDnkseAAAAaAAAAAAAAAAAAAAAAAAAAAAAAAAAAAAAECcAABAnAAAAAAAAAAAAAAAAAAAAAAAAAAAAAAAAAAAAAAAAAAAAABQAAAAAAAAAwMD/AAAAAABkAAAAMgAAAAAAAABkAAAAAAAAAH9/fwAKAAAAIgAAABgAAAAAAAAAAAAAAAAAAAAAAAAAAAAAAAAAAAAkAAAAJAAAAAAAAAAHAAAAAAAAAAAAAAAAAAAAAAAAAAAAAAAAAAAAf39/ACUAAABYAAAAAAAAAAAAAAAAAAAAAAAAAAAAAAAAAAAAAAAAAAAAAAAAAAAAAAAAAAAAAAA/AAAAAAAAAKCGAQAAAAAAAAAAAAAAAAAMAAAAAQAAAAAAAAAAAAAAAAAAAB8AAABUAAAA////AAAAAAEAAAAAAAAAAAAAAAAAAAAAAAAAAAAAAAAAAAAAAAAAAAAAAAB/f38AAAAAA8zMzADAwP8Af39/AAAAAAAAAAAAAAAAAAAAAAAAAAAAIQAAABgAAAAUAAAAAAAAAAA6AAAfEgAADj0AABAAAAAmAAAACAAAAL+PAAD/HwAA"/>
               </a:ext>
             </a:extLst>
           </p:cNvSpPr>
@@ -898,7 +898,7 @@
             <a:spLocks noGrp="1" noChangeArrowheads="1"/>
             <a:extLst>
               <a:ext uri="smNativeData">
-                <pr:smNativeData xmlns:pr="smNativeData" xmlns="smNativeData" val="SMDATA_15_mcIdaRMAAAAlAAAAZAAAAA0AAAAAkAAAAEgAAACQAAAASAAAAAAAAAACAAAAAAAAAAEAAABQAAAAAAAAAAAA4D8AAAAAAADgPwAAAAAAAOA/AAAAAAAA4D8AAAAAAADgPwAAAAAAAOA/AAAAAAAA4D8AAAAAAADgPwAAAAAAAOA/AAAAAAAA4D8CAAAAjAAAAAAAAAAAAAAA////AP///wgAAAAAAAAAAAAAAAAAAAAAAAAAAAAAAAAAAAAAeAAAAAEAAABAAAAAAAAAAAAAAABaAAAAAAAAAAAAAAAAAAAAAAAAAAAAAAAAAAAAAAAAAAAAAAAAAAAAAAAAAAAAAAAAAAAAAAAAAAAAAAAAAAAAAAAAAAAAAAAAAAAAFAAAADwAAAAAAAAAAAAAAAAAAAAPAAAAAQAAACMAAAAjAAAAIwAAAB4AAAAAAAAAZAAAAGQAAAAAAAAAZAAAAGQAAAAVAAAAYAAAAAAAAAAAAAAADwAAACADAAAAAAAAAAAAAAEAAACgMgAAVgcAAKr4//8BAAAAf39/AAEAAABkAAAAAAAAABQAAABAHwAAAAAAACYAAAAAAAAAwOD//wAAAAAmAAAAZAAAABYAAABMAAAAAAAAAAAAAAAEAAAAAAAAAAEAAACZloMKAAAAACgAAAAoAAAAZAAAAGQAAAAAAAAAzMzMAAAAAABQAAAAUAAAAGQAAABkAAAAAAAAABcAAAAUAAAAAAAAAAAAAAD/fwAA/38AAAAAAAAJAAAABAAAAOJXa1geAAAAaAAAAAAAAAAAAAAAAAAAAAAAAAAAAAAAECcAABAnAAAAAAAAAAAAAAAAAAAAAAAAAAAAAAAAAAAAAAAAAAAAABQAAAAAAAAAwMD/AAAAAABkAAAAMgAAAAAAAABkAAAAAAAAAH9/fwAKAAAAIgAAABgAAAAAAAAAAAAAAAAAAAAAAAAAAAAAAAAAAAAkAAAAJAAAAAAAAAAHAAAAAAAAAAAAAAAAAAAAAAAAAAAAAAAAAAAAf39/ACUAAABYAAAAAAAAAAAAAAAAAAAAAAAAAAAAAAAAAAAAAAAAAAAAAAAAAAAAAAAAAAAAAAA/AAAAAAAAAKCGAQAAAAAAAAAAAAAAAAAMAAAAAQAAAAAAAAAAAAAAAAAAAB8AAABUAAAA////AAAAAAEAAAAAAAAAAAAAAAAAAAAAAAAAAAAAAAAAAAAAAAAAAAAAAAB/f38AAAAAA8zMzADAwP8Af39/AAAAAAAAAAAAAAAAAAAAAAAAAAAAIQAAABgAAAAUAAAAsBcAAAA6AADPKQAADj0AABAAAAAmAAAACAAAAL+PAAD/HwAA"/>
+                <pr:smNativeData xmlns:pr="smNativeData" xmlns="smNativeData" val="SMDATA_15_r8odaRMAAAAlAAAAZAAAAA0AAAAAkAAAAEgAAACQAAAASAAAAAAAAAACAAAAAAAAAAEAAABQAAAAAAAAAAAA4D8AAAAAAADgPwAAAAAAAOA/AAAAAAAA4D8AAAAAAADgPwAAAAAAAOA/AAAAAAAA4D8AAAAAAADgPwAAAAAAAOA/AAAAAAAA4D8CAAAAjAAAAAAAAAAAAAAA////AP///wgAAAAAAAAAAAAAAAAAAAAAAAAAAAAAAAAAAAAAeAAAAAEAAABAAAAAAAAAAAAAAABaAAAAAAAAAAAAAAAAAAAAAAAAAAAAAAAAAAAAAAAAAAAAAAAAAAAAAAAAAAAAAAAAAAAAAAAAAAAAAAAAAAAAAAAAAAAAAAAAAAAAFAAAADwAAAAAAAAAAAAAAAAAAAAPAAAAAQAAACMAAAAjAAAAIwAAAB4AAAAAAAAAZAAAAGQAAAAAAAAAZAAAAGQAAAAVAAAAYAAAAAAAAAAAAAAADwAAACADAAAAAAAAAAAAAAEAAACgMgAAVgcAAKr4//8BAAAAf39/AAEAAABkAAAAAAAAABQAAABAHwAAAAAAACYAAAAAAAAAwOD//wAAAAAmAAAAZAAAABYAAABMAAAAAAAAAAAAAAAEAAAAAAAAAAEAAACZloMKAAAAACgAAAAoAAAAZAAAAGQAAAAAAAAAzMzMAAAAAABQAAAAUAAAAGQAAABkAAAAAAAAABcAAAAUAAAAAAAAAAAAAAD/fwAA/38AAAAAAAAJAAAABAAAAOJXa1geAAAAaAAAAAAAAAAAAAAAAAAAAAAAAAAAAAAAECcAABAnAAAAAAAAAAAAAAAAAAAAAAAAAAAAAAAAAAAAAAAAAAAAABQAAAAAAAAAwMD/AAAAAABkAAAAMgAAAAAAAABkAAAAAAAAAH9/fwAKAAAAIgAAABgAAAAAAAAAAAAAAAAAAAAAAAAAAAAAAAAAAAAkAAAAJAAAAAAAAAAHAAAAAAAAAAAAAAAAAAAAAAAAAAAAAAAAAAAAf39/ACUAAABYAAAAAAAAAAAAAAAAAAAAAAAAAAAAAAAAAAAAAAAAAAAAAAAAAAAAAAAAAAAAAAA/AAAAAAAAAKCGAQAAAAAAAAAAAAAAAAAMAAAAAQAAAAAAAAAAAAAAAAAAAB8AAABUAAAA////AAAAAAEAAAAAAAAAAAAAAAAAAAAAAAAAAAAAAAAAAAAAAAAAAAAAAAB/f38AAAAAA8zMzADAwP8Af39/AAAAAAAAAAAAAAAAAAAAAAAAAAAAIQAAABgAAAAUAAAAsBcAAAA6AADPKQAADj0AABAAAAAmAAAACAAAAL+PAAD/HwAA"/>
               </a:ext>
             </a:extLst>
           </p:cNvSpPr>
@@ -958,7 +958,7 @@
             <a:pPr>
               <a:defRPr lang="en-us"/>
             </a:pPr>
-            <a:fld id="{3EAC7CBA-F4D3-F98A-9D14-02DF325A6B57}" type="slidenum">
+            <a:fld id="{2506A95F-11C8-535F-86BE-E70AE7F070B2}" type="slidenum">
               <a:t>‹nº›</a:t>
             </a:fld>
           </a:p>
@@ -1218,7 +1218,7 @@
             <a:spLocks noGrp="1" noChangeArrowheads="1"/>
             <a:extLst>
               <a:ext uri="smNativeData">
-                <pr:smNativeData xmlns:pr="smNativeData" xmlns="smNativeData" val="SMDATA_15_mcIdaRMAAAAlAAAAZAAAAC0AAAAAkAAAAEgAAACQAAAASAAAAAAAAAABAAAAAAAAAAEAAABQAAAAAAAAAAAA4D8AAAAAAADgPwAAAAAAAOA/AAAAAAAA4D8AAAAAAADgPwAAAAAAAOA/AAAAAAAA4D8AAAAAAADgPwAAAAAAAOA/AAAAAAAA4D8CAAAAjAAAAAAAAAAAAAAA40oGDP///wgAAAAAAAAAAAAAAAAAAAAAAAAAAAAAAAAAAAAAZAAAAAEAAABAAAAAAAAAAAAAAAAAAAAAAAAAAAAAAAAAAAAAAAAAAAAAAAAAAAAAAAAAAAAAAAAAAAAAAAAAAAAAAAAAAAAAAAAAAAAAAAAAAAAAAAAAAAAAAAAAAAAAFAAAADwAAAABAAAAAAAAAAAAAAAUAAAAAQAAACMAAAAjAAAAIwAAAB4AAAAAAAAAZAAAAGQAAAAAAAAAZAAAAGQAAAAVAAAAYAAAAAAAAAAAAAAADwAAACADAAAAAAAAAAAAAAEAAACgMgAAVgcAAKr4//8BAAAAf39/AAEAAABkAAAAAAAAABQAAABAHwAAAAAAACYAAAAAAAAAwOD//wAAAAAmAAAAZAAAABYAAABMAAAAAAAAAAAAAAAEAAAAAAAAAAEAAACZloMKAAAAACgAAAAoAAAAZAAAAGQAAAAAAAAAzMzMAAAAAABQAAAAUAAAAGQAAABkAAAAAAAAABcAAAAUAAAAAAAAAAAAAAD/fwAA/38AAAAAAAAJAAAABAAAAAAAAAAeAAAAaAAAAAAAAAAAAAAAAAAAAAAAAAAAAAAAECcAABAnAAAAAAAAAAAAAAAAAAAAAAAAAAAAAAAAAAAAAAAAAAAAABQAAAAAAAAAwMD/AAAAAABkAAAAMgAAAAAAAABkAAAAAAAAAH9/fwAKAAAAIgAAABgAAAAAAAAAAAAAAAAAAAAAAAAAAAAAAAAAAAAkAAAAJAAAAAAAAAAHAAAAAAAAAAAAAAAAAAAAAAAAAAAAAAAAAAAAf39/ACUAAABYAAAAAAAAAAAAAAAAAAAAAAAAAAAAAAAAAAAAAAAAAAAAAAAAAAAAAAAAAAAAAAA/AAAAAAAAAKCGAQAAAAAAAAAAAAAAAAAMAAAAAQAAAAAAAAAAAAAAAAAAAB8AAABUAAAAAAAABQAAAAEAAAAAAAAAAAAAAAAAAAAAAAAAAAAAAAAAAAAAAAAAAAAAAAB/f38AAAAAA8zMzADAwP8Af39/AAAAAAAAAAAAAAAAAAAAAAAAAAAAIQAAABgAAAAUAAAApQUAAJUEAAAsJAAAexsAABAAAAAmAAAACAAAAAEAAAAAAAAA"/>
+                <pr:smNativeData xmlns:pr="smNativeData" xmlns="smNativeData" val="SMDATA_15_r8odaRMAAAAlAAAAZAAAAC0AAAAAkAAAAEgAAACQAAAASAAAAAAAAAABAAAAAAAAAAEAAABQAAAAAAAAAAAA4D8AAAAAAADgPwAAAAAAAOA/AAAAAAAA4D8AAAAAAADgPwAAAAAAAOA/AAAAAAAA4D8AAAAAAADgPwAAAAAAAOA/AAAAAAAA4D8CAAAAjAAAAAAAAAAAAAAA40oGDP///wgAAAAAAAAAAAAAAAAAAAAAAAAAAAAAAAAAAAAAZAAAAAEAAABAAAAAAAAAAAAAAAAAAAAAAAAAAAAAAAAAAAAAAAAAAAAAAAAAAAAAAAAAAAAAAAAAAAAAAAAAAAAAAAAAAAAAAAAAAAAAAAAAAAAAAAAAAAAAAAAAAAAAFAAAADwAAAABAAAAAAAAAAAAAAAUAAAAAQAAACMAAAAjAAAAIwAAAB4AAAAAAAAAZAAAAGQAAAAAAAAAZAAAAGQAAAAVAAAAYAAAAAAAAAAAAAAADwAAACADAAAAAAAAAAAAAAEAAACgMgAAVgcAAKr4//8BAAAAf39/AAEAAABkAAAAAAAAABQAAABAHwAAAAAAACYAAAAAAAAAwOD//wAAAAAmAAAAZAAAABYAAABMAAAAAAAAAAAAAAAEAAAAAAAAAAEAAACZloMKAAAAACgAAAAoAAAAZAAAAGQAAAAAAAAAzMzMAAAAAABQAAAAUAAAAGQAAABkAAAAAAAAABcAAAAUAAAAAAAAAAAAAAD/fwAA/38AAAAAAAAJAAAABAAAAAAAAAAeAAAAaAAAAAAAAAAAAAAAAAAAAAAAAAAAAAAAECcAABAnAAAAAAAAAAAAAAAAAAAAAAAAAAAAAAAAAAAAAAAAAAAAABQAAAAAAAAAwMD/AAAAAABkAAAAMgAAAAAAAABkAAAAAAAAAH9/fwAKAAAAIgAAABgAAAAAAAAAAAAAAAAAAAAAAAAAAAAAAAAAAAAkAAAAJAAAAAAAAAAHAAAAAAAAAAAAAAAAAAAAAAAAAAAAAAAAAAAAf39/ACUAAABYAAAAAAAAAAAAAAAAAAAAAAAAAAAAAAAAAAAAAAAAAAAAAAAAAAAAAAAAAAAAAAA/AAAAAAAAAKCGAQAAAAAAAAAAAAAAAAAMAAAAAQAAAAAAAAAAAAAAAAAAAB8AAABUAAAAAAAABQAAAAEAAAAAAAAAAAAAAAAAAAAAAAAAAAAAAAAAAAAAAAAAAAAAAAB/f38AAAAAA8zMzADAwP8Af39/AAAAAAAAAAAAAAAAAAAAAAAAAAAAIQAAABgAAAAUAAAApQUAAJUEAAAsJAAAexsAABAAAAAmAAAACAAAAAEAAAAAAAAA"/>
               </a:ext>
             </a:extLst>
           </p:cNvSpPr>
@@ -1240,7 +1240,7 @@
             <a:spLocks noGrp="1" noChangeArrowheads="1"/>
             <a:extLst>
               <a:ext uri="smNativeData">
-                <pr:smNativeData xmlns:pr="smNativeData" xmlns="smNativeData" val="SMDATA_15_mcIdaRMAAAAlAAAAZAAAAA0AAAAAkAAAAEgAAACQAAAASAAAAAAAAAAAAAAAAAAAAAEAAABQAAAAAAAAAAAA4D8AAAAAAADgPwAAAAAAAOA/AAAAAAAA4D8AAAAAAADgPwAAAAAAAOA/AAAAAAAA4D8AAAAAAADgPwAAAAAAAOA/AAAAAAAA4D8CAAAAjAAAAAAAAAAAAAAA////AP///wgAAAAAAAAAAAAAAAAAAAAAAAAAAAAAAAAAAAAAeAAAAAEAAABAAAAAAAAAAAAAAABaAAAAAAAAAAAAAAAAAAAAAAAAAAAAAAAAAAAAAAAAAAAAAAAAAAAAAAAAAAAAAAAAAAAAAAAAAAAAAAAAAAAAAAAAAAAAAAAAAAAAFAAAADwAAAAAAAAAAAAAAAAAAAAPAAAAAQAAACMAAAAjAAAAIwAAAB4AAAAAAAAAZAAAAGQAAAAAAAAAZAAAAGQAAAAVAAAAYAAAAAAAAAAAAAAADwAAACADAAAAAAAAAAAAAAEAAACgMgAAVgcAAKr4//8BAAAAf39/AAEAAABkAAAAAAAAABQAAABAHwAAAAAAACYAAAAAAAAAwOD//wAAAAAmAAAAZAAAABYAAABMAAAAAAAAAAAAAAAEAAAAAAAAAAEAAACZloMKAAAAACgAAAAoAAAAZAAAAGQAAAAAAAAAzMzMAAAAAABQAAAAUAAAAGQAAABkAAAAAAAAABcAAAAUAAAAAAAAAAAAAAD/fwAA/38AAAAAAAAJAAAABAAAAAAAAAAeAAAAaAAAAAAAAAAAAAAAAAAAAAAAAAAAAAAAECcAABAnAAAAAAAAAAAAAAAAAAAAAAAAAAAAAAAAAAAAAAAAAAAAABQAAAAAAAAAwMD/AAAAAABkAAAAMgAAAAAAAABkAAAAAAAAAH9/fwAKAAAAIgAAABgAAAAAAAAAAAAAAAAAAAAAAAAAAAAAAAAAAAAkAAAAJAAAAAAAAAAHAAAAAAAAAAAAAAAAAAAAAAAAAAAAAAAAAAAAf39/ACUAAABYAAAAAAAAAAAAAAAAAAAAAAAAAAAAAAAAAAAAAAAAAAAAAAAAAAAAAAAAAAAAAAA/AAAAAAAAAKCGAQAAAAAAAAAAAAAAAAAMAAAAAQAAAAAAAAAAAAAAAAAAAB8AAABUAAAA////AAAAAAEAAAAAAAAAAAAAAAAAAAAAAAAAAAAAAAAAAAAAAAAAAAAAAAB/f38AAAAAA8zMzADAwP8Af39/AAAAAAAAAAAAAAAAAAAAAAAAAAAAIQAAABgAAAAUAAAALwQAAAEdAACjJQAAfDgAABAAAAAmAAAACAAAAAEAAAAAAAAA"/>
+                <pr:smNativeData xmlns:pr="smNativeData" xmlns="smNativeData" val="SMDATA_15_r8odaRMAAAAlAAAAZAAAAA0AAAAAkAAAAEgAAACQAAAASAAAAAAAAAAAAAAAAAAAAAEAAABQAAAAAAAAAAAA4D8AAAAAAADgPwAAAAAAAOA/AAAAAAAA4D8AAAAAAADgPwAAAAAAAOA/AAAAAAAA4D8AAAAAAADgPwAAAAAAAOA/AAAAAAAA4D8CAAAAjAAAAAAAAAAAAAAA////AP///wgAAAAAAAAAAAAAAAAAAAAAAAAAAAAAAAAAAAAAeAAAAAEAAABAAAAAAAAAAAAAAABaAAAAAAAAAAAAAAAAAAAAAAAAAAAAAAAAAAAAAAAAAAAAAAAAAAAAAAAAAAAAAAAAAAAAAAAAAAAAAAAAAAAAAAAAAAAAAAAAAAAAFAAAADwAAAAAAAAAAAAAAAAAAAAPAAAAAQAAACMAAAAjAAAAIwAAAB4AAAAAAAAAZAAAAGQAAAAAAAAAZAAAAGQAAAAVAAAAYAAAAAAAAAAAAAAADwAAACADAAAAAAAAAAAAAAEAAACgMgAAVgcAAKr4//8BAAAAf39/AAEAAABkAAAAAAAAABQAAABAHwAAAAAAACYAAAAAAAAAwOD//wAAAAAmAAAAZAAAABYAAABMAAAAAAAAAAAAAAAEAAAAAAAAAAEAAACZloMKAAAAACgAAAAoAAAAZAAAAGQAAAAAAAAAzMzMAAAAAABQAAAAUAAAAGQAAABkAAAAAAAAABcAAAAUAAAAAAAAAAAAAAD/fwAA/38AAAAAAAAJAAAABAAAAAAAAAAeAAAAaAAAAAAAAAAAAAAAAAAAAAAAAAAAAAAAECcAABAnAAAAAAAAAAAAAAAAAAAAAAAAAAAAAAAAAAAAAAAAAAAAABQAAAAAAAAAwMD/AAAAAABkAAAAMgAAAAAAAABkAAAAAAAAAH9/fwAKAAAAIgAAABgAAAAAAAAAAAAAAAAAAAAAAAAAAAAAAAAAAAAkAAAAJAAAAAAAAAAHAAAAAAAAAAAAAAAAAAAAAAAAAAAAAAAAAAAAf39/ACUAAABYAAAAAAAAAAAAAAAAAAAAAAAAAAAAAAAAAAAAAAAAAAAAAAAAAAAAAAAAAAAAAAA/AAAAAAAAAKCGAQAAAAAAAAAAAAAAAAAMAAAAAQAAAAAAAAAAAAAAAAAAAB8AAABUAAAA////AAAAAAEAAAAAAAAAAAAAAAAAAAAAAAAAAAAAAAAAAAAAAAAAAAAAAAB/f38AAAAAA8zMzADAwP8Af39/AAAAAAAAAAAAAAAAAAAAAAAAAAAAIQAAABgAAAAUAAAALwQAAAEdAACjJQAAfDgAABAAAAAmAAAACAAAAAEAAAAAAAAA"/>
               </a:ext>
             </a:extLst>
           </p:cNvSpPr>
@@ -1272,7 +1272,7 @@
             <a:spLocks noGrp="1" noChangeArrowheads="1"/>
             <a:extLst>
               <a:ext uri="smNativeData">
-                <pr:smNativeData xmlns:pr="smNativeData" xmlns="smNativeData" val="SMDATA_15_mcIdaRMAAAAlAAAAZAAAAA0AAAAAkAAAAEgAAACQAAAASAAAAAAAAAACAAAAAAAAAAEAAABQAAAAAAAAAAAA4D8AAAAAAADgPwAAAAAAAOA/AAAAAAAA4D8AAAAAAADgPwAAAAAAAOA/AAAAAAAA4D8AAAAAAADgPwAAAAAAAOA/AAAAAAAA4D8CAAAAjAAAAAAAAAAAAAAA////AP///wgAAAAAAAAAAAAAAAAAAAAAAAAAAAAAAAAAAAAAeAAAAAEAAABAAAAAAAAAAAAAAABaAAAAAAAAAAAAAAAAAAAAAAAAAAAAAAAAAAAAAAAAAAAAAAAAAAAAAAAAAAAAAAAAAAAAAAAAAAAAAAAAAAAAAAAAAAAAAAAAAAAAFAAAADwAAAAAAAAAAAAAAAAAAAAPAAAAAQAAACMAAAAjAAAAIwAAAB4AAAAAAAAAZAAAAGQAAAAAAAAAZAAAAGQAAAAVAAAAYAAAAAAAAAAAAAAADwAAACADAAAAAAAAAAAAAAEAAACgMgAAVgcAAKr4//8BAAAAf39/AAEAAABkAAAAAAAAABQAAABAHwAAAAAAACYAAAAAAAAAwOD//wAAAAAmAAAAZAAAABYAAABMAAAAAAAAAAAAAAAEAAAAAAAAAAEAAACZloMKAAAAACgAAAAoAAAAZAAAAGQAAAAAAAAAzMzMAAAAAABQAAAAUAAAAGQAAABkAAAAAAAAABcAAAAUAAAAAAAAAAAAAAD/fwAA/38AAAAAAAAJAAAABAAAAAAAAAAeAAAAaAAAAAAAAAAAAAAAAAAAAAAAAAAAAAAAECcAABAnAAAAAAAAAAAAAAAAAAAAAAAAAAAAAAAAAAAAAAAAAAAAABQAAAAAAAAAwMD/AAAAAABkAAAAMgAAAAAAAABkAAAAAAAAAH9/fwAKAAAAIgAAABgAAAAAAAAAAAAAAAAAAAAAAAAAAAAAAAAAAAAkAAAAJAAAAAAAAAAHAAAAAAAAAAAAAAAAAAAAAAAAAAAAAAAAAAAAf39/ACUAAABYAAAAAAAAAAAAAAAAAAAAAAAAAAAAAAAAAAAAAAAAAAAAAAAAAAAAAAAAAAAAAAA/AAAAAAAAAKCGAQAAAAAAAAAAAAAAAAAMAAAAAQAAAAAAAAAAAAAAAAAAAB8AAABUAAAA////AAAAAAEAAAAAAAAAAAAAAAAAAAAAAAAAAAAAAAAAAAAAAAAAAAAAAAB/f38AAAAAA8zMzADAwP8Af39/AAAAAAAAAAAAAAAAAAAAAAAAAAAAIQAAABgAAAAUAAAAsBcAAAA6AADPKQAADj0AABAAAAAmAAAACAAAAAEAAAAAAAAA"/>
+                <pr:smNativeData xmlns:pr="smNativeData" xmlns="smNativeData" val="SMDATA_15_r8odaRMAAAAlAAAAZAAAAA0AAAAAkAAAAEgAAACQAAAASAAAAAAAAAACAAAAAAAAAAEAAABQAAAAAAAAAAAA4D8AAAAAAADgPwAAAAAAAOA/AAAAAAAA4D8AAAAAAADgPwAAAAAAAOA/AAAAAAAA4D8AAAAAAADgPwAAAAAAAOA/AAAAAAAA4D8CAAAAjAAAAAAAAAAAAAAA////AP///wgAAAAAAAAAAAAAAAAAAAAAAAAAAAAAAAAAAAAAeAAAAAEAAABAAAAAAAAAAAAAAABaAAAAAAAAAAAAAAAAAAAAAAAAAAAAAAAAAAAAAAAAAAAAAAAAAAAAAAAAAAAAAAAAAAAAAAAAAAAAAAAAAAAAAAAAAAAAAAAAAAAAFAAAADwAAAAAAAAAAAAAAAAAAAAPAAAAAQAAACMAAAAjAAAAIwAAAB4AAAAAAAAAZAAAAGQAAAAAAAAAZAAAAGQAAAAVAAAAYAAAAAAAAAAAAAAADwAAACADAAAAAAAAAAAAAAEAAACgMgAAVgcAAKr4//8BAAAAf39/AAEAAABkAAAAAAAAABQAAABAHwAAAAAAACYAAAAAAAAAwOD//wAAAAAmAAAAZAAAABYAAABMAAAAAAAAAAAAAAAEAAAAAAAAAAEAAACZloMKAAAAACgAAAAoAAAAZAAAAGQAAAAAAAAAzMzMAAAAAABQAAAAUAAAAGQAAABkAAAAAAAAABcAAAAUAAAAAAAAAAAAAAD/fwAA/38AAAAAAAAJAAAABAAAAAAAAAAeAAAAaAAAAAAAAAAAAAAAAAAAAAAAAAAAAAAAECcAABAnAAAAAAAAAAAAAAAAAAAAAAAAAAAAAAAAAAAAAAAAAAAAABQAAAAAAAAAwMD/AAAAAABkAAAAMgAAAAAAAABkAAAAAAAAAH9/fwAKAAAAIgAAABgAAAAAAAAAAAAAAAAAAAAAAAAAAAAAAAAAAAAkAAAAJAAAAAAAAAAHAAAAAAAAAAAAAAAAAAAAAAAAAAAAAAAAAAAAf39/ACUAAABYAAAAAAAAAAAAAAAAAAAAAAAAAAAAAAAAAAAAAAAAAAAAAAAAAAAAAAAAAAAAAAA/AAAAAAAAAKCGAQAAAAAAAAAAAAAAAAAMAAAAAQAAAAAAAAAAAAAAAAAAAB8AAABUAAAA////AAAAAAEAAAAAAAAAAAAAAAAAAAAAAAAAAAAAAAAAAAAAAAAAAAAAAAB/f38AAAAAA8zMzADAwP8Af39/AAAAAAAAAAAAAAAAAAAAAAAAAAAAIQAAABgAAAAUAAAAsBcAAAA6AADPKQAADj0AABAAAAAmAAAACAAAAAEAAAAAAAAA"/>
               </a:ext>
             </a:extLst>
           </p:cNvSpPr>
@@ -1293,7 +1293,7 @@
             <a:pPr>
               <a:defRPr lang="en-us"/>
             </a:pPr>
-            <a:fld id="{24EF6C85-CBC9-BA9A-8757-3DCF22197168}" type="slidenum">
+            <a:fld id="{57A7C51E-50BA-F233-F41F-A6668B5102F3}" type="slidenum">
               <a:t>1</a:t>
             </a:fld>
           </a:p>
@@ -1341,7 +1341,7 @@
             <a:spLocks noGrp="1" noChangeArrowheads="1"/>
             <a:extLst>
               <a:ext uri="smNativeData">
-                <pr:smNativeData xmlns:pr="smNativeData" xmlns="smNativeData" val="SMDATA_15_mcIdaRMAAAAlAAAAZAAAAA0AAAAAAAAAAAAAAAAAAAAAAAAAAAAAAAAAAAAAAAAAAAEAAABQAAAAAAAAAAAA4D8AAAAAAADgPwAAAAAAAOA/AAAAAAAA4D8AAAAAAADgPwAAAAAAAOA/AAAAAAAA4D8AAAAAAADgPwAAAAAAAOA/AAAAAAAA4D8CAAAAjAAAAAAAAAAAAAAA40oGDP///wgAAAAAAAAAAAAAAAAAAAAAAAAAAAAAAAAAAAAAZAAAAAEAAABAAAAAAAAAAAAAAAAAAAAAAAAAAAAAAAAAAAAAAAAAAAAAAAAAAAAAAAAAAAAAAAAAAAAAAAAAAAAAAAAAAAAAAAAAAAAAAAAAAAAAAAAAAAAAAAAAAAAAFAAAADwAAAAAAAAAAAAAAAAAAAkUAAAAAQAAABQAAAAUAAAAFAAAAAEAAAAAAAAAZAAAAGQAAAAAAAAAZAAAAGQAAAAVAAAAYAAAAAAAAAAAAAAADwAAACADAAAAAAAAAAAAAAEAAACgMgAAVgcAAKr4//8BAAAAf39/AAEAAABkAAAAAAAAABQAAABAHwAAAAAAACYAAAAAAAAAwOD//wAAAAAmAAAAZAAAABYAAABMAAAAAAAAAAAAAAAEAAAAAAAAAAEAAACZloMKAAAAACgAAAAoAAAAZAAAAGQAAAAAAAAAzMzMAAAAAABQAAAAUAAAAGQAAABkAAAAAAAAABcAAAAUAAAAAAAAAAAAAAD/fwAA/38AAAAAAAAJAAAABAAAAAAAAAAeAAAAaAAAAAAAAAAAAAAAAAAAAAAAAAAAAAAAECcAABAnAAAAAAAAAAAAAAAAAAAAAAAAAAAAAAAAAAAAAAAAAAAAABQAAAAAAAAAwMD/AAAAAABkAAAAMgAAAAAAAABkAAAAAAAAAH9/fwAKAAAAIgAAABgAAAAAAAAAAAAAAAAAAAAAAAAAAAAAAAAAAAAkAAAAJAAAAAAAAAAHAAAAAAAAAAAAAAAAAAAAAAAAAAAAAAAAAAAAf39/ACUAAABYAAAAAAAAAAAAAAAAAAAAAAAAAAAAAAAAAAAAAAAAAAAAAAAAAAAAAAAAAAAAAAA/AAAAAAAAAKCGAQAAAAAAAAAAAAAAAAAMAAAAAQAAAAAAAAAAAAAAAAAAAB8AAABUAAAAAAAABQAAAAEAAAAAAAAAAAAAAAAAAAAAAAAAAAAAAAAAAAAAAAAAAAAAAAJ/f38AAAAAA8zMzADAwP8Af39/AAAAAAAAAAAAAAAAAAAAAAAAAAAAIQAAABgAAAAUAAAA0AIAADUCAADAIAAAFBMAABAAAAAmAAAACAAAAAGAAAAAAAAA"/>
+                <pr:smNativeData xmlns:pr="smNativeData" xmlns="smNativeData" val="SMDATA_15_r8odaRMAAAAlAAAAZAAAAA0AAAAAAAAAAAAAAAAAAAAAAAAAAAAAAAAAAAAAAAAAAAEAAABQAAAAAAAAAAAA4D8AAAAAAADgPwAAAAAAAOA/AAAAAAAA4D8AAAAAAADgPwAAAAAAAOA/AAAAAAAA4D8AAAAAAADgPwAAAAAAAOA/AAAAAAAA4D8CAAAAjAAAAAAAAAAAAAAA40oGDP///wgAAAAAAAAAAAAAAAAAAAAAAAAAAAAAAAAAAAAAZAAAAAEAAABAAAAAAAAAAAAAAAAAAAAAAAAAAAAAAAAAAAAAAAAAAAAAAAAAAAAAAAAAAAAAAAAAAAAAAAAAAAAAAAAAAAAAAAAAAAAAAAAAAAAAAAAAAAAAAAAAAAAAFAAAADwAAAAAAAAAAAAAAAAAAAkUAAAAAQAAABQAAAAUAAAAFAAAAAEAAAAAAAAAZAAAAGQAAAAAAAAAZAAAAGQAAAAVAAAAYAAAAAAAAAAAAAAADwAAACADAAAAAAAAAAAAAAEAAACgMgAAVgcAAKr4//8BAAAAf39/AAEAAABkAAAAAAAAABQAAABAHwAAAAAAACYAAAAAAAAAwOD//wAAAAAmAAAAZAAAABYAAABMAAAAAAAAAAAAAAAEAAAAAAAAAAEAAACZloMKAAAAACgAAAAoAAAAZAAAAGQAAAAAAAAAzMzMAAAAAABQAAAAUAAAAGQAAABkAAAAAAAAABcAAAAUAAAAAAAAAAAAAAD/fwAA/38AAAAAAAAJAAAABAAAAAAAAAAeAAAAaAAAAAAAAAAAAAAAAAAAAAAAAAAAAAAAECcAABAnAAAAAAAAAAAAAAAAAAAAAAAAAAAAAAAAAAAAAAAAAAAAABQAAAAAAAAAwMD/AAAAAABkAAAAMgAAAAAAAABkAAAAAAAAAH9/fwAKAAAAIgAAABgAAAAAAAAAAAAAAAAAAAAAAAAAAAAAAAAAAAAkAAAAJAAAAAAAAAAHAAAAAAAAAAAAAAAAAAAAAAAAAAAAAAAAAAAAf39/ACUAAABYAAAAAAAAAAAAAAAAAAAAAAAAAAAAAAAAAAAAAAAAAAAAAAAAAAAAAAAAAAAAAAA/AAAAAAAAAKCGAQAAAAAAAAAAAAAAAAAMAAAAAQAAAAAAAAAAAAAAAAAAAB8AAABUAAAAAAAABQAAAAEAAAAAAAAAAAAAAAAAAAAAAAAAAAAAAAAAAAAAAAAAAAAAAAJ/f38AAAAAA8zMzADAwP8Af39/AAAAAAAAAAAAAAAAAAAAAAAAAAAAIQAAABgAAAAUAAAA0AIAADUCAADAIAAAFBMAABAAAAAmAAAACAAAAAGAAAAAAAAA"/>
               </a:ext>
             </a:extLst>
           </p:cNvSpPr>
@@ -1410,7 +1410,7 @@
             <a:spLocks noGrp="1" noChangeArrowheads="1"/>
             <a:extLst>
               <a:ext uri="smNativeData">
-                <pr:smNativeData xmlns:pr="smNativeData" xmlns="smNativeData" val="SMDATA_15_mcIdaRMAAAAlAAAAZAAAAA0AAAAAAAAAAAAAAAAAAAAAAAAAAAAAAAACAAAAAAAAAAEAAABQAAAAAAAAAAAA4D8AAAAAAADgPwAAAAAAAOA/AAAAAAAA4D8AAAAAAADgPwAAAAAAAOA/AAAAAAAA4D8AAAAAAADgPwAAAAAAAOA/AAAAAAAA4D8CAAAAjAAAAAAAAAAAAAAA40oGDP///wgAAAAAAAAAAAAAAAAAAAAAAAAAAAAAAAAAAAAAZAAAAAEAAABAAAAAAAAAAAAAAAAAAAAAAAAAAAAAAAAAAAAAAAAAAAAAAAAAAAAAAAAAAAAAAAAAAAAAAAAAAAAAAAAAAAAAAAAAAAAAAAAAAAAAAAAAAAAAAAAAAAAAFAAAADwAAAAAAAAAAAAAAAAAAAkUAAAAAQAAABQAAAAUAAAAFAAAAAEAAAAAAAAAZAAAAGQAAAAAAAAAZAAAAGQAAAAVAAAAYAAAAAAAAAAAAAAADwAAACADAAAAAAAAAAAAAAEAAACgMgAAVgcAAKr4//8BAAAAf39/AAEAAABkAAAAAAAAABQAAABAHwAAAAAAACYAAAAAAAAAwOD//wAAAAAmAAAAZAAAABYAAABMAAAAAAAAAAAAAAAEAAAAAAAAAAEAAACZloMKAAAAACgAAAAoAAAAZAAAAGQAAAAAAAAAzMzMAAAAAABQAAAAUAAAAGQAAABkAAAAAAAAABcAAAAUAAAAAAAAAAAAAAD/fwAA/38AAAAAAAAJAAAABAAAAAAAAAAeAAAAaAAAAAAAAAAAAAAAAAAAAAAAAAAAAAAAECcAABAnAAAAAAAAAAAAAAAAAAAAAAAAAAAAAAAAAAAAAAAAAAAAABQAAAAAAAAAwMD/AAAAAABkAAAAMgAAAAAAAABkAAAAAAAAAH9/fwAKAAAAIgAAABgAAAAAAAAAAAAAAAAAAAAAAAAAAAAAAAAAAAAkAAAAJAAAAAAAAAAHAAAAAAAAAAAAAAAAAAAAAAAAAAAAAAAAAAAAf39/ACUAAABYAAAAAAAAAAAAAAAAAAAAAAAAAAAAAAAAAAAAAAAAAAAAAAAAAAAAAAAAAAAAAAA/AAAAAAAAAKCGAQAAAAAAAAAAAAAAAAAMAAAAAQAAAAAAAAAAAAAAAAAAAB8AAABUAAAAAAAABQAAAAEAAAAAAAAAAAAAAAAAAAAAAAAAAAAAAAAAAAAAAAAAAAAAAAJ/f38AAAAAA8zMzADAwP8Af39/AAAAAAAAAAAAAAAAAAAAAAAAAAAAIQAAABgAAAAUAAAA0AIAAH8bAAAGDAAAfCUAABAAAAAmAAAACAAAAIGAAAAAAAAA"/>
+                <pr:smNativeData xmlns:pr="smNativeData" xmlns="smNativeData" val="SMDATA_15_r8odaRMAAAAlAAAAZAAAAA0AAAAAAAAAAAAAAAAAAAAAAAAAAAAAAAACAAAAAAAAAAEAAABQAAAAAAAAAAAA4D8AAAAAAADgPwAAAAAAAOA/AAAAAAAA4D8AAAAAAADgPwAAAAAAAOA/AAAAAAAA4D8AAAAAAADgPwAAAAAAAOA/AAAAAAAA4D8CAAAAjAAAAAAAAAAAAAAA40oGDP///wgAAAAAAAAAAAAAAAAAAAAAAAAAAAAAAAAAAAAAZAAAAAEAAABAAAAAAAAAAAAAAAAAAAAAAAAAAAAAAAAAAAAAAAAAAAAAAAAAAAAAAAAAAAAAAAAAAAAAAAAAAAAAAAAAAAAAAAAAAAAAAAAAAAAAAAAAAAAAAAAAAAAAFAAAADwAAAAAAAAAAAAAAAAAAAkUAAAAAQAAABQAAAAUAAAAFAAAAAEAAAAAAAAAZAAAAGQAAAAAAAAAZAAAAGQAAAAVAAAAYAAAAAAAAAAAAAAADwAAACADAAAAAAAAAAAAAAEAAACgMgAAVgcAAKr4//8BAAAAf39/AAEAAABkAAAAAAAAABQAAABAHwAAAAAAACYAAAAAAAAAwOD//wAAAAAmAAAAZAAAABYAAABMAAAAAAAAAAAAAAAEAAAAAAAAAAEAAACZloMKAAAAACgAAAAoAAAAZAAAAGQAAAAAAAAAzMzMAAAAAABQAAAAUAAAAGQAAABkAAAAAAAAABcAAAAUAAAAAAAAAAAAAAD/fwAA/38AAAAAAAAJAAAABAAAAAAAAAAeAAAAaAAAAAAAAAAAAAAAAAAAAAAAAAAAAAAAECcAABAnAAAAAAAAAAAAAAAAAAAAAAAAAAAAAAAAAAAAAAAAAAAAABQAAAAAAAAAwMD/AAAAAABkAAAAMgAAAAAAAABkAAAAAAAAAH9/fwAKAAAAIgAAABgAAAAAAAAAAAAAAAAAAAAAAAAAAAAAAAAAAAAkAAAAJAAAAAAAAAAHAAAAAAAAAAAAAAAAAAAAAAAAAAAAAAAAAAAAf39/ACUAAABYAAAAAAAAAAAAAAAAAAAAAAAAAAAAAAAAAAAAAAAAAAAAAAAAAAAAAAAAAAAAAAA/AAAAAAAAAKCGAQAAAAAAAAAAAAAAAAAMAAAAAQAAAAAAAAAAAAAAAAAAAB8AAABUAAAAAAAABQAAAAEAAAAAAAAAAAAAAAAAAAAAAAAAAAAAAAAAAAAAAAAAAAAAAAJ/f38AAAAAA8zMzADAwP8Af39/AAAAAAAAAAAAAAAAAAAAAAAAAAAAIQAAABgAAAAUAAAA0AIAAH8bAAAGDAAAfCUAABAAAAAmAAAACAAAAIGAAAAAAAAA"/>
               </a:ext>
             </a:extLst>
           </p:cNvSpPr>
@@ -1520,7 +1520,7 @@
           <p:cNvSpPr>
             <a:extLst>
               <a:ext uri="smNativeData">
-                <pr:smNativeData xmlns:pr="smNativeData" xmlns="smNativeData" val="SMDATA_15_mcIdaRMAAAAlAAAACgAAAA0AAAAAkAAAAEgAAACQAAAASAAAAAAAAAAAAAAAAAAAAAEAAABQAAAAAAAAAAAA4D8AAAAAAADgPwAAAAAAAOA/AAAAAAAA4D8AAAAAAADgPwAAAAAAAOA/AAAAAAAA4D8AAAAAAADgPwAAAAAAAOA/AAAAAAAA4D8CAAAAjAAAAAAAAAAAAAAA////AP///wgAAAAAAAAAAAAAAAAAAAAAAAAAAAAAAAAAAAAAeAAAAAEAAABAAAAAAAAAAAAAAABaAAAAAAAAAAAAAAAAAAAAAAAAAAAAAAAAAAAAAAAAAAAAAAAAAAAAAAAAAAAAAAAAAAAAAAAAAAAAAAAAAAAAAAAAAAAAAAAAAAAAFAAAADwAAAABAAAAAAAAADw9PgsPAAAAAQAAABQAAAAUAAAAFAAAAAEAAAAAAAAAZAAAAGQAAAAAAAAAZAAAAGQAAAAVAAAAYAAAAAAAAAAAAAAADwAAACADAAAAAAAAAAAAAAEAAACgMgAAVgcAAKr4//8BAAAAf39/AAEAAABkAAAAAAAAABQAAABAHwAAAAAAACYAAAAAAAAAwOD//wAAAAAmAAAAZAAAABYAAABMAAAAAAAAAAAAAAAEAAAAAAAAAAEAAACZloMKAAAAACgAAAAoAAAAZAAAAGQAAAAAAAAAzMzMAAAAAABQAAAAUAAAAGQAAABkAAAAAAAAABcAAAAUAAAAAAAAAAAAAAD/fwAA/38AAAAAAAAJAAAABAAAAAAAAAAeAAAAaAAAAAAAAAAAAAAAAAAAAAAAAAAAAAAAECcAABAnAAAAAAAAAAAAAAAAAAAAAAAAAAAAAAAAAAAAAAAAAAAAABQAAAAAAAAAwMD/AAAAAABkAAAAMgAAAAAAAABkAAAAAAAAAH9/fwAKAAAAIgAAABgAAAAAAAAAAAAAAAAAAAAAAAAAAAAAAAAAAAAkAAAAJAAAAAAAAAAHAAAAAAAAAAAAAAAAAAAAAAAAAAAAAAAAAAAAf39/ACUAAABYAAAAAAAAAAAAAAAAAAAAAAAAAAAAAAAAAAAAAAAAAAAAAAAAAAAAAAAAAAAAAAA/AAAAAAAAAKCGAQAAAAAAAAAAAAAAAAAMAAAAAQAAAAAAAAAAAAAAAAAAAB8AAABUAAAA////AP///wEAAAAAAAAAAAAAAAAAAAAAAAAAAAAAAAAAAAAAAAAAADw9PgR/f38AmZaDA8zMzADAwP8Af39/AAAAAAAAAAAAAAAAAAAAAAAAAAAAIQAAABgAAAAUAAAA0AIAAAImAAAGDAAAAiYAABAAAAAmAAAACAAAAP//////////"/>
+                <pr:smNativeData xmlns:pr="smNativeData" xmlns="smNativeData" val="SMDATA_15_r8odaRMAAAAlAAAACgAAAA0AAAAAkAAAAEgAAACQAAAASAAAAAAAAAAAAAAAAAAAAAEAAABQAAAAAAAAAAAA4D8AAAAAAADgPwAAAAAAAOA/AAAAAAAA4D8AAAAAAADgPwAAAAAAAOA/AAAAAAAA4D8AAAAAAADgPwAAAAAAAOA/AAAAAAAA4D8CAAAAjAAAAAAAAAAAAAAA////AP///wgAAAAAAAAAAAAAAAAAAAAAAAAAAAAAAAAAAAAAeAAAAAEAAABAAAAAAAAAAAAAAABaAAAAAAAAAAAAAAAAAAAAAAAAAAAAAAAAAAAAAAAAAAAAAAAAAAAAAAAAAAAAAAAAAAAAAAAAAAAAAAAAAAAAAAAAAAAAAAAAAAAAFAAAADwAAAABAAAAAAAAADw9PgsPAAAAAQAAABQAAAAUAAAAFAAAAAEAAAAAAAAAZAAAAGQAAAAAAAAAZAAAAGQAAAAVAAAAYAAAAAAAAAAAAAAADwAAACADAAAAAAAAAAAAAAEAAACgMgAAVgcAAKr4//8BAAAAf39/AAEAAABkAAAAAAAAABQAAABAHwAAAAAAACYAAAAAAAAAwOD//wAAAAAmAAAAZAAAABYAAABMAAAAAAAAAAAAAAAEAAAAAAAAAAEAAACZloMKAAAAACgAAAAoAAAAZAAAAGQAAAAAAAAAzMzMAAAAAABQAAAAUAAAAGQAAABkAAAAAAAAABcAAAAUAAAAAAAAAAAAAAD/fwAA/38AAAAAAAAJAAAABAAAAAAAAAAeAAAAaAAAAAAAAAAAAAAAAAAAAAAAAAAAAAAAECcAABAnAAAAAAAAAAAAAAAAAAAAAAAAAAAAAAAAAAAAAAAAAAAAABQAAAAAAAAAwMD/AAAAAABkAAAAMgAAAAAAAABkAAAAAAAAAH9/fwAKAAAAIgAAABgAAAAAAAAAAAAAAAAAAAAAAAAAAAAAAAAAAAAkAAAAJAAAAAAAAAAHAAAAAAAAAAAAAAAAAAAAAAAAAAAAAAAAAAAAf39/ACUAAABYAAAAAAAAAAAAAAAAAAAAAAAAAAAAAAAAAAAAAAAAAAAAAAAAAAAAAAAAAAAAAAA/AAAAAAAAAKCGAQAAAAAAAAAAAAAAAAAMAAAAAQAAAAAAAAAAAAAAAAAAAB8AAABUAAAA////AP///wEAAAAAAAAAAAAAAAAAAAAAAAAAAAAAAAAAAAAAAAAAADw9PgR/f38AmZaDA8zMzADAwP8Af39/AAAAAAAAAAAAAAAAAAAAAAAAAAAAIQAAABgAAAAUAAAA0AIAAAImAAAGDAAAAiYAABAAAAAmAAAACAAAAP//////////"/>
               </a:ext>
             </a:extLst>
           </p:cNvSpPr>
@@ -1553,7 +1553,7 @@
             <a:spLocks noGrp="1" noChangeArrowheads="1"/>
             <a:extLst>
               <a:ext uri="smNativeData">
-                <pr:smNativeData xmlns:pr="smNativeData" xmlns="smNativeData" val="SMDATA_15_mcIdaRMAAAAlAAAAZAAAAA0AAAAAAAAAAAAAAAAAAAAAAAAAAAAAAAACAAAAAAAAAAEAAABQAAAAAAAAAAAA4D8AAAAAAADgPwAAAAAAAOA/AAAAAAAA4D8AAAAAAADgPwAAAAAAAOA/AAAAAAAA4D8AAAAAAADgPwAAAAAAAOA/AAAAAAAA4D8CAAAAjAAAAAAAAAAAAAAA40oGDP///wgAAAAAAAAAAAAAAAAAAAAAAAAAAAAAAAAAAAAAZAAAAAEAAABAAAAAAAAAAAAAAAAAAAAAAAAAAAAAAAAAAAAAAAAAAAAAAAAAAAAAAAAAAAAAAAAAAAAAAAAAAAAAAAAAAAAAAAAAAAAAAAAAAAAAAAAAAAAAAAAAAAAAFAAAADwAAAAAAAAAAAAAAAAAAAkUAAAAAQAAABQAAAAUAAAAFAAAAAEAAAAAAAAAZAAAAGQAAAAAAAAAZAAAAGQAAAAVAAAAYAAAAAAAAAAAAAAADwAAACADAAAAAAAAAAAAAAEAAACgMgAAVgcAAKr4//8BAAAAf39/AAEAAABkAAAAAAAAABQAAABAHwAAAAAAACYAAAAAAAAAwOD//wAAAAAmAAAAZAAAABYAAABMAAAAAAAAAAAAAAAEAAAAAAAAAAEAAACZloMKAAAAACgAAAAoAAAAZAAAAGQAAAAAAAAAzMzMAAAAAABQAAAAUAAAAGQAAABkAAAAAAAAABcAAAAUAAAAAAAAAAAAAAD/fwAA/38AAAAAAAAJAAAABAAAAAAAAAAeAAAAaAAAAAAAAAAAAAAAAAAAAAAAAAAAAAAAECcAABAnAAAAAAAAAAAAAAAAAAAAAAAAAAAAAAAAAAAAAAAAAAAAABQAAAAAAAAAwMD/AAAAAABkAAAAMgAAAAAAAABkAAAAAAAAAH9/fwAKAAAAIgAAABgAAAAAAAAAAAAAAAAAAAAAAAAAAAAAAAAAAAAkAAAAJAAAAAAAAAAHAAAAAAAAAAAAAAAAAAAAAAAAAAAAAAAAAAAAf39/ACUAAABYAAAAAAAAAAAAAAAAAAAAAAAAAAAAAAAAAAAAAAAAAAAAAAAAAAAAAAAAAAAAAAA/AAAAAAAAAKCGAQAAAAAAAAAAAAAAAAAMAAAAAQAAAAAAAAAAAAAAAAAAAB8AAABUAAAAAAAABQAAAAEAAAAAAAAAAAAAAAAAAAAAAAAAAAAAAAAAAAAAAAAAAAAAAAJ/f38AAAAAA8zMzADAwP8Af39/AAAAAAAAAAAAAAAAAAAAAAAAAAAAIQAAABgAAAAUAAAA5CEAAOAfAAAaKwAAKiYAABAAAAAmAAAACAAAAIGAAAAAAAAA"/>
+                <pr:smNativeData xmlns:pr="smNativeData" xmlns="smNativeData" val="SMDATA_15_r8odaRMAAAAlAAAAZAAAAA0AAAAAAAAAAAAAAAAAAAAAAAAAAAAAAAACAAAAAAAAAAEAAABQAAAAAAAAAAAA4D8AAAAAAADgPwAAAAAAAOA/AAAAAAAA4D8AAAAAAADgPwAAAAAAAOA/AAAAAAAA4D8AAAAAAADgPwAAAAAAAOA/AAAAAAAA4D8CAAAAjAAAAAAAAAAAAAAA40oGDP///wgAAAAAAAAAAAAAAAAAAAAAAAAAAAAAAAAAAAAAZAAAAAEAAABAAAAAAAAAAAAAAAAAAAAAAAAAAAAAAAAAAAAAAAAAAAAAAAAAAAAAAAAAAAAAAAAAAAAAAAAAAAAAAAAAAAAAAAAAAAAAAAAAAAAAAAAAAAAAAAAAAAAAFAAAADwAAAAAAAAAAAAAAAAAAAkUAAAAAQAAABQAAAAUAAAAFAAAAAEAAAAAAAAAZAAAAGQAAAAAAAAAZAAAAGQAAAAVAAAAYAAAAAAAAAAAAAAADwAAACADAAAAAAAAAAAAAAEAAACgMgAAVgcAAKr4//8BAAAAf39/AAEAAABkAAAAAAAAABQAAABAHwAAAAAAACYAAAAAAAAAwOD//wAAAAAmAAAAZAAAABYAAABMAAAAAAAAAAAAAAAEAAAAAAAAAAEAAACZloMKAAAAACgAAAAoAAAAZAAAAGQAAAAAAAAAzMzMAAAAAABQAAAAUAAAAGQAAABkAAAAAAAAABcAAAAUAAAAAAAAAAAAAAD/fwAA/38AAAAAAAAJAAAABAAAAAAAAAAeAAAAaAAAAAAAAAAAAAAAAAAAAAAAAAAAAAAAECcAABAnAAAAAAAAAAAAAAAAAAAAAAAAAAAAAAAAAAAAAAAAAAAAABQAAAAAAAAAwMD/AAAAAABkAAAAMgAAAAAAAABkAAAAAAAAAH9/fwAKAAAAIgAAABgAAAAAAAAAAAAAAAAAAAAAAAAAAAAAAAAAAAAkAAAAJAAAAAAAAAAHAAAAAAAAAAAAAAAAAAAAAAAAAAAAAAAAAAAAf39/ACUAAABYAAAAAAAAAAAAAAAAAAAAAAAAAAAAAAAAAAAAAAAAAAAAAAAAAAAAAAAAAAAAAAA/AAAAAAAAAKCGAQAAAAAAAAAAAAAAAAAMAAAAAQAAAAAAAAAAAAAAAAAAAB8AAABUAAAAAAAABQAAAAEAAAAAAAAAAAAAAAAAAAAAAAAAAAAAAAAAAAAAAAAAAAAAAAJ/f38AAAAAA8zMzADAwP8Af39/AAAAAAAAAAAAAAAAAAAAAAAAAAAAIQAAABgAAAAUAAAA5CEAAOAfAAAaKwAAKiYAABAAAAAmAAAACAAAAIGAAAAAAAAA"/>
               </a:ext>
             </a:extLst>
           </p:cNvSpPr>
@@ -1626,7 +1626,7 @@
             <a:spLocks noGrp="1" noChangeArrowheads="1"/>
             <a:extLst>
               <a:ext uri="smNativeData">
-                <pr:smNativeData xmlns:pr="smNativeData" xmlns="smNativeData" val="SMDATA_15_mcIdaRMAAAAlAAAAZAAAAA0AAAAAAAAAAAAAAAAAAAAAAAAAAAAAAAACAAAAAAAAAAEAAABQAAAAAAAAAAAA4D8AAAAAAADgPwAAAAAAAOA/AAAAAAAA4D8AAAAAAADgPwAAAAAAAOA/AAAAAAAA4D8AAAAAAADgPwAAAAAAAOA/AAAAAAAA4D8CAAAAjAAAAAAAAAAAAAAA40oGDP///wgAAAAAAAAAAAAAAAAAAAAAAAAAAAAAAAAAAAAAZAAAAAEAAABAAAAAAAAAAAAAAAAAAAAAAAAAAAAAAAAAAAAAAAAAAAAAAAAAAAAAAAAAAAAAAAAAAAAAAAAAAAAAAAAAAAAAAAAAAAAAAAAAAAAAAAAAAAAAAAAAAAAAFAAAADwAAAAAAAAAAAAAAAAAAAkUAAAAAQAAABQAAAAUAAAAFAAAAAEAAAAAAAAAZAAAAGQAAAAAAAAAZAAAAGQAAAAVAAAAYAAAAAAAAAAAAAAADwAAACADAAAAAAAAAAAAAAEAAACgMgAAVgcAAKr4//8BAAAAf39/AAEAAABkAAAAAAAAABQAAABAHwAAAAAAACYAAAAAAAAAwOD//wAAAAAmAAAAZAAAABYAAABMAAAAAAAAAAAAAAAEAAAAAAAAAAEAAACZloMKAAAAACgAAAAoAAAAZAAAAGQAAAAAAAAAzMzMAAAAAABQAAAAUAAAAGQAAABkAAAAAAAAABcAAAAUAAAAAAAAAAAAAAD/fwAA/38AAAAAAAAJAAAABAAAAAAAAAAeAAAAaAAAAAAAAAAAAAAAAAAAAAAAAAAAAAAAECcAABAnAAAAAAAAAAAAAAAAAAAAAAAAAAAAAAAAAAAAAAAAAAAAABQAAAAAAAAAwMD/AAAAAABkAAAAMgAAAAAAAABkAAAAAAAAAH9/fwAKAAAAIgAAABgAAAAAAAAAAAAAAAAAAAAAAAAAAAAAAAAAAAAkAAAAJAAAAAAAAAAHAAAAAAAAAAAAAAAAAAAAAAAAAAAAAAAAAAAAf39/ACUAAABYAAAAAAAAAAAAAAAAAAAAAAAAAAAAAAAAAAAAAAAAAAAAAAAAAAAAAAAAAAAAAAA/AAAAAAAAAKCGAQAAAAAAAAAAAAAAAAAMAAAAAQAAAAAAAAAAAAAAAAAAAB8AAABUAAAAAAAABQAAAAEAAAAAAAAAAAAAAAAAAAAAAAAAAAAAAAAAAAAAAAAAAAAAAAJ/f38AAAAAA8zMzADAwP8Af39/AAAAAAAAAAAAAAAAAAAAAAAAAAAAIQAAABgAAAAUAAAAOiwAAOAfAABwNQAAKiYAABAAAAAmAAAACAAAAIGAAAAAAAAA"/>
+                <pr:smNativeData xmlns:pr="smNativeData" xmlns="smNativeData" val="SMDATA_15_r8odaRMAAAAlAAAAZAAAAA0AAAAAAAAAAAAAAAAAAAAAAAAAAAAAAAACAAAAAAAAAAEAAABQAAAAAAAAAAAA4D8AAAAAAADgPwAAAAAAAOA/AAAAAAAA4D8AAAAAAADgPwAAAAAAAOA/AAAAAAAA4D8AAAAAAADgPwAAAAAAAOA/AAAAAAAA4D8CAAAAjAAAAAAAAAAAAAAA40oGDP///wgAAAAAAAAAAAAAAAAAAAAAAAAAAAAAAAAAAAAAZAAAAAEAAABAAAAAAAAAAAAAAAAAAAAAAAAAAAAAAAAAAAAAAAAAAAAAAAAAAAAAAAAAAAAAAAAAAAAAAAAAAAAAAAAAAAAAAAAAAAAAAAAAAAAAAAAAAAAAAAAAAAAAFAAAADwAAAAAAAAAAAAAAAAAAAkUAAAAAQAAABQAAAAUAAAAFAAAAAEAAAAAAAAAZAAAAGQAAAAAAAAAZAAAAGQAAAAVAAAAYAAAAAAAAAAAAAAADwAAACADAAAAAAAAAAAAAAEAAACgMgAAVgcAAKr4//8BAAAAf39/AAEAAABkAAAAAAAAABQAAABAHwAAAAAAACYAAAAAAAAAwOD//wAAAAAmAAAAZAAAABYAAABMAAAAAAAAAAAAAAAEAAAAAAAAAAEAAACZloMKAAAAACgAAAAoAAAAZAAAAGQAAAAAAAAAzMzMAAAAAABQAAAAUAAAAGQAAABkAAAAAAAAABcAAAAUAAAAAAAAAAAAAAD/fwAA/38AAAAAAAAJAAAABAAAAAAAAAAeAAAAaAAAAAAAAAAAAAAAAAAAAAAAAAAAAAAAECcAABAnAAAAAAAAAAAAAAAAAAAAAAAAAAAAAAAAAAAAAAAAAAAAABQAAAAAAAAAwMD/AAAAAABkAAAAMgAAAAAAAABkAAAAAAAAAH9/fwAKAAAAIgAAABgAAAAAAAAAAAAAAAAAAAAAAAAAAAAAAAAAAAAkAAAAJAAAAAAAAAAHAAAAAAAAAAAAAAAAAAAAAAAAAAAAAAAAAAAAf39/ACUAAABYAAAAAAAAAAAAAAAAAAAAAAAAAAAAAAAAAAAAAAAAAAAAAAAAAAAAAAAAAAAAAAA/AAAAAAAAAKCGAQAAAAAAAAAAAAAAAAAMAAAAAQAAAAAAAAAAAAAAAAAAAB8AAABUAAAAAAAABQAAAAEAAAAAAAAAAAAAAAAAAAAAAAAAAAAAAAAAAAAAAAAAAAAAAAJ/f38AAAAAA8zMzADAwP8Af39/AAAAAAAAAAAAAAAAAAAAAAAAAAAAIQAAABgAAAAUAAAAOiwAAOAfAABwNQAAKiYAABAAAAAmAAAACAAAAIGAAAAAAAAA"/>
               </a:ext>
             </a:extLst>
           </p:cNvSpPr>
@@ -1699,7 +1699,7 @@
             <a:picLocks noChangeAspect="1"/>
             <a:extLst>
               <a:ext uri="smNativeData">
-                <pr:smNativeData xmlns:pr="smNativeData" xmlns="smNativeData" val="SMDATA_17_mcIdaRMAAAAlAAAAEQAAAC0AAAAAkAAAAEgAAACQAAAASAAAAAAAAAAAAAAAAAAAAAEAAABQAAAAAAAAAAAA4D8AAAAAAADgPwAAAAAAAOA/AAAAAAAA4D8AAAAAAADgPwAAAAAAAOA/AAAAAAAA4D8AAAAAAADgPwAAAAAAAOA/AAAAAAAA4D8CAAAAjAAAAAAAAAAAAAAA40oGDP///wgAAAAAAAAAAAAAAAAAAAAAAAAAAAAAAAAAAAAAZAAAAAEAAABAAAAAAAAAAAAAAAAAAAAAAAAAAAAAAAAAAAAAAAAAAAAAAAAAAAAAAAAAAAAAAAAAAAAAAAAAAAAAAAAAAAAAAAAAAAAAAAAAAAAAAAAAAAAAAAAAAAAAFAAAADwAAAAAAAAAAAAAAAAAAAkUAAAAAQAAABQAAAAUAAAAFAAAAAEAAAAAAAAAZAAAAGQAAAAAAAAAZAAAAGQAAAAVAAAAYAAAAAAAAAAAAAAADwAAACADAAAAAAAAAAAAAAEAAACgMgAAVgcAAKr4//8BAAAAf39/AAEAAABkAAAAAAAAABQAAABAHwAAAAAAACYAAAAAAAAAwOD//wAAAAAmAAAAZAAAABYAAABMAAAAAAAAAAAAAAAEAAAAAAAAAAEAAACZloMKAAAAACgAAAAoAAAAZAAAAGQAAAAAAAAAzMzMAAAAAABQAAAAUAAAAGQAAABkAAAAAAAAAAcAAAA4AAAAAAAAAAAAAAAAAAAA////AAAAAAAAAAAAAAAAAAAAAAAAAAAAAAAAAAAAAABkAAAAZAAAAAAAAAAjAAAABAAAAGQAAAAXAAAAFAAAAAAAAAAAAAAA/38AAP9/AAAAAAAACQAAAAQAAAAAAAAAHgAAAGgAAAAAAAAAAAAAAAAAAAAAAAAAAAAAABAnAAAQJwAAAAAAAAAAAAAAAAAAAAAAAAAAAAAAAAAAAAAAAAAAAAAUAAAAAAAAAMDA/wAAAAAAZAAAADIAAAAAAAAAZAAAAAAAAAB/f38ACgAAACIAAAAYAAAAAAAAAAAAAAAAAAAAAAAAAAAAAAAAAAAAJAAAACQAAAAAAAAABwAAAAAAAAAAAAAAAAAAAAAAAAAAAAAAAAAAAH9/fwAlAAAAWAAAAAAAAAAAAAAAAAAAAAAAAAAAAAAAAAAAAAAAAAAAAAAAAAAAAAAAAAAAAAAAPwAAAAAAAACghgEAAAAAAAAAAAAAAAAADAAAAAEAAAAAAAAAAAAAAAAAAAAfAAAAVAAAAONKBgX///8BAAAAAAAAAAAAAAAAAAAAAAAAAAAAAAAAAAAAAAAAAAAAAAACf39/AJmWgwPMzMwAwMD/AH9/fwAAAAAAAAAAAAAAAAD///8AAAAAACEAAAAYAAAAFAAAAIUbAADEGAAABSYAABIcAAAQAAAAJgAAAAgAAAD//////////w=="/>
+                <pr:smNativeData xmlns:pr="smNativeData" xmlns="smNativeData" val="SMDATA_17_r8odaRMAAAAlAAAAEQAAAC0AAAAAkAAAAEgAAACQAAAASAAAAAAAAAAAAAAAAAAAAAEAAABQAAAAAAAAAAAA4D8AAAAAAADgPwAAAAAAAOA/AAAAAAAA4D8AAAAAAADgPwAAAAAAAOA/AAAAAAAA4D8AAAAAAADgPwAAAAAAAOA/AAAAAAAA4D8CAAAAjAAAAAAAAAAAAAAA40oGDP///wgAAAAAAAAAAAAAAAAAAAAAAAAAAAAAAAAAAAAAZAAAAAEAAABAAAAAAAAAAAAAAAAAAAAAAAAAAAAAAAAAAAAAAAAAAAAAAAAAAAAAAAAAAAAAAAAAAAAAAAAAAAAAAAAAAAAAAAAAAAAAAAAAAAAAAAAAAAAAAAAAAAAAFAAAADwAAAAAAAAAAAAAAAAAAAkUAAAAAQAAABQAAAAUAAAAFAAAAAEAAAAAAAAAZAAAAGQAAAAAAAAAZAAAAGQAAAAVAAAAYAAAAAAAAAAAAAAADwAAACADAAAAAAAAAAAAAAEAAACgMgAAVgcAAKr4//8BAAAAf39/AAEAAABkAAAAAAAAABQAAABAHwAAAAAAACYAAAAAAAAAwOD//wAAAAAmAAAAZAAAABYAAABMAAAAAAAAAAAAAAAEAAAAAAAAAAEAAACZloMKAAAAACgAAAAoAAAAZAAAAGQAAAAAAAAAzMzMAAAAAABQAAAAUAAAAGQAAABkAAAAAAAAAAcAAAA4AAAAAAAAAAAAAAAAAAAA////AAAAAAAAAAAAAAAAAAAAAAAAAAAAAAAAAAAAAABkAAAAZAAAAAAAAAAjAAAABAAAAGQAAAAXAAAAFAAAAAAAAAAAAAAA/38AAP9/AAAAAAAACQAAAAQAAAAAAAAAHgAAAGgAAAAAAAAAAAAAAAAAAAAAAAAAAAAAABAnAAAQJwAAAAAAAAAAAAAAAAAAAAAAAAAAAAAAAAAAAAAAAAAAAAAUAAAAAAAAAMDA/wAAAAAAZAAAADIAAAAAAAAAZAAAAAAAAAB/f38ACgAAACIAAAAYAAAAAAAAAAAAAAAAAAAAAAAAAAAAAAAAAAAAJAAAACQAAAAAAAAABwAAAAAAAAAAAAAAAAAAAAAAAAAAAAAAAAAAAH9/fwAlAAAAWAAAAAAAAAAAAAAAAAAAAAAAAAAAAAAAAAAAAAAAAAAAAAAAAAAAAAAAAAAAAAAAPwAAAAAAAACghgEAAAAAAAAAAAAAAAAADAAAAAEAAAAAAAAAAAAAAAAAAAAfAAAAVAAAAONKBgX///8BAAAAAAAAAAAAAAAAAAAAAAAAAAAAAAAAAAAAAAAAAAAAAAACf39/AJmWgwPMzMwAwMD/AH9/fwAAAAAAAAAAAAAAAAD///8AAAAAACEAAAAYAAAAFAAAAIUbAADEGAAABSYAABIcAAAQAAAAJgAAAAgAAAD//////////w=="/>
               </a:ext>
             </a:extLst>
           </p:cNvPicPr>
@@ -1768,7 +1768,7 @@
             <a:spLocks noGrp="1" noChangeArrowheads="1"/>
             <a:extLst>
               <a:ext uri="smNativeData">
-                <pr:smNativeData xmlns:pr="smNativeData" xmlns="smNativeData" val="SMDATA_15_mcIdaRMAAAAlAAAAZAAAAE0AAAAAAAAAAAAAAAAAAAAAAAAAAAAAAAAAAAAAAAAAAAEAAABQAAAAAAAAAAAA4D8AAAAAAADgPwAAAAAAAOA/AAAAAAAA4D8AAAAAAADgPwAAAAAAAOA/AAAAAAAA4D8AAAAAAADgPwAAAAAAAOA/AAAAAAAA4D8CAAAAjAAAAAAAAAAAAAAA40oGDP///wgAAAAAAAAAAAAAAAAAAAAAAAAAAAAAAAAAAAAAZAAAAAEAAABAAAAAAAAAAAAAAAAAAAAAAAAAAAAAAAAAAAAAAAAAAAAAAAAAAAAAAAAAAAAAAAAAAAAAAAAAAAAAAAAAAAAAAAAAAAAAAAAAAAAAAAAAAAAAAAAAAAAAFAAAADwAAAAAAAAAAAAAAAAAAAkUAAAAAQAAABQAAAAUAAAAFAAAAAEAAAAAAAAAZAAAAGQAAAAAAAAAZAAAAGQAAAAVAAAAYAAAAAAAAAAAAAAADwAAACADAAAAAAAAAAAAAAEAAACgMgAAVgcAAKr4//8BAAAAf39/AAEAAABkAAAAAAAAABQAAABAHwAAAAAAACYAAAAAAAAAwOD//wAAAAAmAAAAZAAAABYAAABMAAAAAAAAAAAAAAAEAAAAAAAAAAEAAACZloMKAAAAACgAAAAoAAAAZAAAAGQAAAAAAAAAzMzMAAAAAABQAAAAUAAAAGQAAABkAAAAAAAAABcAAAAUAAAAAAAAAAAAAAD/fwAA/38AAAAAAAAJAAAABAAAACO7AAAeAAAAaAAAAAAAAAAAAAAAAAAAAAAAAAAAAAAAECcAABAnAAAAAAAAAAAAAAAAAAAAAAAAAAAAAAAAAAAAAAAAAAAAABQAAAAAAAAAwMD/AAAAAABkAAAAMgAAAAAAAABkAAAAAAAAAH9/fwAKAAAAIgAAABgAAAAAAAAAAAAAAAAAAAAAAAAAAAAAAAAAAAAkAAAAJAAAAAAAAAAHAAAAAAAAAAAAAAAAAAAAAAAAAAAAAAAAAAAAf39/ACUAAABYAAAAAAAAAAAAAAAAAAAAAAAAAAAAAAAAAAAAAAAAAAAAAAAAAAAAAAAAAAAAAAA/AAAAAAAAAKCGAQAAAAAAAAAAAAAAAAAMAAAAAQAAAAAAAAAAAAAAAAAAAB8AAABUAAAAAAAABQAAAAEAAAAAAAAAAAAAAAAAAAAAAAAAAAAAAAAAAAAAAAAAAAAAAAJ/f38AAAAAA8zMzADAwP8Af39/AAAAAAAAAAAAAAAAAAAAAAAAAAAAIQAAABgAAAAUAAAA0AIAAKwXAADUHAAAUicAABAgAAAmAAAACAAAAAGgAAAAAAAA"/>
+                <pr:smNativeData xmlns:pr="smNativeData" xmlns="smNativeData" val="SMDATA_15_r8odaRMAAAAlAAAAZAAAAE0AAAAAAAAAAAAAAAAAAAAAAAAAAAAAAAAAAAAAAAAAAAEAAABQAAAAAAAAAAAA4D8AAAAAAADgPwAAAAAAAOA/AAAAAAAA4D8AAAAAAADgPwAAAAAAAOA/AAAAAAAA4D8AAAAAAADgPwAAAAAAAOA/AAAAAAAA4D8CAAAAjAAAAAAAAAAAAAAA40oGDP///wgAAAAAAAAAAAAAAAAAAAAAAAAAAAAAAAAAAAAAZAAAAAEAAABAAAAAAAAAAAAAAAAAAAAAAAAAAAAAAAAAAAAAAAAAAAAAAAAAAAAAAAAAAAAAAAAAAAAAAAAAAAAAAAAAAAAAAAAAAAAAAAAAAAAAAAAAAAAAAAAAAAAAFAAAADwAAAAAAAAAAAAAAAAAAAkUAAAAAQAAABQAAAAUAAAAFAAAAAEAAAAAAAAAZAAAAGQAAAAAAAAAZAAAAGQAAAAVAAAAYAAAAAAAAAAAAAAADwAAACADAAAAAAAAAAAAAAEAAACgMgAAVgcAAKr4//8BAAAAf39/AAEAAABkAAAAAAAAABQAAABAHwAAAAAAACYAAAAAAAAAwOD//wAAAAAmAAAAZAAAABYAAABMAAAAAAAAAAAAAAAEAAAAAAAAAAEAAACZloMKAAAAACgAAAAoAAAAZAAAAGQAAAAAAAAAzMzMAAAAAABQAAAAUAAAAGQAAABkAAAAAAAAABcAAAAUAAAAAAAAAAAAAAD/fwAA/38AAAAAAAAJAAAABAAAACO7AAAeAAAAaAAAAAAAAAAAAAAAAAAAAAAAAAAAAAAAECcAABAnAAAAAAAAAAAAAAAAAAAAAAAAAAAAAAAAAAAAAAAAAAAAABQAAAAAAAAAwMD/AAAAAABkAAAAMgAAAAAAAABkAAAAAAAAAH9/fwAKAAAAIgAAABgAAAAAAAAAAAAAAAAAAAAAAAAAAAAAAAAAAAAkAAAAJAAAAAAAAAAHAAAAAAAAAAAAAAAAAAAAAAAAAAAAAAAAAAAAf39/ACUAAABYAAAAAAAAAAAAAAAAAAAAAAAAAAAAAAAAAAAAAAAAAAAAAAAAAAAAAAAAAAAAAAA/AAAAAAAAAKCGAQAAAAAAAAAAAAAAAAAMAAAAAQAAAAAAAAAAAAAAAAAAAB8AAABUAAAAAAAABQAAAAEAAAAAAAAAAAAAAAAAAAAAAAAAAAAAAAAAAAAAAAAAAAAAAAJ/f38AAAAAA8zMzADAwP8Af39/AAAAAAAAAAAAAAAAAAAAAAAAAAAAIQAAABgAAAAUAAAA0AIAAKwXAADUHAAAUicAABAgAAAmAAAACAAAAAGgAAAAAAAA"/>
               </a:ext>
             </a:extLst>
           </p:cNvSpPr>
@@ -1862,7 +1862,7 @@
           <p:cNvGrpSpPr>
             <a:extLst>
               <a:ext uri="smNativeData">
-                <pr:smNativeData xmlns:pr="smNativeData" xmlns="smNativeData" val="SMDATA_6_mcIdaRMAAAAlAAAAAQAAAA8BAAAAkAAAAEgAAACQAAAASAAAAAAAAAAAAAAAAAAAABcAAAAUAAAAAAAAAAAAAAD/fwAA/38AAAAAAAAJAAAABAAAAOA+2yIfAAAAVAAAAAAAAAAAAAAAAAAAAAAAAAAAAAAAAAAAAAAAAAAAAAAAAAAAAAAAAAAAAAAAAAAAAAAAAAAAAAAAAAAAAAAAAAAAAAAAAAAAAAAAAAAAAAAAAAAAACEAAAAYAAAAFAAAAAAAAAAAAAAAQDgAADAqAAAQAAAAJgAAAAgAAAD/////AAAAAA=="/>
+                <pr:smNativeData xmlns:pr="smNativeData" xmlns="smNativeData" val="SMDATA_6_r8odaRMAAAAlAAAAAQAAAA8BAAAAkAAAAEgAAACQAAAASAAAAAAAAAAAAAAAAAAAABcAAAAUAAAAAAAAAAAAAAD/fwAA/38AAAAAAAAJAAAABAAAAOA+2yIfAAAAVAAAAAAAAAAAAAAAAAAAAAAAAAAAAAAAAAAAAAAAAAAAAAAAAAAAAAAAAAAAAAAAAAAAAAAAAAAAAAAAAAAAAAAAAAAAAAAAAAAAAAAAAAAAAAAAAAAAACEAAAAYAAAAFAAAAAAAAAAAAAAAQDgAADAqAAAQAAAAJgAAAAgAAAD/////AAAAAA=="/>
               </a:ext>
             </a:extLst>
           </p:cNvGrpSpPr>
@@ -1882,7 +1882,7 @@
             <p:cNvSpPr>
               <a:extLst>
                 <a:ext uri="smNativeData">
-                  <pr:smNativeData xmlns:pr="smNativeData" xmlns="smNativeData" val="SMDATA_15_mcIdaRMAAAAlAAAACgAAAA0AAAAAkAAAAEgAAACQAAAASAAAAAAAAAAAAAAAAAAAAAEAAABQAAAAAAAAAAAA4D8AAAAAAADgPwAAAAAAAOA/AAAAAAAA4D8AAAAAAADgPwAAAAAAAOA/AAAAAAAA4D8AAAAAAADgPwAAAAAAAOA/AAAAAAAA4D8CAAAAjAAAAAAAAAAAAAAA////AP///wgAAAAAAAAAAAAAAAAAAAAAAAAAAAAAAAAAAAAAeAAAAAEAAABAAAAAAAAAAAAAAABaAAAAAAAAAAAAAAAAAAAAAAAAAAAAAAAAAAAAAAAAAAAAAAAAAAAAAAAAAAAAAAAAAAAAAAAAAAAAAAAAAAAAAAAAAAAAAAAAAAAAFAAAADwAAAABAAAAAgAAAP8AZgAPAAAAAQAAABQAAAAUAAAAFAAAAAEAAAAAAAAAZAAAAGQAAAAAAAAAZAAAAGQAAAAVAAAAYAAAAAAAAAAAAAAADwAAACADAAAAAAAAAAAAAAEAAACgMgAAVgcAAKr4//8BAAAAf39/AAEAAABkAAAAAAAAABQAAABAHwAAAAAAACYAAAAAAAAAwOD//wAAAAAmAAAAZAAAABYAAABMAAAAAAAAAAAAAAAEAAAAAAAAAAEAAACZloMKAAAAACgAAAAoAAAAZAAAAGQAAAAAAAAAzMzMAAAAAABQAAAAUAAAAGQAAABkAAAAAAAAABcAAAAUAAAAAAAAAAAAAAD/fwAA/38AAAAAAAAJAAAABAAAAAAAAAAeAAAAaAAAAAAAAAAAAAAAAAAAAAAAAAAAAAAAECcAABAnAAAAAAAAAAAAAAAAAAAAAAAAAAAAAAAAAAAAAAAAAAAAABQAAAAAAAAAwMD/AAAAAABkAAAAMgAAAAAAAABkAAAAAAAAAH9/fwAKAAAAIgAAABgAAAAAAAAAAAAAAAAAAAAAAAAAAAAAAAAAAAAkAAAAJAAAAAAAAAAHAAAAAAAAAAAAAAAAAAAAAAAAAAAAAAAAAAAAf39/ACUAAABYAAAAAAAAAAAAAAAAAAAAAAAAAAAAAAAAAAAAAAAAAAAAAAAAAAAAAAAAAAAAAAA/AAAAAAAAAKCGAQAAAAAAAAAAAAAAAAAMAAAAAQAAAAAAAAAAAAAAAAAAAB8AAABUAAAA////AAAAAAEAAAAAAAAAAAAAAAAAAAAAAAAAAAAAAAAAAAAAAAAAAP8AZgB/f38AAAAAA8zMzADAwP8Af39/AAAAAAAAAAAAAAAAAAAAAAAAAAAAIQAAABgAAAAUAAAA0AIAAAAAAADQAgAAMCoAAAAAAAAmAAAACAAAAP//////////"/>
+                  <pr:smNativeData xmlns:pr="smNativeData" xmlns="smNativeData" val="SMDATA_15_r8odaRMAAAAlAAAACgAAAA0AAAAAkAAAAEgAAACQAAAASAAAAAAAAAAAAAAAAAAAAAEAAABQAAAAAAAAAAAA4D8AAAAAAADgPwAAAAAAAOA/AAAAAAAA4D8AAAAAAADgPwAAAAAAAOA/AAAAAAAA4D8AAAAAAADgPwAAAAAAAOA/AAAAAAAA4D8CAAAAjAAAAAAAAAAAAAAA////AP///wgAAAAAAAAAAAAAAAAAAAAAAAAAAAAAAAAAAAAAeAAAAAEAAABAAAAAAAAAAAAAAABaAAAAAAAAAAAAAAAAAAAAAAAAAAAAAAAAAAAAAAAAAAAAAAAAAAAAAAAAAAAAAAAAAAAAAAAAAAAAAAAAAAAAAAAAAAAAAAAAAAAAFAAAADwAAAABAAAAAgAAAP8AZgAPAAAAAQAAABQAAAAUAAAAFAAAAAEAAAAAAAAAZAAAAGQAAAAAAAAAZAAAAGQAAAAVAAAAYAAAAAAAAAAAAAAADwAAACADAAAAAAAAAAAAAAEAAACgMgAAVgcAAKr4//8BAAAAf39/AAEAAABkAAAAAAAAABQAAABAHwAAAAAAACYAAAAAAAAAwOD//wAAAAAmAAAAZAAAABYAAABMAAAAAAAAAAAAAAAEAAAAAAAAAAEAAACZloMKAAAAACgAAAAoAAAAZAAAAGQAAAAAAAAAzMzMAAAAAABQAAAAUAAAAGQAAABkAAAAAAAAABcAAAAUAAAAAAAAAAAAAAD/fwAA/38AAAAAAAAJAAAABAAAAAAAAAAeAAAAaAAAAAAAAAAAAAAAAAAAAAAAAAAAAAAAECcAABAnAAAAAAAAAAAAAAAAAAAAAAAAAAAAAAAAAAAAAAAAAAAAABQAAAAAAAAAwMD/AAAAAABkAAAAMgAAAAAAAABkAAAAAAAAAH9/fwAKAAAAIgAAABgAAAAAAAAAAAAAAAAAAAAAAAAAAAAAAAAAAAAkAAAAJAAAAAAAAAAHAAAAAAAAAAAAAAAAAAAAAAAAAAAAAAAAAAAAf39/ACUAAABYAAAAAAAAAAAAAAAAAAAAAAAAAAAAAAAAAAAAAAAAAAAAAAAAAAAAAAAAAAAAAAA/AAAAAAAAAKCGAQAAAAAAAAAAAAAAAAAMAAAAAQAAAAAAAAAAAAAAAAAAAB8AAABUAAAA////AAAAAAEAAAAAAAAAAAAAAAAAAAAAAAAAAAAAAAAAAAAAAAAAAP8AZgB/f38AAAAAA8zMzADAwP8Af39/AAAAAAAAAAAAAAAAAAAAAAAAAAAAIQAAABgAAAAUAAAA0AIAAAAAAADQAgAAMCoAAAAAAAAmAAAACAAAAP//////////"/>
                 </a:ext>
               </a:extLst>
             </p:cNvSpPr>
@@ -1914,7 +1914,7 @@
             <p:cNvSpPr>
               <a:extLst>
                 <a:ext uri="smNativeData">
-                  <pr:smNativeData xmlns:pr="smNativeData" xmlns="smNativeData" val="SMDATA_15_mcIdaRMAAAAlAAAACgAAAA0AAAAAkAAAAEgAAACQAAAASAAAAAAAAAAAAAAAAAAAAAEAAABQAAAAAAAAAAAA4D8AAAAAAADgPwAAAAAAAOA/AAAAAAAA4D8AAAAAAADgPwAAAAAAAOA/AAAAAAAA4D8AAAAAAADgPwAAAAAAAOA/AAAAAAAA4D8CAAAAjAAAAAAAAAAAAAAA////AP///wgAAAAAAAAAAAAAAAAAAAAAAAAAAAAAAAAAAAAAeAAAAAEAAABAAAAAAAAAAAAAAABaAAAAAAAAAAAAAAAAAAAAAAAAAAAAAAAAAAAAAAAAAAAAAAAAAAAAAAAAAAAAAAAAAAAAAAAAAAAAAAAAAAAAAAAAAAAAAAAAAAAAFAAAADwAAAABAAAAAgAAAP8AZgAPAAAAAQAAABQAAAAUAAAAFAAAAAEAAAAAAAAAZAAAAGQAAAAAAAAAZAAAAGQAAAAVAAAAYAAAAAAAAAAAAAAADwAAACADAAAAAAAAAAAAAAEAAACgMgAAVgcAAKr4//8BAAAAf39/AAEAAABkAAAAAAAAABQAAABAHwAAAAAAACYAAAAAAAAAwOD//wAAAAAmAAAAZAAAABYAAABMAAAAAAAAAAAAAAAEAAAAAAAAAAEAAACZloMKAAAAACgAAAAoAAAAZAAAAGQAAAAAAAAAzMzMAAAAAABQAAAAUAAAAGQAAABkAAAAAAAAABcAAAAUAAAAAAAAAAAAAAD/fwAA/38AAAAAAAAJAAAABAAAAFthevEeAAAAaAAAAAAAAAAAAAAAAAAAAAAAAAAAAAAAECcAABAnAAAAAAAAAAAAAAAAAAAAAAAAAAAAAAAAAAAAAAAAAAAAABQAAAAAAAAAwMD/AAAAAABkAAAAMgAAAAAAAABkAAAAAAAAAH9/fwAKAAAAIgAAABgAAAAAAAAAAAAAAAAAAAAAAAAAAAAAAAAAAAAkAAAAJAAAAAAAAAAHAAAAAAAAAAAAAAAAAAAAAAAAAAAAAAAAAAAAf39/ACUAAABYAAAAAAAAAAAAAAAAAAAAAAAAAAAAAAAAAAAAAAAAAAAAAAAAAAAAAAAAAAAAAAA/AAAAAAAAAKCGAQAAAAAAAAAAAAAAAAAMAAAAAQAAAAAAAAAAAAAAAAAAAB8AAABUAAAA////AAAAAAEAAAAAAAAAAAAAAAAAAAAAAAAAAAAAAAAAAAAAAAAAAP8AZgB/f38AAAAAA8zMzADAwP8Af39/AAAAAAAAAAAAAAAAAAAAAAAAAAAAIQAAABgAAAAUAAAAcDUAAAAAAABwNQAAMCoAAAAAAAAmAAAACAAAAP//////////"/>
+                  <pr:smNativeData xmlns:pr="smNativeData" xmlns="smNativeData" val="SMDATA_15_r8odaRMAAAAlAAAACgAAAA0AAAAAkAAAAEgAAACQAAAASAAAAAAAAAAAAAAAAAAAAAEAAABQAAAAAAAAAAAA4D8AAAAAAADgPwAAAAAAAOA/AAAAAAAA4D8AAAAAAADgPwAAAAAAAOA/AAAAAAAA4D8AAAAAAADgPwAAAAAAAOA/AAAAAAAA4D8CAAAAjAAAAAAAAAAAAAAA////AP///wgAAAAAAAAAAAAAAAAAAAAAAAAAAAAAAAAAAAAAeAAAAAEAAABAAAAAAAAAAAAAAABaAAAAAAAAAAAAAAAAAAAAAAAAAAAAAAAAAAAAAAAAAAAAAAAAAAAAAAAAAAAAAAAAAAAAAAAAAAAAAAAAAAAAAAAAAAAAAAAAAAAAFAAAADwAAAABAAAAAgAAAP8AZgAPAAAAAQAAABQAAAAUAAAAFAAAAAEAAAAAAAAAZAAAAGQAAAAAAAAAZAAAAGQAAAAVAAAAYAAAAAAAAAAAAAAADwAAACADAAAAAAAAAAAAAAEAAACgMgAAVgcAAKr4//8BAAAAf39/AAEAAABkAAAAAAAAABQAAABAHwAAAAAAACYAAAAAAAAAwOD//wAAAAAmAAAAZAAAABYAAABMAAAAAAAAAAAAAAAEAAAAAAAAAAEAAACZloMKAAAAACgAAAAoAAAAZAAAAGQAAAAAAAAAzMzMAAAAAABQAAAAUAAAAGQAAABkAAAAAAAAABcAAAAUAAAAAAAAAAAAAAD/fwAA/38AAAAAAAAJAAAABAAAAFthevEeAAAAaAAAAAAAAAAAAAAAAAAAAAAAAAAAAAAAECcAABAnAAAAAAAAAAAAAAAAAAAAAAAAAAAAAAAAAAAAAAAAAAAAABQAAAAAAAAAwMD/AAAAAABkAAAAMgAAAAAAAABkAAAAAAAAAH9/fwAKAAAAIgAAABgAAAAAAAAAAAAAAAAAAAAAAAAAAAAAAAAAAAAkAAAAJAAAAAAAAAAHAAAAAAAAAAAAAAAAAAAAAAAAAAAAAAAAAAAAf39/ACUAAABYAAAAAAAAAAAAAAAAAAAAAAAAAAAAAAAAAAAAAAAAAAAAAAAAAAAAAAAAAAAAAAA/AAAAAAAAAKCGAQAAAAAAAAAAAAAAAAAMAAAAAQAAAAAAAAAAAAAAAAAAAB8AAABUAAAA////AAAAAAEAAAAAAAAAAAAAAAAAAAAAAAAAAAAAAAAAAAAAAAAAAP8AZgB/f38AAAAAA8zMzADAwP8Af39/AAAAAAAAAAAAAAAAAAAAAAAAAAAAIQAAABgAAAAUAAAAcDUAAAAAAABwNQAAMCoAAAAAAAAmAAAACAAAAP//////////"/>
                 </a:ext>
               </a:extLst>
             </p:cNvSpPr>
@@ -1946,7 +1946,7 @@
             <p:cNvSpPr>
               <a:extLst>
                 <a:ext uri="smNativeData">
-                  <pr:smNativeData xmlns:pr="smNativeData" xmlns="smNativeData" val="SMDATA_15_mcIdaRMAAAAlAAAACgAAAA0AAAAAkAAAAEgAAACQAAAASAAAAAAAAAAAAAAAAAAAAAEAAABQAAAAAAAAAAAA4D8AAAAAAADgPwAAAAAAAOA/AAAAAAAA4D8AAAAAAADgPwAAAAAAAOA/AAAAAAAA4D8AAAAAAADgPwAAAAAAAOA/AAAAAAAA4D8CAAAAjAAAAAAAAAAAAAAA////AP///wgAAAAAAAAAAAAAAAAAAAAAAAAAAAAAAAAAAAAAeAAAAAEAAABAAAAAAAAAAAAAAABaAAAAAAAAAAAAAAAAAAAAAAAAAAAAAAAAAAAAAAAAAAAAAAAAAAAAAAAAAAAAAAAAAAAAAAAAAAAAAAAAAAAAAAAAAAAAAAAAAAAAFAAAADwAAAABAAAAAgAAAP8AZgAPAAAAAQAAABQAAAAUAAAAFAAAAAEAAAAAAAAAZAAAAGQAAAAAAAAAZAAAAGQAAAAVAAAAYAAAAAAAAAAAAAAADwAAACADAAAAAAAAAAAAAAEAAACgMgAAVgcAAKr4//8BAAAAf39/AAEAAABkAAAAAAAAABQAAABAHwAAAAAAACYAAAAAAAAAwOD//wAAAAAmAAAAZAAAABYAAABMAAAAAAAAAAAAAAAEAAAAAAAAAAEAAACZloMKAAAAACgAAAAoAAAAZAAAAGQAAAAAAAAAzMzMAAAAAABQAAAAUAAAAGQAAABkAAAAAAAAABcAAAAUAAAAAAAAAAAAAAD/fwAA/38AAAAAAAAJAAAABAAAAA8AAAAeAAAAaAAAAAAAAAAAAAAAAAAAAAAAAAAAAAAAECcAABAnAAAAAAAAAAAAAAAAAAAAAAAAAAAAAAAAAAAAAAAAAAAAABQAAAAAAAAAwMD/AAAAAABkAAAAMgAAAAAAAABkAAAAAAAAAH9/fwAKAAAAIgAAABgAAAAAAAAAAAAAAAAAAAAAAAAAAAAAAAAAAAAkAAAAJAAAAAAAAAAHAAAAAAAAAAAAAAAAAAAAAAAAAAAAAAAAAAAAf39/ACUAAABYAAAAAAAAAAAAAAAAAAAAAAAAAAAAAAAAAAAAAAAAAAAAAAAAAAAAAAAAAAAAAAA/AAAAAAAAAKCGAQAAAAAAAAAAAAAAAAAMAAAAAQAAAAAAAAAAAAAAAAAAAB8AAABUAAAA////AAAAAAEAAAAAAAAAAAAAAAAAAAAAAAAAAAAAAAAAAAAAAAAAAP8AZgB/f38AAAAAA8zMzADAwP8Af39/AAAAAAAAAAAAAAAAAAAAAAAAAAAAIQAAABgAAAAUAAAA2gYAAAAAAADaBgAAMCoAAAAAAAAmAAAACAAAAP//////////"/>
+                  <pr:smNativeData xmlns:pr="smNativeData" xmlns="smNativeData" val="SMDATA_15_r8odaRMAAAAlAAAACgAAAA0AAAAAkAAAAEgAAACQAAAASAAAAAAAAAAAAAAAAAAAAAEAAABQAAAAAAAAAAAA4D8AAAAAAADgPwAAAAAAAOA/AAAAAAAA4D8AAAAAAADgPwAAAAAAAOA/AAAAAAAA4D8AAAAAAADgPwAAAAAAAOA/AAAAAAAA4D8CAAAAjAAAAAAAAAAAAAAA////AP///wgAAAAAAAAAAAAAAAAAAAAAAAAAAAAAAAAAAAAAeAAAAAEAAABAAAAAAAAAAAAAAABaAAAAAAAAAAAAAAAAAAAAAAAAAAAAAAAAAAAAAAAAAAAAAAAAAAAAAAAAAAAAAAAAAAAAAAAAAAAAAAAAAAAAAAAAAAAAAAAAAAAAFAAAADwAAAABAAAAAgAAAP8AZgAPAAAAAQAAABQAAAAUAAAAFAAAAAEAAAAAAAAAZAAAAGQAAAAAAAAAZAAAAGQAAAAVAAAAYAAAAAAAAAAAAAAADwAAACADAAAAAAAAAAAAAAEAAACgMgAAVgcAAKr4//8BAAAAf39/AAEAAABkAAAAAAAAABQAAABAHwAAAAAAACYAAAAAAAAAwOD//wAAAAAmAAAAZAAAABYAAABMAAAAAAAAAAAAAAAEAAAAAAAAAAEAAACZloMKAAAAACgAAAAoAAAAZAAAAGQAAAAAAAAAzMzMAAAAAABQAAAAUAAAAGQAAABkAAAAAAAAABcAAAAUAAAAAAAAAAAAAAD/fwAA/38AAAAAAAAJAAAABAAAAA8AAAAeAAAAaAAAAAAAAAAAAAAAAAAAAAAAAAAAAAAAECcAABAnAAAAAAAAAAAAAAAAAAAAAAAAAAAAAAAAAAAAAAAAAAAAABQAAAAAAAAAwMD/AAAAAABkAAAAMgAAAAAAAABkAAAAAAAAAH9/fwAKAAAAIgAAABgAAAAAAAAAAAAAAAAAAAAAAAAAAAAAAAAAAAAkAAAAJAAAAAAAAAAHAAAAAAAAAAAAAAAAAAAAAAAAAAAAAAAAAAAAf39/ACUAAABYAAAAAAAAAAAAAAAAAAAAAAAAAAAAAAAAAAAAAAAAAAAAAAAAAAAAAAAAAAAAAAA/AAAAAAAAAKCGAQAAAAAAAAAAAAAAAAAMAAAAAQAAAAAAAAAAAAAAAAAAAB8AAABUAAAA////AAAAAAEAAAAAAAAAAAAAAAAAAAAAAAAAAAAAAAAAAAAAAAAAAP8AZgB/f38AAAAAA8zMzADAwP8Af39/AAAAAAAAAAAAAAAAAAAAAAAAAAAAIQAAABgAAAAUAAAA2gYAAAAAAADaBgAAMCoAAAAAAAAmAAAACAAAAP//////////"/>
                 </a:ext>
               </a:extLst>
             </p:cNvSpPr>
@@ -1978,7 +1978,7 @@
             <p:cNvSpPr>
               <a:extLst>
                 <a:ext uri="smNativeData">
-                  <pr:smNativeData xmlns:pr="smNativeData" xmlns="smNativeData" val="SMDATA_15_mcIdaRMAAAAlAAAACgAAAA0AAAAAkAAAAEgAAACQAAAASAAAAAAAAAAAAAAAAAAAAAEAAABQAAAAAAAAAAAA4D8AAAAAAADgPwAAAAAAAOA/AAAAAAAA4D8AAAAAAADgPwAAAAAAAOA/AAAAAAAA4D8AAAAAAADgPwAAAAAAAOA/AAAAAAAA4D8CAAAAjAAAAAAAAAAAAAAA////AP///wgAAAAAAAAAAAAAAAAAAAAAAAAAAAAAAAAAAAAAeAAAAAEAAABAAAAAAAAAAAAAAABaAAAAAAAAAAAAAAAAAAAAAAAAAAAAAAAAAAAAAAAAAAAAAAAAAAAAAAAAAAAAAAAAAAAAAAAAAAAAAAAAAAAAAAAAAAAAAAAAAAAAFAAAADwAAAABAAAAAgAAAP8AZgAPAAAAAQAAABQAAAAUAAAAFAAAAAEAAAAAAAAAZAAAAGQAAAAAAAAAZAAAAGQAAAAVAAAAYAAAAAAAAAAAAAAADwAAACADAAAAAAAAAAAAAAEAAACgMgAAVgcAAKr4//8BAAAAf39/AAEAAABkAAAAAAAAABQAAABAHwAAAAAAACYAAAAAAAAAwOD//wAAAAAmAAAAZAAAABYAAABMAAAAAAAAAAAAAAAEAAAAAAAAAAEAAACZloMKAAAAACgAAAAoAAAAZAAAAGQAAAAAAAAAzMzMAAAAAABQAAAAUAAAAGQAAABkAAAAAAAAABcAAAAUAAAAAAAAAAAAAAD/fwAA/38AAAAAAAAJAAAABAAAAAAAAAAeAAAAaAAAAAAAAAAAAAAAAAAAAAAAAAAAAAAAECcAABAnAAAAAAAAAAAAAAAAAAAAAAAAAAAAAAAAAAAAAAAAAAAAABQAAAAAAAAAwMD/AAAAAABkAAAAMgAAAAAAAABkAAAAAAAAAH9/fwAKAAAAIgAAABgAAAAAAAAAAAAAAAAAAAAAAAAAAAAAAAAAAAAkAAAAJAAAAAAAAAAHAAAAAAAAAAAAAAAAAAAAAAAAAAAAAAAAAAAAf39/ACUAAABYAAAAAAAAAAAAAAAAAAAAAAAAAAAAAAAAAAAAAAAAAAAAAAAAAAAAAAAAAAAAAAA/AAAAAAAAAKCGAQAAAAAAAAAAAAAAAAAMAAAAAQAAAAAAAAAAAAAAAAAAAB8AAABUAAAA////AAAAAAEAAAAAAAAAAAAAAAAAAAAAAAAAAAAAAAAAAAAAAAAAAP8AZgB/f38AAAAAA8zMzADAwP8Af39/AAAAAAAAAAAAAAAAAAAAAAAAAAAAIQAAABgAAAAUAAAAAAgAAAAAAAAACAAAMCoAAAAAAAAmAAAACAAAAP//////////"/>
+                  <pr:smNativeData xmlns:pr="smNativeData" xmlns="smNativeData" val="SMDATA_15_r8odaRMAAAAlAAAACgAAAA0AAAAAkAAAAEgAAACQAAAASAAAAAAAAAAAAAAAAAAAAAEAAABQAAAAAAAAAAAA4D8AAAAAAADgPwAAAAAAAOA/AAAAAAAA4D8AAAAAAADgPwAAAAAAAOA/AAAAAAAA4D8AAAAAAADgPwAAAAAAAOA/AAAAAAAA4D8CAAAAjAAAAAAAAAAAAAAA////AP///wgAAAAAAAAAAAAAAAAAAAAAAAAAAAAAAAAAAAAAeAAAAAEAAABAAAAAAAAAAAAAAABaAAAAAAAAAAAAAAAAAAAAAAAAAAAAAAAAAAAAAAAAAAAAAAAAAAAAAAAAAAAAAAAAAAAAAAAAAAAAAAAAAAAAAAAAAAAAAAAAAAAAFAAAADwAAAABAAAAAgAAAP8AZgAPAAAAAQAAABQAAAAUAAAAFAAAAAEAAAAAAAAAZAAAAGQAAAAAAAAAZAAAAGQAAAAVAAAAYAAAAAAAAAAAAAAADwAAACADAAAAAAAAAAAAAAEAAACgMgAAVgcAAKr4//8BAAAAf39/AAEAAABkAAAAAAAAABQAAABAHwAAAAAAACYAAAAAAAAAwOD//wAAAAAmAAAAZAAAABYAAABMAAAAAAAAAAAAAAAEAAAAAAAAAAEAAACZloMKAAAAACgAAAAoAAAAZAAAAGQAAAAAAAAAzMzMAAAAAABQAAAAUAAAAGQAAABkAAAAAAAAABcAAAAUAAAAAAAAAAAAAAD/fwAA/38AAAAAAAAJAAAABAAAAAAAAAAeAAAAaAAAAAAAAAAAAAAAAAAAAAAAAAAAAAAAECcAABAnAAAAAAAAAAAAAAAAAAAAAAAAAAAAAAAAAAAAAAAAAAAAABQAAAAAAAAAwMD/AAAAAABkAAAAMgAAAAAAAABkAAAAAAAAAH9/fwAKAAAAIgAAABgAAAAAAAAAAAAAAAAAAAAAAAAAAAAAAAAAAAAkAAAAJAAAAAAAAAAHAAAAAAAAAAAAAAAAAAAAAAAAAAAAAAAAAAAAf39/ACUAAABYAAAAAAAAAAAAAAAAAAAAAAAAAAAAAAAAAAAAAAAAAAAAAAAAAAAAAAAAAAAAAAA/AAAAAAAAAKCGAQAAAAAAAAAAAAAAAAAMAAAAAQAAAAAAAAAAAAAAAAAAAB8AAABUAAAA////AAAAAAEAAAAAAAAAAAAAAAAAAAAAAAAAAAAAAAAAAAAAAAAAAP8AZgB/f38AAAAAA8zMzADAwP8Af39/AAAAAAAAAAAAAAAAAAAAAAAAAAAAIQAAABgAAAAUAAAAAAgAAAAAAAAACAAAMCoAAAAAAAAmAAAACAAAAP//////////"/>
                 </a:ext>
               </a:extLst>
             </p:cNvSpPr>
@@ -2010,7 +2010,7 @@
             <p:cNvSpPr>
               <a:extLst>
                 <a:ext uri="smNativeData">
-                  <pr:smNativeData xmlns:pr="smNativeData" xmlns="smNativeData" val="SMDATA_15_mcIdaRMAAAAlAAAACgAAAA0AAAAAkAAAAEgAAACQAAAASAAAAAAAAAAAAAAAAAAAAAEAAABQAAAAAAAAAAAA4D8AAAAAAADgPwAAAAAAAOA/AAAAAAAA4D8AAAAAAADgPwAAAAAAAOA/AAAAAAAA4D8AAAAAAADgPwAAAAAAAOA/AAAAAAAA4D8CAAAAjAAAAAAAAAAAAAAA////AP///wgAAAAAAAAAAAAAAAAAAAAAAAAAAAAAAAAAAAAAeAAAAAEAAABAAAAAAAAAAAAAAABaAAAAAAAAAAAAAAAAAAAAAAAAAAAAAAAAAAAAAAAAAAAAAAAAAAAAAAAAAAAAAAAAAAAAAAAAAAAAAAAAAAAAAAAAAAAAAAAAAAAAFAAAADwAAAABAAAAAgAAAP8AZgAPAAAAAQAAABQAAAAUAAAAFAAAAAEAAAAAAAAAZAAAAGQAAAAAAAAAZAAAAGQAAAAVAAAAYAAAAAAAAAAAAAAADwAAACADAAAAAAAAAAAAAAEAAACgMgAAVgcAAKr4//8BAAAAf39/AAEAAABkAAAAAAAAABQAAABAHwAAAAAAACYAAAAAAAAAwOD//wAAAAAmAAAAZAAAABYAAABMAAAAAAAAAAAAAAAEAAAAAAAAAAEAAACZloMKAAAAACgAAAAoAAAAZAAAAGQAAAAAAAAAzMzMAAAAAABQAAAAUAAAAGQAAABkAAAAAAAAABcAAAAUAAAAAAAAAAAAAAD/fwAA/38AAAAAAAAJAAAABAAAAAAAAAAeAAAAaAAAAAAAAAAAAAAAAAAAAAAAAAAAAAAAECcAABAnAAAAAAAAAAAAAAAAAAAAAAAAAAAAAAAAAAAAAAAAAAAAABQAAAAAAAAAwMD/AAAAAABkAAAAMgAAAAAAAABkAAAAAAAAAH9/fwAKAAAAIgAAABgAAAAAAAAAAAAAAAAAAAAAAAAAAAAAAAAAAAAkAAAAJAAAAAAAAAAHAAAAAAAAAAAAAAAAAAAAAAAAAAAAAAAAAAAAf39/ACUAAABYAAAAAAAAAAAAAAAAAAAAAAAAAAAAAAAAAAAAAAAAAAAAAAAAAAAAAAAAAAAAAAA/AAAAAAAAAKCGAQAAAAAAAAAAAAAAAAAMAAAAAQAAAAAAAAAAAAAAAAAAAB8AAABUAAAA////AAAAAAEAAAAAAAAAAAAAAAAAAAAAAAAAAAAAAAAAAAAAAAAAAP8AZgB/f38AAAAAA8zMzADAwP8Af39/AAAAAAAAAAAAAAAAAAAAAAAAAAAAIQAAABgAAAAUAAAABgwAAAAAAAAGDAAAMCoAAAAAAAAmAAAACAAAAP//////////"/>
+                  <pr:smNativeData xmlns:pr="smNativeData" xmlns="smNativeData" val="SMDATA_15_r8odaRMAAAAlAAAACgAAAA0AAAAAkAAAAEgAAACQAAAASAAAAAAAAAAAAAAAAAAAAAEAAABQAAAAAAAAAAAA4D8AAAAAAADgPwAAAAAAAOA/AAAAAAAA4D8AAAAAAADgPwAAAAAAAOA/AAAAAAAA4D8AAAAAAADgPwAAAAAAAOA/AAAAAAAA4D8CAAAAjAAAAAAAAAAAAAAA////AP///wgAAAAAAAAAAAAAAAAAAAAAAAAAAAAAAAAAAAAAeAAAAAEAAABAAAAAAAAAAAAAAABaAAAAAAAAAAAAAAAAAAAAAAAAAAAAAAAAAAAAAAAAAAAAAAAAAAAAAAAAAAAAAAAAAAAAAAAAAAAAAAAAAAAAAAAAAAAAAAAAAAAAFAAAADwAAAABAAAAAgAAAP8AZgAPAAAAAQAAABQAAAAUAAAAFAAAAAEAAAAAAAAAZAAAAGQAAAAAAAAAZAAAAGQAAAAVAAAAYAAAAAAAAAAAAAAADwAAACADAAAAAAAAAAAAAAEAAACgMgAAVgcAAKr4//8BAAAAf39/AAEAAABkAAAAAAAAABQAAABAHwAAAAAAACYAAAAAAAAAwOD//wAAAAAmAAAAZAAAABYAAABMAAAAAAAAAAAAAAAEAAAAAAAAAAEAAACZloMKAAAAACgAAAAoAAAAZAAAAGQAAAAAAAAAzMzMAAAAAABQAAAAUAAAAGQAAABkAAAAAAAAABcAAAAUAAAAAAAAAAAAAAD/fwAA/38AAAAAAAAJAAAABAAAAAAAAAAeAAAAaAAAAAAAAAAAAAAAAAAAAAAAAAAAAAAAECcAABAnAAAAAAAAAAAAAAAAAAAAAAAAAAAAAAAAAAAAAAAAAAAAABQAAAAAAAAAwMD/AAAAAABkAAAAMgAAAAAAAABkAAAAAAAAAH9/fwAKAAAAIgAAABgAAAAAAAAAAAAAAAAAAAAAAAAAAAAAAAAAAAAkAAAAJAAAAAAAAAAHAAAAAAAAAAAAAAAAAAAAAAAAAAAAAAAAAAAAf39/ACUAAABYAAAAAAAAAAAAAAAAAAAAAAAAAAAAAAAAAAAAAAAAAAAAAAAAAAAAAAAAAAAAAAA/AAAAAAAAAKCGAQAAAAAAAAAAAAAAAAAMAAAAAQAAAAAAAAAAAAAAAAAAAB8AAABUAAAA////AAAAAAEAAAAAAAAAAAAAAAAAAAAAAAAAAAAAAAAAAAAAAAAAAP8AZgB/f38AAAAAA8zMzADAwP8Af39/AAAAAAAAAAAAAAAAAAAAAAAAAAAAIQAAABgAAAAUAAAABgwAAAAAAAAGDAAAMCoAAAAAAAAmAAAACAAAAP//////////"/>
                 </a:ext>
               </a:extLst>
             </p:cNvSpPr>
@@ -2042,7 +2042,7 @@
             <p:cNvSpPr>
               <a:extLst>
                 <a:ext uri="smNativeData">
-                  <pr:smNativeData xmlns:pr="smNativeData" xmlns="smNativeData" val="SMDATA_15_mcIdaRMAAAAlAAAACgAAAA0AAAAAkAAAAEgAAACQAAAASAAAAAAAAAAAAAAAAAAAAAEAAABQAAAAAAAAAAAA4D8AAAAAAADgPwAAAAAAAOA/AAAAAAAA4D8AAAAAAADgPwAAAAAAAOA/AAAAAAAA4D8AAAAAAADgPwAAAAAAAOA/AAAAAAAA4D8CAAAAjAAAAAAAAAAAAAAA////AP///wgAAAAAAAAAAAAAAAAAAAAAAAAAAAAAAAAAAAAAeAAAAAEAAABAAAAAAAAAAAAAAABaAAAAAAAAAAAAAAAAAAAAAAAAAAAAAAAAAAAAAAAAAAAAAAAAAAAAAAAAAAAAAAAAAAAAAAAAAAAAAAAAAAAAAAAAAAAAAAAAAAAAFAAAADwAAAABAAAAAgAAAP8AZgAPAAAAAQAAABQAAAAUAAAAFAAAAAEAAAAAAAAAZAAAAGQAAAAAAAAAZAAAAGQAAAAVAAAAYAAAAAAAAAAAAAAADwAAACADAAAAAAAAAAAAAAEAAACgMgAAVgcAAKr4//8BAAAAf39/AAEAAABkAAAAAAAAABQAAABAHwAAAAAAACYAAAAAAAAAwOD//wAAAAAmAAAAZAAAABYAAABMAAAAAAAAAAAAAAAEAAAAAAAAAAEAAACZloMKAAAAACgAAAAoAAAAZAAAAGQAAAAAAAAAzMzMAAAAAABQAAAAUAAAAGQAAABkAAAAAAAAABcAAAAUAAAAAAAAAAAAAAD/fwAA/38AAAAAAAAJAAAABAAAAAAAAAAeAAAAaAAAAAAAAAAAAAAAAAAAAAAAAAAAAAAAECcAABAnAAAAAAAAAAAAAAAAAAAAAAAAAAAAAAAAAAAAAAAAAAAAABQAAAAAAAAAwMD/AAAAAABkAAAAMgAAAAAAAABkAAAAAAAAAH9/fwAKAAAAIgAAABgAAAAAAAAAAAAAAAAAAAAAAAAAAAAAAAAAAAAkAAAAJAAAAAAAAAAHAAAAAAAAAAAAAAAAAAAAAAAAAAAAAAAAAAAAf39/ACUAAABYAAAAAAAAAAAAAAAAAAAAAAAAAAAAAAAAAAAAAAAAAAAAAAAAAAAAAAAAAAAAAAA/AAAAAAAAAKCGAQAAAAAAAAAAAAAAAAAMAAAAAQAAAAAAAAAAAAAAAAAAAB8AAABUAAAA////AAAAAAEAAAAAAAAAAAAAAAAAAAAAAAAAAAAAAAAAAAAAAAAAAP8AZgB/f38AAAAAA8zMzADAwP8Af39/AAAAAAAAAAAAAAAAAAAAAAAAAAAAIQAAABgAAAAUAAAALw0AAAAAAAAvDQAAMCoAAAAAAAAmAAAACAAAAP//////////"/>
+                  <pr:smNativeData xmlns:pr="smNativeData" xmlns="smNativeData" val="SMDATA_15_r8odaRMAAAAlAAAACgAAAA0AAAAAkAAAAEgAAACQAAAASAAAAAAAAAAAAAAAAAAAAAEAAABQAAAAAAAAAAAA4D8AAAAAAADgPwAAAAAAAOA/AAAAAAAA4D8AAAAAAADgPwAAAAAAAOA/AAAAAAAA4D8AAAAAAADgPwAAAAAAAOA/AAAAAAAA4D8CAAAAjAAAAAAAAAAAAAAA////AP///wgAAAAAAAAAAAAAAAAAAAAAAAAAAAAAAAAAAAAAeAAAAAEAAABAAAAAAAAAAAAAAABaAAAAAAAAAAAAAAAAAAAAAAAAAAAAAAAAAAAAAAAAAAAAAAAAAAAAAAAAAAAAAAAAAAAAAAAAAAAAAAAAAAAAAAAAAAAAAAAAAAAAFAAAADwAAAABAAAAAgAAAP8AZgAPAAAAAQAAABQAAAAUAAAAFAAAAAEAAAAAAAAAZAAAAGQAAAAAAAAAZAAAAGQAAAAVAAAAYAAAAAAAAAAAAAAADwAAACADAAAAAAAAAAAAAAEAAACgMgAAVgcAAKr4//8BAAAAf39/AAEAAABkAAAAAAAAABQAAABAHwAAAAAAACYAAAAAAAAAwOD//wAAAAAmAAAAZAAAABYAAABMAAAAAAAAAAAAAAAEAAAAAAAAAAEAAACZloMKAAAAACgAAAAoAAAAZAAAAGQAAAAAAAAAzMzMAAAAAABQAAAAUAAAAGQAAABkAAAAAAAAABcAAAAUAAAAAAAAAAAAAAD/fwAA/38AAAAAAAAJAAAABAAAAAAAAAAeAAAAaAAAAAAAAAAAAAAAAAAAAAAAAAAAAAAAECcAABAnAAAAAAAAAAAAAAAAAAAAAAAAAAAAAAAAAAAAAAAAAAAAABQAAAAAAAAAwMD/AAAAAABkAAAAMgAAAAAAAABkAAAAAAAAAH9/fwAKAAAAIgAAABgAAAAAAAAAAAAAAAAAAAAAAAAAAAAAAAAAAAAkAAAAJAAAAAAAAAAHAAAAAAAAAAAAAAAAAAAAAAAAAAAAAAAAAAAAf39/ACUAAABYAAAAAAAAAAAAAAAAAAAAAAAAAAAAAAAAAAAAAAAAAAAAAAAAAAAAAAAAAAAAAAA/AAAAAAAAAKCGAQAAAAAAAAAAAAAAAAAMAAAAAQAAAAAAAAAAAAAAAAAAAB8AAABUAAAA////AAAAAAEAAAAAAAAAAAAAAAAAAAAAAAAAAAAAAAAAAAAAAAAAAP8AZgB/f38AAAAAA8zMzADAwP8Af39/AAAAAAAAAAAAAAAAAAAAAAAAAAAAIQAAABgAAAAUAAAALw0AAAAAAAAvDQAAMCoAAAAAAAAmAAAACAAAAP//////////"/>
                 </a:ext>
               </a:extLst>
             </p:cNvSpPr>
@@ -2074,7 +2074,7 @@
             <p:cNvSpPr>
               <a:extLst>
                 <a:ext uri="smNativeData">
-                  <pr:smNativeData xmlns:pr="smNativeData" xmlns="smNativeData" val="SMDATA_15_mcIdaRMAAAAlAAAACgAAAA0AAAAAkAAAAEgAAACQAAAASAAAAAAAAAAAAAAAAAAAAAEAAABQAAAAAAAAAAAA4D8AAAAAAADgPwAAAAAAAOA/AAAAAAAA4D8AAAAAAADgPwAAAAAAAOA/AAAAAAAA4D8AAAAAAADgPwAAAAAAAOA/AAAAAAAA4D8CAAAAjAAAAAAAAAAAAAAA////AP///wgAAAAAAAAAAAAAAAAAAAAAAAAAAAAAAAAAAAAAeAAAAAEAAABAAAAAAAAAAAAAAABaAAAAAAAAAAAAAAAAAAAAAAAAAAAAAAAAAAAAAAAAAAAAAAAAAAAAAAAAAAAAAAAAAAAAAAAAAAAAAAAAAAAAAAAAAAAAAAAAAAAAFAAAADwAAAABAAAAAgAAAP8AZgAPAAAAAQAAABQAAAAUAAAAFAAAAAEAAAAAAAAAZAAAAGQAAAAAAAAAZAAAAGQAAAAVAAAAYAAAAAAAAAAAAAAADwAAACADAAAAAAAAAAAAAAEAAACgMgAAVgcAAKr4//8BAAAAf39/AAEAAABkAAAAAAAAABQAAABAHwAAAAAAACYAAAAAAAAAwOD//wAAAAAmAAAAZAAAABYAAABMAAAAAAAAAAAAAAAEAAAAAAAAAAEAAACZloMKAAAAACgAAAAoAAAAZAAAAGQAAAAAAAAAzMzMAAAAAABQAAAAUAAAAGQAAABkAAAAAAAAABcAAAAUAAAAAAAAAAAAAAD/fwAA/38AAAAAAAAJAAAABAAAAAAAAAAeAAAAaAAAAAAAAAAAAAAAAAAAAAAAAAAAAAAAECcAABAnAAAAAAAAAAAAAAAAAAAAAAAAAAAAAAAAAAAAAAAAAAAAABQAAAAAAAAAwMD/AAAAAABkAAAAMgAAAAAAAABkAAAAAAAAAH9/fwAKAAAAIgAAABgAAAAAAAAAAAAAAAAAAAAAAAAAAAAAAAAAAAAkAAAAJAAAAAAAAAAHAAAAAAAAAAAAAAAAAAAAAAAAAAAAAAAAAAAAf39/ACUAAABYAAAAAAAAAAAAAAAAAAAAAAAAAAAAAAAAAAAAAAAAAAAAAAAAAAAAAAAAAAAAAAA/AAAAAAAAAKCGAQAAAAAAAAAAAAAAAAAMAAAAAQAAAAAAAAAAAAAAAAAAAB8AAABUAAAA////AAAAAAEAAAAAAAAAAAAAAAAAAAAAAAAAAAAAAAAAAAAAAAAAAP8AZgB/f38AAAAAA8zMzADAwP8Af39/AAAAAAAAAAAAAAAAAAAAAAAAAAAAIQAAABgAAAAUAAAANBEAAAAAAAA0EQAAMCoAAAAAAAAmAAAACAAAAP//////////"/>
+                  <pr:smNativeData xmlns:pr="smNativeData" xmlns="smNativeData" val="SMDATA_15_r8odaRMAAAAlAAAACgAAAA0AAAAAkAAAAEgAAACQAAAASAAAAAAAAAAAAAAAAAAAAAEAAABQAAAAAAAAAAAA4D8AAAAAAADgPwAAAAAAAOA/AAAAAAAA4D8AAAAAAADgPwAAAAAAAOA/AAAAAAAA4D8AAAAAAADgPwAAAAAAAOA/AAAAAAAA4D8CAAAAjAAAAAAAAAAAAAAA////AP///wgAAAAAAAAAAAAAAAAAAAAAAAAAAAAAAAAAAAAAeAAAAAEAAABAAAAAAAAAAAAAAABaAAAAAAAAAAAAAAAAAAAAAAAAAAAAAAAAAAAAAAAAAAAAAAAAAAAAAAAAAAAAAAAAAAAAAAAAAAAAAAAAAAAAAAAAAAAAAAAAAAAAFAAAADwAAAABAAAAAgAAAP8AZgAPAAAAAQAAABQAAAAUAAAAFAAAAAEAAAAAAAAAZAAAAGQAAAAAAAAAZAAAAGQAAAAVAAAAYAAAAAAAAAAAAAAADwAAACADAAAAAAAAAAAAAAEAAACgMgAAVgcAAKr4//8BAAAAf39/AAEAAABkAAAAAAAAABQAAABAHwAAAAAAACYAAAAAAAAAwOD//wAAAAAmAAAAZAAAABYAAABMAAAAAAAAAAAAAAAEAAAAAAAAAAEAAACZloMKAAAAACgAAAAoAAAAZAAAAGQAAAAAAAAAzMzMAAAAAABQAAAAUAAAAGQAAABkAAAAAAAAABcAAAAUAAAAAAAAAAAAAAD/fwAA/38AAAAAAAAJAAAABAAAAAAAAAAeAAAAaAAAAAAAAAAAAAAAAAAAAAAAAAAAAAAAECcAABAnAAAAAAAAAAAAAAAAAAAAAAAAAAAAAAAAAAAAAAAAAAAAABQAAAAAAAAAwMD/AAAAAABkAAAAMgAAAAAAAABkAAAAAAAAAH9/fwAKAAAAIgAAABgAAAAAAAAAAAAAAAAAAAAAAAAAAAAAAAAAAAAkAAAAJAAAAAAAAAAHAAAAAAAAAAAAAAAAAAAAAAAAAAAAAAAAAAAAf39/ACUAAABYAAAAAAAAAAAAAAAAAAAAAAAAAAAAAAAAAAAAAAAAAAAAAAAAAAAAAAAAAAAAAAA/AAAAAAAAAKCGAQAAAAAAAAAAAAAAAAAMAAAAAQAAAAAAAAAAAAAAAAAAAB8AAABUAAAA////AAAAAAEAAAAAAAAAAAAAAAAAAAAAAAAAAAAAAAAAAAAAAAAAAP8AZgB/f38AAAAAA8zMzADAwP8Af39/AAAAAAAAAAAAAAAAAAAAAAAAAAAAIQAAABgAAAAUAAAANBEAAAAAAAA0EQAAMCoAAAAAAAAmAAAACAAAAP//////////"/>
                 </a:ext>
               </a:extLst>
             </p:cNvSpPr>
@@ -2106,7 +2106,7 @@
             <p:cNvSpPr>
               <a:extLst>
                 <a:ext uri="smNativeData">
-                  <pr:smNativeData xmlns:pr="smNativeData" xmlns="smNativeData" val="SMDATA_15_mcIdaRMAAAAlAAAACgAAAA0AAAAAkAAAAEgAAACQAAAASAAAAAAAAAAAAAAAAAAAAAEAAABQAAAAAAAAAAAA4D8AAAAAAADgPwAAAAAAAOA/AAAAAAAA4D8AAAAAAADgPwAAAAAAAOA/AAAAAAAA4D8AAAAAAADgPwAAAAAAAOA/AAAAAAAA4D8CAAAAjAAAAAAAAAAAAAAA////AP///wgAAAAAAAAAAAAAAAAAAAAAAAAAAAAAAAAAAAAAeAAAAAEAAABAAAAAAAAAAAAAAABaAAAAAAAAAAAAAAAAAAAAAAAAAAAAAAAAAAAAAAAAAAAAAAAAAAAAAAAAAAAAAAAAAAAAAAAAAAAAAAAAAAAAAAAAAAAAAAAAAAAAFAAAADwAAAABAAAAAgAAAP8AZgAPAAAAAQAAABQAAAAUAAAAFAAAAAEAAAAAAAAAZAAAAGQAAAAAAAAAZAAAAGQAAAAVAAAAYAAAAAAAAAAAAAAADwAAACADAAAAAAAAAAAAAAEAAACgMgAAVgcAAKr4//8BAAAAf39/AAEAAABkAAAAAAAAABQAAABAHwAAAAAAACYAAAAAAAAAwOD//wAAAAAmAAAAZAAAABYAAABMAAAAAAAAAAAAAAAEAAAAAAAAAAEAAACZloMKAAAAACgAAAAoAAAAZAAAAGQAAAAAAAAAzMzMAAAAAABQAAAAUAAAAGQAAABkAAAAAAAAABcAAAAUAAAAAAAAAAAAAAD/fwAA/38AAAAAAAAJAAAABAAAAAAAAAAeAAAAaAAAAAAAAAAAAAAAAAAAAAAAAAAAAAAAECcAABAnAAAAAAAAAAAAAAAAAAAAAAAAAAAAAAAAAAAAAAAAAAAAABQAAAAAAAAAwMD/AAAAAABkAAAAMgAAAAAAAABkAAAAAAAAAH9/fwAKAAAAIgAAABgAAAAAAAAAAAAAAAAAAAAAAAAAAAAAAAAAAAAkAAAAJAAAAAAAAAAHAAAAAAAAAAAAAAAAAAAAAAAAAAAAAAAAAAAAf39/ACUAAABYAAAAAAAAAAAAAAAAAAAAAAAAAAAAAAAAAAAAAAAAAAAAAAAAAAAAAAAAAAAAAAA/AAAAAAAAAKCGAQAAAAAAAAAAAAAAAAAMAAAAAQAAAAAAAAAAAAAAAAAAAB8AAABUAAAA////AAAAAAEAAAAAAAAAAAAAAAAAAAAAAAAAAAAAAAAAAAAAAAAAAP8AZgB/f38AAAAAA8zMzADAwP8Af39/AAAAAAAAAAAAAAAAAAAAAAAAAAAAIQAAABgAAAAUAAAAZhIAAAAAAABmEgAAMCoAAAAAAAAmAAAACAAAAP//////////"/>
+                  <pr:smNativeData xmlns:pr="smNativeData" xmlns="smNativeData" val="SMDATA_15_r8odaRMAAAAlAAAACgAAAA0AAAAAkAAAAEgAAACQAAAASAAAAAAAAAAAAAAAAAAAAAEAAABQAAAAAAAAAAAA4D8AAAAAAADgPwAAAAAAAOA/AAAAAAAA4D8AAAAAAADgPwAAAAAAAOA/AAAAAAAA4D8AAAAAAADgPwAAAAAAAOA/AAAAAAAA4D8CAAAAjAAAAAAAAAAAAAAA////AP///wgAAAAAAAAAAAAAAAAAAAAAAAAAAAAAAAAAAAAAeAAAAAEAAABAAAAAAAAAAAAAAABaAAAAAAAAAAAAAAAAAAAAAAAAAAAAAAAAAAAAAAAAAAAAAAAAAAAAAAAAAAAAAAAAAAAAAAAAAAAAAAAAAAAAAAAAAAAAAAAAAAAAFAAAADwAAAABAAAAAgAAAP8AZgAPAAAAAQAAABQAAAAUAAAAFAAAAAEAAAAAAAAAZAAAAGQAAAAAAAAAZAAAAGQAAAAVAAAAYAAAAAAAAAAAAAAADwAAACADAAAAAAAAAAAAAAEAAACgMgAAVgcAAKr4//8BAAAAf39/AAEAAABkAAAAAAAAABQAAABAHwAAAAAAACYAAAAAAAAAwOD//wAAAAAmAAAAZAAAABYAAABMAAAAAAAAAAAAAAAEAAAAAAAAAAEAAACZloMKAAAAACgAAAAoAAAAZAAAAGQAAAAAAAAAzMzMAAAAAABQAAAAUAAAAGQAAABkAAAAAAAAABcAAAAUAAAAAAAAAAAAAAD/fwAA/38AAAAAAAAJAAAABAAAAAAAAAAeAAAAaAAAAAAAAAAAAAAAAAAAAAAAAAAAAAAAECcAABAnAAAAAAAAAAAAAAAAAAAAAAAAAAAAAAAAAAAAAAAAAAAAABQAAAAAAAAAwMD/AAAAAABkAAAAMgAAAAAAAABkAAAAAAAAAH9/fwAKAAAAIgAAABgAAAAAAAAAAAAAAAAAAAAAAAAAAAAAAAAAAAAkAAAAJAAAAAAAAAAHAAAAAAAAAAAAAAAAAAAAAAAAAAAAAAAAAAAAf39/ACUAAABYAAAAAAAAAAAAAAAAAAAAAAAAAAAAAAAAAAAAAAAAAAAAAAAAAAAAAAAAAAAAAAA/AAAAAAAAAKCGAQAAAAAAAAAAAAAAAAAMAAAAAQAAAAAAAAAAAAAAAAAAAB8AAABUAAAA////AAAAAAEAAAAAAAAAAAAAAAAAAAAAAAAAAAAAAAAAAAAAAAAAAP8AZgB/f38AAAAAA8zMzADAwP8Af39/AAAAAAAAAAAAAAAAAAAAAAAAAAAAIQAAABgAAAAUAAAAZhIAAAAAAABmEgAAMCoAAAAAAAAmAAAACAAAAP//////////"/>
                 </a:ext>
               </a:extLst>
             </p:cNvSpPr>
@@ -2138,7 +2138,7 @@
             <p:cNvSpPr>
               <a:extLst>
                 <a:ext uri="smNativeData">
-                  <pr:smNativeData xmlns:pr="smNativeData" xmlns="smNativeData" val="SMDATA_15_mcIdaRMAAAAlAAAACgAAAA0AAAAAkAAAAEgAAACQAAAASAAAAAAAAAAAAAAAAAAAAAEAAABQAAAAAAAAAAAA4D8AAAAAAADgPwAAAAAAAOA/AAAAAAAA4D8AAAAAAADgPwAAAAAAAOA/AAAAAAAA4D8AAAAAAADgPwAAAAAAAOA/AAAAAAAA4D8CAAAAjAAAAAAAAAAAAAAA////AP///wgAAAAAAAAAAAAAAAAAAAAAAAAAAAAAAAAAAAAAeAAAAAEAAABAAAAAAAAAAAAAAABaAAAAAAAAAAAAAAAAAAAAAAAAAAAAAAAAAAAAAAAAAAAAAAAAAAAAAAAAAAAAAAAAAAAAAAAAAAAAAAAAAAAAAAAAAAAAAAAAAAAAFAAAADwAAAABAAAAAgAAAP8AZgAPAAAAAQAAABQAAAAUAAAAFAAAAAEAAAAAAAAAZAAAAGQAAAAAAAAAZAAAAGQAAAAVAAAAYAAAAAAAAAAAAAAADwAAACADAAAAAAAAAAAAAAEAAACgMgAAVgcAAKr4//8BAAAAf39/AAEAAABkAAAAAAAAABQAAABAHwAAAAAAACYAAAAAAAAAwOD//wAAAAAmAAAAZAAAABYAAABMAAAAAAAAAAAAAAAEAAAAAAAAAAEAAACZloMKAAAAACgAAAAoAAAAZAAAAGQAAAAAAAAAzMzMAAAAAABQAAAAUAAAAGQAAABkAAAAAAAAABcAAAAUAAAAAAAAAAAAAAD/fwAA/38AAAAAAAAJAAAABAAAAAAAAAAeAAAAaAAAAAAAAAAAAAAAAAAAAAAAAAAAAAAAECcAABAnAAAAAAAAAAAAAAAAAAAAAAAAAAAAAAAAAAAAAAAAAAAAABQAAAAAAAAAwMD/AAAAAABkAAAAMgAAAAAAAABkAAAAAAAAAH9/fwAKAAAAIgAAABgAAAAAAAAAAAAAAAAAAAAAAAAAAAAAAAAAAAAkAAAAJAAAAAAAAAAHAAAAAAAAAAAAAAAAAAAAAAAAAAAAAAAAAAAAf39/ACUAAABYAAAAAAAAAAAAAAAAAAAAAAAAAAAAAAAAAAAAAAAAAAAAAAAAAAAAAAAAAAAAAAA/AAAAAAAAAKCGAQAAAAAAAAAAAAAAAAAMAAAAAQAAAAAAAAAAAAAAAAAAAB8AAABUAAAA////AAAAAAEAAAAAAAAAAAAAAAAAAAAAAAAAAAAAAAAAAAAAAAAAAP8AZgB/f38AAAAAA8zMzADAwP8Af39/AAAAAAAAAAAAAAAAAAAAAAAAAAAAIQAAABgAAAAUAAAAYxYAAAAAAABjFgAAMCoAAAAAAAAmAAAACAAAAP//////////"/>
+                  <pr:smNativeData xmlns:pr="smNativeData" xmlns="smNativeData" val="SMDATA_15_r8odaRMAAAAlAAAACgAAAA0AAAAAkAAAAEgAAACQAAAASAAAAAAAAAAAAAAAAAAAAAEAAABQAAAAAAAAAAAA4D8AAAAAAADgPwAAAAAAAOA/AAAAAAAA4D8AAAAAAADgPwAAAAAAAOA/AAAAAAAA4D8AAAAAAADgPwAAAAAAAOA/AAAAAAAA4D8CAAAAjAAAAAAAAAAAAAAA////AP///wgAAAAAAAAAAAAAAAAAAAAAAAAAAAAAAAAAAAAAeAAAAAEAAABAAAAAAAAAAAAAAABaAAAAAAAAAAAAAAAAAAAAAAAAAAAAAAAAAAAAAAAAAAAAAAAAAAAAAAAAAAAAAAAAAAAAAAAAAAAAAAAAAAAAAAAAAAAAAAAAAAAAFAAAADwAAAABAAAAAgAAAP8AZgAPAAAAAQAAABQAAAAUAAAAFAAAAAEAAAAAAAAAZAAAAGQAAAAAAAAAZAAAAGQAAAAVAAAAYAAAAAAAAAAAAAAADwAAACADAAAAAAAAAAAAAAEAAACgMgAAVgcAAKr4//8BAAAAf39/AAEAAABkAAAAAAAAABQAAABAHwAAAAAAACYAAAAAAAAAwOD//wAAAAAmAAAAZAAAABYAAABMAAAAAAAAAAAAAAAEAAAAAAAAAAEAAACZloMKAAAAACgAAAAoAAAAZAAAAGQAAAAAAAAAzMzMAAAAAABQAAAAUAAAAGQAAABkAAAAAAAAABcAAAAUAAAAAAAAAAAAAAD/fwAA/38AAAAAAAAJAAAABAAAAAAAAAAeAAAAaAAAAAAAAAAAAAAAAAAAAAAAAAAAAAAAECcAABAnAAAAAAAAAAAAAAAAAAAAAAAAAAAAAAAAAAAAAAAAAAAAABQAAAAAAAAAwMD/AAAAAABkAAAAMgAAAAAAAABkAAAAAAAAAH9/fwAKAAAAIgAAABgAAAAAAAAAAAAAAAAAAAAAAAAAAAAAAAAAAAAkAAAAJAAAAAAAAAAHAAAAAAAAAAAAAAAAAAAAAAAAAAAAAAAAAAAAf39/ACUAAABYAAAAAAAAAAAAAAAAAAAAAAAAAAAAAAAAAAAAAAAAAAAAAAAAAAAAAAAAAAAAAAA/AAAAAAAAAKCGAQAAAAAAAAAAAAAAAAAMAAAAAQAAAAAAAAAAAAAAAAAAAB8AAABUAAAA////AAAAAAEAAAAAAAAAAAAAAAAAAAAAAAAAAAAAAAAAAAAAAAAAAP8AZgB/f38AAAAAA8zMzADAwP8Af39/AAAAAAAAAAAAAAAAAAAAAAAAAAAAIQAAABgAAAAUAAAAYxYAAAAAAABjFgAAMCoAAAAAAAAmAAAACAAAAP//////////"/>
                 </a:ext>
               </a:extLst>
             </p:cNvSpPr>
@@ -2170,7 +2170,7 @@
             <p:cNvSpPr>
               <a:extLst>
                 <a:ext uri="smNativeData">
-                  <pr:smNativeData xmlns:pr="smNativeData" xmlns="smNativeData" val="SMDATA_15_mcIdaRMAAAAlAAAACgAAAA0AAAAAkAAAAEgAAACQAAAASAAAAAAAAAAAAAAAAAAAAAEAAABQAAAAAAAAAAAA4D8AAAAAAADgPwAAAAAAAOA/AAAAAAAA4D8AAAAAAADgPwAAAAAAAOA/AAAAAAAA4D8AAAAAAADgPwAAAAAAAOA/AAAAAAAA4D8CAAAAjAAAAAAAAAAAAAAA////AP///wgAAAAAAAAAAAAAAAAAAAAAAAAAAAAAAAAAAAAAeAAAAAEAAABAAAAAAAAAAAAAAABaAAAAAAAAAAAAAAAAAAAAAAAAAAAAAAAAAAAAAAAAAAAAAAAAAAAAAAAAAAAAAAAAAAAAAAAAAAAAAAAAAAAAAAAAAAAAAAAAAAAAFAAAADwAAAABAAAAAgAAAP8AZgAPAAAAAQAAABQAAAAUAAAAFAAAAAEAAAAAAAAAZAAAAGQAAAAAAAAAZAAAAGQAAAAVAAAAYAAAAAAAAAAAAAAADwAAACADAAAAAAAAAAAAAAEAAACgMgAAVgcAAKr4//8BAAAAf39/AAEAAABkAAAAAAAAABQAAABAHwAAAAAAACYAAAAAAAAAwOD//wAAAAAmAAAAZAAAABYAAABMAAAAAAAAAAAAAAAEAAAAAAAAAAEAAACZloMKAAAAACgAAAAoAAAAZAAAAGQAAAAAAAAAzMzMAAAAAABQAAAAUAAAAGQAAABkAAAAAAAAABcAAAAUAAAAAAAAAAAAAAD/fwAA/38AAAAAAAAJAAAABAAAAAAAAAAeAAAAaAAAAAAAAAAAAAAAAAAAAAAAAAAAAAAAECcAABAnAAAAAAAAAAAAAAAAAAAAAAAAAAAAAAAAAAAAAAAAAAAAABQAAAAAAAAAwMD/AAAAAABkAAAAMgAAAAAAAABkAAAAAAAAAH9/fwAKAAAAIgAAABgAAAAAAAAAAAAAAAAAAAAAAAAAAAAAAAAAAAAkAAAAJAAAAAAAAAAHAAAAAAAAAAAAAAAAAAAAAAAAAAAAAAAAAAAAf39/ACUAAABYAAAAAAAAAAAAAAAAAAAAAAAAAAAAAAAAAAAAAAAAAAAAAAAAAAAAAAAAAAAAAAA/AAAAAAAAAKCGAQAAAAAAAAAAAAAAAAAMAAAAAQAAAAAAAAAAAAAAAAAAAB8AAABUAAAA////AAAAAAEAAAAAAAAAAAAAAAAAAAAAAAAAAAAAAAAAAAAAAAAAAP8AZgB/f38AAAAAA8zMzADAwP8Af39/AAAAAAAAAAAAAAAAAAAAAAAAAAAAIQAAABgAAAAUAAAAjhcAAAAAAACOFwAAMCoAAAAAAAAmAAAACAAAAP//////////"/>
+                  <pr:smNativeData xmlns:pr="smNativeData" xmlns="smNativeData" val="SMDATA_15_r8odaRMAAAAlAAAACgAAAA0AAAAAkAAAAEgAAACQAAAASAAAAAAAAAAAAAAAAAAAAAEAAABQAAAAAAAAAAAA4D8AAAAAAADgPwAAAAAAAOA/AAAAAAAA4D8AAAAAAADgPwAAAAAAAOA/AAAAAAAA4D8AAAAAAADgPwAAAAAAAOA/AAAAAAAA4D8CAAAAjAAAAAAAAAAAAAAA////AP///wgAAAAAAAAAAAAAAAAAAAAAAAAAAAAAAAAAAAAAeAAAAAEAAABAAAAAAAAAAAAAAABaAAAAAAAAAAAAAAAAAAAAAAAAAAAAAAAAAAAAAAAAAAAAAAAAAAAAAAAAAAAAAAAAAAAAAAAAAAAAAAAAAAAAAAAAAAAAAAAAAAAAFAAAADwAAAABAAAAAgAAAP8AZgAPAAAAAQAAABQAAAAUAAAAFAAAAAEAAAAAAAAAZAAAAGQAAAAAAAAAZAAAAGQAAAAVAAAAYAAAAAAAAAAAAAAADwAAACADAAAAAAAAAAAAAAEAAACgMgAAVgcAAKr4//8BAAAAf39/AAEAAABkAAAAAAAAABQAAABAHwAAAAAAACYAAAAAAAAAwOD//wAAAAAmAAAAZAAAABYAAABMAAAAAAAAAAAAAAAEAAAAAAAAAAEAAACZloMKAAAAACgAAAAoAAAAZAAAAGQAAAAAAAAAzMzMAAAAAABQAAAAUAAAAGQAAABkAAAAAAAAABcAAAAUAAAAAAAAAAAAAAD/fwAA/38AAAAAAAAJAAAABAAAAAAAAAAeAAAAaAAAAAAAAAAAAAAAAAAAAAAAAAAAAAAAECcAABAnAAAAAAAAAAAAAAAAAAAAAAAAAAAAAAAAAAAAAAAAAAAAABQAAAAAAAAAwMD/AAAAAABkAAAAMgAAAAAAAABkAAAAAAAAAH9/fwAKAAAAIgAAABgAAAAAAAAAAAAAAAAAAAAAAAAAAAAAAAAAAAAkAAAAJAAAAAAAAAAHAAAAAAAAAAAAAAAAAAAAAAAAAAAAAAAAAAAAf39/ACUAAABYAAAAAAAAAAAAAAAAAAAAAAAAAAAAAAAAAAAAAAAAAAAAAAAAAAAAAAAAAAAAAAA/AAAAAAAAAKCGAQAAAAAAAAAAAAAAAAAMAAAAAQAAAAAAAAAAAAAAAAAAAB8AAABUAAAA////AAAAAAEAAAAAAAAAAAAAAAAAAAAAAAAAAAAAAAAAAAAAAAAAAP8AZgB/f38AAAAAA8zMzADAwP8Af39/AAAAAAAAAAAAAAAAAAAAAAAAAAAAIQAAABgAAAAUAAAAjhcAAAAAAACOFwAAMCoAAAAAAAAmAAAACAAAAP//////////"/>
                 </a:ext>
               </a:extLst>
             </p:cNvSpPr>
@@ -2202,7 +2202,7 @@
             <p:cNvSpPr>
               <a:extLst>
                 <a:ext uri="smNativeData">
-                  <pr:smNativeData xmlns:pr="smNativeData" xmlns="smNativeData" val="SMDATA_15_mcIdaRMAAAAlAAAACgAAAA0AAAAAkAAAAEgAAACQAAAASAAAAAAAAAAAAAAAAAAAAAEAAABQAAAAAAAAAAAA4D8AAAAAAADgPwAAAAAAAOA/AAAAAAAA4D8AAAAAAADgPwAAAAAAAOA/AAAAAAAA4D8AAAAAAADgPwAAAAAAAOA/AAAAAAAA4D8CAAAAjAAAAAAAAAAAAAAA////AP///wgAAAAAAAAAAAAAAAAAAAAAAAAAAAAAAAAAAAAAeAAAAAEAAABAAAAAAAAAAAAAAABaAAAAAAAAAAAAAAAAAAAAAAAAAAAAAAAAAAAAAAAAAAAAAAAAAAAAAAAAAAAAAAAAAAAAAAAAAAAAAAAAAAAAAAAAAAAAAAAAAAAAFAAAADwAAAABAAAAAgAAAP8AZgAPAAAAAQAAABQAAAAUAAAAFAAAAAEAAAAAAAAAZAAAAGQAAAAAAAAAZAAAAGQAAAAVAAAAYAAAAAAAAAAAAAAADwAAACADAAAAAAAAAAAAAAEAAACgMgAAVgcAAKr4//8BAAAAf39/AAEAAABkAAAAAAAAABQAAABAHwAAAAAAACYAAAAAAAAAwOD//wAAAAAmAAAAZAAAABYAAABMAAAAAAAAAAAAAAAEAAAAAAAAAAEAAACZloMKAAAAACgAAAAoAAAAZAAAAGQAAAAAAAAAzMzMAAAAAABQAAAAUAAAAGQAAABkAAAAAAAAABcAAAAUAAAAAAAAAAAAAAD/fwAA/38AAAAAAAAJAAAABAAAAAAAAAAeAAAAaAAAAAAAAAAAAAAAAAAAAAAAAAAAAAAAECcAABAnAAAAAAAAAAAAAAAAAAAAAAAAAAAAAAAAAAAAAAAAAAAAABQAAAAAAAAAwMD/AAAAAABkAAAAMgAAAAAAAABkAAAAAAAAAH9/fwAKAAAAIgAAABgAAAAAAAAAAAAAAAAAAAAAAAAAAAAAAAAAAAAkAAAAJAAAAAAAAAAHAAAAAAAAAAAAAAAAAAAAAAAAAAAAAAAAAAAAf39/ACUAAABYAAAAAAAAAAAAAAAAAAAAAAAAAAAAAAAAAAAAAAAAAAAAAAAAAAAAAAAAAAAAAAA/AAAAAAAAAKCGAQAAAAAAAAAAAAAAAAAMAAAAAQAAAAAAAAAAAAAAAAAAAB8AAABUAAAA////AAAAAAEAAAAAAAAAAAAAAAAAAAAAAAAAAAAAAAAAAAAAAAAAAP8AZgB/f38AAAAAA8zMzADAwP8Af39/AAAAAAAAAAAAAAAAAAAAAAAAAAAAIQAAABgAAAAUAAAAjRsAAAAAAACNGwAAMCoAAAAAAAAmAAAACAAAAP//////////"/>
+                  <pr:smNativeData xmlns:pr="smNativeData" xmlns="smNativeData" val="SMDATA_15_r8odaRMAAAAlAAAACgAAAA0AAAAAkAAAAEgAAACQAAAASAAAAAAAAAAAAAAAAAAAAAEAAABQAAAAAAAAAAAA4D8AAAAAAADgPwAAAAAAAOA/AAAAAAAA4D8AAAAAAADgPwAAAAAAAOA/AAAAAAAA4D8AAAAAAADgPwAAAAAAAOA/AAAAAAAA4D8CAAAAjAAAAAAAAAAAAAAA////AP///wgAAAAAAAAAAAAAAAAAAAAAAAAAAAAAAAAAAAAAeAAAAAEAAABAAAAAAAAAAAAAAABaAAAAAAAAAAAAAAAAAAAAAAAAAAAAAAAAAAAAAAAAAAAAAAAAAAAAAAAAAAAAAAAAAAAAAAAAAAAAAAAAAAAAAAAAAAAAAAAAAAAAFAAAADwAAAABAAAAAgAAAP8AZgAPAAAAAQAAABQAAAAUAAAAFAAAAAEAAAAAAAAAZAAAAGQAAAAAAAAAZAAAAGQAAAAVAAAAYAAAAAAAAAAAAAAADwAAACADAAAAAAAAAAAAAAEAAACgMgAAVgcAAKr4//8BAAAAf39/AAEAAABkAAAAAAAAABQAAABAHwAAAAAAACYAAAAAAAAAwOD//wAAAAAmAAAAZAAAABYAAABMAAAAAAAAAAAAAAAEAAAAAAAAAAEAAACZloMKAAAAACgAAAAoAAAAZAAAAGQAAAAAAAAAzMzMAAAAAABQAAAAUAAAAGQAAABkAAAAAAAAABcAAAAUAAAAAAAAAAAAAAD/fwAA/38AAAAAAAAJAAAABAAAAAAAAAAeAAAAaAAAAAAAAAAAAAAAAAAAAAAAAAAAAAAAECcAABAnAAAAAAAAAAAAAAAAAAAAAAAAAAAAAAAAAAAAAAAAAAAAABQAAAAAAAAAwMD/AAAAAABkAAAAMgAAAAAAAABkAAAAAAAAAH9/fwAKAAAAIgAAABgAAAAAAAAAAAAAAAAAAAAAAAAAAAAAAAAAAAAkAAAAJAAAAAAAAAAHAAAAAAAAAAAAAAAAAAAAAAAAAAAAAAAAAAAAf39/ACUAAABYAAAAAAAAAAAAAAAAAAAAAAAAAAAAAAAAAAAAAAAAAAAAAAAAAAAAAAAAAAAAAAA/AAAAAAAAAKCGAQAAAAAAAAAAAAAAAAAMAAAAAQAAAAAAAAAAAAAAAAAAAB8AAABUAAAA////AAAAAAEAAAAAAAAAAAAAAAAAAAAAAAAAAAAAAAAAAAAAAAAAAP8AZgB/f38AAAAAA8zMzADAwP8Af39/AAAAAAAAAAAAAAAAAAAAAAAAAAAAIQAAABgAAAAUAAAAjRsAAAAAAACNGwAAMCoAAAAAAAAmAAAACAAAAP//////////"/>
                 </a:ext>
               </a:extLst>
             </p:cNvSpPr>
@@ -2234,7 +2234,7 @@
             <p:cNvSpPr>
               <a:extLst>
                 <a:ext uri="smNativeData">
-                  <pr:smNativeData xmlns:pr="smNativeData" xmlns="smNativeData" val="SMDATA_15_mcIdaRMAAAAlAAAACgAAAA0AAAAAkAAAAEgAAACQAAAASAAAAAAAAAAAAAAAAAAAAAEAAABQAAAAAAAAAAAA4D8AAAAAAADgPwAAAAAAAOA/AAAAAAAA4D8AAAAAAADgPwAAAAAAAOA/AAAAAAAA4D8AAAAAAADgPwAAAAAAAOA/AAAAAAAA4D8CAAAAjAAAAAAAAAAAAAAA////AP///wgAAAAAAAAAAAAAAAAAAAAAAAAAAAAAAAAAAAAAeAAAAAEAAABAAAAAAAAAAAAAAABaAAAAAAAAAAAAAAAAAAAAAAAAAAAAAAAAAAAAAAAAAAAAAAAAAAAAAAAAAAAAAAAAAAAAAAAAAAAAAAAAAAAAAAAAAAAAAAAAAAAAFAAAADwAAAABAAAAAgAAAP8AZgAPAAAAAQAAABQAAAAUAAAAFAAAAAEAAAAAAAAAZAAAAGQAAAAAAAAAZAAAAGQAAAAVAAAAYAAAAAAAAAAAAAAADwAAACADAAAAAAAAAAAAAAEAAACgMgAAVgcAAKr4//8BAAAAf39/AAEAAABkAAAAAAAAABQAAABAHwAAAAAAACYAAAAAAAAAwOD//wAAAAAmAAAAZAAAABYAAABMAAAAAAAAAAAAAAAEAAAAAAAAAAEAAACZloMKAAAAACgAAAAoAAAAZAAAAGQAAAAAAAAAzMzMAAAAAABQAAAAUAAAAGQAAABkAAAAAAAAABcAAAAUAAAAAAAAAAAAAAD/fwAA/38AAAAAAAAJAAAABAAAANgYJSMeAAAAaAAAAAAAAAAAAAAAAAAAAAAAAAAAAAAAECcAABAnAAAAAAAAAAAAAAAAAAAAAAAAAAAAAAAAAAAAAAAAAAAAABQAAAAAAAAAwMD/AAAAAABkAAAAMgAAAAAAAABkAAAAAAAAAH9/fwAKAAAAIgAAABgAAAAAAAAAAAAAAAAAAAAAAAAAAAAAAAAAAAAkAAAAJAAAAAAAAAAHAAAAAAAAAAAAAAAAAAAAAAAAAAAAAAAAAAAAf39/ACUAAABYAAAAAAAAAAAAAAAAAAAAAAAAAAAAAAAAAAAAAAAAAAAAAAAAAAAAAAAAAAAAAAA/AAAAAAAAAKCGAQAAAAAAAAAAAAAAAAAMAAAAAQAAAAAAAAAAAAAAAAAAAB8AAABUAAAA////AAAAAAEAAAAAAAAAAAAAAAAAAAAAAAAAAAAAAAAAAAAAAAAAAP8AZgB/f38AAAAAA8zMzADAwP8Af39/AAAAAAAAAAAAAAAAAAAAAAAAAAAAIQAAABgAAAAUAAAAuxwAAAAAAAC7HAAAMCoAAAAAAAAmAAAACAAAAP//////////"/>
+                  <pr:smNativeData xmlns:pr="smNativeData" xmlns="smNativeData" val="SMDATA_15_r8odaRMAAAAlAAAACgAAAA0AAAAAkAAAAEgAAACQAAAASAAAAAAAAAAAAAAAAAAAAAEAAABQAAAAAAAAAAAA4D8AAAAAAADgPwAAAAAAAOA/AAAAAAAA4D8AAAAAAADgPwAAAAAAAOA/AAAAAAAA4D8AAAAAAADgPwAAAAAAAOA/AAAAAAAA4D8CAAAAjAAAAAAAAAAAAAAA////AP///wgAAAAAAAAAAAAAAAAAAAAAAAAAAAAAAAAAAAAAeAAAAAEAAABAAAAAAAAAAAAAAABaAAAAAAAAAAAAAAAAAAAAAAAAAAAAAAAAAAAAAAAAAAAAAAAAAAAAAAAAAAAAAAAAAAAAAAAAAAAAAAAAAAAAAAAAAAAAAAAAAAAAFAAAADwAAAABAAAAAgAAAP8AZgAPAAAAAQAAABQAAAAUAAAAFAAAAAEAAAAAAAAAZAAAAGQAAAAAAAAAZAAAAGQAAAAVAAAAYAAAAAAAAAAAAAAADwAAACADAAAAAAAAAAAAAAEAAACgMgAAVgcAAKr4//8BAAAAf39/AAEAAABkAAAAAAAAABQAAABAHwAAAAAAACYAAAAAAAAAwOD//wAAAAAmAAAAZAAAABYAAABMAAAAAAAAAAAAAAAEAAAAAAAAAAEAAACZloMKAAAAACgAAAAoAAAAZAAAAGQAAAAAAAAAzMzMAAAAAABQAAAAUAAAAGQAAABkAAAAAAAAABcAAAAUAAAAAAAAAAAAAAD/fwAA/38AAAAAAAAJAAAABAAAANgYJSMeAAAAaAAAAAAAAAAAAAAAAAAAAAAAAAAAAAAAECcAABAnAAAAAAAAAAAAAAAAAAAAAAAAAAAAAAAAAAAAAAAAAAAAABQAAAAAAAAAwMD/AAAAAABkAAAAMgAAAAAAAABkAAAAAAAAAH9/fwAKAAAAIgAAABgAAAAAAAAAAAAAAAAAAAAAAAAAAAAAAAAAAAAkAAAAJAAAAAAAAAAHAAAAAAAAAAAAAAAAAAAAAAAAAAAAAAAAAAAAf39/ACUAAABYAAAAAAAAAAAAAAAAAAAAAAAAAAAAAAAAAAAAAAAAAAAAAAAAAAAAAAAAAAAAAAA/AAAAAAAAAKCGAQAAAAAAAAAAAAAAAAAMAAAAAQAAAAAAAAAAAAAAAAAAAB8AAABUAAAA////AAAAAAEAAAAAAAAAAAAAAAAAAAAAAAAAAAAAAAAAAAAAAAAAAP8AZgB/f38AAAAAA8zMzADAwP8Af39/AAAAAAAAAAAAAAAAAAAAAAAAAAAAIQAAABgAAAAUAAAAuxwAAAAAAAC7HAAAMCoAAAAAAAAmAAAACAAAAP//////////"/>
                 </a:ext>
               </a:extLst>
             </p:cNvSpPr>
@@ -2266,7 +2266,7 @@
             <p:cNvSpPr>
               <a:extLst>
                 <a:ext uri="smNativeData">
-                  <pr:smNativeData xmlns:pr="smNativeData" xmlns="smNativeData" val="SMDATA_15_mcIdaRMAAAAlAAAACgAAAA0AAAAAkAAAAEgAAACQAAAASAAAAAAAAAAAAAAAAAAAAAEAAABQAAAAAAAAAAAA4D8AAAAAAADgPwAAAAAAAOA/AAAAAAAA4D8AAAAAAADgPwAAAAAAAOA/AAAAAAAA4D8AAAAAAADgPwAAAAAAAOA/AAAAAAAA4D8CAAAAjAAAAAAAAAAAAAAA////AP///wgAAAAAAAAAAAAAAAAAAAAAAAAAAAAAAAAAAAAAeAAAAAEAAABAAAAAAAAAAAAAAABaAAAAAAAAAAAAAAAAAAAAAAAAAAAAAAAAAAAAAAAAAAAAAAAAAAAAAAAAAAAAAAAAAAAAAAAAAAAAAAAAAAAAAAAAAAAAAAAAAAAAFAAAADwAAAABAAAAAgAAAP8AZgAPAAAAAQAAABQAAAAUAAAAFAAAAAEAAAAAAAAAZAAAAGQAAAAAAAAAZAAAAGQAAAAVAAAAYAAAAAAAAAAAAAAADwAAACADAAAAAAAAAAAAAAEAAACgMgAAVgcAAKr4//8BAAAAf39/AAEAAABkAAAAAAAAABQAAABAHwAAAAAAACYAAAAAAAAAwOD//wAAAAAmAAAAZAAAABYAAABMAAAAAAAAAAAAAAAEAAAAAAAAAAEAAACZloMKAAAAACgAAAAoAAAAZAAAAGQAAAAAAAAAzMzMAAAAAABQAAAAUAAAAGQAAABkAAAAAAAAABcAAAAUAAAAAAAAAAAAAAD/fwAA/38AAAAAAAAJAAAABAAAAAkACgAeAAAAaAAAAAAAAAAAAAAAAAAAAAAAAAAAAAAAECcAABAnAAAAAAAAAAAAAAAAAAAAAAAAAAAAAAAAAAAAAAAAAAAAABQAAAAAAAAAwMD/AAAAAABkAAAAMgAAAAAAAABkAAAAAAAAAH9/fwAKAAAAIgAAABgAAAAAAAAAAAAAAAAAAAAAAAAAAAAAAAAAAAAkAAAAJAAAAAAAAAAHAAAAAAAAAAAAAAAAAAAAAAAAAAAAAAAAAAAAf39/ACUAAABYAAAAAAAAAAAAAAAAAAAAAAAAAAAAAAAAAAAAAAAAAAAAAAAAAAAAAAAAAAAAAAA/AAAAAAAAAKCGAQAAAAAAAAAAAAAAAAAMAAAAAQAAAAAAAAAAAAAAAAAAAB8AAABUAAAA////AAAAAAEAAAAAAAAAAAAAAAAAAAAAAAAAAAAAAAAAAAAAAAAAAP8AZgB/f38AAAAAA8zMzADAwP8Af39/AAAAAAAAAAAAAAAAAAAAAAAAAAAAIQAAABgAAAAUAAAAwCAAAAAAAADAIAAAMCoAAAAAAAAmAAAACAAAAP//////////"/>
+                  <pr:smNativeData xmlns:pr="smNativeData" xmlns="smNativeData" val="SMDATA_15_r8odaRMAAAAlAAAACgAAAA0AAAAAkAAAAEgAAACQAAAASAAAAAAAAAAAAAAAAAAAAAEAAABQAAAAAAAAAAAA4D8AAAAAAADgPwAAAAAAAOA/AAAAAAAA4D8AAAAAAADgPwAAAAAAAOA/AAAAAAAA4D8AAAAAAADgPwAAAAAAAOA/AAAAAAAA4D8CAAAAjAAAAAAAAAAAAAAA////AP///wgAAAAAAAAAAAAAAAAAAAAAAAAAAAAAAAAAAAAAeAAAAAEAAABAAAAAAAAAAAAAAABaAAAAAAAAAAAAAAAAAAAAAAAAAAAAAAAAAAAAAAAAAAAAAAAAAAAAAAAAAAAAAAAAAAAAAAAAAAAAAAAAAAAAAAAAAAAAAAAAAAAAFAAAADwAAAABAAAAAgAAAP8AZgAPAAAAAQAAABQAAAAUAAAAFAAAAAEAAAAAAAAAZAAAAGQAAAAAAAAAZAAAAGQAAAAVAAAAYAAAAAAAAAAAAAAADwAAACADAAAAAAAAAAAAAAEAAACgMgAAVgcAAKr4//8BAAAAf39/AAEAAABkAAAAAAAAABQAAABAHwAAAAAAACYAAAAAAAAAwOD//wAAAAAmAAAAZAAAABYAAABMAAAAAAAAAAAAAAAEAAAAAAAAAAEAAACZloMKAAAAACgAAAAoAAAAZAAAAGQAAAAAAAAAzMzMAAAAAABQAAAAUAAAAGQAAABkAAAAAAAAABcAAAAUAAAAAAAAAAAAAAD/fwAA/38AAAAAAAAJAAAABAAAAAkACgAeAAAAaAAAAAAAAAAAAAAAAAAAAAAAAAAAAAAAECcAABAnAAAAAAAAAAAAAAAAAAAAAAAAAAAAAAAAAAAAAAAAAAAAABQAAAAAAAAAwMD/AAAAAABkAAAAMgAAAAAAAABkAAAAAAAAAH9/fwAKAAAAIgAAABgAAAAAAAAAAAAAAAAAAAAAAAAAAAAAAAAAAAAkAAAAJAAAAAAAAAAHAAAAAAAAAAAAAAAAAAAAAAAAAAAAAAAAAAAAf39/ACUAAABYAAAAAAAAAAAAAAAAAAAAAAAAAAAAAAAAAAAAAAAAAAAAAAAAAAAAAAAAAAAAAAA/AAAAAAAAAKCGAQAAAAAAAAAAAAAAAAAMAAAAAQAAAAAAAAAAAAAAAAAAAB8AAABUAAAA////AAAAAAEAAAAAAAAAAAAAAAAAAAAAAAAAAAAAAAAAAAAAAAAAAP8AZgB/f38AAAAAA8zMzADAwP8Af39/AAAAAAAAAAAAAAAAAAAAAAAAAAAAIQAAABgAAAAUAAAAwCAAAAAAAADAIAAAMCoAAAAAAAAmAAAACAAAAP//////////"/>
                 </a:ext>
               </a:extLst>
             </p:cNvSpPr>
@@ -2298,7 +2298,7 @@
             <p:cNvSpPr>
               <a:extLst>
                 <a:ext uri="smNativeData">
-                  <pr:smNativeData xmlns:pr="smNativeData" xmlns="smNativeData" val="SMDATA_15_mcIdaRMAAAAlAAAACgAAAA0AAAAAkAAAAEgAAACQAAAASAAAAAAAAAAAAAAAAAAAAAEAAABQAAAAAAAAAAAA4D8AAAAAAADgPwAAAAAAAOA/AAAAAAAA4D8AAAAAAADgPwAAAAAAAOA/AAAAAAAA4D8AAAAAAADgPwAAAAAAAOA/AAAAAAAA4D8CAAAAjAAAAAAAAAAAAAAA////AP///wgAAAAAAAAAAAAAAAAAAAAAAAAAAAAAAAAAAAAAeAAAAAEAAABAAAAAAAAAAAAAAABaAAAAAAAAAAAAAAAAAAAAAAAAAAAAAAAAAAAAAAAAAAAAAAAAAAAAAAAAAAAAAAAAAAAAAAAAAAAAAAAAAAAAAAAAAAAAAAAAAAAAFAAAADwAAAABAAAAAgAAAP8AZgAPAAAAAQAAABQAAAAUAAAAFAAAAAEAAAAAAAAAZAAAAGQAAAAAAAAAZAAAAGQAAAAVAAAAYAAAAAAAAAAAAAAADwAAACADAAAAAAAAAAAAAAEAAACgMgAAVgcAAKr4//8BAAAAf39/AAEAAABkAAAAAAAAABQAAABAHwAAAAAAACYAAAAAAAAAwOD//wAAAAAmAAAAZAAAABYAAABMAAAAAAAAAAAAAAAEAAAAAAAAAAEAAACZloMKAAAAACgAAAAoAAAAZAAAAGQAAAAAAAAAzMzMAAAAAABQAAAAUAAAAGQAAABkAAAAAAAAABcAAAAUAAAAAAAAAAAAAAD/fwAA/38AAAAAAAAJAAAABAAAAAAGIgAeAAAAaAAAAAAAAAAAAAAAAAAAAAAAAAAAAAAAECcAABAnAAAAAAAAAAAAAAAAAAAAAAAAAAAAAAAAAAAAAAAAAAAAABQAAAAAAAAAwMD/AAAAAABkAAAAMgAAAAAAAABkAAAAAAAAAH9/fwAKAAAAIgAAABgAAAAAAAAAAAAAAAAAAAAAAAAAAAAAAAAAAAAkAAAAJAAAAAAAAAAHAAAAAAAAAAAAAAAAAAAAAAAAAAAAAAAAAAAAf39/ACUAAABYAAAAAAAAAAAAAAAAAAAAAAAAAAAAAAAAAAAAAAAAAAAAAAAAAAAAAAAAAAAAAAA/AAAAAAAAAKCGAQAAAAAAAAAAAAAAAAAMAAAAAQAAAAAAAAAAAAAAAAAAAB8AAABUAAAA////AAAAAAEAAAAAAAAAAAAAAAAAAAAAAAAAAAAAAAAAAAAAAAAAAP8AZgB/f38AAAAAA8zMzADAwP8Af39/AAAAAAAAAAAAAAAAAAAAAAAAAAAAIQAAABgAAAAUAAAA6iEAAAAAAADqIQAAMCoAAAAAAAAmAAAACAAAAP//////////"/>
+                  <pr:smNativeData xmlns:pr="smNativeData" xmlns="smNativeData" val="SMDATA_15_r8odaRMAAAAlAAAACgAAAA0AAAAAkAAAAEgAAACQAAAASAAAAAAAAAAAAAAAAAAAAAEAAABQAAAAAAAAAAAA4D8AAAAAAADgPwAAAAAAAOA/AAAAAAAA4D8AAAAAAADgPwAAAAAAAOA/AAAAAAAA4D8AAAAAAADgPwAAAAAAAOA/AAAAAAAA4D8CAAAAjAAAAAAAAAAAAAAA////AP///wgAAAAAAAAAAAAAAAAAAAAAAAAAAAAAAAAAAAAAeAAAAAEAAABAAAAAAAAAAAAAAABaAAAAAAAAAAAAAAAAAAAAAAAAAAAAAAAAAAAAAAAAAAAAAAAAAAAAAAAAAAAAAAAAAAAAAAAAAAAAAAAAAAAAAAAAAAAAAAAAAAAAFAAAADwAAAABAAAAAgAAAP8AZgAPAAAAAQAAABQAAAAUAAAAFAAAAAEAAAAAAAAAZAAAAGQAAAAAAAAAZAAAAGQAAAAVAAAAYAAAAAAAAAAAAAAADwAAACADAAAAAAAAAAAAAAEAAACgMgAAVgcAAKr4//8BAAAAf39/AAEAAABkAAAAAAAAABQAAABAHwAAAAAAACYAAAAAAAAAwOD//wAAAAAmAAAAZAAAABYAAABMAAAAAAAAAAAAAAAEAAAAAAAAAAEAAACZloMKAAAAACgAAAAoAAAAZAAAAGQAAAAAAAAAzMzMAAAAAABQAAAAUAAAAGQAAABkAAAAAAAAABcAAAAUAAAAAAAAAAAAAAD/fwAA/38AAAAAAAAJAAAABAAAAAAGIgAeAAAAaAAAAAAAAAAAAAAAAAAAAAAAAAAAAAAAECcAABAnAAAAAAAAAAAAAAAAAAAAAAAAAAAAAAAAAAAAAAAAAAAAABQAAAAAAAAAwMD/AAAAAABkAAAAMgAAAAAAAABkAAAAAAAAAH9/fwAKAAAAIgAAABgAAAAAAAAAAAAAAAAAAAAAAAAAAAAAAAAAAAAkAAAAJAAAAAAAAAAHAAAAAAAAAAAAAAAAAAAAAAAAAAAAAAAAAAAAf39/ACUAAABYAAAAAAAAAAAAAAAAAAAAAAAAAAAAAAAAAAAAAAAAAAAAAAAAAAAAAAAAAAAAAAA/AAAAAAAAAKCGAQAAAAAAAAAAAAAAAAAMAAAAAQAAAAAAAAAAAAAAAAAAAB8AAABUAAAA////AAAAAAEAAAAAAAAAAAAAAAAAAAAAAAAAAAAAAAAAAAAAAAAAAP8AZgB/f38AAAAAA8zMzADAwP8Af39/AAAAAAAAAAAAAAAAAAAAAAAAAAAAIQAAABgAAAAUAAAA6iEAAAAAAADqIQAAMCoAAAAAAAAmAAAACAAAAP//////////"/>
                 </a:ext>
               </a:extLst>
             </p:cNvSpPr>
@@ -2330,7 +2330,7 @@
             <p:cNvSpPr>
               <a:extLst>
                 <a:ext uri="smNativeData">
-                  <pr:smNativeData xmlns:pr="smNativeData" xmlns="smNativeData" val="SMDATA_15_mcIdaRMAAAAlAAAACgAAAA0AAAAAkAAAAEgAAACQAAAASAAAAAAAAAAAAAAAAAAAAAEAAABQAAAAAAAAAAAA4D8AAAAAAADgPwAAAAAAAOA/AAAAAAAA4D8AAAAAAADgPwAAAAAAAOA/AAAAAAAA4D8AAAAAAADgPwAAAAAAAOA/AAAAAAAA4D8CAAAAjAAAAAAAAAAAAAAA////AP///wgAAAAAAAAAAAAAAAAAAAAAAAAAAAAAAAAAAAAAeAAAAAEAAABAAAAAAAAAAAAAAABaAAAAAAAAAAAAAAAAAAAAAAAAAAAAAAAAAAAAAAAAAAAAAAAAAAAAAAAAAAAAAAAAAAAAAAAAAAAAAAAAAAAAAAAAAAAAAAAAAAAAFAAAADwAAAABAAAAAgAAAP8AZgAPAAAAAQAAABQAAAAUAAAAFAAAAAEAAAAAAAAAZAAAAGQAAAAAAAAAZAAAAGQAAAAVAAAAYAAAAAAAAAAAAAAADwAAACADAAAAAAAAAAAAAAEAAACgMgAAVgcAAKr4//8BAAAAf39/AAEAAABkAAAAAAAAABQAAABAHwAAAAAAACYAAAAAAAAAwOD//wAAAAAmAAAAZAAAABYAAABMAAAAAAAAAAAAAAAEAAAAAAAAAAEAAACZloMKAAAAACgAAAAoAAAAZAAAAGQAAAAAAAAAzMzMAAAAAABQAAAAUAAAAGQAAABkAAAAAAAAABcAAAAUAAAAAAAAAAAAAAD/fwAA/38AAAAAAAAJAAAABAAAAAABUgAeAAAAaAAAAAAAAAAAAAAAAAAAAAAAAAAAAAAAECcAABAnAAAAAAAAAAAAAAAAAAAAAAAAAAAAAAAAAAAAAAAAAAAAABQAAAAAAAAAwMD/AAAAAABkAAAAMgAAAAAAAABkAAAAAAAAAH9/fwAKAAAAIgAAABgAAAAAAAAAAAAAAAAAAAAAAAAAAAAAAAAAAAAkAAAAJAAAAAAAAAAHAAAAAAAAAAAAAAAAAAAAAAAAAAAAAAAAAAAAf39/ACUAAABYAAAAAAAAAAAAAAAAAAAAAAAAAAAAAAAAAAAAAAAAAAAAAAAAAAAAAAAAAAAAAAA/AAAAAAAAAKCGAQAAAAAAAAAAAAAAAAAMAAAAAQAAAAAAAAAAAAAAAAAAAB8AAABUAAAA////AAAAAAEAAAAAAAAAAAAAAAAAAAAAAAAAAAAAAAAAAAAAAAAAAP8AZgB/f38AAAAAA8zMzADAwP8Af39/AAAAAAAAAAAAAAAAAAAAAAAAAAAAIQAAABgAAAAUAAAA7yUAAAAAAADvJQAAMCoAAAAAAAAmAAAACAAAAP//////////"/>
+                  <pr:smNativeData xmlns:pr="smNativeData" xmlns="smNativeData" val="SMDATA_15_r8odaRMAAAAlAAAACgAAAA0AAAAAkAAAAEgAAACQAAAASAAAAAAAAAAAAAAAAAAAAAEAAABQAAAAAAAAAAAA4D8AAAAAAADgPwAAAAAAAOA/AAAAAAAA4D8AAAAAAADgPwAAAAAAAOA/AAAAAAAA4D8AAAAAAADgPwAAAAAAAOA/AAAAAAAA4D8CAAAAjAAAAAAAAAAAAAAA////AP///wgAAAAAAAAAAAAAAAAAAAAAAAAAAAAAAAAAAAAAeAAAAAEAAABAAAAAAAAAAAAAAABaAAAAAAAAAAAAAAAAAAAAAAAAAAAAAAAAAAAAAAAAAAAAAAAAAAAAAAAAAAAAAAAAAAAAAAAAAAAAAAAAAAAAAAAAAAAAAAAAAAAAFAAAADwAAAABAAAAAgAAAP8AZgAPAAAAAQAAABQAAAAUAAAAFAAAAAEAAAAAAAAAZAAAAGQAAAAAAAAAZAAAAGQAAAAVAAAAYAAAAAAAAAAAAAAADwAAACADAAAAAAAAAAAAAAEAAACgMgAAVgcAAKr4//8BAAAAf39/AAEAAABkAAAAAAAAABQAAABAHwAAAAAAACYAAAAAAAAAwOD//wAAAAAmAAAAZAAAABYAAABMAAAAAAAAAAAAAAAEAAAAAAAAAAEAAACZloMKAAAAACgAAAAoAAAAZAAAAGQAAAAAAAAAzMzMAAAAAABQAAAAUAAAAGQAAABkAAAAAAAAABcAAAAUAAAAAAAAAAAAAAD/fwAA/38AAAAAAAAJAAAABAAAAAABUgAeAAAAaAAAAAAAAAAAAAAAAAAAAAAAAAAAAAAAECcAABAnAAAAAAAAAAAAAAAAAAAAAAAAAAAAAAAAAAAAAAAAAAAAABQAAAAAAAAAwMD/AAAAAABkAAAAMgAAAAAAAABkAAAAAAAAAH9/fwAKAAAAIgAAABgAAAAAAAAAAAAAAAAAAAAAAAAAAAAAAAAAAAAkAAAAJAAAAAAAAAAHAAAAAAAAAAAAAAAAAAAAAAAAAAAAAAAAAAAAf39/ACUAAABYAAAAAAAAAAAAAAAAAAAAAAAAAAAAAAAAAAAAAAAAAAAAAAAAAAAAAAAAAAAAAAA/AAAAAAAAAKCGAQAAAAAAAAAAAAAAAAAMAAAAAQAAAAAAAAAAAAAAAAAAAB8AAABUAAAA////AAAAAAEAAAAAAAAAAAAAAAAAAAAAAAAAAAAAAAAAAAAAAAAAAP8AZgB/f38AAAAAA8zMzADAwP8Af39/AAAAAAAAAAAAAAAAAAAAAAAAAAAAIQAAABgAAAAUAAAA7yUAAAAAAADvJQAAMCoAAAAAAAAmAAAACAAAAP//////////"/>
                 </a:ext>
               </a:extLst>
             </p:cNvSpPr>
@@ -2362,7 +2362,7 @@
             <p:cNvSpPr>
               <a:extLst>
                 <a:ext uri="smNativeData">
-                  <pr:smNativeData xmlns:pr="smNativeData" xmlns="smNativeData" val="SMDATA_15_mcIdaRMAAAAlAAAACgAAAA0AAAAAkAAAAEgAAACQAAAASAAAAAAAAAAAAAAAAAAAAAEAAABQAAAAAAAAAAAA4D8AAAAAAADgPwAAAAAAAOA/AAAAAAAA4D8AAAAAAADgPwAAAAAAAOA/AAAAAAAA4D8AAAAAAADgPwAAAAAAAOA/AAAAAAAA4D8CAAAAjAAAAAAAAAAAAAAA////AP///wgAAAAAAAAAAAAAAAAAAAAAAAAAAAAAAAAAAAAAeAAAAAEAAABAAAAAAAAAAAAAAABaAAAAAAAAAAAAAAAAAAAAAAAAAAAAAAAAAAAAAAAAAAAAAAAAAAAAAAAAAAAAAAAAAAAAAAAAAAAAAAAAAAAAAAAAAAAAAAAAAAAAFAAAADwAAAABAAAAAgAAAP8AZgAPAAAAAQAAABQAAAAUAAAAFAAAAAEAAAAAAAAAZAAAAGQAAAAAAAAAZAAAAGQAAAAVAAAAYAAAAAAAAAAAAAAADwAAACADAAAAAAAAAAAAAAEAAACgMgAAVgcAAKr4//8BAAAAf39/AAEAAABkAAAAAAAAABQAAABAHwAAAAAAACYAAAAAAAAAwOD//wAAAAAmAAAAZAAAABYAAABMAAAAAAAAAAAAAAAEAAAAAAAAAAEAAACZloMKAAAAACgAAAAoAAAAZAAAAGQAAAAAAAAAzMzMAAAAAABQAAAAUAAAAGQAAABkAAAAAAAAABcAAAAUAAAAAAAAAAAAAAD/fwAA/38AAAAAAAAJAAAABAAAAAAAAAAeAAAAaAAAAAAAAAAAAAAAAAAAAAAAAAAAAAAAECcAABAnAAAAAAAAAAAAAAAAAAAAAAAAAAAAAAAAAAAAAAAAAAAAABQAAAAAAAAAwMD/AAAAAABkAAAAMgAAAAAAAABkAAAAAAAAAH9/fwAKAAAAIgAAABgAAAAAAAAAAAAAAAAAAAAAAAAAAAAAAAAAAAAkAAAAJAAAAAAAAAAHAAAAAAAAAAAAAAAAAAAAAAAAAAAAAAAAAAAAf39/ACUAAABYAAAAAAAAAAAAAAAAAAAAAAAAAAAAAAAAAAAAAAAAAAAAAAAAAAAAAAAAAAAAAAA/AAAAAAAAAKCGAQAAAAAAAAAAAAAAAAAMAAAAAQAAAAAAAAAAAAAAAAAAAB8AAABUAAAA////AAAAAAEAAAAAAAAAAAAAAAAAAAAAAAAAAAAAAAAAAAAAAAAAAP8AZgB/f38AAAAAA8zMzADAwP8Af39/AAAAAAAAAAAAAAAAAAAAAAAAAAAAIQAAABgAAAAUAAAAGCcAAAAAAAAYJwAAMCoAAAAAAAAmAAAACAAAAP//////////"/>
+                  <pr:smNativeData xmlns:pr="smNativeData" xmlns="smNativeData" val="SMDATA_15_r8odaRMAAAAlAAAACgAAAA0AAAAAkAAAAEgAAACQAAAASAAAAAAAAAAAAAAAAAAAAAEAAABQAAAAAAAAAAAA4D8AAAAAAADgPwAAAAAAAOA/AAAAAAAA4D8AAAAAAADgPwAAAAAAAOA/AAAAAAAA4D8AAAAAAADgPwAAAAAAAOA/AAAAAAAA4D8CAAAAjAAAAAAAAAAAAAAA////AP///wgAAAAAAAAAAAAAAAAAAAAAAAAAAAAAAAAAAAAAeAAAAAEAAABAAAAAAAAAAAAAAABaAAAAAAAAAAAAAAAAAAAAAAAAAAAAAAAAAAAAAAAAAAAAAAAAAAAAAAAAAAAAAAAAAAAAAAAAAAAAAAAAAAAAAAAAAAAAAAAAAAAAFAAAADwAAAABAAAAAgAAAP8AZgAPAAAAAQAAABQAAAAUAAAAFAAAAAEAAAAAAAAAZAAAAGQAAAAAAAAAZAAAAGQAAAAVAAAAYAAAAAAAAAAAAAAADwAAACADAAAAAAAAAAAAAAEAAACgMgAAVgcAAKr4//8BAAAAf39/AAEAAABkAAAAAAAAABQAAABAHwAAAAAAACYAAAAAAAAAwOD//wAAAAAmAAAAZAAAABYAAABMAAAAAAAAAAAAAAAEAAAAAAAAAAEAAACZloMKAAAAACgAAAAoAAAAZAAAAGQAAAAAAAAAzMzMAAAAAABQAAAAUAAAAGQAAABkAAAAAAAAABcAAAAUAAAAAAAAAAAAAAD/fwAA/38AAAAAAAAJAAAABAAAAAAAAAAeAAAAaAAAAAAAAAAAAAAAAAAAAAAAAAAAAAAAECcAABAnAAAAAAAAAAAAAAAAAAAAAAAAAAAAAAAAAAAAAAAAAAAAABQAAAAAAAAAwMD/AAAAAABkAAAAMgAAAAAAAABkAAAAAAAAAH9/fwAKAAAAIgAAABgAAAAAAAAAAAAAAAAAAAAAAAAAAAAAAAAAAAAkAAAAJAAAAAAAAAAHAAAAAAAAAAAAAAAAAAAAAAAAAAAAAAAAAAAAf39/ACUAAABYAAAAAAAAAAAAAAAAAAAAAAAAAAAAAAAAAAAAAAAAAAAAAAAAAAAAAAAAAAAAAAA/AAAAAAAAAKCGAQAAAAAAAAAAAAAAAAAMAAAAAQAAAAAAAAAAAAAAAAAAAB8AAABUAAAA////AAAAAAEAAAAAAAAAAAAAAAAAAAAAAAAAAAAAAAAAAAAAAAAAAP8AZgB/f38AAAAAA8zMzADAwP8Af39/AAAAAAAAAAAAAAAAAAAAAAAAAAAAIQAAABgAAAAUAAAAGCcAAAAAAAAYJwAAMCoAAAAAAAAmAAAACAAAAP//////////"/>
                 </a:ext>
               </a:extLst>
             </p:cNvSpPr>
@@ -2394,7 +2394,7 @@
             <p:cNvSpPr>
               <a:extLst>
                 <a:ext uri="smNativeData">
-                  <pr:smNativeData xmlns:pr="smNativeData" xmlns="smNativeData" val="SMDATA_15_mcIdaRMAAAAlAAAACgAAAA0AAAAAkAAAAEgAAACQAAAASAAAAAAAAAAAAAAAAAAAAAEAAABQAAAAAAAAAAAA4D8AAAAAAADgPwAAAAAAAOA/AAAAAAAA4D8AAAAAAADgPwAAAAAAAOA/AAAAAAAA4D8AAAAAAADgPwAAAAAAAOA/AAAAAAAA4D8CAAAAjAAAAAAAAAAAAAAA////AP///wgAAAAAAAAAAAAAAAAAAAAAAAAAAAAAAAAAAAAAeAAAAAEAAABAAAAAAAAAAAAAAABaAAAAAAAAAAAAAAAAAAAAAAAAAAAAAAAAAAAAAAAAAAAAAAAAAAAAAAAAAAAAAAAAAAAAAAAAAAAAAAAAAAAAAAAAAAAAAAAAAAAAFAAAADwAAAABAAAAAgAAAP8AZgAPAAAAAQAAABQAAAAUAAAAFAAAAAEAAAAAAAAAZAAAAGQAAAAAAAAAZAAAAGQAAAAVAAAAYAAAAAAAAAAAAAAADwAAACADAAAAAAAAAAAAAAEAAACgMgAAVgcAAKr4//8BAAAAf39/AAEAAABkAAAAAAAAABQAAABAHwAAAAAAACYAAAAAAAAAwOD//wAAAAAmAAAAZAAAABYAAABMAAAAAAAAAAAAAAAEAAAAAAAAAAEAAACZloMKAAAAACgAAAAoAAAAZAAAAGQAAAAAAAAAzMzMAAAAAABQAAAAUAAAAGQAAABkAAAAAAAAABcAAAAUAAAAAAAAAAAAAAD/fwAA/38AAAAAAAAJAAAABAAAAFwaJSMeAAAAaAAAAAAAAAAAAAAAAAAAAAAAAAAAAAAAECcAABAnAAAAAAAAAAAAAAAAAAAAAAAAAAAAAAAAAAAAAAAAAAAAABQAAAAAAAAAwMD/AAAAAABkAAAAMgAAAAAAAABkAAAAAAAAAH9/fwAKAAAAIgAAABgAAAAAAAAAAAAAAAAAAAAAAAAAAAAAAAAAAAAkAAAAJAAAAAAAAAAHAAAAAAAAAAAAAAAAAAAAAAAAAAAAAAAAAAAAf39/ACUAAABYAAAAAAAAAAAAAAAAAAAAAAAAAAAAAAAAAAAAAAAAAAAAAAAAAAAAAAAAAAAAAAA/AAAAAAAAAKCGAQAAAAAAAAAAAAAAAAAMAAAAAQAAAAAAAAAAAAAAAAAAAB8AAABUAAAA////AAAAAAEAAAAAAAAAAAAAAAAAAAAAAAAAAAAAAAAAAAAAAAAAAP8AZgB/f38AAAAAA8zMzADAwP8Af39/AAAAAAAAAAAAAAAAAAAAAAAAAAAAIQAAABgAAAAUAAAAHisAAAAAAAAeKwAAMCoAAAAAAAAmAAAACAAAAP//////////"/>
+                  <pr:smNativeData xmlns:pr="smNativeData" xmlns="smNativeData" val="SMDATA_15_r8odaRMAAAAlAAAACgAAAA0AAAAAkAAAAEgAAACQAAAASAAAAAAAAAAAAAAAAAAAAAEAAABQAAAAAAAAAAAA4D8AAAAAAADgPwAAAAAAAOA/AAAAAAAA4D8AAAAAAADgPwAAAAAAAOA/AAAAAAAA4D8AAAAAAADgPwAAAAAAAOA/AAAAAAAA4D8CAAAAjAAAAAAAAAAAAAAA////AP///wgAAAAAAAAAAAAAAAAAAAAAAAAAAAAAAAAAAAAAeAAAAAEAAABAAAAAAAAAAAAAAABaAAAAAAAAAAAAAAAAAAAAAAAAAAAAAAAAAAAAAAAAAAAAAAAAAAAAAAAAAAAAAAAAAAAAAAAAAAAAAAAAAAAAAAAAAAAAAAAAAAAAFAAAADwAAAABAAAAAgAAAP8AZgAPAAAAAQAAABQAAAAUAAAAFAAAAAEAAAAAAAAAZAAAAGQAAAAAAAAAZAAAAGQAAAAVAAAAYAAAAAAAAAAAAAAADwAAACADAAAAAAAAAAAAAAEAAACgMgAAVgcAAKr4//8BAAAAf39/AAEAAABkAAAAAAAAABQAAABAHwAAAAAAACYAAAAAAAAAwOD//wAAAAAmAAAAZAAAABYAAABMAAAAAAAAAAAAAAAEAAAAAAAAAAEAAACZloMKAAAAACgAAAAoAAAAZAAAAGQAAAAAAAAAzMzMAAAAAABQAAAAUAAAAGQAAABkAAAAAAAAABcAAAAUAAAAAAAAAAAAAAD/fwAA/38AAAAAAAAJAAAABAAAAFwaJSMeAAAAaAAAAAAAAAAAAAAAAAAAAAAAAAAAAAAAECcAABAnAAAAAAAAAAAAAAAAAAAAAAAAAAAAAAAAAAAAAAAAAAAAABQAAAAAAAAAwMD/AAAAAABkAAAAMgAAAAAAAABkAAAAAAAAAH9/fwAKAAAAIgAAABgAAAAAAAAAAAAAAAAAAAAAAAAAAAAAAAAAAAAkAAAAJAAAAAAAAAAHAAAAAAAAAAAAAAAAAAAAAAAAAAAAAAAAAAAAf39/ACUAAABYAAAAAAAAAAAAAAAAAAAAAAAAAAAAAAAAAAAAAAAAAAAAAAAAAAAAAAAAAAAAAAA/AAAAAAAAAKCGAQAAAAAAAAAAAAAAAAAMAAAAAQAAAAAAAAAAAAAAAAAAAB8AAABUAAAA////AAAAAAEAAAAAAAAAAAAAAAAAAAAAAAAAAAAAAAAAAAAAAAAAAP8AZgB/f38AAAAAA8zMzADAwP8Af39/AAAAAAAAAAAAAAAAAAAAAAAAAAAAIQAAABgAAAAUAAAAHisAAAAAAAAeKwAAMCoAAAAAAAAmAAAACAAAAP//////////"/>
                 </a:ext>
               </a:extLst>
             </p:cNvSpPr>
@@ -2426,7 +2426,7 @@
             <p:cNvSpPr>
               <a:extLst>
                 <a:ext uri="smNativeData">
-                  <pr:smNativeData xmlns:pr="smNativeData" xmlns="smNativeData" val="SMDATA_15_mcIdaRMAAAAlAAAACgAAAA0AAAAAkAAAAEgAAACQAAAASAAAAAAAAAAAAAAAAAAAAAEAAABQAAAAAAAAAAAA4D8AAAAAAADgPwAAAAAAAOA/AAAAAAAA4D8AAAAAAADgPwAAAAAAAOA/AAAAAAAA4D8AAAAAAADgPwAAAAAAAOA/AAAAAAAA4D8CAAAAjAAAAAAAAAAAAAAA////AP///wgAAAAAAAAAAAAAAAAAAAAAAAAAAAAAAAAAAAAAeAAAAAEAAABAAAAAAAAAAAAAAABaAAAAAAAAAAAAAAAAAAAAAAAAAAAAAAAAAAAAAAAAAAAAAAAAAAAAAAAAAAAAAAAAAAAAAAAAAAAAAAAAAAAAAAAAAAAAAAAAAAAAFAAAADwAAAABAAAAAgAAAP8AZgAPAAAAAQAAABQAAAAUAAAAFAAAAAEAAAAAAAAAZAAAAGQAAAAAAAAAZAAAAGQAAAAVAAAAYAAAAAAAAAAAAAAADwAAACADAAAAAAAAAAAAAAEAAACgMgAAVgcAAKr4//8BAAAAf39/AAEAAABkAAAAAAAAABQAAABAHwAAAAAAACYAAAAAAAAAwOD//wAAAAAmAAAAZAAAABYAAABMAAAAAAAAAAAAAAAEAAAAAAAAAAEAAACZloMKAAAAACgAAAAoAAAAZAAAAGQAAAAAAAAAzMzMAAAAAABQAAAAUAAAAGQAAABkAAAAAAAAABcAAAAUAAAAAAAAAAAAAAD/fwAA/38AAAAAAAAJAAAABAAAAAAAAAAeAAAAaAAAAAAAAAAAAAAAAAAAAAAAAAAAAAAAECcAABAnAAAAAAAAAAAAAAAAAAAAAAAAAAAAAAAAAAAAAAAAAAAAABQAAAAAAAAAwMD/AAAAAABkAAAAMgAAAAAAAABkAAAAAAAAAH9/fwAKAAAAIgAAABgAAAAAAAAAAAAAAAAAAAAAAAAAAAAAAAAAAAAkAAAAJAAAAAAAAAAHAAAAAAAAAAAAAAAAAAAAAAAAAAAAAAAAAAAAf39/ACUAAABYAAAAAAAAAAAAAAAAAAAAAAAAAAAAAAAAAAAAAAAAAAAAAAAAAAAAAAAAAAAAAAA/AAAAAAAAAKCGAQAAAAAAAAAAAAAAAAAMAAAAAQAAAAAAAAAAAAAAAAAAAB8AAABUAAAA////AAAAAAEAAAAAAAAAAAAAAAAAAAAAAAAAAAAAAAAAAAAAAAAAAP8AZgB/f38AAAAAA8zMzADAwP8Af39/AAAAAAAAAAAAAAAAAAAAAAAAAAAAIQAAABgAAAAUAAAARywAAAAAAABHLAAAMCoAAAAAAAAmAAAACAAAAP//////////"/>
+                  <pr:smNativeData xmlns:pr="smNativeData" xmlns="smNativeData" val="SMDATA_15_r8odaRMAAAAlAAAACgAAAA0AAAAAkAAAAEgAAACQAAAASAAAAAAAAAAAAAAAAAAAAAEAAABQAAAAAAAAAAAA4D8AAAAAAADgPwAAAAAAAOA/AAAAAAAA4D8AAAAAAADgPwAAAAAAAOA/AAAAAAAA4D8AAAAAAADgPwAAAAAAAOA/AAAAAAAA4D8CAAAAjAAAAAAAAAAAAAAA////AP///wgAAAAAAAAAAAAAAAAAAAAAAAAAAAAAAAAAAAAAeAAAAAEAAABAAAAAAAAAAAAAAABaAAAAAAAAAAAAAAAAAAAAAAAAAAAAAAAAAAAAAAAAAAAAAAAAAAAAAAAAAAAAAAAAAAAAAAAAAAAAAAAAAAAAAAAAAAAAAAAAAAAAFAAAADwAAAABAAAAAgAAAP8AZgAPAAAAAQAAABQAAAAUAAAAFAAAAAEAAAAAAAAAZAAAAGQAAAAAAAAAZAAAAGQAAAAVAAAAYAAAAAAAAAAAAAAADwAAACADAAAAAAAAAAAAAAEAAACgMgAAVgcAAKr4//8BAAAAf39/AAEAAABkAAAAAAAAABQAAABAHwAAAAAAACYAAAAAAAAAwOD//wAAAAAmAAAAZAAAABYAAABMAAAAAAAAAAAAAAAEAAAAAAAAAAEAAACZloMKAAAAACgAAAAoAAAAZAAAAGQAAAAAAAAAzMzMAAAAAABQAAAAUAAAAGQAAABkAAAAAAAAABcAAAAUAAAAAAAAAAAAAAD/fwAA/38AAAAAAAAJAAAABAAAAAAAAAAeAAAAaAAAAAAAAAAAAAAAAAAAAAAAAAAAAAAAECcAABAnAAAAAAAAAAAAAAAAAAAAAAAAAAAAAAAAAAAAAAAAAAAAABQAAAAAAAAAwMD/AAAAAABkAAAAMgAAAAAAAABkAAAAAAAAAH9/fwAKAAAAIgAAABgAAAAAAAAAAAAAAAAAAAAAAAAAAAAAAAAAAAAkAAAAJAAAAAAAAAAHAAAAAAAAAAAAAAAAAAAAAAAAAAAAAAAAAAAAf39/ACUAAABYAAAAAAAAAAAAAAAAAAAAAAAAAAAAAAAAAAAAAAAAAAAAAAAAAAAAAAAAAAAAAAA/AAAAAAAAAKCGAQAAAAAAAAAAAAAAAAAMAAAAAQAAAAAAAAAAAAAAAAAAAB8AAABUAAAA////AAAAAAEAAAAAAAAAAAAAAAAAAAAAAAAAAAAAAAAAAAAAAAAAAP8AZgB/f38AAAAAA8zMzADAwP8Af39/AAAAAAAAAAAAAAAAAAAAAAAAAAAAIQAAABgAAAAUAAAARywAAAAAAABHLAAAMCoAAAAAAAAmAAAACAAAAP//////////"/>
                 </a:ext>
               </a:extLst>
             </p:cNvSpPr>
@@ -2458,7 +2458,7 @@
             <p:cNvSpPr>
               <a:extLst>
                 <a:ext uri="smNativeData">
-                  <pr:smNativeData xmlns:pr="smNativeData" xmlns="smNativeData" val="SMDATA_15_mcIdaRMAAAAlAAAACgAAAA0AAAAAkAAAAEgAAACQAAAASAAAAAAAAAAAAAAAAAAAAAEAAABQAAAAAAAAAAAA4D8AAAAAAADgPwAAAAAAAOA/AAAAAAAA4D8AAAAAAADgPwAAAAAAAOA/AAAAAAAA4D8AAAAAAADgPwAAAAAAAOA/AAAAAAAA4D8CAAAAjAAAAAAAAAAAAAAA////AP///wgAAAAAAAAAAAAAAAAAAAAAAAAAAAAAAAAAAAAAeAAAAAEAAABAAAAAAAAAAAAAAABaAAAAAAAAAAAAAAAAAAAAAAAAAAAAAAAAAAAAAAAAAAAAAAAAAAAAAAAAAAAAAAAAAAAAAAAAAAAAAAAAAAAAAAAAAAAAAAAAAAAAFAAAADwAAAABAAAAAgAAAP8AZgAPAAAAAQAAABQAAAAUAAAAFAAAAAEAAAAAAAAAZAAAAGQAAAAAAAAAZAAAAGQAAAAVAAAAYAAAAAAAAAAAAAAADwAAACADAAAAAAAAAAAAAAEAAACgMgAAVgcAAKr4//8BAAAAf39/AAEAAABkAAAAAAAAABQAAABAHwAAAAAAACYAAAAAAAAAwOD//wAAAAAmAAAAZAAAABYAAABMAAAAAAAAAAAAAAAEAAAAAAAAAAEAAACZloMKAAAAACgAAAAoAAAAZAAAAGQAAAAAAAAAzMzMAAAAAABQAAAAUAAAAGQAAABkAAAAAAAAABcAAAAUAAAAAAAAAAAAAAD/fwAA/38AAAAAAAAJAAAABAAAAAAAAAAeAAAAaAAAAAAAAAAAAAAAAAAAAAAAAAAAAAAAECcAABAnAAAAAAAAAAAAAAAAAAAAAAAAAAAAAAAAAAAAAAAAAAAAABQAAAAAAAAAwMD/AAAAAABkAAAAMgAAAAAAAABkAAAAAAAAAH9/fwAKAAAAIgAAABgAAAAAAAAAAAAAAAAAAAAAAAAAAAAAAAAAAAAkAAAAJAAAAAAAAAAHAAAAAAAAAAAAAAAAAAAAAAAAAAAAAAAAAAAAf39/ACUAAABYAAAAAAAAAAAAAAAAAAAAAAAAAAAAAAAAAAAAAAAAAAAAAAAAAAAAAAAAAAAAAAA/AAAAAAAAAKCGAQAAAAAAAAAAAAAAAAAMAAAAAQAAAAAAAAAAAAAAAAAAAB8AAABUAAAA////AAAAAAEAAAAAAAAAAAAAAAAAAAAAAAAAAAAAAAAAAAAAAAAAAP8AZgB/f38AAAAAA8zMzADAwP8Af39/AAAAAAAAAAAAAAAAAAAAAAAAAAAAIQAAABgAAAAUAAAATDAAAAAAAABMMAAAMCoAAAAAAAAmAAAACAAAAP//////////"/>
+                  <pr:smNativeData xmlns:pr="smNativeData" xmlns="smNativeData" val="SMDATA_15_r8odaRMAAAAlAAAACgAAAA0AAAAAkAAAAEgAAACQAAAASAAAAAAAAAAAAAAAAAAAAAEAAABQAAAAAAAAAAAA4D8AAAAAAADgPwAAAAAAAOA/AAAAAAAA4D8AAAAAAADgPwAAAAAAAOA/AAAAAAAA4D8AAAAAAADgPwAAAAAAAOA/AAAAAAAA4D8CAAAAjAAAAAAAAAAAAAAA////AP///wgAAAAAAAAAAAAAAAAAAAAAAAAAAAAAAAAAAAAAeAAAAAEAAABAAAAAAAAAAAAAAABaAAAAAAAAAAAAAAAAAAAAAAAAAAAAAAAAAAAAAAAAAAAAAAAAAAAAAAAAAAAAAAAAAAAAAAAAAAAAAAAAAAAAAAAAAAAAAAAAAAAAFAAAADwAAAABAAAAAgAAAP8AZgAPAAAAAQAAABQAAAAUAAAAFAAAAAEAAAAAAAAAZAAAAGQAAAAAAAAAZAAAAGQAAAAVAAAAYAAAAAAAAAAAAAAADwAAACADAAAAAAAAAAAAAAEAAACgMgAAVgcAAKr4//8BAAAAf39/AAEAAABkAAAAAAAAABQAAABAHwAAAAAAACYAAAAAAAAAwOD//wAAAAAmAAAAZAAAABYAAABMAAAAAAAAAAAAAAAEAAAAAAAAAAEAAACZloMKAAAAACgAAAAoAAAAZAAAAGQAAAAAAAAAzMzMAAAAAABQAAAAUAAAAGQAAABkAAAAAAAAABcAAAAUAAAAAAAAAAAAAAD/fwAA/38AAAAAAAAJAAAABAAAAAAAAAAeAAAAaAAAAAAAAAAAAAAAAAAAAAAAAAAAAAAAECcAABAnAAAAAAAAAAAAAAAAAAAAAAAAAAAAAAAAAAAAAAAAAAAAABQAAAAAAAAAwMD/AAAAAABkAAAAMgAAAAAAAABkAAAAAAAAAH9/fwAKAAAAIgAAABgAAAAAAAAAAAAAAAAAAAAAAAAAAAAAAAAAAAAkAAAAJAAAAAAAAAAHAAAAAAAAAAAAAAAAAAAAAAAAAAAAAAAAAAAAf39/ACUAAABYAAAAAAAAAAAAAAAAAAAAAAAAAAAAAAAAAAAAAAAAAAAAAAAAAAAAAAAAAAAAAAA/AAAAAAAAAKCGAQAAAAAAAAAAAAAAAAAMAAAAAQAAAAAAAAAAAAAAAAAAAB8AAABUAAAA////AAAAAAEAAAAAAAAAAAAAAAAAAAAAAAAAAAAAAAAAAAAAAAAAAP8AZgB/f38AAAAAA8zMzADAwP8Af39/AAAAAAAAAAAAAAAAAAAAAAAAAAAAIQAAABgAAAAUAAAATDAAAAAAAABMMAAAMCoAAAAAAAAmAAAACAAAAP//////////"/>
                 </a:ext>
               </a:extLst>
             </p:cNvSpPr>
@@ -2490,7 +2490,7 @@
             <p:cNvSpPr>
               <a:extLst>
                 <a:ext uri="smNativeData">
-                  <pr:smNativeData xmlns:pr="smNativeData" xmlns="smNativeData" val="SMDATA_15_mcIdaRMAAAAlAAAACgAAAA0AAAAAkAAAAEgAAACQAAAASAAAAAAAAAAAAAAAAAAAAAEAAABQAAAAAAAAAAAA4D8AAAAAAADgPwAAAAAAAOA/AAAAAAAA4D8AAAAAAADgPwAAAAAAAOA/AAAAAAAA4D8AAAAAAADgPwAAAAAAAOA/AAAAAAAA4D8CAAAAjAAAAAAAAAAAAAAA////AP///wgAAAAAAAAAAAAAAAAAAAAAAAAAAAAAAAAAAAAAeAAAAAEAAABAAAAAAAAAAAAAAABaAAAAAAAAAAAAAAAAAAAAAAAAAAAAAAAAAAAAAAAAAAAAAAAAAAAAAAAAAAAAAAAAAAAAAAAAAAAAAAAAAAAAAAAAAAAAAAAAAAAAFAAAADwAAAABAAAAAgAAAP8AZgAPAAAAAQAAABQAAAAUAAAAFAAAAAEAAAAAAAAAZAAAAGQAAAAAAAAAZAAAAGQAAAAVAAAAYAAAAAAAAAAAAAAADwAAACADAAAAAAAAAAAAAAEAAACgMgAAVgcAAKr4//8BAAAAf39/AAEAAABkAAAAAAAAABQAAABAHwAAAAAAACYAAAAAAAAAwOD//wAAAAAmAAAAZAAAABYAAABMAAAAAAAAAAAAAAAEAAAAAAAAAAEAAACZloMKAAAAACgAAAAoAAAAZAAAAGQAAAAAAAAAzMzMAAAAAABQAAAAUAAAAGQAAABkAAAAAAAAABcAAAAUAAAAAAAAAAAAAAD/fwAA/38AAAAAAAAJAAAABAAAAAAAAAAeAAAAaAAAAAAAAAAAAAAAAAAAAAAAAAAAAAAAECcAABAnAAAAAAAAAAAAAAAAAAAAAAAAAAAAAAAAAAAAAAAAAAAAABQAAAAAAAAAwMD/AAAAAABkAAAAMgAAAAAAAABkAAAAAAAAAH9/fwAKAAAAIgAAABgAAAAAAAAAAAAAAAAAAAAAAAAAAAAAAAAAAAAkAAAAJAAAAAAAAAAHAAAAAAAAAAAAAAAAAAAAAAAAAAAAAAAAAAAAf39/ACUAAABYAAAAAAAAAAAAAAAAAAAAAAAAAAAAAAAAAAAAAAAAAAAAAAAAAAAAAAAAAAAAAAA/AAAAAAAAAKCGAQAAAAAAAAAAAAAAAAAMAAAAAQAAAAAAAAAAAAAAAAAAAB8AAABUAAAA////AAAAAAEAAAAAAAAAAAAAAAAAAAAAAAAAAAAAAAAAAAAAAAAAAP8AZgB/f38AAAAAA8zMzADAwP8Af39/AAAAAAAAAAAAAAAAAAAAAAAAAAAAIQAAABgAAAAUAAAAdTEAAAAAAAB1MQAAMCoAAAAAAAAmAAAACAAAAP//////////"/>
+                  <pr:smNativeData xmlns:pr="smNativeData" xmlns="smNativeData" val="SMDATA_15_r8odaRMAAAAlAAAACgAAAA0AAAAAkAAAAEgAAACQAAAASAAAAAAAAAAAAAAAAAAAAAEAAABQAAAAAAAAAAAA4D8AAAAAAADgPwAAAAAAAOA/AAAAAAAA4D8AAAAAAADgPwAAAAAAAOA/AAAAAAAA4D8AAAAAAADgPwAAAAAAAOA/AAAAAAAA4D8CAAAAjAAAAAAAAAAAAAAA////AP///wgAAAAAAAAAAAAAAAAAAAAAAAAAAAAAAAAAAAAAeAAAAAEAAABAAAAAAAAAAAAAAABaAAAAAAAAAAAAAAAAAAAAAAAAAAAAAAAAAAAAAAAAAAAAAAAAAAAAAAAAAAAAAAAAAAAAAAAAAAAAAAAAAAAAAAAAAAAAAAAAAAAAFAAAADwAAAABAAAAAgAAAP8AZgAPAAAAAQAAABQAAAAUAAAAFAAAAAEAAAAAAAAAZAAAAGQAAAAAAAAAZAAAAGQAAAAVAAAAYAAAAAAAAAAAAAAADwAAACADAAAAAAAAAAAAAAEAAACgMgAAVgcAAKr4//8BAAAAf39/AAEAAABkAAAAAAAAABQAAABAHwAAAAAAACYAAAAAAAAAwOD//wAAAAAmAAAAZAAAABYAAABMAAAAAAAAAAAAAAAEAAAAAAAAAAEAAACZloMKAAAAACgAAAAoAAAAZAAAAGQAAAAAAAAAzMzMAAAAAABQAAAAUAAAAGQAAABkAAAAAAAAABcAAAAUAAAAAAAAAAAAAAD/fwAA/38AAAAAAAAJAAAABAAAAAAAAAAeAAAAaAAAAAAAAAAAAAAAAAAAAAAAAAAAAAAAECcAABAnAAAAAAAAAAAAAAAAAAAAAAAAAAAAAAAAAAAAAAAAAAAAABQAAAAAAAAAwMD/AAAAAABkAAAAMgAAAAAAAABkAAAAAAAAAH9/fwAKAAAAIgAAABgAAAAAAAAAAAAAAAAAAAAAAAAAAAAAAAAAAAAkAAAAJAAAAAAAAAAHAAAAAAAAAAAAAAAAAAAAAAAAAAAAAAAAAAAAf39/ACUAAABYAAAAAAAAAAAAAAAAAAAAAAAAAAAAAAAAAAAAAAAAAAAAAAAAAAAAAAAAAAAAAAA/AAAAAAAAAKCGAQAAAAAAAAAAAAAAAAAMAAAAAQAAAAAAAAAAAAAAAAAAAB8AAABUAAAA////AAAAAAEAAAAAAAAAAAAAAAAAAAAAAAAAAAAAAAAAAAAAAAAAAP8AZgB/f38AAAAAA8zMzADAwP8Af39/AAAAAAAAAAAAAAAAAAAAAAAAAAAAIQAAABgAAAAUAAAAdTEAAAAAAAB1MQAAMCoAAAAAAAAmAAAACAAAAP//////////"/>
                 </a:ext>
               </a:extLst>
             </p:cNvSpPr>
@@ -2522,7 +2522,7 @@
             <p:cNvSpPr>
               <a:extLst>
                 <a:ext uri="smNativeData">
-                  <pr:smNativeData xmlns:pr="smNativeData" xmlns="smNativeData" val="SMDATA_15_mcIdaRMAAAAlAAAACgAAAA0AAAAAkAAAAEgAAACQAAAASAAAAAAAAAAAAAAAAAAAAAEAAABQAAAAAAAAAAAA4D8AAAAAAADgPwAAAAAAAOA/AAAAAAAA4D8AAAAAAADgPwAAAAAAAOA/AAAAAAAA4D8AAAAAAADgPwAAAAAAAOA/AAAAAAAA4D8CAAAAjAAAAAAAAAAAAAAA////AP///wgAAAAAAAAAAAAAAAAAAAAAAAAAAAAAAAAAAAAAeAAAAAEAAABAAAAAAAAAAAAAAABaAAAAAAAAAAAAAAAAAAAAAAAAAAAAAAAAAAAAAAAAAAAAAAAAAAAAAAAAAAAAAAAAAAAAAAAAAAAAAAAAAAAAAAAAAAAAAAAAAAAAFAAAADwAAAABAAAAAgAAAP8AZgAPAAAAAQAAABQAAAAUAAAAFAAAAAEAAAAAAAAAZAAAAGQAAAAAAAAAZAAAAGQAAAAVAAAAYAAAAAAAAAAAAAAADwAAACADAAAAAAAAAAAAAAEAAACgMgAAVgcAAKr4//8BAAAAf39/AAEAAABkAAAAAAAAABQAAABAHwAAAAAAACYAAAAAAAAAwOD//wAAAAAmAAAAZAAAABYAAABMAAAAAAAAAAAAAAAEAAAAAAAAAAEAAACZloMKAAAAACgAAAAoAAAAZAAAAGQAAAAAAAAAzMzMAAAAAABQAAAAUAAAAGQAAABkAAAAAAAAABcAAAAUAAAAAAAAAAAAAAD/fwAA/38AAAAAAAAJAAAABAAAAAAAAAAeAAAAaAAAAAAAAAAAAAAAAAAAAAAAAAAAAAAAECcAABAnAAAAAAAAAAAAAAAAAAAAAAAAAAAAAAAAAAAAAAAAAAAAABQAAAAAAAAAwMD/AAAAAABkAAAAMgAAAAAAAABkAAAAAAAAAH9/fwAKAAAAIgAAABgAAAAAAAAAAAAAAAAAAAAAAAAAAAAAAAAAAAAkAAAAJAAAAAAAAAAHAAAAAAAAAAAAAAAAAAAAAAAAAAAAAAAAAAAAf39/ACUAAABYAAAAAAAAAAAAAAAAAAAAAAAAAAAAAAAAAAAAAAAAAAAAAAAAAAAAAAAAAAAAAAA/AAAAAAAAAKCGAQAAAAAAAAAAAAAAAAAMAAAAAQAAAAAAAAAAAAAAAAAAAB8AAABUAAAA////AAAAAAEAAAAAAAAAAAAAAAAAAAAAAAAAAAAAAAAAAAAAAAAAAP8AZgB/f38AAAAAA8zMzADAwP8Af39/AAAAAAAAAAAAAAAAAAAAAAAAAAAAIQAAABgAAAAUAAAAAAAAANACAABAOAAA0AIAAAAAAAAmAAAACAAAAP//////////"/>
+                  <pr:smNativeData xmlns:pr="smNativeData" xmlns="smNativeData" val="SMDATA_15_r8odaRMAAAAlAAAACgAAAA0AAAAAkAAAAEgAAACQAAAASAAAAAAAAAAAAAAAAAAAAAEAAABQAAAAAAAAAAAA4D8AAAAAAADgPwAAAAAAAOA/AAAAAAAA4D8AAAAAAADgPwAAAAAAAOA/AAAAAAAA4D8AAAAAAADgPwAAAAAAAOA/AAAAAAAA4D8CAAAAjAAAAAAAAAAAAAAA////AP///wgAAAAAAAAAAAAAAAAAAAAAAAAAAAAAAAAAAAAAeAAAAAEAAABAAAAAAAAAAAAAAABaAAAAAAAAAAAAAAAAAAAAAAAAAAAAAAAAAAAAAAAAAAAAAAAAAAAAAAAAAAAAAAAAAAAAAAAAAAAAAAAAAAAAAAAAAAAAAAAAAAAAFAAAADwAAAABAAAAAgAAAP8AZgAPAAAAAQAAABQAAAAUAAAAFAAAAAEAAAAAAAAAZAAAAGQAAAAAAAAAZAAAAGQAAAAVAAAAYAAAAAAAAAAAAAAADwAAACADAAAAAAAAAAAAAAEAAACgMgAAVgcAAKr4//8BAAAAf39/AAEAAABkAAAAAAAAABQAAABAHwAAAAAAACYAAAAAAAAAwOD//wAAAAAmAAAAZAAAABYAAABMAAAAAAAAAAAAAAAEAAAAAAAAAAEAAACZloMKAAAAACgAAAAoAAAAZAAAAGQAAAAAAAAAzMzMAAAAAABQAAAAUAAAAGQAAABkAAAAAAAAABcAAAAUAAAAAAAAAAAAAAD/fwAA/38AAAAAAAAJAAAABAAAAAAAAAAeAAAAaAAAAAAAAAAAAAAAAAAAAAAAAAAAAAAAECcAABAnAAAAAAAAAAAAAAAAAAAAAAAAAAAAAAAAAAAAAAAAAAAAABQAAAAAAAAAwMD/AAAAAABkAAAAMgAAAAAAAABkAAAAAAAAAH9/fwAKAAAAIgAAABgAAAAAAAAAAAAAAAAAAAAAAAAAAAAAAAAAAAAkAAAAJAAAAAAAAAAHAAAAAAAAAAAAAAAAAAAAAAAAAAAAAAAAAAAAf39/ACUAAABYAAAAAAAAAAAAAAAAAAAAAAAAAAAAAAAAAAAAAAAAAAAAAAAAAAAAAAAAAAAAAAA/AAAAAAAAAKCGAQAAAAAAAAAAAAAAAAAMAAAAAQAAAAAAAAAAAAAAAAAAAB8AAABUAAAA////AAAAAAEAAAAAAAAAAAAAAAAAAAAAAAAAAAAAAAAAAAAAAAAAAP8AZgB/f38AAAAAA8zMzADAwP8Af39/AAAAAAAAAAAAAAAAAAAAAAAAAAAAIQAAABgAAAAUAAAAAAAAANACAABAOAAA0AIAAAAAAAAmAAAACAAAAP//////////"/>
                 </a:ext>
               </a:extLst>
             </p:cNvSpPr>
@@ -2554,7 +2554,7 @@
             <p:cNvSpPr>
               <a:extLst>
                 <a:ext uri="smNativeData">
-                  <pr:smNativeData xmlns:pr="smNativeData" xmlns="smNativeData" val="SMDATA_15_mcIdaRMAAAAlAAAACgAAAA0AAAAAkAAAAEgAAACQAAAASAAAAAAAAAAAAAAAAAAAAAEAAABQAAAAAAAAAAAA4D8AAAAAAADgPwAAAAAAAOA/AAAAAAAA4D8AAAAAAADgPwAAAAAAAOA/AAAAAAAA4D8AAAAAAADgPwAAAAAAAOA/AAAAAAAA4D8CAAAAjAAAAAAAAAAAAAAA////AP///wgAAAAAAAAAAAAAAAAAAAAAAAAAAAAAAAAAAAAAeAAAAAEAAABAAAAAAAAAAAAAAABaAAAAAAAAAAAAAAAAAAAAAAAAAAAAAAAAAAAAAAAAAAAAAAAAAAAAAAAAAAAAAAAAAAAAAAAAAAAAAAAAAAAAAAAAAAAAAAAAAAAAFAAAADwAAAABAAAAAgAAAP8AZgAPAAAAAQAAABQAAAAUAAAAFAAAAAEAAAAAAAAAZAAAAGQAAAAAAAAAZAAAAGQAAAAVAAAAYAAAAAAAAAAAAAAADwAAACADAAAAAAAAAAAAAAEAAACgMgAAVgcAAKr4//8BAAAAf39/AAEAAABkAAAAAAAAABQAAABAHwAAAAAAACYAAAAAAAAAwOD//wAAAAAmAAAAZAAAABYAAABMAAAAAAAAAAAAAAAEAAAAAAAAAAEAAACZloMKAAAAACgAAAAoAAAAZAAAAGQAAAAAAAAAzMzMAAAAAABQAAAAUAAAAGQAAABkAAAAAAAAABcAAAAUAAAAAAAAAAAAAAD/fwAA/38AAAAAAAAJAAAABAAAAAAAAAAeAAAAaAAAAAAAAAAAAAAAAAAAAAAAAAAAAAAAECcAABAnAAAAAAAAAAAAAAAAAAAAAAAAAAAAAAAAAAAAAAAAAAAAABQAAAAAAAAAwMD/AAAAAABkAAAAMgAAAAAAAABkAAAAAAAAAH9/fwAKAAAAIgAAABgAAAAAAAAAAAAAAAAAAAAAAAAAAAAAAAAAAAAkAAAAJAAAAAAAAAAHAAAAAAAAAAAAAAAAAAAAAAAAAAAAAAAAAAAAf39/ACUAAABYAAAAAAAAAAAAAAAAAAAAAAAAAAAAAAAAAAAAAAAAAAAAAAAAAAAAAAAAAAAAAAA/AAAAAAAAAKCGAQAAAAAAAAAAAAAAAAAMAAAAAQAAAAAAAAAAAAAAAAAAAB8AAABUAAAA////AAAAAAEAAAAAAAAAAAAAAAAAAAAAAAAAAAAAAAAAAAAAAAAAAP8AZgB/f38AAAAAA8zMzADAwP8Af39/AAAAAAAAAAAAAAAAAAAAAAAAAAAAIQAAABgAAAAUAAAAAAAAADgEAABAOAAAOAQAAAAAAAAmAAAACAAAAP//////////"/>
+                  <pr:smNativeData xmlns:pr="smNativeData" xmlns="smNativeData" val="SMDATA_15_r8odaRMAAAAlAAAACgAAAA0AAAAAkAAAAEgAAACQAAAASAAAAAAAAAAAAAAAAAAAAAEAAABQAAAAAAAAAAAA4D8AAAAAAADgPwAAAAAAAOA/AAAAAAAA4D8AAAAAAADgPwAAAAAAAOA/AAAAAAAA4D8AAAAAAADgPwAAAAAAAOA/AAAAAAAA4D8CAAAAjAAAAAAAAAAAAAAA////AP///wgAAAAAAAAAAAAAAAAAAAAAAAAAAAAAAAAAAAAAeAAAAAEAAABAAAAAAAAAAAAAAABaAAAAAAAAAAAAAAAAAAAAAAAAAAAAAAAAAAAAAAAAAAAAAAAAAAAAAAAAAAAAAAAAAAAAAAAAAAAAAAAAAAAAAAAAAAAAAAAAAAAAFAAAADwAAAABAAAAAgAAAP8AZgAPAAAAAQAAABQAAAAUAAAAFAAAAAEAAAAAAAAAZAAAAGQAAAAAAAAAZAAAAGQAAAAVAAAAYAAAAAAAAAAAAAAADwAAACADAAAAAAAAAAAAAAEAAACgMgAAVgcAAKr4//8BAAAAf39/AAEAAABkAAAAAAAAABQAAABAHwAAAAAAACYAAAAAAAAAwOD//wAAAAAmAAAAZAAAABYAAABMAAAAAAAAAAAAAAAEAAAAAAAAAAEAAACZloMKAAAAACgAAAAoAAAAZAAAAGQAAAAAAAAAzMzMAAAAAABQAAAAUAAAAGQAAABkAAAAAAAAABcAAAAUAAAAAAAAAAAAAAD/fwAA/38AAAAAAAAJAAAABAAAAAAAAAAeAAAAaAAAAAAAAAAAAAAAAAAAAAAAAAAAAAAAECcAABAnAAAAAAAAAAAAAAAAAAAAAAAAAAAAAAAAAAAAAAAAAAAAABQAAAAAAAAAwMD/AAAAAABkAAAAMgAAAAAAAABkAAAAAAAAAH9/fwAKAAAAIgAAABgAAAAAAAAAAAAAAAAAAAAAAAAAAAAAAAAAAAAkAAAAJAAAAAAAAAAHAAAAAAAAAAAAAAAAAAAAAAAAAAAAAAAAAAAAf39/ACUAAABYAAAAAAAAAAAAAAAAAAAAAAAAAAAAAAAAAAAAAAAAAAAAAAAAAAAAAAAAAAAAAAA/AAAAAAAAAKCGAQAAAAAAAAAAAAAAAAAMAAAAAQAAAAAAAAAAAAAAAAAAAB8AAABUAAAA////AAAAAAEAAAAAAAAAAAAAAAAAAAAAAAAAAAAAAAAAAAAAAAAAAP8AZgB/f38AAAAAA8zMzADAwP8Af39/AAAAAAAAAAAAAAAAAAAAAAAAAAAAIQAAABgAAAAUAAAAAAAAADgEAABAOAAAOAQAAAAAAAAmAAAACAAAAP//////////"/>
                 </a:ext>
               </a:extLst>
             </p:cNvSpPr>
@@ -2586,7 +2586,7 @@
             <p:cNvSpPr>
               <a:extLst>
                 <a:ext uri="smNativeData">
-                  <pr:smNativeData xmlns:pr="smNativeData" xmlns="smNativeData" val="SMDATA_15_mcIdaRMAAAAlAAAACgAAAA0AAAAAkAAAAEgAAACQAAAASAAAAAAAAAAAAAAAAAAAAAEAAABQAAAAAAAAAAAA4D8AAAAAAADgPwAAAAAAAOA/AAAAAAAA4D8AAAAAAADgPwAAAAAAAOA/AAAAAAAA4D8AAAAAAADgPwAAAAAAAOA/AAAAAAAA4D8CAAAAjAAAAAAAAAAAAAAA////AP///wgAAAAAAAAAAAAAAAAAAAAAAAAAAAAAAAAAAAAAeAAAAAEAAABAAAAAAAAAAAAAAABaAAAAAAAAAAAAAAAAAAAAAAAAAAAAAAAAAAAAAAAAAAAAAAAAAAAAAAAAAAAAAAAAAAAAAAAAAAAAAAAAAAAAAAAAAAAAAAAAAAAAFAAAADwAAAABAAAAAgAAAP8AZgAPAAAAAQAAABQAAAAUAAAAFAAAAAEAAAAAAAAAZAAAAGQAAAAAAAAAZAAAAGQAAAAVAAAAYAAAAAAAAAAAAAAADwAAACADAAAAAAAAAAAAAAEAAACgMgAAVgcAAKr4//8BAAAAf39/AAEAAABkAAAAAAAAABQAAABAHwAAAAAAACYAAAAAAAAAwOD//wAAAAAmAAAAZAAAABYAAABMAAAAAAAAAAAAAAAEAAAAAAAAAAEAAACZloMKAAAAACgAAAAoAAAAZAAAAGQAAAAAAAAAzMzMAAAAAABQAAAAUAAAAGQAAABkAAAAAAAAABcAAAAUAAAAAAAAAAAAAAD/fwAA/38AAAAAAAAJAAAABAAAAAAAAAAeAAAAaAAAAAAAAAAAAAAAAAAAAAAAAAAAAAAAECcAABAnAAAAAAAAAAAAAAAAAAAAAAAAAAAAAAAAAAAAAAAAAAAAABQAAAAAAAAAwMD/AAAAAABkAAAAMgAAAAAAAABkAAAAAAAAAH9/fwAKAAAAIgAAABgAAAAAAAAAAAAAAAAAAAAAAAAAAAAAAAAAAAAkAAAAJAAAAAAAAAAHAAAAAAAAAAAAAAAAAAAAAAAAAAAAAAAAAAAAf39/ACUAAABYAAAAAAAAAAAAAAAAAAAAAAAAAAAAAAAAAAAAAAAAAAAAAAAAAAAAAAAAAAAAAAA/AAAAAAAAAKCGAQAAAAAAAAAAAAAAAAAMAAAAAQAAAAAAAAAAAAAAAAAAAB8AAABUAAAA////AAAAAAEAAAAAAAAAAAAAAAAAAAAAAAAAAAAAAAAAAAAAAAAAAP8AZgB/f38AAAAAA8zMzADAwP8Af39/AAAAAAAAAAAAAAAAAAAAAAAAAAAAIQAAABgAAAAUAAAAAAAAAAImAABAOAAAAiYAAAAAAAAmAAAACAAAAP//////////"/>
+                  <pr:smNativeData xmlns:pr="smNativeData" xmlns="smNativeData" val="SMDATA_15_r8odaRMAAAAlAAAACgAAAA0AAAAAkAAAAEgAAACQAAAASAAAAAAAAAAAAAAAAAAAAAEAAABQAAAAAAAAAAAA4D8AAAAAAADgPwAAAAAAAOA/AAAAAAAA4D8AAAAAAADgPwAAAAAAAOA/AAAAAAAA4D8AAAAAAADgPwAAAAAAAOA/AAAAAAAA4D8CAAAAjAAAAAAAAAAAAAAA////AP///wgAAAAAAAAAAAAAAAAAAAAAAAAAAAAAAAAAAAAAeAAAAAEAAABAAAAAAAAAAAAAAABaAAAAAAAAAAAAAAAAAAAAAAAAAAAAAAAAAAAAAAAAAAAAAAAAAAAAAAAAAAAAAAAAAAAAAAAAAAAAAAAAAAAAAAAAAAAAAAAAAAAAFAAAADwAAAABAAAAAgAAAP8AZgAPAAAAAQAAABQAAAAUAAAAFAAAAAEAAAAAAAAAZAAAAGQAAAAAAAAAZAAAAGQAAAAVAAAAYAAAAAAAAAAAAAAADwAAACADAAAAAAAAAAAAAAEAAACgMgAAVgcAAKr4//8BAAAAf39/AAEAAABkAAAAAAAAABQAAABAHwAAAAAAACYAAAAAAAAAwOD//wAAAAAmAAAAZAAAABYAAABMAAAAAAAAAAAAAAAEAAAAAAAAAAEAAACZloMKAAAAACgAAAAoAAAAZAAAAGQAAAAAAAAAzMzMAAAAAABQAAAAUAAAAGQAAABkAAAAAAAAABcAAAAUAAAAAAAAAAAAAAD/fwAA/38AAAAAAAAJAAAABAAAAAAAAAAeAAAAaAAAAAAAAAAAAAAAAAAAAAAAAAAAAAAAECcAABAnAAAAAAAAAAAAAAAAAAAAAAAAAAAAAAAAAAAAAAAAAAAAABQAAAAAAAAAwMD/AAAAAABkAAAAMgAAAAAAAABkAAAAAAAAAH9/fwAKAAAAIgAAABgAAAAAAAAAAAAAAAAAAAAAAAAAAAAAAAAAAAAkAAAAJAAAAAAAAAAHAAAAAAAAAAAAAAAAAAAAAAAAAAAAAAAAAAAAf39/ACUAAABYAAAAAAAAAAAAAAAAAAAAAAAAAAAAAAAAAAAAAAAAAAAAAAAAAAAAAAAAAAAAAAA/AAAAAAAAAKCGAQAAAAAAAAAAAAAAAAAMAAAAAQAAAAAAAAAAAAAAAAAAAB8AAABUAAAA////AAAAAAEAAAAAAAAAAAAAAAAAAAAAAAAAAAAAAAAAAAAAAAAAAP8AZgB/f38AAAAAA8zMzADAwP8Af39/AAAAAAAAAAAAAAAAAAAAAAAAAAAAIQAAABgAAAAUAAAAAAAAAAImAABAOAAAAiYAAAAAAAAmAAAACAAAAP//////////"/>
                 </a:ext>
               </a:extLst>
             </p:cNvSpPr>
@@ -2618,7 +2618,7 @@
             <p:cNvSpPr>
               <a:extLst>
                 <a:ext uri="smNativeData">
-                  <pr:smNativeData xmlns:pr="smNativeData" xmlns="smNativeData" val="SMDATA_15_mcIdaRMAAAAlAAAACgAAAA0AAAAAkAAAAEgAAACQAAAASAAAAAAAAAAAAAAAAAAAAAEAAABQAAAAAAAAAAAA4D8AAAAAAADgPwAAAAAAAOA/AAAAAAAA4D8AAAAAAADgPwAAAAAAAOA/AAAAAAAA4D8AAAAAAADgPwAAAAAAAOA/AAAAAAAA4D8CAAAAjAAAAAAAAAAAAAAA////AP///wgAAAAAAAAAAAAAAAAAAAAAAAAAAAAAAAAAAAAAeAAAAAEAAABAAAAAAAAAAAAAAABaAAAAAAAAAAAAAAAAAAAAAAAAAAAAAAAAAAAAAAAAAAAAAAAAAAAAAAAAAAAAAAAAAAAAAAAAAAAAAAAAAAAAAAAAAAAAAAAAAAAAFAAAADwAAAABAAAAAgAAAP8AZgAPAAAAAQAAABQAAAAUAAAAFAAAAAEAAAAAAAAAZAAAAGQAAAAAAAAAZAAAAGQAAAAVAAAAYAAAAAAAAAAAAAAADwAAACADAAAAAAAAAAAAAAEAAACgMgAAVgcAAKr4//8BAAAAf39/AAEAAABkAAAAAAAAABQAAABAHwAAAAAAACYAAAAAAAAAwOD//wAAAAAmAAAAZAAAABYAAABMAAAAAAAAAAAAAAAEAAAAAAAAAAEAAACZloMKAAAAACgAAAAoAAAAZAAAAGQAAAAAAAAAzMzMAAAAAABQAAAAUAAAAGQAAABkAAAAAAAAABcAAAAUAAAAAAAAAAAAAAD/fwAA/38AAAAAAAAJAAAABAAAABOrwE0eAAAAaAAAAAAAAAAAAAAAAAAAAAAAAAAAAAAAECcAABAnAAAAAAAAAAAAAAAAAAAAAAAAAAAAAAAAAAAAAAAAAAAAABQAAAAAAAAAwMD/AAAAAABkAAAAMgAAAAAAAABkAAAAAAAAAH9/fwAKAAAAIgAAABgAAAAAAAAAAAAAAAAAAAAAAAAAAAAAAAAAAAAkAAAAJAAAAAAAAAAHAAAAAAAAAAAAAAAAAAAAAAAAAAAAAAAAAAAAf39/ACUAAABYAAAAAAAAAAAAAAAAAAAAAAAAAAAAAAAAAAAAAAAAAAAAAAAAAAAAAAAAAAAAAAA/AAAAAAAAAKCGAQAAAAAAAAAAAAAAAAAMAAAAAQAAAAAAAAAAAAAAAAAAAB8AAABUAAAA////AAAAAAEAAAAAAAAAAAAAAAAAAAAAAAAAAAAAAAAAAAAAAAAAAP8AZgB/f38AAAAAA8zMzADAwP8Af39/AAAAAAAAAAAAAAAAAAAAAAAAAAAAIQAAABgAAAAUAAAAAAAAAGonAABAOAAAaicAAAAAAAAmAAAACAAAAP//////////"/>
+                  <pr:smNativeData xmlns:pr="smNativeData" xmlns="smNativeData" val="SMDATA_15_r8odaRMAAAAlAAAACgAAAA0AAAAAkAAAAEgAAACQAAAASAAAAAAAAAAAAAAAAAAAAAEAAABQAAAAAAAAAAAA4D8AAAAAAADgPwAAAAAAAOA/AAAAAAAA4D8AAAAAAADgPwAAAAAAAOA/AAAAAAAA4D8AAAAAAADgPwAAAAAAAOA/AAAAAAAA4D8CAAAAjAAAAAAAAAAAAAAA////AP///wgAAAAAAAAAAAAAAAAAAAAAAAAAAAAAAAAAAAAAeAAAAAEAAABAAAAAAAAAAAAAAABaAAAAAAAAAAAAAAAAAAAAAAAAAAAAAAAAAAAAAAAAAAAAAAAAAAAAAAAAAAAAAAAAAAAAAAAAAAAAAAAAAAAAAAAAAAAAAAAAAAAAFAAAADwAAAABAAAAAgAAAP8AZgAPAAAAAQAAABQAAAAUAAAAFAAAAAEAAAAAAAAAZAAAAGQAAAAAAAAAZAAAAGQAAAAVAAAAYAAAAAAAAAAAAAAADwAAACADAAAAAAAAAAAAAAEAAACgMgAAVgcAAKr4//8BAAAAf39/AAEAAABkAAAAAAAAABQAAABAHwAAAAAAACYAAAAAAAAAwOD//wAAAAAmAAAAZAAAABYAAABMAAAAAAAAAAAAAAAEAAAAAAAAAAEAAACZloMKAAAAACgAAAAoAAAAZAAAAGQAAAAAAAAAzMzMAAAAAABQAAAAUAAAAGQAAABkAAAAAAAAABcAAAAUAAAAAAAAAAAAAAD/fwAA/38AAAAAAAAJAAAABAAAABOrwE0eAAAAaAAAAAAAAAAAAAAAAAAAAAAAAAAAAAAAECcAABAnAAAAAAAAAAAAAAAAAAAAAAAAAAAAAAAAAAAAAAAAAAAAABQAAAAAAAAAwMD/AAAAAABkAAAAMgAAAAAAAABkAAAAAAAAAH9/fwAKAAAAIgAAABgAAAAAAAAAAAAAAAAAAAAAAAAAAAAAAAAAAAAkAAAAJAAAAAAAAAAHAAAAAAAAAAAAAAAAAAAAAAAAAAAAAAAAAAAAf39/ACUAAABYAAAAAAAAAAAAAAAAAAAAAAAAAAAAAAAAAAAAAAAAAAAAAAAAAAAAAAAAAAAAAAA/AAAAAAAAAKCGAQAAAAAAAAAAAAAAAAAMAAAAAQAAAAAAAAAAAAAAAAAAAB8AAABUAAAA////AAAAAAEAAAAAAAAAAAAAAAAAAAAAAAAAAAAAAAAAAAAAAAAAAP8AZgB/f38AAAAAA8zMzADAwP8Af39/AAAAAAAAAAAAAAAAAAAAAAAAAAAAIQAAABgAAAAUAAAAAAAAAGonAABAOAAAaicAAAAAAAAmAAAACAAAAP//////////"/>
                 </a:ext>
               </a:extLst>
             </p:cNvSpPr>
@@ -2650,7 +2650,7 @@
             <p:cNvSpPr>
               <a:extLst>
                 <a:ext uri="smNativeData">
-                  <pr:smNativeData xmlns:pr="smNativeData" xmlns="smNativeData" val="SMDATA_15_mcIdaRMAAAAlAAAACgAAAA0AAAAAkAAAAEgAAACQAAAASAAAAAAAAAAAAAAAAAAAAAEAAABQAAAAAAAAAAAA4D8AAAAAAADgPwAAAAAAAOA/AAAAAAAA4D8AAAAAAADgPwAAAAAAAOA/AAAAAAAA4D8AAAAAAADgPwAAAAAAAOA/AAAAAAAA4D8CAAAAjAAAAAAAAAAAAAAA////AP///wgAAAAAAAAAAAAAAAAAAAAAAAAAAAAAAAAAAAAAeAAAAAEAAABAAAAAAAAAAAAAAABaAAAAAAAAAAAAAAAAAAAAAAAAAAAAAAAAAAAAAAAAAAAAAAAAAAAAAAAAAAAAAAAAAAAAAAAAAAAAAAAAAAAAAAAAAAAAAAAAAAAAFAAAADwAAAABAAAAAgAAAP8AZgAPAAAAAQAAABQAAAAUAAAAFAAAAAEAAAAAAAAAZAAAAGQAAAAAAAAAZAAAAGQAAAAVAAAAYAAAAAAAAAAAAAAADwAAACADAAAAAAAAAAAAAAEAAACgMgAAVgcAAKr4//8BAAAAf39/AAEAAABkAAAAAAAAABQAAABAHwAAAAAAACYAAAAAAAAAwOD//wAAAAAmAAAAZAAAABYAAABMAAAAAAAAAAAAAAAEAAAAAAAAAAEAAACZloMKAAAAACgAAAAoAAAAZAAAAGQAAAAAAAAAzMzMAAAAAABQAAAAUAAAAGQAAABkAAAAAAAAABcAAAAUAAAAAAAAAAAAAAD/fwAA/38AAAAAAAAJAAAABAAAAMHWMkYeAAAAaAAAAAAAAAAAAAAAAAAAAAAAAAAAAAAAECcAABAnAAAAAAAAAAAAAAAAAAAAAAAAAAAAAAAAAAAAAAAAAAAAABQAAAAAAAAAwMD/AAAAAABkAAAAMgAAAAAAAABkAAAAAAAAAH9/fwAKAAAAIgAAABgAAAAAAAAAAAAAAAAAAAAAAAAAAAAAAAAAAAAkAAAAJAAAAAAAAAAHAAAAAAAAAAAAAAAAAAAAAAAAAAAAAAAAAAAAf39/ACUAAABYAAAAAAAAAAAAAAAAAAAAAAAAAAAAAAAAAAAAAAAAAAAAAAAAAAAAAAAAAAAAAAA/AAAAAAAAAKCGAQAAAAAAAAAAAAAAAAAMAAAAAQAAAAAAAAAAAAAAAAAAAB8AAABUAAAA////AAAAAAEAAAAAAAAAAAAAAAAAAAAAAAAAAAAAAAAAAAAAAAAAAP8AZgB/f38AAAAAA8zMzADAwP8Af39/AAAAAAAAAAAAAAAAAAAAAAAAAAAAIQAAABgAAAAUAAAAAAAAABgVAABAOAAAGBUAAAAAAAAmAAAACAAAAP//////////"/>
+                  <pr:smNativeData xmlns:pr="smNativeData" xmlns="smNativeData" val="SMDATA_15_r8odaRMAAAAlAAAACgAAAA0AAAAAkAAAAEgAAACQAAAASAAAAAAAAAAAAAAAAAAAAAEAAABQAAAAAAAAAAAA4D8AAAAAAADgPwAAAAAAAOA/AAAAAAAA4D8AAAAAAADgPwAAAAAAAOA/AAAAAAAA4D8AAAAAAADgPwAAAAAAAOA/AAAAAAAA4D8CAAAAjAAAAAAAAAAAAAAA////AP///wgAAAAAAAAAAAAAAAAAAAAAAAAAAAAAAAAAAAAAeAAAAAEAAABAAAAAAAAAAAAAAABaAAAAAAAAAAAAAAAAAAAAAAAAAAAAAAAAAAAAAAAAAAAAAAAAAAAAAAAAAAAAAAAAAAAAAAAAAAAAAAAAAAAAAAAAAAAAAAAAAAAAFAAAADwAAAABAAAAAgAAAP8AZgAPAAAAAQAAABQAAAAUAAAAFAAAAAEAAAAAAAAAZAAAAGQAAAAAAAAAZAAAAGQAAAAVAAAAYAAAAAAAAAAAAAAADwAAACADAAAAAAAAAAAAAAEAAACgMgAAVgcAAKr4//8BAAAAf39/AAEAAABkAAAAAAAAABQAAABAHwAAAAAAACYAAAAAAAAAwOD//wAAAAAmAAAAZAAAABYAAABMAAAAAAAAAAAAAAAEAAAAAAAAAAEAAACZloMKAAAAACgAAAAoAAAAZAAAAGQAAAAAAAAAzMzMAAAAAABQAAAAUAAAAGQAAABkAAAAAAAAABcAAAAUAAAAAAAAAAAAAAD/fwAA/38AAAAAAAAJAAAABAAAAMHWMkYeAAAAaAAAAAAAAAAAAAAAAAAAAAAAAAAAAAAAECcAABAnAAAAAAAAAAAAAAAAAAAAAAAAAAAAAAAAAAAAAAAAAAAAABQAAAAAAAAAwMD/AAAAAABkAAAAMgAAAAAAAABkAAAAAAAAAH9/fwAKAAAAIgAAABgAAAAAAAAAAAAAAAAAAAAAAAAAAAAAAAAAAAAkAAAAJAAAAAAAAAAHAAAAAAAAAAAAAAAAAAAAAAAAAAAAAAAAAAAAf39/ACUAAABYAAAAAAAAAAAAAAAAAAAAAAAAAAAAAAAAAAAAAAAAAAAAAAAAAAAAAAAAAAAAAAA/AAAAAAAAAKCGAQAAAAAAAAAAAAAAAAAMAAAAAQAAAAAAAAAAAAAAAAAAAB8AAABUAAAA////AAAAAAEAAAAAAAAAAAAAAAAAAAAAAAAAAAAAAAAAAAAAAAAAAP8AZgB/f38AAAAAA8zMzADAwP8Af39/AAAAAAAAAAAAAAAAAAAAAAAAAAAAIQAAABgAAAAUAAAAAAAAABgVAABAOAAAGBUAAAAAAAAmAAAACAAAAP//////////"/>
                 </a:ext>
               </a:extLst>
             </p:cNvSpPr>
@@ -2719,7 +2719,7 @@
             <a:spLocks noGrp="1" noChangeArrowheads="1"/>
             <a:extLst>
               <a:ext uri="smNativeData">
-                <pr:smNativeData xmlns:pr="smNativeData" xmlns="smNativeData" val="SMDATA_15_mcIdaRMAAAAlAAAAZAAAAA0AAAAAAAAAAAAAAAAAAAAAAAAAAAAAAAAAAAAAAAAAAAEAAABQAAAAAAAAAAAA4D8AAAAAAADgPwAAAAAAAOA/AAAAAAAA4D8AAAAAAADgPwAAAAAAAOA/AAAAAAAA4D8AAAAAAADgPwAAAAAAAOA/AAAAAAAA4D8CAAAAjAAAAAAAAAAAAAAA40oGDP///wgAAAAAAAAAAAAAAAAAAAAAAAAAAAAAAAAAAAAAZAAAAAEAAABAAAAAAAAAAAAAAAAAAAAAAAAAAAAAAAAAAAAAAAAAAAAAAAAAAAAAAAAAAAAAAAAAAAAAAAAAAAAAAAAAAAAAAAAAAAAAAAAAAAAAAAAAAAAAAAAAAAAAFAAAADwAAAAAAAAAAAAAAAAAAAkUAAAAAQAAABQAAAAUAAAAFAAAAAEAAAAAAAAAZAAAAGQAAAAAAAAAZAAAAGQAAAAVAAAAYAAAAAAAAAAAAAAADwAAACADAAAAAAAAAAAAAAEAAACgMgAAVgcAAKr4//8BAAAAf39/AAEAAABkAAAAAAAAABQAAABAHwAAAAAAACYAAAAAAAAAwOD//wAAAAAmAAAAZAAAABYAAABMAAAAAAAAAAAAAAAEAAAAAAAAAAEAAACZloMKAAAAACgAAAAoAAAAZAAAAGQAAAAAAAAAzMzMAAAAAABQAAAAUAAAAGQAAABkAAAAAAAAABcAAAAUAAAAAAAAAAAAAAD/fwAA/38AAAAAAAAJAAAABAAAAAAAAAAeAAAAaAAAAAAAAAAAAAAAAAAAAAAAAAAAAAAAECcAABAnAAAAAAAAAAAAAAAAAAAAAAAAAAAAAAAAAAAAAAAAAAAAABQAAAAAAAAAwMD/AAAAAABkAAAAMgAAAAAAAABkAAAAAAAAAH9/fwAKAAAAIgAAABgAAAAAAAAAAAAAAAAAAAAAAAAAAAAAAAAAAAAkAAAAJAAAAAAAAAAHAAAAAAAAAAAAAAAAAAAAAAAAAAAAAAAAAAAAf39/ACUAAABYAAAAAAAAAAAAAAAAAAAAAAAAAAAAAAAAAAAAAAAAAAAAAAAAAAAAAAAAAAAAAAA/AAAAAAAAAKCGAQAAAAAAAAAAAAAAAAAMAAAAAQAAAAAAAAAAAAAAAAAAAB8AAABUAAAAAAAABQAAAAEAAAAAAAAAAAAAAAAAAAAAAAAAAAAAAAAAAAAAAAAAAAAAAAJ/f38AAAAAA8zMzADAwP8Af39/AAAAAAAAAAAAAAAAAAAAAAAAAAAAIQAAABgAAAAUAAAA0AIAABADAABwNQAAqAcAABAAAAAmAAAACAAAAAGAAAAAAAAA"/>
+                <pr:smNativeData xmlns:pr="smNativeData" xmlns="smNativeData" val="SMDATA_15_r8odaRMAAAAlAAAAZAAAAA0AAAAAAAAAAAAAAAAAAAAAAAAAAAAAAAAAAAAAAAAAAAEAAABQAAAAAAAAAAAA4D8AAAAAAADgPwAAAAAAAOA/AAAAAAAA4D8AAAAAAADgPwAAAAAAAOA/AAAAAAAA4D8AAAAAAADgPwAAAAAAAOA/AAAAAAAA4D8CAAAAjAAAAAAAAAAAAAAA40oGDP///wgAAAAAAAAAAAAAAAAAAAAAAAAAAAAAAAAAAAAAZAAAAAEAAABAAAAAAAAAAAAAAAAAAAAAAAAAAAAAAAAAAAAAAAAAAAAAAAAAAAAAAAAAAAAAAAAAAAAAAAAAAAAAAAAAAAAAAAAAAAAAAAAAAAAAAAAAAAAAAAAAAAAAFAAAADwAAAAAAAAAAAAAAAAAAAkUAAAAAQAAABQAAAAUAAAAFAAAAAEAAAAAAAAAZAAAAGQAAAAAAAAAZAAAAGQAAAAVAAAAYAAAAAAAAAAAAAAADwAAACADAAAAAAAAAAAAAAEAAACgMgAAVgcAAKr4//8BAAAAf39/AAEAAABkAAAAAAAAABQAAABAHwAAAAAAACYAAAAAAAAAwOD//wAAAAAmAAAAZAAAABYAAABMAAAAAAAAAAAAAAAEAAAAAAAAAAEAAACZloMKAAAAACgAAAAoAAAAZAAAAGQAAAAAAAAAzMzMAAAAAABQAAAAUAAAAGQAAABkAAAAAAAAABcAAAAUAAAAAAAAAAAAAAD/fwAA/38AAAAAAAAJAAAABAAAAAAAAAAeAAAAaAAAAAAAAAAAAAAAAAAAAAAAAAAAAAAAECcAABAnAAAAAAAAAAAAAAAAAAAAAAAAAAAAAAAAAAAAAAAAAAAAABQAAAAAAAAAwMD/AAAAAABkAAAAMgAAAAAAAABkAAAAAAAAAH9/fwAKAAAAIgAAABgAAAAAAAAAAAAAAAAAAAAAAAAAAAAAAAAAAAAkAAAAJAAAAAAAAAAHAAAAAAAAAAAAAAAAAAAAAAAAAAAAAAAAAAAAf39/ACUAAABYAAAAAAAAAAAAAAAAAAAAAAAAAAAAAAAAAAAAAAAAAAAAAAAAAAAAAAAAAAAAAAA/AAAAAAAAAKCGAQAAAAAAAAAAAAAAAAAMAAAAAQAAAAAAAAAAAAAAAAAAAB8AAABUAAAAAAAABQAAAAEAAAAAAAAAAAAAAAAAAAAAAAAAAAAAAAAAAAAAAAAAAAAAAAJ/f38AAAAAA8zMzADAwP8Af39/AAAAAAAAAAAAAAAAAAAAAAAAAAAAIQAAABgAAAAUAAAA0AIAABADAABwNQAAqAcAABAAAAAmAAAACAAAAAGAAAAAAAAA"/>
               </a:ext>
             </a:extLst>
           </p:cNvSpPr>
@@ -2789,7 +2789,7 @@
             <a:spLocks noGrp="1" noChangeArrowheads="1"/>
             <a:extLst>
               <a:ext uri="smNativeData">
-                <pr:smNativeData xmlns:pr="smNativeData" xmlns="smNativeData" val="SMDATA_15_mcIdaRMAAAAlAAAAZAAAAA0AAAAAAAAAAAAAAAAAAAAAAAAAAAAAAAAAAAAAAAAAAAEAAABQAAAAAAAAAAAA4D8AAAAAAADgPwAAAAAAAOA/AAAAAAAA4D8AAAAAAADgPwAAAAAAAOA/AAAAAAAA4D8AAAAAAADgPwAAAAAAAOA/AAAAAAAA4D8CAAAAjAAAAAAAAAAAAAAA40oGDP///wgAAAAAAAAAAAAAAAAAAAAAAAAAAAAAAAAAAAAAZAAAAAEAAABAAAAAAAAAAAAAAAAAAAAAAAAAAAAAAAAAAAAAAAAAAAAAAAAAAAAAAAAAAAAAAAAAAAAAAAAAAAAAAAAAAAAAAAAAAAAAAAAAAAAAAAAAAAAAAAAAAAAAFAAAADwAAAAAAAAAAAAAAAAAAAkUAAAAAQAAABQAAAAUAAAAFAAAAAEAAAAAAAAAZAAAAGQAAAAAAAAAZAAAAGQAAAAVAAAAYAAAAAAAAAAAAAAADwAAACADAAAAAAAAAAAAAAEAAACgMgAAVgcAAKr4//8BAAAAf39/AAEAAABkAAAAAAAAABQAAABAHwAAAAAAACYAAAAAAAAAwOD//wAAAAAmAAAAZAAAABYAAABMAAAAAAAAAAAAAAAEAAAAAAAAAAEAAACZloMKAAAAACgAAAAoAAAAZAAAAGQAAAAAAAAAzMzMAAAAAABQAAAAUAAAAGQAAABkAAAAAAAAABcAAAAUAAAAAAAAAAAAAAD/fwAA/38AAAAAAAAJAAAABAAAAAAAAAAeAAAAaAAAAAAAAAAAAAAAAAAAAAAAAAAAAAAAECcAABAnAAAAAAAAAAAAAAAAAAAAAAAAAAAAAAAAAAAAAAAAAAAAABQAAAAAAAAAwMD/AAAAAABkAAAAMgAAAAAAAABkAAAAAAAAAH9/fwAKAAAAIgAAABgAAAAAAAAAAAAAAAAAAAAAAAAAAAAAAAAAAAAkAAAAJAAAAAAAAAAHAAAAAAAAAAAAAAAAAAAAAAAAAAAAAAAAAAAAf39/ACUAAABYAAAAAAAAAAAAAAAAAAAAAAAAAAAAAAAAAAAAAAAAAAAAAAAAAAAAAAAAAAAAAAA/AAAAAAAAAKCGAQAAAAAAAAAAAAAAAAAMAAAAAQAAAAAAAAAAAAAAAAAAAB8AAABUAAAAAAAABQAAAAEAAAAAAAAAAAAAAAAAAAAAAAAAAAAAAAAAAAAAAAAAAAAAAAJ/f38AAAAAA8zMzADAwP8Af39/AAAAAAAAAAAAAAAAAAAAAAAAAAAAIQAAABgAAAAUAAAA0AIAAK0IAABwNQAAAiYAABAAAAAmAAAACAAAAAGgAAAAAAAA"/>
+                <pr:smNativeData xmlns:pr="smNativeData" xmlns="smNativeData" val="SMDATA_15_r8odaRMAAAAlAAAAZAAAAA0AAAAAAAAAAAAAAAAAAAAAAAAAAAAAAAAAAAAAAAAAAAEAAABQAAAAAAAAAAAA4D8AAAAAAADgPwAAAAAAAOA/AAAAAAAA4D8AAAAAAADgPwAAAAAAAOA/AAAAAAAA4D8AAAAAAADgPwAAAAAAAOA/AAAAAAAA4D8CAAAAjAAAAAAAAAAAAAAA40oGDP///wgAAAAAAAAAAAAAAAAAAAAAAAAAAAAAAAAAAAAAZAAAAAEAAABAAAAAAAAAAAAAAAAAAAAAAAAAAAAAAAAAAAAAAAAAAAAAAAAAAAAAAAAAAAAAAAAAAAAAAAAAAAAAAAAAAAAAAAAAAAAAAAAAAAAAAAAAAAAAAAAAAAAAFAAAADwAAAAAAAAAAAAAAAAAAAkUAAAAAQAAABQAAAAUAAAAFAAAAAEAAAAAAAAAZAAAAGQAAAAAAAAAZAAAAGQAAAAVAAAAYAAAAAAAAAAAAAAADwAAACADAAAAAAAAAAAAAAEAAACgMgAAVgcAAKr4//8BAAAAf39/AAEAAABkAAAAAAAAABQAAABAHwAAAAAAACYAAAAAAAAAwOD//wAAAAAmAAAAZAAAABYAAABMAAAAAAAAAAAAAAAEAAAAAAAAAAEAAACZloMKAAAAACgAAAAoAAAAZAAAAGQAAAAAAAAAzMzMAAAAAABQAAAAUAAAAGQAAABkAAAAAAAAABcAAAAUAAAAAAAAAAAAAAD/fwAA/38AAAAAAAAJAAAABAAAAAAAAAAeAAAAaAAAAAAAAAAAAAAAAAAAAAAAAAAAAAAAECcAABAnAAAAAAAAAAAAAAAAAAAAAAAAAAAAAAAAAAAAAAAAAAAAABQAAAAAAAAAwMD/AAAAAABkAAAAMgAAAAAAAABkAAAAAAAAAH9/fwAKAAAAIgAAABgAAAAAAAAAAAAAAAAAAAAAAAAAAAAAAAAAAAAkAAAAJAAAAAAAAAAHAAAAAAAAAAAAAAAAAAAAAAAAAAAAAAAAAAAAf39/ACUAAABYAAAAAAAAAAAAAAAAAAAAAAAAAAAAAAAAAAAAAAAAAAAAAAAAAAAAAAAAAAAAAAA/AAAAAAAAAKCGAQAAAAAAAAAAAAAAAAAMAAAAAQAAAAAAAAAAAAAAAAAAAB8AAABUAAAAAAAABQAAAAEAAAAAAAAAAAAAAAAAAAAAAAAAAAAAAAAAAAAAAAAAAAAAAAJ/f38AAAAAA8zMzADAwP8Af39/AAAAAAAAAAAAAAAAAAAAAAAAAAAAIQAAABgAAAAUAAAA0AIAAK0IAABwNQAAAiYAABAAAAAmAAAACAAAAAGgAAAAAAAA"/>
               </a:ext>
             </a:extLst>
           </p:cNvSpPr>
@@ -2905,7 +2905,7 @@
             <a:spLocks noGrp="1" noChangeArrowheads="1"/>
             <a:extLst>
               <a:ext uri="smNativeData">
-                <pr:smNativeData xmlns:pr="smNativeData" xmlns="smNativeData" val="SMDATA_15_mcIdaRMAAAAlAAAAEgAAAA0AAAAAkAAAAEgAAACQAAAASAAAAAAAAAAAAAAAAAAAAAEAAABQAAAAAAAAAAAA4D8AAAAAAADgPwAAAAAAAOA/AAAAAAAA4D8AAAAAAADgPwAAAAAAAOA/AAAAAAAA4D8AAAAAAADgPwAAAAAAAOA/AAAAAAAA4D8CAAAAjAAAAAAAAAAAAAAA////AP///wgAAAAAAAAAAAAAAAAAAAAAAAAAAAAAAAAAAAAAeAAAAAEAAABAAAAAAAAAAAAAAABaAAAAAAAAAAAAAAAAAAAAAAAAAAAAAAAAAAAAAAAAAAAAAAAAAAAAAAAAAAAAAAAAAAAAAAAAAAAAAAAAAAAAAAAAAAAAAAAAAAAAFAAAADwAAAAAAAAAAAAAAAAAAAAPAAAAAQAAACMAAAAjAAAAIwAAAB4AAAAAAAAAZAAAAGQAAAAAAAAAZAAAAGQAAAAVAAAAYAAAAAAAAAAAAAAADwAAACADAAAAAAAAAAAAAAEAAACgMgAAVgcAAKr4//8BAAAAf39/AAEAAABkAAAAAAAAABQAAABAHwAAAAAAACYAAAAAAAAAwOD//wAAAAAmAAAAZAAAABYAAABMAAAAAAAAAAAAAAAEAAAAAAAAAAEAAACZloMKAAAAACgAAAAoAAAAZAAAAGQAAAAAAAAAzMzMAAAAAABQAAAAUAAAAGQAAABkAAAAAAAAABcAAAAUAAAAAAAAAAAAAAD/fwAA/38AAAAAAAAJAAAABAAAAAAAAAAeAAAAaAAAAAAAAAAAAAAAAAAAAAAAAAAAAAAAECcAABAnAAAAAAAAAAAAAAAAAAAAAAAAAAAAAAAAAAAAAAAAAAAAABQAAAAAAAAAwMD/AAAAAABkAAAAMgAAAAAAAABkAAAAAAAAAH9/fwAKAAAAIgAAABgAAAAAAAAAAAAAAAAAAAAAAAAAAAAAAAAAAAAkAAAAJAAAAAAAAAAHAAAAAAAAAAAAAAAAAAAAAAAAAAAAAAAAAAAAf39/ACUAAABYAAAAAAAAAAAAAAAAAAAAAAAAAAAAAAAAAAAAAAAAAAAAAAAAAAAAAAAAAAAAAAA/AAAAAAAAAKCGAQAAAAAAAAAAAAAAAAAMAAAAAQAAAAAAAAAAAAAAAAAAAB8AAABUAAAA////AAAAAAEAAAAAAAAAAAAAAAAAAAAAAAAAAAAAAAAAAAAAAAAAAAAAAAB/f38AAAAAA8zMzADAwP8Af39/AAAAAAAAAAAAAAAAAAAAAAAAAAAAIQAAABgAAAAUAAAAAAAAAAAAAAAAAAAAAAAAABAAAAAmAAAACAAAAACBAAAAAAAA"/>
+                <pr:smNativeData xmlns:pr="smNativeData" xmlns="smNativeData" val="SMDATA_15_r8odaRMAAAAlAAAAEgAAAA0AAAAAkAAAAEgAAACQAAAASAAAAAAAAAAAAAAAAAAAAAEAAABQAAAAAAAAAAAA4D8AAAAAAADgPwAAAAAAAOA/AAAAAAAA4D8AAAAAAADgPwAAAAAAAOA/AAAAAAAA4D8AAAAAAADgPwAAAAAAAOA/AAAAAAAA4D8CAAAAjAAAAAAAAAAAAAAA////AP///wgAAAAAAAAAAAAAAAAAAAAAAAAAAAAAAAAAAAAAeAAAAAEAAABAAAAAAAAAAAAAAABaAAAAAAAAAAAAAAAAAAAAAAAAAAAAAAAAAAAAAAAAAAAAAAAAAAAAAAAAAAAAAAAAAAAAAAAAAAAAAAAAAAAAAAAAAAAAAAAAAAAAFAAAADwAAAAAAAAAAAAAAAAAAAAPAAAAAQAAACMAAAAjAAAAIwAAAB4AAAAAAAAAZAAAAGQAAAAAAAAAZAAAAGQAAAAVAAAAYAAAAAAAAAAAAAAADwAAACADAAAAAAAAAAAAAAEAAACgMgAAVgcAAKr4//8BAAAAf39/AAEAAABkAAAAAAAAABQAAABAHwAAAAAAACYAAAAAAAAAwOD//wAAAAAmAAAAZAAAABYAAABMAAAAAAAAAAAAAAAEAAAAAAAAAAEAAACZloMKAAAAACgAAAAoAAAAZAAAAGQAAAAAAAAAzMzMAAAAAABQAAAAUAAAAGQAAABkAAAAAAAAABcAAAAUAAAAAAAAAAAAAAD/fwAA/38AAAAAAAAJAAAABAAAAAAAAAAeAAAAaAAAAAAAAAAAAAAAAAAAAAAAAAAAAAAAECcAABAnAAAAAAAAAAAAAAAAAAAAAAAAAAAAAAAAAAAAAAAAAAAAABQAAAAAAAAAwMD/AAAAAABkAAAAMgAAAAAAAABkAAAAAAAAAH9/fwAKAAAAIgAAABgAAAAAAAAAAAAAAAAAAAAAAAAAAAAAAAAAAAAkAAAAJAAAAAAAAAAHAAAAAAAAAAAAAAAAAAAAAAAAAAAAAAAAAAAAf39/ACUAAABYAAAAAAAAAAAAAAAAAAAAAAAAAAAAAAAAAAAAAAAAAAAAAAAAAAAAAAAAAAAAAAA/AAAAAAAAAKCGAQAAAAAAAAAAAAAAAAAMAAAAAQAAAAAAAAAAAAAAAAAAAB8AAABUAAAA////AAAAAAEAAAAAAAAAAAAAAAAAAAAAAAAAAAAAAAAAAAAAAAAAAAAAAAB/f38AAAAAA8zMzADAwP8Af39/AAAAAAAAAAAAAAAAAAAAAAAAAAAAIQAAABgAAAAUAAAAAAAAAAAAAAAAAAAAAAAAABAAAAAmAAAACAAAAACBAAAAAAAA"/>
               </a:ext>
             </a:extLst>
           </p:cNvSpPr>
@@ -2936,7 +2936,7 @@
             <a:spLocks noGrp="1" noChangeArrowheads="1"/>
             <a:extLst>
               <a:ext uri="smNativeData">
-                <pr:smNativeData xmlns:pr="smNativeData" xmlns="smNativeData" val="SMDATA_15_mcIdaRMAAAAlAAAAEgAAAA0AAAAAkAAAAEgAAACQAAAASAAAAAAAAAAAAAAAAAAAAAEAAABQAAAAAAAAAAAA4D8AAAAAAADgPwAAAAAAAOA/AAAAAAAA4D8AAAAAAADgPwAAAAAAAOA/AAAAAAAA4D8AAAAAAADgPwAAAAAAAOA/AAAAAAAA4D8CAAAAjAAAAAAAAAAAAAAA////AP///wgAAAAAAAAAAAAAAAAAAAAAAAAAAAAAAAAAAAAAeAAAAAEAAABAAAAAAAAAAAAAAABaAAAAAAAAAAAAAAAAAAAAAAAAAAAAAAAAAAAAAAAAAAAAAAAAAAAAAAAAAAAAAAAAAAAAAAAAAAAAAAAAAAAAAAAAAAAAAAAAAAAAFAAAADwAAAAAAAAAAAAAAAAAAAAPAAAAAQAAACMAAAAjAAAAIwAAAB4AAAAAAAAAZAAAAGQAAAAAAAAAZAAAAGQAAAAVAAAAYAAAAAAAAAAAAAAADwAAACADAAAAAAAAAAAAAAEAAACgMgAAVgcAAKr4//8BAAAAf39/AAEAAABkAAAAAAAAABQAAABAHwAAAAAAACYAAAAAAAAAwOD//wAAAAAmAAAAZAAAABYAAABMAAAAAAAAAAAAAAAEAAAAAAAAAAEAAACZloMKAAAAACgAAAAoAAAAZAAAAGQAAAAAAAAAzMzMAAAAAABQAAAAUAAAAGQAAABkAAAAAAAAABcAAAAUAAAAAAAAAAAAAAD/fwAA/38AAAAAAAAJAAAABAAAAO5+x2YeAAAAaAAAAAAAAAAAAAAAAAAAAAAAAAAAAAAAECcAABAnAAAAAAAAAAAAAAAAAAAAAAAAAAAAAAAAAAAAAAAAAAAAABQAAAAAAAAAwMD/AAAAAABkAAAAMgAAAAAAAABkAAAAAAAAAH9/fwAKAAAAIgAAABgAAAAAAAAAAAAAAAAAAAAAAAAAAAAAAAAAAAAkAAAAJAAAAAAAAAAHAAAAAAAAAAAAAAAAAAAAAAAAAAAAAAAAAAAAf39/ACUAAABYAAAAAAAAAAAAAAAAAAAAAAAAAAAAAAAAAAAAAAAAAAAAAAAAAAAAAAAAAAAAAAA/AAAAAAAAAKCGAQAAAAAAAAAAAAAAAAAMAAAAAQAAAAAAAAAAAAAAAAAAAB8AAABUAAAA////AAAAAAEAAAAAAAAAAAAAAAAAAAAAAAAAAAAAAAAAAAAAAAAAAAAAAAB/f38AAAAAA8zMzADAwP8Af39/AAAAAAAAAAAAAAAAAAAAAAAAAAAAIQAAABgAAAAUAAAAAAAAAMgoAAAoFAAAMCoAABAAAAAmAAAACAAAAAGBAAAAAAAA"/>
+                <pr:smNativeData xmlns:pr="smNativeData" xmlns="smNativeData" val="SMDATA_15_r8odaRMAAAAlAAAAEgAAAA0AAAAAkAAAAEgAAACQAAAASAAAAAAAAAAAAAAAAAAAAAEAAABQAAAAAAAAAAAA4D8AAAAAAADgPwAAAAAAAOA/AAAAAAAA4D8AAAAAAADgPwAAAAAAAOA/AAAAAAAA4D8AAAAAAADgPwAAAAAAAOA/AAAAAAAA4D8CAAAAjAAAAAAAAAAAAAAA////AP///wgAAAAAAAAAAAAAAAAAAAAAAAAAAAAAAAAAAAAAeAAAAAEAAABAAAAAAAAAAAAAAABaAAAAAAAAAAAAAAAAAAAAAAAAAAAAAAAAAAAAAAAAAAAAAAAAAAAAAAAAAAAAAAAAAAAAAAAAAAAAAAAAAAAAAAAAAAAAAAAAAAAAFAAAADwAAAAAAAAAAAAAAAAAAAAPAAAAAQAAACMAAAAjAAAAIwAAAB4AAAAAAAAAZAAAAGQAAAAAAAAAZAAAAGQAAAAVAAAAYAAAAAAAAAAAAAAADwAAACADAAAAAAAAAAAAAAEAAACgMgAAVgcAAKr4//8BAAAAf39/AAEAAABkAAAAAAAAABQAAABAHwAAAAAAACYAAAAAAAAAwOD//wAAAAAmAAAAZAAAABYAAABMAAAAAAAAAAAAAAAEAAAAAAAAAAEAAACZloMKAAAAACgAAAAoAAAAZAAAAGQAAAAAAAAAzMzMAAAAAABQAAAAUAAAAGQAAABkAAAAAAAAABcAAAAUAAAAAAAAAAAAAAD/fwAA/38AAAAAAAAJAAAABAAAAO5+x2YeAAAAaAAAAAAAAAAAAAAAAAAAAAAAAAAAAAAAECcAABAnAAAAAAAAAAAAAAAAAAAAAAAAAAAAAAAAAAAAAAAAAAAAABQAAAAAAAAAwMD/AAAAAABkAAAAMgAAAAAAAABkAAAAAAAAAH9/fwAKAAAAIgAAABgAAAAAAAAAAAAAAAAAAAAAAAAAAAAAAAAAAAAkAAAAJAAAAAAAAAAHAAAAAAAAAAAAAAAAAAAAAAAAAAAAAAAAAAAAf39/ACUAAABYAAAAAAAAAAAAAAAAAAAAAAAAAAAAAAAAAAAAAAAAAAAAAAAAAAAAAAAAAAAAAAA/AAAAAAAAAKCGAQAAAAAAAAAAAAAAAAAMAAAAAQAAAAAAAAAAAAAAAAAAAB8AAABUAAAA////AAAAAAEAAAAAAAAAAAAAAAAAAAAAAAAAAAAAAAAAAAAAAAAAAAAAAAB/f38AAAAAA8zMzADAwP8Af39/AAAAAAAAAAAAAAAAAAAAAAAAAAAAIQAAABgAAAAUAAAAAAAAAMgoAAAoFAAAMCoAABAAAAAmAAAACAAAAAGBAAAAAAAA"/>
               </a:ext>
             </a:extLst>
           </p:cNvSpPr>
@@ -3034,7 +3034,7 @@
           <p:cNvGrpSpPr>
             <a:extLst>
               <a:ext uri="smNativeData">
-                <pr:smNativeData xmlns:pr="smNativeData" xmlns="smNativeData" val="SMDATA_6_mcIdaRMAAAAlAAAAAQAAAA8BAAAAkAAAAEgAAACQAAAASAAAAAAAAAAAAAAAAAAAABcAAAAUAAAAAAAAAAAAAAD/fwAA/38AAAAAAAAJAAAABAAAAA0BDgEfAAAAVAAAAAAAAAAAAAAAAAAAAAAAAAAAAAAAAAAAAAAAAAAAAAAAAAAAAAAAAAAAAAAAAAAAAAAAAAAAAAAAAAAAAAAAAAAAAAAAAAAAAAAAAAAAAAAAAAAAACEAAAAYAAAAFAAAAKIBAABTBgAArTYAAKgnAAAQAAAAJgAAAAgAAAD/////AAAAAA=="/>
+                <pr:smNativeData xmlns:pr="smNativeData" xmlns="smNativeData" val="SMDATA_6_r8odaRMAAAAlAAAAAQAAAA8BAAAAkAAAAEgAAACQAAAASAAAAAAAAAAAAAAAAAAAABcAAAAUAAAAAAAAAAAAAAD/fwAA/38AAAAAAAAJAAAABAAAAA0BDgEfAAAAVAAAAAAAAAAAAAAAAAAAAAAAAAAAAAAAAAAAAAAAAAAAAAAAAAAAAAAAAAAAAAAAAAAAAAAAAAAAAAAAAAAAAAAAAAAAAAAAAAAAAAAAAAAAAAAAAAAAACEAAAAYAAAAFAAAAKIBAABTBgAArTYAAKgnAAAQAAAAJgAAAAgAAAD/////AAAAAA=="/>
               </a:ext>
             </a:extLst>
           </p:cNvGrpSpPr>
@@ -3055,7 +3055,7 @@
               <a:picLocks noChangeAspect="1"/>
               <a:extLst>
                 <a:ext uri="smNativeData">
-                  <pr:smNativeData xmlns:pr="smNativeData" xmlns="smNativeData" val="SMDATA_17_mcIdaRMAAAAlAAAAEQAAAC0AAAAAkAAAAEgAAACQAAAASAAAAAAAAAAAAAAAAAAAAAEAAABQAAAAAAAAAAAA4D8AAAAAAADgPwAAAAAAAOA/AAAAAAAA4D8AAAAAAADgPwAAAAAAAOA/AAAAAAAA4D8AAAAAAADgPwAAAAAAAOA/AAAAAAAA4D8CAAAAjAAAAAAAAAAAAAAA40oGDP///wgAAAAAAAAAAAAAAAAAAAAAAAAAAAAAAAAAAAAAZAAAAAEAAABAAAAAAAAAAAAAAAAAAAAAAAAAAAAAAAAAAAAAAAAAAAAAAAAAAAAAAAAAAAAAAAAAAAAAAAAAAAAAAAAAAAAAAAAAAAAAAAAAAAAAAAAAAAAAAAAAAAAAFAAAADwAAAAAAAAAAAAAAAAAAAkUAAAAAQAAABQAAAAUAAAAFAAAAAEAAAAAAAAAZAAAAGQAAAAAAAAAZAAAAGQAAAAVAAAAYAAAAAAAAAAAAAAADwAAACADAAAAAAAAAAAAAAEAAACgMgAAVgcAAKr4//8BAAAAf39/AAEAAABkAAAAAAAAABQAAABAHwAAAAAAACYAAAAAAAAAwOD//wAAAAAmAAAAZAAAABYAAABMAAAAAAAAAAAAAAAEAAAAAAAAAAEAAACZloMKAAAAACgAAAAoAAAAZAAAAGQAAAAAAAAAzMzMAAAAAABQAAAAUAAAAGQAAABkAAAAAAAAAAcAAAA4AAAAAAAAAAAAAAAAAAAA////AAAAAAAAAAAAAAAAAAAAAAAAAAAAAAAAAAAAAABkAAAAZAAAAAAAAAAjAAAABAAAAGQAAAAXAAAAFAAAAAAAAAAAAAAA/38AAP9/AAAAAAAACQAAAAQAAAAAAAAAHgAAAGgAAAAAAAAAAAAAAAAAAAAAAAAAAAAAABAnAAAQJwAAAAAAAAAAAAAAAAAAAAAAAAAAAAAAAAAAAAAAAAAAAAAUAAAAAAAAAMDA/wAAAAAAZAAAADIAAAAAAAAAZAAAAAAAAAB/f38ACgAAACIAAAAYAAAAAAAAAAAAAAAAAAAAAAAAAAAAAAAAAAAAJAAAACQAAAAAAAAABwAAAAAAAAAAAAAAAAAAAAAAAAAAAAAAAAAAAH9/fwAlAAAAWAAAAAAAAAAAAAAAAAAAAAAAAAAAAAAAAAAAAAAAAAAAAAAAAAAAAAAAAAAAAAAAPwAAAAAAAACghgEAAAAAAAAAAAAAAAAADAAAAAEAAAAAAAAAAAAAAAAAAAAfAAAAVAAAAONKBgX///8BAAAAAAAAAAAAAAAAAAAAAAAAAAAAAAAAAAAAAAAAAAAAAAACf39/AJmWgwPMzMwAwMD/AH9/fwAAAAAAAAAAAAAAAAD///8AAAAAACEAAAAYAAAAFAAAAKIBAADpIgAAgjYAAF8mAAAAAAAAJgAAAAgAAAD//////////w=="/>
+                  <pr:smNativeData xmlns:pr="smNativeData" xmlns="smNativeData" val="SMDATA_17_r8odaRMAAAAlAAAAEQAAAC0AAAAAkAAAAEgAAACQAAAASAAAAAAAAAAAAAAAAAAAAAEAAABQAAAAAAAAAAAA4D8AAAAAAADgPwAAAAAAAOA/AAAAAAAA4D8AAAAAAADgPwAAAAAAAOA/AAAAAAAA4D8AAAAAAADgPwAAAAAAAOA/AAAAAAAA4D8CAAAAjAAAAAAAAAAAAAAA40oGDP///wgAAAAAAAAAAAAAAAAAAAAAAAAAAAAAAAAAAAAAZAAAAAEAAABAAAAAAAAAAAAAAAAAAAAAAAAAAAAAAAAAAAAAAAAAAAAAAAAAAAAAAAAAAAAAAAAAAAAAAAAAAAAAAAAAAAAAAAAAAAAAAAAAAAAAAAAAAAAAAAAAAAAAFAAAADwAAAAAAAAAAAAAAAAAAAkUAAAAAQAAABQAAAAUAAAAFAAAAAEAAAAAAAAAZAAAAGQAAAAAAAAAZAAAAGQAAAAVAAAAYAAAAAAAAAAAAAAADwAAACADAAAAAAAAAAAAAAEAAACgMgAAVgcAAKr4//8BAAAAf39/AAEAAABkAAAAAAAAABQAAABAHwAAAAAAACYAAAAAAAAAwOD//wAAAAAmAAAAZAAAABYAAABMAAAAAAAAAAAAAAAEAAAAAAAAAAEAAACZloMKAAAAACgAAAAoAAAAZAAAAGQAAAAAAAAAzMzMAAAAAABQAAAAUAAAAGQAAABkAAAAAAAAAAcAAAA4AAAAAAAAAAAAAAAAAAAA////AAAAAAAAAAAAAAAAAAAAAAAAAAAAAAAAAAAAAABkAAAAZAAAAAAAAAAjAAAABAAAAGQAAAAXAAAAFAAAAAAAAAAAAAAA/38AAP9/AAAAAAAACQAAAAQAAAAAAAAAHgAAAGgAAAAAAAAAAAAAAAAAAAAAAAAAAAAAABAnAAAQJwAAAAAAAAAAAAAAAAAAAAAAAAAAAAAAAAAAAAAAAAAAAAAUAAAAAAAAAMDA/wAAAAAAZAAAADIAAAAAAAAAZAAAAAAAAAB/f38ACgAAACIAAAAYAAAAAAAAAAAAAAAAAAAAAAAAAAAAAAAAAAAAJAAAACQAAAAAAAAABwAAAAAAAAAAAAAAAAAAAAAAAAAAAAAAAAAAAH9/fwAlAAAAWAAAAAAAAAAAAAAAAAAAAAAAAAAAAAAAAAAAAAAAAAAAAAAAAAAAAAAAAAAAAAAAPwAAAAAAAACghgEAAAAAAAAAAAAAAAAADAAAAAEAAAAAAAAAAAAAAAAAAAAfAAAAVAAAAONKBgX///8BAAAAAAAAAAAAAAAAAAAAAAAAAAAAAAAAAAAAAAAAAAAAAAACf39/AJmWgwPMzMwAwMD/AH9/fwAAAAAAAAAAAAAAAAD///8AAAAAACEAAAAYAAAAFAAAAKIBAADpIgAAgjYAAF8mAAAAAAAAJgAAAAgAAAD//////////w=="/>
                 </a:ext>
               </a:extLst>
             </p:cNvPicPr>
@@ -3088,7 +3088,7 @@
             <p:cNvPicPr>
               <a:extLst>
                 <a:ext uri="smNativeData">
-                  <pr:smNativeData xmlns:pr="smNativeData" xmlns="smNativeData" val="SMDATA_17_mcIdaRMAAAAlAAAAEQAAAA0AAAAAkAAAAEgAAACQAAAASAAAAAAAAAAAAAAAAAAAAAEAAABQAAAAAAAAAAAA4D8AAAAAAADgPwAAAAAAAOA/AAAAAAAA4D8AAAAAAADgPwAAAAAAAOA/AAAAAAAA4D8AAAAAAADgPwAAAAAAAOA/AAAAAAAA4D8CAAAAjAAAAAAAAAAAAAAA40oGDP///wgAAAAAAAAAAAAAAAAAAAAAAAAAAAAAAAAAAAAAZAAAAAEAAABAAAAAAAAAAAAAAAAAAAAAAAAAAAAAAAAAAAAAAAAAAAAAAAAAAAAAAAAAAAAAAAAAAAAAAAAAAAAAAAAAAAAAAAAAAAAAAAAAAAAAAAAAAAAAAAAAAAAAFAAAADwAAAAAAAAAAAAAAAAAAAkUAAAAAQAAABQAAAAUAAAAFAAAAAEAAAAAAAAAZAAAAGQAAAAAAAAAZAAAAGQAAAAVAAAAYAAAAAAAAAAAAAAADwAAACADAAAAAAAAAAAAAAEAAACgMgAAVgcAAKr4//8BAAAAf39/AAEAAABkAAAAAAAAABQAAABAHwAAAAAAACYAAAAAAAAAwOD//wAAAAAmAAAAZAAAABYAAABMAAAAAAAAAAAAAAAEAAAAAAAAAAEAAACZloMKAAAAACgAAAAoAAAAZAAAAGQAAAAAAAAAzMzMAAAAAABQAAAAUAAAAGQAAABkAAAAAAAAAAcAAAA4AAAAAAAAAAAAAAAAAAAA////AAAAAAAAAAAAAAAAAAAAAAAAAAAAAAAAAAAAAABkAAAAZAAAAAAAAAAjAAAABAAAAGQAAAAXAAAAFAAAAAAAAAAAAAAA/38AAP9/AAAAAAAACQAAAAQAAAAAAAAAHgAAAGgAAAAAAAAAAAAAAAAAAAAAAAAAAAAAABAnAAAQJwAAAAAAAAAAAAAAAAAAAAAAAAAAAAAAAAAAAAAAAAAAAAAUAAAAAAAAAMDA/wAAAAAAZAAAADIAAAAAAAAAZAAAAAAAAAB/f38ACgAAACIAAAAYAAAAAAAAAAAAAAAAAAAAAAAAAAAAAAAAAAAAJAAAACQAAAAAAAAABwAAAAAAAAAAAAAAAAAAAAAAAAAAAAAAAAAAAH9/fwAlAAAAWAAAAAAAAAAAAAAAAAAAAAAAAAAAAAAAAAAAAAAAAAAAAAAAAAAAAAAAAAAAAAAAPwAAAAAAAACghgEAAAAAAAAAAAAAAAAADAAAAAEAAAAAAAAAAAAAAAAAAAAfAAAAVAAAAONKBgX///8BAAAAAAAAAAAAAAAAAAAAAAAAAAAAAAAAAAAAAAAAAAAAAAACf39/AJmWgwPMzMwAwMD/AH9/fwAAAAAAAAAAAAAAAAD///8AAAAAACEAAAAYAAAAFAAAALABAABTBgAArTYAAK8GAAAAAAAAJgAAAAgAAAD//////////w=="/>
+                  <pr:smNativeData xmlns:pr="smNativeData" xmlns="smNativeData" val="SMDATA_17_r8odaRMAAAAlAAAAEQAAAA0AAAAAkAAAAEgAAACQAAAASAAAAAAAAAAAAAAAAAAAAAEAAABQAAAAAAAAAAAA4D8AAAAAAADgPwAAAAAAAOA/AAAAAAAA4D8AAAAAAADgPwAAAAAAAOA/AAAAAAAA4D8AAAAAAADgPwAAAAAAAOA/AAAAAAAA4D8CAAAAjAAAAAAAAAAAAAAA40oGDP///wgAAAAAAAAAAAAAAAAAAAAAAAAAAAAAAAAAAAAAZAAAAAEAAABAAAAAAAAAAAAAAAAAAAAAAAAAAAAAAAAAAAAAAAAAAAAAAAAAAAAAAAAAAAAAAAAAAAAAAAAAAAAAAAAAAAAAAAAAAAAAAAAAAAAAAAAAAAAAAAAAAAAAFAAAADwAAAAAAAAAAAAAAAAAAAkUAAAAAQAAABQAAAAUAAAAFAAAAAEAAAAAAAAAZAAAAGQAAAAAAAAAZAAAAGQAAAAVAAAAYAAAAAAAAAAAAAAADwAAACADAAAAAAAAAAAAAAEAAACgMgAAVgcAAKr4//8BAAAAf39/AAEAAABkAAAAAAAAABQAAABAHwAAAAAAACYAAAAAAAAAwOD//wAAAAAmAAAAZAAAABYAAABMAAAAAAAAAAAAAAAEAAAAAAAAAAEAAACZloMKAAAAACgAAAAoAAAAZAAAAGQAAAAAAAAAzMzMAAAAAABQAAAAUAAAAGQAAABkAAAAAAAAAAcAAAA4AAAAAAAAAAAAAAAAAAAA////AAAAAAAAAAAAAAAAAAAAAAAAAAAAAAAAAAAAAABkAAAAZAAAAAAAAAAjAAAABAAAAGQAAAAXAAAAFAAAAAAAAAAAAAAA/38AAP9/AAAAAAAACQAAAAQAAAAAAAAAHgAAAGgAAAAAAAAAAAAAAAAAAAAAAAAAAAAAABAnAAAQJwAAAAAAAAAAAAAAAAAAAAAAAAAAAAAAAAAAAAAAAAAAAAAUAAAAAAAAAMDA/wAAAAAAZAAAADIAAAAAAAAAZAAAAAAAAAB/f38ACgAAACIAAAAYAAAAAAAAAAAAAAAAAAAAAAAAAAAAAAAAAAAAJAAAACQAAAAAAAAABwAAAAAAAAAAAAAAAAAAAAAAAAAAAAAAAAAAAH9/fwAlAAAAWAAAAAAAAAAAAAAAAAAAAAAAAAAAAAAAAAAAAAAAAAAAAAAAAAAAAAAAAAAAAAAAPwAAAAAAAACghgEAAAAAAAAAAAAAAAAADAAAAAEAAAAAAAAAAAAAAAAAAAAfAAAAVAAAAONKBgX///8BAAAAAAAAAAAAAAAAAAAAAAAAAAAAAAAAAAAAAAAAAAAAAAACf39/AJmWgwPMzMwAwMD/AH9/fwAAAAAAAAAAAAAAAAD///8AAAAAACEAAAAYAAAAFAAAALABAABTBgAArTYAAK8GAAAAAAAAJgAAAAgAAAD//////////w=="/>
                 </a:ext>
               </a:extLst>
             </p:cNvPicPr>
@@ -3123,7 +3123,7 @@
             <a:spLocks noGrp="1" noChangeArrowheads="1"/>
             <a:extLst>
               <a:ext uri="smNativeData">
-                <pr:smNativeData xmlns:pr="smNativeData" xmlns="smNativeData" val="SMDATA_15_mcIdaRMAAAAlAAAAZAAAAA0AAAAAAAAAAAAAAAAAAAAAAAAAAAAAAAAAAAAAAAAAAAEAAABQAAAAAAAAAAAA4D8AAAAAAADgPwAAAAAAAOA/AAAAAAAA4D8AAAAAAADgPwAAAAAAAOA/AAAAAAAA4D8AAAAAAADgPwAAAAAAAOA/AAAAAAAA4D8CAAAAjAAAAAAAAAAAAAAA40oGDP///wgAAAAAAAAAAAAAAAAAAAAAAAAAAAAAAAAAAAAAZAAAAAEAAABAAAAAAAAAAAAAAAAAAAAAAAAAAAAAAAAAAAAAAAAAAAAAAAAAAAAAAAAAAAAAAAAAAAAAAAAAAAAAAAAAAAAAAAAAAAAAAAAAAAAAAAAAAAAAAAAAAAAAFAAAADwAAAAAAAAAAAAAAAAAAAkUAAAAAQAAABQAAAAUAAAAFAAAAAEAAAAAAAAAZAAAAGQAAAAAAAAAZAAAAGQAAAAVAAAAYAAAAAAAAAAAAAAADwAAACADAAAAAAAAAAAAAAEAAACgMgAAVgcAAKr4//8BAAAAf39/AAEAAABkAAAAAAAAABQAAABAHwAAAAAAACYAAAAAAAAAwOD//wAAAAAmAAAAZAAAABYAAABMAAAAAAAAAAAAAAAEAAAAAAAAAAEAAACZloMKAAAAACgAAAAoAAAAZAAAAGQAAAAAAAAAzMzMAAAAAABQAAAAUAAAAGQAAABkAAAAAAAAABcAAAAUAAAAAAAAAAAAAAD/fwAA/38AAAAAAAAJAAAABAAAAAAAAAAeAAAAaAAAAAAAAAAAAAAAAAAAAAAAAAAAAAAAECcAABAnAAAAAAAAAAAAAAAAAAAAAAAAAAAAAAAAAAAAAAAAAAAAABQAAAAAAAAAwMD/AAAAAABkAAAAMgAAAAAAAABkAAAAAAAAAH9/fwAKAAAAIgAAABgAAAAAAAAAAAAAAAAAAAAAAAAAAAAAAAAAAAAkAAAAJAAAAAAAAAAHAAAAAAAAAAAAAAAAAAAAAAAAAAAAAAAAAAAAf39/ACUAAABYAAAAAAAAAAAAAAAAAAAAAAAAAAAAAAAAAAAAAAAAAAAAAAAAAAAAAAAAAAAAAAA/AAAAAAAAAKCGAQAAAAAAAAAAAAAAAAAMAAAAAQAAAAAAAAAAAAAAAAAAAB8AAABUAAAAAAAABQAAAAEAAAAAAAAAAAAAAAAAAAAAAAAAAAAAAAAAAAAAAAAAAAAAAAJ/f38AAAAAA8zMzADAwP8Af39/AAAAAAAAAAAAAAAAAAAAAAAAAAAAIQAAABgAAAAUAAAAogEAAMMCAACJNgAAQwcAABAAAAAmAAAACAAAAAGAAAAAAAAA"/>
+                <pr:smNativeData xmlns:pr="smNativeData" xmlns="smNativeData" val="SMDATA_15_r8odaRMAAAAlAAAAZAAAAA0AAAAAAAAAAAAAAAAAAAAAAAAAAAAAAAAAAAAAAAAAAAEAAABQAAAAAAAAAAAA4D8AAAAAAADgPwAAAAAAAOA/AAAAAAAA4D8AAAAAAADgPwAAAAAAAOA/AAAAAAAA4D8AAAAAAADgPwAAAAAAAOA/AAAAAAAA4D8CAAAAjAAAAAAAAAAAAAAA40oGDP///wgAAAAAAAAAAAAAAAAAAAAAAAAAAAAAAAAAAAAAZAAAAAEAAABAAAAAAAAAAAAAAAAAAAAAAAAAAAAAAAAAAAAAAAAAAAAAAAAAAAAAAAAAAAAAAAAAAAAAAAAAAAAAAAAAAAAAAAAAAAAAAAAAAAAAAAAAAAAAAAAAAAAAFAAAADwAAAAAAAAAAAAAAAAAAAkUAAAAAQAAABQAAAAUAAAAFAAAAAEAAAAAAAAAZAAAAGQAAAAAAAAAZAAAAGQAAAAVAAAAYAAAAAAAAAAAAAAADwAAACADAAAAAAAAAAAAAAEAAACgMgAAVgcAAKr4//8BAAAAf39/AAEAAABkAAAAAAAAABQAAABAHwAAAAAAACYAAAAAAAAAwOD//wAAAAAmAAAAZAAAABYAAABMAAAAAAAAAAAAAAAEAAAAAAAAAAEAAACZloMKAAAAACgAAAAoAAAAZAAAAGQAAAAAAAAAzMzMAAAAAABQAAAAUAAAAGQAAABkAAAAAAAAABcAAAAUAAAAAAAAAAAAAAD/fwAA/38AAAAAAAAJAAAABAAAAAAAAAAeAAAAaAAAAAAAAAAAAAAAAAAAAAAAAAAAAAAAECcAABAnAAAAAAAAAAAAAAAAAAAAAAAAAAAAAAAAAAAAAAAAAAAAABQAAAAAAAAAwMD/AAAAAABkAAAAMgAAAAAAAABkAAAAAAAAAH9/fwAKAAAAIgAAABgAAAAAAAAAAAAAAAAAAAAAAAAAAAAAAAAAAAAkAAAAJAAAAAAAAAAHAAAAAAAAAAAAAAAAAAAAAAAAAAAAAAAAAAAAf39/ACUAAABYAAAAAAAAAAAAAAAAAAAAAAAAAAAAAAAAAAAAAAAAAAAAAAAAAAAAAAAAAAAAAAA/AAAAAAAAAKCGAQAAAAAAAAAAAAAAAAAMAAAAAQAAAAAAAAAAAAAAAAAAAB8AAABUAAAAAAAABQAAAAEAAAAAAAAAAAAAAAAAAAAAAAAAAAAAAAAAAAAAAAAAAAAAAAJ/f38AAAAAA8zMzADAwP8Af39/AAAAAAAAAAAAAAAAAAAAAAAAAAAAIQAAABgAAAAUAAAAogEAAMMCAACJNgAAQwcAABAAAAAmAAAACAAAAAGAAAAAAAAA"/>
               </a:ext>
             </a:extLst>
           </p:cNvSpPr>
@@ -3192,7 +3192,7 @@
             <a:spLocks noGrp="1" noChangeArrowheads="1"/>
             <a:extLst>
               <a:ext uri="smNativeData">
-                <pr:smNativeData xmlns:pr="smNativeData" xmlns="smNativeData" val="SMDATA_15_mcIdaRMAAAAlAAAAZAAAAA0AAAAAAAAAAAAAAAAAAAAAAAAAAAAAAAAAAAAAAAAAAAEAAABQAAAAAAAAAAAA4D8AAAAAAADgPwAAAAAAAOA/AAAAAAAA4D8AAAAAAADgPwAAAAAAAOA/AAAAAAAA4D8AAAAAAADgPwAAAAAAAOA/AAAAAAAA4D8CAAAAjAAAAAAAAAAAAAAA40oGDP///wgAAAAAAAAAAAAAAAAAAAAAAAAAAAAAAAAAAAAAZAAAAAEAAABAAAAAAAAAAAAAAAAAAAAAAAAAAAAAAAAAAAAAAAAAAAAAAAAAAAAAAAAAAAAAAAAAAAAAAAAAAAAAAAAAAAAAAAAAAAAAAAAAAAAAAAAAAAAAAAAAAAAAFAAAADwAAAAAAAAAAAAAAAAAAAkUAAAAAQAAABQAAAAUAAAAFAAAAAEAAAAAAAAAZAAAAGQAAAAAAAAAZAAAAGQAAAAVAAAAYAAAAAAAAAAAAAAADwAAACADAAAAAAAAAAAAAAEAAACgMgAAVgcAAKr4//8BAAAAf39/AAEAAABkAAAAAAAAABQAAABAHwAAAAAAACYAAAAAAAAAwOD//wAAAAAmAAAAZAAAABYAAABMAAAAAAAAAAAAAAAEAAAAAAAAAAEAAACZloMKAAAAACgAAAAoAAAAZAAAAGQAAAAAAAAAzMzMAAAAAABQAAAAUAAAAGQAAABkAAAAAAAAABcAAAAUAAAAAAAAAAAAAAD/fwAA/38AAAAAAAAJAAAABAAAAAAAAAAeAAAAaAAAAAAAAAAAAAAAAAAAAAAAAAAAAAAAECcAABAnAAAAAAAAAAAAAAAAAAAAAAAAAAAAAAAAAAAAAAAAAAAAABQAAAAAAAAAwMD/AAAAAABkAAAAMgAAAAAAAABkAAAAAAAAAH9/fwAKAAAAIgAAABgAAAAAAAAAAAAAAAAAAAAAAAAAAAAAAAAAAAAkAAAAJAAAAAAAAAAHAAAAAAAAAAAAAAAAAAAAAAAAAAAAAAAAAAAAf39/ACUAAABYAAAAAAAAAAAAAAAAAAAAAAAAAAAAAAAAAAAAAAAAAAAAAAAAAAAAAAAAAAAAAAA/AAAAAAAAAKCGAQAAAAAAAAAAAAAAAAAMAAAAAQAAAAAAAAAAAAAAAAAAAB8AAABUAAAAAAAABQAAAAEAAAAAAAAAAAAAAAAAAAAAAAAAAAAAAAAAAAAAAAAAAAAAAAJ/f38AAAAAA8zMzADAwP8Af39/AAAAAAAAAAAAAAAAAAAAAAAAAAAAIQAAABgAAAAUAAAAqQMAABAOAABkEQAABCIAABAAAAAmAAAACAAAAAGgAAAAAAAA"/>
+                <pr:smNativeData xmlns:pr="smNativeData" xmlns="smNativeData" val="SMDATA_15_r8odaRMAAAAlAAAAZAAAAA0AAAAAAAAAAAAAAAAAAAAAAAAAAAAAAAAAAAAAAAAAAAEAAABQAAAAAAAAAAAA4D8AAAAAAADgPwAAAAAAAOA/AAAAAAAA4D8AAAAAAADgPwAAAAAAAOA/AAAAAAAA4D8AAAAAAADgPwAAAAAAAOA/AAAAAAAA4D8CAAAAjAAAAAAAAAAAAAAA40oGDP///wgAAAAAAAAAAAAAAAAAAAAAAAAAAAAAAAAAAAAAZAAAAAEAAABAAAAAAAAAAAAAAAAAAAAAAAAAAAAAAAAAAAAAAAAAAAAAAAAAAAAAAAAAAAAAAAAAAAAAAAAAAAAAAAAAAAAAAAAAAAAAAAAAAAAAAAAAAAAAAAAAAAAAFAAAADwAAAAAAAAAAAAAAAAAAAkUAAAAAQAAABQAAAAUAAAAFAAAAAEAAAAAAAAAZAAAAGQAAAAAAAAAZAAAAGQAAAAVAAAAYAAAAAAAAAAAAAAADwAAACADAAAAAAAAAAAAAAEAAACgMgAAVgcAAKr4//8BAAAAf39/AAEAAABkAAAAAAAAABQAAABAHwAAAAAAACYAAAAAAAAAwOD//wAAAAAmAAAAZAAAABYAAABMAAAAAAAAAAAAAAAEAAAAAAAAAAEAAACZloMKAAAAACgAAAAoAAAAZAAAAGQAAAAAAAAAzMzMAAAAAABQAAAAUAAAAGQAAABkAAAAAAAAABcAAAAUAAAAAAAAAAAAAAD/fwAA/38AAAAAAAAJAAAABAAAAAAAAAAeAAAAaAAAAAAAAAAAAAAAAAAAAAAAAAAAAAAAECcAABAnAAAAAAAAAAAAAAAAAAAAAAAAAAAAAAAAAAAAAAAAAAAAABQAAAAAAAAAwMD/AAAAAABkAAAAMgAAAAAAAABkAAAAAAAAAH9/fwAKAAAAIgAAABgAAAAAAAAAAAAAAAAAAAAAAAAAAAAAAAAAAAAkAAAAJAAAAAAAAAAHAAAAAAAAAAAAAAAAAAAAAAAAAAAAAAAAAAAAf39/ACUAAABYAAAAAAAAAAAAAAAAAAAAAAAAAAAAAAAAAAAAAAAAAAAAAAAAAAAAAAAAAAAAAAA/AAAAAAAAAKCGAQAAAAAAAAAAAAAAAAAMAAAAAQAAAAAAAAAAAAAAAAAAAB8AAABUAAAAAAAABQAAAAEAAAAAAAAAAAAAAAAAAAAAAAAAAAAAAAAAAAAAAAAAAAAAAAJ/f38AAAAAA8zMzADAwP8Af39/AAAAAAAAAAAAAAAAAAAAAAAAAAAAIQAAABgAAAAUAAAAqQMAABAOAABkEQAABCIAABAAAAAmAAAACAAAAAGgAAAAAAAA"/>
               </a:ext>
             </a:extLst>
           </p:cNvSpPr>
@@ -3266,7 +3266,7 @@
             <a:spLocks noGrp="1" noChangeArrowheads="1"/>
             <a:extLst>
               <a:ext uri="smNativeData">
-                <pr:smNativeData xmlns:pr="smNativeData" xmlns="smNativeData" val="SMDATA_15_mcIdaRMAAAAlAAAAZAAAAA0AAAAAkAAAAAAAAAAAAAAAAAAAAAAAAAABAAAAAAAAAAEAAABQAAAAAAAAAAAA4D8AAAAAAADgPwAAAAAAAOA/AAAAAAAA4D8AAAAAAADgPwAAAAAAAOA/AAAAAAAA4D8AAAAAAADgPwAAAAAAAOA/AAAAAAAA4D8CAAAAjAAAAAAAAAAAAAAA40oGDP///wgAAAAAAAAAAAAAAAAAAAAAAAAAAAAAAAAAAAAAZAAAAAEAAABAAAAAAAAAAAAAAAAAAAAAAAAAAAAAAAAAAAAAAAAAAAAAAAAAAAAAAAAAAAAAAAAAAAAAAAAAAAAAAAAAAAAAAAAAAAAAAAAAAAAAAAAAAAAAAAAAAAAAFAAAADwAAAAAAAAAAAAAAAAAAAkUAAAAAQAAABQAAAAUAAAAFAAAAAEAAAAAAAAAZAAAAGQAAAAAAAAAZAAAAGQAAAAVAAAAYAAAAAAAAAAAAAAADwAAACADAAAAAAAAAAAAAAEAAACgMgAAVgcAAKr4//8BAAAAf39/AAEAAABkAAAAAAAAABQAAABAHwAAAAAAACYAAAAAAAAAwOD//wAAAAAmAAAAZAAAABYAAABMAAAAAAAAAAAAAAAEAAAAAAAAAAEAAACZloMKAAAAACgAAAAoAAAAZAAAAGQAAAAAAAAAzMzMAAAAAABQAAAAUAAAAGQAAABkAAAAAAAAABcAAAAUAAAAAAAAAAAAAAD/fwAA/38AAAAAAAAJAAAABAAAAAAAAAAeAAAAaAAAAAAAAAAAAAAAAAAAAAAAAAAAAAAAECcAABAnAAAAAAAAAAAAAAAAAAAAAAAAAAAAAAAAAAAAAAAAAAAAABQAAAAAAAAAwMD/AAAAAABkAAAAMgAAAAAAAABkAAAAAAAAAH9/fwAKAAAAIgAAABgAAAAAAAAAAAAAAAAAAAAAAAAAAAAAAAAAAAAkAAAAJAAAAAAAAAAHAAAAAAAAAAAAAAAAAAAAAAAAAAAAAAAAAAAAf39/ACUAAABYAAAAAAAAAAAAAAAAAAAAAAAAAAAAAAAAAAAAAAAAAAAAAAAAAAAAAAAAAAAAAAA/AAAAAAAAAKCGAQAAAAAAAAAAAAAAAAAMAAAAAQAAAAAAAAAAAAAAAAAAAB8AAABUAAAAAAAABQAAAAEAAAAAAAAAAAAAAAAAAAAAAAAAAAAAAAAAAAAAAAAAAAAAAAJ/f38AAAAAA8zMzADAwP8Af39/AAAAAAAAAAAAAAAAAAAAAAAAAAAAIQAAABgAAAAUAAAAmgEAAD4jAADmEgAA8yUAABAAAAAmAAAACAAAAIWgAAD/HwAA"/>
+                <pr:smNativeData xmlns:pr="smNativeData" xmlns="smNativeData" val="SMDATA_15_r8odaRMAAAAlAAAAZAAAAA0AAAAAkAAAAAAAAAAAAAAAAAAAAAAAAAABAAAAAAAAAAEAAABQAAAAAAAAAAAA4D8AAAAAAADgPwAAAAAAAOA/AAAAAAAA4D8AAAAAAADgPwAAAAAAAOA/AAAAAAAA4D8AAAAAAADgPwAAAAAAAOA/AAAAAAAA4D8CAAAAjAAAAAAAAAAAAAAA40oGDP///wgAAAAAAAAAAAAAAAAAAAAAAAAAAAAAAAAAAAAAZAAAAAEAAABAAAAAAAAAAAAAAAAAAAAAAAAAAAAAAAAAAAAAAAAAAAAAAAAAAAAAAAAAAAAAAAAAAAAAAAAAAAAAAAAAAAAAAAAAAAAAAAAAAAAAAAAAAAAAAAAAAAAAFAAAADwAAAAAAAAAAAAAAAAAAAkUAAAAAQAAABQAAAAUAAAAFAAAAAEAAAAAAAAAZAAAAGQAAAAAAAAAZAAAAGQAAAAVAAAAYAAAAAAAAAAAAAAADwAAACADAAAAAAAAAAAAAAEAAACgMgAAVgcAAKr4//8BAAAAf39/AAEAAABkAAAAAAAAABQAAABAHwAAAAAAACYAAAAAAAAAwOD//wAAAAAmAAAAZAAAABYAAABMAAAAAAAAAAAAAAAEAAAAAAAAAAEAAACZloMKAAAAACgAAAAoAAAAZAAAAGQAAAAAAAAAzMzMAAAAAABQAAAAUAAAAGQAAABkAAAAAAAAABcAAAAUAAAAAAAAAAAAAAD/fwAA/38AAAAAAAAJAAAABAAAAAAAAAAeAAAAaAAAAAAAAAAAAAAAAAAAAAAAAAAAAAAAECcAABAnAAAAAAAAAAAAAAAAAAAAAAAAAAAAAAAAAAAAAAAAAAAAABQAAAAAAAAAwMD/AAAAAABkAAAAMgAAAAAAAABkAAAAAAAAAH9/fwAKAAAAIgAAABgAAAAAAAAAAAAAAAAAAAAAAAAAAAAAAAAAAAAkAAAAJAAAAAAAAAAHAAAAAAAAAAAAAAAAAAAAAAAAAAAAAAAAAAAAf39/ACUAAABYAAAAAAAAAAAAAAAAAAAAAAAAAAAAAAAAAAAAAAAAAAAAAAAAAAAAAAAAAAAAAAA/AAAAAAAAAKCGAQAAAAAAAAAAAAAAAAAMAAAAAQAAAAAAAAAAAAAAAAAAAB8AAABUAAAAAAAABQAAAAEAAAAAAAAAAAAAAAAAAAAAAAAAAAAAAAAAAAAAAAAAAAAAAAJ/f38AAAAAA8zMzADAwP8Af39/AAAAAAAAAAAAAAAAAAAAAAAAAAAAIQAAABgAAAAUAAAAmgEAAD4jAADmEgAA8yUAABAAAAAmAAAACAAAAIWgAAD/HwAA"/>
               </a:ext>
             </a:extLst>
           </p:cNvSpPr>
@@ -3361,7 +3361,7 @@
             <a:spLocks noGrp="1" noChangeArrowheads="1"/>
             <a:extLst>
               <a:ext uri="smNativeData">
-                <pr:smNativeData xmlns:pr="smNativeData" xmlns="smNativeData" val="SMDATA_15_mcIdaRMAAAAlAAAAZAAAAA0AAAAAAAAAAAAAAAAAAAAAAAAAAAAAAAAAAAAAAAAAAAEAAABQAAAAAAAAAAAA4D8AAAAAAADgPwAAAAAAAOA/AAAAAAAA4D8AAAAAAADgPwAAAAAAAOA/AAAAAAAA4D8AAAAAAADgPwAAAAAAAOA/AAAAAAAA4D8CAAAAjAAAAAAAAAAAAAAA40oGDP///wgAAAAAAAAAAAAAAAAAAAAAAAAAAAAAAAAAAAAAZAAAAAEAAABAAAAAAAAAAAAAAAAAAAAAAAAAAAAAAAAAAAAAAAAAAAAAAAAAAAAAAAAAAAAAAAAAAAAAAAAAAAAAAAAAAAAAAAAAAAAAAAAAAAAAAAAAAAAAAAAAAAAAFAAAADwAAAAAAAAAAAAAAAAAAAkUAAAAAQAAABQAAAAUAAAAFAAAAAEAAAAAAAAAZAAAAGQAAAAAAAAAZAAAAGQAAAAVAAAAYAAAAAAAAAAAAAAADwAAACADAAAAAAAAAAAAAAEAAACgMgAAVgcAAKr4//8BAAAAf39/AAEAAABkAAAAAAAAABQAAABAHwAAAAAAACYAAAAAAAAAwOD//wAAAAAmAAAAZAAAABYAAABMAAAAAAAAAAAAAAAEAAAAAAAAAAEAAACZloMKAAAAACgAAAAoAAAAZAAAAGQAAAAAAAAAzMzMAAAAAABQAAAAUAAAAGQAAABkAAAAAAAAABcAAAAUAAAAAAAAAAAAAAD/fwAA/38AAAAAAAAJAAAABAAAAAAAAAAeAAAAaAAAAAAAAAAAAAAAAAAAAAAAAAAAAAAAECcAABAnAAAAAAAAAAAAAAAAAAAAAAAAAAAAAAAAAAAAAAAAAAAAABQAAAAAAAAAwMD/AAAAAABkAAAAMgAAAAAAAABkAAAAAAAAAH9/fwAKAAAAIgAAABgAAAAAAAAAAAAAAAAAAAAAAAAAAAAAAAAAAAAkAAAAJAAAAAAAAAAHAAAAAAAAAAAAAAAAAAAAAAAAAAAAAAAAAAAAf39/ACUAAABYAAAAAAAAAAAAAAAAAAAAAAAAAAAAAAAAAAAAAAAAAAAAAAAAAAAAAAAAAAAAAAA/AAAAAAAAAKCGAQAAAAAAAAAAAAAAAAAMAAAAAQAAAAAAAAAAAAAAAAAAAB8AAABUAAAAAAAABQAAAAEAAAAAAAAAAAAAAAAAAAAAAAAAAAAAAAAAAAAAAAAAAAAAAAJ/f38AAAAAA8zMzADAwP8Af39/AAAAAAAAAAAAAAAAAAAAAAAAAAAAIQAAABgAAAAUAAAAdxUAABAOAAAyIwAABCIAABAAAAAmAAAACAAAAAGgAAAAAAAA"/>
+                <pr:smNativeData xmlns:pr="smNativeData" xmlns="smNativeData" val="SMDATA_15_r8odaRMAAAAlAAAAZAAAAA0AAAAAAAAAAAAAAAAAAAAAAAAAAAAAAAAAAAAAAAAAAAEAAABQAAAAAAAAAAAA4D8AAAAAAADgPwAAAAAAAOA/AAAAAAAA4D8AAAAAAADgPwAAAAAAAOA/AAAAAAAA4D8AAAAAAADgPwAAAAAAAOA/AAAAAAAA4D8CAAAAjAAAAAAAAAAAAAAA40oGDP///wgAAAAAAAAAAAAAAAAAAAAAAAAAAAAAAAAAAAAAZAAAAAEAAABAAAAAAAAAAAAAAAAAAAAAAAAAAAAAAAAAAAAAAAAAAAAAAAAAAAAAAAAAAAAAAAAAAAAAAAAAAAAAAAAAAAAAAAAAAAAAAAAAAAAAAAAAAAAAAAAAAAAAFAAAADwAAAAAAAAAAAAAAAAAAAkUAAAAAQAAABQAAAAUAAAAFAAAAAEAAAAAAAAAZAAAAGQAAAAAAAAAZAAAAGQAAAAVAAAAYAAAAAAAAAAAAAAADwAAACADAAAAAAAAAAAAAAEAAACgMgAAVgcAAKr4//8BAAAAf39/AAEAAABkAAAAAAAAABQAAABAHwAAAAAAACYAAAAAAAAAwOD//wAAAAAmAAAAZAAAABYAAABMAAAAAAAAAAAAAAAEAAAAAAAAAAEAAACZloMKAAAAACgAAAAoAAAAZAAAAGQAAAAAAAAAzMzMAAAAAABQAAAAUAAAAGQAAABkAAAAAAAAABcAAAAUAAAAAAAAAAAAAAD/fwAA/38AAAAAAAAJAAAABAAAAAAAAAAeAAAAaAAAAAAAAAAAAAAAAAAAAAAAAAAAAAAAECcAABAnAAAAAAAAAAAAAAAAAAAAAAAAAAAAAAAAAAAAAAAAAAAAABQAAAAAAAAAwMD/AAAAAABkAAAAMgAAAAAAAABkAAAAAAAAAH9/fwAKAAAAIgAAABgAAAAAAAAAAAAAAAAAAAAAAAAAAAAAAAAAAAAkAAAAJAAAAAAAAAAHAAAAAAAAAAAAAAAAAAAAAAAAAAAAAAAAAAAAf39/ACUAAABYAAAAAAAAAAAAAAAAAAAAAAAAAAAAAAAAAAAAAAAAAAAAAAAAAAAAAAAAAAAAAAA/AAAAAAAAAKCGAQAAAAAAAAAAAAAAAAAMAAAAAQAAAAAAAAAAAAAAAAAAAB8AAABUAAAAAAAABQAAAAEAAAAAAAAAAAAAAAAAAAAAAAAAAAAAAAAAAAAAAAAAAAAAAAJ/f38AAAAAA8zMzADAwP8Af39/AAAAAAAAAAAAAAAAAAAAAAAAAAAAIQAAABgAAAAUAAAAdxUAABAOAAAyIwAABCIAABAAAAAmAAAACAAAAAGgAAAAAAAA"/>
               </a:ext>
             </a:extLst>
           </p:cNvSpPr>
@@ -3435,7 +3435,7 @@
             <a:spLocks noGrp="1" noChangeArrowheads="1"/>
             <a:extLst>
               <a:ext uri="smNativeData">
-                <pr:smNativeData xmlns:pr="smNativeData" xmlns="smNativeData" val="SMDATA_15_mcIdaRMAAAAlAAAAZAAAAA0AAAAAkAAAAAAAAAAAAAAAAAAAAAAAAAABAAAAAAAAAAEAAABQAAAAAAAAAAAA4D8AAAAAAADgPwAAAAAAAOA/AAAAAAAA4D8AAAAAAADgPwAAAAAAAOA/AAAAAAAA4D8AAAAAAADgPwAAAAAAAOA/AAAAAAAA4D8CAAAAjAAAAAAAAAAAAAAA40oGDP///wgAAAAAAAAAAAAAAAAAAAAAAAAAAAAAAAAAAAAAZAAAAAEAAABAAAAAAAAAAAAAAAAAAAAAAAAAAAAAAAAAAAAAAAAAAAAAAAAAAAAAAAAAAAAAAAAAAAAAAAAAAAAAAAAAAAAAAAAAAAAAAAAAAAAAAAAAAAAAAAAAAAAAFAAAADwAAAAAAAAAAAAAAAAAAAkUAAAAAQAAABQAAAAUAAAAFAAAAAEAAAAAAAAAZAAAAGQAAAAAAAAAZAAAAGQAAAAVAAAAYAAAAAAAAAAAAAAADwAAACADAAAAAAAAAAAAAAEAAACgMgAAVgcAAKr4//8BAAAAf39/AAEAAABkAAAAAAAAABQAAABAHwAAAAAAACYAAAAAAAAAwOD//wAAAAAmAAAAZAAAABYAAABMAAAAAAAAAAAAAAAEAAAAAAAAAAEAAACZloMKAAAAACgAAAAoAAAAZAAAAGQAAAAAAAAAzMzMAAAAAABQAAAAUAAAAGQAAABkAAAAAAAAABcAAAAUAAAAAAAAAAAAAAD/fwAA/38AAAAAAAAJAAAABAAAAAAAAAAeAAAAaAAAAAAAAAAAAAAAAAAAAAAAAAAAAAAAECcAABAnAAAAAAAAAAAAAAAAAAAAAAAAAAAAAAAAAAAAAAAAAAAAABQAAAAAAAAAwMD/AAAAAABkAAAAMgAAAAAAAABkAAAAAAAAAH9/fwAKAAAAIgAAABgAAAAAAAAAAAAAAAAAAAAAAAAAAAAAAAAAAAAkAAAAJAAAAAAAAAAHAAAAAAAAAAAAAAAAAAAAAAAAAAAAAAAAAAAAf39/ACUAAABYAAAAAAAAAAAAAAAAAAAAAAAAAAAAAAAAAAAAAAAAAAAAAAAAAAAAAAAAAAAAAAA/AAAAAAAAAKCGAQAAAAAAAAAAAAAAAAAMAAAAAQAAAAAAAAAAAAAAAAAAAB8AAABUAAAAAAAABQAAAAEAAAAAAAAAAAAAAAAAAAAAAAAAAAAAAAAAAAAAAAAAAAAAAAJ/f38AAAAAA8zMzADAwP8Af39/AAAAAAAAAAAAAAAAAAAAAAAAAAAAIQAAABgAAAAUAAAAaBMAAD4jAAC0JAAA8yUAABAAAAAmAAAACAAAAIWgAAD/HwAA"/>
+                <pr:smNativeData xmlns:pr="smNativeData" xmlns="smNativeData" val="SMDATA_15_r8odaRMAAAAlAAAAZAAAAA0AAAAAkAAAAAAAAAAAAAAAAAAAAAAAAAABAAAAAAAAAAEAAABQAAAAAAAAAAAA4D8AAAAAAADgPwAAAAAAAOA/AAAAAAAA4D8AAAAAAADgPwAAAAAAAOA/AAAAAAAA4D8AAAAAAADgPwAAAAAAAOA/AAAAAAAA4D8CAAAAjAAAAAAAAAAAAAAA40oGDP///wgAAAAAAAAAAAAAAAAAAAAAAAAAAAAAAAAAAAAAZAAAAAEAAABAAAAAAAAAAAAAAAAAAAAAAAAAAAAAAAAAAAAAAAAAAAAAAAAAAAAAAAAAAAAAAAAAAAAAAAAAAAAAAAAAAAAAAAAAAAAAAAAAAAAAAAAAAAAAAAAAAAAAFAAAADwAAAAAAAAAAAAAAAAAAAkUAAAAAQAAABQAAAAUAAAAFAAAAAEAAAAAAAAAZAAAAGQAAAAAAAAAZAAAAGQAAAAVAAAAYAAAAAAAAAAAAAAADwAAACADAAAAAAAAAAAAAAEAAACgMgAAVgcAAKr4//8BAAAAf39/AAEAAABkAAAAAAAAABQAAABAHwAAAAAAACYAAAAAAAAAwOD//wAAAAAmAAAAZAAAABYAAABMAAAAAAAAAAAAAAAEAAAAAAAAAAEAAACZloMKAAAAACgAAAAoAAAAZAAAAGQAAAAAAAAAzMzMAAAAAABQAAAAUAAAAGQAAABkAAAAAAAAABcAAAAUAAAAAAAAAAAAAAD/fwAA/38AAAAAAAAJAAAABAAAAAAAAAAeAAAAaAAAAAAAAAAAAAAAAAAAAAAAAAAAAAAAECcAABAnAAAAAAAAAAAAAAAAAAAAAAAAAAAAAAAAAAAAAAAAAAAAABQAAAAAAAAAwMD/AAAAAABkAAAAMgAAAAAAAABkAAAAAAAAAH9/fwAKAAAAIgAAABgAAAAAAAAAAAAAAAAAAAAAAAAAAAAAAAAAAAAkAAAAJAAAAAAAAAAHAAAAAAAAAAAAAAAAAAAAAAAAAAAAAAAAAAAAf39/ACUAAABYAAAAAAAAAAAAAAAAAAAAAAAAAAAAAAAAAAAAAAAAAAAAAAAAAAAAAAAAAAAAAAA/AAAAAAAAAKCGAQAAAAAAAAAAAAAAAAAMAAAAAQAAAAAAAAAAAAAAAAAAAB8AAABUAAAAAAAABQAAAAEAAAAAAAAAAAAAAAAAAAAAAAAAAAAAAAAAAAAAAAAAAAAAAAJ/f38AAAAAA8zMzADAwP8Af39/AAAAAAAAAAAAAAAAAAAAAAAAAAAAIQAAABgAAAAUAAAAaBMAAD4jAAC0JAAA8yUAABAAAAAmAAAACAAAAIWgAAD/HwAA"/>
               </a:ext>
             </a:extLst>
           </p:cNvSpPr>
@@ -3530,7 +3530,7 @@
             <a:spLocks noGrp="1" noChangeArrowheads="1"/>
             <a:extLst>
               <a:ext uri="smNativeData">
-                <pr:smNativeData xmlns:pr="smNativeData" xmlns="smNativeData" val="SMDATA_15_mcIdaRMAAAAlAAAAZAAAAA0AAAAAAAAAAAAAAAAAAAAAAAAAAAAAAAAAAAAAAAAAAAEAAABQAAAAAAAAAAAA4D8AAAAAAADgPwAAAAAAAOA/AAAAAAAA4D8AAAAAAADgPwAAAAAAAOA/AAAAAAAA4D8AAAAAAADgPwAAAAAAAOA/AAAAAAAA4D8CAAAAjAAAAAAAAAAAAAAA40oGDP///wgAAAAAAAAAAAAAAAAAAAAAAAAAAAAAAAAAAAAAZAAAAAEAAABAAAAAAAAAAAAAAAAAAAAAAAAAAAAAAAAAAAAAAAAAAAAAAAAAAAAAAAAAAAAAAAAAAAAAAAAAAAAAAAAAAAAAAAAAAAAAAAAAAAAAAAAAAAAAAAAAAAAAFAAAADwAAAAAAAAAAAAAAAAAAAkUAAAAAQAAABQAAAAUAAAAFAAAAAEAAAAAAAAAZAAAAGQAAAAAAAAAZAAAAGQAAAAVAAAAYAAAAAAAAAAAAAAADwAAACADAAAAAAAAAAAAAAEAAACgMgAAVgcAAKr4//8BAAAAf39/AAEAAABkAAAAAAAAABQAAABAHwAAAAAAACYAAAAAAAAAwOD//wAAAAAmAAAAZAAAABYAAABMAAAAAAAAAAAAAAAEAAAAAAAAAAEAAACZloMKAAAAACgAAAAoAAAAZAAAAGQAAAAAAAAAzMzMAAAAAABQAAAAUAAAAGQAAABkAAAAAAAAABcAAAAUAAAAAAAAAAAAAAD/fwAA/38AAAAAAAAJAAAABAAAAAAAAAAeAAAAaAAAAAAAAAAAAAAAAAAAAAAAAAAAAAAAECcAABAnAAAAAAAAAAAAAAAAAAAAAAAAAAAAAAAAAAAAAAAAAAAAABQAAAAAAAAAwMD/AAAAAABkAAAAMgAAAAAAAABkAAAAAAAAAH9/fwAKAAAAIgAAABgAAAAAAAAAAAAAAAAAAAAAAAAAAAAAAAAAAAAkAAAAJAAAAAAAAAAHAAAAAAAAAAAAAAAAAAAAAAAAAAAAAAAAAAAAf39/ACUAAABYAAAAAAAAAAAAAAAAAAAAAAAAAAAAAAAAAAAAAAAAAAAAAAAAAAAAAAAAAAAAAAA/AAAAAAAAAKCGAQAAAAAAAAAAAAAAAAAMAAAAAQAAAAAAAAAAAAAAAAAAAB8AAABUAAAAAAAABQAAAAEAAAAAAAAAAAAAAAAAAAAAAAAAAAAAAAAAAAAAAAAAAAAAAAJ/f38AAAAAA8zMzADAwP8Af39/AAAAAAAAAAAAAAAAAAAAAAAAAAAAIQAAABgAAAAUAAAARScAABAOAAAANQAABCIAABAAAAAmAAAACAAAAAGgAAAAAAAA"/>
+                <pr:smNativeData xmlns:pr="smNativeData" xmlns="smNativeData" val="SMDATA_15_r8odaRMAAAAlAAAAZAAAAA0AAAAAAAAAAAAAAAAAAAAAAAAAAAAAAAAAAAAAAAAAAAEAAABQAAAAAAAAAAAA4D8AAAAAAADgPwAAAAAAAOA/AAAAAAAA4D8AAAAAAADgPwAAAAAAAOA/AAAAAAAA4D8AAAAAAADgPwAAAAAAAOA/AAAAAAAA4D8CAAAAjAAAAAAAAAAAAAAA40oGDP///wgAAAAAAAAAAAAAAAAAAAAAAAAAAAAAAAAAAAAAZAAAAAEAAABAAAAAAAAAAAAAAAAAAAAAAAAAAAAAAAAAAAAAAAAAAAAAAAAAAAAAAAAAAAAAAAAAAAAAAAAAAAAAAAAAAAAAAAAAAAAAAAAAAAAAAAAAAAAAAAAAAAAAFAAAADwAAAAAAAAAAAAAAAAAAAkUAAAAAQAAABQAAAAUAAAAFAAAAAEAAAAAAAAAZAAAAGQAAAAAAAAAZAAAAGQAAAAVAAAAYAAAAAAAAAAAAAAADwAAACADAAAAAAAAAAAAAAEAAACgMgAAVgcAAKr4//8BAAAAf39/AAEAAABkAAAAAAAAABQAAABAHwAAAAAAACYAAAAAAAAAwOD//wAAAAAmAAAAZAAAABYAAABMAAAAAAAAAAAAAAAEAAAAAAAAAAEAAACZloMKAAAAACgAAAAoAAAAZAAAAGQAAAAAAAAAzMzMAAAAAABQAAAAUAAAAGQAAABkAAAAAAAAABcAAAAUAAAAAAAAAAAAAAD/fwAA/38AAAAAAAAJAAAABAAAAAAAAAAeAAAAaAAAAAAAAAAAAAAAAAAAAAAAAAAAAAAAECcAABAnAAAAAAAAAAAAAAAAAAAAAAAAAAAAAAAAAAAAAAAAAAAAABQAAAAAAAAAwMD/AAAAAABkAAAAMgAAAAAAAABkAAAAAAAAAH9/fwAKAAAAIgAAABgAAAAAAAAAAAAAAAAAAAAAAAAAAAAAAAAAAAAkAAAAJAAAAAAAAAAHAAAAAAAAAAAAAAAAAAAAAAAAAAAAAAAAAAAAf39/ACUAAABYAAAAAAAAAAAAAAAAAAAAAAAAAAAAAAAAAAAAAAAAAAAAAAAAAAAAAAAAAAAAAAA/AAAAAAAAAKCGAQAAAAAAAAAAAAAAAAAMAAAAAQAAAAAAAAAAAAAAAAAAAB8AAABUAAAAAAAABQAAAAEAAAAAAAAAAAAAAAAAAAAAAAAAAAAAAAAAAAAAAAAAAAAAAAJ/f38AAAAAA8zMzADAwP8Af39/AAAAAAAAAAAAAAAAAAAAAAAAAAAAIQAAABgAAAAUAAAARScAABAOAAAANQAABCIAABAAAAAmAAAACAAAAAGgAAAAAAAA"/>
               </a:ext>
             </a:extLst>
           </p:cNvSpPr>
@@ -3604,7 +3604,7 @@
             <a:spLocks noGrp="1" noChangeArrowheads="1"/>
             <a:extLst>
               <a:ext uri="smNativeData">
-                <pr:smNativeData xmlns:pr="smNativeData" xmlns="smNativeData" val="SMDATA_15_mcIdaRMAAAAlAAAAZAAAAA0AAAAAkAAAAAAAAAAAAAAAAAAAAAAAAAABAAAAAAAAAAEAAABQAAAAAAAAAAAA4D8AAAAAAADgPwAAAAAAAOA/AAAAAAAA4D8AAAAAAADgPwAAAAAAAOA/AAAAAAAA4D8AAAAAAADgPwAAAAAAAOA/AAAAAAAA4D8CAAAAjAAAAAAAAAAAAAAA40oGDP///wgAAAAAAAAAAAAAAAAAAAAAAAAAAAAAAAAAAAAAZAAAAAEAAABAAAAAAAAAAAAAAAAAAAAAAAAAAAAAAAAAAAAAAAAAAAAAAAAAAAAAAAAAAAAAAAAAAAAAAAAAAAAAAAAAAAAAAAAAAAAAAAAAAAAAAAAAAAAAAAAAAAAAFAAAADwAAAAAAAAAAAAAAAAAAAkUAAAAAQAAABQAAAAUAAAAFAAAAAEAAAAAAAAAZAAAAGQAAAAAAAAAZAAAAGQAAAAVAAAAYAAAAAAAAAAAAAAADwAAACADAAAAAAAAAAAAAAEAAACgMgAAVgcAAKr4//8BAAAAf39/AAEAAABkAAAAAAAAABQAAABAHwAAAAAAACYAAAAAAAAAwOD//wAAAAAmAAAAZAAAABYAAABMAAAAAAAAAAAAAAAEAAAAAAAAAAEAAACZloMKAAAAACgAAAAoAAAAZAAAAGQAAAAAAAAAzMzMAAAAAABQAAAAUAAAAGQAAABkAAAAAAAAABcAAAAUAAAAAAAAAAAAAAD/fwAA/38AAAAAAAAJAAAABAAAAAAAAAAeAAAAaAAAAAAAAAAAAAAAAAAAAAAAAAAAAAAAECcAABAnAAAAAAAAAAAAAAAAAAAAAAAAAAAAAAAAAAAAAAAAAAAAABQAAAAAAAAAwMD/AAAAAABkAAAAMgAAAAAAAABkAAAAAAAAAH9/fwAKAAAAIgAAABgAAAAAAAAAAAAAAAAAAAAAAAAAAAAAAAAAAAAkAAAAJAAAAAAAAAAHAAAAAAAAAAAAAAAAAAAAAAAAAAAAAAAAAAAAf39/ACUAAABYAAAAAAAAAAAAAAAAAAAAAAAAAAAAAAAAAAAAAAAAAAAAAAAAAAAAAAAAAAAAAAA/AAAAAAAAAKCGAQAAAAAAAAAAAAAAAAAMAAAAAQAAAAAAAAAAAAAAAAAAAB8AAABUAAAAAAAABQAAAAEAAAAAAAAAAAAAAAAAAAAAAAAAAAAAAAAAAAAAAAAAAAAAAAJ/f38AAAAAA8zMzADAwP8Af39/AAAAAAAAAAAAAAAAAAAAAAAAAAAAIQAAABgAAAAUAAAANiUAAD4jAACCNgAA8yUAABAAAAAmAAAACAAAAIWgAAD/HwAA"/>
+                <pr:smNativeData xmlns:pr="smNativeData" xmlns="smNativeData" val="SMDATA_15_r8odaRMAAAAlAAAAZAAAAA0AAAAAkAAAAAAAAAAAAAAAAAAAAAAAAAABAAAAAAAAAAEAAABQAAAAAAAAAAAA4D8AAAAAAADgPwAAAAAAAOA/AAAAAAAA4D8AAAAAAADgPwAAAAAAAOA/AAAAAAAA4D8AAAAAAADgPwAAAAAAAOA/AAAAAAAA4D8CAAAAjAAAAAAAAAAAAAAA40oGDP///wgAAAAAAAAAAAAAAAAAAAAAAAAAAAAAAAAAAAAAZAAAAAEAAABAAAAAAAAAAAAAAAAAAAAAAAAAAAAAAAAAAAAAAAAAAAAAAAAAAAAAAAAAAAAAAAAAAAAAAAAAAAAAAAAAAAAAAAAAAAAAAAAAAAAAAAAAAAAAAAAAAAAAFAAAADwAAAAAAAAAAAAAAAAAAAkUAAAAAQAAABQAAAAUAAAAFAAAAAEAAAAAAAAAZAAAAGQAAAAAAAAAZAAAAGQAAAAVAAAAYAAAAAAAAAAAAAAADwAAACADAAAAAAAAAAAAAAEAAACgMgAAVgcAAKr4//8BAAAAf39/AAEAAABkAAAAAAAAABQAAABAHwAAAAAAACYAAAAAAAAAwOD//wAAAAAmAAAAZAAAABYAAABMAAAAAAAAAAAAAAAEAAAAAAAAAAEAAACZloMKAAAAACgAAAAoAAAAZAAAAGQAAAAAAAAAzMzMAAAAAABQAAAAUAAAAGQAAABkAAAAAAAAABcAAAAUAAAAAAAAAAAAAAD/fwAA/38AAAAAAAAJAAAABAAAAAAAAAAeAAAAaAAAAAAAAAAAAAAAAAAAAAAAAAAAAAAAECcAABAnAAAAAAAAAAAAAAAAAAAAAAAAAAAAAAAAAAAAAAAAAAAAABQAAAAAAAAAwMD/AAAAAABkAAAAMgAAAAAAAABkAAAAAAAAAH9/fwAKAAAAIgAAABgAAAAAAAAAAAAAAAAAAAAAAAAAAAAAAAAAAAAkAAAAJAAAAAAAAAAHAAAAAAAAAAAAAAAAAAAAAAAAAAAAAAAAAAAAf39/ACUAAABYAAAAAAAAAAAAAAAAAAAAAAAAAAAAAAAAAAAAAAAAAAAAAAAAAAAAAAAAAAAAAAA/AAAAAAAAAKCGAQAAAAAAAAAAAAAAAAAMAAAAAQAAAAAAAAAAAAAAAAAAAB8AAABUAAAAAAAABQAAAAEAAAAAAAAAAAAAAAAAAAAAAAAAAAAAAAAAAAAAAAAAAAAAAAJ/f38AAAAAA8zMzADAwP8Af39/AAAAAAAAAAAAAAAAAAAAAAAAAAAAIQAAABgAAAAUAAAANiUAAD4jAACCNgAA8yUAABAAAAAmAAAACAAAAIWgAAD/HwAA"/>
               </a:ext>
             </a:extLst>
           </p:cNvSpPr>
@@ -3723,7 +3723,7 @@
           <p:cNvSpPr>
             <a:extLst>
               <a:ext uri="smNativeData">
-                <pr:smNativeData xmlns:pr="smNativeData" xmlns="smNativeData" val="SMDATA_15_mcIdaRMAAAAlAAAAZAAAAE0AAAAAkAAAAEgAAACQAAAASAAAAAAAAAAAAAAAAAAAAAEAAABQAAAAAAAAAAAA4D8AAAAAAADgPwAAAAAAAOA/AAAAAAAA4D8AAAAAAADgPwAAAAAAAOA/AAAAAAAA4D8AAAAAAADgPwAAAAAAAOA/AAAAAAAA4D8CAAAAjAAAAAAAAAAAAAAA40oGDP///wgAAAAAAAAAAAAAAAAAAAAAAAAAAAAAAAAAAAAAZAAAAAEAAABAAAAAAAAAAAAAAAAAAAAAAAAAAAAAAAAAAAAAAAAAAAAAAAAAAAAAAAAAAAAAAAAAAAAAAAAAAAAAAAAAAAAAAAAAAAAAAAAAAAAAAAAAAAAAAAAAAAAAFAAAADwAAAAAAAAAAAAAAAAAAAAPAAAAAQAAACMAAAAjAAAAIwAAAB4AAAAAAAAAZAAAAGQAAAAAAAAAZAAAAGQAAAAVAAAAYAAAAAAAAAAAAAAADwAAACADAAAAAAAAAAAAAAEAAACgMgAAVgcAAKr4//8BAAAAf39/AAEAAABkAAAAAAAAABQAAABAHwAAAAAAACYAAAAAAAAAwOD//wAAAAAmAAAAZAAAABYAAABMAAAAAAAAAAAAAAAEAAAAAAAAAAEAAACZloMKAAAAACgAAAAoAAAAZAAAAGQAAAAAAAAAzMzMAAAAAABQAAAAUAAAAGQAAABkAAAAAAAAABcAAAAUAAAAAAAAAAAAAAD/fwAA/38AAAAAAAAJAAAABAAAAAAAAAAeAAAAaAAAAAAAAAAAAAAAAAAAAAAAAAAAAAAAECcAABAnAAAAAAAAAAAAAAAAAAAAAAAAAAAAAAAAAAAAAAAAAAAAABQAAAAAAAAAwMD/AAAAAABkAAAAMgAAAAAAAABkAAAAAAAAAH9/fwAKAAAAIgAAABgAAAAAAAAAAAAAAAAAAAAAAAAAAAAAAAAAAAAkAAAAJAAAAAAAAAAHAAAAAAAAAAAAAAAAAAAAAAAAAAAAAAAAAAAAf39/ACUAAABYAAAAAAAAAAAAAAAAAAAAAAAAAAAAAAAAAAAAAAAAAAAAAAAAAAAAAAAAAAAAAAA/AAAAAAAAAKCGAQAAAAAAAAAAAAAAAAAMAAAAAQAAAAAAAAAAAAAAAAAAAB8AAABUAAAA40oGBf///wEAAAAAAAAAAAAAAAAAAAAAAAAAAAAAAAAAAAAAAAAAAAAAAAB/f38AmZaDA8zMzADAwP8Af39/AAAAAAAAAAAAAAAAAAAAAAAAAAAAIQAAABgAAAAUAAAAYxEAAGkoAACIIQAAkCkAABAgAAAmAAAACAAAAP//////////"/>
+                <pr:smNativeData xmlns:pr="smNativeData" xmlns="smNativeData" val="SMDATA_15_r8odaRMAAAAlAAAAZAAAAE0AAAAAkAAAAEgAAACQAAAASAAAAAAAAAAAAAAAAAAAAAEAAABQAAAAAAAAAAAA4D8AAAAAAADgPwAAAAAAAOA/AAAAAAAA4D8AAAAAAADgPwAAAAAAAOA/AAAAAAAA4D8AAAAAAADgPwAAAAAAAOA/AAAAAAAA4D8CAAAAjAAAAAAAAAAAAAAA40oGDP///wgAAAAAAAAAAAAAAAAAAAAAAAAAAAAAAAAAAAAAZAAAAAEAAABAAAAAAAAAAAAAAAAAAAAAAAAAAAAAAAAAAAAAAAAAAAAAAAAAAAAAAAAAAAAAAAAAAAAAAAAAAAAAAAAAAAAAAAAAAAAAAAAAAAAAAAAAAAAAAAAAAAAAFAAAADwAAAAAAAAAAAAAAAAAAAAPAAAAAQAAACMAAAAjAAAAIwAAAB4AAAAAAAAAZAAAAGQAAAAAAAAAZAAAAGQAAAAVAAAAYAAAAAAAAAAAAAAADwAAACADAAAAAAAAAAAAAAEAAACgMgAAVgcAAKr4//8BAAAAf39/AAEAAABkAAAAAAAAABQAAABAHwAAAAAAACYAAAAAAAAAwOD//wAAAAAmAAAAZAAAABYAAABMAAAAAAAAAAAAAAAEAAAAAAAAAAEAAACZloMKAAAAACgAAAAoAAAAZAAAAGQAAAAAAAAAzMzMAAAAAABQAAAAUAAAAGQAAABkAAAAAAAAABcAAAAUAAAAAAAAAAAAAAD/fwAA/38AAAAAAAAJAAAABAAAAAAAAAAeAAAAaAAAAAAAAAAAAAAAAAAAAAAAAAAAAAAAECcAABAnAAAAAAAAAAAAAAAAAAAAAAAAAAAAAAAAAAAAAAAAAAAAABQAAAAAAAAAwMD/AAAAAABkAAAAMgAAAAAAAABkAAAAAAAAAH9/fwAKAAAAIgAAABgAAAAAAAAAAAAAAAAAAAAAAAAAAAAAAAAAAAAkAAAAJAAAAAAAAAAHAAAAAAAAAAAAAAAAAAAAAAAAAAAAAAAAAAAAf39/ACUAAABYAAAAAAAAAAAAAAAAAAAAAAAAAAAAAAAAAAAAAAAAAAAAAAAAAAAAAAAAAAAAAAA/AAAAAAAAAKCGAQAAAAAAAAAAAAAAAAAMAAAAAQAAAAAAAAAAAAAAAAAAAB8AAABUAAAA40oGBf///wEAAAAAAAAAAAAAAAAAAAAAAAAAAAAAAAAAAAAAAAAAAAAAAAB/f38AmZaDA8zMzADAwP8Af39/AAAAAAAAAAAAAAAAAAAAAAAAAAAAIQAAABgAAAAUAAAAYxEAAGkoAACIIQAAkCkAABAgAAAmAAAACAAAAP//////////"/>
               </a:ext>
             </a:extLst>
           </p:cNvSpPr>
@@ -3772,7 +3772,7 @@
           <p:cNvSpPr>
             <a:extLst>
               <a:ext uri="smNativeData">
-                <pr:smNativeData xmlns:pr="smNativeData" xmlns="smNativeData" val="SMDATA_15_mcIdaRMAAAAlAAAAZAAAAA0AAAAAkAAAAEgAAACQAAAASAAAAAAAAAABAAAAAAAAAAEAAABQAAAAAAAAAAAA4D8AAAAAAADgPwAAAAAAAOA/AAAAAAAA4D8AAAAAAADgPwAAAAAAAOA/AAAAAAAA4D8AAAAAAADgPwAAAAAAAOA/AAAAAAAA4D8CAAAAjAAAAAEAAAAAAAAA40oGDP///wgAAAAAAAAAAAAAAAAAAAAAAAAAAAAAAAAAAAAAZAAAAAEAAABAAAAAAAAAAAAAAAAAAAAAAAAAAAAAAAAAAAAAAAAAAAAAAAAAAAAAAAAAAAAAAAAAAAAAAAAAAAAAAAAAAAAAAAAAAAAAAAAAAAAAAAAAAAAAAAAAAAAAFAAAADwAAAAAAAAAAAAAAKg3BAAoAAAAAQAAABQAAAAUAAAAFAAAAAEAAAAAAAAAZAAAAGQAAAAAAAAAZAAAAGQAAAAVAAAAYAAAAAAAAAAAAAAADwAAACADAAAAAAAAAAAAAAEAAACgMgAAVgcAAKr4//8BAAAAf39/AAEAAABkAAAAAAAAABQAAABAHwAAAAAAACYAAAAAAAAAwOD//wAAAAAmAAAAZAAAABYAAABMAAAAAAAAAAAAAAAEAAAAAAAAAAEAAACZloMKAAAAACgAAAAoAAAAZAAAAGQAAAAAAAAAzMzMAAAAAABQAAAAUAAAAGQAAABkAAAAAAAAABcAAAAUAAAAAAAAAAAAAAD/fwAA/38AAAAAAAAJAAAABAAAAAAAAAAeAAAAaAAAAAAAAAAAAAAAAAAAAAAAAAAAAAAAECcAABAnAAAAAAAAAAAAAAAAAAAAAAAAAAAAAAAAAAAAAAAAAAAAABQAAAAAAAAAwMD/AAAAAABkAAAAMgAAAAAAAABkAAAAAAAAAH9/fwAKAAAAIgAAABgAAAAAAAAAAAAAAAAAAAAAAAAAAAAAAAAAAAAkAAAAJAAAAAAAAAAHAAAAAAAAAAAAAAAAAAAAAAAAAAAAAAAAAAAAf39/ACUAAABYAAAAAAAAAAAAAAAAAAAAAAAAAAAAAAAAAAAAAAAAAAAAAAAAAAAAAAAAAAAAAAA/AAAAAAAAAKCGAQAAAAAAAAAAAAAAAAAMAAAAAQAAAAAAAAAAAAAAAAAAAB8AAABUAAAA40oGBf///wEAAAAAAAAAAAAAAAAAAAAAAAAAAAAAAAAAAAAAAAAAAKg3BAB/f38AmZaDA8zMzADAwP8Af39/AAAAAAAAAAAAAAAAAAAAAAAAAAAAIQAAABgAAAAUAAAArwEAAFcGAAAONwAAnwYAABAAAAAmAAAACAAAAP//////////"/>
+                <pr:smNativeData xmlns:pr="smNativeData" xmlns="smNativeData" val="SMDATA_15_r8odaRMAAAAlAAAAZAAAAA0AAAAAkAAAAEgAAACQAAAASAAAAAAAAAABAAAAAAAAAAEAAABQAAAAAAAAAAAA4D8AAAAAAADgPwAAAAAAAOA/AAAAAAAA4D8AAAAAAADgPwAAAAAAAOA/AAAAAAAA4D8AAAAAAADgPwAAAAAAAOA/AAAAAAAA4D8CAAAAjAAAAAEAAAAAAAAA40oGDP///wgAAAAAAAAAAAAAAAAAAAAAAAAAAAAAAAAAAAAAZAAAAAEAAABAAAAAAAAAAAAAAAAAAAAAAAAAAAAAAAAAAAAAAAAAAAAAAAAAAAAAAAAAAAAAAAAAAAAAAAAAAAAAAAAAAAAAAAAAAAAAAAAAAAAAAAAAAAAAAAAAAAAAFAAAADwAAAAAAAAAAAAAAKg3BAAoAAAAAQAAABQAAAAUAAAAFAAAAAEAAAAAAAAAZAAAAGQAAAAAAAAAZAAAAGQAAAAVAAAAYAAAAAAAAAAAAAAADwAAACADAAAAAAAAAAAAAAEAAACgMgAAVgcAAKr4//8BAAAAf39/AAEAAABkAAAAAAAAABQAAABAHwAAAAAAACYAAAAAAAAAwOD//wAAAAAmAAAAZAAAABYAAABMAAAAAAAAAAAAAAAEAAAAAAAAAAEAAACZloMKAAAAACgAAAAoAAAAZAAAAGQAAAAAAAAAzMzMAAAAAABQAAAAUAAAAGQAAABkAAAAAAAAABcAAAAUAAAAAAAAAAAAAAD/fwAA/38AAAAAAAAJAAAABAAAAAAAAAAeAAAAaAAAAAAAAAAAAAAAAAAAAAAAAAAAAAAAECcAABAnAAAAAAAAAAAAAAAAAAAAAAAAAAAAAAAAAAAAAAAAAAAAABQAAAAAAAAAwMD/AAAAAABkAAAAMgAAAAAAAABkAAAAAAAAAH9/fwAKAAAAIgAAABgAAAAAAAAAAAAAAAAAAAAAAAAAAAAAAAAAAAAkAAAAJAAAAAAAAAAHAAAAAAAAAAAAAAAAAAAAAAAAAAAAAAAAAAAAf39/ACUAAABYAAAAAAAAAAAAAAAAAAAAAAAAAAAAAAAAAAAAAAAAAAAAAAAAAAAAAAAAAAAAAAA/AAAAAAAAAKCGAQAAAAAAAAAAAAAAAAAMAAAAAQAAAAAAAAAAAAAAAAAAAB8AAABUAAAA40oGBf///wEAAAAAAAAAAAAAAAAAAAAAAAAAAAAAAAAAAAAAAAAAAKg3BAB/f38AmZaDA8zMzADAwP8Af39/AAAAAAAAAAAAAAAAAAAAAAAAAAAAIQAAABgAAAAUAAAArwEAAFcGAAAONwAAnwYAABAAAAAmAAAACAAAAP//////////"/>
               </a:ext>
             </a:extLst>
           </p:cNvSpPr>
@@ -3819,7 +3819,7 @@
             <a:spLocks noGrp="1" noChangeArrowheads="1"/>
             <a:extLst>
               <a:ext uri="smNativeData">
-                <pr:smNativeData xmlns:pr="smNativeData" xmlns="smNativeData" val="SMDATA_15_mcIdaRMAAAAlAAAAZAAAAA0AAAAAAAAAAAAAAAAAAAAAAAAAAAAAAAAAAAAAAAAAAAEAAABQAAAAAAAAAAAA4D8AAAAAAADgPwAAAAAAAOA/AAAAAAAA4D8AAAAAAADgPwAAAAAAAOA/AAAAAAAA4D8AAAAAAADgPwAAAAAAAOA/AAAAAAAA4D8CAAAAjAAAAAAAAAAAAAAA40oGDP///wgAAAAAAAAAAAAAAAAAAAAAAAAAAAAAAAAAAAAAZAAAAAEAAABAAAAAAAAAAAAAAAAAAAAAAAAAAAAAAAAAAAAAAAAAAAAAAAAAAAAAAAAAAAAAAAAAAAAAAAAAAAAAAAAAAAAAAAAAAAAAAAAAAAAAAAAAAAAAAAAAAAAAFAAAADwAAAAAAAAAAAAAAAAAAAkUAAAAAQAAABQAAAAUAAAAFAAAAAEAAAAAAAAAZAAAAGQAAAAAAAAAZAAAAGQAAAAVAAAAYAAAAAAAAAAAAAAADwAAACADAAAAAAAAAAAAAAEAAACgMgAAVgcAAKr4//8BAAAAf39/AAEAAABkAAAAAAAAABQAAABAHwAAAAAAACYAAAAAAAAAwOD//wAAAAAmAAAAZAAAABYAAABMAAAAAAAAAAAAAAAEAAAAAAAAAAEAAACZloMKAAAAACgAAAAoAAAAZAAAAGQAAAAAAAAAzMzMAAAAAABQAAAAUAAAAGQAAABkAAAAAAAAABcAAAAUAAAAAAAAAAAAAAD/fwAA/38AAAAAAAAJAAAABAAAAAAAAAAeAAAAaAAAAAAAAAAAAAAAAAAAAAAAAAAAAAAAECcAABAnAAAAAAAAAAAAAAAAAAAAAAAAAAAAAAAAAAAAAAAAAAAAABQAAAAAAAAAwMD/AAAAAABkAAAAMgAAAAAAAABkAAAAAAAAAH9/fwAKAAAAIgAAABgAAAAAAAAAAAAAAAAAAAAAAAAAAAAAAAAAAAAkAAAAJAAAAAAAAAAHAAAAAAAAAAAAAAAAAAAAAAAAAAAAAAAAAAAAf39/ACUAAABYAAAAAAAAAAAAAAAAAAAAAAAAAAAAAAAAAAAAAAAAAAAAAAAAAAAAAAAAAAAAAAA/AAAAAAAAAKCGAQAAAAAAAAAAAAAAAAAMAAAAAQAAAAAAAAAAAAAAAAAAAB8AAABUAAAAAAAABQAAAAEAAAAAAAAAAAAAAAAAAAAAAAAAAAAAAAAAAAAAAAAAAAAAAAJ/f38AAAAAA8zMzADAwP8Af39/AAAAAAAAAAAAAAAAAAAAAAAAAAAAIQAAABgAAAAUAAAA0AIAADgEAABjFgAAxgsAABAAAAAmAAAACAAAAAAAAAAAAAAA"/>
+                <pr:smNativeData xmlns:pr="smNativeData" xmlns="smNativeData" val="SMDATA_15_r8odaRMAAAAlAAAAZAAAAA0AAAAAAAAAAAAAAAAAAAAAAAAAAAAAAAAAAAAAAAAAAAEAAABQAAAAAAAAAAAA4D8AAAAAAADgPwAAAAAAAOA/AAAAAAAA4D8AAAAAAADgPwAAAAAAAOA/AAAAAAAA4D8AAAAAAADgPwAAAAAAAOA/AAAAAAAA4D8CAAAAjAAAAAAAAAAAAAAA40oGDP///wgAAAAAAAAAAAAAAAAAAAAAAAAAAAAAAAAAAAAAZAAAAAEAAABAAAAAAAAAAAAAAAAAAAAAAAAAAAAAAAAAAAAAAAAAAAAAAAAAAAAAAAAAAAAAAAAAAAAAAAAAAAAAAAAAAAAAAAAAAAAAAAAAAAAAAAAAAAAAAAAAAAAAFAAAADwAAAAAAAAAAAAAAAAAAAkUAAAAAQAAABQAAAAUAAAAFAAAAAEAAAAAAAAAZAAAAGQAAAAAAAAAZAAAAGQAAAAVAAAAYAAAAAAAAAAAAAAADwAAACADAAAAAAAAAAAAAAEAAACgMgAAVgcAAKr4//8BAAAAf39/AAEAAABkAAAAAAAAABQAAABAHwAAAAAAACYAAAAAAAAAwOD//wAAAAAmAAAAZAAAABYAAABMAAAAAAAAAAAAAAAEAAAAAAAAAAEAAACZloMKAAAAACgAAAAoAAAAZAAAAGQAAAAAAAAAzMzMAAAAAABQAAAAUAAAAGQAAABkAAAAAAAAABcAAAAUAAAAAAAAAAAAAAD/fwAA/38AAAAAAAAJAAAABAAAAAAAAAAeAAAAaAAAAAAAAAAAAAAAAAAAAAAAAAAAAAAAECcAABAnAAAAAAAAAAAAAAAAAAAAAAAAAAAAAAAAAAAAAAAAAAAAABQAAAAAAAAAwMD/AAAAAABkAAAAMgAAAAAAAABkAAAAAAAAAH9/fwAKAAAAIgAAABgAAAAAAAAAAAAAAAAAAAAAAAAAAAAAAAAAAAAkAAAAJAAAAAAAAAAHAAAAAAAAAAAAAAAAAAAAAAAAAAAAAAAAAAAAf39/ACUAAABYAAAAAAAAAAAAAAAAAAAAAAAAAAAAAAAAAAAAAAAAAAAAAAAAAAAAAAAAAAAAAAA/AAAAAAAAAKCGAQAAAAAAAAAAAAAAAAAMAAAAAQAAAAAAAAAAAAAAAAAAAB8AAABUAAAAAAAABQAAAAEAAAAAAAAAAAAAAAAAAAAAAAAAAAAAAAAAAAAAAAAAAAAAAAJ/f38AAAAAA8zMzADAwP8Af39/AAAAAAAAAAAAAAAAAAAAAAAAAAAAIQAAABgAAAAUAAAA0AIAADgEAABjFgAAxgsAABAAAAAmAAAACAAAAAAAAAAAAAAA"/>
               </a:ext>
             </a:extLst>
           </p:cNvSpPr>
@@ -3849,7 +3849,7 @@
             <a:spLocks noGrp="1" noChangeArrowheads="1"/>
             <a:extLst>
               <a:ext uri="smNativeData">
-                <pr:smNativeData xmlns:pr="smNativeData" xmlns="smNativeData" val="SMDATA_15_mcIdaRMAAAAlAAAAZAAAAA0AAAAAAAAAAAAAAAAAAAAAAAAAAAAAAAAAAAAAAAAAAAEAAABQAAAAAAAAAAAA4D8AAAAAAADgPwAAAAAAAOA/AAAAAAAA4D8AAAAAAADgPwAAAAAAAOA/AAAAAAAA4D8AAAAAAADgPwAAAAAAAOA/AAAAAAAA4D8CAAAAjAAAAAAAAAAAAAAA40oGDP///wgAAAAAAAAAAAAAAAAAAAAAAAAAAAAAAAAAAAAAZAAAAAEAAABAAAAAAAAAAAAAAAAAAAAAAAAAAAAAAAAAAAAAAAAAAAAAAAAAAAAAAAAAAAAAAAAAAAAAAAAAAAAAAAAAAAAAAAAAAAAAAAAAAAAAAAAAAAAAAAAAAAAAFAAAADwAAAAAAAAAAAAAAAAAAAkUAAAAAQAAABQAAAAUAAAAFAAAAAEAAAAAAAAAZAAAAGQAAAAAAAAAZAAAAGQAAAAVAAAAYAAAAAAAAAAAAAAADwAAACADAAAAAAAAAAAAAAEAAACgMgAAVgcAAKr4//8BAAAAf39/AAEAAABkAAAAAAAAABQAAABAHwAAAAAAACYAAAAAAAAAwOD//wAAAAAmAAAAZAAAABYAAABMAAAAAAAAAAAAAAAEAAAAAAAAAAEAAACZloMKAAAAACgAAAAoAAAAZAAAAGQAAAAAAAAAzMzMAAAAAABQAAAAUAAAAGQAAABkAAAAAAAAABcAAAAUAAAAAAAAAAAAAAD/fwAA/38AAAAAAAAJAAAABAAAAAAAAAAeAAAAaAAAAAAAAAAAAAAAAAAAAAAAAAAAAAAAECcAABAnAAAAAAAAAAAAAAAAAAAAAAAAAAAAAAAAAAAAAAAAAAAAABQAAAAAAAAAwMD/AAAAAABkAAAAMgAAAAAAAABkAAAAAAAAAH9/fwAKAAAAIgAAABgAAAAAAAAAAAAAAAAAAAAAAAAAAAAAAAAAAAAkAAAAJAAAAAAAAAAHAAAAAAAAAAAAAAAAAAAAAAAAAAAAAAAAAAAAf39/ACUAAABYAAAAAAAAAAAAAAAAAAAAAAAAAAAAAAAAAAAAAAAAAAAAAAAAAAAAAAAAAAAAAAA/AAAAAAAAAKCGAQAAAAAAAAAAAAAAAAAMAAAAAQAAAAAAAAAAAAAAAAAAAB8AAABUAAAAAAAABQAAAAEAAAAAAAAAAAAAAAAAAAAAAAAAAAAAAAAAAAAAAAAAAAAAAAJ/f38AAAAAA8zMzADAwP8Af39/AAAAAAAAAAAAAAAAAAAAAAAAAAAAIQAAABgAAAAUAAAAHAIAAGgGAACMCgAAqBEAABAAAAAmAAAACAAAAAGAAAAAAAAA"/>
+                <pr:smNativeData xmlns:pr="smNativeData" xmlns="smNativeData" val="SMDATA_15_r8odaRMAAAAlAAAAZAAAAA0AAAAAAAAAAAAAAAAAAAAAAAAAAAAAAAAAAAAAAAAAAAEAAABQAAAAAAAAAAAA4D8AAAAAAADgPwAAAAAAAOA/AAAAAAAA4D8AAAAAAADgPwAAAAAAAOA/AAAAAAAA4D8AAAAAAADgPwAAAAAAAOA/AAAAAAAA4D8CAAAAjAAAAAAAAAAAAAAA40oGDP///wgAAAAAAAAAAAAAAAAAAAAAAAAAAAAAAAAAAAAAZAAAAAEAAABAAAAAAAAAAAAAAAAAAAAAAAAAAAAAAAAAAAAAAAAAAAAAAAAAAAAAAAAAAAAAAAAAAAAAAAAAAAAAAAAAAAAAAAAAAAAAAAAAAAAAAAAAAAAAAAAAAAAAFAAAADwAAAAAAAAAAAAAAAAAAAkUAAAAAQAAABQAAAAUAAAAFAAAAAEAAAAAAAAAZAAAAGQAAAAAAAAAZAAAAGQAAAAVAAAAYAAAAAAAAAAAAAAADwAAACADAAAAAAAAAAAAAAEAAACgMgAAVgcAAKr4//8BAAAAf39/AAEAAABkAAAAAAAAABQAAABAHwAAAAAAACYAAAAAAAAAwOD//wAAAAAmAAAAZAAAABYAAABMAAAAAAAAAAAAAAAEAAAAAAAAAAEAAACZloMKAAAAACgAAAAoAAAAZAAAAGQAAAAAAAAAzMzMAAAAAABQAAAAUAAAAGQAAABkAAAAAAAAABcAAAAUAAAAAAAAAAAAAAD/fwAA/38AAAAAAAAJAAAABAAAAAAAAAAeAAAAaAAAAAAAAAAAAAAAAAAAAAAAAAAAAAAAECcAABAnAAAAAAAAAAAAAAAAAAAAAAAAAAAAAAAAAAAAAAAAAAAAABQAAAAAAAAAwMD/AAAAAABkAAAAMgAAAAAAAABkAAAAAAAAAH9/fwAKAAAAIgAAABgAAAAAAAAAAAAAAAAAAAAAAAAAAAAAAAAAAAAkAAAAJAAAAAAAAAAHAAAAAAAAAAAAAAAAAAAAAAAAAAAAAAAAAAAAf39/ACUAAABYAAAAAAAAAAAAAAAAAAAAAAAAAAAAAAAAAAAAAAAAAAAAAAAAAAAAAAAAAAAAAAA/AAAAAAAAAKCGAQAAAAAAAAAAAAAAAAAMAAAAAQAAAAAAAAAAAAAAAAAAAB8AAABUAAAAAAAABQAAAAEAAAAAAAAAAAAAAAAAAAAAAAAAAAAAAAAAAAAAAAAAAAAAAAJ/f38AAAAAA8zMzADAwP8Af39/AAAAAAAAAAAAAAAAAAAAAAAAAAAAIQAAABgAAAAUAAAAHAIAAGgGAACMCgAAqBEAABAAAAAmAAAACAAAAAGAAAAAAAAA"/>
               </a:ext>
             </a:extLst>
           </p:cNvSpPr>
@@ -3918,7 +3918,7 @@
             <a:spLocks noGrp="1" noChangeArrowheads="1"/>
             <a:extLst>
               <a:ext uri="smNativeData">
-                <pr:smNativeData xmlns:pr="smNativeData" xmlns="smNativeData" val="SMDATA_15_mcIdaRMAAAAlAAAAZAAAAA0AAAAAAAAAAAAAAAAAAAAAAAAAAAAAAAABAAAAAAAAAAEAAABQAAAAAAAAAAAA4D8AAAAAAADgPwAAAAAAAOA/AAAAAAAA4D8AAAAAAADgPwAAAAAAAOA/AAAAAAAA4D8AAAAAAADgPwAAAAAAAOA/AAAAAAAA4D8CAAAAjAAAAAEAAAAAAAAA40oGDP///wgAAAAAAAAAAAAAAAAAAAAAAAAAAAAAAAAAAAAAeAAAAAEAAABAAAAAAAAAAAAAAABaAAAAAAAAAAAAAAAAAAAAAAAAAAAAAAAAAAAAAAAAAAAAAAAAAAAAAAAAAAAAAAAAAAAAAAAAAAAAAAAAAAAAAAAAAAAAAAAAAAAAFAAAADwAAAABAAAAAAAAAONKBgwPAAAAAQAAACMAAAAjAAAAIwAAAB4AAAAAAAAAZAAAAGQAAAAAAAAAZAAAAGQAAAAVAAAAYAAAAAAAAAAAAAAADwAAACADAAAAAAAAAAAAAAEAAACgMgAAVgcAAKr4//8BAAAAf39/AAEAAABkAAAAAAAAABQAAABAHwAAAAAAACYAAAAAAAAAwOD//wAAAAAmAAAAZAAAABYAAABMAAAAAAAAAAAAAAAEAAAAAAAAAAEAAACZloMKAAAAACgAAAAoAAAAZAAAAGQAAAAAAAAAzMzMAAAAAABQAAAAUAAAAGQAAABkAAAAAAAAABcAAAAUAAAAAAAAAAAAAAD/fwAA/38AAAAAAAAJAAAABAAAAFRhcmceAAAAaAAAAAAAAAAAAAAAAAAAAAAAAAAAAAAAECcAABAnAAAAAAAAAAAAAAAAAAAAAAAAAAAAAAAAAAAAAAAAAAAAABQAAAAAAAAAwMD/AAAAAABkAAAAMgAAAAAAAABkAAAAAAAAAH9/fwAKAAAAIgAAABgAAAAAAAAAAAAAAAAAAAAAAAAAAAAAAAAAAAAkAAAAJAAAAAAAAAAHAAAAAAAAAAAAAAAAAAAAAAAAAAAAAAAAAAAAf39/ACUAAABYAAAAAAAAAAAAAAAAAAAAAAAAAAAAAAAAAAAAAAAAAAAAAAAAAAAAAAAAAAAAAAA/AAAAAAAAAKCGAQAAAAAAAAAAAAAAAAAMAAAAAQAAAAAAAAAAAAAAAAAAAB8AAABUAAAAAAAABQAAAAEAAAAAAAAAAAAAAAAAAAAAAAAAAAAAAAAAAAAAAAAAAAAAAAV/f38AAAAAA8zMzADAwP8Af39/AAAAAAAAAAAAAAAAAAAAAAAAAAAAIQAAABgAAAAUAAAARAEAAAASAABkCwAA2xMAABAAAAAmAAAACAAAAIGgAAD/HwAA"/>
+                <pr:smNativeData xmlns:pr="smNativeData" xmlns="smNativeData" val="SMDATA_15_r8odaRMAAAAlAAAAZAAAAA0AAAAAAAAAAAAAAAAAAAAAAAAAAAAAAAABAAAAAAAAAAEAAABQAAAAAAAAAAAA4D8AAAAAAADgPwAAAAAAAOA/AAAAAAAA4D8AAAAAAADgPwAAAAAAAOA/AAAAAAAA4D8AAAAAAADgPwAAAAAAAOA/AAAAAAAA4D8CAAAAjAAAAAEAAAAAAAAA40oGDP///wgAAAAAAAAAAAAAAAAAAAAAAAAAAAAAAAAAAAAAeAAAAAEAAABAAAAAAAAAAAAAAABaAAAAAAAAAAAAAAAAAAAAAAAAAAAAAAAAAAAAAAAAAAAAAAAAAAAAAAAAAAAAAAAAAAAAAAAAAAAAAAAAAAAAAAAAAAAAAAAAAAAAFAAAADwAAAABAAAAAAAAAONKBgwPAAAAAQAAACMAAAAjAAAAIwAAAB4AAAAAAAAAZAAAAGQAAAAAAAAAZAAAAGQAAAAVAAAAYAAAAAAAAAAAAAAADwAAACADAAAAAAAAAAAAAAEAAACgMgAAVgcAAKr4//8BAAAAf39/AAEAAABkAAAAAAAAABQAAABAHwAAAAAAACYAAAAAAAAAwOD//wAAAAAmAAAAZAAAABYAAABMAAAAAAAAAAAAAAAEAAAAAAAAAAEAAACZloMKAAAAACgAAAAoAAAAZAAAAGQAAAAAAAAAzMzMAAAAAABQAAAAUAAAAGQAAABkAAAAAAAAABcAAAAUAAAAAAAAAAAAAAD/fwAA/38AAAAAAAAJAAAABAAAAFRhcmceAAAAaAAAAAAAAAAAAAAAAAAAAAAAAAAAAAAAECcAABAnAAAAAAAAAAAAAAAAAAAAAAAAAAAAAAAAAAAAAAAAAAAAABQAAAAAAAAAwMD/AAAAAABkAAAAMgAAAAAAAABkAAAAAAAAAH9/fwAKAAAAIgAAABgAAAAAAAAAAAAAAAAAAAAAAAAAAAAAAAAAAAAkAAAAJAAAAAAAAAAHAAAAAAAAAAAAAAAAAAAAAAAAAAAAAAAAAAAAf39/ACUAAABYAAAAAAAAAAAAAAAAAAAAAAAAAAAAAAAAAAAAAAAAAAAAAAAAAAAAAAAAAAAAAAA/AAAAAAAAAKCGAQAAAAAAAAAAAAAAAAAMAAAAAQAAAAAAAAAAAAAAAAAAAB8AAABUAAAAAAAABQAAAAEAAAAAAAAAAAAAAAAAAAAAAAAAAAAAAAAAAAAAAAAAAAAAAAV/f38AAAAAA8zMzADAwP8Af39/AAAAAAAAAAAAAAAAAAAAAAAAAAAAIQAAABgAAAAUAAAARAEAAAASAABkCwAA2xMAABAAAAAmAAAACAAAAIGgAAD/HwAA"/>
               </a:ext>
             </a:extLst>
           </p:cNvSpPr>
@@ -4004,7 +4004,7 @@
             <a:spLocks noGrp="1" noChangeArrowheads="1"/>
             <a:extLst>
               <a:ext uri="smNativeData">
-                <pr:smNativeData xmlns:pr="smNativeData" xmlns="smNativeData" val="SMDATA_15_mcIdaRMAAAAlAAAAZAAAAA0AAAAAAAAAAAAAAAAAAAAAAAAAAAAAAAAAAAAAAAAAAAEAAABQAAAAAAAAAAAA4D8AAAAAAADgPwAAAAAAAOA/AAAAAAAA4D8AAAAAAADgPwAAAAAAAOA/AAAAAAAA4D8AAAAAAADgPwAAAAAAAOA/AAAAAAAA4D8CAAAAjAAAAAAAAAAAAAAA40oGDP///wgAAAAAAAAAAAAAAAAAAAAAAAAAAAAAAAAAAAAAZAAAAAEAAABAAAAAAAAAAAAAAAAAAAAAAAAAAAAAAAAAAAAAAAAAAAAAAAAAAAAAAAAAAAAAAAAAAAAAAAAAAAAAAAAAAAAAAAAAAAAAAAAAAAAAAAAAAAAAAAAAAAAAFAAAADwAAAAAAAAAAAAAAAAAAAkUAAAAAQAAABQAAAAUAAAAFAAAAAEAAAAAAAAAZAAAAGQAAAAAAAAAZAAAAGQAAAAVAAAAYAAAAAAAAAAAAAAADwAAACADAAAAAAAAAAAAAAEAAACgMgAAVgcAAKr4//8BAAAAf39/AAEAAABkAAAAAAAAABQAAABAHwAAAAAAACYAAAAAAAAAwOD//wAAAAAmAAAAZAAAABYAAABMAAAAAAAAAAAAAAAEAAAAAAAAAAEAAACZloMKAAAAACgAAAAoAAAAZAAAAGQAAAAAAAAAzMzMAAAAAABQAAAAUAAAAGQAAABkAAAAAAAAABcAAAAUAAAAAAAAAAAAAAD/fwAA/38AAAAAAAAJAAAABAAAAAAAAAAeAAAAaAAAAAAAAAAAAAAAAAAAAAAAAAAAAAAAECcAABAnAAAAAAAAAAAAAAAAAAAAAAAAAAAAAAAAAAAAAAAAAAAAABQAAAAAAAAAwMD/AAAAAABkAAAAMgAAAAAAAABkAAAAAAAAAH9/fwAKAAAAIgAAABgAAAAAAAAAAAAAAAAAAAAAAAAAAAAAAAAAAAAkAAAAJAAAAAAAAAAHAAAAAAAAAAAAAAAAAAAAAAAAAAAAAAAAAAAAf39/ACUAAABYAAAAAAAAAAAAAAAAAAAAAAAAAAAAAAAAAAAAAAAAAAAAAAAAAAAAAAAAAAAAAAA/AAAAAAAAAKCGAQAAAAAAAAAAAAAAAAAMAAAAAQAAAAAAAAAAAAAAAAAAAB8AAABUAAAAAAAABQAAAAEAAAAAAAAAAAAAAAAAAAAAAAAAAAAAAAAAAAAAAAAAAAAAAAJ/f38AAAAAA8zMzADAwP8Af39/AAAAAAAAAAAAAAAAAAAAAAAAAAAAIQAAABgAAAAUAAAARAEAAEAUAABkCwAAlScAABAAAAAmAAAACAAAAAGgAAAAAAAA"/>
+                <pr:smNativeData xmlns:pr="smNativeData" xmlns="smNativeData" val="SMDATA_15_r8odaRMAAAAlAAAAZAAAAA0AAAAAAAAAAAAAAAAAAAAAAAAAAAAAAAAAAAAAAAAAAAEAAABQAAAAAAAAAAAA4D8AAAAAAADgPwAAAAAAAOA/AAAAAAAA4D8AAAAAAADgPwAAAAAAAOA/AAAAAAAA4D8AAAAAAADgPwAAAAAAAOA/AAAAAAAA4D8CAAAAjAAAAAAAAAAAAAAA40oGDP///wgAAAAAAAAAAAAAAAAAAAAAAAAAAAAAAAAAAAAAZAAAAAEAAABAAAAAAAAAAAAAAAAAAAAAAAAAAAAAAAAAAAAAAAAAAAAAAAAAAAAAAAAAAAAAAAAAAAAAAAAAAAAAAAAAAAAAAAAAAAAAAAAAAAAAAAAAAAAAAAAAAAAAFAAAADwAAAAAAAAAAAAAAAAAAAkUAAAAAQAAABQAAAAUAAAAFAAAAAEAAAAAAAAAZAAAAGQAAAAAAAAAZAAAAGQAAAAVAAAAYAAAAAAAAAAAAAAADwAAACADAAAAAAAAAAAAAAEAAACgMgAAVgcAAKr4//8BAAAAf39/AAEAAABkAAAAAAAAABQAAABAHwAAAAAAACYAAAAAAAAAwOD//wAAAAAmAAAAZAAAABYAAABMAAAAAAAAAAAAAAAEAAAAAAAAAAEAAACZloMKAAAAACgAAAAoAAAAZAAAAGQAAAAAAAAAzMzMAAAAAABQAAAAUAAAAGQAAABkAAAAAAAAABcAAAAUAAAAAAAAAAAAAAD/fwAA/38AAAAAAAAJAAAABAAAAAAAAAAeAAAAaAAAAAAAAAAAAAAAAAAAAAAAAAAAAAAAECcAABAnAAAAAAAAAAAAAAAAAAAAAAAAAAAAAAAAAAAAAAAAAAAAABQAAAAAAAAAwMD/AAAAAABkAAAAMgAAAAAAAABkAAAAAAAAAH9/fwAKAAAAIgAAABgAAAAAAAAAAAAAAAAAAAAAAAAAAAAAAAAAAAAkAAAAJAAAAAAAAAAHAAAAAAAAAAAAAAAAAAAAAAAAAAAAAAAAAAAAf39/ACUAAABYAAAAAAAAAAAAAAAAAAAAAAAAAAAAAAAAAAAAAAAAAAAAAAAAAAAAAAAAAAAAAAA/AAAAAAAAAKCGAQAAAAAAAAAAAAAAAAAMAAAAAQAAAAAAAAAAAAAAAAAAAB8AAABUAAAAAAAABQAAAAEAAAAAAAAAAAAAAAAAAAAAAAAAAAAAAAAAAAAAAAAAAAAAAAJ/f38AAAAAA8zMzADAwP8Af39/AAAAAAAAAAAAAAAAAAAAAAAAAAAAIQAAABgAAAAUAAAARAEAAEAUAABkCwAAlScAABAAAAAmAAAACAAAAAGgAAAAAAAA"/>
               </a:ext>
             </a:extLst>
           </p:cNvSpPr>
@@ -4080,7 +4080,7 @@
             <a:spLocks noGrp="1" noChangeArrowheads="1"/>
             <a:extLst>
               <a:ext uri="smNativeData">
-                <pr:smNativeData xmlns:pr="smNativeData" xmlns="smNativeData" val="SMDATA_15_mcIdaRMAAAAlAAAAZAAAAA0AAAAAAAAAAAAAAAAAAAAAAAAAAAAAAAAAAAAAAAAAAAEAAABQAAAAAAAAAAAA4D8AAAAAAADgPwAAAAAAAOA/AAAAAAAA4D8AAAAAAADgPwAAAAAAAOA/AAAAAAAA4D8AAAAAAADgPwAAAAAAAOA/AAAAAAAA4D8CAAAAjAAAAAAAAAAAAAAA40oGDP///wgAAAAAAAAAAAAAAAAAAAAAAAAAAAAAAAAAAAAAZAAAAAEAAABAAAAAAAAAAAAAAAAAAAAAAAAAAAAAAAAAAAAAAAAAAAAAAAAAAAAAAAAAAAAAAAAAAAAAAAAAAAAAAAAAAAAAAAAAAAAAAAAAAAAAAAAAAAAAAAAAAAAAFAAAADwAAAAAAAAAAAAAAAAAAAkUAAAAAQAAABQAAAAUAAAAFAAAAAEAAAAAAAAAZAAAAGQAAAAAAAAAZAAAAGQAAAAVAAAAYAAAAAAAAAAAAAAADwAAACADAAAAAAAAAAAAAAEAAACgMgAAVgcAAKr4//8BAAAAf39/AAEAAABkAAAAAAAAABQAAABAHwAAAAAAACYAAAAAAAAAwOD//wAAAAAmAAAAZAAAABYAAABMAAAAAAAAAAAAAAAEAAAAAAAAAAEAAACZloMKAAAAACgAAAAoAAAAZAAAAGQAAAAAAAAAzMzMAAAAAABQAAAAUAAAAGQAAABkAAAAAAAAABcAAAAUAAAAAAAAAAAAAAD/fwAA/38AAAAAAAAJAAAABAAAAAAAAAAeAAAAaAAAAAAAAAAAAAAAAAAAAAAAAAAAAAAAECcAABAnAAAAAAAAAAAAAAAAAAAAAAAAAAAAAAAAAAAAAAAAAAAAABQAAAAAAAAAwMD/AAAAAABkAAAAMgAAAAAAAABkAAAAAAAAAH9/fwAKAAAAIgAAABgAAAAAAAAAAAAAAAAAAAAAAAAAAAAAAAAAAAAkAAAAJAAAAAAAAAAHAAAAAAAAAAAAAAAAAAAAAAAAAAAAAAAAAAAAf39/ACUAAABYAAAAAAAAAAAAAAAAAAAAAAAAAAAAAAAAAAAAAAAAAAAAAAAAAAAAAAAAAAAAAAA/AAAAAAAAAKCGAQAAAAAAAAAAAAAAAAAMAAAAAQAAAAAAAAAAAAAAAAAAAB8AAABUAAAAAAAABQAAAAEAAAAAAAAAAAAAAAAAAAAAAAAAAAAAAAAAAAAAAAAAAAAAAAJ/f38AAAAAA8zMzADAwP8Af39/AAAAAAAAAAAAAAAAAAAAAAAAAAAAIQAAABgAAAAUAAAAKw0AAGgGAACbFQAAqBEAABAAAAAmAAAACAAAAAGAAAAAAAAA"/>
+                <pr:smNativeData xmlns:pr="smNativeData" xmlns="smNativeData" val="SMDATA_15_r8odaRMAAAAlAAAAZAAAAA0AAAAAAAAAAAAAAAAAAAAAAAAAAAAAAAAAAAAAAAAAAAEAAABQAAAAAAAAAAAA4D8AAAAAAADgPwAAAAAAAOA/AAAAAAAA4D8AAAAAAADgPwAAAAAAAOA/AAAAAAAA4D8AAAAAAADgPwAAAAAAAOA/AAAAAAAA4D8CAAAAjAAAAAAAAAAAAAAA40oGDP///wgAAAAAAAAAAAAAAAAAAAAAAAAAAAAAAAAAAAAAZAAAAAEAAABAAAAAAAAAAAAAAAAAAAAAAAAAAAAAAAAAAAAAAAAAAAAAAAAAAAAAAAAAAAAAAAAAAAAAAAAAAAAAAAAAAAAAAAAAAAAAAAAAAAAAAAAAAAAAAAAAAAAAFAAAADwAAAAAAAAAAAAAAAAAAAkUAAAAAQAAABQAAAAUAAAAFAAAAAEAAAAAAAAAZAAAAGQAAAAAAAAAZAAAAGQAAAAVAAAAYAAAAAAAAAAAAAAADwAAACADAAAAAAAAAAAAAAEAAACgMgAAVgcAAKr4//8BAAAAf39/AAEAAABkAAAAAAAAABQAAABAHwAAAAAAACYAAAAAAAAAwOD//wAAAAAmAAAAZAAAABYAAABMAAAAAAAAAAAAAAAEAAAAAAAAAAEAAACZloMKAAAAACgAAAAoAAAAZAAAAGQAAAAAAAAAzMzMAAAAAABQAAAAUAAAAGQAAABkAAAAAAAAABcAAAAUAAAAAAAAAAAAAAD/fwAA/38AAAAAAAAJAAAABAAAAAAAAAAeAAAAaAAAAAAAAAAAAAAAAAAAAAAAAAAAAAAAECcAABAnAAAAAAAAAAAAAAAAAAAAAAAAAAAAAAAAAAAAAAAAAAAAABQAAAAAAAAAwMD/AAAAAABkAAAAMgAAAAAAAABkAAAAAAAAAH9/fwAKAAAAIgAAABgAAAAAAAAAAAAAAAAAAAAAAAAAAAAAAAAAAAAkAAAAJAAAAAAAAAAHAAAAAAAAAAAAAAAAAAAAAAAAAAAAAAAAAAAAf39/ACUAAABYAAAAAAAAAAAAAAAAAAAAAAAAAAAAAAAAAAAAAAAAAAAAAAAAAAAAAAAAAAAAAAA/AAAAAAAAAKCGAQAAAAAAAAAAAAAAAAAMAAAAAQAAAAAAAAAAAAAAAAAAAB8AAABUAAAAAAAABQAAAAEAAAAAAAAAAAAAAAAAAAAAAAAAAAAAAAAAAAAAAAAAAAAAAAJ/f38AAAAAA8zMzADAwP8Af39/AAAAAAAAAAAAAAAAAAAAAAAAAAAAIQAAABgAAAAUAAAAKw0AAGgGAACbFQAAqBEAABAAAAAmAAAACAAAAAGAAAAAAAAA"/>
               </a:ext>
             </a:extLst>
           </p:cNvSpPr>
@@ -4149,7 +4149,7 @@
             <a:spLocks noGrp="1" noChangeArrowheads="1"/>
             <a:extLst>
               <a:ext uri="smNativeData">
-                <pr:smNativeData xmlns:pr="smNativeData" xmlns="smNativeData" val="SMDATA_15_mcIdaRMAAAAlAAAAZAAAAA0AAAAAAAAAAAAAAAAAAAAAAAAAAAAAAAABAAAAAAAAAAEAAABQAAAAAAAAAAAA4D8AAAAAAADgPwAAAAAAAOA/AAAAAAAA4D8AAAAAAADgPwAAAAAAAOA/AAAAAAAA4D8AAAAAAADgPwAAAAAAAOA/AAAAAAAA4D8CAAAAjAAAAAEAAAAAAAAA40oGDP///wgAAAAAAAAAAAAAAAAAAAAAAAAAAAAAAAAAAAAAeAAAAAEAAABAAAAAAAAAAAAAAABaAAAAAAAAAAAAAAAAAAAAAAAAAAAAAAAAAAAAAAAAAAAAAAAAAAAAAAAAAAAAAAAAAAAAAAAAAAAAAAAAAAAAAAAAAAAAAAAAAAAAFAAAADwAAAABAAAAAAAAAONKBgwPAAAAAQAAACMAAAAjAAAAIwAAAB4AAAAAAAAAZAAAAGQAAAAAAAAAZAAAAGQAAAAVAAAAYAAAAAAAAAAAAAAADwAAACADAAAAAAAAAAAAAAEAAACgMgAAVgcAAKr4//8BAAAAf39/AAEAAABkAAAAAAAAABQAAABAHwAAAAAAACYAAAAAAAAAwOD//wAAAAAmAAAAZAAAABYAAABMAAAAAAAAAAAAAAAEAAAAAAAAAAEAAACZloMKAAAAACgAAAAoAAAAZAAAAGQAAAAAAAAAzMzMAAAAAABQAAAAUAAAAGQAAABkAAAAAAAAABcAAAAUAAAAAAAAAAAAAAD/fwAA/38AAAAAAAAJAAAABAAAAAAAAAAeAAAAaAAAAAAAAAAAAAAAAAAAAAAAAAAAAAAAECcAABAnAAAAAAAAAAAAAAAAAAAAAAAAAAAAAAAAAAAAAAAAAAAAABQAAAAAAAAAwMD/AAAAAABkAAAAMgAAAAAAAABkAAAAAAAAAH9/fwAKAAAAIgAAABgAAAAAAAAAAAAAAAAAAAAAAAAAAAAAAAAAAAAkAAAAJAAAAAAAAAAHAAAAAAAAAAAAAAAAAAAAAAAAAAAAAAAAAAAAf39/ACUAAABYAAAAAAAAAAAAAAAAAAAAAAAAAAAAAAAAAAAAAAAAAAAAAAAAAAAAAAAAAAAAAAA/AAAAAAAAAKCGAQAAAAAAAAAAAAAAAAAMAAAAAQAAAAAAAAAAAAAAAAAAAB8AAABUAAAAAAAABQAAAAEAAAAAAAAAAAAAAAAAAAAAAAAAAAAAAAAAAAAAAAAAAAAAAAV/f38AAAAAA8zMzADAwP8Af39/AAAAAAAAAAAAAAAAAAAAAAAAAAAAIQAAABgAAAAUAAAAOAwAAAASAABYFgAA2xMAABAAAAAmAAAACAAAAIGgAAD/HwAA"/>
+                <pr:smNativeData xmlns:pr="smNativeData" xmlns="smNativeData" val="SMDATA_15_r8odaRMAAAAlAAAAZAAAAA0AAAAAAAAAAAAAAAAAAAAAAAAAAAAAAAABAAAAAAAAAAEAAABQAAAAAAAAAAAA4D8AAAAAAADgPwAAAAAAAOA/AAAAAAAA4D8AAAAAAADgPwAAAAAAAOA/AAAAAAAA4D8AAAAAAADgPwAAAAAAAOA/AAAAAAAA4D8CAAAAjAAAAAEAAAAAAAAA40oGDP///wgAAAAAAAAAAAAAAAAAAAAAAAAAAAAAAAAAAAAAeAAAAAEAAABAAAAAAAAAAAAAAABaAAAAAAAAAAAAAAAAAAAAAAAAAAAAAAAAAAAAAAAAAAAAAAAAAAAAAAAAAAAAAAAAAAAAAAAAAAAAAAAAAAAAAAAAAAAAAAAAAAAAFAAAADwAAAABAAAAAAAAAONKBgwPAAAAAQAAACMAAAAjAAAAIwAAAB4AAAAAAAAAZAAAAGQAAAAAAAAAZAAAAGQAAAAVAAAAYAAAAAAAAAAAAAAADwAAACADAAAAAAAAAAAAAAEAAACgMgAAVgcAAKr4//8BAAAAf39/AAEAAABkAAAAAAAAABQAAABAHwAAAAAAACYAAAAAAAAAwOD//wAAAAAmAAAAZAAAABYAAABMAAAAAAAAAAAAAAAEAAAAAAAAAAEAAACZloMKAAAAACgAAAAoAAAAZAAAAGQAAAAAAAAAzMzMAAAAAABQAAAAUAAAAGQAAABkAAAAAAAAABcAAAAUAAAAAAAAAAAAAAD/fwAA/38AAAAAAAAJAAAABAAAAAAAAAAeAAAAaAAAAAAAAAAAAAAAAAAAAAAAAAAAAAAAECcAABAnAAAAAAAAAAAAAAAAAAAAAAAAAAAAAAAAAAAAAAAAAAAAABQAAAAAAAAAwMD/AAAAAABkAAAAMgAAAAAAAABkAAAAAAAAAH9/fwAKAAAAIgAAABgAAAAAAAAAAAAAAAAAAAAAAAAAAAAAAAAAAAAkAAAAJAAAAAAAAAAHAAAAAAAAAAAAAAAAAAAAAAAAAAAAAAAAAAAAf39/ACUAAABYAAAAAAAAAAAAAAAAAAAAAAAAAAAAAAAAAAAAAAAAAAAAAAAAAAAAAAAAAAAAAAA/AAAAAAAAAKCGAQAAAAAAAAAAAAAAAAAMAAAAAQAAAAAAAAAAAAAAAAAAAB8AAABUAAAAAAAABQAAAAEAAAAAAAAAAAAAAAAAAAAAAAAAAAAAAAAAAAAAAAAAAAAAAAV/f38AAAAAA8zMzADAwP8Af39/AAAAAAAAAAAAAAAAAAAAAAAAAAAAIQAAABgAAAAUAAAAOAwAAAASAABYFgAA2xMAABAAAAAmAAAACAAAAIGgAAD/HwAA"/>
               </a:ext>
             </a:extLst>
           </p:cNvSpPr>
@@ -4235,7 +4235,7 @@
             <a:spLocks noGrp="1" noChangeArrowheads="1"/>
             <a:extLst>
               <a:ext uri="smNativeData">
-                <pr:smNativeData xmlns:pr="smNativeData" xmlns="smNativeData" val="SMDATA_15_mcIdaRMAAAAlAAAAZAAAAA0AAAAAAAAAAAAAAAAAAAAAAAAAAAAAAAAAAAAAAAAAAAEAAABQAAAAAAAAAAAA4D8AAAAAAADgPwAAAAAAAOA/AAAAAAAA4D8AAAAAAADgPwAAAAAAAOA/AAAAAAAA4D8AAAAAAADgPwAAAAAAAOA/AAAAAAAA4D8CAAAAjAAAAAAAAAAAAAAA40oGDP///wgAAAAAAAAAAAAAAAAAAAAAAAAAAAAAAAAAAAAAZAAAAAEAAABAAAAAAAAAAAAAAAAAAAAAAAAAAAAAAAAAAAAAAAAAAAAAAAAAAAAAAAAAAAAAAAAAAAAAAAAAAAAAAAAAAAAAAAAAAAAAAAAAAAAAAAAAAAAAAAAAAAAAFAAAADwAAAAAAAAAAAAAAAAAAAkUAAAAAQAAABQAAAAUAAAAFAAAAAEAAAAAAAAAZAAAAGQAAAAAAAAAZAAAAGQAAAAVAAAAYAAAAAAAAAAAAAAADwAAACADAAAAAAAAAAAAAAEAAACgMgAAVgcAAKr4//8BAAAAf39/AAEAAABkAAAAAAAAABQAAABAHwAAAAAAACYAAAAAAAAAwOD//wAAAAAmAAAAZAAAABYAAABMAAAAAAAAAAAAAAAEAAAAAAAAAAEAAACZloMKAAAAACgAAAAoAAAAZAAAAGQAAAAAAAAAzMzMAAAAAABQAAAAUAAAAGQAAABkAAAAAAAAABcAAAAUAAAAAAAAAAAAAAD/fwAA/38AAAAAAAAJAAAABAAAAAAAAAAeAAAAaAAAAAAAAAAAAAAAAAAAAAAAAAAAAAAAECcAABAnAAAAAAAAAAAAAAAAAAAAAAAAAAAAAAAAAAAAAAAAAAAAABQAAAAAAAAAwMD/AAAAAABkAAAAMgAAAAAAAABkAAAAAAAAAH9/fwAKAAAAIgAAABgAAAAAAAAAAAAAAAAAAAAAAAAAAAAAAAAAAAAkAAAAJAAAAAAAAAAHAAAAAAAAAAAAAAAAAAAAAAAAAAAAAAAAAAAAf39/ACUAAABYAAAAAAAAAAAAAAAAAAAAAAAAAAAAAAAAAAAAAAAAAAAAAAAAAAAAAAAAAAAAAAA/AAAAAAAAAKCGAQAAAAAAAAAAAAAAAAAMAAAAAQAAAAAAAAAAAAAAAAAAAB8AAABUAAAAAAAABQAAAAEAAAAAAAAAAAAAAAAAAAAAAAAAAAAAAAAAAAAAAAAAAAAAAAJ/f38AAAAAA8zMzADAwP8Af39/AAAAAAAAAAAAAAAAAAAAAAAAAAAAIQAAABgAAAAUAAAAOAwAAEAUAABYFgAAlScAABAAAAAmAAAACAAAAAGgAAAAAAAA"/>
+                <pr:smNativeData xmlns:pr="smNativeData" xmlns="smNativeData" val="SMDATA_15_r8odaRMAAAAlAAAAZAAAAA0AAAAAAAAAAAAAAAAAAAAAAAAAAAAAAAAAAAAAAAAAAAEAAABQAAAAAAAAAAAA4D8AAAAAAADgPwAAAAAAAOA/AAAAAAAA4D8AAAAAAADgPwAAAAAAAOA/AAAAAAAA4D8AAAAAAADgPwAAAAAAAOA/AAAAAAAA4D8CAAAAjAAAAAAAAAAAAAAA40oGDP///wgAAAAAAAAAAAAAAAAAAAAAAAAAAAAAAAAAAAAAZAAAAAEAAABAAAAAAAAAAAAAAAAAAAAAAAAAAAAAAAAAAAAAAAAAAAAAAAAAAAAAAAAAAAAAAAAAAAAAAAAAAAAAAAAAAAAAAAAAAAAAAAAAAAAAAAAAAAAAAAAAAAAAFAAAADwAAAAAAAAAAAAAAAAAAAkUAAAAAQAAABQAAAAUAAAAFAAAAAEAAAAAAAAAZAAAAGQAAAAAAAAAZAAAAGQAAAAVAAAAYAAAAAAAAAAAAAAADwAAACADAAAAAAAAAAAAAAEAAACgMgAAVgcAAKr4//8BAAAAf39/AAEAAABkAAAAAAAAABQAAABAHwAAAAAAACYAAAAAAAAAwOD//wAAAAAmAAAAZAAAABYAAABMAAAAAAAAAAAAAAAEAAAAAAAAAAEAAACZloMKAAAAACgAAAAoAAAAZAAAAGQAAAAAAAAAzMzMAAAAAABQAAAAUAAAAGQAAABkAAAAAAAAABcAAAAUAAAAAAAAAAAAAAD/fwAA/38AAAAAAAAJAAAABAAAAAAAAAAeAAAAaAAAAAAAAAAAAAAAAAAAAAAAAAAAAAAAECcAABAnAAAAAAAAAAAAAAAAAAAAAAAAAAAAAAAAAAAAAAAAAAAAABQAAAAAAAAAwMD/AAAAAABkAAAAMgAAAAAAAABkAAAAAAAAAH9/fwAKAAAAIgAAABgAAAAAAAAAAAAAAAAAAAAAAAAAAAAAAAAAAAAkAAAAJAAAAAAAAAAHAAAAAAAAAAAAAAAAAAAAAAAAAAAAAAAAAAAAf39/ACUAAABYAAAAAAAAAAAAAAAAAAAAAAAAAAAAAAAAAAAAAAAAAAAAAAAAAAAAAAAAAAAAAAA/AAAAAAAAAKCGAQAAAAAAAAAAAAAAAAAMAAAAAQAAAAAAAAAAAAAAAAAAAB8AAABUAAAAAAAABQAAAAEAAAAAAAAAAAAAAAAAAAAAAAAAAAAAAAAAAAAAAAAAAAAAAAJ/f38AAAAAA8zMzADAwP8Af39/AAAAAAAAAAAAAAAAAAAAAAAAAAAAIQAAABgAAAAUAAAAOAwAAEAUAABYFgAAlScAABAAAAAmAAAACAAAAAGgAAAAAAAA"/>
               </a:ext>
             </a:extLst>
           </p:cNvSpPr>
@@ -4311,7 +4311,7 @@
             <a:spLocks noGrp="1" noChangeArrowheads="1"/>
             <a:extLst>
               <a:ext uri="smNativeData">
-                <pr:smNativeData xmlns:pr="smNativeData" xmlns="smNativeData" val="SMDATA_15_mcIdaRMAAAAlAAAAZAAAAA0AAAAAAAAAAAAAAAAAAAAAAAAAAAAAAAAAAAAAAAAAAAEAAABQAAAAAAAAAAAA4D8AAAAAAADgPwAAAAAAAOA/AAAAAAAA4D8AAAAAAADgPwAAAAAAAOA/AAAAAAAA4D8AAAAAAADgPwAAAAAAAOA/AAAAAAAA4D8CAAAAjAAAAAAAAAAAAAAA40oGDP///wgAAAAAAAAAAAAAAAAAAAAAAAAAAAAAAAAAAAAAZAAAAAEAAABAAAAAAAAAAAAAAAAAAAAAAAAAAAAAAAAAAAAAAAAAAAAAAAAAAAAAAAAAAAAAAAAAAAAAAAAAAAAAAAAAAAAAAAAAAAAAAAAAAAAAAAAAAAAAAAAAAAAAFAAAADwAAAAAAAAAAAAAAAAAAAkUAAAAAQAAABQAAAAUAAAAFAAAAAEAAAAAAAAAZAAAAGQAAAAAAAAAZAAAAGQAAAAVAAAAYAAAAAAAAAAAAAAADwAAACADAAAAAAAAAAAAAAEAAACgMgAAVgcAAKr4//8BAAAAf39/AAEAAABkAAAAAAAAABQAAABAHwAAAAAAACYAAAAAAAAAwOD//wAAAAAmAAAAZAAAABYAAABMAAAAAAAAAAAAAAAEAAAAAAAAAAEAAACZloMKAAAAACgAAAAoAAAAZAAAAGQAAAAAAAAAzMzMAAAAAABQAAAAUAAAAGQAAABkAAAAAAAAABcAAAAUAAAAAAAAAAAAAAD/fwAA/38AAAAAAAAJAAAABAAAAAAAAAAeAAAAaAAAAAAAAAAAAAAAAAAAAAAAAAAAAAAAECcAABAnAAAAAAAAAAAAAAAAAAAAAAAAAAAAAAAAAAAAAAAAAAAAABQAAAAAAAAAwMD/AAAAAABkAAAAMgAAAAAAAABkAAAAAAAAAH9/fwAKAAAAIgAAABgAAAAAAAAAAAAAAAAAAAAAAAAAAAAAAAAAAAAkAAAAJAAAAAAAAAAHAAAAAAAAAAAAAAAAAAAAAAAAAAAAAAAAAAAAf39/ACUAAABYAAAAAAAAAAAAAAAAAAAAAAAAAAAAAAAAAAAAAAAAAAAAAAAAAAAAAAAAAAAAAAA/AAAAAAAAAKCGAQAAAAAAAAAAAAAAAAAMAAAAAQAAAAAAAAAAAAAAAAAAAB8AAABUAAAAAAAABQAAAAEAAAAAAAAAAAAAAAAAAAAAAAAAAAAAAAAAAAAAAAAAAAAAAAJ/f38AAAAAA8zMzADAwP8Af39/AAAAAAAAAAAAAAAAAAAAAAAAAAAAIQAAABgAAAAUAAAA6BcAAGgGAABYIAAAqBEAABAAAAAmAAAACAAAAAGAAAAAAAAA"/>
+                <pr:smNativeData xmlns:pr="smNativeData" xmlns="smNativeData" val="SMDATA_15_r8odaRMAAAAlAAAAZAAAAA0AAAAAAAAAAAAAAAAAAAAAAAAAAAAAAAAAAAAAAAAAAAEAAABQAAAAAAAAAAAA4D8AAAAAAADgPwAAAAAAAOA/AAAAAAAA4D8AAAAAAADgPwAAAAAAAOA/AAAAAAAA4D8AAAAAAADgPwAAAAAAAOA/AAAAAAAA4D8CAAAAjAAAAAAAAAAAAAAA40oGDP///wgAAAAAAAAAAAAAAAAAAAAAAAAAAAAAAAAAAAAAZAAAAAEAAABAAAAAAAAAAAAAAAAAAAAAAAAAAAAAAAAAAAAAAAAAAAAAAAAAAAAAAAAAAAAAAAAAAAAAAAAAAAAAAAAAAAAAAAAAAAAAAAAAAAAAAAAAAAAAAAAAAAAAFAAAADwAAAAAAAAAAAAAAAAAAAkUAAAAAQAAABQAAAAUAAAAFAAAAAEAAAAAAAAAZAAAAGQAAAAAAAAAZAAAAGQAAAAVAAAAYAAAAAAAAAAAAAAADwAAACADAAAAAAAAAAAAAAEAAACgMgAAVgcAAKr4//8BAAAAf39/AAEAAABkAAAAAAAAABQAAABAHwAAAAAAACYAAAAAAAAAwOD//wAAAAAmAAAAZAAAABYAAABMAAAAAAAAAAAAAAAEAAAAAAAAAAEAAACZloMKAAAAACgAAAAoAAAAZAAAAGQAAAAAAAAAzMzMAAAAAABQAAAAUAAAAGQAAABkAAAAAAAAABcAAAAUAAAAAAAAAAAAAAD/fwAA/38AAAAAAAAJAAAABAAAAAAAAAAeAAAAaAAAAAAAAAAAAAAAAAAAAAAAAAAAAAAAECcAABAnAAAAAAAAAAAAAAAAAAAAAAAAAAAAAAAAAAAAAAAAAAAAABQAAAAAAAAAwMD/AAAAAABkAAAAMgAAAAAAAABkAAAAAAAAAH9/fwAKAAAAIgAAABgAAAAAAAAAAAAAAAAAAAAAAAAAAAAAAAAAAAAkAAAAJAAAAAAAAAAHAAAAAAAAAAAAAAAAAAAAAAAAAAAAAAAAAAAAf39/ACUAAABYAAAAAAAAAAAAAAAAAAAAAAAAAAAAAAAAAAAAAAAAAAAAAAAAAAAAAAAAAAAAAAA/AAAAAAAAAKCGAQAAAAAAAAAAAAAAAAAMAAAAAQAAAAAAAAAAAAAAAAAAAB8AAABUAAAAAAAABQAAAAEAAAAAAAAAAAAAAAAAAAAAAAAAAAAAAAAAAAAAAAAAAAAAAAJ/f38AAAAAA8zMzADAwP8Af39/AAAAAAAAAAAAAAAAAAAAAAAAAAAAIQAAABgAAAAUAAAA6BcAAGgGAABYIAAAqBEAABAAAAAmAAAACAAAAAGAAAAAAAAA"/>
               </a:ext>
             </a:extLst>
           </p:cNvSpPr>
@@ -4380,7 +4380,7 @@
             <a:spLocks noGrp="1" noChangeArrowheads="1"/>
             <a:extLst>
               <a:ext uri="smNativeData">
-                <pr:smNativeData xmlns:pr="smNativeData" xmlns="smNativeData" val="SMDATA_15_mcIdaRMAAAAlAAAAZAAAAA0AAAAAAAAAAAAAAAAAAAAAAAAAAAAAAAABAAAAAAAAAAEAAABQAAAAAAAAAAAA4D8AAAAAAADgPwAAAAAAAOA/AAAAAAAA4D8AAAAAAADgPwAAAAAAAOA/AAAAAAAA4D8AAAAAAADgPwAAAAAAAOA/AAAAAAAA4D8CAAAAjAAAAAEAAAAAAAAA40oGDP///wgAAAAAAAAAAAAAAAAAAAAAAAAAAAAAAAAAAAAAeAAAAAEAAABAAAAAAAAAAAAAAABaAAAAAAAAAAAAAAAAAAAAAAAAAAAAAAAAAAAAAAAAAAAAAAAAAAAAAAAAAAAAAAAAAAAAAAAAAAAAAAAAAAAAAAAAAAAAAAAAAAAAFAAAADwAAAABAAAAAAAAAONKBgwPAAAAAQAAACMAAAAjAAAAIwAAAB4AAAAAAAAAZAAAAGQAAAAAAAAAZAAAAGQAAAAVAAAAYAAAAAAAAAAAAAAADwAAACADAAAAAAAAAAAAAAEAAACgMgAAVgcAAKr4//8BAAAAf39/AAEAAABkAAAAAAAAABQAAABAHwAAAAAAACYAAAAAAAAAwOD//wAAAAAmAAAAZAAAABYAAABMAAAAAAAAAAAAAAAEAAAAAAAAAAEAAACZloMKAAAAACgAAAAoAAAAZAAAAGQAAAAAAAAAzMzMAAAAAABQAAAAUAAAAGQAAABkAAAAAAAAABcAAAAUAAAAAAAAAAAAAAD/fwAA/38AAAAAAAAJAAAABAAAAAAAAAAeAAAAaAAAAAAAAAAAAAAAAAAAAAAAAAAAAAAAECcAABAnAAAAAAAAAAAAAAAAAAAAAAAAAAAAAAAAAAAAAAAAAAAAABQAAAAAAAAAwMD/AAAAAABkAAAAMgAAAAAAAABkAAAAAAAAAH9/fwAKAAAAIgAAABgAAAAAAAAAAAAAAAAAAAAAAAAAAAAAAAAAAAAkAAAAJAAAAAAAAAAHAAAAAAAAAAAAAAAAAAAAAAAAAAAAAAAAAAAAf39/ACUAAABYAAAAAAAAAAAAAAAAAAAAAAAAAAAAAAAAAAAAAAAAAAAAAAAAAAAAAAAAAAAAAAA/AAAAAAAAAKCGAQAAAAAAAAAAAAAAAAAMAAAAAQAAAAAAAAAAAAAAAAAAAB8AAABUAAAAAAAABQAAAAEAAAAAAAAAAAAAAAAAAAAAAAAAAAAAAAAAAAAAAAAAAAAAAAV/f38AAAAAA8zMzADAwP8Af39/AAAAAAAAAAAAAAAAAAAAAAAAAAAAIQAAABgAAAAUAAAAKxcAAAASAABLIQAA2xMAABAAAAAmAAAACAAAAIGgAAD/HwAA"/>
+                <pr:smNativeData xmlns:pr="smNativeData" xmlns="smNativeData" val="SMDATA_15_r8odaRMAAAAlAAAAZAAAAA0AAAAAAAAAAAAAAAAAAAAAAAAAAAAAAAABAAAAAAAAAAEAAABQAAAAAAAAAAAA4D8AAAAAAADgPwAAAAAAAOA/AAAAAAAA4D8AAAAAAADgPwAAAAAAAOA/AAAAAAAA4D8AAAAAAADgPwAAAAAAAOA/AAAAAAAA4D8CAAAAjAAAAAEAAAAAAAAA40oGDP///wgAAAAAAAAAAAAAAAAAAAAAAAAAAAAAAAAAAAAAeAAAAAEAAABAAAAAAAAAAAAAAABaAAAAAAAAAAAAAAAAAAAAAAAAAAAAAAAAAAAAAAAAAAAAAAAAAAAAAAAAAAAAAAAAAAAAAAAAAAAAAAAAAAAAAAAAAAAAAAAAAAAAFAAAADwAAAABAAAAAAAAAONKBgwPAAAAAQAAACMAAAAjAAAAIwAAAB4AAAAAAAAAZAAAAGQAAAAAAAAAZAAAAGQAAAAVAAAAYAAAAAAAAAAAAAAADwAAACADAAAAAAAAAAAAAAEAAACgMgAAVgcAAKr4//8BAAAAf39/AAEAAABkAAAAAAAAABQAAABAHwAAAAAAACYAAAAAAAAAwOD//wAAAAAmAAAAZAAAABYAAABMAAAAAAAAAAAAAAAEAAAAAAAAAAEAAACZloMKAAAAACgAAAAoAAAAZAAAAGQAAAAAAAAAzMzMAAAAAABQAAAAUAAAAGQAAABkAAAAAAAAABcAAAAUAAAAAAAAAAAAAAD/fwAA/38AAAAAAAAJAAAABAAAAAAAAAAeAAAAaAAAAAAAAAAAAAAAAAAAAAAAAAAAAAAAECcAABAnAAAAAAAAAAAAAAAAAAAAAAAAAAAAAAAAAAAAAAAAAAAAABQAAAAAAAAAwMD/AAAAAABkAAAAMgAAAAAAAABkAAAAAAAAAH9/fwAKAAAAIgAAABgAAAAAAAAAAAAAAAAAAAAAAAAAAAAAAAAAAAAkAAAAJAAAAAAAAAAHAAAAAAAAAAAAAAAAAAAAAAAAAAAAAAAAAAAAf39/ACUAAABYAAAAAAAAAAAAAAAAAAAAAAAAAAAAAAAAAAAAAAAAAAAAAAAAAAAAAAAAAAAAAAA/AAAAAAAAAKCGAQAAAAAAAAAAAAAAAAAMAAAAAQAAAAAAAAAAAAAAAAAAAB8AAABUAAAAAAAABQAAAAEAAAAAAAAAAAAAAAAAAAAAAAAAAAAAAAAAAAAAAAAAAAAAAAV/f38AAAAAA8zMzADAwP8Af39/AAAAAAAAAAAAAAAAAAAAAAAAAAAAIQAAABgAAAAUAAAAKxcAAAASAABLIQAA2xMAABAAAAAmAAAACAAAAIGgAAD/HwAA"/>
               </a:ext>
             </a:extLst>
           </p:cNvSpPr>
@@ -4466,7 +4466,7 @@
             <a:spLocks noGrp="1" noChangeArrowheads="1"/>
             <a:extLst>
               <a:ext uri="smNativeData">
-                <pr:smNativeData xmlns:pr="smNativeData" xmlns="smNativeData" val="SMDATA_15_mcIdaRMAAAAlAAAAZAAAAA0AAAAAAAAAAAAAAAAAAAAAAAAAAAAAAAAAAAAAAAAAAAEAAABQAAAAAAAAAAAA4D8AAAAAAADgPwAAAAAAAOA/AAAAAAAA4D8AAAAAAADgPwAAAAAAAOA/AAAAAAAA4D8AAAAAAADgPwAAAAAAAOA/AAAAAAAA4D8CAAAAjAAAAAAAAAAAAAAA40oGDP///wgAAAAAAAAAAAAAAAAAAAAAAAAAAAAAAAAAAAAAZAAAAAEAAABAAAAAAAAAAAAAAAAAAAAAAAAAAAAAAAAAAAAAAAAAAAAAAAAAAAAAAAAAAAAAAAAAAAAAAAAAAAAAAAAAAAAAAAAAAAAAAAAAAAAAAAAAAAAAAAAAAAAAFAAAADwAAAAAAAAAAAAAAAAAAAkUAAAAAQAAABQAAAAUAAAAFAAAAAEAAAAAAAAAZAAAAGQAAAAAAAAAZAAAAGQAAAAVAAAAYAAAAAAAAAAAAAAADwAAACADAAAAAAAAAAAAAAEAAACgMgAAVgcAAKr4//8BAAAAf39/AAEAAABkAAAAAAAAABQAAABAHwAAAAAAACYAAAAAAAAAwOD//wAAAAAmAAAAZAAAABYAAABMAAAAAAAAAAAAAAAEAAAAAAAAAAEAAACZloMKAAAAACgAAAAoAAAAZAAAAGQAAAAAAAAAzMzMAAAAAABQAAAAUAAAAGQAAABkAAAAAAAAABcAAAAUAAAAAAAAAAAAAAD/fwAA/38AAAAAAAAJAAAABAAAAAAAAAAeAAAAaAAAAAAAAAAAAAAAAAAAAAAAAAAAAAAAECcAABAnAAAAAAAAAAAAAAAAAAAAAAAAAAAAAAAAAAAAAAAAAAAAABQAAAAAAAAAwMD/AAAAAABkAAAAMgAAAAAAAABkAAAAAAAAAH9/fwAKAAAAIgAAABgAAAAAAAAAAAAAAAAAAAAAAAAAAAAAAAAAAAAkAAAAJAAAAAAAAAAHAAAAAAAAAAAAAAAAAAAAAAAAAAAAAAAAAAAAf39/ACUAAABYAAAAAAAAAAAAAAAAAAAAAAAAAAAAAAAAAAAAAAAAAAAAAAAAAAAAAAAAAAAAAAA/AAAAAAAAAKCGAQAAAAAAAAAAAAAAAAAMAAAAAQAAAAAAAAAAAAAAAAAAAB8AAABUAAAAAAAABQAAAAEAAAAAAAAAAAAAAAAAAAAAAAAAAAAAAAAAAAAAAAAAAAAAAAJ/f38AAAAAA8zMzADAwP8Af39/AAAAAAAAAAAAAAAAAAAAAAAAAAAAIQAAABgAAAAUAAAAKxcAAEAUAABLIQAAlScAABAAAAAmAAAACAAAAAGgAAAAAAAA"/>
+                <pr:smNativeData xmlns:pr="smNativeData" xmlns="smNativeData" val="SMDATA_15_r8odaRMAAAAlAAAAZAAAAA0AAAAAAAAAAAAAAAAAAAAAAAAAAAAAAAAAAAAAAAAAAAEAAABQAAAAAAAAAAAA4D8AAAAAAADgPwAAAAAAAOA/AAAAAAAA4D8AAAAAAADgPwAAAAAAAOA/AAAAAAAA4D8AAAAAAADgPwAAAAAAAOA/AAAAAAAA4D8CAAAAjAAAAAAAAAAAAAAA40oGDP///wgAAAAAAAAAAAAAAAAAAAAAAAAAAAAAAAAAAAAAZAAAAAEAAABAAAAAAAAAAAAAAAAAAAAAAAAAAAAAAAAAAAAAAAAAAAAAAAAAAAAAAAAAAAAAAAAAAAAAAAAAAAAAAAAAAAAAAAAAAAAAAAAAAAAAAAAAAAAAAAAAAAAAFAAAADwAAAAAAAAAAAAAAAAAAAkUAAAAAQAAABQAAAAUAAAAFAAAAAEAAAAAAAAAZAAAAGQAAAAAAAAAZAAAAGQAAAAVAAAAYAAAAAAAAAAAAAAADwAAACADAAAAAAAAAAAAAAEAAACgMgAAVgcAAKr4//8BAAAAf39/AAEAAABkAAAAAAAAABQAAABAHwAAAAAAACYAAAAAAAAAwOD//wAAAAAmAAAAZAAAABYAAABMAAAAAAAAAAAAAAAEAAAAAAAAAAEAAACZloMKAAAAACgAAAAoAAAAZAAAAGQAAAAAAAAAzMzMAAAAAABQAAAAUAAAAGQAAABkAAAAAAAAABcAAAAUAAAAAAAAAAAAAAD/fwAA/38AAAAAAAAJAAAABAAAAAAAAAAeAAAAaAAAAAAAAAAAAAAAAAAAAAAAAAAAAAAAECcAABAnAAAAAAAAAAAAAAAAAAAAAAAAAAAAAAAAAAAAAAAAAAAAABQAAAAAAAAAwMD/AAAAAABkAAAAMgAAAAAAAABkAAAAAAAAAH9/fwAKAAAAIgAAABgAAAAAAAAAAAAAAAAAAAAAAAAAAAAAAAAAAAAkAAAAJAAAAAAAAAAHAAAAAAAAAAAAAAAAAAAAAAAAAAAAAAAAAAAAf39/ACUAAABYAAAAAAAAAAAAAAAAAAAAAAAAAAAAAAAAAAAAAAAAAAAAAAAAAAAAAAAAAAAAAAA/AAAAAAAAAKCGAQAAAAAAAAAAAAAAAAAMAAAAAQAAAAAAAAAAAAAAAAAAAB8AAABUAAAAAAAABQAAAAEAAAAAAAAAAAAAAAAAAAAAAAAAAAAAAAAAAAAAAAAAAAAAAAJ/f38AAAAAA8zMzADAwP8Af39/AAAAAAAAAAAAAAAAAAAAAAAAAAAAIQAAABgAAAAUAAAAKxcAAEAUAABLIQAAlScAABAAAAAmAAAACAAAAAGgAAAAAAAA"/>
               </a:ext>
             </a:extLst>
           </p:cNvSpPr>
@@ -4542,7 +4542,7 @@
             <a:spLocks noGrp="1" noChangeArrowheads="1"/>
             <a:extLst>
               <a:ext uri="smNativeData">
-                <pr:smNativeData xmlns:pr="smNativeData" xmlns="smNativeData" val="SMDATA_15_mcIdaRMAAAAlAAAAZAAAAA0AAAAAAAAAAAAAAAAAAAAAAAAAAAAAAAAAAAAAAAAAAAEAAABQAAAAAAAAAAAA4D8AAAAAAADgPwAAAAAAAOA/AAAAAAAA4D8AAAAAAADgPwAAAAAAAOA/AAAAAAAA4D8AAAAAAADgPwAAAAAAAOA/AAAAAAAA4D8CAAAAjAAAAAAAAAAAAAAA40oGDP///wgAAAAAAAAAAAAAAAAAAAAAAAAAAAAAAAAAAAAAZAAAAAEAAABAAAAAAAAAAAAAAAAAAAAAAAAAAAAAAAAAAAAAAAAAAAAAAAAAAAAAAAAAAAAAAAAAAAAAAAAAAAAAAAAAAAAAAAAAAAAAAAAAAAAAAAAAAAAAAAAAAAAAFAAAADwAAAAAAAAAAAAAAAAAAAkUAAAAAQAAABQAAAAUAAAAFAAAAAEAAAAAAAAAZAAAAGQAAAAAAAAAZAAAAGQAAAAVAAAAYAAAAAAAAAAAAAAADwAAACADAAAAAAAAAAAAAAEAAACgMgAAVgcAAKr4//8BAAAAf39/AAEAAABkAAAAAAAAABQAAABAHwAAAAAAACYAAAAAAAAAwOD//wAAAAAmAAAAZAAAABYAAABMAAAAAAAAAAAAAAAEAAAAAAAAAAEAAACZloMKAAAAACgAAAAoAAAAZAAAAGQAAAAAAAAAzMzMAAAAAABQAAAAUAAAAGQAAABkAAAAAAAAABcAAAAUAAAAAAAAAAAAAAD/fwAA/38AAAAAAAAJAAAABAAAAAAAAAAeAAAAaAAAAAAAAAAAAAAAAAAAAAAAAAAAAAAAECcAABAnAAAAAAAAAAAAAAAAAAAAAAAAAAAAAAAAAAAAAAAAAAAAABQAAAAAAAAAwMD/AAAAAABkAAAAMgAAAAAAAABkAAAAAAAAAH9/fwAKAAAAIgAAABgAAAAAAAAAAAAAAAAAAAAAAAAAAAAAAAAAAAAkAAAAJAAAAAAAAAAHAAAAAAAAAAAAAAAAAAAAAAAAAAAAAAAAAAAAf39/ACUAAABYAAAAAAAAAAAAAAAAAAAAAAAAAAAAAAAAAAAAAAAAAAAAAAAAAAAAAAAAAAAAAAA/AAAAAAAAAKCGAQAAAAAAAAAAAAAAAAAMAAAAAQAAAAAAAAAAAAAAAAAAAB8AAABUAAAAAAAABQAAAAEAAAAAAAAAAAAAAAAAAAAAAAAAAAAAAAAAAAAAAAAAAAAAAAJ/f38AAAAAA8zMzADAwP8Af39/AAAAAAAAAAAAAAAAAAAAAAAAAAAAIQAAABgAAAAUAAAA9yIAAGgGAABnKwAAqBEAABAAAAAmAAAACAAAAAGAAAAAAAAA"/>
+                <pr:smNativeData xmlns:pr="smNativeData" xmlns="smNativeData" val="SMDATA_15_r8odaRMAAAAlAAAAZAAAAA0AAAAAAAAAAAAAAAAAAAAAAAAAAAAAAAAAAAAAAAAAAAEAAABQAAAAAAAAAAAA4D8AAAAAAADgPwAAAAAAAOA/AAAAAAAA4D8AAAAAAADgPwAAAAAAAOA/AAAAAAAA4D8AAAAAAADgPwAAAAAAAOA/AAAAAAAA4D8CAAAAjAAAAAAAAAAAAAAA40oGDP///wgAAAAAAAAAAAAAAAAAAAAAAAAAAAAAAAAAAAAAZAAAAAEAAABAAAAAAAAAAAAAAAAAAAAAAAAAAAAAAAAAAAAAAAAAAAAAAAAAAAAAAAAAAAAAAAAAAAAAAAAAAAAAAAAAAAAAAAAAAAAAAAAAAAAAAAAAAAAAAAAAAAAAFAAAADwAAAAAAAAAAAAAAAAAAAkUAAAAAQAAABQAAAAUAAAAFAAAAAEAAAAAAAAAZAAAAGQAAAAAAAAAZAAAAGQAAAAVAAAAYAAAAAAAAAAAAAAADwAAACADAAAAAAAAAAAAAAEAAACgMgAAVgcAAKr4//8BAAAAf39/AAEAAABkAAAAAAAAABQAAABAHwAAAAAAACYAAAAAAAAAwOD//wAAAAAmAAAAZAAAABYAAABMAAAAAAAAAAAAAAAEAAAAAAAAAAEAAACZloMKAAAAACgAAAAoAAAAZAAAAGQAAAAAAAAAzMzMAAAAAABQAAAAUAAAAGQAAABkAAAAAAAAABcAAAAUAAAAAAAAAAAAAAD/fwAA/38AAAAAAAAJAAAABAAAAAAAAAAeAAAAaAAAAAAAAAAAAAAAAAAAAAAAAAAAAAAAECcAABAnAAAAAAAAAAAAAAAAAAAAAAAAAAAAAAAAAAAAAAAAAAAAABQAAAAAAAAAwMD/AAAAAABkAAAAMgAAAAAAAABkAAAAAAAAAH9/fwAKAAAAIgAAABgAAAAAAAAAAAAAAAAAAAAAAAAAAAAAAAAAAAAkAAAAJAAAAAAAAAAHAAAAAAAAAAAAAAAAAAAAAAAAAAAAAAAAAAAAf39/ACUAAABYAAAAAAAAAAAAAAAAAAAAAAAAAAAAAAAAAAAAAAAAAAAAAAAAAAAAAAAAAAAAAAA/AAAAAAAAAKCGAQAAAAAAAAAAAAAAAAAMAAAAAQAAAAAAAAAAAAAAAAAAAB8AAABUAAAAAAAABQAAAAEAAAAAAAAAAAAAAAAAAAAAAAAAAAAAAAAAAAAAAAAAAAAAAAJ/f38AAAAAA8zMzADAwP8Af39/AAAAAAAAAAAAAAAAAAAAAAAAAAAAIQAAABgAAAAUAAAA9yIAAGgGAABnKwAAqBEAABAAAAAmAAAACAAAAAGAAAAAAAAA"/>
               </a:ext>
             </a:extLst>
           </p:cNvSpPr>
@@ -4611,7 +4611,7 @@
             <a:spLocks noGrp="1" noChangeArrowheads="1"/>
             <a:extLst>
               <a:ext uri="smNativeData">
-                <pr:smNativeData xmlns:pr="smNativeData" xmlns="smNativeData" val="SMDATA_15_mcIdaRMAAAAlAAAAZAAAAA0AAAAAAAAAAAAAAAAAAAAAAAAAAAAAAAABAAAAAAAAAAEAAABQAAAAAAAAAAAA4D8AAAAAAADgPwAAAAAAAOA/AAAAAAAA4D8AAAAAAADgPwAAAAAAAOA/AAAAAAAA4D8AAAAAAADgPwAAAAAAAOA/AAAAAAAA4D8CAAAAjAAAAAEAAAAAAAAA40oGDP///wgAAAAAAAAAAAAAAAAAAAAAAAAAAAAAAAAAAAAAeAAAAAEAAABAAAAAAAAAAAAAAABaAAAAAAAAAAAAAAAAAAAAAAAAAAAAAAAAAAAAAAAAAAAAAAAAAAAAAAAAAAAAAAAAAAAAAAAAAAAAAAAAAAAAAAAAAAAAAAAAAAAAFAAAADwAAAABAAAAAAAAAONKBgwPAAAAAQAAACMAAAAjAAAAIwAAAB4AAAAAAAAAZAAAAGQAAAAAAAAAZAAAAGQAAAAVAAAAYAAAAAAAAAAAAAAADwAAACADAAAAAAAAAAAAAAEAAACgMgAAVgcAAKr4//8BAAAAf39/AAEAAABkAAAAAAAAABQAAABAHwAAAAAAACYAAAAAAAAAwOD//wAAAAAmAAAAZAAAABYAAABMAAAAAAAAAAAAAAAEAAAAAAAAAAEAAACZloMKAAAAACgAAAAoAAAAZAAAAGQAAAAAAAAAzMzMAAAAAABQAAAAUAAAAGQAAABkAAAAAAAAABcAAAAUAAAAAAAAAAAAAAD/fwAA/38AAAAAAAAJAAAABAAAAAUABQAeAAAAaAAAAAAAAAAAAAAAAAAAAAAAAAAAAAAAECcAABAnAAAAAAAAAAAAAAAAAAAAAAAAAAAAAAAAAAAAAAAAAAAAABQAAAAAAAAAwMD/AAAAAABkAAAAMgAAAAAAAABkAAAAAAAAAH9/fwAKAAAAIgAAABgAAAAAAAAAAAAAAAAAAAAAAAAAAAAAAAAAAAAkAAAAJAAAAAAAAAAHAAAAAAAAAAAAAAAAAAAAAAAAAAAAAAAAAAAAf39/ACUAAABYAAAAAAAAAAAAAAAAAAAAAAAAAAAAAAAAAAAAAAAAAAAAAAAAAAAAAAAAAAAAAAA/AAAAAAAAAKCGAQAAAAAAAAAAAAAAAAAMAAAAAQAAAAAAAAAAAAAAAAAAAB8AAABUAAAAAAAABQAAAAEAAAAAAAAAAAAAAAAAAAAAAAAAAAAAAAAAAAAAAAAAAAAAAAV/f38AAAAAA8zMzADAwP8Af39/AAAAAAAAAAAAAAAAAAAAAAAAAAAAIQAAABgAAAAUAAAAHyIAAAASAAA/LAAA2xMAABAAAAAmAAAACAAAAIGgAAD/HwAA"/>
+                <pr:smNativeData xmlns:pr="smNativeData" xmlns="smNativeData" val="SMDATA_15_r8odaRMAAAAlAAAAZAAAAA0AAAAAAAAAAAAAAAAAAAAAAAAAAAAAAAABAAAAAAAAAAEAAABQAAAAAAAAAAAA4D8AAAAAAADgPwAAAAAAAOA/AAAAAAAA4D8AAAAAAADgPwAAAAAAAOA/AAAAAAAA4D8AAAAAAADgPwAAAAAAAOA/AAAAAAAA4D8CAAAAjAAAAAEAAAAAAAAA40oGDP///wgAAAAAAAAAAAAAAAAAAAAAAAAAAAAAAAAAAAAAeAAAAAEAAABAAAAAAAAAAAAAAABaAAAAAAAAAAAAAAAAAAAAAAAAAAAAAAAAAAAAAAAAAAAAAAAAAAAAAAAAAAAAAAAAAAAAAAAAAAAAAAAAAAAAAAAAAAAAAAAAAAAAFAAAADwAAAABAAAAAAAAAONKBgwPAAAAAQAAACMAAAAjAAAAIwAAAB4AAAAAAAAAZAAAAGQAAAAAAAAAZAAAAGQAAAAVAAAAYAAAAAAAAAAAAAAADwAAACADAAAAAAAAAAAAAAEAAACgMgAAVgcAAKr4//8BAAAAf39/AAEAAABkAAAAAAAAABQAAABAHwAAAAAAACYAAAAAAAAAwOD//wAAAAAmAAAAZAAAABYAAABMAAAAAAAAAAAAAAAEAAAAAAAAAAEAAACZloMKAAAAACgAAAAoAAAAZAAAAGQAAAAAAAAAzMzMAAAAAABQAAAAUAAAAGQAAABkAAAAAAAAABcAAAAUAAAAAAAAAAAAAAD/fwAA/38AAAAAAAAJAAAABAAAAAUABQAeAAAAaAAAAAAAAAAAAAAAAAAAAAAAAAAAAAAAECcAABAnAAAAAAAAAAAAAAAAAAAAAAAAAAAAAAAAAAAAAAAAAAAAABQAAAAAAAAAwMD/AAAAAABkAAAAMgAAAAAAAABkAAAAAAAAAH9/fwAKAAAAIgAAABgAAAAAAAAAAAAAAAAAAAAAAAAAAAAAAAAAAAAkAAAAJAAAAAAAAAAHAAAAAAAAAAAAAAAAAAAAAAAAAAAAAAAAAAAAf39/ACUAAABYAAAAAAAAAAAAAAAAAAAAAAAAAAAAAAAAAAAAAAAAAAAAAAAAAAAAAAAAAAAAAAA/AAAAAAAAAKCGAQAAAAAAAAAAAAAAAAAMAAAAAQAAAAAAAAAAAAAAAAAAAB8AAABUAAAAAAAABQAAAAEAAAAAAAAAAAAAAAAAAAAAAAAAAAAAAAAAAAAAAAAAAAAAAAV/f38AAAAAA8zMzADAwP8Af39/AAAAAAAAAAAAAAAAAAAAAAAAAAAAIQAAABgAAAAUAAAAHyIAAAASAAA/LAAA2xMAABAAAAAmAAAACAAAAIGgAAD/HwAA"/>
               </a:ext>
             </a:extLst>
           </p:cNvSpPr>
@@ -4697,7 +4697,7 @@
             <a:spLocks noGrp="1" noChangeArrowheads="1"/>
             <a:extLst>
               <a:ext uri="smNativeData">
-                <pr:smNativeData xmlns:pr="smNativeData" xmlns="smNativeData" val="SMDATA_15_mcIdaRMAAAAlAAAAZAAAAA0AAAAAAAAAAAAAAAAAAAAAAAAAAAAAAAAAAAAAAAAAAAEAAABQAAAAAAAAAAAA4D8AAAAAAADgPwAAAAAAAOA/AAAAAAAA4D8AAAAAAADgPwAAAAAAAOA/AAAAAAAA4D8AAAAAAADgPwAAAAAAAOA/AAAAAAAA4D8CAAAAjAAAAAAAAAAAAAAA40oGDP///wgAAAAAAAAAAAAAAAAAAAAAAAAAAAAAAAAAAAAAZAAAAAEAAABAAAAAAAAAAAAAAAAAAAAAAAAAAAAAAAAAAAAAAAAAAAAAAAAAAAAAAAAAAAAAAAAAAAAAAAAAAAAAAAAAAAAAAAAAAAAAAAAAAAAAAAAAAAAAAAAAAAAAFAAAADwAAAAAAAAAAAAAAAAAAAkUAAAAAQAAABQAAAAUAAAAFAAAAAEAAAAAAAAAZAAAAGQAAAAAAAAAZAAAAGQAAAAVAAAAYAAAAAAAAAAAAAAADwAAACADAAAAAAAAAAAAAAEAAACgMgAAVgcAAKr4//8BAAAAf39/AAEAAABkAAAAAAAAABQAAABAHwAAAAAAACYAAAAAAAAAwOD//wAAAAAmAAAAZAAAABYAAABMAAAAAAAAAAAAAAAEAAAAAAAAAAEAAACZloMKAAAAACgAAAAoAAAAZAAAAGQAAAAAAAAAzMzMAAAAAABQAAAAUAAAAGQAAABkAAAAAAAAABcAAAAUAAAAAAAAAAAAAAD/fwAA/38AAAAAAAAJAAAABAAAAAAAAAAeAAAAaAAAAAAAAAAAAAAAAAAAAAAAAAAAAAAAECcAABAnAAAAAAAAAAAAAAAAAAAAAAAAAAAAAAAAAAAAAAAAAAAAABQAAAAAAAAAwMD/AAAAAABkAAAAMgAAAAAAAABkAAAAAAAAAH9/fwAKAAAAIgAAABgAAAAAAAAAAAAAAAAAAAAAAAAAAAAAAAAAAAAkAAAAJAAAAAAAAAAHAAAAAAAAAAAAAAAAAAAAAAAAAAAAAAAAAAAAf39/ACUAAABYAAAAAAAAAAAAAAAAAAAAAAAAAAAAAAAAAAAAAAAAAAAAAAAAAAAAAAAAAAAAAAA/AAAAAAAAAKCGAQAAAAAAAAAAAAAAAAAMAAAAAQAAAAAAAAAAAAAAAAAAAB8AAABUAAAAAAAABQAAAAEAAAAAAAAAAAAAAAAAAAAAAAAAAAAAAAAAAAAAAAAAAAAAAAJ/f38AAAAAA8zMzADAwP8Af39/AAAAAAAAAAAAAAAAAAAAAAAAAAAAIQAAABgAAAAUAAAAHyIAAEAUAAA/LAAAlScAABAAAAAmAAAACAAAAAGgAAAAAAAA"/>
+                <pr:smNativeData xmlns:pr="smNativeData" xmlns="smNativeData" val="SMDATA_15_r8odaRMAAAAlAAAAZAAAAA0AAAAAAAAAAAAAAAAAAAAAAAAAAAAAAAAAAAAAAAAAAAEAAABQAAAAAAAAAAAA4D8AAAAAAADgPwAAAAAAAOA/AAAAAAAA4D8AAAAAAADgPwAAAAAAAOA/AAAAAAAA4D8AAAAAAADgPwAAAAAAAOA/AAAAAAAA4D8CAAAAjAAAAAAAAAAAAAAA40oGDP///wgAAAAAAAAAAAAAAAAAAAAAAAAAAAAAAAAAAAAAZAAAAAEAAABAAAAAAAAAAAAAAAAAAAAAAAAAAAAAAAAAAAAAAAAAAAAAAAAAAAAAAAAAAAAAAAAAAAAAAAAAAAAAAAAAAAAAAAAAAAAAAAAAAAAAAAAAAAAAAAAAAAAAFAAAADwAAAAAAAAAAAAAAAAAAAkUAAAAAQAAABQAAAAUAAAAFAAAAAEAAAAAAAAAZAAAAGQAAAAAAAAAZAAAAGQAAAAVAAAAYAAAAAAAAAAAAAAADwAAACADAAAAAAAAAAAAAAEAAACgMgAAVgcAAKr4//8BAAAAf39/AAEAAABkAAAAAAAAABQAAABAHwAAAAAAACYAAAAAAAAAwOD//wAAAAAmAAAAZAAAABYAAABMAAAAAAAAAAAAAAAEAAAAAAAAAAEAAACZloMKAAAAACgAAAAoAAAAZAAAAGQAAAAAAAAAzMzMAAAAAABQAAAAUAAAAGQAAABkAAAAAAAAABcAAAAUAAAAAAAAAAAAAAD/fwAA/38AAAAAAAAJAAAABAAAAAAAAAAeAAAAaAAAAAAAAAAAAAAAAAAAAAAAAAAAAAAAECcAABAnAAAAAAAAAAAAAAAAAAAAAAAAAAAAAAAAAAAAAAAAAAAAABQAAAAAAAAAwMD/AAAAAABkAAAAMgAAAAAAAABkAAAAAAAAAH9/fwAKAAAAIgAAABgAAAAAAAAAAAAAAAAAAAAAAAAAAAAAAAAAAAAkAAAAJAAAAAAAAAAHAAAAAAAAAAAAAAAAAAAAAAAAAAAAAAAAAAAAf39/ACUAAABYAAAAAAAAAAAAAAAAAAAAAAAAAAAAAAAAAAAAAAAAAAAAAAAAAAAAAAAAAAAAAAA/AAAAAAAAAKCGAQAAAAAAAAAAAAAAAAAMAAAAAQAAAAAAAAAAAAAAAAAAAB8AAABUAAAAAAAABQAAAAEAAAAAAAAAAAAAAAAAAAAAAAAAAAAAAAAAAAAAAAAAAAAAAAJ/f38AAAAAA8zMzADAwP8Af39/AAAAAAAAAAAAAAAAAAAAAAAAAAAAIQAAABgAAAAUAAAAHyIAAEAUAAA/LAAAlScAABAAAAAmAAAACAAAAAGgAAAAAAAA"/>
               </a:ext>
             </a:extLst>
           </p:cNvSpPr>
@@ -4773,7 +4773,7 @@
             <a:spLocks noGrp="1" noChangeArrowheads="1"/>
             <a:extLst>
               <a:ext uri="smNativeData">
-                <pr:smNativeData xmlns:pr="smNativeData" xmlns="smNativeData" val="SMDATA_15_mcIdaRMAAAAlAAAAZAAAAA0AAAAAAAAAAAAAAAAAAAAAAAAAAAAAAAAAAAAAAAAAAAEAAABQAAAAAAAAAAAA4D8AAAAAAADgPwAAAAAAAOA/AAAAAAAA4D8AAAAAAADgPwAAAAAAAOA/AAAAAAAA4D8AAAAAAADgPwAAAAAAAOA/AAAAAAAA4D8CAAAAjAAAAAAAAAAAAAAA40oGDP///wgAAAAAAAAAAAAAAAAAAAAAAAAAAAAAAAAAAAAAZAAAAAEAAABAAAAAAAAAAAAAAAAAAAAAAAAAAAAAAAAAAAAAAAAAAAAAAAAAAAAAAAAAAAAAAAAAAAAAAAAAAAAAAAAAAAAAAAAAAAAAAAAAAAAAAAAAAAAAAAAAAAAAFAAAADwAAAAAAAAAAAAAAAAAAAkUAAAAAQAAABQAAAAUAAAAFAAAAAEAAAAAAAAAZAAAAGQAAAAAAAAAZAAAAGQAAAAVAAAAYAAAAAAAAAAAAAAADwAAACADAAAAAAAAAAAAAAEAAACgMgAAVgcAAKr4//8BAAAAf39/AAEAAABkAAAAAAAAABQAAABAHwAAAAAAACYAAAAAAAAAwOD//wAAAAAmAAAAZAAAABYAAABMAAAAAAAAAAAAAAAEAAAAAAAAAAEAAACZloMKAAAAACgAAAAoAAAAZAAAAGQAAAAAAAAAzMzMAAAAAABQAAAAUAAAAGQAAABkAAAAAAAAABcAAAAUAAAAAAAAAAAAAAD/fwAA/38AAAAAAAAJAAAABAAAAAAAAAAeAAAAaAAAAAAAAAAAAAAAAAAAAAAAAAAAAAAAECcAABAnAAAAAAAAAAAAAAAAAAAAAAAAAAAAAAAAAAAAAAAAAAAAABQAAAAAAAAAwMD/AAAAAABkAAAAMgAAAAAAAABkAAAAAAAAAH9/fwAKAAAAIgAAABgAAAAAAAAAAAAAAAAAAAAAAAAAAAAAAAAAAAAkAAAAJAAAAAAAAAAHAAAAAAAAAAAAAAAAAAAAAAAAAAAAAAAAAAAAf39/ACUAAABYAAAAAAAAAAAAAAAAAAAAAAAAAAAAAAAAAAAAAAAAAAAAAAAAAAAAAAAAAAAAAAA/AAAAAAAAAKCGAQAAAAAAAAAAAAAAAAAMAAAAAQAAAAAAAAAAAAAAAAAAAB8AAABUAAAAAAAABQAAAAEAAAAAAAAAAAAAAAAAAAAAAAAAAAAAAAAAAAAAAAAAAAAAAAJ/f38AAAAAA8zMzADAwP8Af39/AAAAAAAAAAAAAAAAAAAAAAAAAAAAIQAAABgAAAAUAAAA6y0AAGgGAABbNgAAqBEAABAAAAAmAAAACAAAAAGAAAAAAAAA"/>
+                <pr:smNativeData xmlns:pr="smNativeData" xmlns="smNativeData" val="SMDATA_15_r8odaRMAAAAlAAAAZAAAAA0AAAAAAAAAAAAAAAAAAAAAAAAAAAAAAAAAAAAAAAAAAAEAAABQAAAAAAAAAAAA4D8AAAAAAADgPwAAAAAAAOA/AAAAAAAA4D8AAAAAAADgPwAAAAAAAOA/AAAAAAAA4D8AAAAAAADgPwAAAAAAAOA/AAAAAAAA4D8CAAAAjAAAAAAAAAAAAAAA40oGDP///wgAAAAAAAAAAAAAAAAAAAAAAAAAAAAAAAAAAAAAZAAAAAEAAABAAAAAAAAAAAAAAAAAAAAAAAAAAAAAAAAAAAAAAAAAAAAAAAAAAAAAAAAAAAAAAAAAAAAAAAAAAAAAAAAAAAAAAAAAAAAAAAAAAAAAAAAAAAAAAAAAAAAAFAAAADwAAAAAAAAAAAAAAAAAAAkUAAAAAQAAABQAAAAUAAAAFAAAAAEAAAAAAAAAZAAAAGQAAAAAAAAAZAAAAGQAAAAVAAAAYAAAAAAAAAAAAAAADwAAACADAAAAAAAAAAAAAAEAAACgMgAAVgcAAKr4//8BAAAAf39/AAEAAABkAAAAAAAAABQAAABAHwAAAAAAACYAAAAAAAAAwOD//wAAAAAmAAAAZAAAABYAAABMAAAAAAAAAAAAAAAEAAAAAAAAAAEAAACZloMKAAAAACgAAAAoAAAAZAAAAGQAAAAAAAAAzMzMAAAAAABQAAAAUAAAAGQAAABkAAAAAAAAABcAAAAUAAAAAAAAAAAAAAD/fwAA/38AAAAAAAAJAAAABAAAAAAAAAAeAAAAaAAAAAAAAAAAAAAAAAAAAAAAAAAAAAAAECcAABAnAAAAAAAAAAAAAAAAAAAAAAAAAAAAAAAAAAAAAAAAAAAAABQAAAAAAAAAwMD/AAAAAABkAAAAMgAAAAAAAABkAAAAAAAAAH9/fwAKAAAAIgAAABgAAAAAAAAAAAAAAAAAAAAAAAAAAAAAAAAAAAAkAAAAJAAAAAAAAAAHAAAAAAAAAAAAAAAAAAAAAAAAAAAAAAAAAAAAf39/ACUAAABYAAAAAAAAAAAAAAAAAAAAAAAAAAAAAAAAAAAAAAAAAAAAAAAAAAAAAAAAAAAAAAA/AAAAAAAAAKCGAQAAAAAAAAAAAAAAAAAMAAAAAQAAAAAAAAAAAAAAAAAAAB8AAABUAAAAAAAABQAAAAEAAAAAAAAAAAAAAAAAAAAAAAAAAAAAAAAAAAAAAAAAAAAAAAJ/f38AAAAAA8zMzADAwP8Af39/AAAAAAAAAAAAAAAAAAAAAAAAAAAAIQAAABgAAAAUAAAA6y0AAGgGAABbNgAAqBEAABAAAAAmAAAACAAAAAGAAAAAAAAA"/>
               </a:ext>
             </a:extLst>
           </p:cNvSpPr>
@@ -4842,7 +4842,7 @@
             <a:spLocks noGrp="1" noChangeArrowheads="1"/>
             <a:extLst>
               <a:ext uri="smNativeData">
-                <pr:smNativeData xmlns:pr="smNativeData" xmlns="smNativeData" val="SMDATA_15_mcIdaRMAAAAlAAAAZAAAAA0AAAAAAAAAAAAAAAAAAAAAAAAAAAAAAAAAAAAAAAAAAAEAAABQAAAAAAAAAAAA4D8AAAAAAADgPwAAAAAAAOA/AAAAAAAA4D8AAAAAAADgPwAAAAAAAOA/AAAAAAAA4D8AAAAAAADgPwAAAAAAAOA/AAAAAAAA4D8CAAAAjAAAAAAAAAAAAAAA40oGDP///wgAAAAAAAAAAAAAAAAAAAAAAAAAAAAAAAAAAAAAZAAAAAEAAABAAAAAAAAAAAAAAAAAAAAAAAAAAAAAAAAAAAAAAAAAAAAAAAAAAAAAAAAAAAAAAAAAAAAAAAAAAAAAAAAAAAAAAAAAAAAAAAAAAAAAAAAAAAAAAAAAAAAAFAAAADwAAAAAAAAAAAAAAAAAAAkUAAAAAQAAABQAAAAUAAAAFAAAAAEAAAAAAAAAZAAAAGQAAAAAAAAAZAAAAGQAAAAVAAAAYAAAAAAAAAAAAAAADwAAACADAAAAAAAAAAAAAAEAAACgMgAAVgcAAKr4//8BAAAAf39/AAEAAABkAAAAAAAAABQAAABAHwAAAAAAACYAAAAAAAAAwOD//wAAAAAmAAAAZAAAABYAAABMAAAAAAAAAAAAAAAEAAAAAAAAAAEAAACZloMKAAAAACgAAAAoAAAAZAAAAGQAAAAAAAAAzMzMAAAAAABQAAAAUAAAAGQAAABkAAAAAAAAABcAAAAUAAAAAAAAAAAAAAD/fwAA/38AAAAAAAAJAAAABAAAAAAAAAAeAAAAaAAAAAAAAAAAAAAAAAAAAAAAAAAAAAAAECcAABAnAAAAAAAAAAAAAAAAAAAAAAAAAAAAAAAAAAAAAAAAAAAAABQAAAAAAAAAwMD/AAAAAABkAAAAMgAAAAAAAABkAAAAAAAAAH9/fwAKAAAAIgAAABgAAAAAAAAAAAAAAAAAAAAAAAAAAAAAAAAAAAAkAAAAJAAAAAAAAAAHAAAAAAAAAAAAAAAAAAAAAAAAAAAAAAAAAAAAf39/ACUAAABYAAAAAAAAAAAAAAAAAAAAAAAAAAAAAAAAAAAAAAAAAAAAAAAAAAAAAAAAAAAAAAA/AAAAAAAAAKCGAQAAAAAAAAAAAAAAAAAMAAAAAQAAAAAAAAAAAAAAAAAAAB8AAABUAAAAAAAABQAAAAEAAAAAAAAAAAAAAAAAAAAAAAAAAAAAAAAAAAAAAAAAAAAAAAJ/f38AAAAAA8zMzADAwP8Af39/AAAAAAAAAAAAAAAAAAAAAAAAAAAAIQAAABgAAAAUAAAAEy0AAEAUAAAzNwAAlScAABAAAAAmAAAACAAAAAGgAAAAAAAA"/>
+                <pr:smNativeData xmlns:pr="smNativeData" xmlns="smNativeData" val="SMDATA_15_r8odaRMAAAAlAAAAZAAAAA0AAAAAAAAAAAAAAAAAAAAAAAAAAAAAAAAAAAAAAAAAAAEAAABQAAAAAAAAAAAA4D8AAAAAAADgPwAAAAAAAOA/AAAAAAAA4D8AAAAAAADgPwAAAAAAAOA/AAAAAAAA4D8AAAAAAADgPwAAAAAAAOA/AAAAAAAA4D8CAAAAjAAAAAAAAAAAAAAA40oGDP///wgAAAAAAAAAAAAAAAAAAAAAAAAAAAAAAAAAAAAAZAAAAAEAAABAAAAAAAAAAAAAAAAAAAAAAAAAAAAAAAAAAAAAAAAAAAAAAAAAAAAAAAAAAAAAAAAAAAAAAAAAAAAAAAAAAAAAAAAAAAAAAAAAAAAAAAAAAAAAAAAAAAAAFAAAADwAAAAAAAAAAAAAAAAAAAkUAAAAAQAAABQAAAAUAAAAFAAAAAEAAAAAAAAAZAAAAGQAAAAAAAAAZAAAAGQAAAAVAAAAYAAAAAAAAAAAAAAADwAAACADAAAAAAAAAAAAAAEAAACgMgAAVgcAAKr4//8BAAAAf39/AAEAAABkAAAAAAAAABQAAABAHwAAAAAAACYAAAAAAAAAwOD//wAAAAAmAAAAZAAAABYAAABMAAAAAAAAAAAAAAAEAAAAAAAAAAEAAACZloMKAAAAACgAAAAoAAAAZAAAAGQAAAAAAAAAzMzMAAAAAABQAAAAUAAAAGQAAABkAAAAAAAAABcAAAAUAAAAAAAAAAAAAAD/fwAA/38AAAAAAAAJAAAABAAAAAAAAAAeAAAAaAAAAAAAAAAAAAAAAAAAAAAAAAAAAAAAECcAABAnAAAAAAAAAAAAAAAAAAAAAAAAAAAAAAAAAAAAAAAAAAAAABQAAAAAAAAAwMD/AAAAAABkAAAAMgAAAAAAAABkAAAAAAAAAH9/fwAKAAAAIgAAABgAAAAAAAAAAAAAAAAAAAAAAAAAAAAAAAAAAAAkAAAAJAAAAAAAAAAHAAAAAAAAAAAAAAAAAAAAAAAAAAAAAAAAAAAAf39/ACUAAABYAAAAAAAAAAAAAAAAAAAAAAAAAAAAAAAAAAAAAAAAAAAAAAAAAAAAAAAAAAAAAAA/AAAAAAAAAKCGAQAAAAAAAAAAAAAAAAAMAAAAAQAAAAAAAAAAAAAAAAAAAB8AAABUAAAAAAAABQAAAAEAAAAAAAAAAAAAAAAAAAAAAAAAAAAAAAAAAAAAAAAAAAAAAAJ/f38AAAAAA8zMzADAwP8Af39/AAAAAAAAAAAAAAAAAAAAAAAAAAAAIQAAABgAAAAUAAAAEy0AAEAUAAAzNwAAlScAABAAAAAmAAAACAAAAAGgAAAAAAAA"/>
               </a:ext>
             </a:extLst>
           </p:cNvSpPr>
@@ -4918,7 +4918,7 @@
             <a:spLocks noGrp="1" noChangeArrowheads="1"/>
             <a:extLst>
               <a:ext uri="smNativeData">
-                <pr:smNativeData xmlns:pr="smNativeData" xmlns="smNativeData" val="SMDATA_15_mcIdaRMAAAAlAAAAZAAAAA0AAAAAAAAAAAAAAAAAAAAAAAAAAAAAAAABAAAAAAAAAAEAAABQAAAAAAAAAAAA4D8AAAAAAADgPwAAAAAAAOA/AAAAAAAA4D8AAAAAAADgPwAAAAAAAOA/AAAAAAAA4D8AAAAAAADgPwAAAAAAAOA/AAAAAAAA4D8CAAAAjAAAAAEAAAAAAAAA40oGDP///wgAAAAAAAAAAAAAAAAAAAAAAAAAAAAAAAAAAAAAeAAAAAEAAABAAAAAAAAAAAAAAABaAAAAAAAAAAAAAAAAAAAAAAAAAAAAAAAAAAAAAAAAAAAAAAAAAAAAAAAAAAAAAAAAAAAAAAAAAAAAAAAAAAAAAAAAAAAAAAAAAAAAFAAAADwAAAABAAAAAAAAAONKBgwPAAAAAQAAACMAAAAjAAAAIwAAAB4AAAAAAAAAZAAAAGQAAAAAAAAAZAAAAGQAAAAVAAAAYAAAAAAAAAAAAAAADwAAACADAAAAAAAAAAAAAAEAAACgMgAAVgcAAKr4//8BAAAAf39/AAEAAABkAAAAAAAAABQAAABAHwAAAAAAACYAAAAAAAAAwOD//wAAAAAmAAAAZAAAABYAAABMAAAAAAAAAAAAAAAEAAAAAAAAAAEAAACZloMKAAAAACgAAAAoAAAAZAAAAGQAAAAAAAAAzMzMAAAAAABQAAAAUAAAAGQAAABkAAAAAAAAABcAAAAUAAAAAAAAAAAAAAD/fwAA/38AAAAAAAAJAAAABAAAAAAAAAAeAAAAaAAAAAAAAAAAAAAAAAAAAAAAAAAAAAAAECcAABAnAAAAAAAAAAAAAAAAAAAAAAAAAAAAAAAAAAAAAAAAAAAAABQAAAAAAAAAwMD/AAAAAABkAAAAMgAAAAAAAABkAAAAAAAAAH9/fwAKAAAAIgAAABgAAAAAAAAAAAAAAAAAAAAAAAAAAAAAAAAAAAAkAAAAJAAAAAAAAAAHAAAAAAAAAAAAAAAAAAAAAAAAAAAAAAAAAAAAf39/ACUAAABYAAAAAAAAAAAAAAAAAAAAAAAAAAAAAAAAAAAAAAAAAAAAAAAAAAAAAAAAAAAAAAA/AAAAAAAAAKCGAQAAAAAAAAAAAAAAAAAMAAAAAQAAAAAAAAAAAAAAAAAAAB8AAABUAAAAAAAABQAAAAEAAAAAAAAAAAAAAAAAAAAAAAAAAAAAAAAAAAAAAAAAAAAAAAV/f38AAAAAA8zMzADAwP8Af39/AAAAAAAAAAAAAAAAAAAAAAAAAAAAIQAAABgAAAAUAAAAEy0AAAASAAA0NwAA2xMAABAAAAAmAAAACAAAAIGgAAD/HwAA"/>
+                <pr:smNativeData xmlns:pr="smNativeData" xmlns="smNativeData" val="SMDATA_15_r8odaRMAAAAlAAAAZAAAAA0AAAAAAAAAAAAAAAAAAAAAAAAAAAAAAAABAAAAAAAAAAEAAABQAAAAAAAAAAAA4D8AAAAAAADgPwAAAAAAAOA/AAAAAAAA4D8AAAAAAADgPwAAAAAAAOA/AAAAAAAA4D8AAAAAAADgPwAAAAAAAOA/AAAAAAAA4D8CAAAAjAAAAAEAAAAAAAAA40oGDP///wgAAAAAAAAAAAAAAAAAAAAAAAAAAAAAAAAAAAAAeAAAAAEAAABAAAAAAAAAAAAAAABaAAAAAAAAAAAAAAAAAAAAAAAAAAAAAAAAAAAAAAAAAAAAAAAAAAAAAAAAAAAAAAAAAAAAAAAAAAAAAAAAAAAAAAAAAAAAAAAAAAAAFAAAADwAAAABAAAAAAAAAONKBgwPAAAAAQAAACMAAAAjAAAAIwAAAB4AAAAAAAAAZAAAAGQAAAAAAAAAZAAAAGQAAAAVAAAAYAAAAAAAAAAAAAAADwAAACADAAAAAAAAAAAAAAEAAACgMgAAVgcAAKr4//8BAAAAf39/AAEAAABkAAAAAAAAABQAAABAHwAAAAAAACYAAAAAAAAAwOD//wAAAAAmAAAAZAAAABYAAABMAAAAAAAAAAAAAAAEAAAAAAAAAAEAAACZloMKAAAAACgAAAAoAAAAZAAAAGQAAAAAAAAAzMzMAAAAAABQAAAAUAAAAGQAAABkAAAAAAAAABcAAAAUAAAAAAAAAAAAAAD/fwAA/38AAAAAAAAJAAAABAAAAAAAAAAeAAAAaAAAAAAAAAAAAAAAAAAAAAAAAAAAAAAAECcAABAnAAAAAAAAAAAAAAAAAAAAAAAAAAAAAAAAAAAAAAAAAAAAABQAAAAAAAAAwMD/AAAAAABkAAAAMgAAAAAAAABkAAAAAAAAAH9/fwAKAAAAIgAAABgAAAAAAAAAAAAAAAAAAAAAAAAAAAAAAAAAAAAkAAAAJAAAAAAAAAAHAAAAAAAAAAAAAAAAAAAAAAAAAAAAAAAAAAAAf39/ACUAAABYAAAAAAAAAAAAAAAAAAAAAAAAAAAAAAAAAAAAAAAAAAAAAAAAAAAAAAAAAAAAAAA/AAAAAAAAAKCGAQAAAAAAAAAAAAAAAAAMAAAAAQAAAAAAAAAAAAAAAAAAAB8AAABUAAAAAAAABQAAAAEAAAAAAAAAAAAAAAAAAAAAAAAAAAAAAAAAAAAAAAAAAAAAAAV/f38AAAAAA8zMzADAwP8Af39/AAAAAAAAAAAAAAAAAAAAAAAAAAAAIQAAABgAAAAUAAAAEy0AAAASAAA0NwAA2xMAABAAAAAmAAAACAAAAIGgAAD/HwAA"/>
               </a:ext>
             </a:extLst>
           </p:cNvSpPr>
@@ -5004,7 +5004,7 @@
             <a:spLocks noGrp="1" noChangeArrowheads="1"/>
             <a:extLst>
               <a:ext uri="smNativeData">
-                <pr:smNativeData xmlns:pr="smNativeData" xmlns="smNativeData" val="SMDATA_15_mcIdaRMAAAAlAAAAEgAAAA0AAAAAkAAAAEgAAACQAAAASAAAAAAAAAAAAAAAAAAAAAEAAABQAAAAAAAAAAAA4D8AAAAAAADgPwAAAAAAAOA/AAAAAAAA4D8AAAAAAADgPwAAAAAAAOA/AAAAAAAA4D8AAAAAAADgPwAAAAAAAOA/AAAAAAAA4D8CAAAAjAAAAAAAAAAAAAAA////AP///wgAAAAAAAAAAAAAAAAAAAAAAAAAAAAAAAAAAAAAeAAAAAEAAABAAAAAAAAAAAAAAABaAAAAAAAAAAAAAAAAAAAAAAAAAAAAAAAAAAAAAAAAAAAAAAAAAAAAAAAAAAAAAAAAAAAAAAAAAAAAAAAAAAAAAAAAAAAAAAAAAAAAFAAAADwAAAAAAAAAAAAAAAAAAAAPAAAAAQAAACMAAAAjAAAAIwAAAB4AAAAAAAAAZAAAAGQAAAAAAAAAZAAAAGQAAAAVAAAAYAAAAAAAAAAAAAAADwAAACADAAAAAAAAAAAAAAEAAACgMgAAVgcAAKr4//8BAAAAf39/AAEAAABkAAAAAAAAABQAAABAHwAAAAAAACYAAAAAAAAAwOD//wAAAAAmAAAAZAAAABYAAABMAAAAAAAAAAAAAAAEAAAAAAAAAAEAAACZloMKAAAAACgAAAAoAAAAZAAAAGQAAAAAAAAAzMzMAAAAAABQAAAAUAAAAGQAAABkAAAAAAAAABcAAAAUAAAAAAAAAAAAAAD/fwAA/38AAAAAAAAJAAAABAAAAAAAAAAeAAAAaAAAAAAAAAAAAAAAAAAAAAAAAAAAAAAAECcAABAnAAAAAAAAAAAAAAAAAAAAAAAAAAAAAAAAAAAAAAAAAAAAABQAAAAAAAAAwMD/AAAAAABkAAAAMgAAAAAAAABkAAAAAAAAAH9/fwAKAAAAIgAAABgAAAAAAAAAAAAAAAAAAAAAAAAAAAAAAAAAAAAkAAAAJAAAAAAAAAAHAAAAAAAAAAAAAAAAAAAAAAAAAAAAAAAAAAAAf39/ACUAAABYAAAAAAAAAAAAAAAAAAAAAAAAAAAAAAAAAAAAAAAAAAAAAAAAAAAAAAAAAAAAAAA/AAAAAAAAAKCGAQAAAAAAAAAAAAAAAAAMAAAAAQAAAAAAAAAAAAAAAAAAAB8AAABUAAAA////AAAAAAEAAAAAAAAAAAAAAAAAAAAAAAAAAAAAAAAAAAAAAAAAAAAAAAB/f38AAAAAA8zMzADAwP8Af39/AAAAAAAAAAAAAAAAAAAAAAAAAAAAIQAAABgAAAAUAAAA6zQAAGkoAAAnNwAACyoAABAAAAAmAAAACAAAAAGBAAAAAAAA"/>
+                <pr:smNativeData xmlns:pr="smNativeData" xmlns="smNativeData" val="SMDATA_15_r8odaRMAAAAlAAAAEgAAAA0AAAAAkAAAAEgAAACQAAAASAAAAAAAAAAAAAAAAAAAAAEAAABQAAAAAAAAAAAA4D8AAAAAAADgPwAAAAAAAOA/AAAAAAAA4D8AAAAAAADgPwAAAAAAAOA/AAAAAAAA4D8AAAAAAADgPwAAAAAAAOA/AAAAAAAA4D8CAAAAjAAAAAAAAAAAAAAA////AP///wgAAAAAAAAAAAAAAAAAAAAAAAAAAAAAAAAAAAAAeAAAAAEAAABAAAAAAAAAAAAAAABaAAAAAAAAAAAAAAAAAAAAAAAAAAAAAAAAAAAAAAAAAAAAAAAAAAAAAAAAAAAAAAAAAAAAAAAAAAAAAAAAAAAAAAAAAAAAAAAAAAAAFAAAADwAAAAAAAAAAAAAAAAAAAAPAAAAAQAAACMAAAAjAAAAIwAAAB4AAAAAAAAAZAAAAGQAAAAAAAAAZAAAAGQAAAAVAAAAYAAAAAAAAAAAAAAADwAAACADAAAAAAAAAAAAAAEAAACgMgAAVgcAAKr4//8BAAAAf39/AAEAAABkAAAAAAAAABQAAABAHwAAAAAAACYAAAAAAAAAwOD//wAAAAAmAAAAZAAAABYAAABMAAAAAAAAAAAAAAAEAAAAAAAAAAEAAACZloMKAAAAACgAAAAoAAAAZAAAAGQAAAAAAAAAzMzMAAAAAABQAAAAUAAAAGQAAABkAAAAAAAAABcAAAAUAAAAAAAAAAAAAAD/fwAA/38AAAAAAAAJAAAABAAAAAAAAAAeAAAAaAAAAAAAAAAAAAAAAAAAAAAAAAAAAAAAECcAABAnAAAAAAAAAAAAAAAAAAAAAAAAAAAAAAAAAAAAAAAAAAAAABQAAAAAAAAAwMD/AAAAAABkAAAAMgAAAAAAAABkAAAAAAAAAH9/fwAKAAAAIgAAABgAAAAAAAAAAAAAAAAAAAAAAAAAAAAAAAAAAAAkAAAAJAAAAAAAAAAHAAAAAAAAAAAAAAAAAAAAAAAAAAAAAAAAAAAAf39/ACUAAABYAAAAAAAAAAAAAAAAAAAAAAAAAAAAAAAAAAAAAAAAAAAAAAAAAAAAAAAAAAAAAAA/AAAAAAAAAKCGAQAAAAAAAAAAAAAAAAAMAAAAAQAAAAAAAAAAAAAAAAAAAB8AAABUAAAA////AAAAAAEAAAAAAAAAAAAAAAAAAAAAAAAAAAAAAAAAAAAAAAAAAAAAAAB/f38AAAAAA8zMzADAwP8Af39/AAAAAAAAAAAAAAAAAAAAAAAAAAAAIQAAABgAAAAUAAAA6zQAAGkoAAAnNwAACyoAABAAAAAmAAAACAAAAAGBAAAAAAAA"/>
               </a:ext>
             </a:extLst>
           </p:cNvSpPr>
@@ -5063,7 +5063,7 @@
             <a:pPr>
               <a:defRPr lang="en-us"/>
             </a:pPr>
-            <a:fld id="{7B5C3155-1B96-09C7-D8E4-ED927FAA2EB8}" type="slidenum">
+            <a:fld id="{4F8AE05D-13A2-DF16-EC32-E543AE7C1AB0}" type="slidenum">
               <a:t/>
             </a:fld>
           </a:p>
@@ -5112,7 +5112,7 @@
             <a:spLocks noGrp="1" noChangeArrowheads="1"/>
             <a:extLst>
               <a:ext uri="smNativeData">
-                <pr:smNativeData xmlns:pr="smNativeData" xmlns="smNativeData" val="SMDATA_15_mcIdaRMAAAAlAAAAZAAAAA0AAAAAAAAAAAAAAAAAAAAAAAAAAAAAAAAAAAAAAAAAAAEAAABQAAAAAAAAAAAA4D8AAAAAAADgPwAAAAAAAOA/AAAAAAAA4D8AAAAAAADgPwAAAAAAAOA/AAAAAAAA4D8AAAAAAADgPwAAAAAAAOA/AAAAAAAA4D8CAAAAjAAAAAAAAAAAAAAA40oGDP///wgAAAAAAAAAAAAAAAAAAAAAAAAAAAAAAAAAAAAAZAAAAAEAAABAAAAAAAAAAAAAAAAAAAAAAAAAAAAAAAAAAAAAAAAAAAAAAAAAAAAAAAAAAAAAAAAAAAAAAAAAAAAAAAAAAAAAAAAAAAAAAAAAAAAAAAAAAAAAAAAAAAAAFAAAADwAAAAAAAAAAAAAAAAAAAkUAAAAAQAAABQAAAAUAAAAFAAAAAEAAAAAAAAAZAAAAGQAAAAAAAAAZAAAAGQAAAAVAAAAYAAAAAAAAAAAAAAADwAAACADAAAAAAAAAAAAAAEAAACgMgAAVgcAAKr4//8BAAAAf39/AAEAAABkAAAAAAAAABQAAABAHwAAAAAAACYAAAAAAAAAwOD//wAAAAAmAAAAZAAAABYAAABMAAAAAAAAAAAAAAAEAAAAAAAAAAEAAACZloMKAAAAACgAAAAoAAAAZAAAAGQAAAAAAAAAzMzMAAAAAABQAAAAUAAAAGQAAABkAAAAAAAAABcAAAAUAAAAAAAAAAAAAAD/fwAA/38AAAAAAAAJAAAABAAAAAAAAAAeAAAAaAAAAAAAAAAAAAAAAAAAAAAAAAAAAAAAECcAABAnAAAAAAAAAAAAAAAAAAAAAAAAAAAAAAAAAAAAAAAAAAAAABQAAAAAAAAAwMD/AAAAAABkAAAAMgAAAAAAAABkAAAAAAAAAH9/fwAKAAAAIgAAABgAAAAAAAAAAAAAAAAAAAAAAAAAAAAAAAAAAAAkAAAAJAAAAAAAAAAHAAAAAAAAAAAAAAAAAAAAAAAAAAAAAAAAAAAAf39/ACUAAABYAAAAAAAAAAAAAAAAAAAAAAAAAAAAAAAAAAAAAAAAAAAAAAAAAAAAAAAAAAAAAAA/AAAAAAAAAKCGAQAAAAAAAAAAAAAAAAAMAAAAAQAAAAAAAAAAAAAAAAAAAB8AAABUAAAAAAAABQAAAAEAAAAAAAAAAAAAAAAAAAAAAAAAAAAAAAAAAAAAAAAAAAAAAAJ/f38AAAAAA8zMzADAwP8Af39/AAAAAAAAAAAAAAAAAAAAAAAAAAAAIQAAABgAAAAUAAAA0AIAADgEAABjFgAAxgsAABAAAAAmAAAACAAAAAAAAAAAAAAA"/>
+                <pr:smNativeData xmlns:pr="smNativeData" xmlns="smNativeData" val="SMDATA_15_r8odaRMAAAAlAAAAZAAAAA0AAAAAAAAAAAAAAAAAAAAAAAAAAAAAAAAAAAAAAAAAAAEAAABQAAAAAAAAAAAA4D8AAAAAAADgPwAAAAAAAOA/AAAAAAAA4D8AAAAAAADgPwAAAAAAAOA/AAAAAAAA4D8AAAAAAADgPwAAAAAAAOA/AAAAAAAA4D8CAAAAjAAAAAAAAAAAAAAA40oGDP///wgAAAAAAAAAAAAAAAAAAAAAAAAAAAAAAAAAAAAAZAAAAAEAAABAAAAAAAAAAAAAAAAAAAAAAAAAAAAAAAAAAAAAAAAAAAAAAAAAAAAAAAAAAAAAAAAAAAAAAAAAAAAAAAAAAAAAAAAAAAAAAAAAAAAAAAAAAAAAAAAAAAAAFAAAADwAAAAAAAAAAAAAAAAAAAkUAAAAAQAAABQAAAAUAAAAFAAAAAEAAAAAAAAAZAAAAGQAAAAAAAAAZAAAAGQAAAAVAAAAYAAAAAAAAAAAAAAADwAAACADAAAAAAAAAAAAAAEAAACgMgAAVgcAAKr4//8BAAAAf39/AAEAAABkAAAAAAAAABQAAABAHwAAAAAAACYAAAAAAAAAwOD//wAAAAAmAAAAZAAAABYAAABMAAAAAAAAAAAAAAAEAAAAAAAAAAEAAACZloMKAAAAACgAAAAoAAAAZAAAAGQAAAAAAAAAzMzMAAAAAABQAAAAUAAAAGQAAABkAAAAAAAAABcAAAAUAAAAAAAAAAAAAAD/fwAA/38AAAAAAAAJAAAABAAAAAAAAAAeAAAAaAAAAAAAAAAAAAAAAAAAAAAAAAAAAAAAECcAABAnAAAAAAAAAAAAAAAAAAAAAAAAAAAAAAAAAAAAAAAAAAAAABQAAAAAAAAAwMD/AAAAAABkAAAAMgAAAAAAAABkAAAAAAAAAH9/fwAKAAAAIgAAABgAAAAAAAAAAAAAAAAAAAAAAAAAAAAAAAAAAAAkAAAAJAAAAAAAAAAHAAAAAAAAAAAAAAAAAAAAAAAAAAAAAAAAAAAAf39/ACUAAABYAAAAAAAAAAAAAAAAAAAAAAAAAAAAAAAAAAAAAAAAAAAAAAAAAAAAAAAAAAAAAAA/AAAAAAAAAKCGAQAAAAAAAAAAAAAAAAAMAAAAAQAAAAAAAAAAAAAAAAAAAB8AAABUAAAAAAAABQAAAAEAAAAAAAAAAAAAAAAAAAAAAAAAAAAAAAAAAAAAAAAAAAAAAAJ/f38AAAAAA8zMzADAwP8Af39/AAAAAAAAAAAAAAAAAAAAAAAAAAAAIQAAABgAAAAUAAAA0AIAADgEAABjFgAAxgsAABAAAAAmAAAACAAAAAAAAAAAAAAA"/>
               </a:ext>
             </a:extLst>
           </p:cNvSpPr>
@@ -5141,7 +5141,7 @@
             <a:spLocks noGrp="1" noChangeArrowheads="1"/>
             <a:extLst>
               <a:ext uri="smNativeData">
-                <pr:smNativeData xmlns:pr="smNativeData" xmlns="smNativeData" val="SMDATA_15_mcIdaRMAAAAlAAAAZAAAAA0AAAAAAAAAAAAAAAAAAAAAAAAAAAAAAAAAAAAAAAAAAAEAAABQAAAAAAAAAAAA4D8AAAAAAADgPwAAAAAAAOA/AAAAAAAA4D8AAAAAAADgPwAAAAAAAOA/AAAAAAAA4D8AAAAAAADgPwAAAAAAAOA/AAAAAAAA4D8CAAAAjAAAAAAAAAAAAAAA40oGDP///wgAAAAAAAAAAAAAAAAAAAAAAAAAAAAAAAAAAAAAZAAAAAEAAABAAAAAAAAAAAAAAAAAAAAAAAAAAAAAAAAAAAAAAAAAAAAAAAAAAAAAAAAAAAAAAAAAAAAAAAAAAAAAAAAAAAAAAAAAAAAAAAAAAAAAAAAAAAAAAAAAAAAAFAAAADwAAAAAAAAAAAAAAAAAAAkUAAAAAQAAABQAAAAUAAAAFAAAAAEAAAAAAAAAZAAAAGQAAAAAAAAAZAAAAGQAAAAVAAAAYAAAAAAAAAAAAAAADwAAACADAAAAAAAAAAAAAAEAAACgMgAAVgcAAKr4//8BAAAAf39/AAEAAABkAAAAAAAAABQAAABAHwAAAAAAACYAAAAAAAAAwOD//wAAAAAmAAAAZAAAABYAAABMAAAAAAAAAAAAAAAEAAAAAAAAAAEAAACZloMKAAAAACgAAAAoAAAAZAAAAGQAAAAAAAAAzMzMAAAAAABQAAAAUAAAAGQAAABkAAAAAAAAABcAAAAUAAAAAAAAAAAAAAD/fwAA/38AAAAAAAAJAAAABAAAACARESQeAAAAaAAAAAAAAAAAAAAAAAAAAAAAAAAAAAAAECcAABAnAAAAAAAAAAAAAAAAAAAAAAAAAAAAAAAAAAAAAAAAAAAAABQAAAAAAAAAwMD/AAAAAABkAAAAMgAAAAAAAABkAAAAAAAAAH9/fwAKAAAAIgAAABgAAAAAAAAAAAAAAAAAAAAAAAAAAAAAAAAAAAAkAAAAJAAAAAAAAAAHAAAAAAAAAAAAAAAAAAAAAAAAAAAAAAAAAAAAf39/ACUAAABYAAAAAAAAAAAAAAAAAAAAAAAAAAAAAAAAAAAAAAAAAAAAAAAAAAAAAAAAAAAAAAA/AAAAAAAAAKCGAQAAAAAAAAAAAAAAAAAMAAAAAQAAAAAAAAAAAAAAAAAAAB8AAABUAAAAAAAABQAAAAEAAAAAAAAAAAAAAAAAAAAAAAAAAAAAAAAAAAAAAAAAAAAAAAJ/f38AAAAAA8zMzADAwP8Af39/AAAAAAAAAAAAAAAAAAAAAAAAAAAAIQAAABgAAAAUAAAA0AIAAEUOAAAGDAAA8BQAABAAAAAmAAAACAAAAAGAAAAAAAAA"/>
+                <pr:smNativeData xmlns:pr="smNativeData" xmlns="smNativeData" val="SMDATA_15_r8odaRMAAAAlAAAAZAAAAA0AAAAAAAAAAAAAAAAAAAAAAAAAAAAAAAAAAAAAAAAAAAEAAABQAAAAAAAAAAAA4D8AAAAAAADgPwAAAAAAAOA/AAAAAAAA4D8AAAAAAADgPwAAAAAAAOA/AAAAAAAA4D8AAAAAAADgPwAAAAAAAOA/AAAAAAAA4D8CAAAAjAAAAAAAAAAAAAAA40oGDP///wgAAAAAAAAAAAAAAAAAAAAAAAAAAAAAAAAAAAAAZAAAAAEAAABAAAAAAAAAAAAAAAAAAAAAAAAAAAAAAAAAAAAAAAAAAAAAAAAAAAAAAAAAAAAAAAAAAAAAAAAAAAAAAAAAAAAAAAAAAAAAAAAAAAAAAAAAAAAAAAAAAAAAFAAAADwAAAAAAAAAAAAAAAAAAAkUAAAAAQAAABQAAAAUAAAAFAAAAAEAAAAAAAAAZAAAAGQAAAAAAAAAZAAAAGQAAAAVAAAAYAAAAAAAAAAAAAAADwAAACADAAAAAAAAAAAAAAEAAACgMgAAVgcAAKr4//8BAAAAf39/AAEAAABkAAAAAAAAABQAAABAHwAAAAAAACYAAAAAAAAAwOD//wAAAAAmAAAAZAAAABYAAABMAAAAAAAAAAAAAAAEAAAAAAAAAAEAAACZloMKAAAAACgAAAAoAAAAZAAAAGQAAAAAAAAAzMzMAAAAAABQAAAAUAAAAGQAAABkAAAAAAAAABcAAAAUAAAAAAAAAAAAAAD/fwAA/38AAAAAAAAJAAAABAAAACARESQeAAAAaAAAAAAAAAAAAAAAAAAAAAAAAAAAAAAAECcAABAnAAAAAAAAAAAAAAAAAAAAAAAAAAAAAAAAAAAAAAAAAAAAABQAAAAAAAAAwMD/AAAAAABkAAAAMgAAAAAAAABkAAAAAAAAAH9/fwAKAAAAIgAAABgAAAAAAAAAAAAAAAAAAAAAAAAAAAAAAAAAAAAkAAAAJAAAAAAAAAAHAAAAAAAAAAAAAAAAAAAAAAAAAAAAAAAAAAAAf39/ACUAAABYAAAAAAAAAAAAAAAAAAAAAAAAAAAAAAAAAAAAAAAAAAAAAAAAAAAAAAAAAAAAAAA/AAAAAAAAAKCGAQAAAAAAAAAAAAAAAAAMAAAAAQAAAAAAAAAAAAAAAAAAAB8AAABUAAAAAAAABQAAAAEAAAAAAAAAAAAAAAAAAAAAAAAAAAAAAAAAAAAAAAAAAAAAAAJ/f38AAAAAA8zMzADAwP8Af39/AAAAAAAAAAAAAAAAAAAAAAAAAAAAIQAAABgAAAAUAAAA0AIAAEUOAAAGDAAA8BQAABAAAAAmAAAACAAAAAGAAAAAAAAA"/>
               </a:ext>
             </a:extLst>
           </p:cNvSpPr>
@@ -5215,7 +5215,7 @@
             <a:spLocks noGrp="1" noChangeArrowheads="1"/>
             <a:extLst>
               <a:ext uri="smNativeData">
-                <pr:smNativeData xmlns:pr="smNativeData" xmlns="smNativeData" val="SMDATA_15_mcIdaRMAAAAlAAAAZAAAAA0AAAAAAAAAAAAAAAAAAAAAAAAAAAAAAAAAAAAAAAAAAAEAAABQAAAAAAAAAAAA4D8AAAAAAADgPwAAAAAAAOA/AAAAAAAA4D8AAAAAAADgPwAAAAAAAOA/AAAAAAAA4D8AAAAAAADgPwAAAAAAAOA/AAAAAAAA4D8CAAAAjAAAAAAAAAAAAAAA40oGDP///wgAAAAAAAAAAAAAAAAAAAAAAAAAAAAAAAAAAAAAZAAAAAEAAABAAAAAAAAAAAAAAAAAAAAAAAAAAAAAAAAAAAAAAAAAAAAAAAAAAAAAAAAAAAAAAAAAAAAAAAAAAAAAAAAAAAAAAAAAAAAAAAAAAAAAAAAAAAAAAAAAAAAAFAAAADwAAAAAAAAAAAAAAAAAAAkUAAAAAQAAABQAAAAUAAAAFAAAAAEAAAAAAAAAZAAAAGQAAAAAAAAAZAAAAGQAAAAVAAAAYAAAAAAAAAAAAAAADwAAACADAAAAAAAAAAAAAAEAAACgMgAAVgcAAKr4//8BAAAAf39/AAEAAABkAAAAAAAAABQAAABAHwAAAAAAACYAAAAAAAAAwOD//wAAAAAmAAAAZAAAABYAAABMAAAAAAAAAAAAAAAEAAAAAAAAAAEAAACZloMKAAAAACgAAAAoAAAAZAAAAGQAAAAAAAAAzMzMAAAAAABQAAAAUAAAAGQAAABkAAAAAAAAABcAAAAUAAAAAAAAAAAAAAD/fwAA/38AAAAAAAAJAAAABAAAAAAAAAAeAAAAaAAAAAAAAAAAAAAAAAAAAAAAAAAAAAAAECcAABAnAAAAAAAAAAAAAAAAAAAAAAAAAAAAAAAAAAAAAAAAAAAAABQAAAAAAAAAwMD/AAAAAABkAAAAMgAAAAAAAABkAAAAAAAAAH9/fwAKAAAAIgAAABgAAAAAAAAAAAAAAAAAAAAAAAAAAAAAAAAAAAAkAAAAJAAAAAAAAAAHAAAAAAAAAAAAAAAAAAAAAAAAAAAAAAAAAAAAf39/ACUAAABYAAAAAAAAAAAAAAAAAAAAAAAAAAAAAAAAAAAAAAAAAAAAAAAAAAAAAAAAAAAAAAA/AAAAAAAAAKCGAQAAAAAAAAAAAAAAAAAMAAAAAQAAAAAAAAAAAAAAAAAAAB8AAABUAAAAAAAABQAAAAEAAAAAAAAAAAAAAAAAAAAAAAAAAAAAAAAAAAAAAAAAAAAAAAJ/f38AAAAAA8zMzADAwP8Af39/AAAAAAAAAAAAAAAAAAAAAAAAAAAAIQAAABgAAAAUAAAAjhcAADgEAABwNQAAxgsAABAAAAAmAAAACAAAAAEAAAAAAAAA"/>
+                <pr:smNativeData xmlns:pr="smNativeData" xmlns="smNativeData" val="SMDATA_15_r8odaRMAAAAlAAAAZAAAAA0AAAAAAAAAAAAAAAAAAAAAAAAAAAAAAAAAAAAAAAAAAAEAAABQAAAAAAAAAAAA4D8AAAAAAADgPwAAAAAAAOA/AAAAAAAA4D8AAAAAAADgPwAAAAAAAOA/AAAAAAAA4D8AAAAAAADgPwAAAAAAAOA/AAAAAAAA4D8CAAAAjAAAAAAAAAAAAAAA40oGDP///wgAAAAAAAAAAAAAAAAAAAAAAAAAAAAAAAAAAAAAZAAAAAEAAABAAAAAAAAAAAAAAAAAAAAAAAAAAAAAAAAAAAAAAAAAAAAAAAAAAAAAAAAAAAAAAAAAAAAAAAAAAAAAAAAAAAAAAAAAAAAAAAAAAAAAAAAAAAAAAAAAAAAAFAAAADwAAAAAAAAAAAAAAAAAAAkUAAAAAQAAABQAAAAUAAAAFAAAAAEAAAAAAAAAZAAAAGQAAAAAAAAAZAAAAGQAAAAVAAAAYAAAAAAAAAAAAAAADwAAACADAAAAAAAAAAAAAAEAAACgMgAAVgcAAKr4//8BAAAAf39/AAEAAABkAAAAAAAAABQAAABAHwAAAAAAACYAAAAAAAAAwOD//wAAAAAmAAAAZAAAABYAAABMAAAAAAAAAAAAAAAEAAAAAAAAAAEAAACZloMKAAAAACgAAAAoAAAAZAAAAGQAAAAAAAAAzMzMAAAAAABQAAAAUAAAAGQAAABkAAAAAAAAABcAAAAUAAAAAAAAAAAAAAD/fwAA/38AAAAAAAAJAAAABAAAAAAAAAAeAAAAaAAAAAAAAAAAAAAAAAAAAAAAAAAAAAAAECcAABAnAAAAAAAAAAAAAAAAAAAAAAAAAAAAAAAAAAAAAAAAAAAAABQAAAAAAAAAwMD/AAAAAABkAAAAMgAAAAAAAABkAAAAAAAAAH9/fwAKAAAAIgAAABgAAAAAAAAAAAAAAAAAAAAAAAAAAAAAAAAAAAAkAAAAJAAAAAAAAAAHAAAAAAAAAAAAAAAAAAAAAAAAAAAAAAAAAAAAf39/ACUAAABYAAAAAAAAAAAAAAAAAAAAAAAAAAAAAAAAAAAAAAAAAAAAAAAAAAAAAAAAAAAAAAA/AAAAAAAAAKCGAQAAAAAAAAAAAAAAAAAMAAAAAQAAAAAAAAAAAAAAAAAAAB8AAABUAAAAAAAABQAAAAEAAAAAAAAAAAAAAAAAAAAAAAAAAAAAAAAAAAAAAAAAAAAAAAJ/f38AAAAAA8zMzADAwP8Af39/AAAAAAAAAAAAAAAAAAAAAAAAAAAAIQAAABgAAAAUAAAAjhcAADgEAABwNQAAxgsAABAAAAAmAAAACAAAAAEAAAAAAAAA"/>
               </a:ext>
             </a:extLst>
           </p:cNvSpPr>
@@ -5287,7 +5287,7 @@
             <a:spLocks noGrp="1" noChangeArrowheads="1"/>
             <a:extLst>
               <a:ext uri="smNativeData">
-                <pr:smNativeData xmlns:pr="smNativeData" xmlns="smNativeData" val="SMDATA_15_mcIdaRMAAAAlAAAAZAAAAA0AAAAAAAAAAAAAAAAAAAAAAAAAAAAAAAAAAAAAAAAAAAEAAABQAAAAAAAAAAAA4D8AAAAAAADgPwAAAAAAAOA/AAAAAAAA4D8AAAAAAADgPwAAAAAAAOA/AAAAAAAA4D8AAAAAAADgPwAAAAAAAOA/AAAAAAAA4D8CAAAAjAAAAAAAAAAAAAAA40oGDP///wgAAAAAAAAAAAAAAAAAAAAAAAAAAAAAAAAAAAAAZAAAAAEAAABAAAAAAAAAAAAAAAAAAAAAAAAAAAAAAAAAAAAAAAAAAAAAAAAAAAAAAAAAAAAAAAAAAAAAAAAAAAAAAAAAAAAAAAAAAAAAAAAAAAAAAAAAAAAAAAAAAAAAFAAAADwAAAAAAAAAAAAAAAAAAAkUAAAAAQAAABQAAAAUAAAAFAAAAAEAAAAAAAAAZAAAAGQAAAAAAAAAZAAAAGQAAAAVAAAAYAAAAAAAAAAAAAAADwAAACADAAAAAAAAAAAAAAEAAACgMgAAVgcAAKr4//8BAAAAf39/AAEAAABkAAAAAAAAABQAAABAHwAAAAAAACYAAAAAAAAAwOD//wAAAAAmAAAAZAAAABYAAABMAAAAAAAAAAAAAAAEAAAAAAAAAAEAAACZloMKAAAAACgAAAAoAAAAZAAAAGQAAAAAAAAAzMzMAAAAAABQAAAAUAAAAGQAAABkAAAAAAAAABcAAAAUAAAAAAAAAAAAAAD/fwAA/38AAAAAAAAJAAAABAAAAAAAAAAeAAAAaAAAAAAAAAAAAAAAAAAAAAAAAAAAAAAAECcAABAnAAAAAAAAAAAAAAAAAAAAAAAAAAAAAAAAAAAAAAAAAAAAABQAAAAAAAAAwMD/AAAAAABkAAAAMgAAAAAAAABkAAAAAAAAAH9/fwAKAAAAIgAAABgAAAAAAAAAAAAAAAAAAAAAAAAAAAAAAAAAAAAkAAAAJAAAAAAAAAAHAAAAAAAAAAAAAAAAAAAAAAAAAAAAAAAAAAAAf39/ACUAAABYAAAAAAAAAAAAAAAAAAAAAAAAAAAAAAAAAAAAAAAAAAAAAAAAAAAAAAAAAAAAAAA/AAAAAAAAAKCGAQAAAAAAAAAAAAAAAAAMAAAAAQAAAAAAAAAAAAAAAAAAAB8AAABUAAAAAAAABQAAAAEAAAAAAAAAAAAAAAAAAAAAAAAAAAAAAAAAAAAAAAAAAAAAAAJ/f38AAAAAA8zMzADAwP8Af39/AAAAAAAAAAAAAAAAAAAAAAAAAAAAIQAAABgAAAAUAAAAKw0AAEUOAABgFgAA8BQAABAAAAAmAAAACAAAAAGAAAAAAAAA"/>
+                <pr:smNativeData xmlns:pr="smNativeData" xmlns="smNativeData" val="SMDATA_15_r8odaRMAAAAlAAAAZAAAAA0AAAAAAAAAAAAAAAAAAAAAAAAAAAAAAAAAAAAAAAAAAAEAAABQAAAAAAAAAAAA4D8AAAAAAADgPwAAAAAAAOA/AAAAAAAA4D8AAAAAAADgPwAAAAAAAOA/AAAAAAAA4D8AAAAAAADgPwAAAAAAAOA/AAAAAAAA4D8CAAAAjAAAAAAAAAAAAAAA40oGDP///wgAAAAAAAAAAAAAAAAAAAAAAAAAAAAAAAAAAAAAZAAAAAEAAABAAAAAAAAAAAAAAAAAAAAAAAAAAAAAAAAAAAAAAAAAAAAAAAAAAAAAAAAAAAAAAAAAAAAAAAAAAAAAAAAAAAAAAAAAAAAAAAAAAAAAAAAAAAAAAAAAAAAAFAAAADwAAAAAAAAAAAAAAAAAAAkUAAAAAQAAABQAAAAUAAAAFAAAAAEAAAAAAAAAZAAAAGQAAAAAAAAAZAAAAGQAAAAVAAAAYAAAAAAAAAAAAAAADwAAACADAAAAAAAAAAAAAAEAAACgMgAAVgcAAKr4//8BAAAAf39/AAEAAABkAAAAAAAAABQAAABAHwAAAAAAACYAAAAAAAAAwOD//wAAAAAmAAAAZAAAABYAAABMAAAAAAAAAAAAAAAEAAAAAAAAAAEAAACZloMKAAAAACgAAAAoAAAAZAAAAGQAAAAAAAAAzMzMAAAAAABQAAAAUAAAAGQAAABkAAAAAAAAABcAAAAUAAAAAAAAAAAAAAD/fwAA/38AAAAAAAAJAAAABAAAAAAAAAAeAAAAaAAAAAAAAAAAAAAAAAAAAAAAAAAAAAAAECcAABAnAAAAAAAAAAAAAAAAAAAAAAAAAAAAAAAAAAAAAAAAAAAAABQAAAAAAAAAwMD/AAAAAABkAAAAMgAAAAAAAABkAAAAAAAAAH9/fwAKAAAAIgAAABgAAAAAAAAAAAAAAAAAAAAAAAAAAAAAAAAAAAAkAAAAJAAAAAAAAAAHAAAAAAAAAAAAAAAAAAAAAAAAAAAAAAAAAAAAf39/ACUAAABYAAAAAAAAAAAAAAAAAAAAAAAAAAAAAAAAAAAAAAAAAAAAAAAAAAAAAAAAAAAAAAA/AAAAAAAAAKCGAQAAAAAAAAAAAAAAAAAMAAAAAQAAAAAAAAAAAAAAAAAAAB8AAABUAAAAAAAABQAAAAEAAAAAAAAAAAAAAAAAAAAAAAAAAAAAAAAAAAAAAAAAAAAAAAJ/f38AAAAAA8zMzADAwP8Af39/AAAAAAAAAAAAAAAAAAAAAAAAAAAAIQAAABgAAAAUAAAAKw0AAEUOAABgFgAA8BQAABAAAAAmAAAACAAAAAGAAAAAAAAA"/>
               </a:ext>
             </a:extLst>
           </p:cNvSpPr>
@@ -5361,7 +5361,7 @@
             <a:spLocks noGrp="1" noChangeArrowheads="1"/>
             <a:extLst>
               <a:ext uri="smNativeData">
-                <pr:smNativeData xmlns:pr="smNativeData" xmlns="smNativeData" val="SMDATA_15_mcIdaRMAAAAlAAAAZAAAAA0AAAAAAAAAAAAAAAAAAAAAAAAAAAAAAAAAAAAAAAAAAAEAAABQAAAAAAAAAAAA4D8AAAAAAADgPwAAAAAAAOA/AAAAAAAA4D8AAAAAAADgPwAAAAAAAOA/AAAAAAAA4D8AAAAAAADgPwAAAAAAAOA/AAAAAAAA4D8CAAAAjAAAAAAAAAAAAAAA40oGDP///wgAAAAAAAAAAAAAAAAAAAAAAAAAAAAAAAAAAAAAZAAAAAEAAABAAAAAAAAAAAAAAAAAAAAAAAAAAAAAAAAAAAAAAAAAAAAAAAAAAAAAAAAAAAAAAAAAAAAAAAAAAAAAAAAAAAAAAAAAAAAAAAAAAAAAAAAAAAAAAAAAAAAAFAAAADwAAAAAAAAAAAAAAAAAAAkUAAAAAQAAABQAAAAUAAAAFAAAAAEAAAAAAAAAZAAAAGQAAAAAAAAAZAAAAGQAAAAVAAAAYAAAAAAAAAAAAAAADwAAACADAAAAAAAAAAAAAAEAAACgMgAAVgcAAKr4//8BAAAAf39/AAEAAABkAAAAAAAAABQAAABAHwAAAAAAACYAAAAAAAAAwOD//wAAAAAmAAAAZAAAABYAAABMAAAAAAAAAAAAAAAEAAAAAAAAAAEAAACZloMKAAAAACgAAAAoAAAAZAAAAGQAAAAAAAAAzMzMAAAAAABQAAAAUAAAAGQAAABkAAAAAAAAABcAAAAUAAAAAAAAAAAAAAD/fwAA/38AAAAAAAAJAAAABAAAAAAAAAAeAAAAaAAAAAAAAAAAAAAAAAAAAAAAAAAAAAAAECcAABAnAAAAAAAAAAAAAAAAAAAAAAAAAAAAAAAAAAAAAAAAAAAAABQAAAAAAAAAwMD/AAAAAABkAAAAMgAAAAAAAABkAAAAAAAAAH9/fwAKAAAAIgAAABgAAAAAAAAAAAAAAAAAAAAAAAAAAAAAAAAAAAAkAAAAJAAAAAAAAAAHAAAAAAAAAAAAAAAAAAAAAAAAAAAAAAAAAAAAf39/ACUAAABYAAAAAAAAAAAAAAAAAAAAAAAAAAAAAAAAAAAAAAAAAAAAAAAAAAAAAAAAAAAAAAA/AAAAAAAAAKCGAQAAAAAAAAAAAAAAAAAMAAAAAQAAAAAAAAAAAAAAAAAAAB8AAABUAAAAAAAABQAAAAEAAAAAAAAAAAAAAAAAAAAAAAAAAAAAAAAAAAAAAAAAAAAAAAJ/f38AAAAAA8zMzADAwP8Af39/AAAAAAAAAAAAAAAAAAAAAAAAAAAAIQAAABgAAAAUAAAAhRcAAEUOAAC7IAAA8BQAABAAAAAmAAAACAAAAAGAAAAAAAAA"/>
+                <pr:smNativeData xmlns:pr="smNativeData" xmlns="smNativeData" val="SMDATA_15_r8odaRMAAAAlAAAAZAAAAA0AAAAAAAAAAAAAAAAAAAAAAAAAAAAAAAAAAAAAAAAAAAEAAABQAAAAAAAAAAAA4D8AAAAAAADgPwAAAAAAAOA/AAAAAAAA4D8AAAAAAADgPwAAAAAAAOA/AAAAAAAA4D8AAAAAAADgPwAAAAAAAOA/AAAAAAAA4D8CAAAAjAAAAAAAAAAAAAAA40oGDP///wgAAAAAAAAAAAAAAAAAAAAAAAAAAAAAAAAAAAAAZAAAAAEAAABAAAAAAAAAAAAAAAAAAAAAAAAAAAAAAAAAAAAAAAAAAAAAAAAAAAAAAAAAAAAAAAAAAAAAAAAAAAAAAAAAAAAAAAAAAAAAAAAAAAAAAAAAAAAAAAAAAAAAFAAAADwAAAAAAAAAAAAAAAAAAAkUAAAAAQAAABQAAAAUAAAAFAAAAAEAAAAAAAAAZAAAAGQAAAAAAAAAZAAAAGQAAAAVAAAAYAAAAAAAAAAAAAAADwAAACADAAAAAAAAAAAAAAEAAACgMgAAVgcAAKr4//8BAAAAf39/AAEAAABkAAAAAAAAABQAAABAHwAAAAAAACYAAAAAAAAAwOD//wAAAAAmAAAAZAAAABYAAABMAAAAAAAAAAAAAAAEAAAAAAAAAAEAAACZloMKAAAAACgAAAAoAAAAZAAAAGQAAAAAAAAAzMzMAAAAAABQAAAAUAAAAGQAAABkAAAAAAAAABcAAAAUAAAAAAAAAAAAAAD/fwAA/38AAAAAAAAJAAAABAAAAAAAAAAeAAAAaAAAAAAAAAAAAAAAAAAAAAAAAAAAAAAAECcAABAnAAAAAAAAAAAAAAAAAAAAAAAAAAAAAAAAAAAAAAAAAAAAABQAAAAAAAAAwMD/AAAAAABkAAAAMgAAAAAAAABkAAAAAAAAAH9/fwAKAAAAIgAAABgAAAAAAAAAAAAAAAAAAAAAAAAAAAAAAAAAAAAkAAAAJAAAAAAAAAAHAAAAAAAAAAAAAAAAAAAAAAAAAAAAAAAAAAAAf39/ACUAAABYAAAAAAAAAAAAAAAAAAAAAAAAAAAAAAAAAAAAAAAAAAAAAAAAAAAAAAAAAAAAAAA/AAAAAAAAAKCGAQAAAAAAAAAAAAAAAAAMAAAAAQAAAAAAAAAAAAAAAAAAAB8AAABUAAAAAAAABQAAAAEAAAAAAAAAAAAAAAAAAAAAAAAAAAAAAAAAAAAAAAAAAAAAAAJ/f38AAAAAA8zMzADAwP8Af39/AAAAAAAAAAAAAAAAAAAAAAAAAAAAIQAAABgAAAAUAAAAhRcAAEUOAAC7IAAA8BQAABAAAAAmAAAACAAAAAGAAAAAAAAA"/>
               </a:ext>
             </a:extLst>
           </p:cNvSpPr>
@@ -5435,7 +5435,7 @@
             <a:spLocks noGrp="1" noChangeArrowheads="1"/>
             <a:extLst>
               <a:ext uri="smNativeData">
-                <pr:smNativeData xmlns:pr="smNativeData" xmlns="smNativeData" val="SMDATA_15_mcIdaRMAAAAlAAAAZAAAAA0AAAAAAAAAAAAAAAAAAAAAAAAAAAAAAAAAAAAAAAAAAAEAAABQAAAAAAAAAAAA4D8AAAAAAADgPwAAAAAAAOA/AAAAAAAA4D8AAAAAAADgPwAAAAAAAOA/AAAAAAAA4D8AAAAAAADgPwAAAAAAAOA/AAAAAAAA4D8CAAAAjAAAAAAAAAAAAAAA40oGDP///wgAAAAAAAAAAAAAAAAAAAAAAAAAAAAAAAAAAAAAZAAAAAEAAABAAAAAAAAAAAAAAAAAAAAAAAAAAAAAAAAAAAAAAAAAAAAAAAAAAAAAAAAAAAAAAAAAAAAAAAAAAAAAAAAAAAAAAAAAAAAAAAAAAAAAAAAAAAAAAAAAAAAAFAAAADwAAAAAAAAAAAAAAAAAAAkUAAAAAQAAABQAAAAUAAAAFAAAAAEAAAAAAAAAZAAAAGQAAAAAAAAAZAAAAGQAAAAVAAAAYAAAAAAAAAAAAAAADwAAACADAAAAAAAAAAAAAAEAAACgMgAAVgcAAKr4//8BAAAAf39/AAEAAABkAAAAAAAAABQAAABAHwAAAAAAACYAAAAAAAAAwOD//wAAAAAmAAAAZAAAABYAAABMAAAAAAAAAAAAAAAEAAAAAAAAAAEAAACZloMKAAAAACgAAAAoAAAAZAAAAGQAAAAAAAAAzMzMAAAAAABQAAAAUAAAAGQAAABkAAAAAAAAABcAAAAUAAAAAAAAAAAAAAD/fwAA/38AAAAAAAAJAAAABAAAAAAAAAAeAAAAaAAAAAAAAAAAAAAAAAAAAAAAAAAAAAAAECcAABAnAAAAAAAAAAAAAAAAAAAAAAAAAAAAAAAAAAAAAAAAAAAAABQAAAAAAAAAwMD/AAAAAABkAAAAMgAAAAAAAABkAAAAAAAAAH9/fwAKAAAAIgAAABgAAAAAAAAAAAAAAAAAAAAAAAAAAAAAAAAAAAAkAAAAJAAAAAAAAAAHAAAAAAAAAAAAAAAAAAAAAAAAAAAAAAAAAAAAf39/ACUAAABYAAAAAAAAAAAAAAAAAAAAAAAAAAAAAAAAAAAAAAAAAAAAAAAAAAAAAAAAAAAAAAA/AAAAAAAAAKCGAQAAAAAAAAAAAAAAAAAMAAAAAQAAAAAAAAAAAAAAAAAAAB8AAABUAAAAAAAABQAAAAEAAAAAAAAAAAAAAAAAAAAAAAAAAAAAAAAAAAAAAAAAAAAAAAJ/f38AAAAAA8zMzADAwP8Af39/AAAAAAAAAAAAAAAAAAAAAAAAAAAAIQAAABgAAAAUAAAA4CEAAEUOAAAVKwAA8BQAABAAAAAmAAAACAAAAAGAAAAAAAAA"/>
+                <pr:smNativeData xmlns:pr="smNativeData" xmlns="smNativeData" val="SMDATA_15_r8odaRMAAAAlAAAAZAAAAA0AAAAAAAAAAAAAAAAAAAAAAAAAAAAAAAAAAAAAAAAAAAEAAABQAAAAAAAAAAAA4D8AAAAAAADgPwAAAAAAAOA/AAAAAAAA4D8AAAAAAADgPwAAAAAAAOA/AAAAAAAA4D8AAAAAAADgPwAAAAAAAOA/AAAAAAAA4D8CAAAAjAAAAAAAAAAAAAAA40oGDP///wgAAAAAAAAAAAAAAAAAAAAAAAAAAAAAAAAAAAAAZAAAAAEAAABAAAAAAAAAAAAAAAAAAAAAAAAAAAAAAAAAAAAAAAAAAAAAAAAAAAAAAAAAAAAAAAAAAAAAAAAAAAAAAAAAAAAAAAAAAAAAAAAAAAAAAAAAAAAAAAAAAAAAFAAAADwAAAAAAAAAAAAAAAAAAAkUAAAAAQAAABQAAAAUAAAAFAAAAAEAAAAAAAAAZAAAAGQAAAAAAAAAZAAAAGQAAAAVAAAAYAAAAAAAAAAAAAAADwAAACADAAAAAAAAAAAAAAEAAACgMgAAVgcAAKr4//8BAAAAf39/AAEAAABkAAAAAAAAABQAAABAHwAAAAAAACYAAAAAAAAAwOD//wAAAAAmAAAAZAAAABYAAABMAAAAAAAAAAAAAAAEAAAAAAAAAAEAAACZloMKAAAAACgAAAAoAAAAZAAAAGQAAAAAAAAAzMzMAAAAAABQAAAAUAAAAGQAAABkAAAAAAAAABcAAAAUAAAAAAAAAAAAAAD/fwAA/38AAAAAAAAJAAAABAAAAAAAAAAeAAAAaAAAAAAAAAAAAAAAAAAAAAAAAAAAAAAAECcAABAnAAAAAAAAAAAAAAAAAAAAAAAAAAAAAAAAAAAAAAAAAAAAABQAAAAAAAAAwMD/AAAAAABkAAAAMgAAAAAAAABkAAAAAAAAAH9/fwAKAAAAIgAAABgAAAAAAAAAAAAAAAAAAAAAAAAAAAAAAAAAAAAkAAAAJAAAAAAAAAAHAAAAAAAAAAAAAAAAAAAAAAAAAAAAAAAAAAAAf39/ACUAAABYAAAAAAAAAAAAAAAAAAAAAAAAAAAAAAAAAAAAAAAAAAAAAAAAAAAAAAAAAAAAAAA/AAAAAAAAAKCGAQAAAAAAAAAAAAAAAAAMAAAAAQAAAAAAAAAAAAAAAAAAAB8AAABUAAAAAAAABQAAAAEAAAAAAAAAAAAAAAAAAAAAAAAAAAAAAAAAAAAAAAAAAAAAAAJ/f38AAAAAA8zMzADAwP8Af39/AAAAAAAAAAAAAAAAAAAAAAAAAAAAIQAAABgAAAAUAAAA4CEAAEUOAAAVKwAA8BQAABAAAAAmAAAACAAAAAGAAAAAAAAA"/>
               </a:ext>
             </a:extLst>
           </p:cNvSpPr>
@@ -5509,7 +5509,7 @@
             <a:spLocks noGrp="1" noChangeArrowheads="1"/>
             <a:extLst>
               <a:ext uri="smNativeData">
-                <pr:smNativeData xmlns:pr="smNativeData" xmlns="smNativeData" val="SMDATA_15_mcIdaRMAAAAlAAAAZAAAAA0AAAAAAAAAAAAAAAAAAAAAAAAAAAAAAAAAAAAAAAAAAAEAAABQAAAAAAAAAAAA4D8AAAAAAADgPwAAAAAAAOA/AAAAAAAA4D8AAAAAAADgPwAAAAAAAOA/AAAAAAAA4D8AAAAAAADgPwAAAAAAAOA/AAAAAAAA4D8CAAAAjAAAAAAAAAAAAAAA40oGDP///wgAAAAAAAAAAAAAAAAAAAAAAAAAAAAAAAAAAAAAZAAAAAEAAABAAAAAAAAAAAAAAAAAAAAAAAAAAAAAAAAAAAAAAAAAAAAAAAAAAAAAAAAAAAAAAAAAAAAAAAAAAAAAAAAAAAAAAAAAAAAAAAAAAAAAAAAAAAAAAAAAAAAAFAAAADwAAAAAAAAAAAAAAAAAAAkUAAAAAQAAABQAAAAUAAAAFAAAAAEAAAAAAAAAZAAAAGQAAAAAAAAAZAAAAGQAAAAVAAAAYAAAAAAAAAAAAAAADwAAACADAAAAAAAAAAAAAAEAAACgMgAAVgcAAKr4//8BAAAAf39/AAEAAABkAAAAAAAAABQAAABAHwAAAAAAACYAAAAAAAAAwOD//wAAAAAmAAAAZAAAABYAAABMAAAAAAAAAAAAAAAEAAAAAAAAAAEAAACZloMKAAAAACgAAAAoAAAAZAAAAGQAAAAAAAAAzMzMAAAAAABQAAAAUAAAAGQAAABkAAAAAAAAABcAAAAUAAAAAAAAAAAAAAD/fwAA/38AAAAAAAAJAAAABAAAAAAAAAAeAAAAaAAAAAAAAAAAAAAAAAAAAAAAAAAAAAAAECcAABAnAAAAAAAAAAAAAAAAAAAAAAAAAAAAAAAAAAAAAAAAAAAAABQAAAAAAAAAwMD/AAAAAABkAAAAMgAAAAAAAABkAAAAAAAAAH9/fwAKAAAAIgAAABgAAAAAAAAAAAAAAAAAAAAAAAAAAAAAAAAAAAAkAAAAJAAAAAAAAAAHAAAAAAAAAAAAAAAAAAAAAAAAAAAAAAAAAAAAf39/ACUAAABYAAAAAAAAAAAAAAAAAAAAAAAAAAAAAAAAAAAAAAAAAAAAAAAAAAAAAAAAAAAAAAA/AAAAAAAAAKCGAQAAAAAAAAAAAAAAAAAMAAAAAQAAAAAAAAAAAAAAAAAAAB8AAABUAAAAAAAABQAAAAEAAAAAAAAAAAAAAAAAAAAAAAAAAAAAAAAAAAAAAAAAAAAAAAJ/f38AAAAAA8zMzADAwP8Af39/AAAAAAAAAAAAAAAAAAAAAAAAAAAAIQAAABgAAAAUAAAAOiwAAEUOAABwNQAA8BQAABAAAAAmAAAACAAAAAGAAAAAAAAA"/>
+                <pr:smNativeData xmlns:pr="smNativeData" xmlns="smNativeData" val="SMDATA_15_r8odaRMAAAAlAAAAZAAAAA0AAAAAAAAAAAAAAAAAAAAAAAAAAAAAAAAAAAAAAAAAAAEAAABQAAAAAAAAAAAA4D8AAAAAAADgPwAAAAAAAOA/AAAAAAAA4D8AAAAAAADgPwAAAAAAAOA/AAAAAAAA4D8AAAAAAADgPwAAAAAAAOA/AAAAAAAA4D8CAAAAjAAAAAAAAAAAAAAA40oGDP///wgAAAAAAAAAAAAAAAAAAAAAAAAAAAAAAAAAAAAAZAAAAAEAAABAAAAAAAAAAAAAAAAAAAAAAAAAAAAAAAAAAAAAAAAAAAAAAAAAAAAAAAAAAAAAAAAAAAAAAAAAAAAAAAAAAAAAAAAAAAAAAAAAAAAAAAAAAAAAAAAAAAAAFAAAADwAAAAAAAAAAAAAAAAAAAkUAAAAAQAAABQAAAAUAAAAFAAAAAEAAAAAAAAAZAAAAGQAAAAAAAAAZAAAAGQAAAAVAAAAYAAAAAAAAAAAAAAADwAAACADAAAAAAAAAAAAAAEAAACgMgAAVgcAAKr4//8BAAAAf39/AAEAAABkAAAAAAAAABQAAABAHwAAAAAAACYAAAAAAAAAwOD//wAAAAAmAAAAZAAAABYAAABMAAAAAAAAAAAAAAAEAAAAAAAAAAEAAACZloMKAAAAACgAAAAoAAAAZAAAAGQAAAAAAAAAzMzMAAAAAABQAAAAUAAAAGQAAABkAAAAAAAAABcAAAAUAAAAAAAAAAAAAAD/fwAA/38AAAAAAAAJAAAABAAAAAAAAAAeAAAAaAAAAAAAAAAAAAAAAAAAAAAAAAAAAAAAECcAABAnAAAAAAAAAAAAAAAAAAAAAAAAAAAAAAAAAAAAAAAAAAAAABQAAAAAAAAAwMD/AAAAAABkAAAAMgAAAAAAAABkAAAAAAAAAH9/fwAKAAAAIgAAABgAAAAAAAAAAAAAAAAAAAAAAAAAAAAAAAAAAAAkAAAAJAAAAAAAAAAHAAAAAAAAAAAAAAAAAAAAAAAAAAAAAAAAAAAAf39/ACUAAABYAAAAAAAAAAAAAAAAAAAAAAAAAAAAAAAAAAAAAAAAAAAAAAAAAAAAAAAAAAAAAAA/AAAAAAAAAKCGAQAAAAAAAAAAAAAAAAAMAAAAAQAAAAAAAAAAAAAAAAAAAB8AAABUAAAAAAAABQAAAAEAAAAAAAAAAAAAAAAAAAAAAAAAAAAAAAAAAAAAAAAAAAAAAAJ/f38AAAAAA8zMzADAwP8Af39/AAAAAAAAAAAAAAAAAAAAAAAAAAAAIQAAABgAAAAUAAAAOiwAAEUOAABwNQAA8BQAABAAAAAmAAAACAAAAAGAAAAAAAAA"/>
               </a:ext>
             </a:extLst>
           </p:cNvSpPr>
@@ -5583,7 +5583,7 @@
             <a:spLocks noGrp="1" noChangeArrowheads="1"/>
             <a:extLst>
               <a:ext uri="smNativeData">
-                <pr:smNativeData xmlns:pr="smNativeData" xmlns="smNativeData" val="SMDATA_15_mcIdaRMAAAAlAAAAZAAAAA0AAAAAAAAAAAAAAAAAAAAAAAAAAAAAAAACAAAAAAAAAAEAAABQAAAAAAAAAAAA4D8AAAAAAADgPwAAAAAAAOA/AAAAAAAA4D8AAAAAAADgPwAAAAAAAOA/AAAAAAAA4D8AAAAAAADgPwAAAAAAAOA/AAAAAAAA4D8CAAAAjAAAAAAAAAAAAAAA40oGDP///wgAAAAAAAAAAAAAAAAAAAAAAAAAAAAAAAAAAAAAZAAAAAEAAABAAAAAAAAAAAAAAAAAAAAAAAAAAAAAAAAAAAAAAAAAAAAAAAAAAAAAAAAAAAAAAAAAAAAAAAAAAAAAAAAAAAAAAAAAAAAAAAAAAAAAAAAAAAAAAAAAAAAAFAAAADwAAAAAAAAAAAAAAAAAAAkUAAAAAQAAABQAAAAUAAAAFAAAAAEAAAAAAAAAZAAAAGQAAAAAAAAAZAAAAGQAAAAVAAAAYAAAAAAAAAAAAAAADwAAACADAAAAAAAAAAAAAAEAAACgMgAAVgcAAKr4//8BAAAAf39/AAEAAABkAAAAAAAAABQAAABAHwAAAAAAACYAAAAAAAAAwOD//wAAAAAmAAAAZAAAABYAAABMAAAAAAAAAAAAAAAEAAAAAAAAAAEAAACZloMKAAAAACgAAAAoAAAAZAAAAGQAAAAAAAAAzMzMAAAAAABQAAAAUAAAAGQAAABkAAAAAAAAABcAAAAUAAAAAAAAAAAAAAD/fwAA/38AAAAAAAAJAAAABAAAAAAAAAAeAAAAaAAAAAAAAAAAAAAAAAAAAAAAAAAAAAAAECcAABAnAAAAAAAAAAAAAAAAAAAAAAAAAAAAAAAAAAAAAAAAAAAAABQAAAAAAAAAwMD/AAAAAABkAAAAMgAAAAAAAABkAAAAAAAAAH9/fwAKAAAAIgAAABgAAAAAAAAAAAAAAAAAAAAAAAAAAAAAAAAAAAAkAAAAJAAAAAAAAAAHAAAAAAAAAAAAAAAAAAAAAAAAAAAAAAAAAAAAf39/ACUAAABYAAAAAAAAAAAAAAAAAAAAAAAAAAAAAAAAAAAAAAAAAAAAAAAAAAAAAAAAAAAAAAA/AAAAAAAAAKCGAQAAAAAAAAAAAAAAAAAMAAAAAQAAAAAAAAAAAAAAAAAAAB8AAABUAAAAAAAABQAAAAEAAAAAAAAAAAAAAAAAAAAAAAAAAAAAAAAAAAAAAAAAAAAAAAJ/f38AAAAAA8zMzADAwP8Af39/AAAAAAAAAAAAAAAAAAAAAAAAAAAAIQAAABgAAAAUAAAA0AIAALUNAAAGDAAAhg8AABAAAAAmAAAACAAAAIGgAAAAAAAA"/>
+                <pr:smNativeData xmlns:pr="smNativeData" xmlns="smNativeData" val="SMDATA_15_r8odaRMAAAAlAAAAZAAAAA0AAAAAAAAAAAAAAAAAAAAAAAAAAAAAAAACAAAAAAAAAAEAAABQAAAAAAAAAAAA4D8AAAAAAADgPwAAAAAAAOA/AAAAAAAA4D8AAAAAAADgPwAAAAAAAOA/AAAAAAAA4D8AAAAAAADgPwAAAAAAAOA/AAAAAAAA4D8CAAAAjAAAAAAAAAAAAAAA40oGDP///wgAAAAAAAAAAAAAAAAAAAAAAAAAAAAAAAAAAAAAZAAAAAEAAABAAAAAAAAAAAAAAAAAAAAAAAAAAAAAAAAAAAAAAAAAAAAAAAAAAAAAAAAAAAAAAAAAAAAAAAAAAAAAAAAAAAAAAAAAAAAAAAAAAAAAAAAAAAAAAAAAAAAAFAAAADwAAAAAAAAAAAAAAAAAAAkUAAAAAQAAABQAAAAUAAAAFAAAAAEAAAAAAAAAZAAAAGQAAAAAAAAAZAAAAGQAAAAVAAAAYAAAAAAAAAAAAAAADwAAACADAAAAAAAAAAAAAAEAAACgMgAAVgcAAKr4//8BAAAAf39/AAEAAABkAAAAAAAAABQAAABAHwAAAAAAACYAAAAAAAAAwOD//wAAAAAmAAAAZAAAABYAAABMAAAAAAAAAAAAAAAEAAAAAAAAAAEAAACZloMKAAAAACgAAAAoAAAAZAAAAGQAAAAAAAAAzMzMAAAAAABQAAAAUAAAAGQAAABkAAAAAAAAABcAAAAUAAAAAAAAAAAAAAD/fwAA/38AAAAAAAAJAAAABAAAAAAAAAAeAAAAaAAAAAAAAAAAAAAAAAAAAAAAAAAAAAAAECcAABAnAAAAAAAAAAAAAAAAAAAAAAAAAAAAAAAAAAAAAAAAAAAAABQAAAAAAAAAwMD/AAAAAABkAAAAMgAAAAAAAABkAAAAAAAAAH9/fwAKAAAAIgAAABgAAAAAAAAAAAAAAAAAAAAAAAAAAAAAAAAAAAAkAAAAJAAAAAAAAAAHAAAAAAAAAAAAAAAAAAAAAAAAAAAAAAAAAAAAf39/ACUAAABYAAAAAAAAAAAAAAAAAAAAAAAAAAAAAAAAAAAAAAAAAAAAAAAAAAAAAAAAAAAAAAA/AAAAAAAAAKCGAQAAAAAAAAAAAAAAAAAMAAAAAQAAAAAAAAAAAAAAAAAAAB8AAABUAAAAAAAABQAAAAEAAAAAAAAAAAAAAAAAAAAAAAAAAAAAAAAAAAAAAAAAAAAAAAJ/f38AAAAAA8zMzADAwP8Af39/AAAAAAAAAAAAAAAAAAAAAAAAAAAAIQAAABgAAAAUAAAA0AIAALUNAAAGDAAAhg8AABAAAAAmAAAACAAAAIGgAAAAAAAA"/>
               </a:ext>
             </a:extLst>
           </p:cNvSpPr>
@@ -5661,7 +5661,7 @@
             <a:spLocks noGrp="1" noChangeArrowheads="1"/>
             <a:extLst>
               <a:ext uri="smNativeData">
-                <pr:smNativeData xmlns:pr="smNativeData" xmlns="smNativeData" val="SMDATA_15_mcIdaRMAAAAlAAAAZAAAAA0AAAAAAAAAAAAAAAAAAAAAAAAAAAAAAAACAAAAAAAAAAEAAABQAAAAAAAAAAAA4D8AAAAAAADgPwAAAAAAAOA/AAAAAAAA4D8AAAAAAADgPwAAAAAAAOA/AAAAAAAA4D8AAAAAAADgPwAAAAAAAOA/AAAAAAAA4D8CAAAAjAAAAAAAAAAAAAAA40oGDP///wgAAAAAAAAAAAAAAAAAAAAAAAAAAAAAAAAAAAAAZAAAAAEAAABAAAAAAAAAAAAAAAAAAAAAAAAAAAAAAAAAAAAAAAAAAAAAAAAAAAAAAAAAAAAAAAAAAAAAAAAAAAAAAAAAAAAAAAAAAAAAAAAAAAAAAAAAAAAAAAAAAAAAFAAAADwAAAAAAAAAAAAAAAAAAAkUAAAAAQAAABQAAAAUAAAAFAAAAAEAAAAAAAAAZAAAAGQAAAAAAAAAZAAAAGQAAAAVAAAAYAAAAAAAAAAAAAAADwAAACADAAAAAAAAAAAAAAEAAACgMgAAVgcAAKr4//8BAAAAf39/AAEAAABkAAAAAAAAABQAAABAHwAAAAAAACYAAAAAAAAAwOD//wAAAAAmAAAAZAAAABYAAABMAAAAAAAAAAAAAAAEAAAAAAAAAAEAAACZloMKAAAAACgAAAAoAAAAZAAAAGQAAAAAAAAAzMzMAAAAAABQAAAAUAAAAGQAAABkAAAAAAAAABcAAAAUAAAAAAAAAAAAAAD/fwAA/38AAAAAAAAJAAAABAAAAAAAAAAeAAAAaAAAAAAAAAAAAAAAAAAAAAAAAAAAAAAAECcAABAnAAAAAAAAAAAAAAAAAAAAAAAAAAAAAAAAAAAAAAAAAAAAABQAAAAAAAAAwMD/AAAAAABkAAAAMgAAAAAAAABkAAAAAAAAAH9/fwAKAAAAIgAAABgAAAAAAAAAAAAAAAAAAAAAAAAAAAAAAAAAAAAkAAAAJAAAAAAAAAAHAAAAAAAAAAAAAAAAAAAAAAAAAAAAAAAAAAAAf39/ACUAAABYAAAAAAAAAAAAAAAAAAAAAAAAAAAAAAAAAAAAAAAAAAAAAAAAAAAAAAAAAAAAAAA/AAAAAAAAAKCGAQAAAAAAAAAAAAAAAAAMAAAAAQAAAAAAAAAAAAAAAAAAAB8AAABUAAAAAAAABQAAAAEAAAAAAAAAAAAAAAAAAAAAAAAAAAAAAAAAAAAAAAAAAAAAAAJ/f38AAAAAA8zMzADAwP8Af39/AAAAAAAAAAAAAAAAAAAAAAAAAAAAIQAAABgAAAAUAAAAKw0AALUNAABgFgAAhg8AABAAAAAmAAAACAAAAIGgAAAAAAAA"/>
+                <pr:smNativeData xmlns:pr="smNativeData" xmlns="smNativeData" val="SMDATA_15_r8odaRMAAAAlAAAAZAAAAA0AAAAAAAAAAAAAAAAAAAAAAAAAAAAAAAACAAAAAAAAAAEAAABQAAAAAAAAAAAA4D8AAAAAAADgPwAAAAAAAOA/AAAAAAAA4D8AAAAAAADgPwAAAAAAAOA/AAAAAAAA4D8AAAAAAADgPwAAAAAAAOA/AAAAAAAA4D8CAAAAjAAAAAAAAAAAAAAA40oGDP///wgAAAAAAAAAAAAAAAAAAAAAAAAAAAAAAAAAAAAAZAAAAAEAAABAAAAAAAAAAAAAAAAAAAAAAAAAAAAAAAAAAAAAAAAAAAAAAAAAAAAAAAAAAAAAAAAAAAAAAAAAAAAAAAAAAAAAAAAAAAAAAAAAAAAAAAAAAAAAAAAAAAAAFAAAADwAAAAAAAAAAAAAAAAAAAkUAAAAAQAAABQAAAAUAAAAFAAAAAEAAAAAAAAAZAAAAGQAAAAAAAAAZAAAAGQAAAAVAAAAYAAAAAAAAAAAAAAADwAAACADAAAAAAAAAAAAAAEAAACgMgAAVgcAAKr4//8BAAAAf39/AAEAAABkAAAAAAAAABQAAABAHwAAAAAAACYAAAAAAAAAwOD//wAAAAAmAAAAZAAAABYAAABMAAAAAAAAAAAAAAAEAAAAAAAAAAEAAACZloMKAAAAACgAAAAoAAAAZAAAAGQAAAAAAAAAzMzMAAAAAABQAAAAUAAAAGQAAABkAAAAAAAAABcAAAAUAAAAAAAAAAAAAAD/fwAA/38AAAAAAAAJAAAABAAAAAAAAAAeAAAAaAAAAAAAAAAAAAAAAAAAAAAAAAAAAAAAECcAABAnAAAAAAAAAAAAAAAAAAAAAAAAAAAAAAAAAAAAAAAAAAAAABQAAAAAAAAAwMD/AAAAAABkAAAAMgAAAAAAAABkAAAAAAAAAH9/fwAKAAAAIgAAABgAAAAAAAAAAAAAAAAAAAAAAAAAAAAAAAAAAAAkAAAAJAAAAAAAAAAHAAAAAAAAAAAAAAAAAAAAAAAAAAAAAAAAAAAAf39/ACUAAABYAAAAAAAAAAAAAAAAAAAAAAAAAAAAAAAAAAAAAAAAAAAAAAAAAAAAAAAAAAAAAAA/AAAAAAAAAKCGAQAAAAAAAAAAAAAAAAAMAAAAAQAAAAAAAAAAAAAAAAAAAB8AAABUAAAAAAAABQAAAAEAAAAAAAAAAAAAAAAAAAAAAAAAAAAAAAAAAAAAAAAAAAAAAAJ/f38AAAAAA8zMzADAwP8Af39/AAAAAAAAAAAAAAAAAAAAAAAAAAAAIQAAABgAAAAUAAAAKw0AALUNAABgFgAAhg8AABAAAAAmAAAACAAAAIGgAAAAAAAA"/>
               </a:ext>
             </a:extLst>
           </p:cNvSpPr>
@@ -5739,7 +5739,7 @@
             <a:spLocks noGrp="1" noChangeArrowheads="1"/>
             <a:extLst>
               <a:ext uri="smNativeData">
-                <pr:smNativeData xmlns:pr="smNativeData" xmlns="smNativeData" val="SMDATA_15_mcIdaRMAAAAlAAAAZAAAAA0AAAAAAAAAAAAAAAAAAAAAAAAAAAAAAAACAAAAAAAAAAEAAABQAAAAAAAAAAAA4D8AAAAAAADgPwAAAAAAAOA/AAAAAAAA4D8AAAAAAADgPwAAAAAAAOA/AAAAAAAA4D8AAAAAAADgPwAAAAAAAOA/AAAAAAAA4D8CAAAAjAAAAAAAAAAAAAAA40oGDP///wgAAAAAAAAAAAAAAAAAAAAAAAAAAAAAAAAAAAAAZAAAAAEAAABAAAAAAAAAAAAAAAAAAAAAAAAAAAAAAAAAAAAAAAAAAAAAAAAAAAAAAAAAAAAAAAAAAAAAAAAAAAAAAAAAAAAAAAAAAAAAAAAAAAAAAAAAAAAAAAAAAAAAFAAAADwAAAAAAAAAAAAAAAAAAAkUAAAAAQAAABQAAAAUAAAAFAAAAAEAAAAAAAAAZAAAAGQAAAAAAAAAZAAAAGQAAAAVAAAAYAAAAAAAAAAAAAAADwAAACADAAAAAAAAAAAAAAEAAACgMgAAVgcAAKr4//8BAAAAf39/AAEAAABkAAAAAAAAABQAAABAHwAAAAAAACYAAAAAAAAAwOD//wAAAAAmAAAAZAAAABYAAABMAAAAAAAAAAAAAAAEAAAAAAAAAAEAAACZloMKAAAAACgAAAAoAAAAZAAAAGQAAAAAAAAAzMzMAAAAAABQAAAAUAAAAGQAAABkAAAAAAAAABcAAAAUAAAAAAAAAAAAAAD/fwAA/38AAAAAAAAJAAAABAAAAAAAAAAeAAAAaAAAAAAAAAAAAAAAAAAAAAAAAAAAAAAAECcAABAnAAAAAAAAAAAAAAAAAAAAAAAAAAAAAAAAAAAAAAAAAAAAABQAAAAAAAAAwMD/AAAAAABkAAAAMgAAAAAAAABkAAAAAAAAAH9/fwAKAAAAIgAAABgAAAAAAAAAAAAAAAAAAAAAAAAAAAAAAAAAAAAkAAAAJAAAAAAAAAAHAAAAAAAAAAAAAAAAAAAAAAAAAAAAAAAAAAAAf39/ACUAAABYAAAAAAAAAAAAAAAAAAAAAAAAAAAAAAAAAAAAAAAAAAAAAAAAAAAAAAAAAAAAAAA/AAAAAAAAAKCGAQAAAAAAAAAAAAAAAAAMAAAAAQAAAAAAAAAAAAAAAAAAAB8AAABUAAAAAAAABQAAAAEAAAAAAAAAAAAAAAAAAAAAAAAAAAAAAAAAAAAAAAAAAAAAAAJ/f38AAAAAA8zMzADAwP8Af39/AAAAAAAAAAAAAAAAAAAAAAAAAAAAIQAAABgAAAAUAAAAhRcAALUNAAC7IAAAhg8AABAAAAAmAAAACAAAAIGgAAAAAAAA"/>
+                <pr:smNativeData xmlns:pr="smNativeData" xmlns="smNativeData" val="SMDATA_15_r8odaRMAAAAlAAAAZAAAAA0AAAAAAAAAAAAAAAAAAAAAAAAAAAAAAAACAAAAAAAAAAEAAABQAAAAAAAAAAAA4D8AAAAAAADgPwAAAAAAAOA/AAAAAAAA4D8AAAAAAADgPwAAAAAAAOA/AAAAAAAA4D8AAAAAAADgPwAAAAAAAOA/AAAAAAAA4D8CAAAAjAAAAAAAAAAAAAAA40oGDP///wgAAAAAAAAAAAAAAAAAAAAAAAAAAAAAAAAAAAAAZAAAAAEAAABAAAAAAAAAAAAAAAAAAAAAAAAAAAAAAAAAAAAAAAAAAAAAAAAAAAAAAAAAAAAAAAAAAAAAAAAAAAAAAAAAAAAAAAAAAAAAAAAAAAAAAAAAAAAAAAAAAAAAFAAAADwAAAAAAAAAAAAAAAAAAAkUAAAAAQAAABQAAAAUAAAAFAAAAAEAAAAAAAAAZAAAAGQAAAAAAAAAZAAAAGQAAAAVAAAAYAAAAAAAAAAAAAAADwAAACADAAAAAAAAAAAAAAEAAACgMgAAVgcAAKr4//8BAAAAf39/AAEAAABkAAAAAAAAABQAAABAHwAAAAAAACYAAAAAAAAAwOD//wAAAAAmAAAAZAAAABYAAABMAAAAAAAAAAAAAAAEAAAAAAAAAAEAAACZloMKAAAAACgAAAAoAAAAZAAAAGQAAAAAAAAAzMzMAAAAAABQAAAAUAAAAGQAAABkAAAAAAAAABcAAAAUAAAAAAAAAAAAAAD/fwAA/38AAAAAAAAJAAAABAAAAAAAAAAeAAAAaAAAAAAAAAAAAAAAAAAAAAAAAAAAAAAAECcAABAnAAAAAAAAAAAAAAAAAAAAAAAAAAAAAAAAAAAAAAAAAAAAABQAAAAAAAAAwMD/AAAAAABkAAAAMgAAAAAAAABkAAAAAAAAAH9/fwAKAAAAIgAAABgAAAAAAAAAAAAAAAAAAAAAAAAAAAAAAAAAAAAkAAAAJAAAAAAAAAAHAAAAAAAAAAAAAAAAAAAAAAAAAAAAAAAAAAAAf39/ACUAAABYAAAAAAAAAAAAAAAAAAAAAAAAAAAAAAAAAAAAAAAAAAAAAAAAAAAAAAAAAAAAAAA/AAAAAAAAAKCGAQAAAAAAAAAAAAAAAAAMAAAAAQAAAAAAAAAAAAAAAAAAAB8AAABUAAAAAAAABQAAAAEAAAAAAAAAAAAAAAAAAAAAAAAAAAAAAAAAAAAAAAAAAAAAAAJ/f38AAAAAA8zMzADAwP8Af39/AAAAAAAAAAAAAAAAAAAAAAAAAAAAIQAAABgAAAAUAAAAhRcAALUNAAC7IAAAhg8AABAAAAAmAAAACAAAAIGgAAAAAAAA"/>
               </a:ext>
             </a:extLst>
           </p:cNvSpPr>
@@ -5817,7 +5817,7 @@
             <a:spLocks noGrp="1" noChangeArrowheads="1"/>
             <a:extLst>
               <a:ext uri="smNativeData">
-                <pr:smNativeData xmlns:pr="smNativeData" xmlns="smNativeData" val="SMDATA_15_mcIdaRMAAAAlAAAAZAAAAA0AAAAAAAAAAAAAAAAAAAAAAAAAAAAAAAACAAAAAAAAAAEAAABQAAAAAAAAAAAA4D8AAAAAAADgPwAAAAAAAOA/AAAAAAAA4D8AAAAAAADgPwAAAAAAAOA/AAAAAAAA4D8AAAAAAADgPwAAAAAAAOA/AAAAAAAA4D8CAAAAjAAAAAAAAAAAAAAA40oGDP///wgAAAAAAAAAAAAAAAAAAAAAAAAAAAAAAAAAAAAAZAAAAAEAAABAAAAAAAAAAAAAAAAAAAAAAAAAAAAAAAAAAAAAAAAAAAAAAAAAAAAAAAAAAAAAAAAAAAAAAAAAAAAAAAAAAAAAAAAAAAAAAAAAAAAAAAAAAAAAAAAAAAAAFAAAADwAAAAAAAAAAAAAAAAAAAkUAAAAAQAAABQAAAAUAAAAFAAAAAEAAAAAAAAAZAAAAGQAAAAAAAAAZAAAAGQAAAAVAAAAYAAAAAAAAAAAAAAADwAAACADAAAAAAAAAAAAAAEAAACgMgAAVgcAAKr4//8BAAAAf39/AAEAAABkAAAAAAAAABQAAABAHwAAAAAAACYAAAAAAAAAwOD//wAAAAAmAAAAZAAAABYAAABMAAAAAAAAAAAAAAAEAAAAAAAAAAEAAACZloMKAAAAACgAAAAoAAAAZAAAAGQAAAAAAAAAzMzMAAAAAABQAAAAUAAAAGQAAABkAAAAAAAAABcAAAAUAAAAAAAAAAAAAAD/fwAA/38AAAAAAAAJAAAABAAAAAAAAAAeAAAAaAAAAAAAAAAAAAAAAAAAAAAAAAAAAAAAECcAABAnAAAAAAAAAAAAAAAAAAAAAAAAAAAAAAAAAAAAAAAAAAAAABQAAAAAAAAAwMD/AAAAAABkAAAAMgAAAAAAAABkAAAAAAAAAH9/fwAKAAAAIgAAABgAAAAAAAAAAAAAAAAAAAAAAAAAAAAAAAAAAAAkAAAAJAAAAAAAAAAHAAAAAAAAAAAAAAAAAAAAAAAAAAAAAAAAAAAAf39/ACUAAABYAAAAAAAAAAAAAAAAAAAAAAAAAAAAAAAAAAAAAAAAAAAAAAAAAAAAAAAAAAAAAAA/AAAAAAAAAKCGAQAAAAAAAAAAAAAAAAAMAAAAAQAAAAAAAAAAAAAAAAAAAB8AAABUAAAAAAAABQAAAAEAAAAAAAAAAAAAAAAAAAAAAAAAAAAAAAAAAAAAAAAAAAAAAAJ/f38AAAAAA8zMzADAwP8Af39/AAAAAAAAAAAAAAAAAAAAAAAAAAAAIQAAABgAAAAUAAAA4CEAALUNAAAVKwAAhg8AABAAAAAmAAAACAAAAIGgAAAAAAAA"/>
+                <pr:smNativeData xmlns:pr="smNativeData" xmlns="smNativeData" val="SMDATA_15_r8odaRMAAAAlAAAAZAAAAA0AAAAAAAAAAAAAAAAAAAAAAAAAAAAAAAACAAAAAAAAAAEAAABQAAAAAAAAAAAA4D8AAAAAAADgPwAAAAAAAOA/AAAAAAAA4D8AAAAAAADgPwAAAAAAAOA/AAAAAAAA4D8AAAAAAADgPwAAAAAAAOA/AAAAAAAA4D8CAAAAjAAAAAAAAAAAAAAA40oGDP///wgAAAAAAAAAAAAAAAAAAAAAAAAAAAAAAAAAAAAAZAAAAAEAAABAAAAAAAAAAAAAAAAAAAAAAAAAAAAAAAAAAAAAAAAAAAAAAAAAAAAAAAAAAAAAAAAAAAAAAAAAAAAAAAAAAAAAAAAAAAAAAAAAAAAAAAAAAAAAAAAAAAAAFAAAADwAAAAAAAAAAAAAAAAAAAkUAAAAAQAAABQAAAAUAAAAFAAAAAEAAAAAAAAAZAAAAGQAAAAAAAAAZAAAAGQAAAAVAAAAYAAAAAAAAAAAAAAADwAAACADAAAAAAAAAAAAAAEAAACgMgAAVgcAAKr4//8BAAAAf39/AAEAAABkAAAAAAAAABQAAABAHwAAAAAAACYAAAAAAAAAwOD//wAAAAAmAAAAZAAAABYAAABMAAAAAAAAAAAAAAAEAAAAAAAAAAEAAACZloMKAAAAACgAAAAoAAAAZAAAAGQAAAAAAAAAzMzMAAAAAABQAAAAUAAAAGQAAABkAAAAAAAAABcAAAAUAAAAAAAAAAAAAAD/fwAA/38AAAAAAAAJAAAABAAAAAAAAAAeAAAAaAAAAAAAAAAAAAAAAAAAAAAAAAAAAAAAECcAABAnAAAAAAAAAAAAAAAAAAAAAAAAAAAAAAAAAAAAAAAAAAAAABQAAAAAAAAAwMD/AAAAAABkAAAAMgAAAAAAAABkAAAAAAAAAH9/fwAKAAAAIgAAABgAAAAAAAAAAAAAAAAAAAAAAAAAAAAAAAAAAAAkAAAAJAAAAAAAAAAHAAAAAAAAAAAAAAAAAAAAAAAAAAAAAAAAAAAAf39/ACUAAABYAAAAAAAAAAAAAAAAAAAAAAAAAAAAAAAAAAAAAAAAAAAAAAAAAAAAAAAAAAAAAAA/AAAAAAAAAKCGAQAAAAAAAAAAAAAAAAAMAAAAAQAAAAAAAAAAAAAAAAAAAB8AAABUAAAAAAAABQAAAAEAAAAAAAAAAAAAAAAAAAAAAAAAAAAAAAAAAAAAAAAAAAAAAAJ/f38AAAAAA8zMzADAwP8Af39/AAAAAAAAAAAAAAAAAAAAAAAAAAAAIQAAABgAAAAUAAAA4CEAALUNAAAVKwAAhg8AABAAAAAmAAAACAAAAIGgAAAAAAAA"/>
               </a:ext>
             </a:extLst>
           </p:cNvSpPr>
@@ -5895,7 +5895,7 @@
             <a:spLocks noGrp="1" noChangeArrowheads="1"/>
             <a:extLst>
               <a:ext uri="smNativeData">
-                <pr:smNativeData xmlns:pr="smNativeData" xmlns="smNativeData" val="SMDATA_15_mcIdaRMAAAAlAAAAZAAAAA0AAAAAAAAAAAAAAAAAAAAAAAAAAAAAAAACAAAAAAAAAAEAAABQAAAAAAAAAAAA4D8AAAAAAADgPwAAAAAAAOA/AAAAAAAA4D8AAAAAAADgPwAAAAAAAOA/AAAAAAAA4D8AAAAAAADgPwAAAAAAAOA/AAAAAAAA4D8CAAAAjAAAAAAAAAAAAAAA40oGDP///wgAAAAAAAAAAAAAAAAAAAAAAAAAAAAAAAAAAAAAZAAAAAEAAABAAAAAAAAAAAAAAAAAAAAAAAAAAAAAAAAAAAAAAAAAAAAAAAAAAAAAAAAAAAAAAAAAAAAAAAAAAAAAAAAAAAAAAAAAAAAAAAAAAAAAAAAAAAAAAAAAAAAAFAAAADwAAAAAAAAAAAAAAAAAAAkUAAAAAQAAABQAAAAUAAAAFAAAAAEAAAAAAAAAZAAAAGQAAAAAAAAAZAAAAGQAAAAVAAAAYAAAAAAAAAAAAAAADwAAACADAAAAAAAAAAAAAAEAAACgMgAAVgcAAKr4//8BAAAAf39/AAEAAABkAAAAAAAAABQAAABAHwAAAAAAACYAAAAAAAAAwOD//wAAAAAmAAAAZAAAABYAAABMAAAAAAAAAAAAAAAEAAAAAAAAAAEAAACZloMKAAAAACgAAAAoAAAAZAAAAGQAAAAAAAAAzMzMAAAAAABQAAAAUAAAAGQAAABkAAAAAAAAABcAAAAUAAAAAAAAAAAAAAD/fwAA/38AAAAAAAAJAAAABAAAAAAAAAAeAAAAaAAAAAAAAAAAAAAAAAAAAAAAAAAAAAAAECcAABAnAAAAAAAAAAAAAAAAAAAAAAAAAAAAAAAAAAAAAAAAAAAAABQAAAAAAAAAwMD/AAAAAABkAAAAMgAAAAAAAABkAAAAAAAAAH9/fwAKAAAAIgAAABgAAAAAAAAAAAAAAAAAAAAAAAAAAAAAAAAAAAAkAAAAJAAAAAAAAAAHAAAAAAAAAAAAAAAAAAAAAAAAAAAAAAAAAAAAf39/ACUAAABYAAAAAAAAAAAAAAAAAAAAAAAAAAAAAAAAAAAAAAAAAAAAAAAAAAAAAAAAAAAAAAA/AAAAAAAAAKCGAQAAAAAAAAAAAAAAAAAMAAAAAQAAAAAAAAAAAAAAAAAAAB8AAABUAAAAAAAABQAAAAEAAAAAAAAAAAAAAAAAAAAAAAAAAAAAAAAAAAAAAAAAAAAAAAJ/f38AAAAAA8zMzADAwP8Af39/AAAAAAAAAAAAAAAAAAAAAAAAAAAAIQAAABgAAAAUAAAAOiwAALUNAABwNQAAhg8AABAAAAAmAAAACAAAAIGgAAAAAAAA"/>
+                <pr:smNativeData xmlns:pr="smNativeData" xmlns="smNativeData" val="SMDATA_15_r8odaRMAAAAlAAAAZAAAAA0AAAAAAAAAAAAAAAAAAAAAAAAAAAAAAAACAAAAAAAAAAEAAABQAAAAAAAAAAAA4D8AAAAAAADgPwAAAAAAAOA/AAAAAAAA4D8AAAAAAADgPwAAAAAAAOA/AAAAAAAA4D8AAAAAAADgPwAAAAAAAOA/AAAAAAAA4D8CAAAAjAAAAAAAAAAAAAAA40oGDP///wgAAAAAAAAAAAAAAAAAAAAAAAAAAAAAAAAAAAAAZAAAAAEAAABAAAAAAAAAAAAAAAAAAAAAAAAAAAAAAAAAAAAAAAAAAAAAAAAAAAAAAAAAAAAAAAAAAAAAAAAAAAAAAAAAAAAAAAAAAAAAAAAAAAAAAAAAAAAAAAAAAAAAFAAAADwAAAAAAAAAAAAAAAAAAAkUAAAAAQAAABQAAAAUAAAAFAAAAAEAAAAAAAAAZAAAAGQAAAAAAAAAZAAAAGQAAAAVAAAAYAAAAAAAAAAAAAAADwAAACADAAAAAAAAAAAAAAEAAACgMgAAVgcAAKr4//8BAAAAf39/AAEAAABkAAAAAAAAABQAAABAHwAAAAAAACYAAAAAAAAAwOD//wAAAAAmAAAAZAAAABYAAABMAAAAAAAAAAAAAAAEAAAAAAAAAAEAAACZloMKAAAAACgAAAAoAAAAZAAAAGQAAAAAAAAAzMzMAAAAAABQAAAAUAAAAGQAAABkAAAAAAAAABcAAAAUAAAAAAAAAAAAAAD/fwAA/38AAAAAAAAJAAAABAAAAAAAAAAeAAAAaAAAAAAAAAAAAAAAAAAAAAAAAAAAAAAAECcAABAnAAAAAAAAAAAAAAAAAAAAAAAAAAAAAAAAAAAAAAAAAAAAABQAAAAAAAAAwMD/AAAAAABkAAAAMgAAAAAAAABkAAAAAAAAAH9/fwAKAAAAIgAAABgAAAAAAAAAAAAAAAAAAAAAAAAAAAAAAAAAAAAkAAAAJAAAAAAAAAAHAAAAAAAAAAAAAAAAAAAAAAAAAAAAAAAAAAAAf39/ACUAAABYAAAAAAAAAAAAAAAAAAAAAAAAAAAAAAAAAAAAAAAAAAAAAAAAAAAAAAAAAAAAAAA/AAAAAAAAAKCGAQAAAAAAAAAAAAAAAAAMAAAAAQAAAAAAAAAAAAAAAAAAAB8AAABUAAAAAAAABQAAAAEAAAAAAAAAAAAAAAAAAAAAAAAAAAAAAAAAAAAAAAAAAAAAAAJ/f38AAAAAA8zMzADAwP8Af39/AAAAAAAAAAAAAAAAAAAAAAAAAAAAIQAAABgAAAAUAAAAOiwAALUNAABwNQAAhg8AABAAAAAmAAAACAAAAIGgAAAAAAAA"/>
               </a:ext>
             </a:extLst>
           </p:cNvSpPr>
@@ -5973,7 +5973,7 @@
             <a:spLocks noGrp="1" noChangeArrowheads="1"/>
             <a:extLst>
               <a:ext uri="smNativeData">
-                <pr:smNativeData xmlns:pr="smNativeData" xmlns="smNativeData" val="SMDATA_15_mcIdaRMAAAAlAAAAZAAAAA0AAAAAAAAAAAAAAAAAAAAAAAAAAAAAAAAAAAAAAAAAAAEAAABQAAAAAAAAAAAA4D8AAAAAAADgPwAAAAAAAOA/AAAAAAAA4D8AAAAAAADgPwAAAAAAAOA/AAAAAAAA4D8AAAAAAADgPwAAAAAAAOA/AAAAAAAA4D8CAAAAjAAAAAAAAAAAAAAA40oGDP///wgAAAAAAAAAAAAAAAAAAAAAAAAAAAAAAAAAAAAAZAAAAAEAAABAAAAAAAAAAAAAAAAAAAAAAAAAAAAAAAAAAAAAAAAAAAAAAAAAAAAAAAAAAAAAAAAAAAAAAAAAAAAAAAAAAAAAAAAAAAAAAAAAAAAAAAAAAAAAAAAAAAAAFAAAADwAAAAAAAAAAAAAAAAAAAkUAAAAAQAAABQAAAAUAAAAFAAAAAEAAAAAAAAAZAAAAGQAAAAAAAAAZAAAAGQAAAAVAAAAYAAAAAAAAAAAAAAADwAAACADAAAAAAAAAAAAAAEAAACgMgAAVgcAAKr4//8BAAAAf39/AAEAAABkAAAAAAAAABQAAABAHwAAAAAAACYAAAAAAAAAwOD//wAAAAAmAAAAZAAAABYAAABMAAAAAAAAAAAAAAAEAAAAAAAAAAEAAACZloMKAAAAACgAAAAoAAAAZAAAAGQAAAAAAAAAzMzMAAAAAABQAAAAUAAAAGQAAABkAAAAAAAAABcAAAAUAAAAAAAAAAAAAAD/fwAA/38AAAAAAAAJAAAABAAAAAAAAAAeAAAAaAAAAAAAAAAAAAAAAAAAAAAAAAAAAAAAECcAABAnAAAAAAAAAAAAAAAAAAAAAAAAAAAAAAAAAAAAAAAAAAAAABQAAAAAAAAAwMD/AAAAAABkAAAAMgAAAAAAAABkAAAAAAAAAH9/fwAKAAAAIgAAABgAAAAAAAAAAAAAAAAAAAAAAAAAAAAAAAAAAAAkAAAAJAAAAAAAAAAHAAAAAAAAAAAAAAAAAAAAAAAAAAAAAAAAAAAAf39/ACUAAABYAAAAAAAAAAAAAAAAAAAAAAAAAAAAAAAAAAAAAAAAAAAAAAAAAAAAAAAAAAAAAAA/AAAAAAAAAKCGAQAAAAAAAAAAAAAAAAAMAAAAAQAAAAAAAAAAAAAAAAAAAB8AAABUAAAAAAAABQAAAAEAAAAAAAAAAAAAAAAAAAAAAAAAAAAAAAAAAAAAAAAAAAAAAAJ/f38AAAAAA8zMzADAwP8Af39/AAAAAAAAAAAAAAAAAAAAAAAAAAAAIQAAABgAAAAUAAAA0AIAAD0bAAAGDAAA6CEAABAAAAAmAAAACAAAAAGAAAAAAAAA"/>
+                <pr:smNativeData xmlns:pr="smNativeData" xmlns="smNativeData" val="SMDATA_15_r8odaRMAAAAlAAAAZAAAAA0AAAAAAAAAAAAAAAAAAAAAAAAAAAAAAAAAAAAAAAAAAAEAAABQAAAAAAAAAAAA4D8AAAAAAADgPwAAAAAAAOA/AAAAAAAA4D8AAAAAAADgPwAAAAAAAOA/AAAAAAAA4D8AAAAAAADgPwAAAAAAAOA/AAAAAAAA4D8CAAAAjAAAAAAAAAAAAAAA40oGDP///wgAAAAAAAAAAAAAAAAAAAAAAAAAAAAAAAAAAAAAZAAAAAEAAABAAAAAAAAAAAAAAAAAAAAAAAAAAAAAAAAAAAAAAAAAAAAAAAAAAAAAAAAAAAAAAAAAAAAAAAAAAAAAAAAAAAAAAAAAAAAAAAAAAAAAAAAAAAAAAAAAAAAAFAAAADwAAAAAAAAAAAAAAAAAAAkUAAAAAQAAABQAAAAUAAAAFAAAAAEAAAAAAAAAZAAAAGQAAAAAAAAAZAAAAGQAAAAVAAAAYAAAAAAAAAAAAAAADwAAACADAAAAAAAAAAAAAAEAAACgMgAAVgcAAKr4//8BAAAAf39/AAEAAABkAAAAAAAAABQAAABAHwAAAAAAACYAAAAAAAAAwOD//wAAAAAmAAAAZAAAABYAAABMAAAAAAAAAAAAAAAEAAAAAAAAAAEAAACZloMKAAAAACgAAAAoAAAAZAAAAGQAAAAAAAAAzMzMAAAAAABQAAAAUAAAAGQAAABkAAAAAAAAABcAAAAUAAAAAAAAAAAAAAD/fwAA/38AAAAAAAAJAAAABAAAAAAAAAAeAAAAaAAAAAAAAAAAAAAAAAAAAAAAAAAAAAAAECcAABAnAAAAAAAAAAAAAAAAAAAAAAAAAAAAAAAAAAAAAAAAAAAAABQAAAAAAAAAwMD/AAAAAABkAAAAMgAAAAAAAABkAAAAAAAAAH9/fwAKAAAAIgAAABgAAAAAAAAAAAAAAAAAAAAAAAAAAAAAAAAAAAAkAAAAJAAAAAAAAAAHAAAAAAAAAAAAAAAAAAAAAAAAAAAAAAAAAAAAf39/ACUAAABYAAAAAAAAAAAAAAAAAAAAAAAAAAAAAAAAAAAAAAAAAAAAAAAAAAAAAAAAAAAAAAA/AAAAAAAAAKCGAQAAAAAAAAAAAAAAAAAMAAAAAQAAAAAAAAAAAAAAAAAAAB8AAABUAAAAAAAABQAAAAEAAAAAAAAAAAAAAAAAAAAAAAAAAAAAAAAAAAAAAAAAAAAAAAJ/f38AAAAAA8zMzADAwP8Af39/AAAAAAAAAAAAAAAAAAAAAAAAAAAAIQAAABgAAAAUAAAA0AIAAD0bAAAGDAAA6CEAABAAAAAmAAAACAAAAAGAAAAAAAAA"/>
               </a:ext>
             </a:extLst>
           </p:cNvSpPr>
@@ -6047,7 +6047,7 @@
             <a:spLocks noGrp="1" noChangeArrowheads="1"/>
             <a:extLst>
               <a:ext uri="smNativeData">
-                <pr:smNativeData xmlns:pr="smNativeData" xmlns="smNativeData" val="SMDATA_15_mcIdaRMAAAAlAAAAZAAAAA0AAAAAAAAAAAAAAAAAAAAAAAAAAAAAAAAAAAAAAAAAAAEAAABQAAAAAAAAAAAA4D8AAAAAAADgPwAAAAAAAOA/AAAAAAAA4D8AAAAAAADgPwAAAAAAAOA/AAAAAAAA4D8AAAAAAADgPwAAAAAAAOA/AAAAAAAA4D8CAAAAjAAAAAAAAAAAAAAA40oGDP///wgAAAAAAAAAAAAAAAAAAAAAAAAAAAAAAAAAAAAAZAAAAAEAAABAAAAAAAAAAAAAAAAAAAAAAAAAAAAAAAAAAAAAAAAAAAAAAAAAAAAAAAAAAAAAAAAAAAAAAAAAAAAAAAAAAAAAAAAAAAAAAAAAAAAAAAAAAAAAAAAAAAAAFAAAADwAAAAAAAAAAAAAAAAAAAkUAAAAAQAAABQAAAAUAAAAFAAAAAEAAAAAAAAAZAAAAGQAAAAAAAAAZAAAAGQAAAAVAAAAYAAAAAAAAAAAAAAADwAAACADAAAAAAAAAAAAAAEAAACgMgAAVgcAAKr4//8BAAAAf39/AAEAAABkAAAAAAAAABQAAABAHwAAAAAAACYAAAAAAAAAwOD//wAAAAAmAAAAZAAAABYAAABMAAAAAAAAAAAAAAAEAAAAAAAAAAEAAACZloMKAAAAACgAAAAoAAAAZAAAAGQAAAAAAAAAzMzMAAAAAABQAAAAUAAAAGQAAABkAAAAAAAAABcAAAAUAAAAAAAAAAAAAAD/fwAA/38AAAAAAAAJAAAABAAAAAAAAAAeAAAAaAAAAAAAAAAAAAAAAAAAAAAAAAAAAAAAECcAABAnAAAAAAAAAAAAAAAAAAAAAAAAAAAAAAAAAAAAAAAAAAAAABQAAAAAAAAAwMD/AAAAAABkAAAAMgAAAAAAAABkAAAAAAAAAH9/fwAKAAAAIgAAABgAAAAAAAAAAAAAAAAAAAAAAAAAAAAAAAAAAAAkAAAAJAAAAAAAAAAHAAAAAAAAAAAAAAAAAAAAAAAAAAAAAAAAAAAAf39/ACUAAABYAAAAAAAAAAAAAAAAAAAAAAAAAAAAAAAAAAAAAAAAAAAAAAAAAAAAAAAAAAAAAAA/AAAAAAAAAKCGAQAAAAAAAAAAAAAAAAAMAAAAAQAAAAAAAAAAAAAAAAAAAB8AAABUAAAAAAAABQAAAAEAAAAAAAAAAAAAAAAAAAAAAAAAAAAAAAAAAAAAAAAAAAAAAAJ/f38AAAAAA8zMzADAwP8Af39/AAAAAAAAAAAAAAAAAAAAAAAAAAAAIQAAABgAAAAUAAAAKw0AAD0bAABgFgAA6CEAABAAAAAmAAAACAAAAAGAAAAAAAAA"/>
+                <pr:smNativeData xmlns:pr="smNativeData" xmlns="smNativeData" val="SMDATA_15_r8odaRMAAAAlAAAAZAAAAA0AAAAAAAAAAAAAAAAAAAAAAAAAAAAAAAAAAAAAAAAAAAEAAABQAAAAAAAAAAAA4D8AAAAAAADgPwAAAAAAAOA/AAAAAAAA4D8AAAAAAADgPwAAAAAAAOA/AAAAAAAA4D8AAAAAAADgPwAAAAAAAOA/AAAAAAAA4D8CAAAAjAAAAAAAAAAAAAAA40oGDP///wgAAAAAAAAAAAAAAAAAAAAAAAAAAAAAAAAAAAAAZAAAAAEAAABAAAAAAAAAAAAAAAAAAAAAAAAAAAAAAAAAAAAAAAAAAAAAAAAAAAAAAAAAAAAAAAAAAAAAAAAAAAAAAAAAAAAAAAAAAAAAAAAAAAAAAAAAAAAAAAAAAAAAFAAAADwAAAAAAAAAAAAAAAAAAAkUAAAAAQAAABQAAAAUAAAAFAAAAAEAAAAAAAAAZAAAAGQAAAAAAAAAZAAAAGQAAAAVAAAAYAAAAAAAAAAAAAAADwAAACADAAAAAAAAAAAAAAEAAACgMgAAVgcAAKr4//8BAAAAf39/AAEAAABkAAAAAAAAABQAAABAHwAAAAAAACYAAAAAAAAAwOD//wAAAAAmAAAAZAAAABYAAABMAAAAAAAAAAAAAAAEAAAAAAAAAAEAAACZloMKAAAAACgAAAAoAAAAZAAAAGQAAAAAAAAAzMzMAAAAAABQAAAAUAAAAGQAAABkAAAAAAAAABcAAAAUAAAAAAAAAAAAAAD/fwAA/38AAAAAAAAJAAAABAAAAAAAAAAeAAAAaAAAAAAAAAAAAAAAAAAAAAAAAAAAAAAAECcAABAnAAAAAAAAAAAAAAAAAAAAAAAAAAAAAAAAAAAAAAAAAAAAABQAAAAAAAAAwMD/AAAAAABkAAAAMgAAAAAAAABkAAAAAAAAAH9/fwAKAAAAIgAAABgAAAAAAAAAAAAAAAAAAAAAAAAAAAAAAAAAAAAkAAAAJAAAAAAAAAAHAAAAAAAAAAAAAAAAAAAAAAAAAAAAAAAAAAAAf39/ACUAAABYAAAAAAAAAAAAAAAAAAAAAAAAAAAAAAAAAAAAAAAAAAAAAAAAAAAAAAAAAAAAAAA/AAAAAAAAAKCGAQAAAAAAAAAAAAAAAAAMAAAAAQAAAAAAAAAAAAAAAAAAAB8AAABUAAAAAAAABQAAAAEAAAAAAAAAAAAAAAAAAAAAAAAAAAAAAAAAAAAAAAAAAAAAAAJ/f38AAAAAA8zMzADAwP8Af39/AAAAAAAAAAAAAAAAAAAAAAAAAAAAIQAAABgAAAAUAAAAKw0AAD0bAABgFgAA6CEAABAAAAAmAAAACAAAAAGAAAAAAAAA"/>
               </a:ext>
             </a:extLst>
           </p:cNvSpPr>
@@ -6121,7 +6121,7 @@
             <a:spLocks noGrp="1" noChangeArrowheads="1"/>
             <a:extLst>
               <a:ext uri="smNativeData">
-                <pr:smNativeData xmlns:pr="smNativeData" xmlns="smNativeData" val="SMDATA_15_mcIdaRMAAAAlAAAAZAAAAA0AAAAAAAAAAAAAAAAAAAAAAAAAAAAAAAAAAAAAAAAAAAEAAABQAAAAAAAAAAAA4D8AAAAAAADgPwAAAAAAAOA/AAAAAAAA4D8AAAAAAADgPwAAAAAAAOA/AAAAAAAA4D8AAAAAAADgPwAAAAAAAOA/AAAAAAAA4D8CAAAAjAAAAAAAAAAAAAAA40oGDP///wgAAAAAAAAAAAAAAAAAAAAAAAAAAAAAAAAAAAAAZAAAAAEAAABAAAAAAAAAAAAAAAAAAAAAAAAAAAAAAAAAAAAAAAAAAAAAAAAAAAAAAAAAAAAAAAAAAAAAAAAAAAAAAAAAAAAAAAAAAAAAAAAAAAAAAAAAAAAAAAAAAAAAFAAAADwAAAAAAAAAAAAAAAAAAAkUAAAAAQAAABQAAAAUAAAAFAAAAAEAAAAAAAAAZAAAAGQAAAAAAAAAZAAAAGQAAAAVAAAAYAAAAAAAAAAAAAAADwAAACADAAAAAAAAAAAAAAEAAACgMgAAVgcAAKr4//8BAAAAf39/AAEAAABkAAAAAAAAABQAAABAHwAAAAAAACYAAAAAAAAAwOD//wAAAAAmAAAAZAAAABYAAABMAAAAAAAAAAAAAAAEAAAAAAAAAAEAAACZloMKAAAAACgAAAAoAAAAZAAAAGQAAAAAAAAAzMzMAAAAAABQAAAAUAAAAGQAAABkAAAAAAAAABcAAAAUAAAAAAAAAAAAAAD/fwAA/38AAAAAAAAJAAAABAAAAAAAAAAeAAAAaAAAAAAAAAAAAAAAAAAAAAAAAAAAAAAAECcAABAnAAAAAAAAAAAAAAAAAAAAAAAAAAAAAAAAAAAAAAAAAAAAABQAAAAAAAAAwMD/AAAAAABkAAAAMgAAAAAAAABkAAAAAAAAAH9/fwAKAAAAIgAAABgAAAAAAAAAAAAAAAAAAAAAAAAAAAAAAAAAAAAkAAAAJAAAAAAAAAAHAAAAAAAAAAAAAAAAAAAAAAAAAAAAAAAAAAAAf39/ACUAAABYAAAAAAAAAAAAAAAAAAAAAAAAAAAAAAAAAAAAAAAAAAAAAAAAAAAAAAAAAAAAAAA/AAAAAAAAAKCGAQAAAAAAAAAAAAAAAAAMAAAAAQAAAAAAAAAAAAAAAAAAAB8AAABUAAAAAAAABQAAAAEAAAAAAAAAAAAAAAAAAAAAAAAAAAAAAAAAAAAAAAAAAAAAAAJ/f38AAAAAA8zMzADAwP8Af39/AAAAAAAAAAAAAAAAAAAAAAAAAAAAIQAAABgAAAAUAAAAhRcAAD0bAAC7IAAA6CEAABAAAAAmAAAACAAAAAGAAAAAAAAA"/>
+                <pr:smNativeData xmlns:pr="smNativeData" xmlns="smNativeData" val="SMDATA_15_r8odaRMAAAAlAAAAZAAAAA0AAAAAAAAAAAAAAAAAAAAAAAAAAAAAAAAAAAAAAAAAAAEAAABQAAAAAAAAAAAA4D8AAAAAAADgPwAAAAAAAOA/AAAAAAAA4D8AAAAAAADgPwAAAAAAAOA/AAAAAAAA4D8AAAAAAADgPwAAAAAAAOA/AAAAAAAA4D8CAAAAjAAAAAAAAAAAAAAA40oGDP///wgAAAAAAAAAAAAAAAAAAAAAAAAAAAAAAAAAAAAAZAAAAAEAAABAAAAAAAAAAAAAAAAAAAAAAAAAAAAAAAAAAAAAAAAAAAAAAAAAAAAAAAAAAAAAAAAAAAAAAAAAAAAAAAAAAAAAAAAAAAAAAAAAAAAAAAAAAAAAAAAAAAAAFAAAADwAAAAAAAAAAAAAAAAAAAkUAAAAAQAAABQAAAAUAAAAFAAAAAEAAAAAAAAAZAAAAGQAAAAAAAAAZAAAAGQAAAAVAAAAYAAAAAAAAAAAAAAADwAAACADAAAAAAAAAAAAAAEAAACgMgAAVgcAAKr4//8BAAAAf39/AAEAAABkAAAAAAAAABQAAABAHwAAAAAAACYAAAAAAAAAwOD//wAAAAAmAAAAZAAAABYAAABMAAAAAAAAAAAAAAAEAAAAAAAAAAEAAACZloMKAAAAACgAAAAoAAAAZAAAAGQAAAAAAAAAzMzMAAAAAABQAAAAUAAAAGQAAABkAAAAAAAAABcAAAAUAAAAAAAAAAAAAAD/fwAA/38AAAAAAAAJAAAABAAAAAAAAAAeAAAAaAAAAAAAAAAAAAAAAAAAAAAAAAAAAAAAECcAABAnAAAAAAAAAAAAAAAAAAAAAAAAAAAAAAAAAAAAAAAAAAAAABQAAAAAAAAAwMD/AAAAAABkAAAAMgAAAAAAAABkAAAAAAAAAH9/fwAKAAAAIgAAABgAAAAAAAAAAAAAAAAAAAAAAAAAAAAAAAAAAAAkAAAAJAAAAAAAAAAHAAAAAAAAAAAAAAAAAAAAAAAAAAAAAAAAAAAAf39/ACUAAABYAAAAAAAAAAAAAAAAAAAAAAAAAAAAAAAAAAAAAAAAAAAAAAAAAAAAAAAAAAAAAAA/AAAAAAAAAKCGAQAAAAAAAAAAAAAAAAAMAAAAAQAAAAAAAAAAAAAAAAAAAB8AAABUAAAAAAAABQAAAAEAAAAAAAAAAAAAAAAAAAAAAAAAAAAAAAAAAAAAAAAAAAAAAAJ/f38AAAAAA8zMzADAwP8Af39/AAAAAAAAAAAAAAAAAAAAAAAAAAAAIQAAABgAAAAUAAAAhRcAAD0bAAC7IAAA6CEAABAAAAAmAAAACAAAAAGAAAAAAAAA"/>
               </a:ext>
             </a:extLst>
           </p:cNvSpPr>
@@ -6195,7 +6195,7 @@
             <a:spLocks noGrp="1" noChangeArrowheads="1"/>
             <a:extLst>
               <a:ext uri="smNativeData">
-                <pr:smNativeData xmlns:pr="smNativeData" xmlns="smNativeData" val="SMDATA_15_mcIdaRMAAAAlAAAAZAAAAA0AAAAAAAAAAAAAAAAAAAAAAAAAAAAAAAAAAAAAAAAAAAEAAABQAAAAAAAAAAAA4D8AAAAAAADgPwAAAAAAAOA/AAAAAAAA4D8AAAAAAADgPwAAAAAAAOA/AAAAAAAA4D8AAAAAAADgPwAAAAAAAOA/AAAAAAAA4D8CAAAAjAAAAAAAAAAAAAAA40oGDP///wgAAAAAAAAAAAAAAAAAAAAAAAAAAAAAAAAAAAAAZAAAAAEAAABAAAAAAAAAAAAAAAAAAAAAAAAAAAAAAAAAAAAAAAAAAAAAAAAAAAAAAAAAAAAAAAAAAAAAAAAAAAAAAAAAAAAAAAAAAAAAAAAAAAAAAAAAAAAAAAAAAAAAFAAAADwAAAAAAAAAAAAAAAAAAAkUAAAAAQAAABQAAAAUAAAAFAAAAAEAAAAAAAAAZAAAAGQAAAAAAAAAZAAAAGQAAAAVAAAAYAAAAAAAAAAAAAAADwAAACADAAAAAAAAAAAAAAEAAACgMgAAVgcAAKr4//8BAAAAf39/AAEAAABkAAAAAAAAABQAAABAHwAAAAAAACYAAAAAAAAAwOD//wAAAAAmAAAAZAAAABYAAABMAAAAAAAAAAAAAAAEAAAAAAAAAAEAAACZloMKAAAAACgAAAAoAAAAZAAAAGQAAAAAAAAAzMzMAAAAAABQAAAAUAAAAGQAAABkAAAAAAAAABcAAAAUAAAAAAAAAAAAAAD/fwAA/38AAAAAAAAJAAAABAAAAAAAAAAeAAAAaAAAAAAAAAAAAAAAAAAAAAAAAAAAAAAAECcAABAnAAAAAAAAAAAAAAAAAAAAAAAAAAAAAAAAAAAAAAAAAAAAABQAAAAAAAAAwMD/AAAAAABkAAAAMgAAAAAAAABkAAAAAAAAAH9/fwAKAAAAIgAAABgAAAAAAAAAAAAAAAAAAAAAAAAAAAAAAAAAAAAkAAAAJAAAAAAAAAAHAAAAAAAAAAAAAAAAAAAAAAAAAAAAAAAAAAAAf39/ACUAAABYAAAAAAAAAAAAAAAAAAAAAAAAAAAAAAAAAAAAAAAAAAAAAAAAAAAAAAAAAAAAAAA/AAAAAAAAAKCGAQAAAAAAAAAAAAAAAAAMAAAAAQAAAAAAAAAAAAAAAAAAAB8AAABUAAAAAAAABQAAAAEAAAAAAAAAAAAAAAAAAAAAAAAAAAAAAAAAAAAAAAAAAAAAAAJ/f38AAAAAA8zMzADAwP8Af39/AAAAAAAAAAAAAAAAAAAAAAAAAAAAIQAAABgAAAAUAAAA4CEAAD0bAAAVKwAA6CEAABAAAAAmAAAACAAAAAGAAAAAAAAA"/>
+                <pr:smNativeData xmlns:pr="smNativeData" xmlns="smNativeData" val="SMDATA_15_r8odaRMAAAAlAAAAZAAAAA0AAAAAAAAAAAAAAAAAAAAAAAAAAAAAAAAAAAAAAAAAAAEAAABQAAAAAAAAAAAA4D8AAAAAAADgPwAAAAAAAOA/AAAAAAAA4D8AAAAAAADgPwAAAAAAAOA/AAAAAAAA4D8AAAAAAADgPwAAAAAAAOA/AAAAAAAA4D8CAAAAjAAAAAAAAAAAAAAA40oGDP///wgAAAAAAAAAAAAAAAAAAAAAAAAAAAAAAAAAAAAAZAAAAAEAAABAAAAAAAAAAAAAAAAAAAAAAAAAAAAAAAAAAAAAAAAAAAAAAAAAAAAAAAAAAAAAAAAAAAAAAAAAAAAAAAAAAAAAAAAAAAAAAAAAAAAAAAAAAAAAAAAAAAAAFAAAADwAAAAAAAAAAAAAAAAAAAkUAAAAAQAAABQAAAAUAAAAFAAAAAEAAAAAAAAAZAAAAGQAAAAAAAAAZAAAAGQAAAAVAAAAYAAAAAAAAAAAAAAADwAAACADAAAAAAAAAAAAAAEAAACgMgAAVgcAAKr4//8BAAAAf39/AAEAAABkAAAAAAAAABQAAABAHwAAAAAAACYAAAAAAAAAwOD//wAAAAAmAAAAZAAAABYAAABMAAAAAAAAAAAAAAAEAAAAAAAAAAEAAACZloMKAAAAACgAAAAoAAAAZAAAAGQAAAAAAAAAzMzMAAAAAABQAAAAUAAAAGQAAABkAAAAAAAAABcAAAAUAAAAAAAAAAAAAAD/fwAA/38AAAAAAAAJAAAABAAAAAAAAAAeAAAAaAAAAAAAAAAAAAAAAAAAAAAAAAAAAAAAECcAABAnAAAAAAAAAAAAAAAAAAAAAAAAAAAAAAAAAAAAAAAAAAAAABQAAAAAAAAAwMD/AAAAAABkAAAAMgAAAAAAAABkAAAAAAAAAH9/fwAKAAAAIgAAABgAAAAAAAAAAAAAAAAAAAAAAAAAAAAAAAAAAAAkAAAAJAAAAAAAAAAHAAAAAAAAAAAAAAAAAAAAAAAAAAAAAAAAAAAAf39/ACUAAABYAAAAAAAAAAAAAAAAAAAAAAAAAAAAAAAAAAAAAAAAAAAAAAAAAAAAAAAAAAAAAAA/AAAAAAAAAKCGAQAAAAAAAAAAAAAAAAAMAAAAAQAAAAAAAAAAAAAAAAAAAB8AAABUAAAAAAAABQAAAAEAAAAAAAAAAAAAAAAAAAAAAAAAAAAAAAAAAAAAAAAAAAAAAAJ/f38AAAAAA8zMzADAwP8Af39/AAAAAAAAAAAAAAAAAAAAAAAAAAAAIQAAABgAAAAUAAAA4CEAAD0bAAAVKwAA6CEAABAAAAAmAAAACAAAAAGAAAAAAAAA"/>
               </a:ext>
             </a:extLst>
           </p:cNvSpPr>
@@ -6269,7 +6269,7 @@
             <a:spLocks noGrp="1" noChangeArrowheads="1"/>
             <a:extLst>
               <a:ext uri="smNativeData">
-                <pr:smNativeData xmlns:pr="smNativeData" xmlns="smNativeData" val="SMDATA_15_mcIdaRMAAAAlAAAAZAAAAA0AAAAAAAAAAAAAAAAAAAAAAAAAAAAAAAAAAAAAAAAAAAEAAABQAAAAAAAAAAAA4D8AAAAAAADgPwAAAAAAAOA/AAAAAAAA4D8AAAAAAADgPwAAAAAAAOA/AAAAAAAA4D8AAAAAAADgPwAAAAAAAOA/AAAAAAAA4D8CAAAAjAAAAAAAAAAAAAAA40oGDP///wgAAAAAAAAAAAAAAAAAAAAAAAAAAAAAAAAAAAAAZAAAAAEAAABAAAAAAAAAAAAAAAAAAAAAAAAAAAAAAAAAAAAAAAAAAAAAAAAAAAAAAAAAAAAAAAAAAAAAAAAAAAAAAAAAAAAAAAAAAAAAAAAAAAAAAAAAAAAAAAAAAAAAFAAAADwAAAAAAAAAAAAAAAAAAAkUAAAAAQAAABQAAAAUAAAAFAAAAAEAAAAAAAAAZAAAAGQAAAAAAAAAZAAAAGQAAAAVAAAAYAAAAAAAAAAAAAAADwAAACADAAAAAAAAAAAAAAEAAACgMgAAVgcAAKr4//8BAAAAf39/AAEAAABkAAAAAAAAABQAAABAHwAAAAAAACYAAAAAAAAAwOD//wAAAAAmAAAAZAAAABYAAABMAAAAAAAAAAAAAAAEAAAAAAAAAAEAAACZloMKAAAAACgAAAAoAAAAZAAAAGQAAAAAAAAAzMzMAAAAAABQAAAAUAAAAGQAAABkAAAAAAAAABcAAAAUAAAAAAAAAAAAAAD/fwAA/38AAAAAAAAJAAAABAAAAAAAAAAeAAAAaAAAAAAAAAAAAAAAAAAAAAAAAAAAAAAAECcAABAnAAAAAAAAAAAAAAAAAAAAAAAAAAAAAAAAAAAAAAAAAAAAABQAAAAAAAAAwMD/AAAAAABkAAAAMgAAAAAAAABkAAAAAAAAAH9/fwAKAAAAIgAAABgAAAAAAAAAAAAAAAAAAAAAAAAAAAAAAAAAAAAkAAAAJAAAAAAAAAAHAAAAAAAAAAAAAAAAAAAAAAAAAAAAAAAAAAAAf39/ACUAAABYAAAAAAAAAAAAAAAAAAAAAAAAAAAAAAAAAAAAAAAAAAAAAAAAAAAAAAAAAAAAAAA/AAAAAAAAAKCGAQAAAAAAAAAAAAAAAAAMAAAAAQAAAAAAAAAAAAAAAAAAAB8AAABUAAAAAAAABQAAAAEAAAAAAAAAAAAAAAAAAAAAAAAAAAAAAAAAAAAAAAAAAAAAAAJ/f38AAAAAA8zMzADAwP8Af39/AAAAAAAAAAAAAAAAAAAAAAAAAAAAIQAAABgAAAAUAAAAOiwAAD0bAABwNQAA6CEAABAAAAAmAAAACAAAAAGAAAAAAAAA"/>
+                <pr:smNativeData xmlns:pr="smNativeData" xmlns="smNativeData" val="SMDATA_15_r8odaRMAAAAlAAAAZAAAAA0AAAAAAAAAAAAAAAAAAAAAAAAAAAAAAAAAAAAAAAAAAAEAAABQAAAAAAAAAAAA4D8AAAAAAADgPwAAAAAAAOA/AAAAAAAA4D8AAAAAAADgPwAAAAAAAOA/AAAAAAAA4D8AAAAAAADgPwAAAAAAAOA/AAAAAAAA4D8CAAAAjAAAAAAAAAAAAAAA40oGDP///wgAAAAAAAAAAAAAAAAAAAAAAAAAAAAAAAAAAAAAZAAAAAEAAABAAAAAAAAAAAAAAAAAAAAAAAAAAAAAAAAAAAAAAAAAAAAAAAAAAAAAAAAAAAAAAAAAAAAAAAAAAAAAAAAAAAAAAAAAAAAAAAAAAAAAAAAAAAAAAAAAAAAAFAAAADwAAAAAAAAAAAAAAAAAAAkUAAAAAQAAABQAAAAUAAAAFAAAAAEAAAAAAAAAZAAAAGQAAAAAAAAAZAAAAGQAAAAVAAAAYAAAAAAAAAAAAAAADwAAACADAAAAAAAAAAAAAAEAAACgMgAAVgcAAKr4//8BAAAAf39/AAEAAABkAAAAAAAAABQAAABAHwAAAAAAACYAAAAAAAAAwOD//wAAAAAmAAAAZAAAABYAAABMAAAAAAAAAAAAAAAEAAAAAAAAAAEAAACZloMKAAAAACgAAAAoAAAAZAAAAGQAAAAAAAAAzMzMAAAAAABQAAAAUAAAAGQAAABkAAAAAAAAABcAAAAUAAAAAAAAAAAAAAD/fwAA/38AAAAAAAAJAAAABAAAAAAAAAAeAAAAaAAAAAAAAAAAAAAAAAAAAAAAAAAAAAAAECcAABAnAAAAAAAAAAAAAAAAAAAAAAAAAAAAAAAAAAAAAAAAAAAAABQAAAAAAAAAwMD/AAAAAABkAAAAMgAAAAAAAABkAAAAAAAAAH9/fwAKAAAAIgAAABgAAAAAAAAAAAAAAAAAAAAAAAAAAAAAAAAAAAAkAAAAJAAAAAAAAAAHAAAAAAAAAAAAAAAAAAAAAAAAAAAAAAAAAAAAf39/ACUAAABYAAAAAAAAAAAAAAAAAAAAAAAAAAAAAAAAAAAAAAAAAAAAAAAAAAAAAAAAAAAAAAA/AAAAAAAAAKCGAQAAAAAAAAAAAAAAAAAMAAAAAQAAAAAAAAAAAAAAAAAAAB8AAABUAAAAAAAABQAAAAEAAAAAAAAAAAAAAAAAAAAAAAAAAAAAAAAAAAAAAAAAAAAAAAJ/f38AAAAAA8zMzADAwP8Af39/AAAAAAAAAAAAAAAAAAAAAAAAAAAAIQAAABgAAAAUAAAAOiwAAD0bAABwNQAA6CEAABAAAAAmAAAACAAAAAGAAAAAAAAA"/>
               </a:ext>
             </a:extLst>
           </p:cNvSpPr>
@@ -6343,7 +6343,7 @@
             <a:spLocks noGrp="1" noChangeArrowheads="1"/>
             <a:extLst>
               <a:ext uri="smNativeData">
-                <pr:smNativeData xmlns:pr="smNativeData" xmlns="smNativeData" val="SMDATA_15_mcIdaRMAAAAlAAAAZAAAAA0AAAAAAAAAAAAAAAAAAAAAAAAAAAAAAAACAAAAAAAAAAEAAABQAAAAAAAAAAAA4D8AAAAAAADgPwAAAAAAAOA/AAAAAAAA4D8AAAAAAADgPwAAAAAAAOA/AAAAAAAA4D8AAAAAAADgPwAAAAAAAOA/AAAAAAAA4D8CAAAAjAAAAAAAAAAAAAAA40oGDP///wgAAAAAAAAAAAAAAAAAAAAAAAAAAAAAAAAAAAAAZAAAAAEAAABAAAAAAAAAAAAAAAAAAAAAAAAAAAAAAAAAAAAAAAAAAAAAAAAAAAAAAAAAAAAAAAAAAAAAAAAAAAAAAAAAAAAAAAAAAAAAAAAAAAAAAAAAAAAAAAAAAAAAFAAAADwAAAAAAAAAAAAAAAAAAAkUAAAAAQAAABQAAAAUAAAAFAAAAAEAAAAAAAAAZAAAAGQAAAAAAAAAZAAAAGQAAAAVAAAAYAAAAAAAAAAAAAAADwAAACADAAAAAAAAAAAAAAEAAACgMgAAVgcAAKr4//8BAAAAf39/AAEAAABkAAAAAAAAABQAAABAHwAAAAAAACYAAAAAAAAAwOD//wAAAAAmAAAAZAAAABYAAABMAAAAAAAAAAAAAAAEAAAAAAAAAAEAAACZloMKAAAAACgAAAAoAAAAZAAAAGQAAAAAAAAAzMzMAAAAAABQAAAAUAAAAGQAAABkAAAAAAAAABcAAAAUAAAAAAAAAAAAAAD/fwAA/38AAAAAAAAJAAAABAAAAAAAAAAeAAAAaAAAAAAAAAAAAAAAAAAAAAAAAAAAAAAAECcAABAnAAAAAAAAAAAAAAAAAAAAAAAAAAAAAAAAAAAAAAAAAAAAABQAAAAAAAAAwMD/AAAAAABkAAAAMgAAAAAAAABkAAAAAAAAAH9/fwAKAAAAIgAAABgAAAAAAAAAAAAAAAAAAAAAAAAAAAAAAAAAAAAkAAAAJAAAAAAAAAAHAAAAAAAAAAAAAAAAAAAAAAAAAAAAAAAAAAAAf39/ACUAAABYAAAAAAAAAAAAAAAAAAAAAAAAAAAAAAAAAAAAAAAAAAAAAAAAAAAAAAAAAAAAAAA/AAAAAAAAAKCGAQAAAAAAAAAAAAAAAAAMAAAAAQAAAAAAAAAAAAAAAAAAAB8AAABUAAAAAAAABQAAAAEAAAAAAAAAAAAAAAAAAAAAAAAAAAAAAAAAAAAAAAAAAAAAAAJ/f38AAAAAA8zMzADAwP8Af39/AAAAAAAAAAAAAAAAAAAAAAAAAAAAIQAAABgAAAAUAAAA0AIAAK0aAAAGDAAAfhwAABAAAAAmAAAACAAAAIGgAAAAAAAA"/>
+                <pr:smNativeData xmlns:pr="smNativeData" xmlns="smNativeData" val="SMDATA_15_r8odaRMAAAAlAAAAZAAAAA0AAAAAAAAAAAAAAAAAAAAAAAAAAAAAAAACAAAAAAAAAAEAAABQAAAAAAAAAAAA4D8AAAAAAADgPwAAAAAAAOA/AAAAAAAA4D8AAAAAAADgPwAAAAAAAOA/AAAAAAAA4D8AAAAAAADgPwAAAAAAAOA/AAAAAAAA4D8CAAAAjAAAAAAAAAAAAAAA40oGDP///wgAAAAAAAAAAAAAAAAAAAAAAAAAAAAAAAAAAAAAZAAAAAEAAABAAAAAAAAAAAAAAAAAAAAAAAAAAAAAAAAAAAAAAAAAAAAAAAAAAAAAAAAAAAAAAAAAAAAAAAAAAAAAAAAAAAAAAAAAAAAAAAAAAAAAAAAAAAAAAAAAAAAAFAAAADwAAAAAAAAAAAAAAAAAAAkUAAAAAQAAABQAAAAUAAAAFAAAAAEAAAAAAAAAZAAAAGQAAAAAAAAAZAAAAGQAAAAVAAAAYAAAAAAAAAAAAAAADwAAACADAAAAAAAAAAAAAAEAAACgMgAAVgcAAKr4//8BAAAAf39/AAEAAABkAAAAAAAAABQAAABAHwAAAAAAACYAAAAAAAAAwOD//wAAAAAmAAAAZAAAABYAAABMAAAAAAAAAAAAAAAEAAAAAAAAAAEAAACZloMKAAAAACgAAAAoAAAAZAAAAGQAAAAAAAAAzMzMAAAAAABQAAAAUAAAAGQAAABkAAAAAAAAABcAAAAUAAAAAAAAAAAAAAD/fwAA/38AAAAAAAAJAAAABAAAAAAAAAAeAAAAaAAAAAAAAAAAAAAAAAAAAAAAAAAAAAAAECcAABAnAAAAAAAAAAAAAAAAAAAAAAAAAAAAAAAAAAAAAAAAAAAAABQAAAAAAAAAwMD/AAAAAABkAAAAMgAAAAAAAABkAAAAAAAAAH9/fwAKAAAAIgAAABgAAAAAAAAAAAAAAAAAAAAAAAAAAAAAAAAAAAAkAAAAJAAAAAAAAAAHAAAAAAAAAAAAAAAAAAAAAAAAAAAAAAAAAAAAf39/ACUAAABYAAAAAAAAAAAAAAAAAAAAAAAAAAAAAAAAAAAAAAAAAAAAAAAAAAAAAAAAAAAAAAA/AAAAAAAAAKCGAQAAAAAAAAAAAAAAAAAMAAAAAQAAAAAAAAAAAAAAAAAAAB8AAABUAAAAAAAABQAAAAEAAAAAAAAAAAAAAAAAAAAAAAAAAAAAAAAAAAAAAAAAAAAAAAJ/f38AAAAAA8zMzADAwP8Af39/AAAAAAAAAAAAAAAAAAAAAAAAAAAAIQAAABgAAAAUAAAA0AIAAK0aAAAGDAAAfhwAABAAAAAmAAAACAAAAIGgAAAAAAAA"/>
               </a:ext>
             </a:extLst>
           </p:cNvSpPr>
@@ -6421,7 +6421,7 @@
             <a:spLocks noGrp="1" noChangeArrowheads="1"/>
             <a:extLst>
               <a:ext uri="smNativeData">
-                <pr:smNativeData xmlns:pr="smNativeData" xmlns="smNativeData" val="SMDATA_15_mcIdaRMAAAAlAAAAZAAAAA0AAAAAAAAAAAAAAAAAAAAAAAAAAAAAAAACAAAAAAAAAAEAAABQAAAAAAAAAAAA4D8AAAAAAADgPwAAAAAAAOA/AAAAAAAA4D8AAAAAAADgPwAAAAAAAOA/AAAAAAAA4D8AAAAAAADgPwAAAAAAAOA/AAAAAAAA4D8CAAAAjAAAAAAAAAAAAAAA40oGDP///wgAAAAAAAAAAAAAAAAAAAAAAAAAAAAAAAAAAAAAZAAAAAEAAABAAAAAAAAAAAAAAAAAAAAAAAAAAAAAAAAAAAAAAAAAAAAAAAAAAAAAAAAAAAAAAAAAAAAAAAAAAAAAAAAAAAAAAAAAAAAAAAAAAAAAAAAAAAAAAAAAAAAAFAAAADwAAAAAAAAAAAAAAAAAAAkUAAAAAQAAABQAAAAUAAAAFAAAAAEAAAAAAAAAZAAAAGQAAAAAAAAAZAAAAGQAAAAVAAAAYAAAAAAAAAAAAAAADwAAACADAAAAAAAAAAAAAAEAAACgMgAAVgcAAKr4//8BAAAAf39/AAEAAABkAAAAAAAAABQAAABAHwAAAAAAACYAAAAAAAAAwOD//wAAAAAmAAAAZAAAABYAAABMAAAAAAAAAAAAAAAEAAAAAAAAAAEAAACZloMKAAAAACgAAAAoAAAAZAAAAGQAAAAAAAAAzMzMAAAAAABQAAAAUAAAAGQAAABkAAAAAAAAABcAAAAUAAAAAAAAAAAAAAD/fwAA/38AAAAAAAAJAAAABAAAAAAAAAAeAAAAaAAAAAAAAAAAAAAAAAAAAAAAAAAAAAAAECcAABAnAAAAAAAAAAAAAAAAAAAAAAAAAAAAAAAAAAAAAAAAAAAAABQAAAAAAAAAwMD/AAAAAABkAAAAMgAAAAAAAABkAAAAAAAAAH9/fwAKAAAAIgAAABgAAAAAAAAAAAAAAAAAAAAAAAAAAAAAAAAAAAAkAAAAJAAAAAAAAAAHAAAAAAAAAAAAAAAAAAAAAAAAAAAAAAAAAAAAf39/ACUAAABYAAAAAAAAAAAAAAAAAAAAAAAAAAAAAAAAAAAAAAAAAAAAAAAAAAAAAAAAAAAAAAA/AAAAAAAAAKCGAQAAAAAAAAAAAAAAAAAMAAAAAQAAAAAAAAAAAAAAAAAAAB8AAABUAAAAAAAABQAAAAEAAAAAAAAAAAAAAAAAAAAAAAAAAAAAAAAAAAAAAAAAAAAAAAJ/f38AAAAAA8zMzADAwP8Af39/AAAAAAAAAAAAAAAAAAAAAAAAAAAAIQAAABgAAAAUAAAAKw0AAK0aAABgFgAAfhwAABAAAAAmAAAACAAAAIGgAAAAAAAA"/>
+                <pr:smNativeData xmlns:pr="smNativeData" xmlns="smNativeData" val="SMDATA_15_r8odaRMAAAAlAAAAZAAAAA0AAAAAAAAAAAAAAAAAAAAAAAAAAAAAAAACAAAAAAAAAAEAAABQAAAAAAAAAAAA4D8AAAAAAADgPwAAAAAAAOA/AAAAAAAA4D8AAAAAAADgPwAAAAAAAOA/AAAAAAAA4D8AAAAAAADgPwAAAAAAAOA/AAAAAAAA4D8CAAAAjAAAAAAAAAAAAAAA40oGDP///wgAAAAAAAAAAAAAAAAAAAAAAAAAAAAAAAAAAAAAZAAAAAEAAABAAAAAAAAAAAAAAAAAAAAAAAAAAAAAAAAAAAAAAAAAAAAAAAAAAAAAAAAAAAAAAAAAAAAAAAAAAAAAAAAAAAAAAAAAAAAAAAAAAAAAAAAAAAAAAAAAAAAAFAAAADwAAAAAAAAAAAAAAAAAAAkUAAAAAQAAABQAAAAUAAAAFAAAAAEAAAAAAAAAZAAAAGQAAAAAAAAAZAAAAGQAAAAVAAAAYAAAAAAAAAAAAAAADwAAACADAAAAAAAAAAAAAAEAAACgMgAAVgcAAKr4//8BAAAAf39/AAEAAABkAAAAAAAAABQAAABAHwAAAAAAACYAAAAAAAAAwOD//wAAAAAmAAAAZAAAABYAAABMAAAAAAAAAAAAAAAEAAAAAAAAAAEAAACZloMKAAAAACgAAAAoAAAAZAAAAGQAAAAAAAAAzMzMAAAAAABQAAAAUAAAAGQAAABkAAAAAAAAABcAAAAUAAAAAAAAAAAAAAD/fwAA/38AAAAAAAAJAAAABAAAAAAAAAAeAAAAaAAAAAAAAAAAAAAAAAAAAAAAAAAAAAAAECcAABAnAAAAAAAAAAAAAAAAAAAAAAAAAAAAAAAAAAAAAAAAAAAAABQAAAAAAAAAwMD/AAAAAABkAAAAMgAAAAAAAABkAAAAAAAAAH9/fwAKAAAAIgAAABgAAAAAAAAAAAAAAAAAAAAAAAAAAAAAAAAAAAAkAAAAJAAAAAAAAAAHAAAAAAAAAAAAAAAAAAAAAAAAAAAAAAAAAAAAf39/ACUAAABYAAAAAAAAAAAAAAAAAAAAAAAAAAAAAAAAAAAAAAAAAAAAAAAAAAAAAAAAAAAAAAA/AAAAAAAAAKCGAQAAAAAAAAAAAAAAAAAMAAAAAQAAAAAAAAAAAAAAAAAAAB8AAABUAAAAAAAABQAAAAEAAAAAAAAAAAAAAAAAAAAAAAAAAAAAAAAAAAAAAAAAAAAAAAJ/f38AAAAAA8zMzADAwP8Af39/AAAAAAAAAAAAAAAAAAAAAAAAAAAAIQAAABgAAAAUAAAAKw0AAK0aAABgFgAAfhwAABAAAAAmAAAACAAAAIGgAAAAAAAA"/>
               </a:ext>
             </a:extLst>
           </p:cNvSpPr>
@@ -6499,7 +6499,7 @@
             <a:spLocks noGrp="1" noChangeArrowheads="1"/>
             <a:extLst>
               <a:ext uri="smNativeData">
-                <pr:smNativeData xmlns:pr="smNativeData" xmlns="smNativeData" val="SMDATA_15_mcIdaRMAAAAlAAAAZAAAAA0AAAAAAAAAAAAAAAAAAAAAAAAAAAAAAAACAAAAAAAAAAEAAABQAAAAAAAAAAAA4D8AAAAAAADgPwAAAAAAAOA/AAAAAAAA4D8AAAAAAADgPwAAAAAAAOA/AAAAAAAA4D8AAAAAAADgPwAAAAAAAOA/AAAAAAAA4D8CAAAAjAAAAAAAAAAAAAAA40oGDP///wgAAAAAAAAAAAAAAAAAAAAAAAAAAAAAAAAAAAAAZAAAAAEAAABAAAAAAAAAAAAAAAAAAAAAAAAAAAAAAAAAAAAAAAAAAAAAAAAAAAAAAAAAAAAAAAAAAAAAAAAAAAAAAAAAAAAAAAAAAAAAAAAAAAAAAAAAAAAAAAAAAAAAFAAAADwAAAAAAAAAAAAAAAAAAAkUAAAAAQAAABQAAAAUAAAAFAAAAAEAAAAAAAAAZAAAAGQAAAAAAAAAZAAAAGQAAAAVAAAAYAAAAAAAAAAAAAAADwAAACADAAAAAAAAAAAAAAEAAACgMgAAVgcAAKr4//8BAAAAf39/AAEAAABkAAAAAAAAABQAAABAHwAAAAAAACYAAAAAAAAAwOD//wAAAAAmAAAAZAAAABYAAABMAAAAAAAAAAAAAAAEAAAAAAAAAAEAAACZloMKAAAAACgAAAAoAAAAZAAAAGQAAAAAAAAAzMzMAAAAAABQAAAAUAAAAGQAAABkAAAAAAAAABcAAAAUAAAAAAAAAAAAAAD/fwAA/38AAAAAAAAJAAAABAAAAAAAAAAeAAAAaAAAAAAAAAAAAAAAAAAAAAAAAAAAAAAAECcAABAnAAAAAAAAAAAAAAAAAAAAAAAAAAAAAAAAAAAAAAAAAAAAABQAAAAAAAAAwMD/AAAAAABkAAAAMgAAAAAAAABkAAAAAAAAAH9/fwAKAAAAIgAAABgAAAAAAAAAAAAAAAAAAAAAAAAAAAAAAAAAAAAkAAAAJAAAAAAAAAAHAAAAAAAAAAAAAAAAAAAAAAAAAAAAAAAAAAAAf39/ACUAAABYAAAAAAAAAAAAAAAAAAAAAAAAAAAAAAAAAAAAAAAAAAAAAAAAAAAAAAAAAAAAAAA/AAAAAAAAAKCGAQAAAAAAAAAAAAAAAAAMAAAAAQAAAAAAAAAAAAAAAAAAAB8AAABUAAAAAAAABQAAAAEAAAAAAAAAAAAAAAAAAAAAAAAAAAAAAAAAAAAAAAAAAAAAAAJ/f38AAAAAA8zMzADAwP8Af39/AAAAAAAAAAAAAAAAAAAAAAAAAAAAIQAAABgAAAAUAAAAhRcAAK0aAAC7IAAAfhwAABAAAAAmAAAACAAAAIGgAAAAAAAA"/>
+                <pr:smNativeData xmlns:pr="smNativeData" xmlns="smNativeData" val="SMDATA_15_r8odaRMAAAAlAAAAZAAAAA0AAAAAAAAAAAAAAAAAAAAAAAAAAAAAAAACAAAAAAAAAAEAAABQAAAAAAAAAAAA4D8AAAAAAADgPwAAAAAAAOA/AAAAAAAA4D8AAAAAAADgPwAAAAAAAOA/AAAAAAAA4D8AAAAAAADgPwAAAAAAAOA/AAAAAAAA4D8CAAAAjAAAAAAAAAAAAAAA40oGDP///wgAAAAAAAAAAAAAAAAAAAAAAAAAAAAAAAAAAAAAZAAAAAEAAABAAAAAAAAAAAAAAAAAAAAAAAAAAAAAAAAAAAAAAAAAAAAAAAAAAAAAAAAAAAAAAAAAAAAAAAAAAAAAAAAAAAAAAAAAAAAAAAAAAAAAAAAAAAAAAAAAAAAAFAAAADwAAAAAAAAAAAAAAAAAAAkUAAAAAQAAABQAAAAUAAAAFAAAAAEAAAAAAAAAZAAAAGQAAAAAAAAAZAAAAGQAAAAVAAAAYAAAAAAAAAAAAAAADwAAACADAAAAAAAAAAAAAAEAAACgMgAAVgcAAKr4//8BAAAAf39/AAEAAABkAAAAAAAAABQAAABAHwAAAAAAACYAAAAAAAAAwOD//wAAAAAmAAAAZAAAABYAAABMAAAAAAAAAAAAAAAEAAAAAAAAAAEAAACZloMKAAAAACgAAAAoAAAAZAAAAGQAAAAAAAAAzMzMAAAAAABQAAAAUAAAAGQAAABkAAAAAAAAABcAAAAUAAAAAAAAAAAAAAD/fwAA/38AAAAAAAAJAAAABAAAAAAAAAAeAAAAaAAAAAAAAAAAAAAAAAAAAAAAAAAAAAAAECcAABAnAAAAAAAAAAAAAAAAAAAAAAAAAAAAAAAAAAAAAAAAAAAAABQAAAAAAAAAwMD/AAAAAABkAAAAMgAAAAAAAABkAAAAAAAAAH9/fwAKAAAAIgAAABgAAAAAAAAAAAAAAAAAAAAAAAAAAAAAAAAAAAAkAAAAJAAAAAAAAAAHAAAAAAAAAAAAAAAAAAAAAAAAAAAAAAAAAAAAf39/ACUAAABYAAAAAAAAAAAAAAAAAAAAAAAAAAAAAAAAAAAAAAAAAAAAAAAAAAAAAAAAAAAAAAA/AAAAAAAAAKCGAQAAAAAAAAAAAAAAAAAMAAAAAQAAAAAAAAAAAAAAAAAAAB8AAABUAAAAAAAABQAAAAEAAAAAAAAAAAAAAAAAAAAAAAAAAAAAAAAAAAAAAAAAAAAAAAJ/f38AAAAAA8zMzADAwP8Af39/AAAAAAAAAAAAAAAAAAAAAAAAAAAAIQAAABgAAAAUAAAAhRcAAK0aAAC7IAAAfhwAABAAAAAmAAAACAAAAIGgAAAAAAAA"/>
               </a:ext>
             </a:extLst>
           </p:cNvSpPr>
@@ -6577,7 +6577,7 @@
             <a:spLocks noGrp="1" noChangeArrowheads="1"/>
             <a:extLst>
               <a:ext uri="smNativeData">
-                <pr:smNativeData xmlns:pr="smNativeData" xmlns="smNativeData" val="SMDATA_15_mcIdaRMAAAAlAAAAZAAAAA0AAAAAAAAAAAAAAAAAAAAAAAAAAAAAAAACAAAAAAAAAAEAAABQAAAAAAAAAAAA4D8AAAAAAADgPwAAAAAAAOA/AAAAAAAA4D8AAAAAAADgPwAAAAAAAOA/AAAAAAAA4D8AAAAAAADgPwAAAAAAAOA/AAAAAAAA4D8CAAAAjAAAAAAAAAAAAAAA40oGDP///wgAAAAAAAAAAAAAAAAAAAAAAAAAAAAAAAAAAAAAZAAAAAEAAABAAAAAAAAAAAAAAAAAAAAAAAAAAAAAAAAAAAAAAAAAAAAAAAAAAAAAAAAAAAAAAAAAAAAAAAAAAAAAAAAAAAAAAAAAAAAAAAAAAAAAAAAAAAAAAAAAAAAAFAAAADwAAAAAAAAAAAAAAAAAAAkUAAAAAQAAABQAAAAUAAAAFAAAAAEAAAAAAAAAZAAAAGQAAAAAAAAAZAAAAGQAAAAVAAAAYAAAAAAAAAAAAAAADwAAACADAAAAAAAAAAAAAAEAAACgMgAAVgcAAKr4//8BAAAAf39/AAEAAABkAAAAAAAAABQAAABAHwAAAAAAACYAAAAAAAAAwOD//wAAAAAmAAAAZAAAABYAAABMAAAAAAAAAAAAAAAEAAAAAAAAAAEAAACZloMKAAAAACgAAAAoAAAAZAAAAGQAAAAAAAAAzMzMAAAAAABQAAAAUAAAAGQAAABkAAAAAAAAABcAAAAUAAAAAAAAAAAAAAD/fwAA/38AAAAAAAAJAAAABAAAAAAAAAAeAAAAaAAAAAAAAAAAAAAAAAAAAAAAAAAAAAAAECcAABAnAAAAAAAAAAAAAAAAAAAAAAAAAAAAAAAAAAAAAAAAAAAAABQAAAAAAAAAwMD/AAAAAABkAAAAMgAAAAAAAABkAAAAAAAAAH9/fwAKAAAAIgAAABgAAAAAAAAAAAAAAAAAAAAAAAAAAAAAAAAAAAAkAAAAJAAAAAAAAAAHAAAAAAAAAAAAAAAAAAAAAAAAAAAAAAAAAAAAf39/ACUAAABYAAAAAAAAAAAAAAAAAAAAAAAAAAAAAAAAAAAAAAAAAAAAAAAAAAAAAAAAAAAAAAA/AAAAAAAAAKCGAQAAAAAAAAAAAAAAAAAMAAAAAQAAAAAAAAAAAAAAAAAAAB8AAABUAAAAAAAABQAAAAEAAAAAAAAAAAAAAAAAAAAAAAAAAAAAAAAAAAAAAAAAAAAAAAJ/f38AAAAAA8zMzADAwP8Af39/AAAAAAAAAAAAAAAAAAAAAAAAAAAAIQAAABgAAAAUAAAA4CEAAK0aAAAVKwAAfhwAABAAAAAmAAAACAAAAIGgAAAAAAAA"/>
+                <pr:smNativeData xmlns:pr="smNativeData" xmlns="smNativeData" val="SMDATA_15_r8odaRMAAAAlAAAAZAAAAA0AAAAAAAAAAAAAAAAAAAAAAAAAAAAAAAACAAAAAAAAAAEAAABQAAAAAAAAAAAA4D8AAAAAAADgPwAAAAAAAOA/AAAAAAAA4D8AAAAAAADgPwAAAAAAAOA/AAAAAAAA4D8AAAAAAADgPwAAAAAAAOA/AAAAAAAA4D8CAAAAjAAAAAAAAAAAAAAA40oGDP///wgAAAAAAAAAAAAAAAAAAAAAAAAAAAAAAAAAAAAAZAAAAAEAAABAAAAAAAAAAAAAAAAAAAAAAAAAAAAAAAAAAAAAAAAAAAAAAAAAAAAAAAAAAAAAAAAAAAAAAAAAAAAAAAAAAAAAAAAAAAAAAAAAAAAAAAAAAAAAAAAAAAAAFAAAADwAAAAAAAAAAAAAAAAAAAkUAAAAAQAAABQAAAAUAAAAFAAAAAEAAAAAAAAAZAAAAGQAAAAAAAAAZAAAAGQAAAAVAAAAYAAAAAAAAAAAAAAADwAAACADAAAAAAAAAAAAAAEAAACgMgAAVgcAAKr4//8BAAAAf39/AAEAAABkAAAAAAAAABQAAABAHwAAAAAAACYAAAAAAAAAwOD//wAAAAAmAAAAZAAAABYAAABMAAAAAAAAAAAAAAAEAAAAAAAAAAEAAACZloMKAAAAACgAAAAoAAAAZAAAAGQAAAAAAAAAzMzMAAAAAABQAAAAUAAAAGQAAABkAAAAAAAAABcAAAAUAAAAAAAAAAAAAAD/fwAA/38AAAAAAAAJAAAABAAAAAAAAAAeAAAAaAAAAAAAAAAAAAAAAAAAAAAAAAAAAAAAECcAABAnAAAAAAAAAAAAAAAAAAAAAAAAAAAAAAAAAAAAAAAAAAAAABQAAAAAAAAAwMD/AAAAAABkAAAAMgAAAAAAAABkAAAAAAAAAH9/fwAKAAAAIgAAABgAAAAAAAAAAAAAAAAAAAAAAAAAAAAAAAAAAAAkAAAAJAAAAAAAAAAHAAAAAAAAAAAAAAAAAAAAAAAAAAAAAAAAAAAAf39/ACUAAABYAAAAAAAAAAAAAAAAAAAAAAAAAAAAAAAAAAAAAAAAAAAAAAAAAAAAAAAAAAAAAAA/AAAAAAAAAKCGAQAAAAAAAAAAAAAAAAAMAAAAAQAAAAAAAAAAAAAAAAAAAB8AAABUAAAAAAAABQAAAAEAAAAAAAAAAAAAAAAAAAAAAAAAAAAAAAAAAAAAAAAAAAAAAAJ/f38AAAAAA8zMzADAwP8Af39/AAAAAAAAAAAAAAAAAAAAAAAAAAAAIQAAABgAAAAUAAAA4CEAAK0aAAAVKwAAfhwAABAAAAAmAAAACAAAAIGgAAAAAAAA"/>
               </a:ext>
             </a:extLst>
           </p:cNvSpPr>
@@ -6655,7 +6655,7 @@
             <a:spLocks noGrp="1" noChangeArrowheads="1"/>
             <a:extLst>
               <a:ext uri="smNativeData">
-                <pr:smNativeData xmlns:pr="smNativeData" xmlns="smNativeData" val="SMDATA_15_mcIdaRMAAAAlAAAAZAAAAA0AAAAAAAAAAAAAAAAAAAAAAAAAAAAAAAACAAAAAAAAAAEAAABQAAAAAAAAAAAA4D8AAAAAAADgPwAAAAAAAOA/AAAAAAAA4D8AAAAAAADgPwAAAAAAAOA/AAAAAAAA4D8AAAAAAADgPwAAAAAAAOA/AAAAAAAA4D8CAAAAjAAAAAAAAAAAAAAA40oGDP///wgAAAAAAAAAAAAAAAAAAAAAAAAAAAAAAAAAAAAAZAAAAAEAAABAAAAAAAAAAAAAAAAAAAAAAAAAAAAAAAAAAAAAAAAAAAAAAAAAAAAAAAAAAAAAAAAAAAAAAAAAAAAAAAAAAAAAAAAAAAAAAAAAAAAAAAAAAAAAAAAAAAAAFAAAADwAAAAAAAAAAAAAAAAAAAkUAAAAAQAAABQAAAAUAAAAFAAAAAEAAAAAAAAAZAAAAGQAAAAAAAAAZAAAAGQAAAAVAAAAYAAAAAAAAAAAAAAADwAAACADAAAAAAAAAAAAAAEAAACgMgAAVgcAAKr4//8BAAAAf39/AAEAAABkAAAAAAAAABQAAABAHwAAAAAAACYAAAAAAAAAwOD//wAAAAAmAAAAZAAAABYAAABMAAAAAAAAAAAAAAAEAAAAAAAAAAEAAACZloMKAAAAACgAAAAoAAAAZAAAAGQAAAAAAAAAzMzMAAAAAABQAAAAUAAAAGQAAABkAAAAAAAAABcAAAAUAAAAAAAAAAAAAAD/fwAA/38AAAAAAAAJAAAABAAAAAAAAAAeAAAAaAAAAAAAAAAAAAAAAAAAAAAAAAAAAAAAECcAABAnAAAAAAAAAAAAAAAAAAAAAAAAAAAAAAAAAAAAAAAAAAAAABQAAAAAAAAAwMD/AAAAAABkAAAAMgAAAAAAAABkAAAAAAAAAH9/fwAKAAAAIgAAABgAAAAAAAAAAAAAAAAAAAAAAAAAAAAAAAAAAAAkAAAAJAAAAAAAAAAHAAAAAAAAAAAAAAAAAAAAAAAAAAAAAAAAAAAAf39/ACUAAABYAAAAAAAAAAAAAAAAAAAAAAAAAAAAAAAAAAAAAAAAAAAAAAAAAAAAAAAAAAAAAAA/AAAAAAAAAKCGAQAAAAAAAAAAAAAAAAAMAAAAAQAAAAAAAAAAAAAAAAAAAB8AAABUAAAAAAAABQAAAAEAAAAAAAAAAAAAAAAAAAAAAAAAAAAAAAAAAAAAAAAAAAAAAAJ/f38AAAAAA8zMzADAwP8Af39/AAAAAAAAAAAAAAAAAAAAAAAAAAAAIQAAABgAAAAUAAAAOiwAAK0aAABwNQAAfhwAABAAAAAmAAAACAAAAIGgAAAAAAAA"/>
+                <pr:smNativeData xmlns:pr="smNativeData" xmlns="smNativeData" val="SMDATA_15_r8odaRMAAAAlAAAAZAAAAA0AAAAAAAAAAAAAAAAAAAAAAAAAAAAAAAACAAAAAAAAAAEAAABQAAAAAAAAAAAA4D8AAAAAAADgPwAAAAAAAOA/AAAAAAAA4D8AAAAAAADgPwAAAAAAAOA/AAAAAAAA4D8AAAAAAADgPwAAAAAAAOA/AAAAAAAA4D8CAAAAjAAAAAAAAAAAAAAA40oGDP///wgAAAAAAAAAAAAAAAAAAAAAAAAAAAAAAAAAAAAAZAAAAAEAAABAAAAAAAAAAAAAAAAAAAAAAAAAAAAAAAAAAAAAAAAAAAAAAAAAAAAAAAAAAAAAAAAAAAAAAAAAAAAAAAAAAAAAAAAAAAAAAAAAAAAAAAAAAAAAAAAAAAAAFAAAADwAAAAAAAAAAAAAAAAAAAkUAAAAAQAAABQAAAAUAAAAFAAAAAEAAAAAAAAAZAAAAGQAAAAAAAAAZAAAAGQAAAAVAAAAYAAAAAAAAAAAAAAADwAAACADAAAAAAAAAAAAAAEAAACgMgAAVgcAAKr4//8BAAAAf39/AAEAAABkAAAAAAAAABQAAABAHwAAAAAAACYAAAAAAAAAwOD//wAAAAAmAAAAZAAAABYAAABMAAAAAAAAAAAAAAAEAAAAAAAAAAEAAACZloMKAAAAACgAAAAoAAAAZAAAAGQAAAAAAAAAzMzMAAAAAABQAAAAUAAAAGQAAABkAAAAAAAAABcAAAAUAAAAAAAAAAAAAAD/fwAA/38AAAAAAAAJAAAABAAAAAAAAAAeAAAAaAAAAAAAAAAAAAAAAAAAAAAAAAAAAAAAECcAABAnAAAAAAAAAAAAAAAAAAAAAAAAAAAAAAAAAAAAAAAAAAAAABQAAAAAAAAAwMD/AAAAAABkAAAAMgAAAAAAAABkAAAAAAAAAH9/fwAKAAAAIgAAABgAAAAAAAAAAAAAAAAAAAAAAAAAAAAAAAAAAAAkAAAAJAAAAAAAAAAHAAAAAAAAAAAAAAAAAAAAAAAAAAAAAAAAAAAAf39/ACUAAABYAAAAAAAAAAAAAAAAAAAAAAAAAAAAAAAAAAAAAAAAAAAAAAAAAAAAAAAAAAAAAAA/AAAAAAAAAKCGAQAAAAAAAAAAAAAAAAAMAAAAAQAAAAAAAAAAAAAAAAAAAB8AAABUAAAAAAAABQAAAAEAAAAAAAAAAAAAAAAAAAAAAAAAAAAAAAAAAAAAAAAAAAAAAAJ/f38AAAAAA8zMzADAwP8Af39/AAAAAAAAAAAAAAAAAAAAAAAAAAAAIQAAABgAAAAUAAAAOiwAAK0aAABwNQAAfhwAABAAAAAmAAAACAAAAIGgAAAAAAAA"/>
               </a:ext>
             </a:extLst>
           </p:cNvSpPr>
@@ -6768,7 +6768,7 @@
             <a:spLocks noGrp="1" noChangeArrowheads="1"/>
             <a:extLst>
               <a:ext uri="smNativeData">
-                <pr:smNativeData xmlns:pr="smNativeData" xmlns="smNativeData" val="SMDATA_15_mcIdaRMAAAAlAAAAZAAAAA0AAAAAAAAAAAAAAAAAAAAAAAAAAAAAAAAAAAAAAAAAAAEAAABQAAAAAAAAAAAA4D8AAAAAAADgPwAAAAAAAOA/AAAAAAAA4D8AAAAAAADgPwAAAAAAAOA/AAAAAAAA4D8AAAAAAADgPwAAAAAAAOA/AAAAAAAA4D8CAAAAjAAAAAAAAAAAAAAA40oGDP///wgAAAAAAAAAAAAAAAAAAAAAAAAAAAAAAAAAAAAAZAAAAAEAAABAAAAAAAAAAAAAAAAAAAAAAAAAAAAAAAAAAAAAAAAAAAAAAAAAAAAAAAAAAAAAAAAAAAAAAAAAAAAAAAAAAAAAAAAAAAAAAAAAAAAAAAAAAAAAAAAAAAAAFAAAADwAAAAAAAAAAAAAAAAAAAkUAAAAAQAAABQAAAAUAAAAFAAAAAEAAAAAAAAAZAAAAGQAAAAAAAAAZAAAAGQAAAAVAAAAYAAAAAAAAAAAAAAADwAAACADAAAAAAAAAAAAAAEAAACgMgAAVgcAAKr4//8BAAAAf39/AAEAAABkAAAAAAAAABQAAABAHwAAAAAAACYAAAAAAAAAwOD//wAAAAAmAAAAZAAAABYAAABMAAAAAAAAAAAAAAAEAAAAAAAAAAEAAACZloMKAAAAACgAAAAoAAAAZAAAAGQAAAAAAAAAzMzMAAAAAABQAAAAUAAAAGQAAABkAAAAAAAAABcAAAAUAAAAAAAAAAAAAAD/fwAA/38AAAAAAAAJAAAABAAAAAAAAAAeAAAAaAAAAAAAAAAAAAAAAAAAAAAAAAAAAAAAECcAABAnAAAAAAAAAAAAAAAAAAAAAAAAAAAAAAAAAAAAAAAAAAAAABQAAAAAAAAAwMD/AAAAAABkAAAAMgAAAAAAAABkAAAAAAAAAH9/fwAKAAAAIgAAABgAAAAAAAAAAAAAAAAAAAAAAAAAAAAAAAAAAAAkAAAAJAAAAAAAAAAHAAAAAAAAAAAAAAAAAAAAAAAAAAAAAAAAAAAAf39/ACUAAABYAAAAAAAAAAAAAAAAAAAAAAAAAAAAAAAAAAAAAAAAAAAAAAAAAAAAAAAAAAAAAAA/AAAAAAAAAKCGAQAAAAAAAAAAAAAAAAAMAAAAAQAAAAAAAAAAAAAAAAAAAB8AAABUAAAAAAAABQAAAAEAAAAAAAAAAAAAAAAAAAAAAAAAAAAAAAAAAAAAAAAAAAAAAAJ/f38AAAAAA8zMzADAwP8Af39/AAAAAAAAAAAAAAAAAAAAAAAAAAAAIQAAABgAAAAUAAAA0AIAADgEAABjFgAAxgsAABAAAAAmAAAACAAAAAAAAAAAAAAA"/>
+                <pr:smNativeData xmlns:pr="smNativeData" xmlns="smNativeData" val="SMDATA_15_r8odaRMAAAAlAAAAZAAAAA0AAAAAAAAAAAAAAAAAAAAAAAAAAAAAAAAAAAAAAAAAAAEAAABQAAAAAAAAAAAA4D8AAAAAAADgPwAAAAAAAOA/AAAAAAAA4D8AAAAAAADgPwAAAAAAAOA/AAAAAAAA4D8AAAAAAADgPwAAAAAAAOA/AAAAAAAA4D8CAAAAjAAAAAAAAAAAAAAA40oGDP///wgAAAAAAAAAAAAAAAAAAAAAAAAAAAAAAAAAAAAAZAAAAAEAAABAAAAAAAAAAAAAAAAAAAAAAAAAAAAAAAAAAAAAAAAAAAAAAAAAAAAAAAAAAAAAAAAAAAAAAAAAAAAAAAAAAAAAAAAAAAAAAAAAAAAAAAAAAAAAAAAAAAAAFAAAADwAAAAAAAAAAAAAAAAAAAkUAAAAAQAAABQAAAAUAAAAFAAAAAEAAAAAAAAAZAAAAGQAAAAAAAAAZAAAAGQAAAAVAAAAYAAAAAAAAAAAAAAADwAAACADAAAAAAAAAAAAAAEAAACgMgAAVgcAAKr4//8BAAAAf39/AAEAAABkAAAAAAAAABQAAABAHwAAAAAAACYAAAAAAAAAwOD//wAAAAAmAAAAZAAAABYAAABMAAAAAAAAAAAAAAAEAAAAAAAAAAEAAACZloMKAAAAACgAAAAoAAAAZAAAAGQAAAAAAAAAzMzMAAAAAABQAAAAUAAAAGQAAABkAAAAAAAAABcAAAAUAAAAAAAAAAAAAAD/fwAA/38AAAAAAAAJAAAABAAAAAAAAAAeAAAAaAAAAAAAAAAAAAAAAAAAAAAAAAAAAAAAECcAABAnAAAAAAAAAAAAAAAAAAAAAAAAAAAAAAAAAAAAAAAAAAAAABQAAAAAAAAAwMD/AAAAAABkAAAAMgAAAAAAAABkAAAAAAAAAH9/fwAKAAAAIgAAABgAAAAAAAAAAAAAAAAAAAAAAAAAAAAAAAAAAAAkAAAAJAAAAAAAAAAHAAAAAAAAAAAAAAAAAAAAAAAAAAAAAAAAAAAAf39/ACUAAABYAAAAAAAAAAAAAAAAAAAAAAAAAAAAAAAAAAAAAAAAAAAAAAAAAAAAAAAAAAAAAAA/AAAAAAAAAKCGAQAAAAAAAAAAAAAAAAAMAAAAAQAAAAAAAAAAAAAAAAAAAB8AAABUAAAAAAAABQAAAAEAAAAAAAAAAAAAAAAAAAAAAAAAAAAAAAAAAAAAAAAAAAAAAAJ/f38AAAAAA8zMzADAwP8Af39/AAAAAAAAAAAAAAAAAAAAAAAAAAAAIQAAABgAAAAUAAAA0AIAADgEAABjFgAAxgsAABAAAAAmAAAACAAAAAAAAAAAAAAA"/>
               </a:ext>
             </a:extLst>
           </p:cNvSpPr>
@@ -6797,7 +6797,7 @@
             <a:spLocks noGrp="1" noChangeArrowheads="1"/>
             <a:extLst>
               <a:ext uri="smNativeData">
-                <pr:smNativeData xmlns:pr="smNativeData" xmlns="smNativeData" val="SMDATA_15_mcIdaRMAAAAlAAAAZAAAAA0AAAAAAAAAAAAAAAAAAAAAAAAAAAAAAAAAAAAAAAAAAAEAAABQAAAAAAAAAAAA4D8AAAAAAADgPwAAAAAAAOA/AAAAAAAA4D8AAAAAAADgPwAAAAAAAOA/AAAAAAAA4D8AAAAAAADgPwAAAAAAAOA/AAAAAAAA4D8CAAAAjAAAAAAAAAAAAAAA40oGDP///wgAAAAAAAAAAAAAAAAAAAAAAAAAAAAAAAAAAAAAZAAAAAEAAABAAAAAAAAAAAAAAAAAAAAAAAAAAAAAAAAAAAAAAAAAAAAAAAAAAAAAAAAAAAAAAAAAAAAAAAAAAAAAAAAAAAAAAAAAAAAAAAAAAAAAAAAAAAAAAAAAAAAAFAAAADwAAAAAAAAAAAAAAAAAAAkUAAAAAQAAABQAAAAUAAAAFAAAAAEAAAAAAAAAZAAAAGQAAAAAAAAAZAAAAGQAAAAVAAAAYAAAAAAAAAAAAAAADwAAACADAAAAAAAAAAAAAAEAAACgMgAAVgcAAKr4//8BAAAAf39/AAEAAABkAAAAAAAAABQAAABAHwAAAAAAACYAAAAAAAAAwOD//wAAAAAmAAAAZAAAABYAAABMAAAAAAAAAAAAAAAEAAAAAAAAAAEAAACZloMKAAAAACgAAAAoAAAAZAAAAGQAAAAAAAAAzMzMAAAAAABQAAAAUAAAAGQAAABkAAAAAAAAABcAAAAUAAAAAAAAAAAAAAD/fwAA/38AAAAAAAAJAAAABAAAAAAAAAAeAAAAaAAAAAAAAAAAAAAAAAAAAAAAAAAAAAAAECcAABAnAAAAAAAAAAAAAAAAAAAAAAAAAAAAAAAAAAAAAAAAAAAAABQAAAAAAAAAwMD/AAAAAABkAAAAMgAAAAAAAABkAAAAAAAAAH9/fwAKAAAAIgAAABgAAAAAAAAAAAAAAAAAAAAAAAAAAAAAAAAAAAAkAAAAJAAAAAAAAAAHAAAAAAAAAAAAAAAAAAAAAAAAAAAAAAAAAAAAf39/ACUAAABYAAAAAAAAAAAAAAAAAAAAAAAAAAAAAAAAAAAAAAAAAAAAAAAAAAAAAAAAAAAAAAA/AAAAAAAAAKCGAQAAAAAAAAAAAAAAAAAMAAAAAQAAAAAAAAAAAAAAAAAAAB8AAABUAAAAAAAABQAAAAEAAAAAAAAAAAAAAAAAAAAAAAAAAAAAAAAAAAAAAAAAAAAAAAJ/f38AAAAAA8zMzADAwP8Af39/AAAAAAAAAAAAAAAAAAAAAAAAAAAAIQAAABgAAAAUAAAAjhcAADgEAABwNQAAAiYAABAAAAAmAAAACAAAAAAAAAAAAAAA"/>
+                <pr:smNativeData xmlns:pr="smNativeData" xmlns="smNativeData" val="SMDATA_15_r8odaRMAAAAlAAAAZAAAAA0AAAAAAAAAAAAAAAAAAAAAAAAAAAAAAAAAAAAAAAAAAAEAAABQAAAAAAAAAAAA4D8AAAAAAADgPwAAAAAAAOA/AAAAAAAA4D8AAAAAAADgPwAAAAAAAOA/AAAAAAAA4D8AAAAAAADgPwAAAAAAAOA/AAAAAAAA4D8CAAAAjAAAAAAAAAAAAAAA40oGDP///wgAAAAAAAAAAAAAAAAAAAAAAAAAAAAAAAAAAAAAZAAAAAEAAABAAAAAAAAAAAAAAAAAAAAAAAAAAAAAAAAAAAAAAAAAAAAAAAAAAAAAAAAAAAAAAAAAAAAAAAAAAAAAAAAAAAAAAAAAAAAAAAAAAAAAAAAAAAAAAAAAAAAAFAAAADwAAAAAAAAAAAAAAAAAAAkUAAAAAQAAABQAAAAUAAAAFAAAAAEAAAAAAAAAZAAAAGQAAAAAAAAAZAAAAGQAAAAVAAAAYAAAAAAAAAAAAAAADwAAACADAAAAAAAAAAAAAAEAAACgMgAAVgcAAKr4//8BAAAAf39/AAEAAABkAAAAAAAAABQAAABAHwAAAAAAACYAAAAAAAAAwOD//wAAAAAmAAAAZAAAABYAAABMAAAAAAAAAAAAAAAEAAAAAAAAAAEAAACZloMKAAAAACgAAAAoAAAAZAAAAGQAAAAAAAAAzMzMAAAAAABQAAAAUAAAAGQAAABkAAAAAAAAABcAAAAUAAAAAAAAAAAAAAD/fwAA/38AAAAAAAAJAAAABAAAAAAAAAAeAAAAaAAAAAAAAAAAAAAAAAAAAAAAAAAAAAAAECcAABAnAAAAAAAAAAAAAAAAAAAAAAAAAAAAAAAAAAAAAAAAAAAAABQAAAAAAAAAwMD/AAAAAABkAAAAMgAAAAAAAABkAAAAAAAAAH9/fwAKAAAAIgAAABgAAAAAAAAAAAAAAAAAAAAAAAAAAAAAAAAAAAAkAAAAJAAAAAAAAAAHAAAAAAAAAAAAAAAAAAAAAAAAAAAAAAAAAAAAf39/ACUAAABYAAAAAAAAAAAAAAAAAAAAAAAAAAAAAAAAAAAAAAAAAAAAAAAAAAAAAAAAAAAAAAA/AAAAAAAAAKCGAQAAAAAAAAAAAAAAAAAMAAAAAQAAAAAAAAAAAAAAAAAAAB8AAABUAAAAAAAABQAAAAEAAAAAAAAAAAAAAAAAAAAAAAAAAAAAAAAAAAAAAAAAAAAAAAJ/f38AAAAAA8zMzADAwP8Af39/AAAAAAAAAAAAAAAAAAAAAAAAAAAAIQAAABgAAAAUAAAAjhcAADgEAABwNQAAAiYAABAAAAAmAAAACAAAAAAAAAAAAAAA"/>
               </a:ext>
             </a:extLst>
           </p:cNvSpPr>
@@ -6864,7 +6864,7 @@
             <a:spLocks noGrp="1" noChangeArrowheads="1"/>
             <a:extLst>
               <a:ext uri="smNativeData">
-                <pr:smNativeData xmlns:pr="smNativeData" xmlns="smNativeData" val="SMDATA_15_mcIdaRMAAAAlAAAAZAAAAA0AAAAAAAAAAAAAAAAAAAAAAAAAAAAAAAAAAAAAAAAAAAEAAABQAAAAAAAAAAAA4D8AAAAAAADgPwAAAAAAAOA/AAAAAAAA4D8AAAAAAADgPwAAAAAAAOA/AAAAAAAA4D8AAAAAAADgPwAAAAAAAOA/AAAAAAAA4D8CAAAAjAAAAAAAAAAAAAAA40oGDP///wgAAAAAAAAAAAAAAAAAAAAAAAAAAAAAAAAAAAAAZAAAAAEAAABAAAAAAAAAAAAAAAAAAAAAAAAAAAAAAAAAAAAAAAAAAAAAAAAAAAAAAAAAAAAAAAAAAAAAAAAAAAAAAAAAAAAAAAAAAAAAAAAAAAAAAAAAAAAAAAAAAAAAFAAAADwAAAAAAAAAAAAAAAAAAAkUAAAAAQAAABQAAAAUAAAAFAAAAAEAAAAAAAAAZAAAAGQAAAAAAAAAZAAAAGQAAAAVAAAAYAAAAAAAAAAAAAAADwAAACADAAAAAAAAAAAAAAEAAACgMgAAVgcAAKr4//8BAAAAf39/AAEAAABkAAAAAAAAABQAAABAHwAAAAAAACYAAAAAAAAAwOD//wAAAAAmAAAAZAAAABYAAABMAAAAAAAAAAAAAAAEAAAAAAAAAAEAAACZloMKAAAAACgAAAAoAAAAZAAAAGQAAAAAAAAAzMzMAAAAAABQAAAAUAAAAGQAAABkAAAAAAAAABcAAAAUAAAAAAAAAAAAAAD/fwAA/38AAAAAAAAJAAAABAAAAAAAAAAeAAAAaAAAAAAAAAAAAAAAAAAAAAAAAAAAAAAAECcAABAnAAAAAAAAAAAAAAAAAAAAAAAAAAAAAAAAAAAAAAAAAAAAABQAAAAAAAAAwMD/AAAAAABkAAAAMgAAAAAAAABkAAAAAAAAAH9/fwAKAAAAIgAAABgAAAAAAAAAAAAAAAAAAAAAAAAAAAAAAAAAAAAkAAAAJAAAAAAAAAAHAAAAAAAAAAAAAAAAAAAAAAAAAAAAAAAAAAAAf39/ACUAAABYAAAAAAAAAAAAAAAAAAAAAAAAAAAAAAAAAAAAAAAAAAAAAAAAAAAAAAAAAAAAAAA/AAAAAAAAAKCGAQAAAAAAAAAAAAAAAAAMAAAAAQAAAAAAAAAAAAAAAAAAAB8AAABUAAAAAAAABQAAAAEAAAAAAAAAAAAAAAAAAAAAAAAAAAAAAAAAAAAAAAAAAAAAAAJ/f38AAAAAA8zMzADAwP8Af39/AAAAAAAAAAAAAAAAAAAAAAAAAAAAIQAAABgAAAAUAAAAAQgAAGonAAB1MQAAMCoAABAAAAAmAAAACAAAAAGAAAAAAAAA"/>
+                <pr:smNativeData xmlns:pr="smNativeData" xmlns="smNativeData" val="SMDATA_15_r8odaRMAAAAlAAAAZAAAAA0AAAAAAAAAAAAAAAAAAAAAAAAAAAAAAAAAAAAAAAAAAAEAAABQAAAAAAAAAAAA4D8AAAAAAADgPwAAAAAAAOA/AAAAAAAA4D8AAAAAAADgPwAAAAAAAOA/AAAAAAAA4D8AAAAAAADgPwAAAAAAAOA/AAAAAAAA4D8CAAAAjAAAAAAAAAAAAAAA40oGDP///wgAAAAAAAAAAAAAAAAAAAAAAAAAAAAAAAAAAAAAZAAAAAEAAABAAAAAAAAAAAAAAAAAAAAAAAAAAAAAAAAAAAAAAAAAAAAAAAAAAAAAAAAAAAAAAAAAAAAAAAAAAAAAAAAAAAAAAAAAAAAAAAAAAAAAAAAAAAAAAAAAAAAAFAAAADwAAAAAAAAAAAAAAAAAAAkUAAAAAQAAABQAAAAUAAAAFAAAAAEAAAAAAAAAZAAAAGQAAAAAAAAAZAAAAGQAAAAVAAAAYAAAAAAAAAAAAAAADwAAACADAAAAAAAAAAAAAAEAAACgMgAAVgcAAKr4//8BAAAAf39/AAEAAABkAAAAAAAAABQAAABAHwAAAAAAACYAAAAAAAAAwOD//wAAAAAmAAAAZAAAABYAAABMAAAAAAAAAAAAAAAEAAAAAAAAAAEAAACZloMKAAAAACgAAAAoAAAAZAAAAGQAAAAAAAAAzMzMAAAAAABQAAAAUAAAAGQAAABkAAAAAAAAABcAAAAUAAAAAAAAAAAAAAD/fwAA/38AAAAAAAAJAAAABAAAAAAAAAAeAAAAaAAAAAAAAAAAAAAAAAAAAAAAAAAAAAAAECcAABAnAAAAAAAAAAAAAAAAAAAAAAAAAAAAAAAAAAAAAAAAAAAAABQAAAAAAAAAwMD/AAAAAABkAAAAMgAAAAAAAABkAAAAAAAAAH9/fwAKAAAAIgAAABgAAAAAAAAAAAAAAAAAAAAAAAAAAAAAAAAAAAAkAAAAJAAAAAAAAAAHAAAAAAAAAAAAAAAAAAAAAAAAAAAAAAAAAAAAf39/ACUAAABYAAAAAAAAAAAAAAAAAAAAAAAAAAAAAAAAAAAAAAAAAAAAAAAAAAAAAAAAAAAAAAA/AAAAAAAAAKCGAQAAAAAAAAAAAAAAAAAMAAAAAQAAAAAAAAAAAAAAAAAAAB8AAABUAAAAAAAABQAAAAEAAAAAAAAAAAAAAAAAAAAAAAAAAAAAAAAAAAAAAAAAAAAAAAJ/f38AAAAAA8zMzADAwP8Af39/AAAAAAAAAAAAAAAAAAAAAAAAAAAAIQAAABgAAAAUAAAAAQgAAGonAAB1MQAAMCoAABAAAAAmAAAACAAAAAGAAAAAAAAA"/>
               </a:ext>
             </a:extLst>
           </p:cNvSpPr>
@@ -7016,7 +7016,7 @@
             <a:spLocks noGrp="1" noChangeArrowheads="1"/>
             <a:extLst>
               <a:ext uri="smNativeData">
-                <pr:smNativeData xmlns:pr="smNativeData" xmlns="smNativeData" val="SMDATA_15_mcIdaRMAAAAlAAAAZAAAAA0AAAAAAAAAAAAAAAAAAAAAAAAAAAAAAAAAAAAAAAAAAAEAAABQAAAAAAAAAAAA4D8AAAAAAADgPwAAAAAAAOA/AAAAAAAA4D8AAAAAAADgPwAAAAAAAOA/AAAAAAAA4D8AAAAAAADgPwAAAAAAAOA/AAAAAAAA4D8CAAAAjAAAAAAAAAAAAAAA40oGDP///wgAAAAAAAAAAAAAAAAAAAAAAAAAAAAAAAAAAAAAZAAAAAEAAABAAAAAAAAAAAAAAAAAAAAAAAAAAAAAAAAAAAAAAAAAAAAAAAAAAAAAAAAAAAAAAAAAAAAAAAAAAAAAAAAAAAAAAAAAAAAAAAAAAAAAAAAAAAAAAAAAAAAAFAAAADwAAAAAAAAAAAAAAAAAAAkUAAAAAQAAABQAAAAUAAAAFAAAAAEAAAAAAAAAZAAAAGQAAAAAAAAAZAAAAGQAAAAVAAAAYAAAAAAAAAAAAAAADwAAACADAAAAAAAAAAAAAAEAAACgMgAAVgcAAKr4//8BAAAAf39/AAEAAABkAAAAAAAAABQAAABAHwAAAAAAACYAAAAAAAAAwOD//wAAAAAmAAAAZAAAABYAAABMAAAAAAAAAAAAAAAEAAAAAAAAAAEAAACZloMKAAAAACgAAAAoAAAAZAAAAGQAAAAAAAAAzMzMAAAAAABQAAAAUAAAAGQAAABkAAAAAAAAABcAAAAUAAAAAAAAAAAAAAD/fwAA/38AAAAAAAAJAAAABAAAAAAAAAAeAAAAaAAAAAAAAAAAAAAAAAAAAAAAAAAAAAAAECcAABAnAAAAAAAAAAAAAAAAAAAAAAAAAAAAAAAAAAAAAAAAAAAAABQAAAAAAAAAwMD/AAAAAABkAAAAMgAAAAAAAABkAAAAAAAAAH9/fwAKAAAAIgAAABgAAAAAAAAAAAAAAAAAAAAAAAAAAAAAAAAAAAAkAAAAJAAAAAAAAAAHAAAAAAAAAAAAAAAAAAAAAAAAAAAAAAAAAAAAf39/ACUAAABYAAAAAAAAAAAAAAAAAAAAAAAAAAAAAAAAAAAAAAAAAAAAAAAAAAAAAAAAAAAAAAA/AAAAAAAAAKCGAQAAAAAAAAAAAAAAAAAMAAAAAQAAAAAAAAAAAAAAAAAAAB8AAABUAAAAAAAABQAAAAEAAAAAAAAAAAAAAAAAAAAAAAAAAAAAAAAAAAAAAAAAAAAAAAJ/f38AAAAAA8zMzADAwP8Af39/AAAAAAAAAAAAAAAAAAAAAAAAAAAAIQAAABgAAAAUAAAA0AIAADgEAABjFgAAxgsAABAAAAAmAAAACAAAAAAAAAAAAAAA"/>
+                <pr:smNativeData xmlns:pr="smNativeData" xmlns="smNativeData" val="SMDATA_15_r8odaRMAAAAlAAAAZAAAAA0AAAAAAAAAAAAAAAAAAAAAAAAAAAAAAAAAAAAAAAAAAAEAAABQAAAAAAAAAAAA4D8AAAAAAADgPwAAAAAAAOA/AAAAAAAA4D8AAAAAAADgPwAAAAAAAOA/AAAAAAAA4D8AAAAAAADgPwAAAAAAAOA/AAAAAAAA4D8CAAAAjAAAAAAAAAAAAAAA40oGDP///wgAAAAAAAAAAAAAAAAAAAAAAAAAAAAAAAAAAAAAZAAAAAEAAABAAAAAAAAAAAAAAAAAAAAAAAAAAAAAAAAAAAAAAAAAAAAAAAAAAAAAAAAAAAAAAAAAAAAAAAAAAAAAAAAAAAAAAAAAAAAAAAAAAAAAAAAAAAAAAAAAAAAAFAAAADwAAAAAAAAAAAAAAAAAAAkUAAAAAQAAABQAAAAUAAAAFAAAAAEAAAAAAAAAZAAAAGQAAAAAAAAAZAAAAGQAAAAVAAAAYAAAAAAAAAAAAAAADwAAACADAAAAAAAAAAAAAAEAAACgMgAAVgcAAKr4//8BAAAAf39/AAEAAABkAAAAAAAAABQAAABAHwAAAAAAACYAAAAAAAAAwOD//wAAAAAmAAAAZAAAABYAAABMAAAAAAAAAAAAAAAEAAAAAAAAAAEAAACZloMKAAAAACgAAAAoAAAAZAAAAGQAAAAAAAAAzMzMAAAAAABQAAAAUAAAAGQAAABkAAAAAAAAABcAAAAUAAAAAAAAAAAAAAD/fwAA/38AAAAAAAAJAAAABAAAAAAAAAAeAAAAaAAAAAAAAAAAAAAAAAAAAAAAAAAAAAAAECcAABAnAAAAAAAAAAAAAAAAAAAAAAAAAAAAAAAAAAAAAAAAAAAAABQAAAAAAAAAwMD/AAAAAABkAAAAMgAAAAAAAABkAAAAAAAAAH9/fwAKAAAAIgAAABgAAAAAAAAAAAAAAAAAAAAAAAAAAAAAAAAAAAAkAAAAJAAAAAAAAAAHAAAAAAAAAAAAAAAAAAAAAAAAAAAAAAAAAAAAf39/ACUAAABYAAAAAAAAAAAAAAAAAAAAAAAAAAAAAAAAAAAAAAAAAAAAAAAAAAAAAAAAAAAAAAA/AAAAAAAAAKCGAQAAAAAAAAAAAAAAAAAMAAAAAQAAAAAAAAAAAAAAAAAAAB8AAABUAAAAAAAABQAAAAEAAAAAAAAAAAAAAAAAAAAAAAAAAAAAAAAAAAAAAAAAAAAAAAJ/f38AAAAAA8zMzADAwP8Af39/AAAAAAAAAAAAAAAAAAAAAAAAAAAAIQAAABgAAAAUAAAA0AIAADgEAABjFgAAxgsAABAAAAAmAAAACAAAAAAAAAAAAAAA"/>
               </a:ext>
             </a:extLst>
           </p:cNvSpPr>
@@ -7045,7 +7045,7 @@
             <a:spLocks noGrp="1" noChangeArrowheads="1"/>
             <a:extLst>
               <a:ext uri="smNativeData">
-                <pr:smNativeData xmlns:pr="smNativeData" xmlns="smNativeData" val="SMDATA_15_mcIdaRMAAAAlAAAAZAAAAA0AAAAAAAAAAAAAAAAAAAAAAAAAAAAAAAAAAAAAAAAAAAEAAABQAAAAAAAAAAAA4D8AAAAAAADgPwAAAAAAAOA/AAAAAAAA4D8AAAAAAADgPwAAAAAAAOA/AAAAAAAA4D8AAAAAAADgPwAAAAAAAOA/AAAAAAAA4D8CAAAAjAAAAAAAAAAAAAAA40oGDP///wgAAAAAAAAAAAAAAAAAAAAAAAAAAAAAAAAAAAAAZAAAAAEAAABAAAAAAAAAAAAAAAAAAAAAAAAAAAAAAAAAAAAAAAAAAAAAAAAAAAAAAAAAAAAAAAAAAAAAAAAAAAAAAAAAAAAAAAAAAAAAAAAAAAAAAAAAAAAAAAAAAAAAFAAAADwAAAAAAAAAAAAAAAAAAAkUAAAAAQAAABQAAAAUAAAAFAAAAAEAAAAAAAAAZAAAAGQAAAAAAAAAZAAAAGQAAAAVAAAAYAAAAAAAAAAAAAAADwAAACADAAAAAAAAAAAAAAEAAACgMgAAVgcAAKr4//8BAAAAf39/AAEAAABkAAAAAAAAABQAAABAHwAAAAAAACYAAAAAAAAAwOD//wAAAAAmAAAAZAAAABYAAABMAAAAAAAAAAAAAAAEAAAAAAAAAAEAAACZloMKAAAAACgAAAAoAAAAZAAAAGQAAAAAAAAAzMzMAAAAAABQAAAAUAAAAGQAAABkAAAAAAAAABcAAAAUAAAAAAAAAAAAAAD/fwAA/38AAAAAAAAJAAAABAAAAAAAAAAeAAAAaAAAAAAAAAAAAAAAAAAAAAAAAAAAAAAAECcAABAnAAAAAAAAAAAAAAAAAAAAAAAAAAAAAAAAAAAAAAAAAAAAABQAAAAAAAAAwMD/AAAAAABkAAAAMgAAAAAAAABkAAAAAAAAAH9/fwAKAAAAIgAAABgAAAAAAAAAAAAAAAAAAAAAAAAAAAAAAAAAAAAkAAAAJAAAAAAAAAAHAAAAAAAAAAAAAAAAAAAAAAAAAAAAAAAAAAAAf39/ACUAAABYAAAAAAAAAAAAAAAAAAAAAAAAAAAAAAAAAAAAAAAAAAAAAAAAAAAAAAAAAAAAAAA/AAAAAAAAAKCGAQAAAAAAAAAAAAAAAAAMAAAAAQAAAAAAAAAAAAAAAAAAAB8AAABUAAAAAAAABQAAAAEAAAAAAAAAAAAAAAAAAAAAAAAAAAAAAAAAAAAAAAAAAAAAAAJ/f38AAAAAA8zMzADAwP8Af39/AAAAAAAAAAAAAAAAAAAAAAAAAAAAIQAAABgAAAAUAAAAjhcAADgEAABwNQAAAiYAABAAAAAmAAAACAAAAAAAAAAAAAAA"/>
+                <pr:smNativeData xmlns:pr="smNativeData" xmlns="smNativeData" val="SMDATA_15_r8odaRMAAAAlAAAAZAAAAA0AAAAAAAAAAAAAAAAAAAAAAAAAAAAAAAAAAAAAAAAAAAEAAABQAAAAAAAAAAAA4D8AAAAAAADgPwAAAAAAAOA/AAAAAAAA4D8AAAAAAADgPwAAAAAAAOA/AAAAAAAA4D8AAAAAAADgPwAAAAAAAOA/AAAAAAAA4D8CAAAAjAAAAAAAAAAAAAAA40oGDP///wgAAAAAAAAAAAAAAAAAAAAAAAAAAAAAAAAAAAAAZAAAAAEAAABAAAAAAAAAAAAAAAAAAAAAAAAAAAAAAAAAAAAAAAAAAAAAAAAAAAAAAAAAAAAAAAAAAAAAAAAAAAAAAAAAAAAAAAAAAAAAAAAAAAAAAAAAAAAAAAAAAAAAFAAAADwAAAAAAAAAAAAAAAAAAAkUAAAAAQAAABQAAAAUAAAAFAAAAAEAAAAAAAAAZAAAAGQAAAAAAAAAZAAAAGQAAAAVAAAAYAAAAAAAAAAAAAAADwAAACADAAAAAAAAAAAAAAEAAACgMgAAVgcAAKr4//8BAAAAf39/AAEAAABkAAAAAAAAABQAAABAHwAAAAAAACYAAAAAAAAAwOD//wAAAAAmAAAAZAAAABYAAABMAAAAAAAAAAAAAAAEAAAAAAAAAAEAAACZloMKAAAAACgAAAAoAAAAZAAAAGQAAAAAAAAAzMzMAAAAAABQAAAAUAAAAGQAAABkAAAAAAAAABcAAAAUAAAAAAAAAAAAAAD/fwAA/38AAAAAAAAJAAAABAAAAAAAAAAeAAAAaAAAAAAAAAAAAAAAAAAAAAAAAAAAAAAAECcAABAnAAAAAAAAAAAAAAAAAAAAAAAAAAAAAAAAAAAAAAAAAAAAABQAAAAAAAAAwMD/AAAAAABkAAAAMgAAAAAAAABkAAAAAAAAAH9/fwAKAAAAIgAAABgAAAAAAAAAAAAAAAAAAAAAAAAAAAAAAAAAAAAkAAAAJAAAAAAAAAAHAAAAAAAAAAAAAAAAAAAAAAAAAAAAAAAAAAAAf39/ACUAAABYAAAAAAAAAAAAAAAAAAAAAAAAAAAAAAAAAAAAAAAAAAAAAAAAAAAAAAAAAAAAAAA/AAAAAAAAAKCGAQAAAAAAAAAAAAAAAAAMAAAAAQAAAAAAAAAAAAAAAAAAAB8AAABUAAAAAAAABQAAAAEAAAAAAAAAAAAAAAAAAAAAAAAAAAAAAAAAAAAAAAAAAAAAAAJ/f38AAAAAA8zMzADAwP8Af39/AAAAAAAAAAAAAAAAAAAAAAAAAAAAIQAAABgAAAAUAAAAjhcAADgEAABwNQAAAiYAABAAAAAmAAAACAAAAAAAAAAAAAAA"/>
               </a:ext>
             </a:extLst>
           </p:cNvSpPr>
@@ -7112,7 +7112,7 @@
             <a:spLocks noGrp="1" noChangeArrowheads="1"/>
             <a:extLst>
               <a:ext uri="smNativeData">
-                <pr:smNativeData xmlns:pr="smNativeData" xmlns="smNativeData" val="SMDATA_15_mcIdaRMAAAAlAAAAZAAAAA0AAAAAAAAAAAAAAAAAAAAAAAAAAAAAAAAAAAAAAAAAAAEAAABQAAAAAAAAAAAA4D8AAAAAAADgPwAAAAAAAOA/AAAAAAAA4D8AAAAAAADgPwAAAAAAAOA/AAAAAAAA4D8AAAAAAADgPwAAAAAAAOA/AAAAAAAA4D8CAAAAjAAAAAAAAAAAAAAA40oGDP///wgAAAAAAAAAAAAAAAAAAAAAAAAAAAAAAAAAAAAAZAAAAAEAAABAAAAAAAAAAAAAAAAAAAAAAAAAAAAAAAAAAAAAAAAAAAAAAAAAAAAAAAAAAAAAAAAAAAAAAAAAAAAAAAAAAAAAAAAAAAAAAAAAAAAAAAAAAAAAAAAAAAAAFAAAADwAAAAAAAAAAAAAAAAAAAkUAAAAAQAAABQAAAAUAAAAFAAAAAEAAAAAAAAAZAAAAGQAAAAAAAAAZAAAAGQAAAAVAAAAYAAAAAAAAAAAAAAADwAAACADAAAAAAAAAAAAAAEAAACgMgAAVgcAAKr4//8BAAAAf39/AAEAAABkAAAAAAAAABQAAABAHwAAAAAAACYAAAAAAAAAwOD//wAAAAAmAAAAZAAAABYAAABMAAAAAAAAAAAAAAAEAAAAAAAAAAEAAACZloMKAAAAACgAAAAoAAAAZAAAAGQAAAAAAAAAzMzMAAAAAABQAAAAUAAAAGQAAABkAAAAAAAAABcAAAAUAAAAAAAAAAAAAAD/fwAA/38AAAAAAAAJAAAABAAAAAAAAAAeAAAAaAAAAAAAAAAAAAAAAAAAAAAAAAAAAAAAECcAABAnAAAAAAAAAAAAAAAAAAAAAAAAAAAAAAAAAAAAAAAAAAAAABQAAAAAAAAAwMD/AAAAAABkAAAAMgAAAAAAAABkAAAAAAAAAH9/fwAKAAAAIgAAABgAAAAAAAAAAAAAAAAAAAAAAAAAAAAAAAAAAAAkAAAAJAAAAAAAAAAHAAAAAAAAAAAAAAAAAAAAAAAAAAAAAAAAAAAAf39/ACUAAABYAAAAAAAAAAAAAAAAAAAAAAAAAAAAAAAAAAAAAAAAAAAAAAAAAAAAAAAAAAAAAAA/AAAAAAAAAKCGAQAAAAAAAAAAAAAAAAAMAAAAAQAAAAAAAAAAAAAAAAAAAB8AAABUAAAAAAAABQAAAAEAAAAAAAAAAAAAAAAAAAAAAAAAAAAAAAAAAAAAAAAAAAAAAAJ/f38AAAAAA8zMzADAwP8Af39/AAAAAAAAAAAAAAAAAAAAAAAAAAAAIQAAABgAAAAUAAAAAQgAABgVAABKFgAAAiYAABAAAAAmAAAACAAAAAEAAAAAAAAA"/>
+                <pr:smNativeData xmlns:pr="smNativeData" xmlns="smNativeData" val="SMDATA_15_r8odaRMAAAAlAAAAZAAAAA0AAAAAAAAAAAAAAAAAAAAAAAAAAAAAAAAAAAAAAAAAAAEAAABQAAAAAAAAAAAA4D8AAAAAAADgPwAAAAAAAOA/AAAAAAAA4D8AAAAAAADgPwAAAAAAAOA/AAAAAAAA4D8AAAAAAADgPwAAAAAAAOA/AAAAAAAA4D8CAAAAjAAAAAAAAAAAAAAA40oGDP///wgAAAAAAAAAAAAAAAAAAAAAAAAAAAAAAAAAAAAAZAAAAAEAAABAAAAAAAAAAAAAAAAAAAAAAAAAAAAAAAAAAAAAAAAAAAAAAAAAAAAAAAAAAAAAAAAAAAAAAAAAAAAAAAAAAAAAAAAAAAAAAAAAAAAAAAAAAAAAAAAAAAAAFAAAADwAAAAAAAAAAAAAAAAAAAkUAAAAAQAAABQAAAAUAAAAFAAAAAEAAAAAAAAAZAAAAGQAAAAAAAAAZAAAAGQAAAAVAAAAYAAAAAAAAAAAAAAADwAAACADAAAAAAAAAAAAAAEAAACgMgAAVgcAAKr4//8BAAAAf39/AAEAAABkAAAAAAAAABQAAABAHwAAAAAAACYAAAAAAAAAwOD//wAAAAAmAAAAZAAAABYAAABMAAAAAAAAAAAAAAAEAAAAAAAAAAEAAACZloMKAAAAACgAAAAoAAAAZAAAAGQAAAAAAAAAzMzMAAAAAABQAAAAUAAAAGQAAABkAAAAAAAAABcAAAAUAAAAAAAAAAAAAAD/fwAA/38AAAAAAAAJAAAABAAAAAAAAAAeAAAAaAAAAAAAAAAAAAAAAAAAAAAAAAAAAAAAECcAABAnAAAAAAAAAAAAAAAAAAAAAAAAAAAAAAAAAAAAAAAAAAAAABQAAAAAAAAAwMD/AAAAAABkAAAAMgAAAAAAAABkAAAAAAAAAH9/fwAKAAAAIgAAABgAAAAAAAAAAAAAAAAAAAAAAAAAAAAAAAAAAAAkAAAAJAAAAAAAAAAHAAAAAAAAAAAAAAAAAAAAAAAAAAAAAAAAAAAAf39/ACUAAABYAAAAAAAAAAAAAAAAAAAAAAAAAAAAAAAAAAAAAAAAAAAAAAAAAAAAAAAAAAAAAAA/AAAAAAAAAKCGAQAAAAAAAAAAAAAAAAAMAAAAAQAAAAAAAAAAAAAAAAAAAB8AAABUAAAAAAAABQAAAAEAAAAAAAAAAAAAAAAAAAAAAAAAAAAAAAAAAAAAAAAAAAAAAAJ/f38AAAAAA8zMzADAwP8Af39/AAAAAAAAAAAAAAAAAAAAAAAAAAAAIQAAABgAAAAUAAAAAQgAABgVAABKFgAAAiYAABAAAAAmAAAACAAAAAEAAAAAAAAA"/>
               </a:ext>
             </a:extLst>
           </p:cNvSpPr>
@@ -7184,7 +7184,7 @@
             <a:spLocks noGrp="1" noChangeArrowheads="1"/>
             <a:extLst>
               <a:ext uri="smNativeData">
-                <pr:smNativeData xmlns:pr="smNativeData" xmlns="smNativeData" val="SMDATA_15_mcIdaRMAAAAlAAAAZAAAAA0AAAAAAAAAAAAAAAAAAAAAAAAAAAAAAAAAAAAAAAAAAAEAAABQAAAAAAAAAAAA4D8AAAAAAADgPwAAAAAAAOA/AAAAAAAA4D8AAAAAAADgPwAAAAAAAOA/AAAAAAAA4D8AAAAAAADgPwAAAAAAAOA/AAAAAAAA4D8CAAAAjAAAAAAAAAAAAAAA40oGDP///wgAAAAAAAAAAAAAAAAAAAAAAAAAAAAAAAAAAAAAZAAAAAEAAABAAAAAAAAAAAAAAAAAAAAAAAAAAAAAAAAAAAAAAAAAAAAAAAAAAAAAAAAAAAAAAAAAAAAAAAAAAAAAAAAAAAAAAAAAAAAAAAAAAAAAAAAAAAAAAAAAAAAAFAAAADwAAAAAAAAAAAAAAAAAAAkUAAAAAQAAABQAAAAUAAAAFAAAAAEAAAAAAAAAZAAAAGQAAAAAAAAAZAAAAGQAAAAVAAAAYAAAAAAAAAAAAAAADwAAACADAAAAAAAAAAAAAAEAAACgMgAAVgcAAKr4//8BAAAAf39/AAEAAABkAAAAAAAAABQAAABAHwAAAAAAACYAAAAAAAAAwOD//wAAAAAmAAAAZAAAABYAAABMAAAAAAAAAAAAAAAEAAAAAAAAAAEAAACZloMKAAAAACgAAAAoAAAAZAAAAGQAAAAAAAAAzMzMAAAAAABQAAAAUAAAAGQAAABkAAAAAAAAABcAAAAUAAAAAAAAAAAAAAD/fwAA/38AAAAAAAAJAAAABAAAAAAAAAAeAAAAaAAAAAAAAAAAAAAAAAAAAAAAAAAAAAAAECcAABAnAAAAAAAAAAAAAAAAAAAAAAAAAAAAAAAAAAAAAAAAAAAAABQAAAAAAAAAwMD/AAAAAABkAAAAMgAAAAAAAABkAAAAAAAAAH9/fwAKAAAAIgAAABgAAAAAAAAAAAAAAAAAAAAAAAAAAAAAAAAAAAAkAAAAJAAAAAAAAAAHAAAAAAAAAAAAAAAAAAAAAAAAAAAAAAAAAAAAf39/ACUAAABYAAAAAAAAAAAAAAAAAAAAAAAAAAAAAAAAAAAAAAAAAAAAAAAAAAAAAAAAAAAAAAA/AAAAAAAAAKCGAQAAAAAAAAAAAAAAAAAMAAAAAQAAAAAAAAAAAAAAAAAAAB8AAABUAAAAAAAABQAAAAEAAAAAAAAAAAAAAAAAAAAAAAAAAAAAAAAAAAAAAAAAAAAAAAJ/f38AAAAAA8zMzADAwP8Af39/AAAAAAAAAAAAAAAAAAAAAAAAAAAAIQAAABgAAAAUAAAAAQgAAGonAAB1MQAAMCoAABAAAAAmAAAACAAAAAGAAAAAAAAA"/>
+                <pr:smNativeData xmlns:pr="smNativeData" xmlns="smNativeData" val="SMDATA_15_r8odaRMAAAAlAAAAZAAAAA0AAAAAAAAAAAAAAAAAAAAAAAAAAAAAAAAAAAAAAAAAAAEAAABQAAAAAAAAAAAA4D8AAAAAAADgPwAAAAAAAOA/AAAAAAAA4D8AAAAAAADgPwAAAAAAAOA/AAAAAAAA4D8AAAAAAADgPwAAAAAAAOA/AAAAAAAA4D8CAAAAjAAAAAAAAAAAAAAA40oGDP///wgAAAAAAAAAAAAAAAAAAAAAAAAAAAAAAAAAAAAAZAAAAAEAAABAAAAAAAAAAAAAAAAAAAAAAAAAAAAAAAAAAAAAAAAAAAAAAAAAAAAAAAAAAAAAAAAAAAAAAAAAAAAAAAAAAAAAAAAAAAAAAAAAAAAAAAAAAAAAAAAAAAAAFAAAADwAAAAAAAAAAAAAAAAAAAkUAAAAAQAAABQAAAAUAAAAFAAAAAEAAAAAAAAAZAAAAGQAAAAAAAAAZAAAAGQAAAAVAAAAYAAAAAAAAAAAAAAADwAAACADAAAAAAAAAAAAAAEAAACgMgAAVgcAAKr4//8BAAAAf39/AAEAAABkAAAAAAAAABQAAABAHwAAAAAAACYAAAAAAAAAwOD//wAAAAAmAAAAZAAAABYAAABMAAAAAAAAAAAAAAAEAAAAAAAAAAEAAACZloMKAAAAACgAAAAoAAAAZAAAAGQAAAAAAAAAzMzMAAAAAABQAAAAUAAAAGQAAABkAAAAAAAAABcAAAAUAAAAAAAAAAAAAAD/fwAA/38AAAAAAAAJAAAABAAAAAAAAAAeAAAAaAAAAAAAAAAAAAAAAAAAAAAAAAAAAAAAECcAABAnAAAAAAAAAAAAAAAAAAAAAAAAAAAAAAAAAAAAAAAAAAAAABQAAAAAAAAAwMD/AAAAAABkAAAAMgAAAAAAAABkAAAAAAAAAH9/fwAKAAAAIgAAABgAAAAAAAAAAAAAAAAAAAAAAAAAAAAAAAAAAAAkAAAAJAAAAAAAAAAHAAAAAAAAAAAAAAAAAAAAAAAAAAAAAAAAAAAAf39/ACUAAABYAAAAAAAAAAAAAAAAAAAAAAAAAAAAAAAAAAAAAAAAAAAAAAAAAAAAAAAAAAAAAAA/AAAAAAAAAKCGAQAAAAAAAAAAAAAAAAAMAAAAAQAAAAAAAAAAAAAAAAAAAB8AAABUAAAAAAAABQAAAAEAAAAAAAAAAAAAAAAAAAAAAAAAAAAAAAAAAAAAAAAAAAAAAAJ/f38AAAAAA8zMzADAwP8Af39/AAAAAAAAAAAAAAAAAAAAAAAAAAAAIQAAABgAAAAUAAAAAQgAAGonAAB1MQAAMCoAABAAAAAmAAAACAAAAAGAAAAAAAAA"/>
               </a:ext>
             </a:extLst>
           </p:cNvSpPr>
@@ -7336,7 +7336,7 @@
             <a:spLocks noGrp="1" noChangeArrowheads="1"/>
             <a:extLst>
               <a:ext uri="smNativeData">
-                <pr:smNativeData xmlns:pr="smNativeData" xmlns="smNativeData" val="SMDATA_15_mcIdaRMAAAAlAAAAZAAAAA0AAAAAAAAAAAAAAAAAAAAAAAAAAAAAAAAAAAAAAAAAAAEAAABQAAAAAAAAAAAA4D8AAAAAAADgPwAAAAAAAOA/AAAAAAAA4D8AAAAAAADgPwAAAAAAAOA/AAAAAAAA4D8AAAAAAADgPwAAAAAAAOA/AAAAAAAA4D8CAAAAjAAAAAAAAAAAAAAA40oGDP///wgAAAAAAAAAAAAAAAAAAAAAAAAAAAAAAAAAAAAAZAAAAAEAAABAAAAAAAAAAAAAAAAAAAAAAAAAAAAAAAAAAAAAAAAAAAAAAAAAAAAAAAAAAAAAAAAAAAAAAAAAAAAAAAAAAAAAAAAAAAAAAAAAAAAAAAAAAAAAAAAAAAAAFAAAADwAAAAAAAAAAAAAAAAAAAkUAAAAAQAAABQAAAAUAAAAFAAAAAEAAAAAAAAAZAAAAGQAAAAAAAAAZAAAAGQAAAAVAAAAYAAAAAAAAAAAAAAADwAAACADAAAAAAAAAAAAAAEAAACgMgAAVgcAAKr4//8BAAAAf39/AAEAAABkAAAAAAAAABQAAABAHwAAAAAAACYAAAAAAAAAwOD//wAAAAAmAAAAZAAAABYAAABMAAAAAAAAAAAAAAAEAAAAAAAAAAEAAACZloMKAAAAACgAAAAoAAAAZAAAAGQAAAAAAAAAzMzMAAAAAABQAAAAUAAAAGQAAABkAAAAAAAAABcAAAAUAAAAAAAAAAAAAAD/fwAA/38AAAAAAAAJAAAABAAAAAAAAAAeAAAAaAAAAAAAAAAAAAAAAAAAAAAAAAAAAAAAECcAABAnAAAAAAAAAAAAAAAAAAAAAAAAAAAAAAAAAAAAAAAAAAAAABQAAAAAAAAAwMD/AAAAAABkAAAAMgAAAAAAAABkAAAAAAAAAH9/fwAKAAAAIgAAABgAAAAAAAAAAAAAAAAAAAAAAAAAAAAAAAAAAAAkAAAAJAAAAAAAAAAHAAAAAAAAAAAAAAAAAAAAAAAAAAAAAAAAAAAAf39/ACUAAABYAAAAAAAAAAAAAAAAAAAAAAAAAAAAAAAAAAAAAAAAAAAAAAAAAAAAAAAAAAAAAAA/AAAAAAAAAKCGAQAAAAAAAAAAAAAAAAAMAAAAAQAAAAAAAAAAAAAAAAAAAB8AAABUAAAAAAAABQAAAAEAAAAAAAAAAAAAAAAAAAAAAAAAAAAAAAAAAAAAAAAAAAAAAAJ/f38AAAAAA8zMzADAwP8Af39/AAAAAAAAAAAAAAAAAAAAAAAAAAAAIQAAABgAAAAUAAAA0AIAADgEAABjFgAAxgsAABAAAAAmAAAACAAAAAAAAAAAAAAA"/>
+                <pr:smNativeData xmlns:pr="smNativeData" xmlns="smNativeData" val="SMDATA_15_r8odaRMAAAAlAAAAZAAAAA0AAAAAAAAAAAAAAAAAAAAAAAAAAAAAAAAAAAAAAAAAAAEAAABQAAAAAAAAAAAA4D8AAAAAAADgPwAAAAAAAOA/AAAAAAAA4D8AAAAAAADgPwAAAAAAAOA/AAAAAAAA4D8AAAAAAADgPwAAAAAAAOA/AAAAAAAA4D8CAAAAjAAAAAAAAAAAAAAA40oGDP///wgAAAAAAAAAAAAAAAAAAAAAAAAAAAAAAAAAAAAAZAAAAAEAAABAAAAAAAAAAAAAAAAAAAAAAAAAAAAAAAAAAAAAAAAAAAAAAAAAAAAAAAAAAAAAAAAAAAAAAAAAAAAAAAAAAAAAAAAAAAAAAAAAAAAAAAAAAAAAAAAAAAAAFAAAADwAAAAAAAAAAAAAAAAAAAkUAAAAAQAAABQAAAAUAAAAFAAAAAEAAAAAAAAAZAAAAGQAAAAAAAAAZAAAAGQAAAAVAAAAYAAAAAAAAAAAAAAADwAAACADAAAAAAAAAAAAAAEAAACgMgAAVgcAAKr4//8BAAAAf39/AAEAAABkAAAAAAAAABQAAABAHwAAAAAAACYAAAAAAAAAwOD//wAAAAAmAAAAZAAAABYAAABMAAAAAAAAAAAAAAAEAAAAAAAAAAEAAACZloMKAAAAACgAAAAoAAAAZAAAAGQAAAAAAAAAzMzMAAAAAABQAAAAUAAAAGQAAABkAAAAAAAAABcAAAAUAAAAAAAAAAAAAAD/fwAA/38AAAAAAAAJAAAABAAAAAAAAAAeAAAAaAAAAAAAAAAAAAAAAAAAAAAAAAAAAAAAECcAABAnAAAAAAAAAAAAAAAAAAAAAAAAAAAAAAAAAAAAAAAAAAAAABQAAAAAAAAAwMD/AAAAAABkAAAAMgAAAAAAAABkAAAAAAAAAH9/fwAKAAAAIgAAABgAAAAAAAAAAAAAAAAAAAAAAAAAAAAAAAAAAAAkAAAAJAAAAAAAAAAHAAAAAAAAAAAAAAAAAAAAAAAAAAAAAAAAAAAAf39/ACUAAABYAAAAAAAAAAAAAAAAAAAAAAAAAAAAAAAAAAAAAAAAAAAAAAAAAAAAAAAAAAAAAAA/AAAAAAAAAKCGAQAAAAAAAAAAAAAAAAAMAAAAAQAAAAAAAAAAAAAAAAAAAB8AAABUAAAAAAAABQAAAAEAAAAAAAAAAAAAAAAAAAAAAAAAAAAAAAAAAAAAAAAAAAAAAAJ/f38AAAAAA8zMzADAwP8Af39/AAAAAAAAAAAAAAAAAAAAAAAAAAAAIQAAABgAAAAUAAAA0AIAADgEAABjFgAAxgsAABAAAAAmAAAACAAAAAAAAAAAAAAA"/>
               </a:ext>
             </a:extLst>
           </p:cNvSpPr>
@@ -7365,7 +7365,7 @@
             <a:spLocks noGrp="1" noChangeArrowheads="1"/>
             <a:extLst>
               <a:ext uri="smNativeData">
-                <pr:smNativeData xmlns:pr="smNativeData" xmlns="smNativeData" val="SMDATA_15_mcIdaRMAAAAlAAAAZAAAAA0AAAAAAAAAAAAAAAAAAAAAAAAAAAAAAAAAAAAAAAAAAAEAAABQAAAAAAAAAAAA4D8AAAAAAADgPwAAAAAAAOA/AAAAAAAA4D8AAAAAAADgPwAAAAAAAOA/AAAAAAAA4D8AAAAAAADgPwAAAAAAAOA/AAAAAAAA4D8CAAAAjAAAAAAAAAAAAAAA40oGDP///wgAAAAAAAAAAAAAAAAAAAAAAAAAAAAAAAAAAAAAZAAAAAEAAABAAAAAAAAAAAAAAAAAAAAAAAAAAAAAAAAAAAAAAAAAAAAAAAAAAAAAAAAAAAAAAAAAAAAAAAAAAAAAAAAAAAAAAAAAAAAAAAAAAAAAAAAAAAAAAAAAAAAAFAAAADwAAAAAAAAAAAAAAAAAAAkUAAAAAQAAABQAAAAUAAAAFAAAAAEAAAAAAAAAZAAAAGQAAAAAAAAAZAAAAGQAAAAVAAAAYAAAAAAAAAAAAAAADwAAACADAAAAAAAAAAAAAAEAAACgMgAAVgcAAKr4//8BAAAAf39/AAEAAABkAAAAAAAAABQAAABAHwAAAAAAACYAAAAAAAAAwOD//wAAAAAmAAAAZAAAABYAAABMAAAAAAAAAAAAAAAEAAAAAAAAAAEAAACZloMKAAAAACgAAAAoAAAAZAAAAGQAAAAAAAAAzMzMAAAAAABQAAAAUAAAAGQAAABkAAAAAAAAABcAAAAUAAAAAAAAAAAAAAD/fwAA/38AAAAAAAAJAAAABAAAAAAAAAAeAAAAaAAAAAAAAAAAAAAAAAAAAAAAAAAAAAAAECcAABAnAAAAAAAAAAAAAAAAAAAAAAAAAAAAAAAAAAAAAAAAAAAAABQAAAAAAAAAwMD/AAAAAABkAAAAMgAAAAAAAABkAAAAAAAAAH9/fwAKAAAAIgAAABgAAAAAAAAAAAAAAAAAAAAAAAAAAAAAAAAAAAAkAAAAJAAAAAAAAAAHAAAAAAAAAAAAAAAAAAAAAAAAAAAAAAAAAAAAf39/ACUAAABYAAAAAAAAAAAAAAAAAAAAAAAAAAAAAAAAAAAAAAAAAAAAAAAAAAAAAAAAAAAAAAA/AAAAAAAAAKCGAQAAAAAAAAAAAAAAAAAMAAAAAQAAAAAAAAAAAAAAAAAAAB8AAABUAAAAAAAABQAAAAEAAAAAAAAAAAAAAAAAAAAAAAAAAAAAAAAAAAAAAAAAAAAAAAJ/f38AAAAAA8zMzADAwP8Af39/AAAAAAAAAAAAAAAAAAAAAAAAAAAAIQAAABgAAAAUAAAAjBcAABgVAABwNQAAAiYAABAAAAAmAAAACAAAAAEAAAAAAAAA"/>
+                <pr:smNativeData xmlns:pr="smNativeData" xmlns="smNativeData" val="SMDATA_15_r8odaRMAAAAlAAAAZAAAAA0AAAAAAAAAAAAAAAAAAAAAAAAAAAAAAAAAAAAAAAAAAAEAAABQAAAAAAAAAAAA4D8AAAAAAADgPwAAAAAAAOA/AAAAAAAA4D8AAAAAAADgPwAAAAAAAOA/AAAAAAAA4D8AAAAAAADgPwAAAAAAAOA/AAAAAAAA4D8CAAAAjAAAAAAAAAAAAAAA40oGDP///wgAAAAAAAAAAAAAAAAAAAAAAAAAAAAAAAAAAAAAZAAAAAEAAABAAAAAAAAAAAAAAAAAAAAAAAAAAAAAAAAAAAAAAAAAAAAAAAAAAAAAAAAAAAAAAAAAAAAAAAAAAAAAAAAAAAAAAAAAAAAAAAAAAAAAAAAAAAAAAAAAAAAAFAAAADwAAAAAAAAAAAAAAAAAAAkUAAAAAQAAABQAAAAUAAAAFAAAAAEAAAAAAAAAZAAAAGQAAAAAAAAAZAAAAGQAAAAVAAAAYAAAAAAAAAAAAAAADwAAACADAAAAAAAAAAAAAAEAAACgMgAAVgcAAKr4//8BAAAAf39/AAEAAABkAAAAAAAAABQAAABAHwAAAAAAACYAAAAAAAAAwOD//wAAAAAmAAAAZAAAABYAAABMAAAAAAAAAAAAAAAEAAAAAAAAAAEAAACZloMKAAAAACgAAAAoAAAAZAAAAGQAAAAAAAAAzMzMAAAAAABQAAAAUAAAAGQAAABkAAAAAAAAABcAAAAUAAAAAAAAAAAAAAD/fwAA/38AAAAAAAAJAAAABAAAAAAAAAAeAAAAaAAAAAAAAAAAAAAAAAAAAAAAAAAAAAAAECcAABAnAAAAAAAAAAAAAAAAAAAAAAAAAAAAAAAAAAAAAAAAAAAAABQAAAAAAAAAwMD/AAAAAABkAAAAMgAAAAAAAABkAAAAAAAAAH9/fwAKAAAAIgAAABgAAAAAAAAAAAAAAAAAAAAAAAAAAAAAAAAAAAAkAAAAJAAAAAAAAAAHAAAAAAAAAAAAAAAAAAAAAAAAAAAAAAAAAAAAf39/ACUAAABYAAAAAAAAAAAAAAAAAAAAAAAAAAAAAAAAAAAAAAAAAAAAAAAAAAAAAAAAAAAAAAA/AAAAAAAAAKCGAQAAAAAAAAAAAAAAAAAMAAAAAQAAAAAAAAAAAAAAAAAAAB8AAABUAAAAAAAABQAAAAEAAAAAAAAAAAAAAAAAAAAAAAAAAAAAAAAAAAAAAAAAAAAAAAJ/f38AAAAAA8zMzADAwP8Af39/AAAAAAAAAAAAAAAAAAAAAAAAAAAAIQAAABgAAAAUAAAAjBcAABgVAABwNQAAAiYAABAAAAAmAAAACAAAAAEAAAAAAAAA"/>
               </a:ext>
             </a:extLst>
           </p:cNvSpPr>
@@ -7437,7 +7437,7 @@
             <a:spLocks noGrp="1" noChangeArrowheads="1"/>
             <a:extLst>
               <a:ext uri="smNativeData">
-                <pr:smNativeData xmlns:pr="smNativeData" xmlns="smNativeData" val="SMDATA_15_mcIdaRMAAAAlAAAAZAAAAA0AAAAAAAAAAAAAAAAAAAAAAAAAAAAAAAAAAAAAAAAAAAEAAABQAAAAAAAAAAAA4D8AAAAAAADgPwAAAAAAAOA/AAAAAAAA4D8AAAAAAADgPwAAAAAAAOA/AAAAAAAA4D8AAAAAAADgPwAAAAAAAOA/AAAAAAAA4D8CAAAAjAAAAAAAAAAAAAAA40oGDP///wgAAAAAAAAAAAAAAAAAAAAAAAAAAAAAAAAAAAAAZAAAAAEAAABAAAAAAAAAAAAAAAAAAAAAAAAAAAAAAAAAAAAAAAAAAAAAAAAAAAAAAAAAAAAAAAAAAAAAAAAAAAAAAAAAAAAAAAAAAAAAAAAAAAAAAAAAAAAAAAAAAAAAFAAAADwAAAAAAAAAAAAAAAAAAAkUAAAAAQAAABQAAAAUAAAAFAAAAAEAAAAAAAAAZAAAAGQAAAAAAAAAZAAAAGQAAAAVAAAAYAAAAAAAAAAAAAAADwAAACADAAAAAAAAAAAAAAEAAACgMgAAVgcAAKr4//8BAAAAf39/AAEAAABkAAAAAAAAABQAAABAHwAAAAAAACYAAAAAAAAAwOD//wAAAAAmAAAAZAAAABYAAABMAAAAAAAAAAAAAAAEAAAAAAAAAAEAAACZloMKAAAAACgAAAAoAAAAZAAAAGQAAAAAAAAAzMzMAAAAAABQAAAAUAAAAGQAAABkAAAAAAAAABcAAAAUAAAAAAAAAAAAAAD/fwAA/38AAAAAAAAJAAAABAAAAAAAAAAeAAAAaAAAAAAAAAAAAAAAAAAAAAAAAAAAAAAAECcAABAnAAAAAAAAAAAAAAAAAAAAAAAAAAAAAAAAAAAAAAAAAAAAABQAAAAAAAAAwMD/AAAAAABkAAAAMgAAAAAAAABkAAAAAAAAAH9/fwAKAAAAIgAAABgAAAAAAAAAAAAAAAAAAAAAAAAAAAAAAAAAAAAkAAAAJAAAAAAAAAAHAAAAAAAAAAAAAAAAAAAAAAAAAAAAAAAAAAAAf39/ACUAAABYAAAAAAAAAAAAAAAAAAAAAAAAAAAAAAAAAAAAAAAAAAAAAAAAAAAAAAAAAAAAAAA/AAAAAAAAAKCGAQAAAAAAAAAAAAAAAAAMAAAAAQAAAAAAAAAAAAAAAAAAAB8AAABUAAAAAAAABQAAAAEAAAAAAAAAAAAAAAAAAAAAAAAAAAAAAAAAAAAAAAAAAAAAAAJ/f38AAAAAA8zMzADAwP8Af39/AAAAAAAAAAAAAAAAAAAAAAAAAAAAIQAAABgAAAAUAAAAAQgAAGonAAB1MQAAMCoAABAAAAAmAAAACAAAAAGAAAAAAAAA"/>
+                <pr:smNativeData xmlns:pr="smNativeData" xmlns="smNativeData" val="SMDATA_15_r8odaRMAAAAlAAAAZAAAAA0AAAAAAAAAAAAAAAAAAAAAAAAAAAAAAAAAAAAAAAAAAAEAAABQAAAAAAAAAAAA4D8AAAAAAADgPwAAAAAAAOA/AAAAAAAA4D8AAAAAAADgPwAAAAAAAOA/AAAAAAAA4D8AAAAAAADgPwAAAAAAAOA/AAAAAAAA4D8CAAAAjAAAAAAAAAAAAAAA40oGDP///wgAAAAAAAAAAAAAAAAAAAAAAAAAAAAAAAAAAAAAZAAAAAEAAABAAAAAAAAAAAAAAAAAAAAAAAAAAAAAAAAAAAAAAAAAAAAAAAAAAAAAAAAAAAAAAAAAAAAAAAAAAAAAAAAAAAAAAAAAAAAAAAAAAAAAAAAAAAAAAAAAAAAAFAAAADwAAAAAAAAAAAAAAAAAAAkUAAAAAQAAABQAAAAUAAAAFAAAAAEAAAAAAAAAZAAAAGQAAAAAAAAAZAAAAGQAAAAVAAAAYAAAAAAAAAAAAAAADwAAACADAAAAAAAAAAAAAAEAAACgMgAAVgcAAKr4//8BAAAAf39/AAEAAABkAAAAAAAAABQAAABAHwAAAAAAACYAAAAAAAAAwOD//wAAAAAmAAAAZAAAABYAAABMAAAAAAAAAAAAAAAEAAAAAAAAAAEAAACZloMKAAAAACgAAAAoAAAAZAAAAGQAAAAAAAAAzMzMAAAAAABQAAAAUAAAAGQAAABkAAAAAAAAABcAAAAUAAAAAAAAAAAAAAD/fwAA/38AAAAAAAAJAAAABAAAAAAAAAAeAAAAaAAAAAAAAAAAAAAAAAAAAAAAAAAAAAAAECcAABAnAAAAAAAAAAAAAAAAAAAAAAAAAAAAAAAAAAAAAAAAAAAAABQAAAAAAAAAwMD/AAAAAABkAAAAMgAAAAAAAABkAAAAAAAAAH9/fwAKAAAAIgAAABgAAAAAAAAAAAAAAAAAAAAAAAAAAAAAAAAAAAAkAAAAJAAAAAAAAAAHAAAAAAAAAAAAAAAAAAAAAAAAAAAAAAAAAAAAf39/ACUAAABYAAAAAAAAAAAAAAAAAAAAAAAAAAAAAAAAAAAAAAAAAAAAAAAAAAAAAAAAAAAAAAA/AAAAAAAAAKCGAQAAAAAAAAAAAAAAAAAMAAAAAQAAAAAAAAAAAAAAAAAAAB8AAABUAAAAAAAABQAAAAEAAAAAAAAAAAAAAAAAAAAAAAAAAAAAAAAAAAAAAAAAAAAAAAJ/f38AAAAAA8zMzADAwP8Af39/AAAAAAAAAAAAAAAAAAAAAAAAAAAAIQAAABgAAAAUAAAAAQgAAGonAAB1MQAAMCoAABAAAAAmAAAACAAAAAGAAAAAAAAA"/>
               </a:ext>
             </a:extLst>
           </p:cNvSpPr>
@@ -7589,7 +7589,7 @@
             <a:spLocks noGrp="1" noChangeArrowheads="1"/>
             <a:extLst>
               <a:ext uri="smNativeData">
-                <pr:smNativeData xmlns:pr="smNativeData" xmlns="smNativeData" val="SMDATA_15_mcIdaRMAAAAlAAAAZAAAAA0AAAAAAAAAAAAAAAAAAAAAAAAAAAAAAAAAAAAAAAAAAAEAAABQAAAAAAAAAAAA4D8AAAAAAADgPwAAAAAAAOA/AAAAAAAA4D8AAAAAAADgPwAAAAAAAOA/AAAAAAAA4D8AAAAAAADgPwAAAAAAAOA/AAAAAAAA4D8CAAAAjAAAAAAAAAAAAAAA40oGDP///wgAAAAAAAAAAAAAAAAAAAAAAAAAAAAAAAAAAAAAZAAAAAEAAABAAAAAAAAAAAAAAAAAAAAAAAAAAAAAAAAAAAAAAAAAAAAAAAAAAAAAAAAAAAAAAAAAAAAAAAAAAAAAAAAAAAAAAAAAAAAAAAAAAAAAAAAAAAAAAAAAAAAAFAAAADwAAAAAAAAAAAAAAAAAAAkUAAAAAQAAABQAAAAUAAAAFAAAAAEAAAAAAAAAZAAAAGQAAAAAAAAAZAAAAGQAAAAVAAAAYAAAAAAAAAAAAAAADwAAACADAAAAAAAAAAAAAAEAAACgMgAAVgcAAKr4//8BAAAAf39/AAEAAABkAAAAAAAAABQAAABAHwAAAAAAACYAAAAAAAAAwOD//wAAAAAmAAAAZAAAABYAAABMAAAAAAAAAAAAAAAEAAAAAAAAAAEAAACZloMKAAAAACgAAAAoAAAAZAAAAGQAAAAAAAAAzMzMAAAAAABQAAAAUAAAAGQAAABkAAAAAAAAABcAAAAUAAAAAAAAAAAAAAD/fwAA/38AAAAAAAAJAAAABAAAAAAAAAAeAAAAaAAAAAAAAAAAAAAAAAAAAAAAAAAAAAAAECcAABAnAAAAAAAAAAAAAAAAAAAAAAAAAAAAAAAAAAAAAAAAAAAAABQAAAAAAAAAwMD/AAAAAABkAAAAMgAAAAAAAABkAAAAAAAAAH9/fwAKAAAAIgAAABgAAAAAAAAAAAAAAAAAAAAAAAAAAAAAAAAAAAAkAAAAJAAAAAAAAAAHAAAAAAAAAAAAAAAAAAAAAAAAAAAAAAAAAAAAf39/ACUAAABYAAAAAAAAAAAAAAAAAAAAAAAAAAAAAAAAAAAAAAAAAAAAAAAAAAAAAAAAAAAAAAA/AAAAAAAAAKCGAQAAAAAAAAAAAAAAAAAMAAAAAQAAAAAAAAAAAAAAAAAAAB8AAABUAAAAAAAABQAAAAEAAAAAAAAAAAAAAAAAAAAAAAAAAAAAAAAAAAAAAAAAAAAAAAJ/f38AAAAAA8zMzADAwP8Af39/AAAAAAAAAAAAAAAAAAAAAAAAAAAAIQAAABgAAAAUAAAA0AIAADgEAABjFgAAxgsAABAAAAAmAAAACAAAAAAAAAAAAAAA"/>
+                <pr:smNativeData xmlns:pr="smNativeData" xmlns="smNativeData" val="SMDATA_15_r8odaRMAAAAlAAAAZAAAAA0AAAAAAAAAAAAAAAAAAAAAAAAAAAAAAAAAAAAAAAAAAAEAAABQAAAAAAAAAAAA4D8AAAAAAADgPwAAAAAAAOA/AAAAAAAA4D8AAAAAAADgPwAAAAAAAOA/AAAAAAAA4D8AAAAAAADgPwAAAAAAAOA/AAAAAAAA4D8CAAAAjAAAAAAAAAAAAAAA40oGDP///wgAAAAAAAAAAAAAAAAAAAAAAAAAAAAAAAAAAAAAZAAAAAEAAABAAAAAAAAAAAAAAAAAAAAAAAAAAAAAAAAAAAAAAAAAAAAAAAAAAAAAAAAAAAAAAAAAAAAAAAAAAAAAAAAAAAAAAAAAAAAAAAAAAAAAAAAAAAAAAAAAAAAAFAAAADwAAAAAAAAAAAAAAAAAAAkUAAAAAQAAABQAAAAUAAAAFAAAAAEAAAAAAAAAZAAAAGQAAAAAAAAAZAAAAGQAAAAVAAAAYAAAAAAAAAAAAAAADwAAACADAAAAAAAAAAAAAAEAAACgMgAAVgcAAKr4//8BAAAAf39/AAEAAABkAAAAAAAAABQAAABAHwAAAAAAACYAAAAAAAAAwOD//wAAAAAmAAAAZAAAABYAAABMAAAAAAAAAAAAAAAEAAAAAAAAAAEAAACZloMKAAAAACgAAAAoAAAAZAAAAGQAAAAAAAAAzMzMAAAAAABQAAAAUAAAAGQAAABkAAAAAAAAABcAAAAUAAAAAAAAAAAAAAD/fwAA/38AAAAAAAAJAAAABAAAAAAAAAAeAAAAaAAAAAAAAAAAAAAAAAAAAAAAAAAAAAAAECcAABAnAAAAAAAAAAAAAAAAAAAAAAAAAAAAAAAAAAAAAAAAAAAAABQAAAAAAAAAwMD/AAAAAABkAAAAMgAAAAAAAABkAAAAAAAAAH9/fwAKAAAAIgAAABgAAAAAAAAAAAAAAAAAAAAAAAAAAAAAAAAAAAAkAAAAJAAAAAAAAAAHAAAAAAAAAAAAAAAAAAAAAAAAAAAAAAAAAAAAf39/ACUAAABYAAAAAAAAAAAAAAAAAAAAAAAAAAAAAAAAAAAAAAAAAAAAAAAAAAAAAAAAAAAAAAA/AAAAAAAAAKCGAQAAAAAAAAAAAAAAAAAMAAAAAQAAAAAAAAAAAAAAAAAAAB8AAABUAAAAAAAABQAAAAEAAAAAAAAAAAAAAAAAAAAAAAAAAAAAAAAAAAAAAAAAAAAAAAJ/f38AAAAAA8zMzADAwP8Af39/AAAAAAAAAAAAAAAAAAAAAAAAAAAAIQAAABgAAAAUAAAA0AIAADgEAABjFgAAxgsAABAAAAAmAAAACAAAAAAAAAAAAAAA"/>
               </a:ext>
             </a:extLst>
           </p:cNvSpPr>
@@ -7618,7 +7618,7 @@
             <a:spLocks noGrp="1" noChangeArrowheads="1"/>
             <a:extLst>
               <a:ext uri="smNativeData">
-                <pr:smNativeData xmlns:pr="smNativeData" xmlns="smNativeData" val="SMDATA_15_mcIdaRMAAAAlAAAAZAAAAA0AAAAAAAAAAAAAAAAAAAAAAAAAAAAAAAAAAAAAAAAAAAEAAABQAAAAAAAAAAAA4D8AAAAAAADgPwAAAAAAAOA/AAAAAAAA4D8AAAAAAADgPwAAAAAAAOA/AAAAAAAA4D8AAAAAAADgPwAAAAAAAOA/AAAAAAAA4D8CAAAAjAAAAAAAAAAAAAAA40oGDP///wgAAAAAAAAAAAAAAAAAAAAAAAAAAAAAAAAAAAAAZAAAAAEAAABAAAAAAAAAAAAAAAAAAAAAAAAAAAAAAAAAAAAAAAAAAAAAAAAAAAAAAAAAAAAAAAAAAAAAAAAAAAAAAAAAAAAAAAAAAAAAAAAAAAAAAAAAAAAAAAAAAAAAFAAAADwAAAAAAAAAAAAAAAAAAAkUAAAAAQAAABQAAAAUAAAAFAAAAAEAAAAAAAAAZAAAAGQAAAAAAAAAZAAAAGQAAAAVAAAAYAAAAAAAAAAAAAAADwAAACADAAAAAAAAAAAAAAEAAACgMgAAVgcAAKr4//8BAAAAf39/AAEAAABkAAAAAAAAABQAAABAHwAAAAAAACYAAAAAAAAAwOD//wAAAAAmAAAAZAAAABYAAABMAAAAAAAAAAAAAAAEAAAAAAAAAAEAAACZloMKAAAAACgAAAAoAAAAZAAAAGQAAAAAAAAAzMzMAAAAAABQAAAAUAAAAGQAAABkAAAAAAAAABcAAAAUAAAAAAAAAAAAAAD/fwAA/38AAAAAAAAJAAAABAAAAAAAAAAeAAAAaAAAAAAAAAAAAAAAAAAAAAAAAAAAAAAAECcAABAnAAAAAAAAAAAAAAAAAAAAAAAAAAAAAAAAAAAAAAAAAAAAABQAAAAAAAAAwMD/AAAAAABkAAAAMgAAAAAAAABkAAAAAAAAAH9/fwAKAAAAIgAAABgAAAAAAAAAAAAAAAAAAAAAAAAAAAAAAAAAAAAkAAAAJAAAAAAAAAAHAAAAAAAAAAAAAAAAAAAAAAAAAAAAAAAAAAAAf39/ACUAAABYAAAAAAAAAAAAAAAAAAAAAAAAAAAAAAAAAAAAAAAAAAAAAAAAAAAAAAAAAAAAAAA/AAAAAAAAAKCGAQAAAAAAAAAAAAAAAAAMAAAAAQAAAAAAAAAAAAAAAAAAAB8AAABUAAAAAAAABQAAAAEAAAAAAAAAAAAAAAAAAAAAAAAAAAAAAAAAAAAAAAAAAAAAAAJ/f38AAAAAA8zMzADAwP8Af39/AAAAAAAAAAAAAAAAAAAAAAAAAAAAIQAAABgAAAAUAAAAjBcAADgEAADUJQAAAiYAABAAAAAmAAAACAAAAAEAAAAAAAAA"/>
+                <pr:smNativeData xmlns:pr="smNativeData" xmlns="smNativeData" val="SMDATA_15_r8odaRMAAAAlAAAAZAAAAA0AAAAAAAAAAAAAAAAAAAAAAAAAAAAAAAAAAAAAAAAAAAEAAABQAAAAAAAAAAAA4D8AAAAAAADgPwAAAAAAAOA/AAAAAAAA4D8AAAAAAADgPwAAAAAAAOA/AAAAAAAA4D8AAAAAAADgPwAAAAAAAOA/AAAAAAAA4D8CAAAAjAAAAAAAAAAAAAAA40oGDP///wgAAAAAAAAAAAAAAAAAAAAAAAAAAAAAAAAAAAAAZAAAAAEAAABAAAAAAAAAAAAAAAAAAAAAAAAAAAAAAAAAAAAAAAAAAAAAAAAAAAAAAAAAAAAAAAAAAAAAAAAAAAAAAAAAAAAAAAAAAAAAAAAAAAAAAAAAAAAAAAAAAAAAFAAAADwAAAAAAAAAAAAAAAAAAAkUAAAAAQAAABQAAAAUAAAAFAAAAAEAAAAAAAAAZAAAAGQAAAAAAAAAZAAAAGQAAAAVAAAAYAAAAAAAAAAAAAAADwAAACADAAAAAAAAAAAAAAEAAACgMgAAVgcAAKr4//8BAAAAf39/AAEAAABkAAAAAAAAABQAAABAHwAAAAAAACYAAAAAAAAAwOD//wAAAAAmAAAAZAAAABYAAABMAAAAAAAAAAAAAAAEAAAAAAAAAAEAAACZloMKAAAAACgAAAAoAAAAZAAAAGQAAAAAAAAAzMzMAAAAAABQAAAAUAAAAGQAAABkAAAAAAAAABcAAAAUAAAAAAAAAAAAAAD/fwAA/38AAAAAAAAJAAAABAAAAAAAAAAeAAAAaAAAAAAAAAAAAAAAAAAAAAAAAAAAAAAAECcAABAnAAAAAAAAAAAAAAAAAAAAAAAAAAAAAAAAAAAAAAAAAAAAABQAAAAAAAAAwMD/AAAAAABkAAAAMgAAAAAAAABkAAAAAAAAAH9/fwAKAAAAIgAAABgAAAAAAAAAAAAAAAAAAAAAAAAAAAAAAAAAAAAkAAAAJAAAAAAAAAAHAAAAAAAAAAAAAAAAAAAAAAAAAAAAAAAAAAAAf39/ACUAAABYAAAAAAAAAAAAAAAAAAAAAAAAAAAAAAAAAAAAAAAAAAAAAAAAAAAAAAAAAAAAAAA/AAAAAAAAAKCGAQAAAAAAAAAAAAAAAAAMAAAAAQAAAAAAAAAAAAAAAAAAAB8AAABUAAAAAAAABQAAAAEAAAAAAAAAAAAAAAAAAAAAAAAAAAAAAAAAAAAAAAAAAAAAAAJ/f38AAAAAA8zMzADAwP8Af39/AAAAAAAAAAAAAAAAAAAAAAAAAAAAIQAAABgAAAAUAAAAjBcAADgEAADUJQAAAiYAABAAAAAmAAAACAAAAAEAAAAAAAAA"/>
               </a:ext>
             </a:extLst>
           </p:cNvSpPr>
@@ -7690,7 +7690,7 @@
             <a:spLocks noGrp="1" noChangeArrowheads="1"/>
             <a:extLst>
               <a:ext uri="smNativeData">
-                <pr:smNativeData xmlns:pr="smNativeData" xmlns="smNativeData" val="SMDATA_15_mcIdaRMAAAAlAAAAZAAAAA0AAAAAAAAAAAAAAAAAAAAAAAAAAAAAAAAAAAAAAAAAAAEAAABQAAAAAAAAAAAA4D8AAAAAAADgPwAAAAAAAOA/AAAAAAAA4D8AAAAAAADgPwAAAAAAAOA/AAAAAAAA4D8AAAAAAADgPwAAAAAAAOA/AAAAAAAA4D8CAAAAjAAAAAAAAAAAAAAA40oGDP///wgAAAAAAAAAAAAAAAAAAAAAAAAAAAAAAAAAAAAAZAAAAAEAAABAAAAAAAAAAAAAAAAAAAAAAAAAAAAAAAAAAAAAAAAAAAAAAAAAAAAAAAAAAAAAAAAAAAAAAAAAAAAAAAAAAAAAAAAAAAAAAAAAAAAAAAAAAAAAAAAAAAAAFAAAADwAAAAAAAAAAAAAAAAAAAkUAAAAAQAAABQAAAAUAAAAFAAAAAEAAAAAAAAAZAAAAGQAAAAAAAAAZAAAAGQAAAAVAAAAYAAAAAAAAAAAAAAADwAAACADAAAAAAAAAAAAAAEAAACgMgAAVgcAAKr4//8BAAAAf39/AAEAAABkAAAAAAAAABQAAABAHwAAAAAAACYAAAAAAAAAwOD//wAAAAAmAAAAZAAAABYAAABMAAAAAAAAAAAAAAAEAAAAAAAAAAEAAACZloMKAAAAACgAAAAoAAAAZAAAAGQAAAAAAAAAzMzMAAAAAABQAAAAUAAAAGQAAABkAAAAAAAAABcAAAAUAAAAAAAAAAAAAAD/fwAA/38AAAAAAAAJAAAABAAAAAAAAAAeAAAAaAAAAAAAAAAAAAAAAAAAAAAAAAAAAAAAECcAABAnAAAAAAAAAAAAAAAAAAAAAAAAAAAAAAAAAAAAAAAAAAAAABQAAAAAAAAAwMD/AAAAAABkAAAAMgAAAAAAAABkAAAAAAAAAH9/fwAKAAAAIgAAABgAAAAAAAAAAAAAAAAAAAAAAAAAAAAAAAAAAAAkAAAAJAAAAAAAAAAHAAAAAAAAAAAAAAAAAAAAAAAAAAAAAAAAAAAAf39/ACUAAABYAAAAAAAAAAAAAAAAAAAAAAAAAAAAAAAAAAAAAAAAAAAAAAAAAAAAAAAAAAAAAAA/AAAAAAAAAKCGAQAAAAAAAAAAAAAAAAAMAAAAAQAAAAAAAAAAAAAAAAAAAB8AAABUAAAAAAAABQAAAAEAAAAAAAAAAAAAAAAAAAAAAAAAAAAAAAAAAAAAAAAAAAAAAAJ/f38AAAAAA8zMzADAwP8Af39/AAAAAAAAAAAAAAAAAAAAAAAAAAAAIQAAABgAAAAUAAAAFicAADgEAABwNQAAAiYAABAAAAAmAAAACAAAAAEAAAAAAAAA"/>
+                <pr:smNativeData xmlns:pr="smNativeData" xmlns="smNativeData" val="SMDATA_15_r8odaRMAAAAlAAAAZAAAAA0AAAAAAAAAAAAAAAAAAAAAAAAAAAAAAAAAAAAAAAAAAAEAAABQAAAAAAAAAAAA4D8AAAAAAADgPwAAAAAAAOA/AAAAAAAA4D8AAAAAAADgPwAAAAAAAOA/AAAAAAAA4D8AAAAAAADgPwAAAAAAAOA/AAAAAAAA4D8CAAAAjAAAAAAAAAAAAAAA40oGDP///wgAAAAAAAAAAAAAAAAAAAAAAAAAAAAAAAAAAAAAZAAAAAEAAABAAAAAAAAAAAAAAAAAAAAAAAAAAAAAAAAAAAAAAAAAAAAAAAAAAAAAAAAAAAAAAAAAAAAAAAAAAAAAAAAAAAAAAAAAAAAAAAAAAAAAAAAAAAAAAAAAAAAAFAAAADwAAAAAAAAAAAAAAAAAAAkUAAAAAQAAABQAAAAUAAAAFAAAAAEAAAAAAAAAZAAAAGQAAAAAAAAAZAAAAGQAAAAVAAAAYAAAAAAAAAAAAAAADwAAACADAAAAAAAAAAAAAAEAAACgMgAAVgcAAKr4//8BAAAAf39/AAEAAABkAAAAAAAAABQAAABAHwAAAAAAACYAAAAAAAAAwOD//wAAAAAmAAAAZAAAABYAAABMAAAAAAAAAAAAAAAEAAAAAAAAAAEAAACZloMKAAAAACgAAAAoAAAAZAAAAGQAAAAAAAAAzMzMAAAAAABQAAAAUAAAAGQAAABkAAAAAAAAABcAAAAUAAAAAAAAAAAAAAD/fwAA/38AAAAAAAAJAAAABAAAAAAAAAAeAAAAaAAAAAAAAAAAAAAAAAAAAAAAAAAAAAAAECcAABAnAAAAAAAAAAAAAAAAAAAAAAAAAAAAAAAAAAAAAAAAAAAAABQAAAAAAAAAwMD/AAAAAABkAAAAMgAAAAAAAABkAAAAAAAAAH9/fwAKAAAAIgAAABgAAAAAAAAAAAAAAAAAAAAAAAAAAAAAAAAAAAAkAAAAJAAAAAAAAAAHAAAAAAAAAAAAAAAAAAAAAAAAAAAAAAAAAAAAf39/ACUAAABYAAAAAAAAAAAAAAAAAAAAAAAAAAAAAAAAAAAAAAAAAAAAAAAAAAAAAAAAAAAAAAA/AAAAAAAAAKCGAQAAAAAAAAAAAAAAAAAMAAAAAQAAAAAAAAAAAAAAAAAAAB8AAABUAAAAAAAABQAAAAEAAAAAAAAAAAAAAAAAAAAAAAAAAAAAAAAAAAAAAAAAAAAAAAJ/f38AAAAAA8zMzADAwP8Af39/AAAAAAAAAAAAAAAAAAAAAAAAAAAAIQAAABgAAAAUAAAAFicAADgEAABwNQAAAiYAABAAAAAmAAAACAAAAAEAAAAAAAAA"/>
               </a:ext>
             </a:extLst>
           </p:cNvSpPr>
@@ -7762,7 +7762,7 @@
             <a:spLocks noGrp="1" noChangeArrowheads="1"/>
             <a:extLst>
               <a:ext uri="smNativeData">
-                <pr:smNativeData xmlns:pr="smNativeData" xmlns="smNativeData" val="SMDATA_15_mcIdaRMAAAAlAAAAZAAAAA0AAAAAAAAAAAAAAAAAAAAAAAAAAAAAAAAAAAAAAAAAAAEAAABQAAAAAAAAAAAA4D8AAAAAAADgPwAAAAAAAOA/AAAAAAAA4D8AAAAAAADgPwAAAAAAAOA/AAAAAAAA4D8AAAAAAADgPwAAAAAAAOA/AAAAAAAA4D8CAAAAjAAAAAAAAAAAAAAA40oGDP///wgAAAAAAAAAAAAAAAAAAAAAAAAAAAAAAAAAAAAAZAAAAAEAAABAAAAAAAAAAAAAAAAAAAAAAAAAAAAAAAAAAAAAAAAAAAAAAAAAAAAAAAAAAAAAAAAAAAAAAAAAAAAAAAAAAAAAAAAAAAAAAAAAAAAAAAAAAAAAAAAAAAAAFAAAADwAAAAAAAAAAAAAAAAAAAkUAAAAAQAAABQAAAAUAAAAFAAAAAEAAAAAAAAAZAAAAGQAAAAAAAAAZAAAAGQAAAAVAAAAYAAAAAAAAAAAAAAADwAAACADAAAAAAAAAAAAAAEAAACgMgAAVgcAAKr4//8BAAAAf39/AAEAAABkAAAAAAAAABQAAABAHwAAAAAAACYAAAAAAAAAwOD//wAAAAAmAAAAZAAAABYAAABMAAAAAAAAAAAAAAAEAAAAAAAAAAEAAACZloMKAAAAACgAAAAoAAAAZAAAAGQAAAAAAAAAzMzMAAAAAABQAAAAUAAAAGQAAABkAAAAAAAAABcAAAAUAAAAAAAAAAAAAAD/fwAA/38AAAAAAAAJAAAABAAAAAAAAAAeAAAAaAAAAAAAAAAAAAAAAAAAAAAAAAAAAAAAECcAABAnAAAAAAAAAAAAAAAAAAAAAAAAAAAAAAAAAAAAAAAAAAAAABQAAAAAAAAAwMD/AAAAAABkAAAAMgAAAAAAAABkAAAAAAAAAH9/fwAKAAAAIgAAABgAAAAAAAAAAAAAAAAAAAAAAAAAAAAAAAAAAAAkAAAAJAAAAAAAAAAHAAAAAAAAAAAAAAAAAAAAAAAAAAAAAAAAAAAAf39/ACUAAABYAAAAAAAAAAAAAAAAAAAAAAAAAAAAAAAAAAAAAAAAAAAAAAAAAAAAAAAAAAAAAAA/AAAAAAAAAKCGAQAAAAAAAAAAAAAAAAAMAAAAAQAAAAAAAAAAAAAAAAAAAB8AAABUAAAAAAAABQAAAAEAAAAAAAAAAAAAAAAAAAAAAAAAAAAAAAAAAAAAAAAAAAAAAAJ/f38AAAAAA8zMzADAwP8Af39/AAAAAAAAAAAAAAAAAAAAAAAAAAAAIQAAABgAAAAUAAAAAQgAAGonAAB1MQAAMCoAABAAAAAmAAAACAAAAAGAAAAAAAAA"/>
+                <pr:smNativeData xmlns:pr="smNativeData" xmlns="smNativeData" val="SMDATA_15_r8odaRMAAAAlAAAAZAAAAA0AAAAAAAAAAAAAAAAAAAAAAAAAAAAAAAAAAAAAAAAAAAEAAABQAAAAAAAAAAAA4D8AAAAAAADgPwAAAAAAAOA/AAAAAAAA4D8AAAAAAADgPwAAAAAAAOA/AAAAAAAA4D8AAAAAAADgPwAAAAAAAOA/AAAAAAAA4D8CAAAAjAAAAAAAAAAAAAAA40oGDP///wgAAAAAAAAAAAAAAAAAAAAAAAAAAAAAAAAAAAAAZAAAAAEAAABAAAAAAAAAAAAAAAAAAAAAAAAAAAAAAAAAAAAAAAAAAAAAAAAAAAAAAAAAAAAAAAAAAAAAAAAAAAAAAAAAAAAAAAAAAAAAAAAAAAAAAAAAAAAAAAAAAAAAFAAAADwAAAAAAAAAAAAAAAAAAAkUAAAAAQAAABQAAAAUAAAAFAAAAAEAAAAAAAAAZAAAAGQAAAAAAAAAZAAAAGQAAAAVAAAAYAAAAAAAAAAAAAAADwAAACADAAAAAAAAAAAAAAEAAACgMgAAVgcAAKr4//8BAAAAf39/AAEAAABkAAAAAAAAABQAAABAHwAAAAAAACYAAAAAAAAAwOD//wAAAAAmAAAAZAAAABYAAABMAAAAAAAAAAAAAAAEAAAAAAAAAAEAAACZloMKAAAAACgAAAAoAAAAZAAAAGQAAAAAAAAAzMzMAAAAAABQAAAAUAAAAGQAAABkAAAAAAAAABcAAAAUAAAAAAAAAAAAAAD/fwAA/38AAAAAAAAJAAAABAAAAAAAAAAeAAAAaAAAAAAAAAAAAAAAAAAAAAAAAAAAAAAAECcAABAnAAAAAAAAAAAAAAAAAAAAAAAAAAAAAAAAAAAAAAAAAAAAABQAAAAAAAAAwMD/AAAAAABkAAAAMgAAAAAAAABkAAAAAAAAAH9/fwAKAAAAIgAAABgAAAAAAAAAAAAAAAAAAAAAAAAAAAAAAAAAAAAkAAAAJAAAAAAAAAAHAAAAAAAAAAAAAAAAAAAAAAAAAAAAAAAAAAAAf39/ACUAAABYAAAAAAAAAAAAAAAAAAAAAAAAAAAAAAAAAAAAAAAAAAAAAAAAAAAAAAAAAAAAAAA/AAAAAAAAAKCGAQAAAAAAAAAAAAAAAAAMAAAAAQAAAAAAAAAAAAAAAAAAAB8AAABUAAAAAAAABQAAAAEAAAAAAAAAAAAAAAAAAAAAAAAAAAAAAAAAAAAAAAAAAAAAAAJ/f38AAAAAA8zMzADAwP8Af39/AAAAAAAAAAAAAAAAAAAAAAAAAAAAIQAAABgAAAAUAAAAAQgAAGonAAB1MQAAMCoAABAAAAAmAAAACAAAAAGAAAAAAAAA"/>
               </a:ext>
             </a:extLst>
           </p:cNvSpPr>
@@ -7914,7 +7914,7 @@
             <a:spLocks noGrp="1" noChangeArrowheads="1"/>
             <a:extLst>
               <a:ext uri="smNativeData">
-                <pr:smNativeData xmlns:pr="smNativeData" xmlns="smNativeData" val="SMDATA_15_mcIdaRMAAAAlAAAAZAAAAA0AAAAAAAAAAAAAAAAAAAAAAAAAAAAAAAAAAAAAAAAAAAEAAABQAAAAAAAAAAAA4D8AAAAAAADgPwAAAAAAAOA/AAAAAAAA4D8AAAAAAADgPwAAAAAAAOA/AAAAAAAA4D8AAAAAAADgPwAAAAAAAOA/AAAAAAAA4D8CAAAAjAAAAAAAAAAAAAAA40oGDP///wgAAAAAAAAAAAAAAAAAAAAAAAAAAAAAAAAAAAAAZAAAAAEAAABAAAAAAAAAAAAAAAAAAAAAAAAAAAAAAAAAAAAAAAAAAAAAAAAAAAAAAAAAAAAAAAAAAAAAAAAAAAAAAAAAAAAAAAAAAAAAAAAAAAAAAAAAAAAAAAAAAAAAFAAAADwAAAAAAAAAAAAAAAAAAAkUAAAAAQAAABQAAAAUAAAAFAAAAAEAAAAAAAAAZAAAAGQAAAAAAAAAZAAAAGQAAAAVAAAAYAAAAAAAAAAAAAAADwAAACADAAAAAAAAAAAAAAEAAACgMgAAVgcAAKr4//8BAAAAf39/AAEAAABkAAAAAAAAABQAAABAHwAAAAAAACYAAAAAAAAAwOD//wAAAAAmAAAAZAAAABYAAABMAAAAAAAAAAAAAAAEAAAAAAAAAAEAAACZloMKAAAAACgAAAAoAAAAZAAAAGQAAAAAAAAAzMzMAAAAAABQAAAAUAAAAGQAAABkAAAAAAAAABcAAAAUAAAAAAAAAAAAAAD/fwAA/38AAAAAAAAJAAAABAAAAAAAAAAeAAAAaAAAAAAAAAAAAAAAAAAAAAAAAAAAAAAAECcAABAnAAAAAAAAAAAAAAAAAAAAAAAAAAAAAAAAAAAAAAAAAAAAABQAAAAAAAAAwMD/AAAAAABkAAAAMgAAAAAAAABkAAAAAAAAAH9/fwAKAAAAIgAAABgAAAAAAAAAAAAAAAAAAAAAAAAAAAAAAAAAAAAkAAAAJAAAAAAAAAAHAAAAAAAAAAAAAAAAAAAAAAAAAAAAAAAAAAAAf39/ACUAAABYAAAAAAAAAAAAAAAAAAAAAAAAAAAAAAAAAAAAAAAAAAAAAAAAAAAAAAAAAAAAAAA/AAAAAAAAAKCGAQAAAAAAAAAAAAAAAAAMAAAAAQAAAAAAAAAAAAAAAAAAAB8AAABUAAAAAAAABQAAAAEAAAAAAAAAAAAAAAAAAAAAAAAAAAAAAAAAAAAAAAAAAAAAAAJ/f38AAAAAA8zMzADAwP8Af39/AAAAAAAAAAAAAAAAAAAAAAAAAAAAIQAAABgAAAAUAAAA0AIAADgEAABjFgAAxgsAABAAAAAmAAAACAAAAAAAAAAAAAAA"/>
+                <pr:smNativeData xmlns:pr="smNativeData" xmlns="smNativeData" val="SMDATA_15_r8odaRMAAAAlAAAAZAAAAA0AAAAAAAAAAAAAAAAAAAAAAAAAAAAAAAAAAAAAAAAAAAEAAABQAAAAAAAAAAAA4D8AAAAAAADgPwAAAAAAAOA/AAAAAAAA4D8AAAAAAADgPwAAAAAAAOA/AAAAAAAA4D8AAAAAAADgPwAAAAAAAOA/AAAAAAAA4D8CAAAAjAAAAAAAAAAAAAAA40oGDP///wgAAAAAAAAAAAAAAAAAAAAAAAAAAAAAAAAAAAAAZAAAAAEAAABAAAAAAAAAAAAAAAAAAAAAAAAAAAAAAAAAAAAAAAAAAAAAAAAAAAAAAAAAAAAAAAAAAAAAAAAAAAAAAAAAAAAAAAAAAAAAAAAAAAAAAAAAAAAAAAAAAAAAFAAAADwAAAAAAAAAAAAAAAAAAAkUAAAAAQAAABQAAAAUAAAAFAAAAAEAAAAAAAAAZAAAAGQAAAAAAAAAZAAAAGQAAAAVAAAAYAAAAAAAAAAAAAAADwAAACADAAAAAAAAAAAAAAEAAACgMgAAVgcAAKr4//8BAAAAf39/AAEAAABkAAAAAAAAABQAAABAHwAAAAAAACYAAAAAAAAAwOD//wAAAAAmAAAAZAAAABYAAABMAAAAAAAAAAAAAAAEAAAAAAAAAAEAAACZloMKAAAAACgAAAAoAAAAZAAAAGQAAAAAAAAAzMzMAAAAAABQAAAAUAAAAGQAAABkAAAAAAAAABcAAAAUAAAAAAAAAAAAAAD/fwAA/38AAAAAAAAJAAAABAAAAAAAAAAeAAAAaAAAAAAAAAAAAAAAAAAAAAAAAAAAAAAAECcAABAnAAAAAAAAAAAAAAAAAAAAAAAAAAAAAAAAAAAAAAAAAAAAABQAAAAAAAAAwMD/AAAAAABkAAAAMgAAAAAAAABkAAAAAAAAAH9/fwAKAAAAIgAAABgAAAAAAAAAAAAAAAAAAAAAAAAAAAAAAAAAAAAkAAAAJAAAAAAAAAAHAAAAAAAAAAAAAAAAAAAAAAAAAAAAAAAAAAAAf39/ACUAAABYAAAAAAAAAAAAAAAAAAAAAAAAAAAAAAAAAAAAAAAAAAAAAAAAAAAAAAAAAAAAAAA/AAAAAAAAAKCGAQAAAAAAAAAAAAAAAAAMAAAAAQAAAAAAAAAAAAAAAAAAAB8AAABUAAAAAAAABQAAAAEAAAAAAAAAAAAAAAAAAAAAAAAAAAAAAAAAAAAAAAAAAAAAAAJ/f38AAAAAA8zMzADAwP8Af39/AAAAAAAAAAAAAAAAAAAAAAAAAAAAIQAAABgAAAAUAAAA0AIAADgEAABjFgAAxgsAABAAAAAmAAAACAAAAAAAAAAAAAAA"/>
               </a:ext>
             </a:extLst>
           </p:cNvSpPr>
@@ -7943,7 +7943,7 @@
             <a:spLocks noGrp="1" noChangeArrowheads="1"/>
             <a:extLst>
               <a:ext uri="smNativeData">
-                <pr:smNativeData xmlns:pr="smNativeData" xmlns="smNativeData" val="SMDATA_15_mcIdaRMAAAAlAAAAZAAAAA0AAAAAAAAAAAAAAAAAAAAAAAAAAAAAAAAAAAAAAAAAAAEAAABQAAAAAAAAAAAA4D8AAAAAAADgPwAAAAAAAOA/AAAAAAAA4D8AAAAAAADgPwAAAAAAAOA/AAAAAAAA4D8AAAAAAADgPwAAAAAAAOA/AAAAAAAA4D8CAAAAjAAAAAAAAAAAAAAA40oGDP///wgAAAAAAAAAAAAAAAAAAAAAAAAAAAAAAAAAAAAAZAAAAAEAAABAAAAAAAAAAAAAAAAAAAAAAAAAAAAAAAAAAAAAAAAAAAAAAAAAAAAAAAAAAAAAAAAAAAAAAAAAAAAAAAAAAAAAAAAAAAAAAAAAAAAAAAAAAAAAAAAAAAAAFAAAADwAAAAAAAAAAAAAAAAAAAkUAAAAAQAAABQAAAAUAAAAFAAAAAEAAAAAAAAAZAAAAGQAAAAAAAAAZAAAAGQAAAAVAAAAYAAAAAAAAAAAAAAADwAAACADAAAAAAAAAAAAAAEAAACgMgAAVgcAAKr4//8BAAAAf39/AAEAAABkAAAAAAAAABQAAABAHwAAAAAAACYAAAAAAAAAwOD//wAAAAAmAAAAZAAAABYAAABMAAAAAAAAAAAAAAAEAAAAAAAAAAEAAACZloMKAAAAACgAAAAoAAAAZAAAAGQAAAAAAAAAzMzMAAAAAABQAAAAUAAAAGQAAABkAAAAAAAAABcAAAAUAAAAAAAAAAAAAAD/fwAA/38AAAAAAAAJAAAABAAAAAAAAAAeAAAAaAAAAAAAAAAAAAAAAAAAAAAAAAAAAAAAECcAABAnAAAAAAAAAAAAAAAAAAAAAAAAAAAAAAAAAAAAAAAAAAAAABQAAAAAAAAAwMD/AAAAAABkAAAAMgAAAAAAAABkAAAAAAAAAH9/fwAKAAAAIgAAABgAAAAAAAAAAAAAAAAAAAAAAAAAAAAAAAAAAAAkAAAAJAAAAAAAAAAHAAAAAAAAAAAAAAAAAAAAAAAAAAAAAAAAAAAAf39/ACUAAABYAAAAAAAAAAAAAAAAAAAAAAAAAAAAAAAAAAAAAAAAAAAAAAAAAAAAAAAAAAAAAAA/AAAAAAAAAKCGAQAAAAAAAAAAAAAAAAAMAAAAAQAAAAAAAAAAAAAAAAAAAB8AAABUAAAAAAAABQAAAAEAAAAAAAAAAAAAAAAAAAAAAAAAAAAAAAAAAAAAAAAAAAAAAAJ/f38AAAAAA8zMzADAwP8Af39/AAAAAAAAAAAAAAAAAAAAAAAAAAAAIQAAABgAAAAUAAAAjBcAABgVAADUJQAAAiYAABAAAAAmAAAACAAAAAEAAAAAAAAA"/>
+                <pr:smNativeData xmlns:pr="smNativeData" xmlns="smNativeData" val="SMDATA_15_r8odaRMAAAAlAAAAZAAAAA0AAAAAAAAAAAAAAAAAAAAAAAAAAAAAAAAAAAAAAAAAAAEAAABQAAAAAAAAAAAA4D8AAAAAAADgPwAAAAAAAOA/AAAAAAAA4D8AAAAAAADgPwAAAAAAAOA/AAAAAAAA4D8AAAAAAADgPwAAAAAAAOA/AAAAAAAA4D8CAAAAjAAAAAAAAAAAAAAA40oGDP///wgAAAAAAAAAAAAAAAAAAAAAAAAAAAAAAAAAAAAAZAAAAAEAAABAAAAAAAAAAAAAAAAAAAAAAAAAAAAAAAAAAAAAAAAAAAAAAAAAAAAAAAAAAAAAAAAAAAAAAAAAAAAAAAAAAAAAAAAAAAAAAAAAAAAAAAAAAAAAAAAAAAAAFAAAADwAAAAAAAAAAAAAAAAAAAkUAAAAAQAAABQAAAAUAAAAFAAAAAEAAAAAAAAAZAAAAGQAAAAAAAAAZAAAAGQAAAAVAAAAYAAAAAAAAAAAAAAADwAAACADAAAAAAAAAAAAAAEAAACgMgAAVgcAAKr4//8BAAAAf39/AAEAAABkAAAAAAAAABQAAABAHwAAAAAAACYAAAAAAAAAwOD//wAAAAAmAAAAZAAAABYAAABMAAAAAAAAAAAAAAAEAAAAAAAAAAEAAACZloMKAAAAACgAAAAoAAAAZAAAAGQAAAAAAAAAzMzMAAAAAABQAAAAUAAAAGQAAABkAAAAAAAAABcAAAAUAAAAAAAAAAAAAAD/fwAA/38AAAAAAAAJAAAABAAAAAAAAAAeAAAAaAAAAAAAAAAAAAAAAAAAAAAAAAAAAAAAECcAABAnAAAAAAAAAAAAAAAAAAAAAAAAAAAAAAAAAAAAAAAAAAAAABQAAAAAAAAAwMD/AAAAAABkAAAAMgAAAAAAAABkAAAAAAAAAH9/fwAKAAAAIgAAABgAAAAAAAAAAAAAAAAAAAAAAAAAAAAAAAAAAAAkAAAAJAAAAAAAAAAHAAAAAAAAAAAAAAAAAAAAAAAAAAAAAAAAAAAAf39/ACUAAABYAAAAAAAAAAAAAAAAAAAAAAAAAAAAAAAAAAAAAAAAAAAAAAAAAAAAAAAAAAAAAAA/AAAAAAAAAKCGAQAAAAAAAAAAAAAAAAAMAAAAAQAAAAAAAAAAAAAAAAAAAB8AAABUAAAAAAAABQAAAAEAAAAAAAAAAAAAAAAAAAAAAAAAAAAAAAAAAAAAAAAAAAAAAAJ/f38AAAAAA8zMzADAwP8Af39/AAAAAAAAAAAAAAAAAAAAAAAAAAAAIQAAABgAAAAUAAAAjBcAABgVAADUJQAAAiYAABAAAAAmAAAACAAAAAEAAAAAAAAA"/>
               </a:ext>
             </a:extLst>
           </p:cNvSpPr>
@@ -8015,7 +8015,7 @@
             <a:spLocks noGrp="1" noChangeArrowheads="1"/>
             <a:extLst>
               <a:ext uri="smNativeData">
-                <pr:smNativeData xmlns:pr="smNativeData" xmlns="smNativeData" val="SMDATA_15_mcIdaRMAAAAlAAAAZAAAAA0AAAAAAAAAAAAAAAAAAAAAAAAAAAAAAAAAAAAAAAAAAAEAAABQAAAAAAAAAAAA4D8AAAAAAADgPwAAAAAAAOA/AAAAAAAA4D8AAAAAAADgPwAAAAAAAOA/AAAAAAAA4D8AAAAAAADgPwAAAAAAAOA/AAAAAAAA4D8CAAAAjAAAAAAAAAAAAAAA40oGDP///wgAAAAAAAAAAAAAAAAAAAAAAAAAAAAAAAAAAAAAZAAAAAEAAABAAAAAAAAAAAAAAAAAAAAAAAAAAAAAAAAAAAAAAAAAAAAAAAAAAAAAAAAAAAAAAAAAAAAAAAAAAAAAAAAAAAAAAAAAAAAAAAAAAAAAAAAAAAAAAAAAAAAAFAAAADwAAAAAAAAAAAAAAAAAAAkUAAAAAQAAABQAAAAUAAAAFAAAAAEAAAAAAAAAZAAAAGQAAAAAAAAAZAAAAGQAAAAVAAAAYAAAAAAAAAAAAAAADwAAACADAAAAAAAAAAAAAAEAAACgMgAAVgcAAKr4//8BAAAAf39/AAEAAABkAAAAAAAAABQAAABAHwAAAAAAACYAAAAAAAAAwOD//wAAAAAmAAAAZAAAABYAAABMAAAAAAAAAAAAAAAEAAAAAAAAAAEAAACZloMKAAAAACgAAAAoAAAAZAAAAGQAAAAAAAAAzMzMAAAAAABQAAAAUAAAAGQAAABkAAAAAAAAABcAAAAUAAAAAAAAAAAAAAD/fwAA/38AAAAAAAAJAAAABAAAAAAAAAAeAAAAaAAAAAAAAAAAAAAAAAAAAAAAAAAAAAAAECcAABAnAAAAAAAAAAAAAAAAAAAAAAAAAAAAAAAAAAAAAAAAAAAAABQAAAAAAAAAwMD/AAAAAABkAAAAMgAAAAAAAABkAAAAAAAAAH9/fwAKAAAAIgAAABgAAAAAAAAAAAAAAAAAAAAAAAAAAAAAAAAAAAAkAAAAJAAAAAAAAAAHAAAAAAAAAAAAAAAAAAAAAAAAAAAAAAAAAAAAf39/ACUAAABYAAAAAAAAAAAAAAAAAAAAAAAAAAAAAAAAAAAAAAAAAAAAAAAAAAAAAAAAAAAAAAA/AAAAAAAAAKCGAQAAAAAAAAAAAAAAAAAMAAAAAQAAAAAAAAAAAAAAAAAAAB8AAABUAAAAAAAABQAAAAEAAAAAAAAAAAAAAAAAAAAAAAAAAAAAAAAAAAAAAAAAAAAAAAJ/f38AAAAAA8zMzADAwP8Af39/AAAAAAAAAAAAAAAAAAAAAAAAAAAAIQAAABgAAAAUAAAAFicAABgVAABwNQAAAiYAABAAAAAmAAAACAAAAAEAAAAAAAAA"/>
+                <pr:smNativeData xmlns:pr="smNativeData" xmlns="smNativeData" val="SMDATA_15_r8odaRMAAAAlAAAAZAAAAA0AAAAAAAAAAAAAAAAAAAAAAAAAAAAAAAAAAAAAAAAAAAEAAABQAAAAAAAAAAAA4D8AAAAAAADgPwAAAAAAAOA/AAAAAAAA4D8AAAAAAADgPwAAAAAAAOA/AAAAAAAA4D8AAAAAAADgPwAAAAAAAOA/AAAAAAAA4D8CAAAAjAAAAAAAAAAAAAAA40oGDP///wgAAAAAAAAAAAAAAAAAAAAAAAAAAAAAAAAAAAAAZAAAAAEAAABAAAAAAAAAAAAAAAAAAAAAAAAAAAAAAAAAAAAAAAAAAAAAAAAAAAAAAAAAAAAAAAAAAAAAAAAAAAAAAAAAAAAAAAAAAAAAAAAAAAAAAAAAAAAAAAAAAAAAFAAAADwAAAAAAAAAAAAAAAAAAAkUAAAAAQAAABQAAAAUAAAAFAAAAAEAAAAAAAAAZAAAAGQAAAAAAAAAZAAAAGQAAAAVAAAAYAAAAAAAAAAAAAAADwAAACADAAAAAAAAAAAAAAEAAACgMgAAVgcAAKr4//8BAAAAf39/AAEAAABkAAAAAAAAABQAAABAHwAAAAAAACYAAAAAAAAAwOD//wAAAAAmAAAAZAAAABYAAABMAAAAAAAAAAAAAAAEAAAAAAAAAAEAAACZloMKAAAAACgAAAAoAAAAZAAAAGQAAAAAAAAAzMzMAAAAAABQAAAAUAAAAGQAAABkAAAAAAAAABcAAAAUAAAAAAAAAAAAAAD/fwAA/38AAAAAAAAJAAAABAAAAAAAAAAeAAAAaAAAAAAAAAAAAAAAAAAAAAAAAAAAAAAAECcAABAnAAAAAAAAAAAAAAAAAAAAAAAAAAAAAAAAAAAAAAAAAAAAABQAAAAAAAAAwMD/AAAAAABkAAAAMgAAAAAAAABkAAAAAAAAAH9/fwAKAAAAIgAAABgAAAAAAAAAAAAAAAAAAAAAAAAAAAAAAAAAAAAkAAAAJAAAAAAAAAAHAAAAAAAAAAAAAAAAAAAAAAAAAAAAAAAAAAAAf39/ACUAAABYAAAAAAAAAAAAAAAAAAAAAAAAAAAAAAAAAAAAAAAAAAAAAAAAAAAAAAAAAAAAAAA/AAAAAAAAAKCGAQAAAAAAAAAAAAAAAAAMAAAAAQAAAAAAAAAAAAAAAAAAAB8AAABUAAAAAAAABQAAAAEAAAAAAAAAAAAAAAAAAAAAAAAAAAAAAAAAAAAAAAAAAAAAAAJ/f38AAAAAA8zMzADAwP8Af39/AAAAAAAAAAAAAAAAAAAAAAAAAAAAIQAAABgAAAAUAAAAFicAABgVAABwNQAAAiYAABAAAAAmAAAACAAAAAEAAAAAAAAA"/>
               </a:ext>
             </a:extLst>
           </p:cNvSpPr>
@@ -8087,7 +8087,7 @@
             <a:spLocks noGrp="1" noChangeArrowheads="1"/>
             <a:extLst>
               <a:ext uri="smNativeData">
-                <pr:smNativeData xmlns:pr="smNativeData" xmlns="smNativeData" val="SMDATA_15_mcIdaRMAAAAlAAAAZAAAAA0AAAAAAAAAAAAAAAAAAAAAAAAAAAAAAAAAAAAAAAAAAAEAAABQAAAAAAAAAAAA4D8AAAAAAADgPwAAAAAAAOA/AAAAAAAA4D8AAAAAAADgPwAAAAAAAOA/AAAAAAAA4D8AAAAAAADgPwAAAAAAAOA/AAAAAAAA4D8CAAAAjAAAAAAAAAAAAAAA40oGDP///wgAAAAAAAAAAAAAAAAAAAAAAAAAAAAAAAAAAAAAZAAAAAEAAABAAAAAAAAAAAAAAAAAAAAAAAAAAAAAAAAAAAAAAAAAAAAAAAAAAAAAAAAAAAAAAAAAAAAAAAAAAAAAAAAAAAAAAAAAAAAAAAAAAAAAAAAAAAAAAAAAAAAAFAAAADwAAAAAAAAAAAAAAAAAAAkUAAAAAQAAABQAAAAUAAAAFAAAAAEAAAAAAAAAZAAAAGQAAAAAAAAAZAAAAGQAAAAVAAAAYAAAAAAAAAAAAAAADwAAACADAAAAAAAAAAAAAAEAAACgMgAAVgcAAKr4//8BAAAAf39/AAEAAABkAAAAAAAAABQAAABAHwAAAAAAACYAAAAAAAAAwOD//wAAAAAmAAAAZAAAABYAAABMAAAAAAAAAAAAAAAEAAAAAAAAAAEAAACZloMKAAAAACgAAAAoAAAAZAAAAGQAAAAAAAAAzMzMAAAAAABQAAAAUAAAAGQAAABkAAAAAAAAABcAAAAUAAAAAAAAAAAAAAD/fwAA/38AAAAAAAAJAAAABAAAAAAAAAAeAAAAaAAAAAAAAAAAAAAAAAAAAAAAAAAAAAAAECcAABAnAAAAAAAAAAAAAAAAAAAAAAAAAAAAAAAAAAAAAAAAAAAAABQAAAAAAAAAwMD/AAAAAABkAAAAMgAAAAAAAABkAAAAAAAAAH9/fwAKAAAAIgAAABgAAAAAAAAAAAAAAAAAAAAAAAAAAAAAAAAAAAAkAAAAJAAAAAAAAAAHAAAAAAAAAAAAAAAAAAAAAAAAAAAAAAAAAAAAf39/ACUAAABYAAAAAAAAAAAAAAAAAAAAAAAAAAAAAAAAAAAAAAAAAAAAAAAAAAAAAAAAAAAAAAA/AAAAAAAAAKCGAQAAAAAAAAAAAAAAAAAMAAAAAQAAAAAAAAAAAAAAAAAAAB8AAABUAAAAAAAABQAAAAEAAAAAAAAAAAAAAAAAAAAAAAAAAAAAAAAAAAAAAAAAAAAAAAJ/f38AAAAAA8zMzADAwP8Af39/AAAAAAAAAAAAAAAAAAAAAAAAAAAAIQAAABgAAAAUAAAAAQgAAGonAAB1MQAAMCoAABAAAAAmAAAACAAAAAGAAAAAAAAA"/>
+                <pr:smNativeData xmlns:pr="smNativeData" xmlns="smNativeData" val="SMDATA_15_r8odaRMAAAAlAAAAZAAAAA0AAAAAAAAAAAAAAAAAAAAAAAAAAAAAAAAAAAAAAAAAAAEAAABQAAAAAAAAAAAA4D8AAAAAAADgPwAAAAAAAOA/AAAAAAAA4D8AAAAAAADgPwAAAAAAAOA/AAAAAAAA4D8AAAAAAADgPwAAAAAAAOA/AAAAAAAA4D8CAAAAjAAAAAAAAAAAAAAA40oGDP///wgAAAAAAAAAAAAAAAAAAAAAAAAAAAAAAAAAAAAAZAAAAAEAAABAAAAAAAAAAAAAAAAAAAAAAAAAAAAAAAAAAAAAAAAAAAAAAAAAAAAAAAAAAAAAAAAAAAAAAAAAAAAAAAAAAAAAAAAAAAAAAAAAAAAAAAAAAAAAAAAAAAAAFAAAADwAAAAAAAAAAAAAAAAAAAkUAAAAAQAAABQAAAAUAAAAFAAAAAEAAAAAAAAAZAAAAGQAAAAAAAAAZAAAAGQAAAAVAAAAYAAAAAAAAAAAAAAADwAAACADAAAAAAAAAAAAAAEAAACgMgAAVgcAAKr4//8BAAAAf39/AAEAAABkAAAAAAAAABQAAABAHwAAAAAAACYAAAAAAAAAwOD//wAAAAAmAAAAZAAAABYAAABMAAAAAAAAAAAAAAAEAAAAAAAAAAEAAACZloMKAAAAACgAAAAoAAAAZAAAAGQAAAAAAAAAzMzMAAAAAABQAAAAUAAAAGQAAABkAAAAAAAAABcAAAAUAAAAAAAAAAAAAAD/fwAA/38AAAAAAAAJAAAABAAAAAAAAAAeAAAAaAAAAAAAAAAAAAAAAAAAAAAAAAAAAAAAECcAABAnAAAAAAAAAAAAAAAAAAAAAAAAAAAAAAAAAAAAAAAAAAAAABQAAAAAAAAAwMD/AAAAAABkAAAAMgAAAAAAAABkAAAAAAAAAH9/fwAKAAAAIgAAABgAAAAAAAAAAAAAAAAAAAAAAAAAAAAAAAAAAAAkAAAAJAAAAAAAAAAHAAAAAAAAAAAAAAAAAAAAAAAAAAAAAAAAAAAAf39/ACUAAABYAAAAAAAAAAAAAAAAAAAAAAAAAAAAAAAAAAAAAAAAAAAAAAAAAAAAAAAAAAAAAAA/AAAAAAAAAKCGAQAAAAAAAAAAAAAAAAAMAAAAAQAAAAAAAAAAAAAAAAAAAB8AAABUAAAAAAAABQAAAAEAAAAAAAAAAAAAAAAAAAAAAAAAAAAAAAAAAAAAAAAAAAAAAAJ/f38AAAAAA8zMzADAwP8Af39/AAAAAAAAAAAAAAAAAAAAAAAAAAAAIQAAABgAAAAUAAAAAQgAAGonAAB1MQAAMCoAABAAAAAmAAAACAAAAAGAAAAAAAAA"/>
               </a:ext>
             </a:extLst>
           </p:cNvSpPr>
@@ -8239,7 +8239,7 @@
             <a:spLocks noGrp="1" noChangeArrowheads="1"/>
             <a:extLst>
               <a:ext uri="smNativeData">
-                <pr:smNativeData xmlns:pr="smNativeData" xmlns="smNativeData" val="SMDATA_15_mcIdaRMAAAAlAAAAZAAAAA0AAAAAAAAAAAAAAAAAAAAAAAAAAAAAAAAAAAAAAAAAAAEAAABQAAAAAAAAAAAA4D8AAAAAAADgPwAAAAAAAOA/AAAAAAAA4D8AAAAAAADgPwAAAAAAAOA/AAAAAAAA4D8AAAAAAADgPwAAAAAAAOA/AAAAAAAA4D8CAAAAjAAAAAAAAAAAAAAA40oGDP///wgAAAAAAAAAAAAAAAAAAAAAAAAAAAAAAAAAAAAAZAAAAAEAAABAAAAAAAAAAAAAAAAAAAAAAAAAAAAAAAAAAAAAAAAAAAAAAAAAAAAAAAAAAAAAAAAAAAAAAAAAAAAAAAAAAAAAAAAAAAAAAAAAAAAAAAAAAAAAAAAAAAAAFAAAADwAAAAAAAAAAAAAAAAAAAkUAAAAAQAAABQAAAAUAAAAFAAAAAEAAAAAAAAAZAAAAGQAAAAAAAAAZAAAAGQAAAAVAAAAYAAAAAAAAAAAAAAADwAAACADAAAAAAAAAAAAAAEAAACgMgAAVgcAAKr4//8BAAAAf39/AAEAAABkAAAAAAAAABQAAABAHwAAAAAAACYAAAAAAAAAwOD//wAAAAAmAAAAZAAAABYAAABMAAAAAAAAAAAAAAAEAAAAAAAAAAEAAACZloMKAAAAACgAAAAoAAAAZAAAAGQAAAAAAAAAzMzMAAAAAABQAAAAUAAAAGQAAABkAAAAAAAAABcAAAAUAAAAAAAAAAAAAAD/fwAA/38AAAAAAAAJAAAABAAAAAAAAAAeAAAAaAAAAAAAAAAAAAAAAAAAAAAAAAAAAAAAECcAABAnAAAAAAAAAAAAAAAAAAAAAAAAAAAAAAAAAAAAAAAAAAAAABQAAAAAAAAAwMD/AAAAAABkAAAAMgAAAAAAAABkAAAAAAAAAH9/fwAKAAAAIgAAABgAAAAAAAAAAAAAAAAAAAAAAAAAAAAAAAAAAAAkAAAAJAAAAAAAAAAHAAAAAAAAAAAAAAAAAAAAAAAAAAAAAAAAAAAAf39/ACUAAABYAAAAAAAAAAAAAAAAAAAAAAAAAAAAAAAAAAAAAAAAAAAAAAAAAAAAAAAAAAAAAAA/AAAAAAAAAKCGAQAAAAAAAAAAAAAAAAAMAAAAAQAAAAAAAAAAAAAAAAAAAB8AAABUAAAAAAAABQAAAAEAAAAAAAAAAAAAAAAAAAAAAAAAAAAAAAAAAAAAAAAAAAAAAAJ/f38AAAAAA8zMzADAwP8Af39/AAAAAAAAAAAAAAAAAAAAAAAAAAAAIQAAABgAAAAUAAAA0AIAADgEAABjFgAAxgsAABAAAAAmAAAACAAAAAAAAAAAAAAA"/>
+                <pr:smNativeData xmlns:pr="smNativeData" xmlns="smNativeData" val="SMDATA_15_r8odaRMAAAAlAAAAZAAAAA0AAAAAAAAAAAAAAAAAAAAAAAAAAAAAAAAAAAAAAAAAAAEAAABQAAAAAAAAAAAA4D8AAAAAAADgPwAAAAAAAOA/AAAAAAAA4D8AAAAAAADgPwAAAAAAAOA/AAAAAAAA4D8AAAAAAADgPwAAAAAAAOA/AAAAAAAA4D8CAAAAjAAAAAAAAAAAAAAA40oGDP///wgAAAAAAAAAAAAAAAAAAAAAAAAAAAAAAAAAAAAAZAAAAAEAAABAAAAAAAAAAAAAAAAAAAAAAAAAAAAAAAAAAAAAAAAAAAAAAAAAAAAAAAAAAAAAAAAAAAAAAAAAAAAAAAAAAAAAAAAAAAAAAAAAAAAAAAAAAAAAAAAAAAAAFAAAADwAAAAAAAAAAAAAAAAAAAkUAAAAAQAAABQAAAAUAAAAFAAAAAEAAAAAAAAAZAAAAGQAAAAAAAAAZAAAAGQAAAAVAAAAYAAAAAAAAAAAAAAADwAAACADAAAAAAAAAAAAAAEAAACgMgAAVgcAAKr4//8BAAAAf39/AAEAAABkAAAAAAAAABQAAABAHwAAAAAAACYAAAAAAAAAwOD//wAAAAAmAAAAZAAAABYAAABMAAAAAAAAAAAAAAAEAAAAAAAAAAEAAACZloMKAAAAACgAAAAoAAAAZAAAAGQAAAAAAAAAzMzMAAAAAABQAAAAUAAAAGQAAABkAAAAAAAAABcAAAAUAAAAAAAAAAAAAAD/fwAA/38AAAAAAAAJAAAABAAAAAAAAAAeAAAAaAAAAAAAAAAAAAAAAAAAAAAAAAAAAAAAECcAABAnAAAAAAAAAAAAAAAAAAAAAAAAAAAAAAAAAAAAAAAAAAAAABQAAAAAAAAAwMD/AAAAAABkAAAAMgAAAAAAAABkAAAAAAAAAH9/fwAKAAAAIgAAABgAAAAAAAAAAAAAAAAAAAAAAAAAAAAAAAAAAAAkAAAAJAAAAAAAAAAHAAAAAAAAAAAAAAAAAAAAAAAAAAAAAAAAAAAAf39/ACUAAABYAAAAAAAAAAAAAAAAAAAAAAAAAAAAAAAAAAAAAAAAAAAAAAAAAAAAAAAAAAAAAAA/AAAAAAAAAKCGAQAAAAAAAAAAAAAAAAAMAAAAAQAAAAAAAAAAAAAAAAAAAB8AAABUAAAAAAAABQAAAAEAAAAAAAAAAAAAAAAAAAAAAAAAAAAAAAAAAAAAAAAAAAAAAAJ/f38AAAAAA8zMzADAwP8Af39/AAAAAAAAAAAAAAAAAAAAAAAAAAAAIQAAABgAAAAUAAAA0AIAADgEAABjFgAAxgsAABAAAAAmAAAACAAAAAAAAAAAAAAA"/>
               </a:ext>
             </a:extLst>
           </p:cNvSpPr>
@@ -8268,7 +8268,7 @@
             <a:spLocks noGrp="1" noChangeArrowheads="1"/>
             <a:extLst>
               <a:ext uri="smNativeData">
-                <pr:smNativeData xmlns:pr="smNativeData" xmlns="smNativeData" val="SMDATA_15_mcIdaRMAAAAlAAAAZAAAAA0AAAAAAAAAAAAAAAAAAAAAAAAAAAAAAAAAAAAAAAAAAAEAAABQAAAAAAAAAAAA4D8AAAAAAADgPwAAAAAAAOA/AAAAAAAA4D8AAAAAAADgPwAAAAAAAOA/AAAAAAAA4D8AAAAAAADgPwAAAAAAAOA/AAAAAAAA4D8CAAAAjAAAAAAAAAAAAAAA40oGDP///wgAAAAAAAAAAAAAAAAAAAAAAAAAAAAAAAAAAAAAZAAAAAEAAABAAAAAAAAAAAAAAAAAAAAAAAAAAAAAAAAAAAAAAAAAAAAAAAAAAAAAAAAAAAAAAAAAAAAAAAAAAAAAAAAAAAAAAAAAAAAAAAAAAAAAAAAAAAAAAAAAAAAAFAAAADwAAAAAAAAAAAAAAAAAAAkUAAAAAQAAABQAAAAUAAAAFAAAAAEAAAAAAAAAZAAAAGQAAAAAAAAAZAAAAGQAAAAVAAAAYAAAAAAAAAAAAAAADwAAACADAAAAAAAAAAAAAAEAAACgMgAAVgcAAKr4//8BAAAAf39/AAEAAABkAAAAAAAAABQAAABAHwAAAAAAACYAAAAAAAAAwOD//wAAAAAmAAAAZAAAABYAAABMAAAAAAAAAAAAAAAEAAAAAAAAAAEAAACZloMKAAAAACgAAAAoAAAAZAAAAGQAAAAAAAAAzMzMAAAAAABQAAAAUAAAAGQAAABkAAAAAAAAABcAAAAUAAAAAAAAAAAAAAD/fwAA/38AAAAAAAAJAAAABAAAAAAAAAAeAAAAaAAAAAAAAAAAAAAAAAAAAAAAAAAAAAAAECcAABAnAAAAAAAAAAAAAAAAAAAAAAAAAAAAAAAAAAAAAAAAAAAAABQAAAAAAAAAwMD/AAAAAABkAAAAMgAAAAAAAABkAAAAAAAAAH9/fwAKAAAAIgAAABgAAAAAAAAAAAAAAAAAAAAAAAAAAAAAAAAAAAAkAAAAJAAAAAAAAAAHAAAAAAAAAAAAAAAAAAAAAAAAAAAAAAAAAAAAf39/ACUAAABYAAAAAAAAAAAAAAAAAAAAAAAAAAAAAAAAAAAAAAAAAAAAAAAAAAAAAAAAAAAAAAA/AAAAAAAAAKCGAQAAAAAAAAAAAAAAAAAMAAAAAQAAAAAAAAAAAAAAAAAAAB8AAABUAAAAAAAABQAAAAEAAAAAAAAAAAAAAAAAAAAAAAAAAAAAAAAAAAAAAAAAAAAAAAJ/f38AAAAAA8zMzADAwP8Af39/AAAAAAAAAAAAAAAAAAAAAAAAAAAAIQAAABgAAAAUAAAAjBcAABgVAADUJQAAAiYAABAAAAAmAAAACAAAAAEAAAAAAAAA"/>
+                <pr:smNativeData xmlns:pr="smNativeData" xmlns="smNativeData" val="SMDATA_15_r8odaRMAAAAlAAAAZAAAAA0AAAAAAAAAAAAAAAAAAAAAAAAAAAAAAAAAAAAAAAAAAAEAAABQAAAAAAAAAAAA4D8AAAAAAADgPwAAAAAAAOA/AAAAAAAA4D8AAAAAAADgPwAAAAAAAOA/AAAAAAAA4D8AAAAAAADgPwAAAAAAAOA/AAAAAAAA4D8CAAAAjAAAAAAAAAAAAAAA40oGDP///wgAAAAAAAAAAAAAAAAAAAAAAAAAAAAAAAAAAAAAZAAAAAEAAABAAAAAAAAAAAAAAAAAAAAAAAAAAAAAAAAAAAAAAAAAAAAAAAAAAAAAAAAAAAAAAAAAAAAAAAAAAAAAAAAAAAAAAAAAAAAAAAAAAAAAAAAAAAAAAAAAAAAAFAAAADwAAAAAAAAAAAAAAAAAAAkUAAAAAQAAABQAAAAUAAAAFAAAAAEAAAAAAAAAZAAAAGQAAAAAAAAAZAAAAGQAAAAVAAAAYAAAAAAAAAAAAAAADwAAACADAAAAAAAAAAAAAAEAAACgMgAAVgcAAKr4//8BAAAAf39/AAEAAABkAAAAAAAAABQAAABAHwAAAAAAACYAAAAAAAAAwOD//wAAAAAmAAAAZAAAABYAAABMAAAAAAAAAAAAAAAEAAAAAAAAAAEAAACZloMKAAAAACgAAAAoAAAAZAAAAGQAAAAAAAAAzMzMAAAAAABQAAAAUAAAAGQAAABkAAAAAAAAABcAAAAUAAAAAAAAAAAAAAD/fwAA/38AAAAAAAAJAAAABAAAAAAAAAAeAAAAaAAAAAAAAAAAAAAAAAAAAAAAAAAAAAAAECcAABAnAAAAAAAAAAAAAAAAAAAAAAAAAAAAAAAAAAAAAAAAAAAAABQAAAAAAAAAwMD/AAAAAABkAAAAMgAAAAAAAABkAAAAAAAAAH9/fwAKAAAAIgAAABgAAAAAAAAAAAAAAAAAAAAAAAAAAAAAAAAAAAAkAAAAJAAAAAAAAAAHAAAAAAAAAAAAAAAAAAAAAAAAAAAAAAAAAAAAf39/ACUAAABYAAAAAAAAAAAAAAAAAAAAAAAAAAAAAAAAAAAAAAAAAAAAAAAAAAAAAAAAAAAAAAA/AAAAAAAAAKCGAQAAAAAAAAAAAAAAAAAMAAAAAQAAAAAAAAAAAAAAAAAAAB8AAABUAAAAAAAABQAAAAEAAAAAAAAAAAAAAAAAAAAAAAAAAAAAAAAAAAAAAAAAAAAAAAJ/f38AAAAAA8zMzADAwP8Af39/AAAAAAAAAAAAAAAAAAAAAAAAAAAAIQAAABgAAAAUAAAAjBcAABgVAADUJQAAAiYAABAAAAAmAAAACAAAAAEAAAAAAAAA"/>
               </a:ext>
             </a:extLst>
           </p:cNvSpPr>
@@ -8340,7 +8340,7 @@
             <a:spLocks noGrp="1" noChangeArrowheads="1"/>
             <a:extLst>
               <a:ext uri="smNativeData">
-                <pr:smNativeData xmlns:pr="smNativeData" xmlns="smNativeData" val="SMDATA_15_mcIdaRMAAAAlAAAAZAAAAA0AAAAAAAAAAAAAAAAAAAAAAAAAAAAAAAAAAAAAAAAAAAEAAABQAAAAAAAAAAAA4D8AAAAAAADgPwAAAAAAAOA/AAAAAAAA4D8AAAAAAADgPwAAAAAAAOA/AAAAAAAA4D8AAAAAAADgPwAAAAAAAOA/AAAAAAAA4D8CAAAAjAAAAAAAAAAAAAAA40oGDP///wgAAAAAAAAAAAAAAAAAAAAAAAAAAAAAAAAAAAAAZAAAAAEAAABAAAAAAAAAAAAAAAAAAAAAAAAAAAAAAAAAAAAAAAAAAAAAAAAAAAAAAAAAAAAAAAAAAAAAAAAAAAAAAAAAAAAAAAAAAAAAAAAAAAAAAAAAAAAAAAAAAAAAFAAAADwAAAAAAAAAAAAAAAAAAAkUAAAAAQAAABQAAAAUAAAAFAAAAAEAAAAAAAAAZAAAAGQAAAAAAAAAZAAAAGQAAAAVAAAAYAAAAAAAAAAAAAAADwAAACADAAAAAAAAAAAAAAEAAACgMgAAVgcAAKr4//8BAAAAf39/AAEAAABkAAAAAAAAABQAAABAHwAAAAAAACYAAAAAAAAAwOD//wAAAAAmAAAAZAAAABYAAABMAAAAAAAAAAAAAAAEAAAAAAAAAAEAAACZloMKAAAAACgAAAAoAAAAZAAAAGQAAAAAAAAAzMzMAAAAAABQAAAAUAAAAGQAAABkAAAAAAAAABcAAAAUAAAAAAAAAAAAAAD/fwAA/38AAAAAAAAJAAAABAAAAAAAAAAeAAAAaAAAAAAAAAAAAAAAAAAAAAAAAAAAAAAAECcAABAnAAAAAAAAAAAAAAAAAAAAAAAAAAAAAAAAAAAAAAAAAAAAABQAAAAAAAAAwMD/AAAAAABkAAAAMgAAAAAAAABkAAAAAAAAAH9/fwAKAAAAIgAAABgAAAAAAAAAAAAAAAAAAAAAAAAAAAAAAAAAAAAkAAAAJAAAAAAAAAAHAAAAAAAAAAAAAAAAAAAAAAAAAAAAAAAAAAAAf39/ACUAAABYAAAAAAAAAAAAAAAAAAAAAAAAAAAAAAAAAAAAAAAAAAAAAAAAAAAAAAAAAAAAAAA/AAAAAAAAAKCGAQAAAAAAAAAAAAAAAAAMAAAAAQAAAAAAAAAAAAAAAAAAAB8AAABUAAAAAAAABQAAAAEAAAAAAAAAAAAAAAAAAAAAAAAAAAAAAAAAAAAAAAAAAAAAAAJ/f38AAAAAA8zMzADAwP8Af39/AAAAAAAAAAAAAAAAAAAAAAAAAAAAIQAAABgAAAAUAAAAFicAABgVAABwNQAAAiYAABAAAAAmAAAACAAAAAEAAAAAAAAA"/>
+                <pr:smNativeData xmlns:pr="smNativeData" xmlns="smNativeData" val="SMDATA_15_r8odaRMAAAAlAAAAZAAAAA0AAAAAAAAAAAAAAAAAAAAAAAAAAAAAAAAAAAAAAAAAAAEAAABQAAAAAAAAAAAA4D8AAAAAAADgPwAAAAAAAOA/AAAAAAAA4D8AAAAAAADgPwAAAAAAAOA/AAAAAAAA4D8AAAAAAADgPwAAAAAAAOA/AAAAAAAA4D8CAAAAjAAAAAAAAAAAAAAA40oGDP///wgAAAAAAAAAAAAAAAAAAAAAAAAAAAAAAAAAAAAAZAAAAAEAAABAAAAAAAAAAAAAAAAAAAAAAAAAAAAAAAAAAAAAAAAAAAAAAAAAAAAAAAAAAAAAAAAAAAAAAAAAAAAAAAAAAAAAAAAAAAAAAAAAAAAAAAAAAAAAAAAAAAAAFAAAADwAAAAAAAAAAAAAAAAAAAkUAAAAAQAAABQAAAAUAAAAFAAAAAEAAAAAAAAAZAAAAGQAAAAAAAAAZAAAAGQAAAAVAAAAYAAAAAAAAAAAAAAADwAAACADAAAAAAAAAAAAAAEAAACgMgAAVgcAAKr4//8BAAAAf39/AAEAAABkAAAAAAAAABQAAABAHwAAAAAAACYAAAAAAAAAwOD//wAAAAAmAAAAZAAAABYAAABMAAAAAAAAAAAAAAAEAAAAAAAAAAEAAACZloMKAAAAACgAAAAoAAAAZAAAAGQAAAAAAAAAzMzMAAAAAABQAAAAUAAAAGQAAABkAAAAAAAAABcAAAAUAAAAAAAAAAAAAAD/fwAA/38AAAAAAAAJAAAABAAAAAAAAAAeAAAAaAAAAAAAAAAAAAAAAAAAAAAAAAAAAAAAECcAABAnAAAAAAAAAAAAAAAAAAAAAAAAAAAAAAAAAAAAAAAAAAAAABQAAAAAAAAAwMD/AAAAAABkAAAAMgAAAAAAAABkAAAAAAAAAH9/fwAKAAAAIgAAABgAAAAAAAAAAAAAAAAAAAAAAAAAAAAAAAAAAAAkAAAAJAAAAAAAAAAHAAAAAAAAAAAAAAAAAAAAAAAAAAAAAAAAAAAAf39/ACUAAABYAAAAAAAAAAAAAAAAAAAAAAAAAAAAAAAAAAAAAAAAAAAAAAAAAAAAAAAAAAAAAAA/AAAAAAAAAKCGAQAAAAAAAAAAAAAAAAAMAAAAAQAAAAAAAAAAAAAAAAAAAB8AAABUAAAAAAAABQAAAAEAAAAAAAAAAAAAAAAAAAAAAAAAAAAAAAAAAAAAAAAAAAAAAAJ/f38AAAAAA8zMzADAwP8Af39/AAAAAAAAAAAAAAAAAAAAAAAAAAAAIQAAABgAAAAUAAAAFicAABgVAABwNQAAAiYAABAAAAAmAAAACAAAAAEAAAAAAAAA"/>
               </a:ext>
             </a:extLst>
           </p:cNvSpPr>
@@ -8412,7 +8412,7 @@
             <a:spLocks noGrp="1" noChangeArrowheads="1"/>
             <a:extLst>
               <a:ext uri="smNativeData">
-                <pr:smNativeData xmlns:pr="smNativeData" xmlns="smNativeData" val="SMDATA_15_mcIdaRMAAAAlAAAAZAAAAA0AAAAAAAAAAAAAAAAAAAAAAAAAAAAAAAAAAAAAAAAAAAEAAABQAAAAAAAAAAAA4D8AAAAAAADgPwAAAAAAAOA/AAAAAAAA4D8AAAAAAADgPwAAAAAAAOA/AAAAAAAA4D8AAAAAAADgPwAAAAAAAOA/AAAAAAAA4D8CAAAAjAAAAAAAAAAAAAAA40oGDP///wgAAAAAAAAAAAAAAAAAAAAAAAAAAAAAAAAAAAAAZAAAAAEAAABAAAAAAAAAAAAAAAAAAAAAAAAAAAAAAAAAAAAAAAAAAAAAAAAAAAAAAAAAAAAAAAAAAAAAAAAAAAAAAAAAAAAAAAAAAAAAAAAAAAAAAAAAAAAAAAAAAAAAFAAAADwAAAAAAAAAAAAAAAAAAAkUAAAAAQAAABQAAAAUAAAAFAAAAAEAAAAAAAAAZAAAAGQAAAAAAAAAZAAAAGQAAAAVAAAAYAAAAAAAAAAAAAAADwAAACADAAAAAAAAAAAAAAEAAACgMgAAVgcAAKr4//8BAAAAf39/AAEAAABkAAAAAAAAABQAAABAHwAAAAAAACYAAAAAAAAAwOD//wAAAAAmAAAAZAAAABYAAABMAAAAAAAAAAAAAAAEAAAAAAAAAAEAAACZloMKAAAAACgAAAAoAAAAZAAAAGQAAAAAAAAAzMzMAAAAAABQAAAAUAAAAGQAAABkAAAAAAAAABcAAAAUAAAAAAAAAAAAAAD/fwAA/38AAAAAAAAJAAAABAAAAAAAAAAeAAAAaAAAAAAAAAAAAAAAAAAAAAAAAAAAAAAAECcAABAnAAAAAAAAAAAAAAAAAAAAAAAAAAAAAAAAAAAAAAAAAAAAABQAAAAAAAAAwMD/AAAAAABkAAAAMgAAAAAAAABkAAAAAAAAAH9/fwAKAAAAIgAAABgAAAAAAAAAAAAAAAAAAAAAAAAAAAAAAAAAAAAkAAAAJAAAAAAAAAAHAAAAAAAAAAAAAAAAAAAAAAAAAAAAAAAAAAAAf39/ACUAAABYAAAAAAAAAAAAAAAAAAAAAAAAAAAAAAAAAAAAAAAAAAAAAAAAAAAAAAAAAAAAAAA/AAAAAAAAAKCGAQAAAAAAAAAAAAAAAAAMAAAAAQAAAAAAAAAAAAAAAAAAAB8AAABUAAAAAAAABQAAAAEAAAAAAAAAAAAAAAAAAAAAAAAAAAAAAAAAAAAAAAAAAAAAAAJ/f38AAAAAA8zMzADAwP8Af39/AAAAAAAAAAAAAAAAAAAAAAAAAAAAIQAAABgAAAAUAAAAAQgAABgVAABKFgAAAiYAABAAAAAmAAAACAAAAAEAAAAAAAAA"/>
+                <pr:smNativeData xmlns:pr="smNativeData" xmlns="smNativeData" val="SMDATA_15_r8odaRMAAAAlAAAAZAAAAA0AAAAAAAAAAAAAAAAAAAAAAAAAAAAAAAAAAAAAAAAAAAEAAABQAAAAAAAAAAAA4D8AAAAAAADgPwAAAAAAAOA/AAAAAAAA4D8AAAAAAADgPwAAAAAAAOA/AAAAAAAA4D8AAAAAAADgPwAAAAAAAOA/AAAAAAAA4D8CAAAAjAAAAAAAAAAAAAAA40oGDP///wgAAAAAAAAAAAAAAAAAAAAAAAAAAAAAAAAAAAAAZAAAAAEAAABAAAAAAAAAAAAAAAAAAAAAAAAAAAAAAAAAAAAAAAAAAAAAAAAAAAAAAAAAAAAAAAAAAAAAAAAAAAAAAAAAAAAAAAAAAAAAAAAAAAAAAAAAAAAAAAAAAAAAFAAAADwAAAAAAAAAAAAAAAAAAAkUAAAAAQAAABQAAAAUAAAAFAAAAAEAAAAAAAAAZAAAAGQAAAAAAAAAZAAAAGQAAAAVAAAAYAAAAAAAAAAAAAAADwAAACADAAAAAAAAAAAAAAEAAACgMgAAVgcAAKr4//8BAAAAf39/AAEAAABkAAAAAAAAABQAAABAHwAAAAAAACYAAAAAAAAAwOD//wAAAAAmAAAAZAAAABYAAABMAAAAAAAAAAAAAAAEAAAAAAAAAAEAAACZloMKAAAAACgAAAAoAAAAZAAAAGQAAAAAAAAAzMzMAAAAAABQAAAAUAAAAGQAAABkAAAAAAAAABcAAAAUAAAAAAAAAAAAAAD/fwAA/38AAAAAAAAJAAAABAAAAAAAAAAeAAAAaAAAAAAAAAAAAAAAAAAAAAAAAAAAAAAAECcAABAnAAAAAAAAAAAAAAAAAAAAAAAAAAAAAAAAAAAAAAAAAAAAABQAAAAAAAAAwMD/AAAAAABkAAAAMgAAAAAAAABkAAAAAAAAAH9/fwAKAAAAIgAAABgAAAAAAAAAAAAAAAAAAAAAAAAAAAAAAAAAAAAkAAAAJAAAAAAAAAAHAAAAAAAAAAAAAAAAAAAAAAAAAAAAAAAAAAAAf39/ACUAAABYAAAAAAAAAAAAAAAAAAAAAAAAAAAAAAAAAAAAAAAAAAAAAAAAAAAAAAAAAAAAAAA/AAAAAAAAAKCGAQAAAAAAAAAAAAAAAAAMAAAAAQAAAAAAAAAAAAAAAAAAAB8AAABUAAAAAAAABQAAAAEAAAAAAAAAAAAAAAAAAAAAAAAAAAAAAAAAAAAAAAAAAAAAAAJ/f38AAAAAA8zMzADAwP8Af39/AAAAAAAAAAAAAAAAAAAAAAAAAAAAIQAAABgAAAAUAAAAAQgAABgVAABKFgAAAiYAABAAAAAmAAAACAAAAAEAAAAAAAAA"/>
               </a:ext>
             </a:extLst>
           </p:cNvSpPr>
@@ -8484,7 +8484,7 @@
             <a:spLocks noGrp="1" noChangeArrowheads="1"/>
             <a:extLst>
               <a:ext uri="smNativeData">
-                <pr:smNativeData xmlns:pr="smNativeData" xmlns="smNativeData" val="SMDATA_15_mcIdaRMAAAAlAAAAZAAAAA0AAAAAAAAAAAAAAAAAAAAAAAAAAAAAAAAAAAAAAAAAAAEAAABQAAAAAAAAAAAA4D8AAAAAAADgPwAAAAAAAOA/AAAAAAAA4D8AAAAAAADgPwAAAAAAAOA/AAAAAAAA4D8AAAAAAADgPwAAAAAAAOA/AAAAAAAA4D8CAAAAjAAAAAAAAAAAAAAA40oGDP///wgAAAAAAAAAAAAAAAAAAAAAAAAAAAAAAAAAAAAAZAAAAAEAAABAAAAAAAAAAAAAAAAAAAAAAAAAAAAAAAAAAAAAAAAAAAAAAAAAAAAAAAAAAAAAAAAAAAAAAAAAAAAAAAAAAAAAAAAAAAAAAAAAAAAAAAAAAAAAAAAAAAAAFAAAADwAAAAAAAAAAAAAAAAAAAkUAAAAAQAAABQAAAAUAAAAFAAAAAEAAAAAAAAAZAAAAGQAAAAAAAAAZAAAAGQAAAAVAAAAYAAAAAAAAAAAAAAADwAAACADAAAAAAAAAAAAAAEAAACgMgAAVgcAAKr4//8BAAAAf39/AAEAAABkAAAAAAAAABQAAABAHwAAAAAAACYAAAAAAAAAwOD//wAAAAAmAAAAZAAAABYAAABMAAAAAAAAAAAAAAAEAAAAAAAAAAEAAACZloMKAAAAACgAAAAoAAAAZAAAAGQAAAAAAAAAzMzMAAAAAABQAAAAUAAAAGQAAABkAAAAAAAAABcAAAAUAAAAAAAAAAAAAAD/fwAA/38AAAAAAAAJAAAABAAAAAAAAAAeAAAAaAAAAAAAAAAAAAAAAAAAAAAAAAAAAAAAECcAABAnAAAAAAAAAAAAAAAAAAAAAAAAAAAAAAAAAAAAAAAAAAAAABQAAAAAAAAAwMD/AAAAAABkAAAAMgAAAAAAAABkAAAAAAAAAH9/fwAKAAAAIgAAABgAAAAAAAAAAAAAAAAAAAAAAAAAAAAAAAAAAAAkAAAAJAAAAAAAAAAHAAAAAAAAAAAAAAAAAAAAAAAAAAAAAAAAAAAAf39/ACUAAABYAAAAAAAAAAAAAAAAAAAAAAAAAAAAAAAAAAAAAAAAAAAAAAAAAAAAAAAAAAAAAAA/AAAAAAAAAKCGAQAAAAAAAAAAAAAAAAAMAAAAAQAAAAAAAAAAAAAAAAAAAB8AAABUAAAAAAAABQAAAAEAAAAAAAAAAAAAAAAAAAAAAAAAAAAAAAAAAAAAAAAAAAAAAAJ/f38AAAAAA8zMzADAwP8Af39/AAAAAAAAAAAAAAAAAAAAAAAAAAAAIQAAABgAAAAUAAAAAQgAAGonAAB1MQAAMCoAABAAAAAmAAAACAAAAAGAAAAAAAAA"/>
+                <pr:smNativeData xmlns:pr="smNativeData" xmlns="smNativeData" val="SMDATA_15_r8odaRMAAAAlAAAAZAAAAA0AAAAAAAAAAAAAAAAAAAAAAAAAAAAAAAAAAAAAAAAAAAEAAABQAAAAAAAAAAAA4D8AAAAAAADgPwAAAAAAAOA/AAAAAAAA4D8AAAAAAADgPwAAAAAAAOA/AAAAAAAA4D8AAAAAAADgPwAAAAAAAOA/AAAAAAAA4D8CAAAAjAAAAAAAAAAAAAAA40oGDP///wgAAAAAAAAAAAAAAAAAAAAAAAAAAAAAAAAAAAAAZAAAAAEAAABAAAAAAAAAAAAAAAAAAAAAAAAAAAAAAAAAAAAAAAAAAAAAAAAAAAAAAAAAAAAAAAAAAAAAAAAAAAAAAAAAAAAAAAAAAAAAAAAAAAAAAAAAAAAAAAAAAAAAFAAAADwAAAAAAAAAAAAAAAAAAAkUAAAAAQAAABQAAAAUAAAAFAAAAAEAAAAAAAAAZAAAAGQAAAAAAAAAZAAAAGQAAAAVAAAAYAAAAAAAAAAAAAAADwAAACADAAAAAAAAAAAAAAEAAACgMgAAVgcAAKr4//8BAAAAf39/AAEAAABkAAAAAAAAABQAAABAHwAAAAAAACYAAAAAAAAAwOD//wAAAAAmAAAAZAAAABYAAABMAAAAAAAAAAAAAAAEAAAAAAAAAAEAAACZloMKAAAAACgAAAAoAAAAZAAAAGQAAAAAAAAAzMzMAAAAAABQAAAAUAAAAGQAAABkAAAAAAAAABcAAAAUAAAAAAAAAAAAAAD/fwAA/38AAAAAAAAJAAAABAAAAAAAAAAeAAAAaAAAAAAAAAAAAAAAAAAAAAAAAAAAAAAAECcAABAnAAAAAAAAAAAAAAAAAAAAAAAAAAAAAAAAAAAAAAAAAAAAABQAAAAAAAAAwMD/AAAAAABkAAAAMgAAAAAAAABkAAAAAAAAAH9/fwAKAAAAIgAAABgAAAAAAAAAAAAAAAAAAAAAAAAAAAAAAAAAAAAkAAAAJAAAAAAAAAAHAAAAAAAAAAAAAAAAAAAAAAAAAAAAAAAAAAAAf39/ACUAAABYAAAAAAAAAAAAAAAAAAAAAAAAAAAAAAAAAAAAAAAAAAAAAAAAAAAAAAAAAAAAAAA/AAAAAAAAAKCGAQAAAAAAAAAAAAAAAAAMAAAAAQAAAAAAAAAAAAAAAAAAAB8AAABUAAAAAAAABQAAAAEAAAAAAAAAAAAAAAAAAAAAAAAAAAAAAAAAAAAAAAAAAAAAAAJ/f38AAAAAA8zMzADAwP8Af39/AAAAAAAAAAAAAAAAAAAAAAAAAAAAIQAAABgAAAAUAAAAAQgAAGonAAB1MQAAMCoAABAAAAAmAAAACAAAAAGAAAAAAAAA"/>
               </a:ext>
             </a:extLst>
           </p:cNvSpPr>
@@ -8636,7 +8636,7 @@
             <a:spLocks noGrp="1" noChangeArrowheads="1"/>
             <a:extLst>
               <a:ext uri="smNativeData">
-                <pr:smNativeData xmlns:pr="smNativeData" xmlns="smNativeData" val="SMDATA_15_mcIdaRMAAAAlAAAAZAAAAA0AAAAAAAAAAAAAAAAAAAAAAAAAAAAAAAAAAAAAAAAAAAEAAABQAAAAAAAAAAAA4D8AAAAAAADgPwAAAAAAAOA/AAAAAAAA4D8AAAAAAADgPwAAAAAAAOA/AAAAAAAA4D8AAAAAAADgPwAAAAAAAOA/AAAAAAAA4D8CAAAAjAAAAAAAAAAAAAAA40oGDP///wgAAAAAAAAAAAAAAAAAAAAAAAAAAAAAAAAAAAAAZAAAAAEAAABAAAAAAAAAAAAAAAAAAAAAAAAAAAAAAAAAAAAAAAAAAAAAAAAAAAAAAAAAAAAAAAAAAAAAAAAAAAAAAAAAAAAAAAAAAAAAAAAAAAAAAAAAAAAAAAAAAAAAFAAAADwAAAAAAAAAAAAAAAAAAAkUAAAAAQAAABQAAAAUAAAAFAAAAAEAAAAAAAAAZAAAAGQAAAAAAAAAZAAAAGQAAAAVAAAAYAAAAAAAAAAAAAAADwAAACADAAAAAAAAAAAAAAEAAACgMgAAVgcAAKr4//8BAAAAf39/AAEAAABkAAAAAAAAABQAAABAHwAAAAAAACYAAAAAAAAAwOD//wAAAAAmAAAAZAAAABYAAABMAAAAAAAAAAAAAAAEAAAAAAAAAAEAAACZloMKAAAAACgAAAAoAAAAZAAAAGQAAAAAAAAAzMzMAAAAAABQAAAAUAAAAGQAAABkAAAAAAAAABcAAAAUAAAAAAAAAAAAAAD/fwAA/38AAAAAAAAJAAAABAAAAAAAAAAeAAAAaAAAAAAAAAAAAAAAAAAAAAAAAAAAAAAAECcAABAnAAAAAAAAAAAAAAAAAAAAAAAAAAAAAAAAAAAAAAAAAAAAABQAAAAAAAAAwMD/AAAAAABkAAAAMgAAAAAAAABkAAAAAAAAAH9/fwAKAAAAIgAAABgAAAAAAAAAAAAAAAAAAAAAAAAAAAAAAAAAAAAkAAAAJAAAAAAAAAAHAAAAAAAAAAAAAAAAAAAAAAAAAAAAAAAAAAAAf39/ACUAAABYAAAAAAAAAAAAAAAAAAAAAAAAAAAAAAAAAAAAAAAAAAAAAAAAAAAAAAAAAAAAAAA/AAAAAAAAAKCGAQAAAAAAAAAAAAAAAAAMAAAAAQAAAAAAAAAAAAAAAAAAAB8AAABUAAAAAAAABQAAAAEAAAAAAAAAAAAAAAAAAAAAAAAAAAAAAAAAAAAAAAAAAAAAAAJ/f38AAAAAA8zMzADAwP8Af39/AAAAAAAAAAAAAAAAAAAAAAAAAAAAIQAAABgAAAAUAAAA0AIAADgEAABjFgAAxgsAABAAAAAmAAAACAAAAAAAAAAAAAAA"/>
+                <pr:smNativeData xmlns:pr="smNativeData" xmlns="smNativeData" val="SMDATA_15_r8odaRMAAAAlAAAAZAAAAA0AAAAAAAAAAAAAAAAAAAAAAAAAAAAAAAAAAAAAAAAAAAEAAABQAAAAAAAAAAAA4D8AAAAAAADgPwAAAAAAAOA/AAAAAAAA4D8AAAAAAADgPwAAAAAAAOA/AAAAAAAA4D8AAAAAAADgPwAAAAAAAOA/AAAAAAAA4D8CAAAAjAAAAAAAAAAAAAAA40oGDP///wgAAAAAAAAAAAAAAAAAAAAAAAAAAAAAAAAAAAAAZAAAAAEAAABAAAAAAAAAAAAAAAAAAAAAAAAAAAAAAAAAAAAAAAAAAAAAAAAAAAAAAAAAAAAAAAAAAAAAAAAAAAAAAAAAAAAAAAAAAAAAAAAAAAAAAAAAAAAAAAAAAAAAFAAAADwAAAAAAAAAAAAAAAAAAAkUAAAAAQAAABQAAAAUAAAAFAAAAAEAAAAAAAAAZAAAAGQAAAAAAAAAZAAAAGQAAAAVAAAAYAAAAAAAAAAAAAAADwAAACADAAAAAAAAAAAAAAEAAACgMgAAVgcAAKr4//8BAAAAf39/AAEAAABkAAAAAAAAABQAAABAHwAAAAAAACYAAAAAAAAAwOD//wAAAAAmAAAAZAAAABYAAABMAAAAAAAAAAAAAAAEAAAAAAAAAAEAAACZloMKAAAAACgAAAAoAAAAZAAAAGQAAAAAAAAAzMzMAAAAAABQAAAAUAAAAGQAAABkAAAAAAAAABcAAAAUAAAAAAAAAAAAAAD/fwAA/38AAAAAAAAJAAAABAAAAAAAAAAeAAAAaAAAAAAAAAAAAAAAAAAAAAAAAAAAAAAAECcAABAnAAAAAAAAAAAAAAAAAAAAAAAAAAAAAAAAAAAAAAAAAAAAABQAAAAAAAAAwMD/AAAAAABkAAAAMgAAAAAAAABkAAAAAAAAAH9/fwAKAAAAIgAAABgAAAAAAAAAAAAAAAAAAAAAAAAAAAAAAAAAAAAkAAAAJAAAAAAAAAAHAAAAAAAAAAAAAAAAAAAAAAAAAAAAAAAAAAAAf39/ACUAAABYAAAAAAAAAAAAAAAAAAAAAAAAAAAAAAAAAAAAAAAAAAAAAAAAAAAAAAAAAAAAAAA/AAAAAAAAAKCGAQAAAAAAAAAAAAAAAAAMAAAAAQAAAAAAAAAAAAAAAAAAAB8AAABUAAAAAAAABQAAAAEAAAAAAAAAAAAAAAAAAAAAAAAAAAAAAAAAAAAAAAAAAAAAAAJ/f38AAAAAA8zMzADAwP8Af39/AAAAAAAAAAAAAAAAAAAAAAAAAAAAIQAAABgAAAAUAAAA0AIAADgEAABjFgAAxgsAABAAAAAmAAAACAAAAAAAAAAAAAAA"/>
               </a:ext>
             </a:extLst>
           </p:cNvSpPr>
@@ -8665,7 +8665,7 @@
             <a:spLocks noGrp="1" noChangeArrowheads="1"/>
             <a:extLst>
               <a:ext uri="smNativeData">
-                <pr:smNativeData xmlns:pr="smNativeData" xmlns="smNativeData" val="SMDATA_15_mcIdaRMAAAAlAAAAZAAAAA0AAAAAAAAAAAAAAAAAAAAAAAAAAAAAAAAAAAAAAAAAAAEAAABQAAAAAAAAAAAA4D8AAAAAAADgPwAAAAAAAOA/AAAAAAAA4D8AAAAAAADgPwAAAAAAAOA/AAAAAAAA4D8AAAAAAADgPwAAAAAAAOA/AAAAAAAA4D8CAAAAjAAAAAAAAAAAAAAA40oGDP///wgAAAAAAAAAAAAAAAAAAAAAAAAAAAAAAAAAAAAAZAAAAAEAAABAAAAAAAAAAAAAAAAAAAAAAAAAAAAAAAAAAAAAAAAAAAAAAAAAAAAAAAAAAAAAAAAAAAAAAAAAAAAAAAAAAAAAAAAAAAAAAAAAAAAAAAAAAAAAAAAAAAAAFAAAADwAAAAAAAAAAAAAAAAAAAkUAAAAAQAAABQAAAAUAAAAFAAAAAEAAAAAAAAAZAAAAGQAAAAAAAAAZAAAAGQAAAAVAAAAYAAAAAAAAAAAAAAADwAAACADAAAAAAAAAAAAAAEAAACgMgAAVgcAAKr4//8BAAAAf39/AAEAAABkAAAAAAAAABQAAABAHwAAAAAAACYAAAAAAAAAwOD//wAAAAAmAAAAZAAAABYAAABMAAAAAAAAAAAAAAAEAAAAAAAAAAEAAACZloMKAAAAACgAAAAoAAAAZAAAAGQAAAAAAAAAzMzMAAAAAABQAAAAUAAAAGQAAABkAAAAAAAAABcAAAAUAAAAAAAAAAAAAAD/fwAA/38AAAAAAAAJAAAABAAAAAAAAAAeAAAAaAAAAAAAAAAAAAAAAAAAAAAAAAAAAAAAECcAABAnAAAAAAAAAAAAAAAAAAAAAAAAAAAAAAAAAAAAAAAAAAAAABQAAAAAAAAAwMD/AAAAAABkAAAAMgAAAAAAAABkAAAAAAAAAH9/fwAKAAAAIgAAABgAAAAAAAAAAAAAAAAAAAAAAAAAAAAAAAAAAAAkAAAAJAAAAAAAAAAHAAAAAAAAAAAAAAAAAAAAAAAAAAAAAAAAAAAAf39/ACUAAABYAAAAAAAAAAAAAAAAAAAAAAAAAAAAAAAAAAAAAAAAAAAAAAAAAAAAAAAAAAAAAAA/AAAAAAAAAKCGAQAAAAAAAAAAAAAAAAAMAAAAAQAAAAAAAAAAAAAAAAAAAB8AAABUAAAAAAAABQAAAAEAAAAAAAAAAAAAAAAAAAAAAAAAAAAAAAAAAAAAAAAAAAAAAAJ/f38AAAAAA8zMzADAwP8Af39/AAAAAAAAAAAAAAAAAAAAAAAAAAAAIQAAABgAAAAUAAAA0AIAAGonAAB1MQAAMCoAABAAAAAmAAAACAAAAAGAAAAAAAAA"/>
+                <pr:smNativeData xmlns:pr="smNativeData" xmlns="smNativeData" val="SMDATA_15_r8odaRMAAAAlAAAAZAAAAA0AAAAAAAAAAAAAAAAAAAAAAAAAAAAAAAAAAAAAAAAAAAEAAABQAAAAAAAAAAAA4D8AAAAAAADgPwAAAAAAAOA/AAAAAAAA4D8AAAAAAADgPwAAAAAAAOA/AAAAAAAA4D8AAAAAAADgPwAAAAAAAOA/AAAAAAAA4D8CAAAAjAAAAAAAAAAAAAAA40oGDP///wgAAAAAAAAAAAAAAAAAAAAAAAAAAAAAAAAAAAAAZAAAAAEAAABAAAAAAAAAAAAAAAAAAAAAAAAAAAAAAAAAAAAAAAAAAAAAAAAAAAAAAAAAAAAAAAAAAAAAAAAAAAAAAAAAAAAAAAAAAAAAAAAAAAAAAAAAAAAAAAAAAAAAFAAAADwAAAAAAAAAAAAAAAAAAAkUAAAAAQAAABQAAAAUAAAAFAAAAAEAAAAAAAAAZAAAAGQAAAAAAAAAZAAAAGQAAAAVAAAAYAAAAAAAAAAAAAAADwAAACADAAAAAAAAAAAAAAEAAACgMgAAVgcAAKr4//8BAAAAf39/AAEAAABkAAAAAAAAABQAAABAHwAAAAAAACYAAAAAAAAAwOD//wAAAAAmAAAAZAAAABYAAABMAAAAAAAAAAAAAAAEAAAAAAAAAAEAAACZloMKAAAAACgAAAAoAAAAZAAAAGQAAAAAAAAAzMzMAAAAAABQAAAAUAAAAGQAAABkAAAAAAAAABcAAAAUAAAAAAAAAAAAAAD/fwAA/38AAAAAAAAJAAAABAAAAAAAAAAeAAAAaAAAAAAAAAAAAAAAAAAAAAAAAAAAAAAAECcAABAnAAAAAAAAAAAAAAAAAAAAAAAAAAAAAAAAAAAAAAAAAAAAABQAAAAAAAAAwMD/AAAAAABkAAAAMgAAAAAAAABkAAAAAAAAAH9/fwAKAAAAIgAAABgAAAAAAAAAAAAAAAAAAAAAAAAAAAAAAAAAAAAkAAAAJAAAAAAAAAAHAAAAAAAAAAAAAAAAAAAAAAAAAAAAAAAAAAAAf39/ACUAAABYAAAAAAAAAAAAAAAAAAAAAAAAAAAAAAAAAAAAAAAAAAAAAAAAAAAAAAAAAAAAAAA/AAAAAAAAAKCGAQAAAAAAAAAAAAAAAAAMAAAAAQAAAAAAAAAAAAAAAAAAAB8AAABUAAAAAAAABQAAAAEAAAAAAAAAAAAAAAAAAAAAAAAAAAAAAAAAAAAAAAAAAAAAAAJ/f38AAAAAA8zMzADAwP8Af39/AAAAAAAAAAAAAAAAAAAAAAAAAAAAIQAAABgAAAAUAAAA0AIAAGonAAB1MQAAMCoAABAAAAAmAAAACAAAAAGAAAAAAAAA"/>
               </a:ext>
             </a:extLst>
           </p:cNvSpPr>
@@ -8817,7 +8817,7 @@
             <a:spLocks noGrp="1" noChangeArrowheads="1"/>
             <a:extLst>
               <a:ext uri="smNativeData">
-                <pr:smNativeData xmlns:pr="smNativeData" xmlns="smNativeData" val="SMDATA_15_mcIdaRMAAAAlAAAAZAAAAA0AAAAAAAAAAAAAAAAAAAAAAAAAAAAAAAAAAAAAAAAAAAEAAABQAAAAAAAAAAAA4D8AAAAAAADgPwAAAAAAAOA/AAAAAAAA4D8AAAAAAADgPwAAAAAAAOA/AAAAAAAA4D8AAAAAAADgPwAAAAAAAOA/AAAAAAAA4D8CAAAAjAAAAAAAAAAAAAAA////AP///wgAAAAAAAAAAAAAAAAAAAAAAAAAAAAAAAAAAAAAeAAAAAEAAABAAAAAAAAAAAAAAABaAAAAAAAAAAAAAAAAAAAAAAAAAAAAAAAAAAAAAAAAAAAAAAAAAAAAAAAAAAAAAAAAAAAAAAAAAAAAAAAAAAAAAAAAAAAAAAAAAAAAFAAAADwAAAAAAAAAAAAAAAAAAAAPAAAAAQAAACMAAAAjAAAAIwAAAB4AAAAAAAAAZAAAAGQAAAAAAAAAZAAAAGQAAAAVAAAAYAAAAAAAAAAAAAAADwAAACADAAAAAAAAAAAAAAEAAACgMgAAVgcAAKr4//8BAAAAf39/AAEAAABkAAAAAAAAABQAAABAHwAAAAAAACYAAAAAAAAAwOD//wAAAAAmAAAAZAAAABYAAABMAAAAAAAAAAAAAAAEAAAAAAAAAAEAAACZloMKAAAAACgAAAAoAAAAZAAAAGQAAAAAAAAAzMzMAAAAAABQAAAAUAAAAGQAAABkAAAAAAAAABcAAAAUAAAAAAAAAAAAAAD/fwAA/38AAAAAAAAJAAAABAAAAICAgIAeAAAAaAAAAAAAAAAAAAAAAAAAAAAAAAAAAAAAECcAABAnAAAAAAAAAAAAAAAAAAAAAAAAAAAAAAAAAAAAAAAAAAAAABQAAAAAAAAAwMD/AAAAAABkAAAAMgAAAAAAAABkAAAAAAAAAH9/fwAKAAAAIgAAABgAAAAAAAAAAAAAAAAAAAAAAAAAAAAAAAAAAAAkAAAAJAAAAAAAAAAHAAAAAAAAAAAAAAAAAAAAAAAAAAAAAAAAAAAAf39/ACUAAABYAAAAAAAAAAAAAAAAAAAAAAAAAAAAAAAAAAAAAAAAAAAAAAAAAAAAAAAAAAAAAAA/AAAAAAAAAKCGAQAAAAAAAAAAAAAAAAAMAAAAAQAAAAAAAAAAAAAAAAAAAB8AAABUAAAA////AAAAAAEAAAAAAAAAAAAAAAAAAAAAAAAAAAAAAAAAAAAAAAAAAAAAAAB/f38AAAAAA8zMzADAwP8Af39/AAAAAAAAAAAAAAAAAAAAAAAAAAAAIQAAABgAAAAUAAAA0AIAADgEAABjFgAAxgsAABAAAAAmAAAACAAAAL8/AAAAAAAA"/>
+                <pr:smNativeData xmlns:pr="smNativeData" xmlns="smNativeData" val="SMDATA_15_r8odaRMAAAAlAAAAZAAAAA0AAAAAAAAAAAAAAAAAAAAAAAAAAAAAAAAAAAAAAAAAAAEAAABQAAAAAAAAAAAA4D8AAAAAAADgPwAAAAAAAOA/AAAAAAAA4D8AAAAAAADgPwAAAAAAAOA/AAAAAAAA4D8AAAAAAADgPwAAAAAAAOA/AAAAAAAA4D8CAAAAjAAAAAAAAAAAAAAA////AP///wgAAAAAAAAAAAAAAAAAAAAAAAAAAAAAAAAAAAAAeAAAAAEAAABAAAAAAAAAAAAAAABaAAAAAAAAAAAAAAAAAAAAAAAAAAAAAAAAAAAAAAAAAAAAAAAAAAAAAAAAAAAAAAAAAAAAAAAAAAAAAAAAAAAAAAAAAAAAAAAAAAAAFAAAADwAAAAAAAAAAAAAAAAAAAAPAAAAAQAAACMAAAAjAAAAIwAAAB4AAAAAAAAAZAAAAGQAAAAAAAAAZAAAAGQAAAAVAAAAYAAAAAAAAAAAAAAADwAAACADAAAAAAAAAAAAAAEAAACgMgAAVgcAAKr4//8BAAAAf39/AAEAAABkAAAAAAAAABQAAABAHwAAAAAAACYAAAAAAAAAwOD//wAAAAAmAAAAZAAAABYAAABMAAAAAAAAAAAAAAAEAAAAAAAAAAEAAACZloMKAAAAACgAAAAoAAAAZAAAAGQAAAAAAAAAzMzMAAAAAABQAAAAUAAAAGQAAABkAAAAAAAAABcAAAAUAAAAAAAAAAAAAAD/fwAA/38AAAAAAAAJAAAABAAAAICAgIAeAAAAaAAAAAAAAAAAAAAAAAAAAAAAAAAAAAAAECcAABAnAAAAAAAAAAAAAAAAAAAAAAAAAAAAAAAAAAAAAAAAAAAAABQAAAAAAAAAwMD/AAAAAABkAAAAMgAAAAAAAABkAAAAAAAAAH9/fwAKAAAAIgAAABgAAAAAAAAAAAAAAAAAAAAAAAAAAAAAAAAAAAAkAAAAJAAAAAAAAAAHAAAAAAAAAAAAAAAAAAAAAAAAAAAAAAAAAAAAf39/ACUAAABYAAAAAAAAAAAAAAAAAAAAAAAAAAAAAAAAAAAAAAAAAAAAAAAAAAAAAAAAAAAAAAA/AAAAAAAAAKCGAQAAAAAAAAAAAAAAAAAMAAAAAQAAAAAAAAAAAAAAAAAAAB8AAABUAAAA////AAAAAAEAAAAAAAAAAAAAAAAAAAAAAAAAAAAAAAAAAAAAAAAAAAAAAAB/f38AAAAAA8zMzADAwP8Af39/AAAAAAAAAAAAAAAAAAAAAAAAAAAAIQAAABgAAAAUAAAA0AIAADgEAABjFgAAxgsAABAAAAAmAAAACAAAAL8/AAAAAAAA"/>
               </a:ext>
             </a:extLst>
           </p:cNvSpPr>
@@ -8862,7 +8862,7 @@
             <a:spLocks noGrp="1" noChangeArrowheads="1"/>
             <a:extLst>
               <a:ext uri="smNativeData">
-                <pr:smNativeData xmlns:pr="smNativeData" xmlns="smNativeData" val="SMDATA_15_mcIdaRMAAAAlAAAAZAAAAA0AAAAAAAAAAAAAAAAAAAAAAAAAAAAAAAAAAAAAAAAAAAEAAABQAAAAAAAAAAAA4D8AAAAAAADgPwAAAAAAAOA/AAAAAAAA4D8AAAAAAADgPwAAAAAAAOA/AAAAAAAA4D8AAAAAAADgPwAAAAAAAOA/AAAAAAAA4D8CAAAAjAAAAAAAAAAAAAAA////AP///wgAAAAAAAAAAAAAAAAAAAAAAAAAAAAAAAAAAAAAeAAAAAEAAABAAAAAAAAAAAAAAABaAAAAAAAAAAAAAAAAAAAAAAAAAAAAAAAAAAAAAAAAAAAAAAAAAAAAAAAAAAAAAAAAAAAAAAAAAAAAAAAAAAAAAAAAAAAAAAAAAAAAFAAAADwAAAAAAAAAAAAAAAAAAAAPAAAAAQAAACMAAAAjAAAAIwAAAB4AAAAAAAAAZAAAAGQAAAAAAAAAZAAAAGQAAAAVAAAAYAAAAAAAAAAAAAAADwAAACADAAAAAAAAAAAAAAEAAACgMgAAVgcAAKr4//8BAAAAf39/AAEAAABkAAAAAAAAABQAAABAHwAAAAAAACYAAAAAAAAAwOD//wAAAAAmAAAAZAAAABYAAABMAAAAAAAAAAAAAAAEAAAAAAAAAAEAAACZloMKAAAAACgAAAAoAAAAZAAAAGQAAAAAAAAAzMzMAAAAAABQAAAAUAAAAGQAAABkAAAAAAAAABcAAAAUAAAAAAAAAAAAAAD/fwAA/38AAAAAAAAJAAAABAAAAICAgIAeAAAAaAAAAAAAAAAAAAAAAAAAAAAAAAAAAAAAECcAABAnAAAAAAAAAAAAAAAAAAAAAAAAAAAAAAAAAAAAAAAAAAAAABQAAAAAAAAAwMD/AAAAAABkAAAAMgAAAAAAAABkAAAAAAAAAH9/fwAKAAAAIgAAABgAAAAAAAAAAAAAAAAAAAAAAAAAAAAAAAAAAAAkAAAAJAAAAAAAAAAHAAAAAAAAAAAAAAAAAAAAAAAAAAAAAAAAAAAAf39/ACUAAABYAAAAAAAAAAAAAAAAAAAAAAAAAAAAAAAAAAAAAAAAAAAAAAAAAAAAAAAAAAAAAAA/AAAAAAAAAKCGAQAAAAAAAAAAAAAAAAAMAAAAAQAAAAAAAAAAAAAAAAAAAB8AAABUAAAA////AAAAAAEAAAAAAAAAAAAAAAAAAAAAAAAAAAAAAAAAAAAAAAAAAAAAAAB/f38AAAAAA8zMzADAwP8Af39/AAAAAAAAAAAAAAAAAAAAAAAAAAAAIQAAABgAAAAUAAAAjhcAADgEAABwNQAAAiYAABAAAAAmAAAACAAAAD8vAAAAAAAA"/>
+                <pr:smNativeData xmlns:pr="smNativeData" xmlns="smNativeData" val="SMDATA_15_r8odaRMAAAAlAAAAZAAAAA0AAAAAAAAAAAAAAAAAAAAAAAAAAAAAAAAAAAAAAAAAAAEAAABQAAAAAAAAAAAA4D8AAAAAAADgPwAAAAAAAOA/AAAAAAAA4D8AAAAAAADgPwAAAAAAAOA/AAAAAAAA4D8AAAAAAADgPwAAAAAAAOA/AAAAAAAA4D8CAAAAjAAAAAAAAAAAAAAA////AP///wgAAAAAAAAAAAAAAAAAAAAAAAAAAAAAAAAAAAAAeAAAAAEAAABAAAAAAAAAAAAAAABaAAAAAAAAAAAAAAAAAAAAAAAAAAAAAAAAAAAAAAAAAAAAAAAAAAAAAAAAAAAAAAAAAAAAAAAAAAAAAAAAAAAAAAAAAAAAAAAAAAAAFAAAADwAAAAAAAAAAAAAAAAAAAAPAAAAAQAAACMAAAAjAAAAIwAAAB4AAAAAAAAAZAAAAGQAAAAAAAAAZAAAAGQAAAAVAAAAYAAAAAAAAAAAAAAADwAAACADAAAAAAAAAAAAAAEAAACgMgAAVgcAAKr4//8BAAAAf39/AAEAAABkAAAAAAAAABQAAABAHwAAAAAAACYAAAAAAAAAwOD//wAAAAAmAAAAZAAAABYAAABMAAAAAAAAAAAAAAAEAAAAAAAAAAEAAACZloMKAAAAACgAAAAoAAAAZAAAAGQAAAAAAAAAzMzMAAAAAABQAAAAUAAAAGQAAABkAAAAAAAAABcAAAAUAAAAAAAAAAAAAAD/fwAA/38AAAAAAAAJAAAABAAAAICAgIAeAAAAaAAAAAAAAAAAAAAAAAAAAAAAAAAAAAAAECcAABAnAAAAAAAAAAAAAAAAAAAAAAAAAAAAAAAAAAAAAAAAAAAAABQAAAAAAAAAwMD/AAAAAABkAAAAMgAAAAAAAABkAAAAAAAAAH9/fwAKAAAAIgAAABgAAAAAAAAAAAAAAAAAAAAAAAAAAAAAAAAAAAAkAAAAJAAAAAAAAAAHAAAAAAAAAAAAAAAAAAAAAAAAAAAAAAAAAAAAf39/ACUAAABYAAAAAAAAAAAAAAAAAAAAAAAAAAAAAAAAAAAAAAAAAAAAAAAAAAAAAAAAAAAAAAA/AAAAAAAAAKCGAQAAAAAAAAAAAAAAAAAMAAAAAQAAAAAAAAAAAAAAAAAAAB8AAABUAAAA////AAAAAAEAAAAAAAAAAAAAAAAAAAAAAAAAAAAAAAAAAAAAAAAAAAAAAAB/f38AAAAAA8zMzADAwP8Af39/AAAAAAAAAAAAAAAAAAAAAAAAAAAAIQAAABgAAAAUAAAAjhcAADgEAABwNQAAAiYAABAAAAAmAAAACAAAAD8vAAAAAAAA"/>
               </a:ext>
             </a:extLst>
           </p:cNvSpPr>
@@ -8978,7 +8978,7 @@
           <p:cNvSpPr>
             <a:extLst>
               <a:ext uri="smNativeData">
-                <pr:smNativeData xmlns:pr="smNativeData" xmlns="smNativeData" val="SMDATA_15_mcIdaRMAAAAlAAAACgAAAA0AAAAAkAAAAEgAAACQAAAASAAAAAAAAAAAAAAAAAAAAAEAAABQAAAAAAAAAAAA4D8AAAAAAADgPwAAAAAAAOA/AAAAAAAA4D8AAAAAAADgPwAAAAAAAOA/AAAAAAAA4D8AAAAAAADgPwAAAAAAAOA/AAAAAAAA4D8CAAAAjAAAAAAAAAAAAAAA////AP///wgAAAAAAAAAAAAAAAAAAAAAAAAAAAAAAAAAAAAAeAAAAAEAAABAAAAAAAAAAAAAAABaAAAAAAAAAAAAAAAAAAAAAAAAAAAAAAAAAAAAAAAAAAAAAAAAAAAAAAAAAAAAAAAAAAAAAAAAAAAAAAAAAAAAAAAAAAAAAAAAAAAAFAAAADwAAAABAAAAAAAAADw9PgsUAAAAAQAAABQAAAAUAAAAFAAAAAEAAAAAAAAAZAAAAGQAAAAAAAAAZAAAAGQAAAAVAAAAYAAAAAAAAAAAAAAADwAAACADAAAAAAAAAAAAAAEAAACgMgAAVgcAAKr4//8BAAAAf39/AAEAAABkAAAAAAAAABQAAABAHwAAAAAAACYAAAAAAAAAwOD//wAAAAAmAAAAZAAAABYAAABMAAAAAAAAAAAAAAAEAAAAAAAAAAEAAACZloMKAAAAACgAAAAoAAAAZAAAAGQAAAAAAAAAzMzMAAAAAABQAAAAUAAAAGQAAABkAAAAAAAAABcAAAAUAAAAAAAAAAAAAAD/fwAA/38AAAAAAAAJAAAABAAAAICAgIAeAAAAaAAAAAAAAAAAAAAAAAAAAAAAAAAAAAAAECcAABAnAAAAAAAAAAAAAAAAAAAAAAAAAAAAAAAAAAAAAAAAAAAAABQAAAAAAAAAwMD/AAAAAABkAAAAMgAAAAAAAABkAAAAAAAAAH9/fwAKAAAAIgAAABgAAAAAAAAAAAAAAAAAAAAAAAAAAAAAAAAAAAAkAAAAJAAAAAAAAAAHAAAAAAAAAAAAAAAAAAAAAAAAAAAAAAAAAAAAf39/ACUAAABYAAAAAAAAAAAAAAAAAAAAAAAAAAAAAAAAAAAAAAAAAAAAAAAAAAAAAAAAAAAAAAA/AAAAAAAAAKCGAQAAAAAAAAAAAAAAAAAMAAAAAQAAAAAAAAAAAAAAAAAAAB8AAABUAAAA////AP///wEAAAAAAAAAAAAAAAAAAAAAAAAAAAAAAAAAAAAAAAAAADw9PgR/f38AmZaDA8zMzADAwP8Af39/AAAAAAAAAAAAAAAAAAAAAAAAAAAAIQAAABgAAAAUAAAA0AIAANQCAABjFgAA1AIAABAAAAAmAAAACAAAAP//////////"/>
+                <pr:smNativeData xmlns:pr="smNativeData" xmlns="smNativeData" val="SMDATA_15_r8odaRMAAAAlAAAACgAAAA0AAAAAkAAAAEgAAACQAAAASAAAAAAAAAAAAAAAAAAAAAEAAABQAAAAAAAAAAAA4D8AAAAAAADgPwAAAAAAAOA/AAAAAAAA4D8AAAAAAADgPwAAAAAAAOA/AAAAAAAA4D8AAAAAAADgPwAAAAAAAOA/AAAAAAAA4D8CAAAAjAAAAAAAAAAAAAAA////AP///wgAAAAAAAAAAAAAAAAAAAAAAAAAAAAAAAAAAAAAeAAAAAEAAABAAAAAAAAAAAAAAABaAAAAAAAAAAAAAAAAAAAAAAAAAAAAAAAAAAAAAAAAAAAAAAAAAAAAAAAAAAAAAAAAAAAAAAAAAAAAAAAAAAAAAAAAAAAAAAAAAAAAFAAAADwAAAABAAAAAAAAADw9PgsUAAAAAQAAABQAAAAUAAAAFAAAAAEAAAAAAAAAZAAAAGQAAAAAAAAAZAAAAGQAAAAVAAAAYAAAAAAAAAAAAAAADwAAACADAAAAAAAAAAAAAAEAAACgMgAAVgcAAKr4//8BAAAAf39/AAEAAABkAAAAAAAAABQAAABAHwAAAAAAACYAAAAAAAAAwOD//wAAAAAmAAAAZAAAABYAAABMAAAAAAAAAAAAAAAEAAAAAAAAAAEAAACZloMKAAAAACgAAAAoAAAAZAAAAGQAAAAAAAAAzMzMAAAAAABQAAAAUAAAAGQAAABkAAAAAAAAABcAAAAUAAAAAAAAAAAAAAD/fwAA/38AAAAAAAAJAAAABAAAAICAgIAeAAAAaAAAAAAAAAAAAAAAAAAAAAAAAAAAAAAAECcAABAnAAAAAAAAAAAAAAAAAAAAAAAAAAAAAAAAAAAAAAAAAAAAABQAAAAAAAAAwMD/AAAAAABkAAAAMgAAAAAAAABkAAAAAAAAAH9/fwAKAAAAIgAAABgAAAAAAAAAAAAAAAAAAAAAAAAAAAAAAAAAAAAkAAAAJAAAAAAAAAAHAAAAAAAAAAAAAAAAAAAAAAAAAAAAAAAAAAAAf39/ACUAAABYAAAAAAAAAAAAAAAAAAAAAAAAAAAAAAAAAAAAAAAAAAAAAAAAAAAAAAAAAAAAAAA/AAAAAAAAAKCGAQAAAAAAAAAAAAAAAAAMAAAAAQAAAAAAAAAAAAAAAAAAAB8AAABUAAAA////AP///wEAAAAAAAAAAAAAAAAAAAAAAAAAAAAAAAAAAAAAAAAAADw9PgR/f38AmZaDA8zMzADAwP8Af39/AAAAAAAAAAAAAAAAAAAAAAAAAAAAIQAAABgAAAAUAAAA0AIAANQCAABjFgAA1AIAABAAAAAmAAAACAAAAP//////////"/>
               </a:ext>
             </a:extLst>
           </p:cNvSpPr>
@@ -9010,7 +9010,7 @@
           <p:cNvSpPr>
             <a:extLst>
               <a:ext uri="smNativeData">
-                <pr:smNativeData xmlns:pr="smNativeData" xmlns="smNativeData" val="SMDATA_15_mcIdaRMAAAAlAAAACgAAAA0AAAAAkAAAAEgAAACQAAAASAAAAAAAAAAAAAAAAAAAAAEAAABQAAAAAAAAAAAA4D8AAAAAAADgPwAAAAAAAOA/AAAAAAAA4D8AAAAAAADgPwAAAAAAAOA/AAAAAAAA4D8AAAAAAADgPwAAAAAAAOA/AAAAAAAA4D8CAAAAjAAAAAAAAAAAAAAA////AP///wgAAAAAAAAAAAAAAAAAAAAAAAAAAAAAAAAAAAAAeAAAAAEAAABAAAAAAAAAAAAAAABaAAAAAAAAAAAAAAAAAAAAAAAAAAAAAAAAAAAAAAAAAAAAAAAAAAAAAAAAAAAAAAAAAAAAAAAAAAAAAAAAAAAAAAAAAAAAAAAAAAAAFAAAADwAAAABAAAAAAAAADw9PgsUAAAAAQAAABQAAAAUAAAAFAAAAAEAAAAAAAAAZAAAAGQAAAAAAAAAZAAAAGQAAAAVAAAAYAAAAAAAAAAAAAAADwAAACADAAAAAAAAAAAAAAEAAACgMgAAVgcAAKr4//8BAAAAf39/AAEAAABkAAAAAAAAABQAAABAHwAAAAAAACYAAAAAAAAAwOD//wAAAAAmAAAAZAAAABYAAABMAAAAAAAAAAAAAAAEAAAAAAAAAAEAAACZloMKAAAAACgAAAAoAAAAZAAAAGQAAAAAAAAAzMzMAAAAAABQAAAAUAAAAGQAAABkAAAAAAAAABcAAAAUAAAAAAAAAAAAAAD/fwAA/38AAAAAAAAJAAAABAAAAICAgIAeAAAAaAAAAAAAAAAAAAAAAAAAAAAAAAAAAAAAECcAABAnAAAAAAAAAAAAAAAAAAAAAAAAAAAAAAAAAAAAAAAAAAAAABQAAAAAAAAAwMD/AAAAAABkAAAAMgAAAAAAAABkAAAAAAAAAH9/fwAKAAAAIgAAABgAAAAAAAAAAAAAAAAAAAAAAAAAAAAAAAAAAAAkAAAAJAAAAAAAAAAHAAAAAAAAAAAAAAAAAAAAAAAAAAAAAAAAAAAAf39/ACUAAABYAAAAAAAAAAAAAAAAAAAAAAAAAAAAAAAAAAAAAAAAAAAAAAAAAAAAAAAAAAAAAAA/AAAAAAAAAKCGAQAAAAAAAAAAAAAAAAAMAAAAAQAAAAAAAAAAAAAAAAAAAB8AAABUAAAA////AP///wEAAAAAAAAAAAAAAAAAAAAAAAAAAAAAAAAAAAAAAAAAADw9PgR/f38AmZaDA8zMzADAwP8Af39/AAAAAAAAAAAAAAAAAAAAAAAAAAAAIQAAABgAAAAUAAAAjhcAANQCAABwNQAA1AIAABAAAAAmAAAACAAAAP//////////"/>
+                <pr:smNativeData xmlns:pr="smNativeData" xmlns="smNativeData" val="SMDATA_15_r8odaRMAAAAlAAAACgAAAA0AAAAAkAAAAEgAAACQAAAASAAAAAAAAAAAAAAAAAAAAAEAAABQAAAAAAAAAAAA4D8AAAAAAADgPwAAAAAAAOA/AAAAAAAA4D8AAAAAAADgPwAAAAAAAOA/AAAAAAAA4D8AAAAAAADgPwAAAAAAAOA/AAAAAAAA4D8CAAAAjAAAAAAAAAAAAAAA////AP///wgAAAAAAAAAAAAAAAAAAAAAAAAAAAAAAAAAAAAAeAAAAAEAAABAAAAAAAAAAAAAAABaAAAAAAAAAAAAAAAAAAAAAAAAAAAAAAAAAAAAAAAAAAAAAAAAAAAAAAAAAAAAAAAAAAAAAAAAAAAAAAAAAAAAAAAAAAAAAAAAAAAAFAAAADwAAAABAAAAAAAAADw9PgsUAAAAAQAAABQAAAAUAAAAFAAAAAEAAAAAAAAAZAAAAGQAAAAAAAAAZAAAAGQAAAAVAAAAYAAAAAAAAAAAAAAADwAAACADAAAAAAAAAAAAAAEAAACgMgAAVgcAAKr4//8BAAAAf39/AAEAAABkAAAAAAAAABQAAABAHwAAAAAAACYAAAAAAAAAwOD//wAAAAAmAAAAZAAAABYAAABMAAAAAAAAAAAAAAAEAAAAAAAAAAEAAACZloMKAAAAACgAAAAoAAAAZAAAAGQAAAAAAAAAzMzMAAAAAABQAAAAUAAAAGQAAABkAAAAAAAAABcAAAAUAAAAAAAAAAAAAAD/fwAA/38AAAAAAAAJAAAABAAAAICAgIAeAAAAaAAAAAAAAAAAAAAAAAAAAAAAAAAAAAAAECcAABAnAAAAAAAAAAAAAAAAAAAAAAAAAAAAAAAAAAAAAAAAAAAAABQAAAAAAAAAwMD/AAAAAABkAAAAMgAAAAAAAABkAAAAAAAAAH9/fwAKAAAAIgAAABgAAAAAAAAAAAAAAAAAAAAAAAAAAAAAAAAAAAAkAAAAJAAAAAAAAAAHAAAAAAAAAAAAAAAAAAAAAAAAAAAAAAAAAAAAf39/ACUAAABYAAAAAAAAAAAAAAAAAAAAAAAAAAAAAAAAAAAAAAAAAAAAAAAAAAAAAAAAAAAAAAA/AAAAAAAAAKCGAQAAAAAAAAAAAAAAAAAMAAAAAQAAAAAAAAAAAAAAAAAAAB8AAABUAAAA////AP///wEAAAAAAAAAAAAAAAAAAAAAAAAAAAAAAAAAAAAAAAAAADw9PgR/f38AmZaDA8zMzADAwP8Af39/AAAAAAAAAAAAAAAAAAAAAAAAAAAAIQAAABgAAAAUAAAAjhcAANQCAABwNQAA1AIAABAAAAAmAAAACAAAAP//////////"/>
               </a:ext>
             </a:extLst>
           </p:cNvSpPr>
@@ -9042,7 +9042,7 @@
           <p:cNvSpPr>
             <a:extLst>
               <a:ext uri="smNativeData">
-                <pr:smNativeData xmlns:pr="smNativeData" xmlns="smNativeData" val="SMDATA_15_mcIdaRMAAAAlAAAAZAAAAE0AAAAAAAAAAAAAAAAAAAAAAAAAAAAAAAAAAAAAAAAAAAEAAABQAAAAAAAAAAAA4D8AAAAAAADgPwAAAAAAAOA/AAAAAAAA4D8AAAAAAADgPwAAAAAAAOA/AAAAAAAA4D8AAAAAAADgPwAAAAAAAOA/AAAAAAAA4D8CAAAAjAAAAAAAAAAAAAAA40oGDP///wgAAAAAAAAAAAAAAAAAAAAAAAAAAAAAAAAAAAAAZAAAAAEAAABAAAAAAAAAAAAAAAAAAAAAAAAAAAAAAAAAAAAAAAAAAAAAAAAAAAAAAAAAAAAAAAAAAAAAAAAAAAAAAAAAAAAAAAAAAAAAAAAAAAAAAAAAAAAAAAAAAAAAFAAAADwAAAAAAAAAAAAAAAAAAAAPAAAAAQAAACMAAAAjAAAAIwAAAB4AAAAAAAAAZAAAAGQAAAAAAAAAZAAAAGQAAAAVAAAAYAAAAAAAAAAAAAAADwAAACADAAAAAAAAAAAAAAEAAACgMgAAVgcAAKr4//8BAAAAf39/AAEAAABkAAAAAAAAABQAAABAHwAAAAAAACYAAAAAAAAAwOD//wAAAAAmAAAAZAAAABYAAABMAAAAAAAAAAAAAAAEAAAAAAAAAAEAAACZloMKAAAAACgAAAAoAAAAZAAAAGQAAAAAAAAAzMzMAAAAAABQAAAAUAAAAGQAAABkAAAAAAAAABcAAAAUAAAAAAAAAAAAAAD/fwAA/38AAAAAAAAJAAAABAAAAICAgIAeAAAAaAAAAAAAAAAAAAAAAAAAAAAAAAAAAAAAECcAABAnAAAAAAAAAAAAAAAAAAAAAAAAAAAAAAAAAAAAAAAAAAAAABQAAAAAAAAAwMD/AAAAAABkAAAAMgAAAAAAAABkAAAAAAAAAH9/fwAKAAAAIgAAABgAAAAAAAAAAAAAAAAAAAAAAAAAAAAAAAAAAAAkAAAAJAAAAAAAAAAHAAAAAAAAAAAAAAAAAAAAAAAAAAAAAAAAAAAAf39/ACUAAABYAAAAAAAAAAAAAAAAAAAAAAAAAAAAAAAAAAAAAAAAAAAAAAAAAAAAAAAAAAAAAAA/AAAAAAAAAKCGAQAAAAAAAAAAAAAAAAAMAAAAAQAAAAAAAAAAAAAAAAAAAB8AAABUAAAA40oGBf///wEAAAAAAAAAAAAAAAAAAAAAAAAAAAAAAAAAAAAAAAAAAAAAAAB/f38AmZaDA8zMzADAwP8Af39/AAAAAAAAAAAAAAAAAAAAAAAAAAAAIQAAABgAAAAUAAAAqzQAAFsnAABwNQAAHSgAABAgAAAmAAAACAAAAP//////////"/>
+                <pr:smNativeData xmlns:pr="smNativeData" xmlns="smNativeData" val="SMDATA_15_r8odaRMAAAAlAAAAZAAAAE0AAAAAAAAAAAAAAAAAAAAAAAAAAAAAAAAAAAAAAAAAAAEAAABQAAAAAAAAAAAA4D8AAAAAAADgPwAAAAAAAOA/AAAAAAAA4D8AAAAAAADgPwAAAAAAAOA/AAAAAAAA4D8AAAAAAADgPwAAAAAAAOA/AAAAAAAA4D8CAAAAjAAAAAAAAAAAAAAA40oGDP///wgAAAAAAAAAAAAAAAAAAAAAAAAAAAAAAAAAAAAAZAAAAAEAAABAAAAAAAAAAAAAAAAAAAAAAAAAAAAAAAAAAAAAAAAAAAAAAAAAAAAAAAAAAAAAAAAAAAAAAAAAAAAAAAAAAAAAAAAAAAAAAAAAAAAAAAAAAAAAAAAAAAAAFAAAADwAAAAAAAAAAAAAAAAAAAAPAAAAAQAAACMAAAAjAAAAIwAAAB4AAAAAAAAAZAAAAGQAAAAAAAAAZAAAAGQAAAAVAAAAYAAAAAAAAAAAAAAADwAAACADAAAAAAAAAAAAAAEAAACgMgAAVgcAAKr4//8BAAAAf39/AAEAAABkAAAAAAAAABQAAABAHwAAAAAAACYAAAAAAAAAwOD//wAAAAAmAAAAZAAAABYAAABMAAAAAAAAAAAAAAAEAAAAAAAAAAEAAACZloMKAAAAACgAAAAoAAAAZAAAAGQAAAAAAAAAzMzMAAAAAABQAAAAUAAAAGQAAABkAAAAAAAAABcAAAAUAAAAAAAAAAAAAAD/fwAA/38AAAAAAAAJAAAABAAAAICAgIAeAAAAaAAAAAAAAAAAAAAAAAAAAAAAAAAAAAAAECcAABAnAAAAAAAAAAAAAAAAAAAAAAAAAAAAAAAAAAAAAAAAAAAAABQAAAAAAAAAwMD/AAAAAABkAAAAMgAAAAAAAABkAAAAAAAAAH9/fwAKAAAAIgAAABgAAAAAAAAAAAAAAAAAAAAAAAAAAAAAAAAAAAAkAAAAJAAAAAAAAAAHAAAAAAAAAAAAAAAAAAAAAAAAAAAAAAAAAAAAf39/ACUAAABYAAAAAAAAAAAAAAAAAAAAAAAAAAAAAAAAAAAAAAAAAAAAAAAAAAAAAAAAAAAAAAA/AAAAAAAAAKCGAQAAAAAAAAAAAAAAAAAMAAAAAQAAAAAAAAAAAAAAAAAAAB8AAABUAAAA40oGBf///wEAAAAAAAAAAAAAAAAAAAAAAAAAAAAAAAAAAAAAAAAAAAAAAAB/f38AmZaDA8zMzADAwP8Af39/AAAAAAAAAAAAAAAAAAAAAAAAAAAAIQAAABgAAAAUAAAAqzQAAFsnAABwNQAAHSgAABAgAAAmAAAACAAAAP//////////"/>
               </a:ext>
             </a:extLst>
           </p:cNvSpPr>
@@ -9069,13 +9069,13 @@
             <a:pPr algn="r">
               <a:defRPr lang="en-us"/>
             </a:pPr>
-            <a:fld id="{376C6C06-48DA-399A-94D4-BECF229A62EB}" type="slidenum">
+            <a:fld id="{49371852-1CA4-62EE-EA8F-EABB56C11CBF}" type="slidenum">
               <a:rPr lang="en-us" sz="800" cap="none">
                 <a:solidFill>
                   <a:schemeClr val="bg2"/>
                 </a:solidFill>
               </a:rPr>
-              <a:t>6</a:t>
+              <a:t>10</a:t>
             </a:fld>
             <a:endParaRPr lang="en-us" sz="800" cap="none">
               <a:solidFill>
@@ -9091,7 +9091,7 @@
           <p:cNvSpPr>
             <a:extLst>
               <a:ext uri="smNativeData">
-                <pr:smNativeData xmlns:pr="smNativeData" xmlns="smNativeData" val="SMDATA_15_mcIdaRMAAAAlAAAAZAAAAE0AAAAAAAAAAAAAAAAAAAAAAAAAAAAAAAAAAAAAAAAAAAEAAABQAAAAAAAAAAAA4D8AAAAAAADgPwAAAAAAAOA/AAAAAAAA4D8AAAAAAADgPwAAAAAAAOA/AAAAAAAA4D8AAAAAAADgPwAAAAAAAOA/AAAAAAAA4D8CAAAAjAAAAAAAAAAAAAAA40oGDP///wgAAAAAAAAAAAAAAAAAAAAAAAAAAAAAAAAAAAAAZAAAAAEAAABAAAAAAAAAAAAAAAAAAAAAAAAAAAAAAAAAAAAAAAAAAAAAAAAAAAAAAAAAAAAAAAAAAAAAAAAAAAAAAAAAAAAAAAAAAAAAAAAAAAAAAAAAAAAAAAAAAAAAFAAAADwAAAAAAAAAAAAAAAAAAAAPAAAAAQAAACMAAAAjAAAAIwAAAB4AAAAAAAAAZAAAAGQAAAAAAAAAZAAAAGQAAAAVAAAAYAAAAAAAAAAAAAAADwAAACADAAAAAAAAAAAAAAEAAACgMgAAVgcAAKr4//8BAAAAf39/AAEAAABkAAAAAAAAABQAAABAHwAAAAAAACYAAAAAAAAAwOD//wAAAAAmAAAAZAAAABYAAABMAAAAAAAAAAAAAAAEAAAAAAAAAAEAAACZloMKAAAAACgAAAAoAAAAZAAAAGQAAAAAAAAAzMzMAAAAAABQAAAAUAAAAGQAAABkAAAAAAAAABcAAAAUAAAAAAAAAAAAAAD/fwAA/38AAAAAAAAJAAAABAAAAICAgIAeAAAAaAAAAAAAAAAAAAAAAAAAAAAAAAAAAAAAECcAABAnAAAAAAAAAAAAAAAAAAAAAAAAAAAAAAAAAAAAAAAAAAAAABQAAAAAAAAAwMD/AAAAAABkAAAAMgAAAAAAAABkAAAAAAAAAH9/fwAKAAAAIgAAABgAAAAAAAAAAAAAAAAAAAAAAAAAAAAAAAAAAAAkAAAAJAAAAAAAAAAHAAAAAAAAAAAAAAAAAAAAAAAAAAAAAAAAAAAAf39/ACUAAABYAAAAAAAAAAAAAAAAAAAAAAAAAAAAAAAAAAAAAAAAAAAAAAAAAAAAAAAAAAAAAAA/AAAAAAAAAKCGAQAAAAAAAAAAAAAAAAAMAAAAAQAAAAAAAAAAAAAAAAAAAB8AAABUAAAA40oGBf///wEAAAAAAAAAAAAAAAAAAAAAAAAAAAAAAAAAAAAAAAAAAAAAAAB/f38AmZaDA8zMzADAwP8Af39/AAAAAAAAAAAAAAAAAAAAAAAAAAAAIQAAABgAAAAUAAAAQTMAAFsnAABnMwAAHSgAABAgAAAmAAAACAAAAP//////////"/>
+                <pr:smNativeData xmlns:pr="smNativeData" xmlns="smNativeData" val="SMDATA_15_r8odaRMAAAAlAAAAZAAAAE0AAAAAAAAAAAAAAAAAAAAAAAAAAAAAAAAAAAAAAAAAAAEAAABQAAAAAAAAAAAA4D8AAAAAAADgPwAAAAAAAOA/AAAAAAAA4D8AAAAAAADgPwAAAAAAAOA/AAAAAAAA4D8AAAAAAADgPwAAAAAAAOA/AAAAAAAA4D8CAAAAjAAAAAAAAAAAAAAA40oGDP///wgAAAAAAAAAAAAAAAAAAAAAAAAAAAAAAAAAAAAAZAAAAAEAAABAAAAAAAAAAAAAAAAAAAAAAAAAAAAAAAAAAAAAAAAAAAAAAAAAAAAAAAAAAAAAAAAAAAAAAAAAAAAAAAAAAAAAAAAAAAAAAAAAAAAAAAAAAAAAAAAAAAAAFAAAADwAAAAAAAAAAAAAAAAAAAAPAAAAAQAAACMAAAAjAAAAIwAAAB4AAAAAAAAAZAAAAGQAAAAAAAAAZAAAAGQAAAAVAAAAYAAAAAAAAAAAAAAADwAAACADAAAAAAAAAAAAAAEAAACgMgAAVgcAAKr4//8BAAAAf39/AAEAAABkAAAAAAAAABQAAABAHwAAAAAAACYAAAAAAAAAwOD//wAAAAAmAAAAZAAAABYAAABMAAAAAAAAAAAAAAAEAAAAAAAAAAEAAACZloMKAAAAACgAAAAoAAAAZAAAAGQAAAAAAAAAzMzMAAAAAABQAAAAUAAAAGQAAABkAAAAAAAAABcAAAAUAAAAAAAAAAAAAAD/fwAA/38AAAAAAAAJAAAABAAAAICAgIAeAAAAaAAAAAAAAAAAAAAAAAAAAAAAAAAAAAAAECcAABAnAAAAAAAAAAAAAAAAAAAAAAAAAAAAAAAAAAAAAAAAAAAAABQAAAAAAAAAwMD/AAAAAABkAAAAMgAAAAAAAABkAAAAAAAAAH9/fwAKAAAAIgAAABgAAAAAAAAAAAAAAAAAAAAAAAAAAAAAAAAAAAAkAAAAJAAAAAAAAAAHAAAAAAAAAAAAAAAAAAAAAAAAAAAAAAAAAAAAf39/ACUAAABYAAAAAAAAAAAAAAAAAAAAAAAAAAAAAAAAAAAAAAAAAAAAAAAAAAAAAAAAAAAAAAA/AAAAAAAAAKCGAQAAAAAAAAAAAAAAAAAMAAAAAQAAAAAAAAAAAAAAAAAAAB8AAABUAAAA40oGBf///wEAAAAAAAAAAAAAAAAAAAAAAAAAAAAAAAAAAAAAAAAAAAAAAAB/f38AmZaDA8zMzADAwP8Af39/AAAAAAAAAAAAAAAAAAAAAAAAAAAAIQAAABgAAAAUAAAAQTMAAFsnAABnMwAAHSgAABAgAAAmAAAACAAAAP//////////"/>
               </a:ext>
             </a:extLst>
           </p:cNvSpPr>
@@ -9812,7 +9812,7 @@
             <a:spLocks noGrp="1" noChangeArrowheads="1"/>
             <a:extLst>
               <a:ext uri="smNativeData">
-                <pr:smNativeData xmlns:pr="smNativeData" xmlns="smNativeData" val="SMDATA_15_mcIdaRMAAAAlAAAAZAAAAA0AAAAAAAAAAAAAAAAAAAAAAAAAAAAAAAAAAAAAAAAAAAEAAABQAAAAAAAAAAAA4D8AAAAAAADgPwAAAAAAAOA/AAAAAAAA4D8AAAAAAADgPwAAAAAAAOA/AAAAAAAA4D8AAAAAAADgPwAAAAAAAOA/AAAAAAAA4D8CAAAAjAAAAAAAAAAAAAAA40oGDP///wgAAAAAAAAAAAAAAAAAAAAAAAAAAAAAAAAAAAAAZAAAAAEAAABAAAAAAAAAAAAAAAAAAAAAAAAAAAAAAAAAAAAAAAAAAAAAAAAAAAAAAAAAAAAAAAAAAAAAAAAAAAAAAAAAAAAAAAAAAAAAAAAAAAAAAAAAAAAAAAAAAAAAFAAAADwAAAAAAAAAAAAAAAAAAAkUAAAAAQAAABQAAAAUAAAAFAAAAAEAAAAAAAAAZAAAAGQAAAAAAAAAZAAAAGQAAAAVAAAAYAAAAAAAAAAAAAAADwAAACADAAAAAAAAAAAAAAEAAACgMgAAVgcAAKr4//8BAAAAf39/AAEAAABkAAAAAAAAABQAAABAHwAAAAAAACYAAAAAAAAAwOD//wAAAAAmAAAAZAAAABYAAABMAAAAAAAAAAAAAAAEAAAAAAAAAAEAAACZloMKAAAAACgAAAAoAAAAZAAAAGQAAAAAAAAAzMzMAAAAAABQAAAAUAAAAGQAAABkAAAAAAAAABcAAAAUAAAAAAAAAAAAAAD/fwAA/38AAAAAAAAJAAAABAAAAAAAAAAeAAAAaAAAAAAAAAAAAAAAAAAAAAAAAAAAAAAAECcAABAnAAAAAAAAAAAAAAAAAAAAAAAAAAAAAAAAAAAAAAAAAAAAABQAAAAAAAAAwMD/AAAAAABkAAAAMgAAAAAAAABkAAAAAAAAAH9/fwAKAAAAIgAAABgAAAAAAAAAAAAAAAAAAAAAAAAAAAAAAAAAAAAkAAAAJAAAAAAAAAAHAAAAAAAAAAAAAAAAAAAAAAAAAAAAAAAAAAAAf39/ACUAAABYAAAAAAAAAAAAAAAAAAAAAAAAAAAAAAAAAAAAAAAAAAAAAAAAAAAAAAAAAAAAAAA/AAAAAAAAAKCGAQAAAAAAAAAAAAAAAAAMAAAAAQAAAAAAAAAAAAAAAAAAAB8AAABUAAAA40oGBf///wEAAAAAAAAAAAAAAAAAAAAAAAAAAAAAAAAAAAAAAAAAAAAAAAJ/f38AmZaDA8zMzADAwP8Af39/AAAAAAAAAAAAAAAAAAAAAAAAAAAAIQAAABgAAAAUAAAA0AIAADUCAADvMwAAFBMAABAAAAAmAAAACAAAAAEAAAAAAAAA"/>
+                <pr:smNativeData xmlns:pr="smNativeData" xmlns="smNativeData" val="SMDATA_15_r8odaRMAAAAlAAAAZAAAAA0AAAAAAAAAAAAAAAAAAAAAAAAAAAAAAAAAAAAAAAAAAAEAAABQAAAAAAAAAAAA4D8AAAAAAADgPwAAAAAAAOA/AAAAAAAA4D8AAAAAAADgPwAAAAAAAOA/AAAAAAAA4D8AAAAAAADgPwAAAAAAAOA/AAAAAAAA4D8CAAAAjAAAAAAAAAAAAAAA40oGDP///wgAAAAAAAAAAAAAAAAAAAAAAAAAAAAAAAAAAAAAZAAAAAEAAABAAAAAAAAAAAAAAAAAAAAAAAAAAAAAAAAAAAAAAAAAAAAAAAAAAAAAAAAAAAAAAAAAAAAAAAAAAAAAAAAAAAAAAAAAAAAAAAAAAAAAAAAAAAAAAAAAAAAAFAAAADwAAAAAAAAAAAAAAAAAAAkUAAAAAQAAABQAAAAUAAAAFAAAAAEAAAAAAAAAZAAAAGQAAAAAAAAAZAAAAGQAAAAVAAAAYAAAAAAAAAAAAAAADwAAACADAAAAAAAAAAAAAAEAAACgMgAAVgcAAKr4//8BAAAAf39/AAEAAABkAAAAAAAAABQAAABAHwAAAAAAACYAAAAAAAAAwOD//wAAAAAmAAAAZAAAABYAAABMAAAAAAAAAAAAAAAEAAAAAAAAAAEAAACZloMKAAAAACgAAAAoAAAAZAAAAGQAAAAAAAAAzMzMAAAAAABQAAAAUAAAAGQAAABkAAAAAAAAABcAAAAUAAAAAAAAAAAAAAD/fwAA/38AAAAAAAAJAAAABAAAAAAAAAAeAAAAaAAAAAAAAAAAAAAAAAAAAAAAAAAAAAAAECcAABAnAAAAAAAAAAAAAAAAAAAAAAAAAAAAAAAAAAAAAAAAAAAAABQAAAAAAAAAwMD/AAAAAABkAAAAMgAAAAAAAABkAAAAAAAAAH9/fwAKAAAAIgAAABgAAAAAAAAAAAAAAAAAAAAAAAAAAAAAAAAAAAAkAAAAJAAAAAAAAAAHAAAAAAAAAAAAAAAAAAAAAAAAAAAAAAAAAAAAf39/ACUAAABYAAAAAAAAAAAAAAAAAAAAAAAAAAAAAAAAAAAAAAAAAAAAAAAAAAAAAAAAAAAAAAA/AAAAAAAAAKCGAQAAAAAAAAAAAAAAAAAMAAAAAQAAAAAAAAAAAAAAAAAAAB8AAABUAAAA40oGBf///wEAAAAAAAAAAAAAAAAAAAAAAAAAAAAAAAAAAAAAAAAAAAAAAAJ/f38AmZaDA8zMzADAwP8Af39/AAAAAAAAAAAAAAAAAAAAAAAAAAAAIQAAABgAAAAUAAAA0AIAADUCAADvMwAAFBMAABAAAAAmAAAACAAAAAEAAAAAAAAA"/>
               </a:ext>
             </a:extLst>
           </p:cNvSpPr>
@@ -9846,7 +9846,7 @@
             <a:spLocks noGrp="1" noChangeArrowheads="1"/>
             <a:extLst>
               <a:ext uri="smNativeData">
-                <pr:smNativeData xmlns:pr="smNativeData" xmlns="smNativeData" val="SMDATA_15_mcIdaRMAAAAlAAAAZAAAAA0AAAAAAAAAAAAAAAAAAAAAAAAAAAAAAAACAAAAAAAAAAEAAABQAAAAAAAAAAAA4D8AAAAAAADgPwAAAAAAAOA/AAAAAAAA4D8AAAAAAADgPwAAAAAAAOA/AAAAAAAA4D8AAAAAAADgPwAAAAAAAOA/AAAAAAAA4D8CAAAAjAAAAAAAAAAAAAAA40oGDP///wgAAAAAAAAAAAAAAAAAAAAAAAAAAAAAAAAAAAAAZAAAAAEAAABAAAAAAAAAAAAAAAAAAAAAAAAAAAAAAAAAAAAAAAAAAAAAAAAAAAAAAAAAAAAAAAAAAAAAAAAAAAAAAAAAAAAAAAAAAAAAAAAAAAAAAAAAAAAAAAAAAAAAFAAAADwAAAAAAAAAAAAAAAAAAAkUAAAAAQAAABQAAAAUAAAAFAAAAAEAAAAAAAAAZAAAAGQAAAAAAAAAZAAAAGQAAAAVAAAAYAAAAAAAAAAAAAAADwAAACADAAAAAAAAAAAAAAEAAACgMgAAVgcAAKr4//8BAAAAf39/AAEAAABkAAAAAAAAABQAAABAHwAAAAAAACYAAAAAAAAAwOD//wAAAAAmAAAAZAAAABYAAABMAAAAAAAAAAAAAAAEAAAAAAAAAAEAAACZloMKAAAAACgAAAAoAAAAZAAAAGQAAAAAAAAAzMzMAAAAAABQAAAAUAAAAGQAAABkAAAAAAAAABcAAAAUAAAAAAAAAAAAAAD/fwAA/38AAAAAAAAJAAAABAAAAAAAAAAeAAAAaAAAAAAAAAAAAAAAAAAAAAAAAAAAAAAAECcAABAnAAAAAAAAAAAAAAAAAAAAAAAAAAAAAAAAAAAAAAAAAAAAABQAAAAAAAAAwMD/AAAAAABkAAAAMgAAAAAAAABkAAAAAAAAAH9/fwAKAAAAIgAAABgAAAAAAAAAAAAAAAAAAAAAAAAAAAAAAAAAAAAkAAAAJAAAAAAAAAAHAAAAAAAAAAAAAAAAAAAAAAAAAAAAAAAAAAAAf39/ACUAAABYAAAAAAAAAAAAAAAAAAAAAAAAAAAAAAAAAAAAAAAAAAAAAAAAAAAAAAAAAAAAAAA/AAAAAAAAAKCGAQAAAAAAAAAAAAAAAAAMAAAAAQAAAAAAAAAAAAAAAAAAAB8AAABUAAAA40oGBf///wEAAAAAAAAAAAAAAAAAAAAAAAAAAAAAAAAAAAAAAAAAAAAAAAJ/f38AmZaDA8zMzADAwP8Af39/AAAAAAAAAAAAAAAAAAAAAAAAAAAAIQAAABgAAAAUAAAA0AIAAH8bAAAGDAAAfCUAABAAAAAmAAAACAAAAAGAAAAAAAAA"/>
+                <pr:smNativeData xmlns:pr="smNativeData" xmlns="smNativeData" val="SMDATA_15_r8odaRMAAAAlAAAAZAAAAA0AAAAAAAAAAAAAAAAAAAAAAAAAAAAAAAACAAAAAAAAAAEAAABQAAAAAAAAAAAA4D8AAAAAAADgPwAAAAAAAOA/AAAAAAAA4D8AAAAAAADgPwAAAAAAAOA/AAAAAAAA4D8AAAAAAADgPwAAAAAAAOA/AAAAAAAA4D8CAAAAjAAAAAAAAAAAAAAA40oGDP///wgAAAAAAAAAAAAAAAAAAAAAAAAAAAAAAAAAAAAAZAAAAAEAAABAAAAAAAAAAAAAAAAAAAAAAAAAAAAAAAAAAAAAAAAAAAAAAAAAAAAAAAAAAAAAAAAAAAAAAAAAAAAAAAAAAAAAAAAAAAAAAAAAAAAAAAAAAAAAAAAAAAAAFAAAADwAAAAAAAAAAAAAAAAAAAkUAAAAAQAAABQAAAAUAAAAFAAAAAEAAAAAAAAAZAAAAGQAAAAAAAAAZAAAAGQAAAAVAAAAYAAAAAAAAAAAAAAADwAAACADAAAAAAAAAAAAAAEAAACgMgAAVgcAAKr4//8BAAAAf39/AAEAAABkAAAAAAAAABQAAABAHwAAAAAAACYAAAAAAAAAwOD//wAAAAAmAAAAZAAAABYAAABMAAAAAAAAAAAAAAAEAAAAAAAAAAEAAACZloMKAAAAACgAAAAoAAAAZAAAAGQAAAAAAAAAzMzMAAAAAABQAAAAUAAAAGQAAABkAAAAAAAAABcAAAAUAAAAAAAAAAAAAAD/fwAA/38AAAAAAAAJAAAABAAAAAAAAAAeAAAAaAAAAAAAAAAAAAAAAAAAAAAAAAAAAAAAECcAABAnAAAAAAAAAAAAAAAAAAAAAAAAAAAAAAAAAAAAAAAAAAAAABQAAAAAAAAAwMD/AAAAAABkAAAAMgAAAAAAAABkAAAAAAAAAH9/fwAKAAAAIgAAABgAAAAAAAAAAAAAAAAAAAAAAAAAAAAAAAAAAAAkAAAAJAAAAAAAAAAHAAAAAAAAAAAAAAAAAAAAAAAAAAAAAAAAAAAAf39/ACUAAABYAAAAAAAAAAAAAAAAAAAAAAAAAAAAAAAAAAAAAAAAAAAAAAAAAAAAAAAAAAAAAAA/AAAAAAAAAKCGAQAAAAAAAAAAAAAAAAAMAAAAAQAAAAAAAAAAAAAAAAAAAB8AAABUAAAA40oGBf///wEAAAAAAAAAAAAAAAAAAAAAAAAAAAAAAAAAAAAAAAAAAAAAAAJ/f38AmZaDA8zMzADAwP8Af39/AAAAAAAAAAAAAAAAAAAAAAAAAAAAIQAAABgAAAAUAAAA0AIAAH8bAAAGDAAAfCUAABAAAAAmAAAACAAAAAGAAAAAAAAA"/>
               </a:ext>
             </a:extLst>
           </p:cNvSpPr>
@@ -9912,7 +9912,7 @@
             <a:spLocks noGrp="1" noChangeArrowheads="1"/>
             <a:extLst>
               <a:ext uri="smNativeData">
-                <pr:smNativeData xmlns:pr="smNativeData" xmlns="smNativeData" val="SMDATA_15_mcIdaRMAAAAlAAAAZAAAAA0AAAAAAAAAAAAAAAAAAAAAAAAAAAAAAAACAAAAAAAAAAEAAABQAAAAAAAAAAAA4D8AAAAAAADgPwAAAAAAAOA/AAAAAAAA4D8AAAAAAADgPwAAAAAAAOA/AAAAAAAA4D8AAAAAAADgPwAAAAAAAOA/AAAAAAAA4D8CAAAAjAAAAAAAAAAAAAAA40oGDP///wgAAAAAAAAAAAAAAAAAAAAAAAAAAAAAAAAAAAAAZAAAAAEAAABAAAAAAAAAAAAAAAAAAAAAAAAAAAAAAAAAAAAAAAAAAAAAAAAAAAAAAAAAAAAAAAAAAAAAAAAAAAAAAAAAAAAAAAAAAAAAAAAAAAAAAAAAAAAAAAAAAAAAFAAAADwAAAAAAAAAAAAAAAAAAAkUAAAAAQAAABQAAAAUAAAAFAAAAAEAAAAAAAAAZAAAAGQAAAAAAAAAZAAAAGQAAAAVAAAAYAAAAAAAAAAAAAAADwAAACADAAAAAAAAAAAAAAEAAACgMgAAVgcAAKr4//8BAAAAf39/AAEAAABkAAAAAAAAABQAAABAHwAAAAAAACYAAAAAAAAAwOD//wAAAAAmAAAAZAAAABYAAABMAAAAAAAAAAAAAAAEAAAAAAAAAAEAAACZloMKAAAAACgAAAAoAAAAZAAAAGQAAAAAAAAAzMzMAAAAAABQAAAAUAAAAGQAAABkAAAAAAAAABcAAAAUAAAAAAAAAAAAAAD/fwAA/38AAAAAAAAJAAAABAAAAAAAAAAeAAAAaAAAAAAAAAAAAAAAAAAAAAAAAAAAAAAAECcAABAnAAAAAAAAAAAAAAAAAAAAAAAAAAAAAAAAAAAAAAAAAAAAABQAAAAAAAAAwMD/AAAAAABkAAAAMgAAAAAAAABkAAAAAAAAAH9/fwAKAAAAIgAAABgAAAAAAAAAAAAAAAAAAAAAAAAAAAAAAAAAAAAkAAAAJAAAAAAAAAAHAAAAAAAAAAAAAAAAAAAAAAAAAAAAAAAAAAAAf39/ACUAAABYAAAAAAAAAAAAAAAAAAAAAAAAAAAAAAAAAAAAAAAAAAAAAAAAAAAAAAAAAAAAAAA/AAAAAAAAAKCGAQAAAAAAAAAAAAAAAAAMAAAAAQAAAAAAAAAAAAAAAAAAAB8AAABUAAAA40oGBf///wEAAAAAAAAAAAAAAAAAAAAAAAAAAAAAAAAAAAAAAAAAAAAAAAJ/f38AmZaDA8zMzADAwP8Af39/AAAAAAAAAAAAAAAAAAAAAAAAAAAAIQAAABgAAAAUAAAAhRcAAOAfAAC7IAAAKiYAABAAAAAmAAAACAAAAAEAAAAAAAAA"/>
+                <pr:smNativeData xmlns:pr="smNativeData" xmlns="smNativeData" val="SMDATA_15_r8odaRMAAAAlAAAAZAAAAA0AAAAAAAAAAAAAAAAAAAAAAAAAAAAAAAACAAAAAAAAAAEAAABQAAAAAAAAAAAA4D8AAAAAAADgPwAAAAAAAOA/AAAAAAAA4D8AAAAAAADgPwAAAAAAAOA/AAAAAAAA4D8AAAAAAADgPwAAAAAAAOA/AAAAAAAA4D8CAAAAjAAAAAAAAAAAAAAA40oGDP///wgAAAAAAAAAAAAAAAAAAAAAAAAAAAAAAAAAAAAAZAAAAAEAAABAAAAAAAAAAAAAAAAAAAAAAAAAAAAAAAAAAAAAAAAAAAAAAAAAAAAAAAAAAAAAAAAAAAAAAAAAAAAAAAAAAAAAAAAAAAAAAAAAAAAAAAAAAAAAAAAAAAAAFAAAADwAAAAAAAAAAAAAAAAAAAkUAAAAAQAAABQAAAAUAAAAFAAAAAEAAAAAAAAAZAAAAGQAAAAAAAAAZAAAAGQAAAAVAAAAYAAAAAAAAAAAAAAADwAAACADAAAAAAAAAAAAAAEAAACgMgAAVgcAAKr4//8BAAAAf39/AAEAAABkAAAAAAAAABQAAABAHwAAAAAAACYAAAAAAAAAwOD//wAAAAAmAAAAZAAAABYAAABMAAAAAAAAAAAAAAAEAAAAAAAAAAEAAACZloMKAAAAACgAAAAoAAAAZAAAAGQAAAAAAAAAzMzMAAAAAABQAAAAUAAAAGQAAABkAAAAAAAAABcAAAAUAAAAAAAAAAAAAAD/fwAA/38AAAAAAAAJAAAABAAAAAAAAAAeAAAAaAAAAAAAAAAAAAAAAAAAAAAAAAAAAAAAECcAABAnAAAAAAAAAAAAAAAAAAAAAAAAAAAAAAAAAAAAAAAAAAAAABQAAAAAAAAAwMD/AAAAAABkAAAAMgAAAAAAAABkAAAAAAAAAH9/fwAKAAAAIgAAABgAAAAAAAAAAAAAAAAAAAAAAAAAAAAAAAAAAAAkAAAAJAAAAAAAAAAHAAAAAAAAAAAAAAAAAAAAAAAAAAAAAAAAAAAAf39/ACUAAABYAAAAAAAAAAAAAAAAAAAAAAAAAAAAAAAAAAAAAAAAAAAAAAAAAAAAAAAAAAAAAAA/AAAAAAAAAKCGAQAAAAAAAAAAAAAAAAAMAAAAAQAAAAAAAAAAAAAAAAAAAB8AAABUAAAA40oGBf///wEAAAAAAAAAAAAAAAAAAAAAAAAAAAAAAAAAAAAAAAAAAAAAAAJ/f38AmZaDA8zMzADAwP8Af39/AAAAAAAAAAAAAAAAAAAAAAAAAAAAIQAAABgAAAAUAAAAhRcAAOAfAAC7IAAAKiYAABAAAAAmAAAACAAAAAEAAAAAAAAA"/>
               </a:ext>
             </a:extLst>
           </p:cNvSpPr>
@@ -9945,7 +9945,7 @@
           <p:cNvSpPr>
             <a:extLst>
               <a:ext uri="smNativeData">
-                <pr:smNativeData xmlns:pr="smNativeData" xmlns="smNativeData" val="SMDATA_15_mcIdaRMAAAAlAAAAZAAAAE0AAAAAkAAAAEgAAACQAAAASAAAAAAAAAAAAAAAAAAAAAEAAABQAAAAAAAAAAAA4D8AAAAAAADgPwAAAAAAAOA/AAAAAAAA4D8AAAAAAADgPwAAAAAAAOA/AAAAAAAA4D8AAAAAAADgPwAAAAAAAOA/AAAAAAAA4D8CAAAAjAAAAAAAAAAAAAAA40oGDP///wgAAAAAAAAAAAAAAAAAAAAAAAAAAAAAAAAAAAAAZAAAAAEAAABAAAAAAAAAAAAAAAAAAAAAAAAAAAAAAAAAAAAAAAAAAAAAAAAAAAAAAAAAAAAAAAAAAAAAAAAAAAAAAAAAAAAAAAAAAAAAAAAAAAAAAAAAAAAAAAAAAAAAFAAAADwAAAAAAAAAAAAAAAAAAAAPAAAAAQAAACMAAAAjAAAAIwAAAB4AAAAAAAAAZAAAAGQAAAAAAAAAZAAAAGQAAAAVAAAAYAAAAAAAAAAAAAAADwAAACADAAAAAAAAAAAAAAEAAACgMgAAVgcAAKr4//8BAAAAf39/AAEAAABkAAAAAAAAABQAAABAHwAAAAAAACYAAAAAAAAAwOD//wAAAAAmAAAAZAAAABYAAABMAAAAAAAAAAAAAAAEAAAAAAAAAAEAAACZloMKAAAAACgAAAAoAAAAZAAAAGQAAAAAAAAAzMzMAAAAAABQAAAAUAAAAGQAAABkAAAAAAAAABcAAAAUAAAAAAAAAAAAAAD/fwAA/38AAAAAAAAJAAAABAAAAAAAAAAeAAAAaAAAAAAAAAAAAAAAAAAAAAAAAAAAAAAAECcAABAnAAAAAAAAAAAAAAAAAAAAAAAAAAAAAAAAAAAAAAAAAAAAABQAAAAAAAAAwMD/AAAAAABkAAAAMgAAAAAAAABkAAAAAAAAAH9/fwAKAAAAIgAAABgAAAAAAAAAAAAAAAAAAAAAAAAAAAAAAAAAAAAkAAAAJAAAAAAAAAAHAAAAAAAAAAAAAAAAAAAAAAAAAAAAAAAAAAAAf39/ACUAAABYAAAAAAAAAAAAAAAAAAAAAAAAAAAAAAAAAAAAAAAAAAAAAAAAAAAAAAAAAAAAAAA/AAAAAAAAAKCGAQAAAAAAAAAAAAAAAAAMAAAAAQAAAAAAAAAAAAAAAAAAAB8AAABUAAAA40oGBf///wEAAAAAAAAAAAAAAAAAAAAAAAAAAAAAAAAAAAAAAAAAAAAAAAB/f38AmZaDA8zMzADAwP8Af39/AAAAAAAAAAAAAAAAAAAAAAAAAAAAIQAAABgAAAAUAAAAyAIAAGMOAAB4NQAASRcAABAgAAAmAAAACAAAAP//////////"/>
+                <pr:smNativeData xmlns:pr="smNativeData" xmlns="smNativeData" val="SMDATA_15_r8odaRMAAAAlAAAAZAAAAE0AAAAAkAAAAEgAAACQAAAASAAAAAAAAAAAAAAAAAAAAAEAAABQAAAAAAAAAAAA4D8AAAAAAADgPwAAAAAAAOA/AAAAAAAA4D8AAAAAAADgPwAAAAAAAOA/AAAAAAAA4D8AAAAAAADgPwAAAAAAAOA/AAAAAAAA4D8CAAAAjAAAAAAAAAAAAAAA40oGDP///wgAAAAAAAAAAAAAAAAAAAAAAAAAAAAAAAAAAAAAZAAAAAEAAABAAAAAAAAAAAAAAAAAAAAAAAAAAAAAAAAAAAAAAAAAAAAAAAAAAAAAAAAAAAAAAAAAAAAAAAAAAAAAAAAAAAAAAAAAAAAAAAAAAAAAAAAAAAAAAAAAAAAAFAAAADwAAAAAAAAAAAAAAAAAAAAPAAAAAQAAACMAAAAjAAAAIwAAAB4AAAAAAAAAZAAAAGQAAAAAAAAAZAAAAGQAAAAVAAAAYAAAAAAAAAAAAAAADwAAACADAAAAAAAAAAAAAAEAAACgMgAAVgcAAKr4//8BAAAAf39/AAEAAABkAAAAAAAAABQAAABAHwAAAAAAACYAAAAAAAAAwOD//wAAAAAmAAAAZAAAABYAAABMAAAAAAAAAAAAAAAEAAAAAAAAAAEAAACZloMKAAAAACgAAAAoAAAAZAAAAGQAAAAAAAAAzMzMAAAAAABQAAAAUAAAAGQAAABkAAAAAAAAABcAAAAUAAAAAAAAAAAAAAD/fwAA/38AAAAAAAAJAAAABAAAAAAAAAAeAAAAaAAAAAAAAAAAAAAAAAAAAAAAAAAAAAAAECcAABAnAAAAAAAAAAAAAAAAAAAAAAAAAAAAAAAAAAAAAAAAAAAAABQAAAAAAAAAwMD/AAAAAABkAAAAMgAAAAAAAABkAAAAAAAAAH9/fwAKAAAAIgAAABgAAAAAAAAAAAAAAAAAAAAAAAAAAAAAAAAAAAAkAAAAJAAAAAAAAAAHAAAAAAAAAAAAAAAAAAAAAAAAAAAAAAAAAAAAf39/ACUAAABYAAAAAAAAAAAAAAAAAAAAAAAAAAAAAAAAAAAAAAAAAAAAAAAAAAAAAAAAAAAAAAA/AAAAAAAAAKCGAQAAAAAAAAAAAAAAAAAMAAAAAQAAAAAAAAAAAAAAAAAAAB8AAABUAAAA40oGBf///wEAAAAAAAAAAAAAAAAAAAAAAAAAAAAAAAAAAAAAAAAAAAAAAAB/f38AmZaDA8zMzADAwP8Af39/AAAAAAAAAAAAAAAAAAAAAAAAAAAAIQAAABgAAAAUAAAAyAIAAGMOAAB4NQAASRcAABAgAAAmAAAACAAAAP//////////"/>
               </a:ext>
             </a:extLst>
           </p:cNvSpPr>
@@ -10013,7 +10013,7 @@
             <a:spLocks noGrp="1" noChangeArrowheads="1"/>
             <a:extLst>
               <a:ext uri="smNativeData">
-                <pr:smNativeData xmlns:pr="smNativeData" xmlns="smNativeData" val="SMDATA_15_mcIdaRMAAAAlAAAAZAAAAA0AAAAAAAAAAAAAAAAAAAAAAAAAAAAAAAACAAAAAAAAAAEAAABQAAAAAAAAAAAA4D8AAAAAAADgPwAAAAAAAOA/AAAAAAAA4D8AAAAAAADgPwAAAAAAAOA/AAAAAAAA4D8AAAAAAADgPwAAAAAAAOA/AAAAAAAA4D8CAAAAjAAAAAAAAAAAAAAA40oGDP///wgAAAAAAAAAAAAAAAAAAAAAAAAAAAAAAAAAAAAAZAAAAAEAAABAAAAAAAAAAAAAAAAAAAAAAAAAAAAAAAAAAAAAAAAAAAAAAAAAAAAAAAAAAAAAAAAAAAAAAAAAAAAAAAAAAAAAAAAAAAAAAAAAAAAAAAAAAAAAAAAAAAAAFAAAADwAAAAAAAAAAAAAAAAAAAkUAAAAAQAAABQAAAAUAAAAFAAAAAEAAAAAAAAAZAAAAGQAAAAAAAAAZAAAAGQAAAAVAAAAYAAAAAAAAAAAAAAADwAAACADAAAAAAAAAAAAAAEAAACgMgAAVgcAAKr4//8BAAAAf39/AAEAAABkAAAAAAAAABQAAABAHwAAAAAAACYAAAAAAAAAwOD//wAAAAAmAAAAZAAAABYAAABMAAAAAAAAAAAAAAAEAAAAAAAAAAEAAACZloMKAAAAACgAAAAoAAAAZAAAAGQAAAAAAAAAzMzMAAAAAABQAAAAUAAAAGQAAABkAAAAAAAAABcAAAAUAAAAAAAAAAAAAAD/fwAA/38AAAAAAAAJAAAABAAAAAAAAAAeAAAAaAAAAAAAAAAAAAAAAAAAAAAAAAAAAAAAECcAABAnAAAAAAAAAAAAAAAAAAAAAAAAAAAAAAAAAAAAAAAAAAAAABQAAAAAAAAAwMD/AAAAAABkAAAAMgAAAAAAAABkAAAAAAAAAH9/fwAKAAAAIgAAABgAAAAAAAAAAAAAAAAAAAAAAAAAAAAAAAAAAAAkAAAAJAAAAAAAAAAHAAAAAAAAAAAAAAAAAAAAAAAAAAAAAAAAAAAAf39/ACUAAABYAAAAAAAAAAAAAAAAAAAAAAAAAAAAAAAAAAAAAAAAAAAAAAAAAAAAAAAAAAAAAAA/AAAAAAAAAKCGAQAAAAAAAAAAAAAAAAAMAAAAAQAAAAAAAAAAAAAAAAAAAB8AAABUAAAA40oGBf///wEAAAAAAAAAAAAAAAAAAAAAAAAAAAAAAAAAAAAAAAAAAAAAAAJ/f38AmZaDA8zMzADAwP8Af39/AAAAAAAAAAAAAAAAAAAAAAAAAAAAIQAAABgAAAAUAAAAciUAAOAfAABwNQAAKiYAABAAAAAmAAAACAAAAAEAAAAAAAAA"/>
+                <pr:smNativeData xmlns:pr="smNativeData" xmlns="smNativeData" val="SMDATA_15_r8odaRMAAAAlAAAAZAAAAA0AAAAAAAAAAAAAAAAAAAAAAAAAAAAAAAACAAAAAAAAAAEAAABQAAAAAAAAAAAA4D8AAAAAAADgPwAAAAAAAOA/AAAAAAAA4D8AAAAAAADgPwAAAAAAAOA/AAAAAAAA4D8AAAAAAADgPwAAAAAAAOA/AAAAAAAA4D8CAAAAjAAAAAAAAAAAAAAA40oGDP///wgAAAAAAAAAAAAAAAAAAAAAAAAAAAAAAAAAAAAAZAAAAAEAAABAAAAAAAAAAAAAAAAAAAAAAAAAAAAAAAAAAAAAAAAAAAAAAAAAAAAAAAAAAAAAAAAAAAAAAAAAAAAAAAAAAAAAAAAAAAAAAAAAAAAAAAAAAAAAAAAAAAAAFAAAADwAAAAAAAAAAAAAAAAAAAkUAAAAAQAAABQAAAAUAAAAFAAAAAEAAAAAAAAAZAAAAGQAAAAAAAAAZAAAAGQAAAAVAAAAYAAAAAAAAAAAAAAADwAAACADAAAAAAAAAAAAAAEAAACgMgAAVgcAAKr4//8BAAAAf39/AAEAAABkAAAAAAAAABQAAABAHwAAAAAAACYAAAAAAAAAwOD//wAAAAAmAAAAZAAAABYAAABMAAAAAAAAAAAAAAAEAAAAAAAAAAEAAACZloMKAAAAACgAAAAoAAAAZAAAAGQAAAAAAAAAzMzMAAAAAABQAAAAUAAAAGQAAABkAAAAAAAAABcAAAAUAAAAAAAAAAAAAAD/fwAA/38AAAAAAAAJAAAABAAAAAAAAAAeAAAAaAAAAAAAAAAAAAAAAAAAAAAAAAAAAAAAECcAABAnAAAAAAAAAAAAAAAAAAAAAAAAAAAAAAAAAAAAAAAAAAAAABQAAAAAAAAAwMD/AAAAAABkAAAAMgAAAAAAAABkAAAAAAAAAH9/fwAKAAAAIgAAABgAAAAAAAAAAAAAAAAAAAAAAAAAAAAAAAAAAAAkAAAAJAAAAAAAAAAHAAAAAAAAAAAAAAAAAAAAAAAAAAAAAAAAAAAAf39/ACUAAABYAAAAAAAAAAAAAAAAAAAAAAAAAAAAAAAAAAAAAAAAAAAAAAAAAAAAAAAAAAAAAAA/AAAAAAAAAKCGAQAAAAAAAAAAAAAAAAAMAAAAAQAAAAAAAAAAAAAAAAAAAB8AAABUAAAA40oGBf///wEAAAAAAAAAAAAAAAAAAAAAAAAAAAAAAAAAAAAAAAAAAAAAAAJ/f38AmZaDA8zMzADAwP8Af39/AAAAAAAAAAAAAAAAAAAAAAAAAAAAIQAAABgAAAAUAAAAciUAAOAfAABwNQAAKiYAABAAAAAmAAAACAAAAAEAAAAAAAAA"/>
               </a:ext>
             </a:extLst>
           </p:cNvSpPr>
@@ -10087,7 +10087,7 @@
             <a:spLocks noGrp="1" noChangeArrowheads="1"/>
             <a:extLst>
               <a:ext uri="smNativeData">
-                <pr:smNativeData xmlns:pr="smNativeData" xmlns="smNativeData" val="SMDATA_15_mcIdaRMAAAAlAAAAZAAAAA0AAAAAAAAAAAAAAAAAAAAAAAAAAAAAAAAAAAAAAAAAAAEAAABQAAAAAAAAAAAA4D8AAAAAAADgPwAAAAAAAOA/AAAAAAAA4D8AAAAAAADgPwAAAAAAAOA/AAAAAAAA4D8AAAAAAADgPwAAAAAAAOA/AAAAAAAA4D8CAAAAjAAAAAAAAAAAAAAA40oGDP///wgAAAAAAAAAAAAAAAAAAAAAAAAAAAAAAAAAAAAAZAAAAAEAAABAAAAAAAAAAAAAAAAAAAAAAAAAAAAAAAAAAAAAAAAAAAAAAAAAAAAAAAAAAAAAAAAAAAAAAAAAAAAAAAAAAAAAAAAAAAAAAAAAAAAAAAAAAAAAAAAAAAAAFAAAADwAAAAAAAAAAAAAAAAAAAkUAAAAAQAAABQAAAAUAAAAFAAAAAEAAAAAAAAAZAAAAGQAAAAAAAAAZAAAAGQAAAAVAAAAYAAAAAAAAAAAAAAADwAAACADAAAAAAAAAAAAAAEAAACgMgAAVgcAAKr4//8BAAAAf39/AAEAAABkAAAAAAAAABQAAABAHwAAAAAAACYAAAAAAAAAwOD//wAAAAAmAAAAZAAAABYAAABMAAAAAAAAAAAAAAAEAAAAAAAAAAEAAACZloMKAAAAACgAAAAoAAAAZAAAAGQAAAAAAAAAzMzMAAAAAABQAAAAUAAAAGQAAABkAAAAAAAAABcAAAAUAAAAAAAAAAAAAAD/fwAA/38AAAAAAAAJAAAABAAAAIIAAAAeAAAAaAAAAAAAAAAAAAAAAAAAAAAAAAAAAAAAECcAABAnAAAAAAAAAAAAAAAAAAAAAAAAAAAAAAAAAAAAAAAAAAAAABQAAAAAAAAAwMD/AAAAAABkAAAAMgAAAAAAAABkAAAAAAAAAH9/fwAKAAAAIgAAABgAAAAAAAAAAAAAAAAAAAAAAAAAAAAAAAAAAAAkAAAAJAAAAAAAAAAHAAAAAAAAAAAAAAAAAAAAAAAAAAAAAAAAAAAAf39/ACUAAABYAAAAAAAAAAAAAAAAAAAAAAAAAAAAAAAAAAAAAAAAAAAAAAAAAAAAAAAAAAAAAAA/AAAAAAAAAKCGAQAAAAAAAAAAAAAAAAAMAAAAAQAAAAAAAAAAAAAAAAAAAB8AAABUAAAA40oGBf///wEAAAAAAAAAAAAAAAAAAAAAAAAAAAAAAAAAAAAAAAAAAAAAAAJ/f38AmZaDA8zMzADAwP8Af39/AAAAAAAAAAAAAAAAAAAAAAAAAAAAIQAAABgAAAAUAAAA0AIAADgEAABjFgAAAiYAABAAAAAmAAAACAAAAAEAAAAAAAAA"/>
+                <pr:smNativeData xmlns:pr="smNativeData" xmlns="smNativeData" val="SMDATA_15_r8odaRMAAAAlAAAAZAAAAA0AAAAAAAAAAAAAAAAAAAAAAAAAAAAAAAAAAAAAAAAAAAEAAABQAAAAAAAAAAAA4D8AAAAAAADgPwAAAAAAAOA/AAAAAAAA4D8AAAAAAADgPwAAAAAAAOA/AAAAAAAA4D8AAAAAAADgPwAAAAAAAOA/AAAAAAAA4D8CAAAAjAAAAAAAAAAAAAAA40oGDP///wgAAAAAAAAAAAAAAAAAAAAAAAAAAAAAAAAAAAAAZAAAAAEAAABAAAAAAAAAAAAAAAAAAAAAAAAAAAAAAAAAAAAAAAAAAAAAAAAAAAAAAAAAAAAAAAAAAAAAAAAAAAAAAAAAAAAAAAAAAAAAAAAAAAAAAAAAAAAAAAAAAAAAFAAAADwAAAAAAAAAAAAAAAAAAAkUAAAAAQAAABQAAAAUAAAAFAAAAAEAAAAAAAAAZAAAAGQAAAAAAAAAZAAAAGQAAAAVAAAAYAAAAAAAAAAAAAAADwAAACADAAAAAAAAAAAAAAEAAACgMgAAVgcAAKr4//8BAAAAf39/AAEAAABkAAAAAAAAABQAAABAHwAAAAAAACYAAAAAAAAAwOD//wAAAAAmAAAAZAAAABYAAABMAAAAAAAAAAAAAAAEAAAAAAAAAAEAAACZloMKAAAAACgAAAAoAAAAZAAAAGQAAAAAAAAAzMzMAAAAAABQAAAAUAAAAGQAAABkAAAAAAAAABcAAAAUAAAAAAAAAAAAAAD/fwAA/38AAAAAAAAJAAAABAAAAIIAAAAeAAAAaAAAAAAAAAAAAAAAAAAAAAAAAAAAAAAAECcAABAnAAAAAAAAAAAAAAAAAAAAAAAAAAAAAAAAAAAAAAAAAAAAABQAAAAAAAAAwMD/AAAAAABkAAAAMgAAAAAAAABkAAAAAAAAAH9/fwAKAAAAIgAAABgAAAAAAAAAAAAAAAAAAAAAAAAAAAAAAAAAAAAkAAAAJAAAAAAAAAAHAAAAAAAAAAAAAAAAAAAAAAAAAAAAAAAAAAAAf39/ACUAAABYAAAAAAAAAAAAAAAAAAAAAAAAAAAAAAAAAAAAAAAAAAAAAAAAAAAAAAAAAAAAAAA/AAAAAAAAAKCGAQAAAAAAAAAAAAAAAAAMAAAAAQAAAAAAAAAAAAAAAAAAAB8AAABUAAAA40oGBf///wEAAAAAAAAAAAAAAAAAAAAAAAAAAAAAAAAAAAAAAAAAAAAAAAJ/f38AmZaDA8zMzADAwP8Af39/AAAAAAAAAAAAAAAAAAAAAAAAAAAAIQAAABgAAAAUAAAA0AIAADgEAABjFgAAAiYAABAAAAAmAAAACAAAAAEAAAAAAAAA"/>
               </a:ext>
             </a:extLst>
           </p:cNvSpPr>
@@ -10123,7 +10123,7 @@
             <a:spLocks noGrp="1" noChangeArrowheads="1"/>
             <a:extLst>
               <a:ext uri="smNativeData">
-                <pr:smNativeData xmlns:pr="smNativeData" xmlns="smNativeData" val="SMDATA_15_mcIdaRMAAAAlAAAAZAAAAA0AAAAAAAAAAAAAAAAAAAAAAAAAAAAAAAAAAAAAAAAAAAEAAABQAAAAAAAAAAAA4D8AAAAAAADgPwAAAAAAAOA/AAAAAAAA4D8AAAAAAADgPwAAAAAAAOA/AAAAAAAA4D8AAAAAAADgPwAAAAAAAOA/AAAAAAAA4D8CAAAAjAAAAAAAAAAAAAAA40oGDP///wgAAAAAAAAAAAAAAAAAAAAAAAAAAAAAAAAAAAAAZAAAAAEAAABAAAAAAAAAAAAAAAAAAAAAAAAAAAAAAAAAAAAAAAAAAAAAAAAAAAAAAAAAAAAAAAAAAAAAAAAAAAAAAAAAAAAAAAAAAAAAAAAAAAAAAAAAAAAAAAAAAAAAFAAAADwAAAAAAAAAAAAAAAAAAAkUAAAAAQAAABQAAAAUAAAAFAAAAAEAAAAAAAAAZAAAAGQAAAAAAAAAZAAAAGQAAAAVAAAAYAAAAAAAAAAAAAAADwAAACADAAAAAAAAAAAAAAEAAACgMgAAVgcAAKr4//8BAAAAf39/AAEAAABkAAAAAAAAABQAAABAHwAAAAAAACYAAAAAAAAAwOD//wAAAAAmAAAAZAAAABYAAABMAAAAAAAAAAAAAAAEAAAAAAAAAAEAAACZloMKAAAAACgAAAAoAAAAZAAAAGQAAAAAAAAAzMzMAAAAAABQAAAAUAAAAGQAAABkAAAAAAAAABcAAAAUAAAAAAAAAAAAAAD/fwAA/38AAAAAAAAJAAAABAAAAAEAAAEeAAAAaAAAAAAAAAAAAAAAAAAAAAAAAAAAAAAAECcAABAnAAAAAAAAAAAAAAAAAAAAAAAAAAAAAAAAAAAAAAAAAAAAABQAAAAAAAAAwMD/AAAAAABkAAAAMgAAAAAAAABkAAAAAAAAAH9/fwAKAAAAIgAAABgAAAAAAAAAAAAAAAAAAAAAAAAAAAAAAAAAAAAkAAAAJAAAAAAAAAAHAAAAAAAAAAAAAAAAAAAAAAAAAAAAAAAAAAAAf39/ACUAAABYAAAAAAAAAAAAAAAAAAAAAAAAAAAAAAAAAAAAAAAAAAAAAAAAAAAAAAAAAAAAAAA/AAAAAAAAAKCGAQAAAAAAAAAAAAAAAAAMAAAAAQAAAAAAAAAAAAAAAAAAAB8AAABUAAAA40oGBf///wEAAAAAAAAAAAAAAAAAAAAAAAAAAAAAAAAAAAAAAAAAAAAAAAJ/f38AmZaDA8zMzADAwP8Af39/AAAAAAAAAAAAAAAAAAAAAAAAAAAAIQAAABgAAAAUAAAAjhcAADgEAABwNQAAAiYAABAAAAAmAAAACAAAAAGAAAAAAAAA"/>
+                <pr:smNativeData xmlns:pr="smNativeData" xmlns="smNativeData" val="SMDATA_15_r8odaRMAAAAlAAAAZAAAAA0AAAAAAAAAAAAAAAAAAAAAAAAAAAAAAAAAAAAAAAAAAAEAAABQAAAAAAAAAAAA4D8AAAAAAADgPwAAAAAAAOA/AAAAAAAA4D8AAAAAAADgPwAAAAAAAOA/AAAAAAAA4D8AAAAAAADgPwAAAAAAAOA/AAAAAAAA4D8CAAAAjAAAAAAAAAAAAAAA40oGDP///wgAAAAAAAAAAAAAAAAAAAAAAAAAAAAAAAAAAAAAZAAAAAEAAABAAAAAAAAAAAAAAAAAAAAAAAAAAAAAAAAAAAAAAAAAAAAAAAAAAAAAAAAAAAAAAAAAAAAAAAAAAAAAAAAAAAAAAAAAAAAAAAAAAAAAAAAAAAAAAAAAAAAAFAAAADwAAAAAAAAAAAAAAAAAAAkUAAAAAQAAABQAAAAUAAAAFAAAAAEAAAAAAAAAZAAAAGQAAAAAAAAAZAAAAGQAAAAVAAAAYAAAAAAAAAAAAAAADwAAACADAAAAAAAAAAAAAAEAAACgMgAAVgcAAKr4//8BAAAAf39/AAEAAABkAAAAAAAAABQAAABAHwAAAAAAACYAAAAAAAAAwOD//wAAAAAmAAAAZAAAABYAAABMAAAAAAAAAAAAAAAEAAAAAAAAAAEAAACZloMKAAAAACgAAAAoAAAAZAAAAGQAAAAAAAAAzMzMAAAAAABQAAAAUAAAAGQAAABkAAAAAAAAABcAAAAUAAAAAAAAAAAAAAD/fwAA/38AAAAAAAAJAAAABAAAAAEAAAEeAAAAaAAAAAAAAAAAAAAAAAAAAAAAAAAAAAAAECcAABAnAAAAAAAAAAAAAAAAAAAAAAAAAAAAAAAAAAAAAAAAAAAAABQAAAAAAAAAwMD/AAAAAABkAAAAMgAAAAAAAABkAAAAAAAAAH9/fwAKAAAAIgAAABgAAAAAAAAAAAAAAAAAAAAAAAAAAAAAAAAAAAAkAAAAJAAAAAAAAAAHAAAAAAAAAAAAAAAAAAAAAAAAAAAAAAAAAAAAf39/ACUAAABYAAAAAAAAAAAAAAAAAAAAAAAAAAAAAAAAAAAAAAAAAAAAAAAAAAAAAAAAAAAAAAA/AAAAAAAAAKCGAQAAAAAAAAAAAAAAAAAMAAAAAQAAAAAAAAAAAAAAAAAAAB8AAABUAAAA40oGBf///wEAAAAAAAAAAAAAAAAAAAAAAAAAAAAAAAAAAAAAAAAAAAAAAAJ/f38AmZaDA8zMzADAwP8Af39/AAAAAAAAAAAAAAAAAAAAAAAAAAAAIQAAABgAAAAUAAAAjhcAADgEAABwNQAAAiYAAAAAAAAmAAAACAAAAAGAAAAAAAAA"/>
               </a:ext>
             </a:extLst>
           </p:cNvSpPr>
@@ -10142,20 +10142,26 @@
           <a:lstStyle/>
           <a:p>
             <a:pPr lvl="2">
-              <a:defRPr lang="en-us"/>
-            </a:pPr>
-            <a:r>
-              <a:rPr lang="pt-br" kern="1" cap="none"/>
-              <a:t>Use esse tamanho de fonte e ocupe apenas esse bloco</a:t>
-            </a:r>
+              <a:defRPr lang="pt-br" kern="1" cap="none"/>
+            </a:pPr>
+            <a:r>
+              <a:t>Como estamos tratando de dados históricos, não precisamos analisar eles em alta frequência. Contudo, precisamos de um procesasmento em chunks ou em batch e o volume ingerido é constante.</a:t>
+            </a:r>
+          </a:p>
+          <a:p>
+            <a:pPr lvl="2">
+              <a:defRPr lang="pt-br" kern="1" cap="none"/>
+            </a:pPr>
+            <a:r>
+              <a:t>Por fim, o volume de dados é grande e podemos acesá-los diretamente nos sites ou com um web-scrapping, pois eles são públicos.</a:t>
+            </a:r>
+          </a:p>
+          <a:p>
+            <a:pPr lvl="2">
+              <a:defRPr lang="en-us"/>
+            </a:pPr>
             <a:endParaRPr lang="pt-br" kern="1" cap="none"/>
           </a:p>
-          <a:p>
-            <a:pPr lvl="2">
-              <a:defRPr lang="en-us"/>
-            </a:pPr>
-            <a:endParaRPr lang="pt-br" kern="1" cap="none"/>
-          </a:p>
         </p:txBody>
       </p:sp>
       <p:sp>
@@ -10165,7 +10171,7 @@
             <a:spLocks noGrp="1" noChangeArrowheads="1"/>
             <a:extLst>
               <a:ext uri="smNativeData">
-                <pr:smNativeData xmlns:pr="smNativeData" xmlns="smNativeData" val="SMDATA_15_mcIdaRMAAAAlAAAAZAAAAA0AAAAAAAAAAAAAAAAAAAAAAAAAAAAAAAAAAAAAAAAAAAEAAABQAAAAAAAAAAAA4D8AAAAAAADgPwAAAAAAAOA/AAAAAAAA4D8AAAAAAADgPwAAAAAAAOA/AAAAAAAA4D8AAAAAAADgPwAAAAAAAOA/AAAAAAAA4D8CAAAAjAAAAAAAAAAAAAAA40oGDP///wgAAAAAAAAAAAAAAAAAAAAAAAAAAAAAAAAAAAAAZAAAAAEAAABAAAAAAAAAAAAAAAAAAAAAAAAAAAAAAAAAAAAAAAAAAAAAAAAAAAAAAAAAAAAAAAAAAAAAAAAAAAAAAAAAAAAAAAAAAAAAAAAAAAAAAAAAAAAAAAAAAAAAFAAAADwAAAAAAAAAAAAAAAAAAAkUAAAAAQAAABQAAAAUAAAAFAAAAAEAAAAAAAAAZAAAAGQAAAAAAAAAZAAAAGQAAAAVAAAAYAAAAAAAAAAAAAAADwAAACADAAAAAAAAAAAAAAEAAACgMgAAVgcAAKr4//8BAAAAf39/AAEAAABkAAAAAAAAABQAAABAHwAAAAAAACYAAAAAAAAAwOD//wAAAAAmAAAAZAAAABYAAABMAAAAAAAAAAAAAAAEAAAAAAAAAAEAAACZloMKAAAAACgAAAAoAAAAZAAAAGQAAAAAAAAAzMzMAAAAAABQAAAAUAAAAGQAAABkAAAAAAAAABcAAAAUAAAAAAAAAAAAAAD/fwAA/38AAAAAAAAJAAAABAAAACEAAAAeAAAAaAAAAAAAAAAAAAAAAAAAAAAAAAAAAAAAECcAABAnAAAAAAAAAAAAAAAAAAAAAAAAAAAAAAAAAAAAAAAAAAAAABQAAAAAAAAAwMD/AAAAAABkAAAAMgAAAAAAAABkAAAAAAAAAH9/fwAKAAAAIgAAABgAAAAAAAAAAAAAAAAAAAAAAAAAAAAAAAAAAAAkAAAAJAAAAAAAAAAHAAAAAAAAAAAAAAAAAAAAAAAAAAAAAAAAAAAAf39/ACUAAABYAAAAAAAAAAAAAAAAAAAAAAAAAAAAAAAAAAAAAAAAAAAAAAAAAAAAAAAAAAAAAAA/AAAAAAAAAKCGAQAAAAAAAAAAAAAAAAAMAAAAAQAAAAAAAAAAAAAAAAAAAB8AAABUAAAA40oGBf///wEAAAAAAAAAAAAAAAAAAAAAAAAAAAAAAAAAAAAAAAAAAAAAAAJ/f38AmZaDA8zMzADAwP8Af39/AAAAAAAAAAAAAAAAAAAAAAAAAAAAIQAAABgAAAAUAAAAAQgAAGonAAB1MQAAMCoAABAAAAAmAAAACAAAAAAAAAAAAAAA"/>
+                <pr:smNativeData xmlns:pr="smNativeData" xmlns="smNativeData" val="SMDATA_15_r8odaRMAAAAlAAAAZAAAAA0AAAAAAAAAAAAAAAAAAAAAAAAAAAAAAAAAAAAAAAAAAAEAAABQAAAAAAAAAAAA4D8AAAAAAADgPwAAAAAAAOA/AAAAAAAA4D8AAAAAAADgPwAAAAAAAOA/AAAAAAAA4D8AAAAAAADgPwAAAAAAAOA/AAAAAAAA4D8CAAAAjAAAAAAAAAAAAAAA40oGDP///wgAAAAAAAAAAAAAAAAAAAAAAAAAAAAAAAAAAAAAZAAAAAEAAABAAAAAAAAAAAAAAAAAAAAAAAAAAAAAAAAAAAAAAAAAAAAAAAAAAAAAAAAAAAAAAAAAAAAAAAAAAAAAAAAAAAAAAAAAAAAAAAAAAAAAAAAAAAAAAAAAAAAAFAAAADwAAAAAAAAAAAAAAAAAAAkUAAAAAQAAABQAAAAUAAAAFAAAAAEAAAAAAAAAZAAAAGQAAAAAAAAAZAAAAGQAAAAVAAAAYAAAAAAAAAAAAAAADwAAACADAAAAAAAAAAAAAAEAAACgMgAAVgcAAKr4//8BAAAAf39/AAEAAABkAAAAAAAAABQAAABAHwAAAAAAACYAAAAAAAAAwOD//wAAAAAmAAAAZAAAABYAAABMAAAAAAAAAAAAAAAEAAAAAAAAAAEAAACZloMKAAAAACgAAAAoAAAAZAAAAGQAAAAAAAAAzMzMAAAAAABQAAAAUAAAAGQAAABkAAAAAAAAABcAAAAUAAAAAAAAAAAAAAD/fwAA/38AAAAAAAAJAAAABAAAACEAAAAeAAAAaAAAAAAAAAAAAAAAAAAAAAAAAAAAAAAAECcAABAnAAAAAAAAAAAAAAAAAAAAAAAAAAAAAAAAAAAAAAAAAAAAABQAAAAAAAAAwMD/AAAAAABkAAAAMgAAAAAAAABkAAAAAAAAAH9/fwAKAAAAIgAAABgAAAAAAAAAAAAAAAAAAAAAAAAAAAAAAAAAAAAkAAAAJAAAAAAAAAAHAAAAAAAAAAAAAAAAAAAAAAAAAAAAAAAAAAAAf39/ACUAAABYAAAAAAAAAAAAAAAAAAAAAAAAAAAAAAAAAAAAAAAAAAAAAAAAAAAAAAAAAAAAAAA/AAAAAAAAAKCGAQAAAAAAAAAAAAAAAAAMAAAAAQAAAAAAAAAAAAAAAAAAAB8AAABUAAAA40oGBf///wEAAAAAAAAAAAAAAAAAAAAAAAAAAAAAAAAAAAAAAAAAAAAAAAJ/f38AmZaDA8zMzADAwP8Af39/AAAAAAAAAAAAAAAAAAAAAAAAAAAAIQAAABgAAAAUAAAAAQgAAGonAAB1MQAAMCoAABAAAAAmAAAACAAAAAAAAAAAAAAA"/>
               </a:ext>
             </a:extLst>
           </p:cNvSpPr>
@@ -10223,7 +10229,7 @@
             <a:spLocks noGrp="1" noChangeArrowheads="1"/>
             <a:extLst>
               <a:ext uri="smNativeData">
-                <pr:smNativeData xmlns:pr="smNativeData" xmlns="smNativeData" val="SMDATA_15_mcIdaRMAAAAlAAAAZAAAAA0AAAAAAAAAAAAAAAAAAAAAAAAAAAAAAAAAAAAAAAAAAAEAAABQAAAAAAAAAAAA4D8AAAAAAADgPwAAAAAAAOA/AAAAAAAA4D8AAAAAAADgPwAAAAAAAOA/AAAAAAAA4D8AAAAAAADgPwAAAAAAAOA/AAAAAAAA4D8CAAAAjAAAAAAAAAAAAAAA40oGDP///wgAAAAAAAAAAAAAAAAAAAAAAAAAAAAAAAAAAAAAZAAAAAEAAABAAAAAAAAAAAAAAAAAAAAAAAAAAAAAAAAAAAAAAAAAAAAAAAAAAAAAAAAAAAAAAAAAAAAAAAAAAAAAAAAAAAAAAAAAAAAAAAAAAAAAAAAAAAAAAAAAAAAAFAAAADwAAAAAAAAAAAAAAAAAAAkUAAAAAQAAABQAAAAUAAAAFAAAAAEAAAAAAAAAZAAAAGQAAAAAAAAAZAAAAGQAAAAVAAAAYAAAAAAAAAAAAAAADwAAACADAAAAAAAAAAAAAAEAAACgMgAAVgcAAKr4//8BAAAAf39/AAEAAABkAAAAAAAAABQAAABAHwAAAAAAACYAAAAAAAAAwOD//wAAAAAmAAAAZAAAABYAAABMAAAAAAAAAAAAAAAEAAAAAAAAAAEAAACZloMKAAAAACgAAAAoAAAAZAAAAGQAAAAAAAAAzMzMAAAAAABQAAAAUAAAAGQAAABkAAAAAAAAABcAAAAUAAAAAAAAAAAAAAD/fwAA/38AAAAAAAAJAAAABAAAAGVkaXUeAAAAaAAAAAAAAAAAAAAAAAAAAAAAAAAAAAAAECcAABAnAAAAAAAAAAAAAAAAAAAAAAAAAAAAAAAAAAAAAAAAAAAAABQAAAAAAAAAwMD/AAAAAABkAAAAMgAAAAAAAABkAAAAAAAAAH9/fwAKAAAAIgAAABgAAAAAAAAAAAAAAAAAAAAAAAAAAAAAAAAAAAAkAAAAJAAAAAAAAAAHAAAAAAAAAAAAAAAAAAAAAAAAAAAAAAAAAAAAf39/ACUAAABYAAAAAAAAAAAAAAAAAAAAAAAAAAAAAAAAAAAAAAAAAAAAAAAAAAAAAAAAAAAAAAA/AAAAAAAAAKCGAQAAAAAAAAAAAAAAAAAMAAAAAQAAAAAAAAAAAAAAAAAAAB8AAABUAAAA40oGBf///wEAAAAAAAAAAAAAAAAAAAAAAAAAAAAAAAAAAAAAAAAAAAAAAAJ/f38AmZaDA8zMzADAwP8Af39/AAAAAAAAAAAAAAAAAAAAAAAAAAAAIQAAABgAAAAUAAAA0AIAADgEAABjFgAAxgsAABAAAAAmAAAACAAAAAAAAAAAAAAA"/>
+                <pr:smNativeData xmlns:pr="smNativeData" xmlns="smNativeData" val="SMDATA_15_r8odaRMAAAAlAAAAZAAAAA0AAAAAAAAAAAAAAAAAAAAAAAAAAAAAAAAAAAAAAAAAAAEAAABQAAAAAAAAAAAA4D8AAAAAAADgPwAAAAAAAOA/AAAAAAAA4D8AAAAAAADgPwAAAAAAAOA/AAAAAAAA4D8AAAAAAADgPwAAAAAAAOA/AAAAAAAA4D8CAAAAjAAAAAAAAAAAAAAA40oGDP///wgAAAAAAAAAAAAAAAAAAAAAAAAAAAAAAAAAAAAAZAAAAAEAAABAAAAAAAAAAAAAAAAAAAAAAAAAAAAAAAAAAAAAAAAAAAAAAAAAAAAAAAAAAAAAAAAAAAAAAAAAAAAAAAAAAAAAAAAAAAAAAAAAAAAAAAAAAAAAAAAAAAAAFAAAADwAAAAAAAAAAAAAAAAAAAkUAAAAAQAAABQAAAAUAAAAFAAAAAEAAAAAAAAAZAAAAGQAAAAAAAAAZAAAAGQAAAAVAAAAYAAAAAAAAAAAAAAADwAAACADAAAAAAAAAAAAAAEAAACgMgAAVgcAAKr4//8BAAAAf39/AAEAAABkAAAAAAAAABQAAABAHwAAAAAAACYAAAAAAAAAwOD//wAAAAAmAAAAZAAAABYAAABMAAAAAAAAAAAAAAAEAAAAAAAAAAEAAACZloMKAAAAACgAAAAoAAAAZAAAAGQAAAAAAAAAzMzMAAAAAABQAAAAUAAAAGQAAABkAAAAAAAAABcAAAAUAAAAAAAAAAAAAAD/fwAA/38AAAAAAAAJAAAABAAAAGVkaXUeAAAAaAAAAAAAAAAAAAAAAAAAAAAAAAAAAAAAECcAABAnAAAAAAAAAAAAAAAAAAAAAAAAAAAAAAAAAAAAAAAAAAAAABQAAAAAAAAAwMD/AAAAAABkAAAAMgAAAAAAAABkAAAAAAAAAH9/fwAKAAAAIgAAABgAAAAAAAAAAAAAAAAAAAAAAAAAAAAAAAAAAAAkAAAAJAAAAAAAAAAHAAAAAAAAAAAAAAAAAAAAAAAAAAAAAAAAAAAAf39/ACUAAABYAAAAAAAAAAAAAAAAAAAAAAAAAAAAAAAAAAAAAAAAAAAAAAAAAAAAAAAAAAAAAAA/AAAAAAAAAKCGAQAAAAAAAAAAAAAAAAAMAAAAAQAAAAAAAAAAAAAAAAAAAB8AAABUAAAA40oGBf///wEAAAAAAAAAAAAAAAAAAAAAAAAAAAAAAAAAAAAAAAAAAAAAAAJ/f38AmZaDA8zMzADAwP8Af39/AAAAAAAAAAAAAAAAAAAAAAAAAAAAIQAAABgAAAAUAAAA0AIAADgEAABjFgAAxgsAABAAAAAmAAAACAAAAAAAAAAAAAAA"/>
               </a:ext>
             </a:extLst>
           </p:cNvSpPr>
@@ -10254,7 +10260,7 @@
             <a:spLocks noGrp="1" noChangeArrowheads="1"/>
             <a:extLst>
               <a:ext uri="smNativeData">
-                <pr:smNativeData xmlns:pr="smNativeData" xmlns="smNativeData" val="SMDATA_15_mcIdaRMAAAAlAAAAZAAAAA0AAAAAAAAAAAAAAAAAAAAAAAAAAAAAAAAAAAAAAAAAAAEAAABQAAAAAAAAAAAA4D8AAAAAAADgPwAAAAAAAOA/AAAAAAAA4D8AAAAAAADgPwAAAAAAAOA/AAAAAAAA4D8AAAAAAADgPwAAAAAAAOA/AAAAAAAA4D8CAAAAjAAAAAAAAAAAAAAA40oGDP///wgAAAAAAAAAAAAAAAAAAAAAAAAAAAAAAAAAAAAAZAAAAAEAAABAAAAAAAAAAAAAAAAAAAAAAAAAAAAAAAAAAAAAAAAAAAAAAAAAAAAAAAAAAAAAAAAAAAAAAAAAAAAAAAAAAAAAAAAAAAAAAAAAAAAAAAAAAAAAAAAAAAAAFAAAADwAAAAAAAAAAAAAAAAAAAkUAAAAAQAAABQAAAAUAAAAFAAAAAEAAAAAAAAAZAAAAGQAAAAAAAAAZAAAAGQAAAAVAAAAYAAAAAAAAAAAAAAADwAAACADAAAAAAAAAAAAAAEAAACgMgAAVgcAAKr4//8BAAAAf39/AAEAAABkAAAAAAAAABQAAABAHwAAAAAAACYAAAAAAAAAwOD//wAAAAAmAAAAZAAAABYAAABMAAAAAAAAAAAAAAAEAAAAAAAAAAEAAACZloMKAAAAACgAAAAoAAAAZAAAAGQAAAAAAAAAzMzMAAAAAABQAAAAUAAAAGQAAABkAAAAAAAAABcAAAAUAAAAAAAAAAAAAAD/fwAA/38AAAAAAAAJAAAABAAAAAAAAAAeAAAAaAAAAAAAAAAAAAAAAAAAAAAAAAAAAAAAECcAABAnAAAAAAAAAAAAAAAAAAAAAAAAAAAAAAAAAAAAAAAAAAAAABQAAAAAAAAAwMD/AAAAAABkAAAAMgAAAAAAAABkAAAAAAAAAH9/fwAKAAAAIgAAABgAAAAAAAAAAAAAAAAAAAAAAAAAAAAAAAAAAAAkAAAAJAAAAAAAAAAHAAAAAAAAAAAAAAAAAAAAAAAAAAAAAAAAAAAAf39/ACUAAABYAAAAAAAAAAAAAAAAAAAAAAAAAAAAAAAAAAAAAAAAAAAAAAAAAAAAAAAAAAAAAAA/AAAAAAAAAKCGAQAAAAAAAAAAAAAAAAAMAAAAAQAAAAAAAAAAAAAAAAAAAB8AAABUAAAA40oGBf///wEAAAAAAAAAAAAAAAAAAAAAAAAAAAAAAAAAAAAAAAAAAAAAAAJ/f38AmZaDA8zMzADAwP8Af39/AAAAAAAAAAAAAAAAAAAAAAAAAAAAIQAAABgAAAAUAAAAjBcAADgEAABwNQAAAiYAABAAAAAmAAAACAAAAAGAAAAAAAAA"/>
+                <pr:smNativeData xmlns:pr="smNativeData" xmlns="smNativeData" val="SMDATA_15_r8odaRMAAAAlAAAAZAAAAA0AAAAAAAAAAAAAAAAAAAAAAAAAAAAAAAAAAAAAAAAAAAEAAABQAAAAAAAAAAAA4D8AAAAAAADgPwAAAAAAAOA/AAAAAAAA4D8AAAAAAADgPwAAAAAAAOA/AAAAAAAA4D8AAAAAAADgPwAAAAAAAOA/AAAAAAAA4D8CAAAAjAAAAAAAAAAAAAAA40oGDP///wgAAAAAAAAAAAAAAAAAAAAAAAAAAAAAAAAAAAAAZAAAAAEAAABAAAAAAAAAAAAAAAAAAAAAAAAAAAAAAAAAAAAAAAAAAAAAAAAAAAAAAAAAAAAAAAAAAAAAAAAAAAAAAAAAAAAAAAAAAAAAAAAAAAAAAAAAAAAAAAAAAAAAFAAAADwAAAAAAAAAAAAAAAAAAAkUAAAAAQAAABQAAAAUAAAAFAAAAAEAAAAAAAAAZAAAAGQAAAAAAAAAZAAAAGQAAAAVAAAAYAAAAAAAAAAAAAAADwAAACADAAAAAAAAAAAAAAEAAACgMgAAVgcAAKr4//8BAAAAf39/AAEAAABkAAAAAAAAABQAAABAHwAAAAAAACYAAAAAAAAAwOD//wAAAAAmAAAAZAAAABYAAABMAAAAAAAAAAAAAAAEAAAAAAAAAAEAAACZloMKAAAAACgAAAAoAAAAZAAAAGQAAAAAAAAAzMzMAAAAAABQAAAAUAAAAGQAAABkAAAAAAAAABcAAAAUAAAAAAAAAAAAAAD/fwAA/38AAAAAAAAJAAAABAAAAAAAAAAeAAAAaAAAAAAAAAAAAAAAAAAAAAAAAAAAAAAAECcAABAnAAAAAAAAAAAAAAAAAAAAAAAAAAAAAAAAAAAAAAAAAAAAABQAAAAAAAAAwMD/AAAAAABkAAAAMgAAAAAAAABkAAAAAAAAAH9/fwAKAAAAIgAAABgAAAAAAAAAAAAAAAAAAAAAAAAAAAAAAAAAAAAkAAAAJAAAAAAAAAAHAAAAAAAAAAAAAAAAAAAAAAAAAAAAAAAAAAAAf39/ACUAAABYAAAAAAAAAAAAAAAAAAAAAAAAAAAAAAAAAAAAAAAAAAAAAAAAAAAAAAAAAAAAAAA/AAAAAAAAAKCGAQAAAAAAAAAAAAAAAAAMAAAAAQAAAAAAAAAAAAAAAAAAAB8AAABUAAAA40oGBf///wEAAAAAAAAAAAAAAAAAAAAAAAAAAAAAAAAAAAAAAAAAAAAAAAJ/f38AmZaDA8zMzADAwP8Af39/AAAAAAAAAAAAAAAAAAAAAAAAAAAAIQAAABgAAAAUAAAAjBcAADgEAABwNQAAAiYAABAAAAAmAAAACAAAAAGAAAAAAAAA"/>
               </a:ext>
             </a:extLst>
           </p:cNvSpPr>
@@ -10374,7 +10380,7 @@
             <a:spLocks noGrp="1" noChangeArrowheads="1"/>
             <a:extLst>
               <a:ext uri="smNativeData">
-                <pr:smNativeData xmlns:pr="smNativeData" xmlns="smNativeData" val="SMDATA_15_mcIdaRMAAAAlAAAAZAAAAA0AAAAAAAAAAAAAAAAAAAAAAAAAAAAAAAAAAAAAAAAAAAEAAABQAAAAAAAAAAAA4D8AAAAAAADgPwAAAAAAAOA/AAAAAAAA4D8AAAAAAADgPwAAAAAAAOA/AAAAAAAA4D8AAAAAAADgPwAAAAAAAOA/AAAAAAAA4D8CAAAAjAAAAAAAAAAAAAAA40oGDP///wgAAAAAAAAAAAAAAAAAAAAAAAAAAAAAAAAAAAAAZAAAAAEAAABAAAAAAAAAAAAAAAAAAAAAAAAAAAAAAAAAAAAAAAAAAAAAAAAAAAAAAAAAAAAAAAAAAAAAAAAAAAAAAAAAAAAAAAAAAAAAAAAAAAAAAAAAAAAAAAAAAAAAFAAAADwAAAAAAAAAAAAAAAAAAAkUAAAAAQAAABQAAAAUAAAAFAAAAAEAAAAAAAAAZAAAAGQAAAAAAAAAZAAAAGQAAAAVAAAAYAAAAAAAAAAAAAAADwAAACADAAAAAAAAAAAAAAEAAACgMgAAVgcAAKr4//8BAAAAf39/AAEAAABkAAAAAAAAABQAAABAHwAAAAAAACYAAAAAAAAAwOD//wAAAAAmAAAAZAAAABYAAABMAAAAAAAAAAAAAAAEAAAAAAAAAAEAAACZloMKAAAAACgAAAAoAAAAZAAAAGQAAAAAAAAAzMzMAAAAAABQAAAAUAAAAGQAAABkAAAAAAAAABcAAAAUAAAAAAAAAAAAAAD/fwAA/38AAAAAAAAJAAAABAAAABEEAQAeAAAAaAAAAAAAAAAAAAAAAAAAAAAAAAAAAAAAECcAABAnAAAAAAAAAAAAAAAAAAAAAAAAAAAAAAAAAAAAAAAAAAAAABQAAAAAAAAAwMD/AAAAAABkAAAAMgAAAAAAAABkAAAAAAAAAH9/fwAKAAAAIgAAABgAAAAAAAAAAAAAAAAAAAAAAAAAAAAAAAAAAAAkAAAAJAAAAAAAAAAHAAAAAAAAAAAAAAAAAAAAAAAAAAAAAAAAAAAAf39/ACUAAABYAAAAAAAAAAAAAAAAAAAAAAAAAAAAAAAAAAAAAAAAAAAAAAAAAAAAAAAAAAAAAAA/AAAAAAAAAKCGAQAAAAAAAAAAAAAAAAAMAAAAAQAAAAAAAAAAAAAAAAAAAB8AAABUAAAA40oGBf///wEAAAAAAAAAAAAAAAAAAAAAAAAAAAAAAAAAAAAAAAAAAAAAAAJ/f38AmZaDA8zMzADAwP8Af39/AAAAAAAAAAAAAAAAAAAAAAAAAAAAIQAAABgAAAAUAAAAAQgAAGonAAB1MQAAMCoAABAAAAAmAAAACAAAAAAAAAAAAAAA"/>
+                <pr:smNativeData xmlns:pr="smNativeData" xmlns="smNativeData" val="SMDATA_15_r8odaRMAAAAlAAAAZAAAAA0AAAAAAAAAAAAAAAAAAAAAAAAAAAAAAAAAAAAAAAAAAAEAAABQAAAAAAAAAAAA4D8AAAAAAADgPwAAAAAAAOA/AAAAAAAA4D8AAAAAAADgPwAAAAAAAOA/AAAAAAAA4D8AAAAAAADgPwAAAAAAAOA/AAAAAAAA4D8CAAAAjAAAAAAAAAAAAAAA40oGDP///wgAAAAAAAAAAAAAAAAAAAAAAAAAAAAAAAAAAAAAZAAAAAEAAABAAAAAAAAAAAAAAAAAAAAAAAAAAAAAAAAAAAAAAAAAAAAAAAAAAAAAAAAAAAAAAAAAAAAAAAAAAAAAAAAAAAAAAAAAAAAAAAAAAAAAAAAAAAAAAAAAAAAAFAAAADwAAAAAAAAAAAAAAAAAAAkUAAAAAQAAABQAAAAUAAAAFAAAAAEAAAAAAAAAZAAAAGQAAAAAAAAAZAAAAGQAAAAVAAAAYAAAAAAAAAAAAAAADwAAACADAAAAAAAAAAAAAAEAAACgMgAAVgcAAKr4//8BAAAAf39/AAEAAABkAAAAAAAAABQAAABAHwAAAAAAACYAAAAAAAAAwOD//wAAAAAmAAAAZAAAABYAAABMAAAAAAAAAAAAAAAEAAAAAAAAAAEAAACZloMKAAAAACgAAAAoAAAAZAAAAGQAAAAAAAAAzMzMAAAAAABQAAAAUAAAAGQAAABkAAAAAAAAABcAAAAUAAAAAAAAAAAAAAD/fwAA/38AAAAAAAAJAAAABAAAABEEAQAeAAAAaAAAAAAAAAAAAAAAAAAAAAAAAAAAAAAAECcAABAnAAAAAAAAAAAAAAAAAAAAAAAAAAAAAAAAAAAAAAAAAAAAABQAAAAAAAAAwMD/AAAAAABkAAAAMgAAAAAAAABkAAAAAAAAAH9/fwAKAAAAIgAAABgAAAAAAAAAAAAAAAAAAAAAAAAAAAAAAAAAAAAkAAAAJAAAAAAAAAAHAAAAAAAAAAAAAAAAAAAAAAAAAAAAAAAAAAAAf39/ACUAAABYAAAAAAAAAAAAAAAAAAAAAAAAAAAAAAAAAAAAAAAAAAAAAAAAAAAAAAAAAAAAAAA/AAAAAAAAAKCGAQAAAAAAAAAAAAAAAAAMAAAAAQAAAAAAAAAAAAAAAAAAAB8AAABUAAAA40oGBf///wEAAAAAAAAAAAAAAAAAAAAAAAAAAAAAAAAAAAAAAAAAAAAAAAJ/f38AmZaDA8zMzADAwP8Af39/AAAAAAAAAAAAAAAAAAAAAAAAAAAAIQAAABgAAAAUAAAAAQgAAGonAAB1MQAAMCoAABAAAAAmAAAACAAAAAAAAAAAAAAA"/>
               </a:ext>
             </a:extLst>
           </p:cNvSpPr>
@@ -10390,7 +10396,6 @@
             <a:pPr>
               <a:defRPr lang="en-us"/>
             </a:pPr>
-            <a:endParaRPr lang="pt-br" cap="none"/>
           </a:p>
         </p:txBody>
       </p:sp>
@@ -10433,7 +10438,7 @@
             <a:spLocks noGrp="1" noChangeArrowheads="1"/>
             <a:extLst>
               <a:ext uri="smNativeData">
-                <pr:smNativeData xmlns:pr="smNativeData" xmlns="smNativeData" val="SMDATA_15_mcIdaRMAAAAlAAAAZAAAAA0AAAAAAAAAAAAAAAAAAAAAAAAAAAAAAAAAAAAAAAAAAAEAAABQAAAAAAAAAAAA4D8AAAAAAADgPwAAAAAAAOA/AAAAAAAA4D8AAAAAAADgPwAAAAAAAOA/AAAAAAAA4D8AAAAAAADgPwAAAAAAAOA/AAAAAAAA4D8CAAAAjAAAAAAAAAAAAAAA40oGDP///wgAAAAAAAAAAAAAAAAAAAAAAAAAAAAAAAAAAAAAZAAAAAEAAABAAAAAAAAAAAAAAAAAAAAAAAAAAAAAAAAAAAAAAAAAAAAAAAAAAAAAAAAAAAAAAAAAAAAAAAAAAAAAAAAAAAAAAAAAAAAAAAAAAAAAAAAAAAAAAAAAAAAAFAAAADwAAAAAAAAAAAAAAAAAAAkUAAAAAQAAABQAAAAUAAAAFAAAAAEAAAAAAAAAZAAAAGQAAAAAAAAAZAAAAGQAAAAVAAAAYAAAAAAAAAAAAAAADwAAACADAAAAAAAAAAAAAAEAAACgMgAAVgcAAKr4//8BAAAAf39/AAEAAABkAAAAAAAAABQAAABAHwAAAAAAACYAAAAAAAAAwOD//wAAAAAmAAAAZAAAABYAAABMAAAAAAAAAAAAAAAEAAAAAAAAAAEAAACZloMKAAAAACgAAAAoAAAAZAAAAGQAAAAAAAAAzMzMAAAAAABQAAAAUAAAAGQAAABkAAAAAAAAABcAAAAUAAAAAAAAAAAAAAD/fwAA/38AAAAAAAAJAAAABAAAAAAAAAAeAAAAaAAAAAAAAAAAAAAAAAAAAAAAAAAAAAAAECcAABAnAAAAAAAAAAAAAAAAAAAAAAAAAAAAAAAAAAAAAAAAAAAAABQAAAAAAAAAwMD/AAAAAABkAAAAMgAAAAAAAABkAAAAAAAAAH9/fwAKAAAAIgAAABgAAAAAAAAAAAAAAAAAAAAAAAAAAAAAAAAAAAAkAAAAJAAAAAAAAAAHAAAAAAAAAAAAAAAAAAAAAAAAAAAAAAAAAAAAf39/ACUAAABYAAAAAAAAAAAAAAAAAAAAAAAAAAAAAAAAAAAAAAAAAAAAAAAAAAAAAAAAAAAAAAA/AAAAAAAAAKCGAQAAAAAAAAAAAAAAAAAMAAAAAQAAAAAAAAAAAAAAAAAAAB8AAABUAAAA40oGBf///wEAAAAAAAAAAAAAAAAAAAAAAAAAAAAAAAAAAAAAAAAAAAAAAAJ/f38AmZaDA8zMzADAwP8Af39/AAAAAAAAAAAAAAAAAAAAAAAAAAAAIQAAABgAAAAUAAAA0AIAADgEAABjFgAAxgsAABAAAAAmAAAACAAAAAAAAAAAAAAA"/>
+                <pr:smNativeData xmlns:pr="smNativeData" xmlns="smNativeData" val="SMDATA_15_r8odaRMAAAAlAAAAZAAAAA0AAAAAAAAAAAAAAAAAAAAAAAAAAAAAAAAAAAAAAAAAAAEAAABQAAAAAAAAAAAA4D8AAAAAAADgPwAAAAAAAOA/AAAAAAAA4D8AAAAAAADgPwAAAAAAAOA/AAAAAAAA4D8AAAAAAADgPwAAAAAAAOA/AAAAAAAA4D8CAAAAjAAAAAAAAAAAAAAA40oGDP///wgAAAAAAAAAAAAAAAAAAAAAAAAAAAAAAAAAAAAAZAAAAAEAAABAAAAAAAAAAAAAAAAAAAAAAAAAAAAAAAAAAAAAAAAAAAAAAAAAAAAAAAAAAAAAAAAAAAAAAAAAAAAAAAAAAAAAAAAAAAAAAAAAAAAAAAAAAAAAAAAAAAAAFAAAADwAAAAAAAAAAAAAAAAAAAkUAAAAAQAAABQAAAAUAAAAFAAAAAEAAAAAAAAAZAAAAGQAAAAAAAAAZAAAAGQAAAAVAAAAYAAAAAAAAAAAAAAADwAAACADAAAAAAAAAAAAAAEAAACgMgAAVgcAAKr4//8BAAAAf39/AAEAAABkAAAAAAAAABQAAABAHwAAAAAAACYAAAAAAAAAwOD//wAAAAAmAAAAZAAAABYAAABMAAAAAAAAAAAAAAAEAAAAAAAAAAEAAACZloMKAAAAACgAAAAoAAAAZAAAAGQAAAAAAAAAzMzMAAAAAABQAAAAUAAAAGQAAABkAAAAAAAAABcAAAAUAAAAAAAAAAAAAAD/fwAA/38AAAAAAAAJAAAABAAAAAAAAAAeAAAAaAAAAAAAAAAAAAAAAAAAAAAAAAAAAAAAECcAABAnAAAAAAAAAAAAAAAAAAAAAAAAAAAAAAAAAAAAAAAAAAAAABQAAAAAAAAAwMD/AAAAAABkAAAAMgAAAAAAAABkAAAAAAAAAH9/fwAKAAAAIgAAABgAAAAAAAAAAAAAAAAAAAAAAAAAAAAAAAAAAAAkAAAAJAAAAAAAAAAHAAAAAAAAAAAAAAAAAAAAAAAAAAAAAAAAAAAAf39/ACUAAABYAAAAAAAAAAAAAAAAAAAAAAAAAAAAAAAAAAAAAAAAAAAAAAAAAAAAAAAAAAAAAAA/AAAAAAAAAKCGAQAAAAAAAAAAAAAAAAAMAAAAAQAAAAAAAAAAAAAAAAAAAB8AAABUAAAA40oGBf///wEAAAAAAAAAAAAAAAAAAAAAAAAAAAAAAAAAAAAAAAAAAAAAAAJ/f38AmZaDA8zMzADAwP8Af39/AAAAAAAAAAAAAAAAAAAAAAAAAAAAIQAAABgAAAAUAAAA0AIAADgEAABjFgAAxgsAABAAAAAmAAAACAAAAAAAAAAAAAAA"/>
               </a:ext>
             </a:extLst>
           </p:cNvSpPr>
@@ -10464,7 +10469,7 @@
             <a:spLocks noGrp="1" noChangeArrowheads="1"/>
             <a:extLst>
               <a:ext uri="smNativeData">
-                <pr:smNativeData xmlns:pr="smNativeData" xmlns="smNativeData" val="SMDATA_15_mcIdaRMAAAAlAAAAZAAAAA0AAAAAAAAAAAAAAAAAAAAAAAAAAAAAAAAAAAAAAAAAAAEAAABQAAAAAAAAAAAA4D8AAAAAAADgPwAAAAAAAOA/AAAAAAAA4D8AAAAAAADgPwAAAAAAAOA/AAAAAAAA4D8AAAAAAADgPwAAAAAAAOA/AAAAAAAA4D8CAAAAjAAAAAAAAAAAAAAA40oGDP///wgAAAAAAAAAAAAAAAAAAAAAAAAAAAAAAAAAAAAAZAAAAAEAAABAAAAAAAAAAAAAAAAAAAAAAAAAAAAAAAAAAAAAAAAAAAAAAAAAAAAAAAAAAAAAAAAAAAAAAAAAAAAAAAAAAAAAAAAAAAAAAAAAAAAAAAAAAAAAAAAAAAAAFAAAADwAAAAAAAAAAAAAAAAAAAkUAAAAAQAAABQAAAAUAAAAFAAAAAEAAAAAAAAAZAAAAGQAAAAAAAAAZAAAAGQAAAAVAAAAYAAAAAAAAAAAAAAADwAAACADAAAAAAAAAAAAAAEAAACgMgAAVgcAAKr4//8BAAAAf39/AAEAAABkAAAAAAAAABQAAABAHwAAAAAAACYAAAAAAAAAwOD//wAAAAAmAAAAZAAAABYAAABMAAAAAAAAAAAAAAAEAAAAAAAAAAEAAACZloMKAAAAACgAAAAoAAAAZAAAAGQAAAAAAAAAzMzMAAAAAABQAAAAUAAAAGQAAABkAAAAAAAAABcAAAAUAAAAAAAAAAAAAAD/fwAA/38AAAAAAAAJAAAABAAAANg5BygeAAAAaAAAAAAAAAAAAAAAAAAAAAAAAAAAAAAAECcAABAnAAAAAAAAAAAAAAAAAAAAAAAAAAAAAAAAAAAAAAAAAAAAABQAAAAAAAAAwMD/AAAAAABkAAAAMgAAAAAAAABkAAAAAAAAAH9/fwAKAAAAIgAAABgAAAAAAAAAAAAAAAAAAAAAAAAAAAAAAAAAAAAkAAAAJAAAAAAAAAAHAAAAAAAAAAAAAAAAAAAAAAAAAAAAAAAAAAAAf39/ACUAAABYAAAAAAAAAAAAAAAAAAAAAAAAAAAAAAAAAAAAAAAAAAAAAAAAAAAAAAAAAAAAAAA/AAAAAAAAAKCGAQAAAAAAAAAAAAAAAAAMAAAAAQAAAAAAAAAAAAAAAAAAAB8AAABUAAAA40oGBf///wEAAAAAAAAAAAAAAAAAAAAAAAAAAAAAAAAAAAAAAAAAAAAAAAJ/f38AmZaDA8zMzADAwP8Af39/AAAAAAAAAAAAAAAAAAAAAAAAAAAAIQAAABgAAAAUAAAAjhcAADgEAABwNQAAAiYAAAAAAAAmAAAACAAAAAGAAAAAAAAA"/>
+                <pr:smNativeData xmlns:pr="smNativeData" xmlns="smNativeData" val="SMDATA_15_r8odaRMAAAAlAAAAZAAAAA0AAAAAAAAAAAAAAAAAAAAAAAAAAAAAAAAAAAAAAAAAAAEAAABQAAAAAAAAAAAA4D8AAAAAAADgPwAAAAAAAOA/AAAAAAAA4D8AAAAAAADgPwAAAAAAAOA/AAAAAAAA4D8AAAAAAADgPwAAAAAAAOA/AAAAAAAA4D8CAAAAjAAAAAAAAAAAAAAA40oGDP///wgAAAAAAAAAAAAAAAAAAAAAAAAAAAAAAAAAAAAAZAAAAAEAAABAAAAAAAAAAAAAAAAAAAAAAAAAAAAAAAAAAAAAAAAAAAAAAAAAAAAAAAAAAAAAAAAAAAAAAAAAAAAAAAAAAAAAAAAAAAAAAAAAAAAAAAAAAAAAAAAAAAAAFAAAADwAAAAAAAAAAAAAAAAAAAkUAAAAAQAAABQAAAAUAAAAFAAAAAEAAAAAAAAAZAAAAGQAAAAAAAAAZAAAAGQAAAAVAAAAYAAAAAAAAAAAAAAADwAAACADAAAAAAAAAAAAAAEAAACgMgAAVgcAAKr4//8BAAAAf39/AAEAAABkAAAAAAAAABQAAABAHwAAAAAAACYAAAAAAAAAwOD//wAAAAAmAAAAZAAAABYAAABMAAAAAAAAAAAAAAAEAAAAAAAAAAEAAACZloMKAAAAACgAAAAoAAAAZAAAAGQAAAAAAAAAzMzMAAAAAABQAAAAUAAAAGQAAABkAAAAAAAAABcAAAAUAAAAAAAAAAAAAAD/fwAA/38AAAAAAAAJAAAABAAAANg5BygeAAAAaAAAAAAAAAAAAAAAAAAAAAAAAAAAAAAAECcAABAnAAAAAAAAAAAAAAAAAAAAAAAAAAAAAAAAAAAAAAAAAAAAABQAAAAAAAAAwMD/AAAAAABkAAAAMgAAAAAAAABkAAAAAAAAAH9/fwAKAAAAIgAAABgAAAAAAAAAAAAAAAAAAAAAAAAAAAAAAAAAAAAkAAAAJAAAAAAAAAAHAAAAAAAAAAAAAAAAAAAAAAAAAAAAAAAAAAAAf39/ACUAAABYAAAAAAAAAAAAAAAAAAAAAAAAAAAAAAAAAAAAAAAAAAAAAAAAAAAAAAAAAAAAAAA/AAAAAAAAAKCGAQAAAAAAAAAAAAAAAAAMAAAAAQAAAAAAAAAAAAAAAAAAAB8AAABUAAAA40oGBf///wEAAAAAAAAAAAAAAAAAAAAAAAAAAAAAAAAAAAAAAAAAAAAAAAJ/f38AmZaDA8zMzADAwP8Af39/AAAAAAAAAAAAAAAAAAAAAAAAAAAAIQAAABgAAAAUAAAAjhcAADgEAABwNQAAAiYAAAAAAAAmAAAACAAAAAGAAAAAAAAA"/>
               </a:ext>
             </a:extLst>
           </p:cNvSpPr>
@@ -10566,7 +10571,7 @@
             <a:spLocks noGrp="1" noChangeArrowheads="1"/>
             <a:extLst>
               <a:ext uri="smNativeData">
-                <pr:smNativeData xmlns:pr="smNativeData" xmlns="smNativeData" val="SMDATA_15_mcIdaRMAAAAlAAAAZAAAAA0AAAAAAAAAAAAAAAAAAAAAAAAAAAAAAAAAAAAAAAAAAAEAAABQAAAAAAAAAAAA4D8AAAAAAADgPwAAAAAAAOA/AAAAAAAA4D8AAAAAAADgPwAAAAAAAOA/AAAAAAAA4D8AAAAAAADgPwAAAAAAAOA/AAAAAAAA4D8CAAAAjAAAAAAAAAAAAAAA40oGDP///wgAAAAAAAAAAAAAAAAAAAAAAAAAAAAAAAAAAAAAZAAAAAEAAABAAAAAAAAAAAAAAAAAAAAAAAAAAAAAAAAAAAAAAAAAAAAAAAAAAAAAAAAAAAAAAAAAAAAAAAAAAAAAAAAAAAAAAAAAAAAAAAAAAAAAAAAAAAAAAAAAAAAAFAAAADwAAAAAAAAAAAAAAAAAAAkUAAAAAQAAABQAAAAUAAAAFAAAAAEAAAAAAAAAZAAAAGQAAAAAAAAAZAAAAGQAAAAVAAAAYAAAAAAAAAAAAAAADwAAACADAAAAAAAAAAAAAAEAAACgMgAAVgcAAKr4//8BAAAAf39/AAEAAABkAAAAAAAAABQAAABAHwAAAAAAACYAAAAAAAAAwOD//wAAAAAmAAAAZAAAABYAAABMAAAAAAAAAAAAAAAEAAAAAAAAAAEAAACZloMKAAAAACgAAAAoAAAAZAAAAGQAAAAAAAAAzMzMAAAAAABQAAAAUAAAAGQAAABkAAAAAAAAABcAAAAUAAAAAAAAAAAAAAD/fwAA/38AAAAAAAAJAAAABAAAAHIAdQAeAAAAaAAAAAAAAAAAAAAAAAAAAAAAAAAAAAAAECcAABAnAAAAAAAAAAAAAAAAAAAAAAAAAAAAAAAAAAAAAAAAAAAAABQAAAAAAAAAwMD/AAAAAABkAAAAMgAAAAAAAABkAAAAAAAAAH9/fwAKAAAAIgAAABgAAAAAAAAAAAAAAAAAAAAAAAAAAAAAAAAAAAAkAAAAJAAAAAAAAAAHAAAAAAAAAAAAAAAAAAAAAAAAAAAAAAAAAAAAf39/ACUAAABYAAAAAAAAAAAAAAAAAAAAAAAAAAAAAAAAAAAAAAAAAAAAAAAAAAAAAAAAAAAAAAA/AAAAAAAAAKCGAQAAAAAAAAAAAAAAAAAMAAAAAQAAAAAAAAAAAAAAAAAAAB8AAABUAAAA40oGBf///wEAAAAAAAAAAAAAAAAAAAAAAAAAAAAAAAAAAAAAAAAAAAAAAAJ/f38AmZaDA8zMzADAwP8Af39/AAAAAAAAAAAAAAAAAAAAAAAAAAAAIQAAABgAAAAUAAAAAQgAAGonAAB1MQAAMCoAABAAAAAmAAAACAAAAAAAAAAAAAAA"/>
+                <pr:smNativeData xmlns:pr="smNativeData" xmlns="smNativeData" val="SMDATA_15_r8odaRMAAAAlAAAAZAAAAA0AAAAAAAAAAAAAAAAAAAAAAAAAAAAAAAAAAAAAAAAAAAEAAABQAAAAAAAAAAAA4D8AAAAAAADgPwAAAAAAAOA/AAAAAAAA4D8AAAAAAADgPwAAAAAAAOA/AAAAAAAA4D8AAAAAAADgPwAAAAAAAOA/AAAAAAAA4D8CAAAAjAAAAAAAAAAAAAAA40oGDP///wgAAAAAAAAAAAAAAAAAAAAAAAAAAAAAAAAAAAAAZAAAAAEAAABAAAAAAAAAAAAAAAAAAAAAAAAAAAAAAAAAAAAAAAAAAAAAAAAAAAAAAAAAAAAAAAAAAAAAAAAAAAAAAAAAAAAAAAAAAAAAAAAAAAAAAAAAAAAAAAAAAAAAFAAAADwAAAAAAAAAAAAAAAAAAAkUAAAAAQAAABQAAAAUAAAAFAAAAAEAAAAAAAAAZAAAAGQAAAAAAAAAZAAAAGQAAAAVAAAAYAAAAAAAAAAAAAAADwAAACADAAAAAAAAAAAAAAEAAACgMgAAVgcAAKr4//8BAAAAf39/AAEAAABkAAAAAAAAABQAAABAHwAAAAAAACYAAAAAAAAAwOD//wAAAAAmAAAAZAAAABYAAABMAAAAAAAAAAAAAAAEAAAAAAAAAAEAAACZloMKAAAAACgAAAAoAAAAZAAAAGQAAAAAAAAAzMzMAAAAAABQAAAAUAAAAGQAAABkAAAAAAAAABcAAAAUAAAAAAAAAAAAAAD/fwAA/38AAAAAAAAJAAAABAAAAHIAdQAeAAAAaAAAAAAAAAAAAAAAAAAAAAAAAAAAAAAAECcAABAnAAAAAAAAAAAAAAAAAAAAAAAAAAAAAAAAAAAAAAAAAAAAABQAAAAAAAAAwMD/AAAAAABkAAAAMgAAAAAAAABkAAAAAAAAAH9/fwAKAAAAIgAAABgAAAAAAAAAAAAAAAAAAAAAAAAAAAAAAAAAAAAkAAAAJAAAAAAAAAAHAAAAAAAAAAAAAAAAAAAAAAAAAAAAAAAAAAAAf39/ACUAAABYAAAAAAAAAAAAAAAAAAAAAAAAAAAAAAAAAAAAAAAAAAAAAAAAAAAAAAAAAAAAAAA/AAAAAAAAAKCGAQAAAAAAAAAAAAAAAAAMAAAAAQAAAAAAAAAAAAAAAAAAAB8AAABUAAAA40oGBf///wEAAAAAAAAAAAAAAAAAAAAAAAAAAAAAAAAAAAAAAAAAAAAAAAJ/f38AmZaDA8zMzADAwP8Af39/AAAAAAAAAAAAAAAAAAAAAAAAAAAAIQAAABgAAAAUAAAAAQgAAGonAAB1MQAAMCoAABAAAAAmAAAACAAAAAAAAAAAAAAA"/>
               </a:ext>
             </a:extLst>
           </p:cNvSpPr>
@@ -10645,7 +10650,7 @@
             <a:spLocks noGrp="1" noChangeArrowheads="1"/>
             <a:extLst>
               <a:ext uri="smNativeData">
-                <pr:smNativeData xmlns:pr="smNativeData" xmlns="smNativeData" val="SMDATA_15_mcIdaRMAAAAlAAAAZAAAAA0AAAAAAAAAAAAAAAAAAAAAAAAAAAAAAAAAAAAAAAAAAAEAAABQAAAAAAAAAAAA4D8AAAAAAADgPwAAAAAAAOA/AAAAAAAA4D8AAAAAAADgPwAAAAAAAOA/AAAAAAAA4D8AAAAAAADgPwAAAAAAAOA/AAAAAAAA4D8CAAAAjAAAAAAAAAAAAAAA40oGDP///wgAAAAAAAAAAAAAAAAAAAAAAAAAAAAAAAAAAAAAZAAAAAEAAABAAAAAAAAAAAAAAAAAAAAAAAAAAAAAAAAAAAAAAAAAAAAAAAAAAAAAAAAAAAAAAAAAAAAAAAAAAAAAAAAAAAAAAAAAAAAAAAAAAAAAAAAAAAAAAAAAAAAAFAAAADwAAAAAAAAAAAAAAAAAAAkUAAAAAQAAABQAAAAUAAAAFAAAAAEAAAAAAAAAZAAAAGQAAAAAAAAAZAAAAGQAAAAVAAAAYAAAAAAAAAAAAAAADwAAACADAAAAAAAAAAAAAAEAAACgMgAAVgcAAKr4//8BAAAAf39/AAEAAABkAAAAAAAAABQAAABAHwAAAAAAACYAAAAAAAAAwOD//wAAAAAmAAAAZAAAABYAAABMAAAAAAAAAAAAAAAEAAAAAAAAAAEAAACZloMKAAAAACgAAAAoAAAAZAAAAGQAAAAAAAAAzMzMAAAAAABQAAAAUAAAAGQAAABkAAAAAAAAABcAAAAUAAAAAAAAAAAAAAD/fwAA/38AAAAAAAAJAAAABAAAABEDAAAeAAAAaAAAAAAAAAAAAAAAAAAAAAAAAAAAAAAAECcAABAnAAAAAAAAAAAAAAAAAAAAAAAAAAAAAAAAAAAAAAAAAAAAABQAAAAAAAAAwMD/AAAAAABkAAAAMgAAAAAAAABkAAAAAAAAAH9/fwAKAAAAIgAAABgAAAAAAAAAAAAAAAAAAAAAAAAAAAAAAAAAAAAkAAAAJAAAAAAAAAAHAAAAAAAAAAAAAAAAAAAAAAAAAAAAAAAAAAAAf39/ACUAAABYAAAAAAAAAAAAAAAAAAAAAAAAAAAAAAAAAAAAAAAAAAAAAAAAAAAAAAAAAAAAAAA/AAAAAAAAAKCGAQAAAAAAAAAAAAAAAAAMAAAAAQAAAAAAAAAAAAAAAAAAAB8AAABUAAAA40oGBf///wEAAAAAAAAAAAAAAAAAAAAAAAAAAAAAAAAAAAAAAAAAAAAAAAJ/f38AmZaDA8zMzADAwP8Af39/AAAAAAAAAAAAAAAAAAAAAAAAAAAAIQAAABgAAAAUAAAA0AIAADgEAABjFgAAxgsAABAAAAAmAAAACAAAAAAAAAAAAAAA"/>
+                <pr:smNativeData xmlns:pr="smNativeData" xmlns="smNativeData" val="SMDATA_15_r8odaRMAAAAlAAAAZAAAAA0AAAAAAAAAAAAAAAAAAAAAAAAAAAAAAAAAAAAAAAAAAAEAAABQAAAAAAAAAAAA4D8AAAAAAADgPwAAAAAAAOA/AAAAAAAA4D8AAAAAAADgPwAAAAAAAOA/AAAAAAAA4D8AAAAAAADgPwAAAAAAAOA/AAAAAAAA4D8CAAAAjAAAAAAAAAAAAAAA40oGDP///wgAAAAAAAAAAAAAAAAAAAAAAAAAAAAAAAAAAAAAZAAAAAEAAABAAAAAAAAAAAAAAAAAAAAAAAAAAAAAAAAAAAAAAAAAAAAAAAAAAAAAAAAAAAAAAAAAAAAAAAAAAAAAAAAAAAAAAAAAAAAAAAAAAAAAAAAAAAAAAAAAAAAAFAAAADwAAAAAAAAAAAAAAAAAAAkUAAAAAQAAABQAAAAUAAAAFAAAAAEAAAAAAAAAZAAAAGQAAAAAAAAAZAAAAGQAAAAVAAAAYAAAAAAAAAAAAAAADwAAACADAAAAAAAAAAAAAAEAAACgMgAAVgcAAKr4//8BAAAAf39/AAEAAABkAAAAAAAAABQAAABAHwAAAAAAACYAAAAAAAAAwOD//wAAAAAmAAAAZAAAABYAAABMAAAAAAAAAAAAAAAEAAAAAAAAAAEAAACZloMKAAAAACgAAAAoAAAAZAAAAGQAAAAAAAAAzMzMAAAAAABQAAAAUAAAAGQAAABkAAAAAAAAABcAAAAUAAAAAAAAAAAAAAD/fwAA/38AAAAAAAAJAAAABAAAABEDAAAeAAAAaAAAAAAAAAAAAAAAAAAAAAAAAAAAAAAAECcAABAnAAAAAAAAAAAAAAAAAAAAAAAAAAAAAAAAAAAAAAAAAAAAABQAAAAAAAAAwMD/AAAAAABkAAAAMgAAAAAAAABkAAAAAAAAAH9/fwAKAAAAIgAAABgAAAAAAAAAAAAAAAAAAAAAAAAAAAAAAAAAAAAkAAAAJAAAAAAAAAAHAAAAAAAAAAAAAAAAAAAAAAAAAAAAAAAAAAAAf39/ACUAAABYAAAAAAAAAAAAAAAAAAAAAAAAAAAAAAAAAAAAAAAAAAAAAAAAAAAAAAAAAAAAAAA/AAAAAAAAAKCGAQAAAAAAAAAAAAAAAAAMAAAAAQAAAAAAAAAAAAAAAAAAAB8AAABUAAAA40oGBf///wEAAAAAAAAAAAAAAAAAAAAAAAAAAAAAAAAAAAAAAAAAAAAAAAJ/f38AmZaDA8zMzADAwP8Af39/AAAAAAAAAAAAAAAAAAAAAAAAAAAAIQAAABgAAAAUAAAA0AIAADgEAABjFgAAxgsAABAAAAAmAAAACAAAAAAAAAAAAAAA"/>
               </a:ext>
             </a:extLst>
           </p:cNvSpPr>
@@ -10676,7 +10681,7 @@
             <a:spLocks noGrp="1" noChangeArrowheads="1"/>
             <a:extLst>
               <a:ext uri="smNativeData">
-                <pr:smNativeData xmlns:pr="smNativeData" xmlns="smNativeData" val="SMDATA_15_mcIdaRMAAAAlAAAAZAAAAA0AAAAAAAAAAAAAAAAAAAAAAAAAAAAAAAAAAAAAAAAAAAEAAABQAAAAAAAAAAAA4D8AAAAAAADgPwAAAAAAAOA/AAAAAAAA4D8AAAAAAADgPwAAAAAAAOA/AAAAAAAA4D8AAAAAAADgPwAAAAAAAOA/AAAAAAAA4D8CAAAAjAAAAAAAAAAAAAAA40oGDP///wgAAAAAAAAAAAAAAAAAAAAAAAAAAAAAAAAAAAAAZAAAAAEAAABAAAAAAAAAAAAAAAAAAAAAAAAAAAAAAAAAAAAAAAAAAAAAAAAAAAAAAAAAAAAAAAAAAAAAAAAAAAAAAAAAAAAAAAAAAAAAAAAAAAAAAAAAAAAAAAAAAAAAFAAAADwAAAAAAAAAAAAAAAAAAAkUAAAAAQAAABQAAAAUAAAAFAAAAAEAAAAAAAAAZAAAAGQAAAAAAAAAZAAAAGQAAAAVAAAAYAAAAAAAAAAAAAAADwAAACADAAAAAAAAAAAAAAEAAACgMgAAVgcAAKr4//8BAAAAf39/AAEAAABkAAAAAAAAABQAAABAHwAAAAAAACYAAAAAAAAAwOD//wAAAAAmAAAAZAAAABYAAABMAAAAAAAAAAAAAAAEAAAAAAAAAAEAAACZloMKAAAAACgAAAAoAAAAZAAAAGQAAAAAAAAAzMzMAAAAAABQAAAAUAAAAGQAAABkAAAAAAAAABcAAAAUAAAAAAAAAAAAAAD/fwAA/38AAAAAAAAJAAAABAAAAAAAAAAeAAAAaAAAAAAAAAAAAAAAAAAAAAAAAAAAAAAAECcAABAnAAAAAAAAAAAAAAAAAAAAAAAAAAAAAAAAAAAAAAAAAAAAABQAAAAAAAAAwMD/AAAAAABkAAAAMgAAAAAAAABkAAAAAAAAAH9/fwAKAAAAIgAAABgAAAAAAAAAAAAAAAAAAAAAAAAAAAAAAAAAAAAkAAAAJAAAAAAAAAAHAAAAAAAAAAAAAAAAAAAAAAAAAAAAAAAAAAAAf39/ACUAAABYAAAAAAAAAAAAAAAAAAAAAAAAAAAAAAAAAAAAAAAAAAAAAAAAAAAAAAAAAAAAAAA/AAAAAAAAAKCGAQAAAAAAAAAAAAAAAAAMAAAAAQAAAAAAAAAAAAAAAAAAAB8AAABUAAAA40oGBf///wEAAAAAAAAAAAAAAAAAAAAAAAAAAAAAAAAAAAAAAAAAAAAAAAJ/f38AmZaDA8zMzADAwP8Af39/AAAAAAAAAAAAAAAAAAAAAAAAAAAAIQAAABgAAAAUAAAAjhcAADgEAABwNQAAAiYAABAAAAAmAAAACAAAAAGAAAAAAAAA"/>
+                <pr:smNativeData xmlns:pr="smNativeData" xmlns="smNativeData" val="SMDATA_15_r8odaRMAAAAlAAAAZAAAAA0AAAAAAAAAAAAAAAAAAAAAAAAAAAAAAAAAAAAAAAAAAAEAAABQAAAAAAAAAAAA4D8AAAAAAADgPwAAAAAAAOA/AAAAAAAA4D8AAAAAAADgPwAAAAAAAOA/AAAAAAAA4D8AAAAAAADgPwAAAAAAAOA/AAAAAAAA4D8CAAAAjAAAAAAAAAAAAAAA40oGDP///wgAAAAAAAAAAAAAAAAAAAAAAAAAAAAAAAAAAAAAZAAAAAEAAABAAAAAAAAAAAAAAAAAAAAAAAAAAAAAAAAAAAAAAAAAAAAAAAAAAAAAAAAAAAAAAAAAAAAAAAAAAAAAAAAAAAAAAAAAAAAAAAAAAAAAAAAAAAAAAAAAAAAAFAAAADwAAAAAAAAAAAAAAAAAAAkUAAAAAQAAABQAAAAUAAAAFAAAAAEAAAAAAAAAZAAAAGQAAAAAAAAAZAAAAGQAAAAVAAAAYAAAAAAAAAAAAAAADwAAACADAAAAAAAAAAAAAAEAAACgMgAAVgcAAKr4//8BAAAAf39/AAEAAABkAAAAAAAAABQAAABAHwAAAAAAACYAAAAAAAAAwOD//wAAAAAmAAAAZAAAABYAAABMAAAAAAAAAAAAAAAEAAAAAAAAAAEAAACZloMKAAAAACgAAAAoAAAAZAAAAGQAAAAAAAAAzMzMAAAAAABQAAAAUAAAAGQAAABkAAAAAAAAABcAAAAUAAAAAAAAAAAAAAD/fwAA/38AAAAAAAAJAAAABAAAAAAAAAAeAAAAaAAAAAAAAAAAAAAAAAAAAAAAAAAAAAAAECcAABAnAAAAAAAAAAAAAAAAAAAAAAAAAAAAAAAAAAAAAAAAAAAAABQAAAAAAAAAwMD/AAAAAABkAAAAMgAAAAAAAABkAAAAAAAAAH9/fwAKAAAAIgAAABgAAAAAAAAAAAAAAAAAAAAAAAAAAAAAAAAAAAAkAAAAJAAAAAAAAAAHAAAAAAAAAAAAAAAAAAAAAAAAAAAAAAAAAAAAf39/ACUAAABYAAAAAAAAAAAAAAAAAAAAAAAAAAAAAAAAAAAAAAAAAAAAAAAAAAAAAAAAAAAAAAA/AAAAAAAAAKCGAQAAAAAAAAAAAAAAAAAMAAAAAQAAAAAAAAAAAAAAAAAAAB8AAABUAAAA40oGBf///wEAAAAAAAAAAAAAAAAAAAAAAAAAAAAAAAAAAAAAAAAAAAAAAAJ/f38AmZaDA8zMzADAwP8Af39/AAAAAAAAAAAAAAAAAAAAAAAAAAAAIQAAABgAAAAUAAAAjhcAADgEAABwNQAAAiYAABAAAAAmAAAACAAAAAGAAAAAAAAA"/>
               </a:ext>
             </a:extLst>
           </p:cNvSpPr>
@@ -10830,7 +10835,7 @@
             <a:spLocks noGrp="1" noChangeArrowheads="1"/>
             <a:extLst>
               <a:ext uri="smNativeData">
-                <pr:smNativeData xmlns:pr="smNativeData" xmlns="smNativeData" val="SMDATA_15_mcIdaRMAAAAlAAAAZAAAAA0AAAAAAAAAAAAAAAAAAAAAAAAAAAAAAAAAAAAAAAAAAAEAAABQAAAAAAAAAAAA4D8AAAAAAADgPwAAAAAAAOA/AAAAAAAA4D8AAAAAAADgPwAAAAAAAOA/AAAAAAAA4D8AAAAAAADgPwAAAAAAAOA/AAAAAAAA4D8CAAAAjAAAAAAAAAAAAAAA40oGDP///wgAAAAAAAAAAAAAAAAAAAAAAAAAAAAAAAAAAAAAZAAAAAEAAABAAAAAAAAAAAAAAAAAAAAAAAAAAAAAAAAAAAAAAAAAAAAAAAAAAAAAAAAAAAAAAAAAAAAAAAAAAAAAAAAAAAAAAAAAAAAAAAAAAAAAAAAAAAAAAAAAAAAAFAAAADwAAAAAAAAAAAAAAAAAAAkUAAAAAQAAABQAAAAUAAAAFAAAAAEAAAAAAAAAZAAAAGQAAAAAAAAAZAAAAGQAAAAVAAAAYAAAAAAAAAAAAAAADwAAACADAAAAAAAAAAAAAAEAAACgMgAAVgcAAKr4//8BAAAAf39/AAEAAABkAAAAAAAAABQAAABAHwAAAAAAACYAAAAAAAAAwOD//wAAAAAmAAAAZAAAABYAAABMAAAAAAAAAAAAAAAEAAAAAAAAAAEAAACZloMKAAAAACgAAAAoAAAAZAAAAGQAAAAAAAAAzMzMAAAAAABQAAAAUAAAAGQAAABkAAAAAAAAABcAAAAUAAAAAAAAAAAAAAD/fwAA/38AAAAAAAAJAAAABAAAAAAFcsgeAAAAaAAAAAAAAAAAAAAAAAAAAAAAAAAAAAAAECcAABAnAAAAAAAAAAAAAAAAAAAAAAAAAAAAAAAAAAAAAAAAAAAAABQAAAAAAAAAwMD/AAAAAABkAAAAMgAAAAAAAABkAAAAAAAAAH9/fwAKAAAAIgAAABgAAAAAAAAAAAAAAAAAAAAAAAAAAAAAAAAAAAAkAAAAJAAAAAAAAAAHAAAAAAAAAAAAAAAAAAAAAAAAAAAAAAAAAAAAf39/ACUAAABYAAAAAAAAAAAAAAAAAAAAAAAAAAAAAAAAAAAAAAAAAAAAAAAAAAAAAAAAAAAAAAA/AAAAAAAAAKCGAQAAAAAAAAAAAAAAAAAMAAAAAQAAAAAAAAAAAAAAAAAAAB8AAABUAAAA40oGBf///wEAAAAAAAAAAAAAAAAAAAAAAAAAAAAAAAAAAAAAAAAAAAAAAAJ/f38AmZaDA8zMzADAwP8Af39/AAAAAAAAAAAAAAAAAAAAAAAAAAAAIQAAABgAAAAUAAAAAQgAAGonAAB1MQAAMCoAABAAAAAmAAAACAAAAAAAAAAAAAAA"/>
+                <pr:smNativeData xmlns:pr="smNativeData" xmlns="smNativeData" val="SMDATA_15_r8odaRMAAAAlAAAAZAAAAA0AAAAAAAAAAAAAAAAAAAAAAAAAAAAAAAAAAAAAAAAAAAEAAABQAAAAAAAAAAAA4D8AAAAAAADgPwAAAAAAAOA/AAAAAAAA4D8AAAAAAADgPwAAAAAAAOA/AAAAAAAA4D8AAAAAAADgPwAAAAAAAOA/AAAAAAAA4D8CAAAAjAAAAAAAAAAAAAAA40oGDP///wgAAAAAAAAAAAAAAAAAAAAAAAAAAAAAAAAAAAAAZAAAAAEAAABAAAAAAAAAAAAAAAAAAAAAAAAAAAAAAAAAAAAAAAAAAAAAAAAAAAAAAAAAAAAAAAAAAAAAAAAAAAAAAAAAAAAAAAAAAAAAAAAAAAAAAAAAAAAAAAAAAAAAFAAAADwAAAAAAAAAAAAAAAAAAAkUAAAAAQAAABQAAAAUAAAAFAAAAAEAAAAAAAAAZAAAAGQAAAAAAAAAZAAAAGQAAAAVAAAAYAAAAAAAAAAAAAAADwAAACADAAAAAAAAAAAAAAEAAACgMgAAVgcAAKr4//8BAAAAf39/AAEAAABkAAAAAAAAABQAAABAHwAAAAAAACYAAAAAAAAAwOD//wAAAAAmAAAAZAAAABYAAABMAAAAAAAAAAAAAAAEAAAAAAAAAAEAAACZloMKAAAAACgAAAAoAAAAZAAAAGQAAAAAAAAAzMzMAAAAAABQAAAAUAAAAGQAAABkAAAAAAAAABcAAAAUAAAAAAAAAAAAAAD/fwAA/38AAAAAAAAJAAAABAAAAAAFcsgeAAAAaAAAAAAAAAAAAAAAAAAAAAAAAAAAAAAAECcAABAnAAAAAAAAAAAAAAAAAAAAAAAAAAAAAAAAAAAAAAAAAAAAABQAAAAAAAAAwMD/AAAAAABkAAAAMgAAAAAAAABkAAAAAAAAAH9/fwAKAAAAIgAAABgAAAAAAAAAAAAAAAAAAAAAAAAAAAAAAAAAAAAkAAAAJAAAAAAAAAAHAAAAAAAAAAAAAAAAAAAAAAAAAAAAAAAAAAAAf39/ACUAAABYAAAAAAAAAAAAAAAAAAAAAAAAAAAAAAAAAAAAAAAAAAAAAAAAAAAAAAAAAAAAAAA/AAAAAAAAAKCGAQAAAAAAAAAAAAAAAAAMAAAAAQAAAAAAAAAAAAAAAAAAAB8AAABUAAAA40oGBf///wEAAAAAAAAAAAAAAAAAAAAAAAAAAAAAAAAAAAAAAAAAAAAAAAJ/f38AmZaDA8zMzADAwP8Af39/AAAAAAAAAAAAAAAAAAAAAAAAAAAAIQAAABgAAAAUAAAAAQgAAGonAAB1MQAAMCoAABAAAAAmAAAACAAAAAAAAAAAAAAA"/>
               </a:ext>
             </a:extLst>
           </p:cNvSpPr>
@@ -10888,7 +10893,7 @@
             <a:spLocks noGrp="1" noChangeArrowheads="1"/>
             <a:extLst>
               <a:ext uri="smNativeData">
-                <pr:smNativeData xmlns:pr="smNativeData" xmlns="smNativeData" val="SMDATA_15_mcIdaRMAAAAlAAAAZAAAAE0AAAAAAAAAAAAAAAAAAAAAAAAAAAAAAAAAAAAAAAAAAAEAAABQAAAAAAAAAAAA4D8AAAAAAADgPwAAAAAAAOA/AAAAAAAA4D8AAAAAAADgPwAAAAAAAOA/AAAAAAAA4D8AAAAAAADgPwAAAAAAAOA/AAAAAAAA4D8CAAAAjAAAAAAAAAAAAAAA40oGDP///wgAAAAAAAAAAAAAAAAAAAAAAAAAAAAAAAAAAAAAZAAAAAEAAABAAAAAAAAAAAAAAAAAAAAAAAAAAAAAAAAAAAAAAAAAAAAAAAAAAAAAAAAAAAAAAAAAAAAAAAAAAAAAAAAAAAAAAAAAAAAAAAAAAAAAAAAAAAAAAAAAAAAAFAAAADwAAAAAAAAAAAAAAAAAAAkUAAAAAQAAABQAAAAUAAAAFAAAAAEAAAAAAAAAZAAAAGQAAAAAAAAAZAAAAGQAAAAVAAAAYAAAAAAAAAAAAAAADwAAACADAAAAAAAAAAAAAAEAAACgMgAAVgcAAKr4//8BAAAAf39/AAEAAABkAAAAAAAAABQAAABAHwAAAAAAACYAAAAAAAAAwOD//wAAAAAmAAAAZAAAABYAAABMAAAAAAAAAAAAAAAEAAAAAAAAAAEAAACZloMKAAAAACgAAAAoAAAAZAAAAGQAAAAAAAAAzMzMAAAAAABQAAAAUAAAAGQAAABkAAAAAAAAABcAAAAUAAAAAAAAAAAAAAD/fwAA/38AAAAAAAAJAAAABAAAAAEAAAEeAAAAaAAAAAAAAAAAAAAAAAAAAAAAAAAAAAAAECcAABAnAAAAAAAAAAAAAAAAAAAAAAAAAAAAAAAAAAAAAAAAAAAAABQAAAAAAAAAwMD/AAAAAABkAAAAMgAAAAAAAABkAAAAAAAAAH9/fwAKAAAAIgAAABgAAAAAAAAAAAAAAAAAAAAAAAAAAAAAAAAAAAAkAAAAJAAAAAAAAAAHAAAAAAAAAAAAAAAAAAAAAAAAAAAAAAAAAAAAf39/ACUAAABYAAAAAAAAAAAAAAAAAAAAAAAAAAAAAAAAAAAAAAAAAAAAAAAAAAAAAAAAAAAAAAA/AAAAAAAAAKCGAQAAAAAAAAAAAAAAAAAMAAAAAQAAAAAAAAAAAAAAAAAAAB8AAABUAAAA40oGBf///wEAAAAAAAAAAAAAAAAAAAAAAAAAAAAAAAAAAAAAAAAAAAAAAAJ/f38AmZaDA8zMzADAwP8Af39/AAAAAAAAAAAAAAAAAAAAAAAAAAAAIQAAABgAAAAUAAAA0AIAAKwXAADUHAAA4xwAABAgAAAmAAAACAAAAAEAAAAAAAAA"/>
+                <pr:smNativeData xmlns:pr="smNativeData" xmlns="smNativeData" val="SMDATA_15_r8odaRMAAAAlAAAAZAAAAE0AAAAAAAAAAAAAAAAAAAAAAAAAAAAAAAAAAAAAAAAAAAEAAABQAAAAAAAAAAAA4D8AAAAAAADgPwAAAAAAAOA/AAAAAAAA4D8AAAAAAADgPwAAAAAAAOA/AAAAAAAA4D8AAAAAAADgPwAAAAAAAOA/AAAAAAAA4D8CAAAAjAAAAAAAAAAAAAAA40oGDP///wgAAAAAAAAAAAAAAAAAAAAAAAAAAAAAAAAAAAAAZAAAAAEAAABAAAAAAAAAAAAAAAAAAAAAAAAAAAAAAAAAAAAAAAAAAAAAAAAAAAAAAAAAAAAAAAAAAAAAAAAAAAAAAAAAAAAAAAAAAAAAAAAAAAAAAAAAAAAAAAAAAAAAFAAAADwAAAAAAAAAAAAAAAAAAAkUAAAAAQAAABQAAAAUAAAAFAAAAAEAAAAAAAAAZAAAAGQAAAAAAAAAZAAAAGQAAAAVAAAAYAAAAAAAAAAAAAAADwAAACADAAAAAAAAAAAAAAEAAACgMgAAVgcAAKr4//8BAAAAf39/AAEAAABkAAAAAAAAABQAAABAHwAAAAAAACYAAAAAAAAAwOD//wAAAAAmAAAAZAAAABYAAABMAAAAAAAAAAAAAAAEAAAAAAAAAAEAAACZloMKAAAAACgAAAAoAAAAZAAAAGQAAAAAAAAAzMzMAAAAAABQAAAAUAAAAGQAAABkAAAAAAAAABcAAAAUAAAAAAAAAAAAAAD/fwAA/38AAAAAAAAJAAAABAAAAAEAAAEeAAAAaAAAAAAAAAAAAAAAAAAAAAAAAAAAAAAAECcAABAnAAAAAAAAAAAAAAAAAAAAAAAAAAAAAAAAAAAAAAAAAAAAABQAAAAAAAAAwMD/AAAAAABkAAAAMgAAAAAAAABkAAAAAAAAAH9/fwAKAAAAIgAAABgAAAAAAAAAAAAAAAAAAAAAAAAAAAAAAAAAAAAkAAAAJAAAAAAAAAAHAAAAAAAAAAAAAAAAAAAAAAAAAAAAAAAAAAAAf39/ACUAAABYAAAAAAAAAAAAAAAAAAAAAAAAAAAAAAAAAAAAAAAAAAAAAAAAAAAAAAAAAAAAAAA/AAAAAAAAAKCGAQAAAAAAAAAAAAAAAAAMAAAAAQAAAAAAAAAAAAAAAAAAAB8AAABUAAAA40oGBf///wEAAAAAAAAAAAAAAAAAAAAAAAAAAAAAAAAAAAAAAAAAAAAAAAJ/f38AmZaDA8zMzADAwP8Af39/AAAAAAAAAAAAAAAAAAAAAAAAAAAAIQAAABgAAAAUAAAA0AIAAKwXAADUHAAA4xwAABAgAAAmAAAACAAAAAEAAAAAAAAA"/>
               </a:ext>
             </a:extLst>
           </p:cNvSpPr>
@@ -10956,7 +10961,7 @@
             <a:spLocks noGrp="1" noChangeArrowheads="1"/>
             <a:extLst>
               <a:ext uri="smNativeData">
-                <pr:smNativeData xmlns:pr="smNativeData" xmlns="smNativeData" val="SMDATA_15_mcIdaRMAAAAlAAAAEgAAAA0AAAAAkAAAAEgAAACQAAAASAAAAAAAAAAAAAAAAAAAAAEAAABQAAAAAAAAAAAA4D8AAAAAAADgPwAAAAAAAOA/AAAAAAAA4D8AAAAAAADgPwAAAAAAAOA/AAAAAAAA4D8AAAAAAADgPwAAAAAAAOA/AAAAAAAA4D8CAAAAjAAAAAAAAAAAAAAA////AP///wgAAAAAAAAAAAAAAAAAAAAAAAAAAAAAAAAAAAAAeAAAAAEAAABAAAAAAAAAAAAAAABaAAAAAAAAAAAAAAAAAAAAAAAAAAAAAAAAAAAAAAAAAAAAAAAAAAAAAAAAAAAAAAAAAAAAAAAAAAAAAAAAAAAAAAAAAAAAAAAAAAAAFAAAADwAAAAAAAAAAAAAAAAAAAAPAAAAAQAAACMAAAAjAAAAIwAAAB4AAAAAAAAAZAAAAGQAAAAAAAAAZAAAAGQAAAAVAAAAYAAAAAAAAAAAAAAADwAAACADAAAAAAAAAAAAAAEAAACgMgAAVgcAAKr4//8BAAAAf39/AAEAAABkAAAAAAAAABQAAABAHwAAAAAAACYAAAAAAAAAwOD//wAAAAAmAAAAZAAAABYAAABMAAAAAAAAAAAAAAAEAAAAAAAAAAEAAACZloMKAAAAACgAAAAoAAAAZAAAAGQAAAAAAAAAzMzMAAAAAABQAAAAUAAAAGQAAABkAAAAAAAAABcAAAAUAAAAAAAAAAAAAAD/fwAA/38AAAAAAAAJAAAABAAAAAAAAAAeAAAAaAAAAAAAAAAAAAAAAAAAAAAAAAAAAAAAECcAABAnAAAAAAAAAAAAAAAAAAAAAAAAAAAAAAAAAAAAAAAAAAAAABQAAAAAAAAAwMD/AAAAAABkAAAAMgAAAAAAAABkAAAAAAAAAH9/fwAKAAAAIgAAABgAAAAAAAAAAAAAAAAAAAAAAAAAAAAAAAAAAAAkAAAAJAAAAAAAAAAHAAAAAAAAAAAAAAAAAAAAAAAAAAAAAAAAAAAAf39/ACUAAABYAAAAAAAAAAAAAAAAAAAAAAAAAAAAAAAAAAAAAAAAAAAAAAAAAAAAAAAAAAAAAAA/AAAAAAAAAKCGAQAAAAAAAAAAAAAAAAAMAAAAAQAAAAAAAAAAAAAAAAAAAB8AAABUAAAA////AP///wEAAAAAAAAAAAAAAAAAAAAAAAAAAAAAAAAAAAAAAAAAAAAAAAB/f38AmZaDA8zMzADAwP8Af39/AAAAAAAAAAAAAAAAAAAAAAAAAAAAIQAAABgAAAAUAAAAWzQAAKgnAACXNgAAECkAABAAAAAmAAAACAAAAIGBAAAAAAAA"/>
+                <pr:smNativeData xmlns:pr="smNativeData" xmlns="smNativeData" val="SMDATA_15_r8odaRMAAAAlAAAAEgAAAA0AAAAAkAAAAEgAAACQAAAASAAAAAAAAAAAAAAAAAAAAAEAAABQAAAAAAAAAAAA4D8AAAAAAADgPwAAAAAAAOA/AAAAAAAA4D8AAAAAAADgPwAAAAAAAOA/AAAAAAAA4D8AAAAAAADgPwAAAAAAAOA/AAAAAAAA4D8CAAAAjAAAAAAAAAAAAAAA////AP///wgAAAAAAAAAAAAAAAAAAAAAAAAAAAAAAAAAAAAAeAAAAAEAAABAAAAAAAAAAAAAAABaAAAAAAAAAAAAAAAAAAAAAAAAAAAAAAAAAAAAAAAAAAAAAAAAAAAAAAAAAAAAAAAAAAAAAAAAAAAAAAAAAAAAAAAAAAAAAAAAAAAAFAAAADwAAAAAAAAAAAAAAAAAAAAPAAAAAQAAACMAAAAjAAAAIwAAAB4AAAAAAAAAZAAAAGQAAAAAAAAAZAAAAGQAAAAVAAAAYAAAAAAAAAAAAAAADwAAACADAAAAAAAAAAAAAAEAAACgMgAAVgcAAKr4//8BAAAAf39/AAEAAABkAAAAAAAAABQAAABAHwAAAAAAACYAAAAAAAAAwOD//wAAAAAmAAAAZAAAABYAAABMAAAAAAAAAAAAAAAEAAAAAAAAAAEAAACZloMKAAAAACgAAAAoAAAAZAAAAGQAAAAAAAAAzMzMAAAAAABQAAAAUAAAAGQAAABkAAAAAAAAABcAAAAUAAAAAAAAAAAAAAD/fwAA/38AAAAAAAAJAAAABAAAAAAAAAAeAAAAaAAAAAAAAAAAAAAAAAAAAAAAAAAAAAAAECcAABAnAAAAAAAAAAAAAAAAAAAAAAAAAAAAAAAAAAAAAAAAAAAAABQAAAAAAAAAwMD/AAAAAABkAAAAMgAAAAAAAABkAAAAAAAAAH9/fwAKAAAAIgAAABgAAAAAAAAAAAAAAAAAAAAAAAAAAAAAAAAAAAAkAAAAJAAAAAAAAAAHAAAAAAAAAAAAAAAAAAAAAAAAAAAAAAAAAAAAf39/ACUAAABYAAAAAAAAAAAAAAAAAAAAAAAAAAAAAAAAAAAAAAAAAAAAAAAAAAAAAAAAAAAAAAA/AAAAAAAAAKCGAQAAAAAAAAAAAAAAAAAMAAAAAQAAAAAAAAAAAAAAAAAAAB8AAABUAAAA////AP///wEAAAAAAAAAAAAAAAAAAAAAAAAAAAAAAAAAAAAAAAAAAAAAAAB/f38AmZaDA8zMzADAwP8Af39/AAAAAAAAAAAAAAAAAAAAAAAAAAAAIQAAABgAAAAUAAAAWzQAAKgnAACXNgAAECkAABAAAAAmAAAACAAAAIGBAAAAAAAA"/>
               </a:ext>
             </a:extLst>
           </p:cNvSpPr>
@@ -10997,7 +11002,7 @@
             <a:spLocks noGrp="1" noChangeArrowheads="1"/>
             <a:extLst>
               <a:ext uri="smNativeData">
-                <pr:smNativeData xmlns:pr="smNativeData" xmlns="smNativeData" val="SMDATA_15_mcIdaRMAAAAlAAAAZAAAAA0AAAAAAAAAAAAAAAAAAAAAAAAAAAAAAAAAAAAAAAAAAAEAAABQAAAAAAAAAAAA4D8AAAAAAADgPwAAAAAAAOA/AAAAAAAA4D8AAAAAAADgPwAAAAAAAOA/AAAAAAAA4D8AAAAAAADgPwAAAAAAAOA/AAAAAAAA4D8CAAAAjAAAAAAAAAAAAAAA40oGDP///wgAAAAAAAAAAAAAAAAAAAAAAAAAAAAAAAAAAAAAZAAAAAEAAABAAAAAAAAAAAAAAAAAAAAAAAAAAAAAAAAAAAAAAAAAAAAAAAAAAAAAAAAAAAAAAAAAAAAAAAAAAAAAAAAAAAAAAAAAAAAAAAAAAAAAAAAAAAAAAAAAAAAAFAAAADwAAAAAAAAAAAAAAAAAAAkUAAAAAQAAABQAAAAUAAAAFAAAAAEAAAAAAAAAZAAAAGQAAAAAAAAAZAAAAGQAAAAVAAAAYAAAAAAAAAAAAAAADwAAACADAAAAAAAAAAAAAAEAAACgMgAAVgcAAKr4//8BAAAAf39/AAEAAABkAAAAAAAAABQAAABAHwAAAAAAACYAAAAAAAAAwOD//wAAAAAmAAAAZAAAABYAAABMAAAAAAAAAAAAAAAEAAAAAAAAAAEAAACZloMKAAAAACgAAAAoAAAAZAAAAGQAAAAAAAAAzMzMAAAAAABQAAAAUAAAAGQAAABkAAAAAAAAABcAAAAUAAAAAAAAAAAAAAD/fwAA/38AAAAAAAAJAAAABAAAAAAAAAAeAAAAaAAAAAAAAAAAAAAAAAAAAAAAAAAAAAAAECcAABAnAAAAAAAAAAAAAAAAAAAAAAAAAAAAAAAAAAAAAAAAAAAAABQAAAAAAAAAwMD/AAAAAABkAAAAMgAAAAAAAABkAAAAAAAAAH9/fwAKAAAAIgAAABgAAAAAAAAAAAAAAAAAAAAAAAAAAAAAAAAAAAAkAAAAJAAAAAAAAAAHAAAAAAAAAAAAAAAAAAAAAAAAAAAAAAAAAAAAf39/ACUAAABYAAAAAAAAAAAAAAAAAAAAAAAAAAAAAAAAAAAAAAAAAAAAAAAAAAAAAAAAAAAAAAA/AAAAAAAAAKCGAQAAAAAAAAAAAAAAAAAMAAAAAQAAAAAAAAAAAAAAAAAAAB8AAABUAAAA40oGBf///wEAAAAAAAAAAAAAAAAAAAAAAAAAAAAAAAAAAAAAAAAAAAAAAAJ/f38AmZaDA8zMzADAwP8Af39/AAAAAAAAAAAAAAAAAAAAAAAAAAAAIQAAABgAAAAUAAAAeAMAAGIDAAAANQAAwgYAABAAAAAmAAAACAAAAAEAAAAAAAAA"/>
+                <pr:smNativeData xmlns:pr="smNativeData" xmlns="smNativeData" val="SMDATA_15_r8odaRMAAAAlAAAAZAAAAA0AAAAAAAAAAAAAAAAAAAAAAAAAAAAAAAAAAAAAAAAAAAEAAABQAAAAAAAAAAAA4D8AAAAAAADgPwAAAAAAAOA/AAAAAAAA4D8AAAAAAADgPwAAAAAAAOA/AAAAAAAA4D8AAAAAAADgPwAAAAAAAOA/AAAAAAAA4D8CAAAAjAAAAAAAAAAAAAAA40oGDP///wgAAAAAAAAAAAAAAAAAAAAAAAAAAAAAAAAAAAAAZAAAAAEAAABAAAAAAAAAAAAAAAAAAAAAAAAAAAAAAAAAAAAAAAAAAAAAAAAAAAAAAAAAAAAAAAAAAAAAAAAAAAAAAAAAAAAAAAAAAAAAAAAAAAAAAAAAAAAAAAAAAAAAFAAAADwAAAAAAAAAAAAAAAAAAAkUAAAAAQAAABQAAAAUAAAAFAAAAAEAAAAAAAAAZAAAAGQAAAAAAAAAZAAAAGQAAAAVAAAAYAAAAAAAAAAAAAAADwAAACADAAAAAAAAAAAAAAEAAACgMgAAVgcAAKr4//8BAAAAf39/AAEAAABkAAAAAAAAABQAAABAHwAAAAAAACYAAAAAAAAAwOD//wAAAAAmAAAAZAAAABYAAABMAAAAAAAAAAAAAAAEAAAAAAAAAAEAAACZloMKAAAAACgAAAAoAAAAZAAAAGQAAAAAAAAAzMzMAAAAAABQAAAAUAAAAGQAAABkAAAAAAAAABcAAAAUAAAAAAAAAAAAAAD/fwAA/38AAAAAAAAJAAAABAAAAAAAAAAeAAAAaAAAAAAAAAAAAAAAAAAAAAAAAAAAAAAAECcAABAnAAAAAAAAAAAAAAAAAAAAAAAAAAAAAAAAAAAAAAAAAAAAABQAAAAAAAAAwMD/AAAAAABkAAAAMgAAAAAAAABkAAAAAAAAAH9/fwAKAAAAIgAAABgAAAAAAAAAAAAAAAAAAAAAAAAAAAAAAAAAAAAkAAAAJAAAAAAAAAAHAAAAAAAAAAAAAAAAAAAAAAAAAAAAAAAAAAAAf39/ACUAAABYAAAAAAAAAAAAAAAAAAAAAAAAAAAAAAAAAAAAAAAAAAAAAAAAAAAAAAAAAAAAAAA/AAAAAAAAAKCGAQAAAAAAAAAAAAAAAAAMAAAAAQAAAAAAAAAAAAAAAAAAAB8AAABUAAAA40oGBf///wEAAAAAAAAAAAAAAAAAAAAAAAAAAAAAAAAAAAAAAAAAAAAAAAJ/f38AmZaDA8zMzADAwP8Af39/AAAAAAAAAAAAAAAAAAAAAAAAAAAAIQAAABgAAAAUAAAAeAMAAGIDAAAANQAAwgYAABAAAAAmAAAACAAAAAEAAAAAAAAA"/>
               </a:ext>
             </a:extLst>
           </p:cNvSpPr>
@@ -11033,7 +11038,7 @@
             <a:spLocks noGrp="1" noChangeArrowheads="1"/>
             <a:extLst>
               <a:ext uri="smNativeData">
-                <pr:smNativeData xmlns:pr="smNativeData" xmlns="smNativeData" val="SMDATA_15_mcIdaRMAAAAlAAAAZAAAAA0AAAAAAAAAAAAAAAAAAAAAAAAAAAAAAAAAAAAAAAAAAAEAAABQAAAAAAAAAAAA4D8AAAAAAADgPwAAAAAAAOA/AAAAAAAA4D8AAAAAAADgPwAAAAAAAOA/AAAAAAAA4D8AAAAAAADgPwAAAAAAAOA/AAAAAAAA4D8CAAAAjAAAAAAAAAAAAAAA40oGDP///wgAAAAAAAAAAAAAAAAAAAAAAAAAAAAAAAAAAAAAZAAAAAEAAABAAAAAAAAAAAAAAAAAAAAAAAAAAAAAAAAAAAAAAAAAAAAAAAAAAAAAAAAAAAAAAAAAAAAAAAAAAAAAAAAAAAAAAAAAAAAAAAAAAAAAAAAAAAAAAAAAAAAAFAAAADwAAAAAAAAAAAAAAAAAAAkUAAAAAQAAABQAAAAUAAAAFAAAAAEAAAAAAAAAZAAAAGQAAAAAAAAAZAAAAGQAAAAVAAAAYAAAAAAAAAAAAAAADwAAACADAAAAAAAAAAAAAAEAAACgMgAAVgcAAKr4//8BAAAAf39/AAEAAABkAAAAAAAAABQAAABAHwAAAAAAACYAAAAAAAAAwOD//wAAAAAmAAAAZAAAABYAAABMAAAAAAAAAAAAAAAEAAAAAAAAAAEAAACZloMKAAAAACgAAAAoAAAAZAAAAGQAAAAAAAAAzMzMAAAAAABQAAAAUAAAAGQAAABkAAAAAAAAABcAAAAUAAAAAAAAAAAAAAD/fwAA/38AAAAAAAAJAAAABAAAAAAAAAAeAAAAaAAAAAAAAAAAAAAAAAAAAAAAAAAAAAAAECcAABAnAAAAAAAAAAAAAAAAAAAAAAAAAAAAAAAAAAAAAAAAAAAAABQAAAAAAAAAwMD/AAAAAABkAAAAMgAAAAAAAABkAAAAAAAAAH9/fwAKAAAAIgAAABgAAAAAAAAAAAAAAAAAAAAAAAAAAAAAAAAAAAAkAAAAJAAAAAAAAAAHAAAAAAAAAAAAAAAAAAAAAAAAAAAAAAAAAAAAf39/ACUAAABYAAAAAAAAAAAAAAAAAAAAAAAAAAAAAAAAAAAAAAAAAAAAAAAAAAAAAAAAAAAAAAA/AAAAAAAAAKCGAQAAAAAAAAAAAAAAAAAMAAAAAQAAAAAAAAAAAAAAAAAAAB8AAABUAAAA40oGBf///wEAAAAAAAAAAAAAAAAAAAAAAAAAAAAAAAAAAAAAAAAAAAAAAAJ/f38AmZaDA8zMzADAwP8Af39/AAAAAAAAAAAAAAAAAAAAAAAAAAAAIQAAABgAAAAUAAAAqQMAAIYMAABkEQAABCIAAAAAAAAmAAAACAAAAIGAAAAAAAAA"/>
+                <pr:smNativeData xmlns:pr="smNativeData" xmlns="smNativeData" val="SMDATA_15_r8odaRMAAAAlAAAAZAAAAA0AAAAAAAAAAAAAAAAAAAAAAAAAAAAAAAAAAAAAAAAAAAEAAABQAAAAAAAAAAAA4D8AAAAAAADgPwAAAAAAAOA/AAAAAAAA4D8AAAAAAADgPwAAAAAAAOA/AAAAAAAA4D8AAAAAAADgPwAAAAAAAOA/AAAAAAAA4D8CAAAAjAAAAAAAAAAAAAAA40oGDP///wgAAAAAAAAAAAAAAAAAAAAAAAAAAAAAAAAAAAAAZAAAAAEAAABAAAAAAAAAAAAAAAAAAAAAAAAAAAAAAAAAAAAAAAAAAAAAAAAAAAAAAAAAAAAAAAAAAAAAAAAAAAAAAAAAAAAAAAAAAAAAAAAAAAAAAAAAAAAAAAAAAAAAFAAAADwAAAAAAAAAAAAAAAAAAAkUAAAAAQAAABQAAAAUAAAAFAAAAAEAAAAAAAAAZAAAAGQAAAAAAAAAZAAAAGQAAAAVAAAAYAAAAAAAAAAAAAAADwAAACADAAAAAAAAAAAAAAEAAACgMgAAVgcAAKr4//8BAAAAf39/AAEAAABkAAAAAAAAABQAAABAHwAAAAAAACYAAAAAAAAAwOD//wAAAAAmAAAAZAAAABYAAABMAAAAAAAAAAAAAAAEAAAAAAAAAAEAAACZloMKAAAAACgAAAAoAAAAZAAAAGQAAAAAAAAAzMzMAAAAAABQAAAAUAAAAGQAAABkAAAAAAAAABcAAAAUAAAAAAAAAAAAAAD/fwAA/38AAAAAAAAJAAAABAAAAAAAAAAeAAAAaAAAAAAAAAAAAAAAAAAAAAAAAAAAAAAAECcAABAnAAAAAAAAAAAAAAAAAAAAAAAAAAAAAAAAAAAAAAAAAAAAABQAAAAAAAAAwMD/AAAAAABkAAAAMgAAAAAAAABkAAAAAAAAAH9/fwAKAAAAIgAAABgAAAAAAAAAAAAAAAAAAAAAAAAAAAAAAAAAAAAkAAAAJAAAAAAAAAAHAAAAAAAAAAAAAAAAAAAAAAAAAAAAAAAAAAAAf39/ACUAAABYAAAAAAAAAAAAAAAAAAAAAAAAAAAAAAAAAAAAAAAAAAAAAAAAAAAAAAAAAAAAAAA/AAAAAAAAAKCGAQAAAAAAAAAAAAAAAAAMAAAAAQAAAAAAAAAAAAAAAAAAAB8AAABUAAAA40oGBf///wEAAAAAAAAAAAAAAAAAAAAAAAAAAAAAAAAAAAAAAAAAAAAAAAJ/f38AmZaDA8zMzADAwP8Af39/AAAAAAAAAAAAAAAAAAAAAAAAAAAAIQAAABgAAAAUAAAAqQMAAIYMAABkEQAABCIAAAAAAAAmAAAACAAAAIGAAAAAAAAA"/>
               </a:ext>
             </a:extLst>
           </p:cNvSpPr>
@@ -11172,7 +11177,7 @@
             <a:spLocks noGrp="1" noChangeArrowheads="1"/>
             <a:extLst>
               <a:ext uri="smNativeData">
-                <pr:smNativeData xmlns:pr="smNativeData" xmlns="smNativeData" val="SMDATA_15_mcIdaRMAAAAlAAAAZAAAAA0AAAAAkAAAAAAAAAAAAAAAAAAAAAAAAAABAAAAAAAAAAEAAABQAAAAAAAAAAAA4D8AAAAAAADgPwAAAAAAAOA/AAAAAAAA4D8AAAAAAADgPwAAAAAAAOA/AAAAAAAA4D8AAAAAAADgPwAAAAAAAOA/AAAAAAAA4D8CAAAAjAAAAAAAAAAAAAAA40oGDP///wgAAAAAAAAAAAAAAAAAAAAAAAAAAAAAAAAAAAAAZAAAAAEAAABAAAAAAAAAAAAAAAAAAAAAAAAAAAAAAAAAAAAAAAAAAAAAAAAAAAAAAAAAAAAAAAAAAAAAAAAAAAAAAAAAAAAAAAAAAAAAAAAAAAAAAAAAAAAAAAAAAAAAFAAAADwAAAAAAAAAAAAAAAAAAAkUAAAAAQAAABQAAAAUAAAAFAAAAAEAAAAAAAAAZAAAAGQAAAAAAAAAZAAAAGQAAAAVAAAAYAAAAAAAAAAAAAAADwAAACADAAAAAAAAAAAAAAEAAACgMgAAVgcAAKr4//8BAAAAf39/AAEAAABkAAAAAAAAABQAAABAHwAAAAAAACYAAAAAAAAAwOD//wAAAAAmAAAAZAAAABYAAABMAAAAAAAAAAAAAAAEAAAAAAAAAAEAAACZloMKAAAAACgAAAAoAAAAZAAAAGQAAAAAAAAAzMzMAAAAAABQAAAAUAAAAGQAAABkAAAAAAAAABcAAAAUAAAAAAAAAAAAAAD/fwAA/38AAAAAAAAJAAAABAAAAAAAAAAeAAAAaAAAAAAAAAAAAAAAAAAAAAAAAAAAAAAAECcAABAnAAAAAAAAAAAAAAAAAAAAAAAAAAAAAAAAAAAAAAAAAAAAABQAAAAAAAAAwMD/AAAAAABkAAAAMgAAAAAAAABkAAAAAAAAAH9/fwAKAAAAIgAAABgAAAAAAAAAAAAAAAAAAAAAAAAAAAAAAAAAAAAkAAAAJAAAAAAAAAAHAAAAAAAAAAAAAAAAAAAAAAAAAAAAAAAAAAAAf39/ACUAAABYAAAAAAAAAAAAAAAAAAAAAAAAAAAAAAAAAAAAAAAAAAAAAAAAAAAAAAAAAAAAAAA/AAAAAAAAAKCGAQAAAAAAAAAAAAAAAAAMAAAAAQAAAAAAAAAAAAAAAAAAAB8AAABUAAAAAAAABQAAAAEAAAAAAAAAAAAAAAAAAAAAAAAAAAAAAAAAAAAAAAAAAAAAAAJ/f38AmZaDA8zMzADAwP8Af39/AAAAAAAAAAAAAAAAAAAAAAAAAAAAIQAAABgAAAAUAAAAmgEAAD4jAADmEgAA8yUAABAAAAAmAAAACAAAAAGAAAAAAAAA"/>
+                <pr:smNativeData xmlns:pr="smNativeData" xmlns="smNativeData" val="SMDATA_15_r8odaRMAAAAlAAAAZAAAAA0AAAAAkAAAAAAAAAAAAAAAAAAAAAAAAAABAAAAAAAAAAEAAABQAAAAAAAAAAAA4D8AAAAAAADgPwAAAAAAAOA/AAAAAAAA4D8AAAAAAADgPwAAAAAAAOA/AAAAAAAA4D8AAAAAAADgPwAAAAAAAOA/AAAAAAAA4D8CAAAAjAAAAAAAAAAAAAAA40oGDP///wgAAAAAAAAAAAAAAAAAAAAAAAAAAAAAAAAAAAAAZAAAAAEAAABAAAAAAAAAAAAAAAAAAAAAAAAAAAAAAAAAAAAAAAAAAAAAAAAAAAAAAAAAAAAAAAAAAAAAAAAAAAAAAAAAAAAAAAAAAAAAAAAAAAAAAAAAAAAAAAAAAAAAFAAAADwAAAAAAAAAAAAAAAAAAAkUAAAAAQAAABQAAAAUAAAAFAAAAAEAAAAAAAAAZAAAAGQAAAAAAAAAZAAAAGQAAAAVAAAAYAAAAAAAAAAAAAAADwAAACADAAAAAAAAAAAAAAEAAACgMgAAVgcAAKr4//8BAAAAf39/AAEAAABkAAAAAAAAABQAAABAHwAAAAAAACYAAAAAAAAAwOD//wAAAAAmAAAAZAAAABYAAABMAAAAAAAAAAAAAAAEAAAAAAAAAAEAAACZloMKAAAAACgAAAAoAAAAZAAAAGQAAAAAAAAAzMzMAAAAAABQAAAAUAAAAGQAAABkAAAAAAAAABcAAAAUAAAAAAAAAAAAAAD/fwAA/38AAAAAAAAJAAAABAAAAAAAAAAeAAAAaAAAAAAAAAAAAAAAAAAAAAAAAAAAAAAAECcAABAnAAAAAAAAAAAAAAAAAAAAAAAAAAAAAAAAAAAAAAAAAAAAABQAAAAAAAAAwMD/AAAAAABkAAAAMgAAAAAAAABkAAAAAAAAAH9/fwAKAAAAIgAAABgAAAAAAAAAAAAAAAAAAAAAAAAAAAAAAAAAAAAkAAAAJAAAAAAAAAAHAAAAAAAAAAAAAAAAAAAAAAAAAAAAAAAAAAAAf39/ACUAAABYAAAAAAAAAAAAAAAAAAAAAAAAAAAAAAAAAAAAAAAAAAAAAAAAAAAAAAAAAAAAAAA/AAAAAAAAAKCGAQAAAAAAAAAAAAAAAAAMAAAAAQAAAAAAAAAAAAAAAAAAAB8AAABUAAAAAAAABQAAAAEAAAAAAAAAAAAAAAAAAAAAAAAAAAAAAAAAAAAAAAAAAAAAAAJ/f38AmZaDA8zMzADAwP8Af39/AAAAAAAAAAAAAAAAAAAAAAAAAAAAIQAAABgAAAAUAAAAmgEAAD4jAADmEgAA8yUAABAAAAAmAAAACAAAAAGAAAAAAAAA"/>
               </a:ext>
             </a:extLst>
           </p:cNvSpPr>
@@ -11261,7 +11266,7 @@
             <a:spLocks noGrp="1" noChangeArrowheads="1"/>
             <a:extLst>
               <a:ext uri="smNativeData">
-                <pr:smNativeData xmlns:pr="smNativeData" xmlns="smNativeData" val="SMDATA_15_mcIdaRMAAAAlAAAAZAAAAA0AAAAAAAAAAAAAAAAAAAAAAAAAAAAAAAAAAAAAAAAAAAEAAABQAAAAAAAAAAAA4D8AAAAAAADgPwAAAAAAAOA/AAAAAAAA4D8AAAAAAADgPwAAAAAAAOA/AAAAAAAA4D8AAAAAAADgPwAAAAAAAOA/AAAAAAAA4D8CAAAAjAAAAAAAAAAAAAAA40oGDP///wgAAAAAAAAAAAAAAAAAAAAAAAAAAAAAAAAAAAAAZAAAAAEAAABAAAAAAAAAAAAAAAAAAAAAAAAAAAAAAAAAAAAAAAAAAAAAAAAAAAAAAAAAAAAAAAAAAAAAAAAAAAAAAAAAAAAAAAAAAAAAAAAAAAAAAAAAAAAAAAAAAAAAFAAAADwAAAAAAAAAAAAAAAAAAAkUAAAAAQAAABQAAAAUAAAAFAAAAAEAAAAAAAAAZAAAAGQAAAAAAAAAZAAAAGQAAAAVAAAAYAAAAAAAAAAAAAAADwAAACADAAAAAAAAAAAAAAEAAACgMgAAVgcAAKr4//8BAAAAf39/AAEAAABkAAAAAAAAABQAAABAHwAAAAAAACYAAAAAAAAAwOD//wAAAAAmAAAAZAAAABYAAABMAAAAAAAAAAAAAAAEAAAAAAAAAAEAAACZloMKAAAAACgAAAAoAAAAZAAAAGQAAAAAAAAAzMzMAAAAAABQAAAAUAAAAGQAAABkAAAAAAAAABcAAAAUAAAAAAAAAAAAAAD/fwAA/38AAAAAAAAJAAAABAAAAAAAAAAeAAAAaAAAAAAAAAAAAAAAAAAAAAAAAAAAAAAAECcAABAnAAAAAAAAAAAAAAAAAAAAAAAAAAAAAAAAAAAAAAAAAAAAABQAAAAAAAAAwMD/AAAAAABkAAAAMgAAAAAAAABkAAAAAAAAAH9/fwAKAAAAIgAAABgAAAAAAAAAAAAAAAAAAAAAAAAAAAAAAAAAAAAkAAAAJAAAAAAAAAAHAAAAAAAAAAAAAAAAAAAAAAAAAAAAAAAAAAAAf39/ACUAAABYAAAAAAAAAAAAAAAAAAAAAAAAAAAAAAAAAAAAAAAAAAAAAAAAAAAAAAAAAAAAAAA/AAAAAAAAAKCGAQAAAAAAAAAAAAAAAAAMAAAAAQAAAAAAAAAAAAAAAAAAAB8AAABUAAAA40oGBf///wEAAAAAAAAAAAAAAAAAAAAAAAAAAAAAAAAAAAAAAAAAAAAAAAJ/f38AmZaDA8zMzADAwP8Af39/AAAAAAAAAAAAAAAAAAAAAAAAAAAAIQAAABgAAAAUAAAAdxUAAIYMAAAyIwAABCIAAAAAAAAmAAAACAAAAIGAAAAAAAAA"/>
+                <pr:smNativeData xmlns:pr="smNativeData" xmlns="smNativeData" val="SMDATA_15_r8odaRMAAAAlAAAAZAAAAA0AAAAAAAAAAAAAAAAAAAAAAAAAAAAAAAAAAAAAAAAAAAEAAABQAAAAAAAAAAAA4D8AAAAAAADgPwAAAAAAAOA/AAAAAAAA4D8AAAAAAADgPwAAAAAAAOA/AAAAAAAA4D8AAAAAAADgPwAAAAAAAOA/AAAAAAAA4D8CAAAAjAAAAAAAAAAAAAAA40oGDP///wgAAAAAAAAAAAAAAAAAAAAAAAAAAAAAAAAAAAAAZAAAAAEAAABAAAAAAAAAAAAAAAAAAAAAAAAAAAAAAAAAAAAAAAAAAAAAAAAAAAAAAAAAAAAAAAAAAAAAAAAAAAAAAAAAAAAAAAAAAAAAAAAAAAAAAAAAAAAAAAAAAAAAFAAAADwAAAAAAAAAAAAAAAAAAAkUAAAAAQAAABQAAAAUAAAAFAAAAAEAAAAAAAAAZAAAAGQAAAAAAAAAZAAAAGQAAAAVAAAAYAAAAAAAAAAAAAAADwAAACADAAAAAAAAAAAAAAEAAACgMgAAVgcAAKr4//8BAAAAf39/AAEAAABkAAAAAAAAABQAAABAHwAAAAAAACYAAAAAAAAAwOD//wAAAAAmAAAAZAAAABYAAABMAAAAAAAAAAAAAAAEAAAAAAAAAAEAAACZloMKAAAAACgAAAAoAAAAZAAAAGQAAAAAAAAAzMzMAAAAAABQAAAAUAAAAGQAAABkAAAAAAAAABcAAAAUAAAAAAAAAAAAAAD/fwAA/38AAAAAAAAJAAAABAAAAAAAAAAeAAAAaAAAAAAAAAAAAAAAAAAAAAAAAAAAAAAAECcAABAnAAAAAAAAAAAAAAAAAAAAAAAAAAAAAAAAAAAAAAAAAAAAABQAAAAAAAAAwMD/AAAAAABkAAAAMgAAAAAAAABkAAAAAAAAAH9/fwAKAAAAIgAAABgAAAAAAAAAAAAAAAAAAAAAAAAAAAAAAAAAAAAkAAAAJAAAAAAAAAAHAAAAAAAAAAAAAAAAAAAAAAAAAAAAAAAAAAAAf39/ACUAAABYAAAAAAAAAAAAAAAAAAAAAAAAAAAAAAAAAAAAAAAAAAAAAAAAAAAAAAAAAAAAAAA/AAAAAAAAAKCGAQAAAAAAAAAAAAAAAAAMAAAAAQAAAAAAAAAAAAAAAAAAAB8AAABUAAAA40oGBf///wEAAAAAAAAAAAAAAAAAAAAAAAAAAAAAAAAAAAAAAAAAAAAAAAJ/f38AmZaDA8zMzADAwP8Af39/AAAAAAAAAAAAAAAAAAAAAAAAAAAAIQAAABgAAAAUAAAAdxUAAIYMAAAyIwAABCIAAAAAAAAmAAAACAAAAIGAAAAAAAAA"/>
               </a:ext>
             </a:extLst>
           </p:cNvSpPr>
@@ -11372,7 +11377,7 @@
             <a:spLocks noGrp="1" noChangeArrowheads="1"/>
             <a:extLst>
               <a:ext uri="smNativeData">
-                <pr:smNativeData xmlns:pr="smNativeData" xmlns="smNativeData" val="SMDATA_15_mcIdaRMAAAAlAAAAZAAAAA0AAAAAkAAAAAAAAAAAAAAAAAAAAAAAAAABAAAAAAAAAAEAAABQAAAAAAAAAAAA4D8AAAAAAADgPwAAAAAAAOA/AAAAAAAA4D8AAAAAAADgPwAAAAAAAOA/AAAAAAAA4D8AAAAAAADgPwAAAAAAAOA/AAAAAAAA4D8CAAAAjAAAAAAAAAAAAAAA40oGDP///wgAAAAAAAAAAAAAAAAAAAAAAAAAAAAAAAAAAAAAZAAAAAEAAABAAAAAAAAAAAAAAAAAAAAAAAAAAAAAAAAAAAAAAAAAAAAAAAAAAAAAAAAAAAAAAAAAAAAAAAAAAAAAAAAAAAAAAAAAAAAAAAAAAAAAAAAAAAAAAAAAAAAAFAAAADwAAAAAAAAAAAAAAAAAAAkUAAAAAQAAABQAAAAUAAAAFAAAAAEAAAAAAAAAZAAAAGQAAAAAAAAAZAAAAGQAAAAVAAAAYAAAAAAAAAAAAAAADwAAACADAAAAAAAAAAAAAAEAAACgMgAAVgcAAKr4//8BAAAAf39/AAEAAABkAAAAAAAAABQAAABAHwAAAAAAACYAAAAAAAAAwOD//wAAAAAmAAAAZAAAABYAAABMAAAAAAAAAAAAAAAEAAAAAAAAAAEAAACZloMKAAAAACgAAAAoAAAAZAAAAGQAAAAAAAAAzMzMAAAAAABQAAAAUAAAAGQAAABkAAAAAAAAABcAAAAUAAAAAAAAAAAAAAD/fwAA/38AAAAAAAAJAAAABAAAAAAAAAAeAAAAaAAAAAAAAAAAAAAAAAAAAAAAAAAAAAAAECcAABAnAAAAAAAAAAAAAAAAAAAAAAAAAAAAAAAAAAAAAAAAAAAAABQAAAAAAAAAwMD/AAAAAABkAAAAMgAAAAAAAABkAAAAAAAAAH9/fwAKAAAAIgAAABgAAAAAAAAAAAAAAAAAAAAAAAAAAAAAAAAAAAAkAAAAJAAAAAAAAAAHAAAAAAAAAAAAAAAAAAAAAAAAAAAAAAAAAAAAf39/ACUAAABYAAAAAAAAAAAAAAAAAAAAAAAAAAAAAAAAAAAAAAAAAAAAAAAAAAAAAAAAAAAAAAA/AAAAAAAAAKCGAQAAAAAAAAAAAAAAAAAMAAAAAQAAAAAAAAAAAAAAAAAAAB8AAABUAAAAAAAABQAAAAEAAAAAAAAAAAAAAAAAAAAAAAAAAAAAAAAAAAAAAAAAAAAAAAJ/f38AmZaDA8zMzADAwP8Af39/AAAAAAAAAAAAAAAAAAAAAAAAAAAAIQAAABgAAAAUAAAAaBMAAD4jAAC0JAAA8yUAABAAAAAmAAAACAAAAAEAAAAAAAAA"/>
+                <pr:smNativeData xmlns:pr="smNativeData" xmlns="smNativeData" val="SMDATA_15_r8odaRMAAAAlAAAAZAAAAA0AAAAAkAAAAAAAAAAAAAAAAAAAAAAAAAABAAAAAAAAAAEAAABQAAAAAAAAAAAA4D8AAAAAAADgPwAAAAAAAOA/AAAAAAAA4D8AAAAAAADgPwAAAAAAAOA/AAAAAAAA4D8AAAAAAADgPwAAAAAAAOA/AAAAAAAA4D8CAAAAjAAAAAAAAAAAAAAA40oGDP///wgAAAAAAAAAAAAAAAAAAAAAAAAAAAAAAAAAAAAAZAAAAAEAAABAAAAAAAAAAAAAAAAAAAAAAAAAAAAAAAAAAAAAAAAAAAAAAAAAAAAAAAAAAAAAAAAAAAAAAAAAAAAAAAAAAAAAAAAAAAAAAAAAAAAAAAAAAAAAAAAAAAAAFAAAADwAAAAAAAAAAAAAAAAAAAkUAAAAAQAAABQAAAAUAAAAFAAAAAEAAAAAAAAAZAAAAGQAAAAAAAAAZAAAAGQAAAAVAAAAYAAAAAAAAAAAAAAADwAAACADAAAAAAAAAAAAAAEAAACgMgAAVgcAAKr4//8BAAAAf39/AAEAAABkAAAAAAAAABQAAABAHwAAAAAAACYAAAAAAAAAwOD//wAAAAAmAAAAZAAAABYAAABMAAAAAAAAAAAAAAAEAAAAAAAAAAEAAACZloMKAAAAACgAAAAoAAAAZAAAAGQAAAAAAAAAzMzMAAAAAABQAAAAUAAAAGQAAABkAAAAAAAAABcAAAAUAAAAAAAAAAAAAAD/fwAA/38AAAAAAAAJAAAABAAAAAAAAAAeAAAAaAAAAAAAAAAAAAAAAAAAAAAAAAAAAAAAECcAABAnAAAAAAAAAAAAAAAAAAAAAAAAAAAAAAAAAAAAAAAAAAAAABQAAAAAAAAAwMD/AAAAAABkAAAAMgAAAAAAAABkAAAAAAAAAH9/fwAKAAAAIgAAABgAAAAAAAAAAAAAAAAAAAAAAAAAAAAAAAAAAAAkAAAAJAAAAAAAAAAHAAAAAAAAAAAAAAAAAAAAAAAAAAAAAAAAAAAAf39/ACUAAABYAAAAAAAAAAAAAAAAAAAAAAAAAAAAAAAAAAAAAAAAAAAAAAAAAAAAAAAAAAAAAAA/AAAAAAAAAKCGAQAAAAAAAAAAAAAAAAAMAAAAAQAAAAAAAAAAAAAAAAAAAB8AAABUAAAAAAAABQAAAAEAAAAAAAAAAAAAAAAAAAAAAAAAAAAAAAAAAAAAAAAAAAAAAAJ/f38AmZaDA8zMzADAwP8Af39/AAAAAAAAAAAAAAAAAAAAAAAAAAAAIQAAABgAAAAUAAAAaBMAAD4jAAC0JAAA8yUAABAAAAAmAAAACAAAAAEAAAAAAAAA"/>
               </a:ext>
             </a:extLst>
           </p:cNvSpPr>
@@ -11408,7 +11413,7 @@
             <a:spLocks noGrp="1" noChangeArrowheads="1"/>
             <a:extLst>
               <a:ext uri="smNativeData">
-                <pr:smNativeData xmlns:pr="smNativeData" xmlns="smNativeData" val="SMDATA_15_mcIdaRMAAAAlAAAAZAAAAA0AAAAAAAAAAAAAAAAAAAAAAAAAAAAAAAAAAAAAAAAAAAEAAABQAAAAAAAAAAAA4D8AAAAAAADgPwAAAAAAAOA/AAAAAAAA4D8AAAAAAADgPwAAAAAAAOA/AAAAAAAA4D8AAAAAAADgPwAAAAAAAOA/AAAAAAAA4D8CAAAAjAAAAAAAAAAAAAAA40oGDP///wgAAAAAAAAAAAAAAAAAAAAAAAAAAAAAAAAAAAAAZAAAAAEAAABAAAAAAAAAAAAAAAAAAAAAAAAAAAAAAAAAAAAAAAAAAAAAAAAAAAAAAAAAAAAAAAAAAAAAAAAAAAAAAAAAAAAAAAAAAAAAAAAAAAAAAAAAAAAAAAAAAAAAFAAAADwAAAAAAAAAAAAAAAAAAAkUAAAAAQAAABQAAAAUAAAAFAAAAAEAAAAAAAAAZAAAAGQAAAAAAAAAZAAAAGQAAAAVAAAAYAAAAAAAAAAAAAAADwAAACADAAAAAAAAAAAAAAEAAACgMgAAVgcAAKr4//8BAAAAf39/AAEAAABkAAAAAAAAABQAAABAHwAAAAAAACYAAAAAAAAAwOD//wAAAAAmAAAAZAAAABYAAABMAAAAAAAAAAAAAAAEAAAAAAAAAAEAAACZloMKAAAAACgAAAAoAAAAZAAAAGQAAAAAAAAAzMzMAAAAAABQAAAAUAAAAGQAAABkAAAAAAAAABcAAAAUAAAAAAAAAAAAAAD/fwAA/38AAAAAAAAJAAAABAAAAAAAAAAeAAAAaAAAAAAAAAAAAAAAAAAAAAAAAAAAAAAAECcAABAnAAAAAAAAAAAAAAAAAAAAAAAAAAAAAAAAAAAAAAAAAAAAABQAAAAAAAAAwMD/AAAAAABkAAAAMgAAAAAAAABkAAAAAAAAAH9/fwAKAAAAIgAAABgAAAAAAAAAAAAAAAAAAAAAAAAAAAAAAAAAAAAkAAAAJAAAAAAAAAAHAAAAAAAAAAAAAAAAAAAAAAAAAAAAAAAAAAAAf39/ACUAAABYAAAAAAAAAAAAAAAAAAAAAAAAAAAAAAAAAAAAAAAAAAAAAAAAAAAAAAAAAAAAAAA/AAAAAAAAAKCGAQAAAAAAAAAAAAAAAAAMAAAAAQAAAAAAAAAAAAAAAAAAAB8AAABUAAAA40oGBf///wEAAAAAAAAAAAAAAAAAAAAAAAAAAAAAAAAAAAAAAAAAAAAAAAJ/f38AmZaDA8zMzADAwP8Af39/AAAAAAAAAAAAAAAAAAAAAAAAAAAAIQAAABgAAAAUAAAARScAAIYMAAAANQAABCIAAAAAAAAmAAAACAAAAIGAAAAAAAAA"/>
+                <pr:smNativeData xmlns:pr="smNativeData" xmlns="smNativeData" val="SMDATA_15_r8odaRMAAAAlAAAAZAAAAA0AAAAAAAAAAAAAAAAAAAAAAAAAAAAAAAAAAAAAAAAAAAEAAABQAAAAAAAAAAAA4D8AAAAAAADgPwAAAAAAAOA/AAAAAAAA4D8AAAAAAADgPwAAAAAAAOA/AAAAAAAA4D8AAAAAAADgPwAAAAAAAOA/AAAAAAAA4D8CAAAAjAAAAAAAAAAAAAAA40oGDP///wgAAAAAAAAAAAAAAAAAAAAAAAAAAAAAAAAAAAAAZAAAAAEAAABAAAAAAAAAAAAAAAAAAAAAAAAAAAAAAAAAAAAAAAAAAAAAAAAAAAAAAAAAAAAAAAAAAAAAAAAAAAAAAAAAAAAAAAAAAAAAAAAAAAAAAAAAAAAAAAAAAAAAFAAAADwAAAAAAAAAAAAAAAAAAAkUAAAAAQAAABQAAAAUAAAAFAAAAAEAAAAAAAAAZAAAAGQAAAAAAAAAZAAAAGQAAAAVAAAAYAAAAAAAAAAAAAAADwAAACADAAAAAAAAAAAAAAEAAACgMgAAVgcAAKr4//8BAAAAf39/AAEAAABkAAAAAAAAABQAAABAHwAAAAAAACYAAAAAAAAAwOD//wAAAAAmAAAAZAAAABYAAABMAAAAAAAAAAAAAAAEAAAAAAAAAAEAAACZloMKAAAAACgAAAAoAAAAZAAAAGQAAAAAAAAAzMzMAAAAAABQAAAAUAAAAGQAAABkAAAAAAAAABcAAAAUAAAAAAAAAAAAAAD/fwAA/38AAAAAAAAJAAAABAAAAAAAAAAeAAAAaAAAAAAAAAAAAAAAAAAAAAAAAAAAAAAAECcAABAnAAAAAAAAAAAAAAAAAAAAAAAAAAAAAAAAAAAAAAAAAAAAABQAAAAAAAAAwMD/AAAAAABkAAAAMgAAAAAAAABkAAAAAAAAAH9/fwAKAAAAIgAAABgAAAAAAAAAAAAAAAAAAAAAAAAAAAAAAAAAAAAkAAAAJAAAAAAAAAAHAAAAAAAAAAAAAAAAAAAAAAAAAAAAAAAAAAAAf39/ACUAAABYAAAAAAAAAAAAAAAAAAAAAAAAAAAAAAAAAAAAAAAAAAAAAAAAAAAAAAAAAAAAAAA/AAAAAAAAAKCGAQAAAAAAAAAAAAAAAAAMAAAAAQAAAAAAAAAAAAAAAAAAAB8AAABUAAAA40oGBf///wEAAAAAAAAAAAAAAAAAAAAAAAAAAAAAAAAAAAAAAAAAAAAAAAJ/f38AmZaDA8zMzADAwP8Af39/AAAAAAAAAAAAAAAAAAAAAAAAAAAAIQAAABgAAAAUAAAARScAAIYMAAAANQAABCIAAAAAAAAmAAAACAAAAIGAAAAAAAAA"/>
               </a:ext>
             </a:extLst>
           </p:cNvSpPr>
@@ -11500,7 +11505,7 @@
             <a:spLocks noGrp="1" noChangeArrowheads="1"/>
             <a:extLst>
               <a:ext uri="smNativeData">
-                <pr:smNativeData xmlns:pr="smNativeData" xmlns="smNativeData" val="SMDATA_15_mcIdaRMAAAAlAAAAZAAAAA0AAAAAkAAAAAAAAAAAAAAAAAAAAAAAAAABAAAAAAAAAAEAAABQAAAAAAAAAAAA4D8AAAAAAADgPwAAAAAAAOA/AAAAAAAA4D8AAAAAAADgPwAAAAAAAOA/AAAAAAAA4D8AAAAAAADgPwAAAAAAAOA/AAAAAAAA4D8CAAAAjAAAAAAAAAAAAAAA40oGDP///wgAAAAAAAAAAAAAAAAAAAAAAAAAAAAAAAAAAAAAZAAAAAEAAABAAAAAAAAAAAAAAAAAAAAAAAAAAAAAAAAAAAAAAAAAAAAAAAAAAAAAAAAAAAAAAAAAAAAAAAAAAAAAAAAAAAAAAAAAAAAAAAAAAAAAAAAAAAAAAAAAAAAAFAAAADwAAAAAAAAAAAAAAAAAAAkUAAAAAQAAABQAAAAUAAAAFAAAAAEAAAAAAAAAZAAAAGQAAAAAAAAAZAAAAGQAAAAVAAAAYAAAAAAAAAAAAAAADwAAACADAAAAAAAAAAAAAAEAAACgMgAAVgcAAKr4//8BAAAAf39/AAEAAABkAAAAAAAAABQAAABAHwAAAAAAACYAAAAAAAAAwOD//wAAAAAmAAAAZAAAABYAAABMAAAAAAAAAAAAAAAEAAAAAAAAAAEAAACZloMKAAAAACgAAAAoAAAAZAAAAGQAAAAAAAAAzMzMAAAAAABQAAAAUAAAAGQAAABkAAAAAAAAABcAAAAUAAAAAAAAAAAAAAD/fwAA/38AAAAAAAAJAAAABAAAAAAAAAAeAAAAaAAAAAAAAAAAAAAAAAAAAAAAAAAAAAAAECcAABAnAAAAAAAAAAAAAAAAAAAAAAAAAAAAAAAAAAAAAAAAAAAAABQAAAAAAAAAwMD/AAAAAABkAAAAMgAAAAAAAABkAAAAAAAAAH9/fwAKAAAAIgAAABgAAAAAAAAAAAAAAAAAAAAAAAAAAAAAAAAAAAAkAAAAJAAAAAAAAAAHAAAAAAAAAAAAAAAAAAAAAAAAAAAAAAAAAAAAf39/ACUAAABYAAAAAAAAAAAAAAAAAAAAAAAAAAAAAAAAAAAAAAAAAAAAAAAAAAAAAAAAAAAAAAA/AAAAAAAAAKCGAQAAAAAAAAAAAAAAAAAMAAAAAQAAAAAAAAAAAAAAAAAAAB8AAABUAAAAAAAABQAAAAEAAAAAAAAAAAAAAAAAAAAAAAAAAAAAAAAAAAAAAAAAAAAAAAJ/f38AmZaDA8zMzADAwP8Af39/AAAAAAAAAAAAAAAAAAAAAAAAAAAAIQAAABgAAAAUAAAANiUAAD4jAACCNgAA8yUAABAAAAAmAAAACAAAAAAAAAAAAAAA"/>
+                <pr:smNativeData xmlns:pr="smNativeData" xmlns="smNativeData" val="SMDATA_15_r8odaRMAAAAlAAAAZAAAAA0AAAAAkAAAAAAAAAAAAAAAAAAAAAAAAAABAAAAAAAAAAEAAABQAAAAAAAAAAAA4D8AAAAAAADgPwAAAAAAAOA/AAAAAAAA4D8AAAAAAADgPwAAAAAAAOA/AAAAAAAA4D8AAAAAAADgPwAAAAAAAOA/AAAAAAAA4D8CAAAAjAAAAAAAAAAAAAAA40oGDP///wgAAAAAAAAAAAAAAAAAAAAAAAAAAAAAAAAAAAAAZAAAAAEAAABAAAAAAAAAAAAAAAAAAAAAAAAAAAAAAAAAAAAAAAAAAAAAAAAAAAAAAAAAAAAAAAAAAAAAAAAAAAAAAAAAAAAAAAAAAAAAAAAAAAAAAAAAAAAAAAAAAAAAFAAAADwAAAAAAAAAAAAAAAAAAAkUAAAAAQAAABQAAAAUAAAAFAAAAAEAAAAAAAAAZAAAAGQAAAAAAAAAZAAAAGQAAAAVAAAAYAAAAAAAAAAAAAAADwAAACADAAAAAAAAAAAAAAEAAACgMgAAVgcAAKr4//8BAAAAf39/AAEAAABkAAAAAAAAABQAAABAHwAAAAAAACYAAAAAAAAAwOD//wAAAAAmAAAAZAAAABYAAABMAAAAAAAAAAAAAAAEAAAAAAAAAAEAAACZloMKAAAAACgAAAAoAAAAZAAAAGQAAAAAAAAAzMzMAAAAAABQAAAAUAAAAGQAAABkAAAAAAAAABcAAAAUAAAAAAAAAAAAAAD/fwAA/38AAAAAAAAJAAAABAAAAAAAAAAeAAAAaAAAAAAAAAAAAAAAAAAAAAAAAAAAAAAAECcAABAnAAAAAAAAAAAAAAAAAAAAAAAAAAAAAAAAAAAAAAAAAAAAABQAAAAAAAAAwMD/AAAAAABkAAAAMgAAAAAAAABkAAAAAAAAAH9/fwAKAAAAIgAAABgAAAAAAAAAAAAAAAAAAAAAAAAAAAAAAAAAAAAkAAAAJAAAAAAAAAAHAAAAAAAAAAAAAAAAAAAAAAAAAAAAAAAAAAAAf39/ACUAAABYAAAAAAAAAAAAAAAAAAAAAAAAAAAAAAAAAAAAAAAAAAAAAAAAAAAAAAAAAAAAAAA/AAAAAAAAAKCGAQAAAAAAAAAAAAAAAAAMAAAAAQAAAAAAAAAAAAAAAAAAAB8AAABUAAAAAAAABQAAAAEAAAAAAAAAAAAAAAAAAAAAAAAAAAAAAAAAAAAAAAAAAAAAAAJ/f38AmZaDA8zMzADAwP8Af39/AAAAAAAAAAAAAAAAAAAAAAAAAAAAIQAAABgAAAAUAAAANiUAAD4jAACCNgAA8yUAABAAAAAmAAAACAAAAAAAAAAAAAAA"/>
               </a:ext>
             </a:extLst>
           </p:cNvSpPr>
@@ -11531,7 +11536,7 @@
             <a:picLocks noChangeAspect="1"/>
             <a:extLst>
               <a:ext uri="smNativeData">
-                <pr:smNativeData xmlns:pr="smNativeData" xmlns="smNativeData" val="SMDATA_17_mcIdaRMAAAAlAAAAEQAAAC0AAAAAkAAAAEgAAACQAAAASAAAAAAAAAAAAAAAAAAAAAEAAABQAAAAAAAAAAAA4D8AAAAAAADgPwAAAAAAAOA/AAAAAAAA4D8AAAAAAADgPwAAAAAAAOA/AAAAAAAA4D8AAAAAAADgPwAAAAAAAOA/AAAAAAAA4D8CAAAAjAAAAAAAAAAAAAAA40oGDP///wgAAAAAAAAAAAAAAAAAAAAAAAAAAAAAAAAAAAAAZAAAAAEAAABAAAAAAAAAAAAAAAAAAAAAAAAAAAAAAAAAAAAAAAAAAAAAAAAAAAAAAAAAAAAAAAAAAAAAAAAAAAAAAAAAAAAAAAAAAAAAAAAAAAAAAAAAAAAAAAAAAAAAFAAAADwAAAAAAAAAAAAAAAAAAAkUAAAAAQAAABQAAAAUAAAAFAAAAAEAAAAAAAAAZAAAAGQAAAAAAAAAZAAAAGQAAAAVAAAAYAAAAAAAAAAAAAAADwAAACADAAAAAAAAAAAAAAEAAACgMgAAVgcAAKr4//8BAAAAf39/AAEAAABkAAAAAAAAABQAAABAHwAAAAAAACYAAAAAAAAAwOD//wAAAAAmAAAAZAAAABYAAABMAAAAAAAAAAAAAAAEAAAAAAAAAAEAAACZloMKAAAAACgAAAAoAAAAZAAAAGQAAAAAAAAAzMzMAAAAAABQAAAAUAAAAGQAAABkAAAAAAAAAAcAAAA4AAAAAAAAAAAAAAAAAAAA////AAAAAAAAAAAAAAAAAAAAAAAAAAAAAAAAAAAAAABkAAAAZAAAAAAAAAAjAAAABAAAAGQAAAAXAAAAFAAAAAAAAAAAAAAA/38AAP9/AAAAAAAACQAAAAQAAAA4fq8nHgAAAGgAAAAAAAAAAAAAAAAAAAAAAAAAAAAAABAnAAAQJwAAAAAAAAAAAAAAAAAAAAAAAAAAAAAAAAAAAAAAAAAAAAAUAAAAAAAAAMDA/wAAAAAAZAAAADIAAAAAAAAAZAAAAAAAAAB/f38ACgAAACIAAAAYAAAAAAAAAAAAAAAAAAAAAAAAAAAAAAAAAAAAJAAAACQAAAAAAAAABwAAAAAAAAAAAAAAAAAAAAAAAAAAAAAAAAAAAH9/fwAlAAAAWAAAAAAAAAAAAAAAAAAAAAAAAAAAAAAAAAAAAAAAAAAAAAAAAAAAAAAAAAAAAAAAPwAAAAAAAACghgEAAAAAAAAAAAAAAAAADAAAAAEAAAAAAAAAAAAAAAAAAAAfAAAAVAAAAONKBgX///8BAAAAAAAAAAAAAAAAAAAAAAAAAAAAAAAAAAAAAAAAAAAAAAACf39/AJmWgwPMzMwAwMD/AH9/fwAAAAAAAAAAAAAAAAD///8AAAAAACEAAAAYAAAAFAAAAFwsAABuBwAAETIAAIULAAAQAAAAJgAAAAgAAAD//////////w=="/>
+                <pr:smNativeData xmlns:pr="smNativeData" xmlns="smNativeData" val="SMDATA_17_r8odaRMAAAAlAAAAEQAAAC0AAAAAkAAAAEgAAACQAAAASAAAAAAAAAAAAAAAAAAAAAEAAABQAAAAAAAAAAAA4D8AAAAAAADgPwAAAAAAAOA/AAAAAAAA4D8AAAAAAADgPwAAAAAAAOA/AAAAAAAA4D8AAAAAAADgPwAAAAAAAOA/AAAAAAAA4D8CAAAAjAAAAAAAAAAAAAAA40oGDP///wgAAAAAAAAAAAAAAAAAAAAAAAAAAAAAAAAAAAAAZAAAAAEAAABAAAAAAAAAAAAAAAAAAAAAAAAAAAAAAAAAAAAAAAAAAAAAAAAAAAAAAAAAAAAAAAAAAAAAAAAAAAAAAAAAAAAAAAAAAAAAAAAAAAAAAAAAAAAAAAAAAAAAFAAAADwAAAAAAAAAAAAAAAAAAAkUAAAAAQAAABQAAAAUAAAAFAAAAAEAAAAAAAAAZAAAAGQAAAAAAAAAZAAAAGQAAAAVAAAAYAAAAAAAAAAAAAAADwAAACADAAAAAAAAAAAAAAEAAACgMgAAVgcAAKr4//8BAAAAf39/AAEAAABkAAAAAAAAABQAAABAHwAAAAAAACYAAAAAAAAAwOD//wAAAAAmAAAAZAAAABYAAABMAAAAAAAAAAAAAAAEAAAAAAAAAAEAAACZloMKAAAAACgAAAAoAAAAZAAAAGQAAAAAAAAAzMzMAAAAAABQAAAAUAAAAGQAAABkAAAAAAAAAAcAAAA4AAAAAAAAAAAAAAAAAAAA////AAAAAAAAAAAAAAAAAAAAAAAAAAAAAAAAAAAAAABkAAAAZAAAAAAAAAAjAAAABAAAAGQAAAAXAAAAFAAAAAAAAAAAAAAA/38AAP9/AAAAAAAACQAAAAQAAAA4fq8nHgAAAGgAAAAAAAAAAAAAAAAAAAAAAAAAAAAAABAnAAAQJwAAAAAAAAAAAAAAAAAAAAAAAAAAAAAAAAAAAAAAAAAAAAAUAAAAAAAAAMDA/wAAAAAAZAAAADIAAAAAAAAAZAAAAAAAAAB/f38ACgAAACIAAAAYAAAAAAAAAAAAAAAAAAAAAAAAAAAAAAAAAAAAJAAAACQAAAAAAAAABwAAAAAAAAAAAAAAAAAAAAAAAAAAAAAAAAAAAH9/fwAlAAAAWAAAAAAAAAAAAAAAAAAAAAAAAAAAAAAAAAAAAAAAAAAAAAAAAAAAAAAAAAAAAAAAPwAAAAAAAACghgEAAAAAAAAAAAAAAAAADAAAAAEAAAAAAAAAAAAAAAAAAAAfAAAAVAAAAONKBgX///8BAAAAAAAAAAAAAAAAAAAAAAAAAAAAAAAAAAAAAAAAAAAAAAACf39/AJmWgwPMzMwAwMD/AH9/fwAAAAAAAAAAAAAAAAD///8AAAAAACEAAAAYAAAAFAAAAFwsAABuBwAAETIAAIULAAAQAAAAJgAAAAgAAAD//////////w=="/>
               </a:ext>
             </a:extLst>
           </p:cNvPicPr>
@@ -11564,7 +11569,7 @@
           <p:cNvSpPr>
             <a:extLst>
               <a:ext uri="smNativeData">
-                <pr:smNativeData xmlns:pr="smNativeData" xmlns="smNativeData" val="SMDATA_15_mcIdaRMAAAAlAAAA2wAAAA0AAAAAbAAAADYAAABsAAAANgAAAAAAAAABAAAAAAAAAAEAAABQAAAA6SCH3cGE7D8AAAAAAADgPwAAAAAAAOA/AAAAAAAA4D8AAAAAAADgPwAAAAAAAOA/AAAAAAAA4D8AAAAAAADgPwAAAAAAAOA/AAAAAAAA4D8CAAAAjAAAAAEAAAAAAAAAGKtLAP///wgAAAAAAAAAAAAAAAAAAAAAAAAAAAAAAAAAAAAAZAAAAAEAAABAAAAAAAAAAAAAAAAAAAAAAAAAAAAAAAAAAAAAAAAAAAAAAAAAAAAAAAAAAAAAAAAAAAAAAAAAAAAAAAAAAAAAAAAAAAAAAAAAAAAAAAAAAAAAAAAAAAAAFAAAADwAAAABAAAAAAAAABirSwAoAAAAAQAAABQAAAAUAAAAFAAAAAEAAAAAAAAAZAAAAGQAAAAAAAAAZAAAAGQAAAAVAAAAYAAAAAAAAAAAAAAADwAAACADAAAAAAAAAAAAAAEAAACgMgAAVgcAAKr4//8BAAAAf39/AAEAAABkAAAAAAAAABQAAABAHwAAAAAAACYAAAAAAAAAwOD//wAAAAAmAAAAZAAAABYAAABMAAAAAAAAAAAAAAAEAAAAAAAAAAEAAACZloMKAAAAACgAAAAoAAAAZAAAAGQAAAAAAAAAzMzMAAAAAABQAAAAUAAAAGQAAABkAAAAAAAAABcAAAAUAAAAAAAAAAAAAAD/fwAA/38AAAAAAAAJAAAABAAAAAAAAAAeAAAAaAAAAAAAAAAAAAAAAAAAAAAAAAAAAAAAECcAABAnAAAAAAAAAAAAAAAAAAAAAAAAAAAAAAAAAAAAAAAAAAAAABQAAAAAAAAAwMD/AAAAAABkAAAAMgAAAAAAAABkAAAAAAAAAH9/fwAKAAAAIgAAABgAAAAAAAAAAAAAAAAAAAAAAAAAAAAAAAAAAAAkAAAAJAAAAAAAAAAHAAAAAAAAAAAAAAAAAAAAAAAAAAAAAAAAAAAAf39/ACUAAABYAAAAAAAAAAAAAAAAAAAAAAAAAAAAAAAAAAAAAAAAAAAAAAAAAAAAAAAAAAAAAAA/AAAAAAAAAKCGAQAAAAAAAAAAAAAAAAAMAAAAAQAAAAAAAAAAAAAAAAAAAB8AAABUAAAAGKtLAP///wEAAAAAAAAAAAAAAAAAAAAAAAAAAAAAAAAAAAAAAAAAABirSwB/f38AmZaDA8zMzADAwP8Af39/AAAAAAAAAAAAAAAAAAAAAAAAAAAAIQAAABgAAAAUAAAA5x4AAF4IAADdKgAA+AoAABAAAAAmAAAACAAAAP//////////"/>
+                <pr:smNativeData xmlns:pr="smNativeData" xmlns="smNativeData" val="SMDATA_15_r8odaRMAAAAlAAAA2wAAAA0AAAAAbAAAADYAAABsAAAANgAAAAAAAAABAAAAAAAAAAEAAABQAAAA6SCH3cGE7D8AAAAAAADgPwAAAAAAAOA/AAAAAAAA4D8AAAAAAADgPwAAAAAAAOA/AAAAAAAA4D8AAAAAAADgPwAAAAAAAOA/AAAAAAAA4D8CAAAAjAAAAAEAAAAAAAAAGKtLAP///wgAAAAAAAAAAAAAAAAAAAAAAAAAAAAAAAAAAAAAZAAAAAEAAABAAAAAAAAAAAAAAAAAAAAAAAAAAAAAAAAAAAAAAAAAAAAAAAAAAAAAAAAAAAAAAAAAAAAAAAAAAAAAAAAAAAAAAAAAAAAAAAAAAAAAAAAAAAAAAAAAAAAAFAAAADwAAAABAAAAAAAAABirSwAoAAAAAQAAABQAAAAUAAAAFAAAAAEAAAAAAAAAZAAAAGQAAAAAAAAAZAAAAGQAAAAVAAAAYAAAAAAAAAAAAAAADwAAACADAAAAAAAAAAAAAAEAAACgMgAAVgcAAKr4//8BAAAAf39/AAEAAABkAAAAAAAAABQAAABAHwAAAAAAACYAAAAAAAAAwOD//wAAAAAmAAAAZAAAABYAAABMAAAAAAAAAAAAAAAEAAAAAAAAAAEAAACZloMKAAAAACgAAAAoAAAAZAAAAGQAAAAAAAAAzMzMAAAAAABQAAAAUAAAAGQAAABkAAAAAAAAABcAAAAUAAAAAAAAAAAAAAD/fwAA/38AAAAAAAAJAAAABAAAAAAAAAAeAAAAaAAAAAAAAAAAAAAAAAAAAAAAAAAAAAAAECcAABAnAAAAAAAAAAAAAAAAAAAAAAAAAAAAAAAAAAAAAAAAAAAAABQAAAAAAAAAwMD/AAAAAABkAAAAMgAAAAAAAABkAAAAAAAAAH9/fwAKAAAAIgAAABgAAAAAAAAAAAAAAAAAAAAAAAAAAAAAAAAAAAAkAAAAJAAAAAAAAAAHAAAAAAAAAAAAAAAAAAAAAAAAAAAAAAAAAAAAf39/ACUAAABYAAAAAAAAAAAAAAAAAAAAAAAAAAAAAAAAAAAAAAAAAAAAAAAAAAAAAAAAAAAAAAA/AAAAAAAAAKCGAQAAAAAAAAAAAAAAAAAMAAAAAQAAAAAAAAAAAAAAAAAAAB8AAABUAAAAGKtLAP///wEAAAAAAAAAAAAAAAAAAAAAAAAAAAAAAAAAAAAAAAAAABirSwB/f38AmZaDA8zMzADAwP8Af39/AAAAAAAAAAAAAAAAAAAAAAAAAAAAIQAAABgAAAAUAAAA5x4AAF4IAADdKgAA+AoAABAAAAAmAAAACAAAAP//////////"/>
               </a:ext>
             </a:extLst>
           </p:cNvSpPr>
@@ -11629,7 +11634,7 @@
           <p:cNvSpPr>
             <a:extLst>
               <a:ext uri="smNativeData">
-                <pr:smNativeData xmlns:pr="smNativeData" xmlns="smNativeData" val="SMDATA_15_mcIdaRMAAAAlAAAA2wAAAA0AAAAAbAAAADYAAABsAAAANgAAAAAAAAABAAAAAAAAAAEAAABQAAAAzEiG683T7D8AAAAAAADgPwAAAAAAAOA/AAAAAAAA4D8AAAAAAADgPwAAAAAAAOA/AAAAAAAA4D8AAAAAAADgPwAAAAAAAOA/AAAAAAAA4D8CAAAAjAAAAAEAAAAAAAAAJiJiAP///wgAAAAAAAAAAAAAAAAAAAAAAAAAAAAAAAAAAAAAZAAAAAEAAABAAAAAAAAAAAAAAAAAAAAAAAAAAAAAAAAAAAAAAAAAAAAAAAAAAAAAAAAAAAAAAAAAAAAAAAAAAAAAAAAAAAAAAAAAAAAAAAAAAAAAAAAAAAAAAAAAAAAAFAAAADwAAAABAAAAAAAAAHAwoAAoAAAAAQAAABQAAAAUAAAAFAAAAAEAAAAAAAAAZAAAAGQAAAAAAAAAZAAAAGQAAAAVAAAAYAAAAAAAAAAAAAAADwAAACADAAAAAAAAAAAAAAEAAACgMgAAVgcAAKr4//8BAAAAf39/AAEAAABkAAAAAAAAABQAAABAHwAAAAAAACYAAAAAAAAAwOD//wAAAAAmAAAAZAAAABYAAABMAAAAAAAAAAAAAAAEAAAAAAAAAAEAAACZloMKAAAAACgAAAAoAAAAZAAAAGQAAAAAAAAAzMzMAAAAAABQAAAAUAAAAGQAAABkAAAAAAAAABcAAAAUAAAAAAAAAAAAAAD/fwAA/38AAAAAAAAJAAAABAAAAAAAAAAeAAAAaAAAAAAAAAAAAAAAAAAAAAAAAAAAAAAAECcAABAnAAAAAAAAAAAAAAAAAAAAAAAAAAAAAAAAAAAAAAAAAAAAABQAAAAAAAAAwMD/AAAAAABkAAAAMgAAAAAAAABkAAAAAAAAAH9/fwAKAAAAIgAAABgAAAAAAAAAAAAAAAAAAAAAAAAAAAAAAAAAAAAkAAAAJAAAAAAAAAAHAAAAAAAAAAAAAAAAAAAAAAAAAAAAAAAAAAAAf39/ACUAAABYAAAAAAAAAAAAAAAAAAAAAAAAAAAAAAAAAAAAAAAAAAAAAAAAAAAAAAAAAAAAAAA/AAAAAAAAAKCGAQAAAAAAAAAAAAAAAAAMAAAAAQAAAAAAAAAAAAAAAAAAAB8AAABUAAAAJiJiAP///wEAAAAAAAAAAAAAAAAAAAAAAAAAAAAAAAAAAAAAAAAAAHAwoAB/f38AmZaDA8zMzADAwP8Af39/AAAAAAAAAAAAAAAAAAAAAAAAAAAAIQAAABgAAAAUAAAAwRAAAFAIAAAmHgAA+AoAABAAAAAmAAAACAAAAP//////////"/>
+                <pr:smNativeData xmlns:pr="smNativeData" xmlns="smNativeData" val="SMDATA_15_r8odaRMAAAAlAAAA2wAAAA0AAAAAbAAAADYAAABsAAAANgAAAAAAAAABAAAAAAAAAAEAAABQAAAAzEiG683T7D8AAAAAAADgPwAAAAAAAOA/AAAAAAAA4D8AAAAAAADgPwAAAAAAAOA/AAAAAAAA4D8AAAAAAADgPwAAAAAAAOA/AAAAAAAA4D8CAAAAjAAAAAEAAAAAAAAAJiJiAP///wgAAAAAAAAAAAAAAAAAAAAAAAAAAAAAAAAAAAAAZAAAAAEAAABAAAAAAAAAAAAAAAAAAAAAAAAAAAAAAAAAAAAAAAAAAAAAAAAAAAAAAAAAAAAAAAAAAAAAAAAAAAAAAAAAAAAAAAAAAAAAAAAAAAAAAAAAAAAAAAAAAAAAFAAAADwAAAABAAAAAAAAAHAwoAAoAAAAAQAAABQAAAAUAAAAFAAAAAEAAAAAAAAAZAAAAGQAAAAAAAAAZAAAAGQAAAAVAAAAYAAAAAAAAAAAAAAADwAAACADAAAAAAAAAAAAAAEAAACgMgAAVgcAAKr4//8BAAAAf39/AAEAAABkAAAAAAAAABQAAABAHwAAAAAAACYAAAAAAAAAwOD//wAAAAAmAAAAZAAAABYAAABMAAAAAAAAAAAAAAAEAAAAAAAAAAEAAACZloMKAAAAACgAAAAoAAAAZAAAAGQAAAAAAAAAzMzMAAAAAABQAAAAUAAAAGQAAABkAAAAAAAAABcAAAAUAAAAAAAAAAAAAAD/fwAA/38AAAAAAAAJAAAABAAAAAAAAAAeAAAAaAAAAAAAAAAAAAAAAAAAAAAAAAAAAAAAECcAABAnAAAAAAAAAAAAAAAAAAAAAAAAAAAAAAAAAAAAAAAAAAAAABQAAAAAAAAAwMD/AAAAAABkAAAAMgAAAAAAAABkAAAAAAAAAH9/fwAKAAAAIgAAABgAAAAAAAAAAAAAAAAAAAAAAAAAAAAAAAAAAAAkAAAAJAAAAAAAAAAHAAAAAAAAAAAAAAAAAAAAAAAAAAAAAAAAAAAAf39/ACUAAABYAAAAAAAAAAAAAAAAAAAAAAAAAAAAAAAAAAAAAAAAAAAAAAAAAAAAAAAAAAAAAAA/AAAAAAAAAKCGAQAAAAAAAAAAAAAAAAAMAAAAAQAAAAAAAAAAAAAAAAAAAB8AAABUAAAAJiJiAP///wEAAAAAAAAAAAAAAAAAAAAAAAAAAAAAAAAAAAAAAAAAAHAwoAB/f38AmZaDA8zMzADAwP8Af39/AAAAAAAAAAAAAAAAAAAAAAAAAAAAIQAAABgAAAAUAAAAwRAAAFAIAAAmHgAA+AoAABAAAAAmAAAACAAAAP//////////"/>
               </a:ext>
             </a:extLst>
           </p:cNvSpPr>
@@ -11687,7 +11692,7 @@
             <a:picLocks noChangeAspect="1"/>
             <a:extLst>
               <a:ext uri="smNativeData">
-                <pr:smNativeData xmlns:pr="smNativeData" xmlns="smNativeData" val="SMDATA_17_mcIdaRMAAAAlAAAAEQAAAC0AAAAAkAAAAEgAAACQAAAASAAAAAAAAAAAAAAAAAAAAAEAAABQAAAAAAAAAAAA4D8AAAAAAADgPwAAAAAAAOA/AAAAAAAA4D8AAAAAAADgPwAAAAAAAOA/AAAAAAAA4D8AAAAAAADgPwAAAAAAAOA/AAAAAAAA4D8CAAAAjAAAAAAAAAAAAAAA40oGDP///wgAAAAAAAAAAAAAAAAAAAAAAAAAAAAAAAAAAAAAZAAAAAEAAABAAAAAAAAAAAAAAAAAAAAAAAAAAAAAAAAAAAAAAAAAAAAAAAAAAAAAAAAAAAAAAAAAAAAAAAAAAAAAAAAAAAAAAAAAAAAAAAAAAAAAAAAAAAAAAAAAAAAAFAAAADwAAAAAAAAAAAAAAAAAAAkUAAAAAQAAABQAAAAUAAAAFAAAAAEAAAAAAAAAZAAAAGQAAAAAAAAAZAAAAGQAAAAVAAAAYAAAAAAAAAAAAAAADwAAACADAAAAAAAAAAAAAAEAAACgMgAAVgcAAKr4//8BAAAAf39/AAEAAABkAAAAAAAAABQAAABAHwAAAAAAACYAAAAAAAAAwOD//wAAAAAmAAAAZAAAABYAAABMAAAAAAAAAAAAAAAEAAAAAAAAAAEAAACZloMKAAAAACgAAAAoAAAAZAAAAGQAAAAAAAAAzMzMAAAAAABQAAAAUAAAAGQAAABkAAAAAAAAAAcAAAA4AAAAAAAAAAAAAAAAAAAA////AAAAAAAAAAAAAAAAAAAAAAAAAAAAAAAAAAAAAABkAAAAZAAAAAAAAAAjAAAABAAAAGQAAAAXAAAAFAAAAAAAAAAAAAAA/38AAP9/AAAAAAAACQAAAAQAAAAAAAAAHgAAAGgAAAAAAAAAAAAAAAAAAAAAAAAAAAAAABAnAAAQJwAAAAAAAAAAAAAAAAAAAAAAAAAAAAAAAAAAAAAAAAAAAAAUAAAAAAAAAMDA/wAAAAAAZAAAADIAAAAAAAAAZAAAAAAAAAB/f38ACgAAACIAAAAYAAAAAAAAAAAAAAAAAAAAAAAAAAAAAAAAAAAAJAAAACQAAAAAAAAABwAAAAAAAAAAAAAAAAAAAAAAAAAAAAAAAAAAAH9/fwAlAAAAWAAAAAAAAAAAAAAAAAAAAAAAAAAAAAAAAAAAAAAAAAAAAAAAAAAAAAAAAAAAAAAAPwAAAAAAAACghgEAAAAAAAAAAAAAAAAADAAAAAEAAAAAAAAAAAAAAAAAAAAfAAAAVAAAAONKBgX///8BAAAAAAAAAAAAAAAAAAAAAAAAAAAAAAAAAAAAAAAAAAAAAAACf39/AJmWgwPMzMwAwMD/AH9/fwAAAAAAAAAAAAAAAAD///8AAAAAACEAAAAYAAAAFAAAAG8IAABTBwAAQg8AACkLAAAQAAAAJgAAAAgAAAD//////////w=="/>
+                <pr:smNativeData xmlns:pr="smNativeData" xmlns="smNativeData" val="SMDATA_17_r8odaRMAAAAlAAAAEQAAAC0AAAAAkAAAAEgAAACQAAAASAAAAAAAAAAAAAAAAAAAAAEAAABQAAAAAAAAAAAA4D8AAAAAAADgPwAAAAAAAOA/AAAAAAAA4D8AAAAAAADgPwAAAAAAAOA/AAAAAAAA4D8AAAAAAADgPwAAAAAAAOA/AAAAAAAA4D8CAAAAjAAAAAAAAAAAAAAA40oGDP///wgAAAAAAAAAAAAAAAAAAAAAAAAAAAAAAAAAAAAAZAAAAAEAAABAAAAAAAAAAAAAAAAAAAAAAAAAAAAAAAAAAAAAAAAAAAAAAAAAAAAAAAAAAAAAAAAAAAAAAAAAAAAAAAAAAAAAAAAAAAAAAAAAAAAAAAAAAAAAAAAAAAAAFAAAADwAAAAAAAAAAAAAAAAAAAkUAAAAAQAAABQAAAAUAAAAFAAAAAEAAAAAAAAAZAAAAGQAAAAAAAAAZAAAAGQAAAAVAAAAYAAAAAAAAAAAAAAADwAAACADAAAAAAAAAAAAAAEAAACgMgAAVgcAAKr4//8BAAAAf39/AAEAAABkAAAAAAAAABQAAABAHwAAAAAAACYAAAAAAAAAwOD//wAAAAAmAAAAZAAAABYAAABMAAAAAAAAAAAAAAAEAAAAAAAAAAEAAACZloMKAAAAACgAAAAoAAAAZAAAAGQAAAAAAAAAzMzMAAAAAABQAAAAUAAAAGQAAABkAAAAAAAAAAcAAAA4AAAAAAAAAAAAAAAAAAAA////AAAAAAAAAAAAAAAAAAAAAAAAAAAAAAAAAAAAAABkAAAAZAAAAAAAAAAjAAAABAAAAGQAAAAXAAAAFAAAAAAAAAAAAAAA/38AAP9/AAAAAAAACQAAAAQAAAAAAAAAHgAAAGgAAAAAAAAAAAAAAAAAAAAAAAAAAAAAABAnAAAQJwAAAAAAAAAAAAAAAAAAAAAAAAAAAAAAAAAAAAAAAAAAAAAUAAAAAAAAAMDA/wAAAAAAZAAAADIAAAAAAAAAZAAAAAAAAAB/f38ACgAAACIAAAAYAAAAAAAAAAAAAAAAAAAAAAAAAAAAAAAAAAAAJAAAACQAAAAAAAAABwAAAAAAAAAAAAAAAAAAAAAAAAAAAAAAAAAAAH9/fwAlAAAAWAAAAAAAAAAAAAAAAAAAAAAAAAAAAAAAAAAAAAAAAAAAAAAAAAAAAAAAAAAAAAAAPwAAAAAAAACghgEAAAAAAAAAAAAAAAAADAAAAAEAAAAAAAAAAAAAAAAAAAAfAAAAVAAAAONKBgX///8BAAAAAAAAAAAAAAAAAAAAAAAAAAAAAAAAAAAAAAAAAAAAAAACf39/AJmWgwPMzMwAwMD/AH9/fwAAAAAAAAAAAAAAAAD///8AAAAAACEAAAAYAAAAFAAAAG8IAABTBwAAQg8AACkLAAAQAAAAJgAAAAgAAAD//////////w=="/>
               </a:ext>
             </a:extLst>
           </p:cNvPicPr>
@@ -11720,7 +11725,7 @@
           <p:cNvSpPr txBox="1">
             <a:extLst>
               <a:ext uri="smNativeData">
-                <pr:smNativeData xmlns:pr="smNativeData" xmlns="smNativeData" val="SMDATA_15_mcIdaRMAAAAlAAAAEgAAAE8BAAAAkAAAAEgAAACQAAAASAAAAAAAAAAAAAAAAAAAAAEAAABQAAAAAAAAAAAA4D8AAAAAAADgPwAAAAAAAOA/AAAAAAAA4D8AAAAAAADgPwAAAAAAAOA/AAAAAAAA4D8AAAAAAADgPwAAAAAAAOA/AAAAAAAA4D8CAAAAjAAAAAAAAAAAAAAAPD0+C////wgAAAAAAAAAAAAAAAAAAAAAAAAAAAAAAAAAAAAAZAAAAAEAAABAAAAAAAAAAAAAAAAAAAAAAAAAAAAAAAAAAAAAAAAAAAAAAAAAAAAAAAAAAAAAAAAAAAAAAAAAAAAAAAAAAAAAAAAAAAAAAAAAAAAAAAAAAAAAAAAAAAAAFAAAADwAAAAAAAAAAAAAAAAAAAAUAAAAAQAAABQAAAAUAAAAFAAAAAEAAAAAAAAAZAAAAGQAAAAAAAAAZAAAAGQAAAAVAAAAYAAAAAAAAAAAAAAADwAAACADAAAAAAAAAAAAAAEAAACgMgAAVgcAAKr4//8BAAAAf39/AAEAAABkAAAAAAAAABQAAABAHwAAAAAAACYAAAAAAAAAwOD//wAAAAAmAAAAZAAAABYAAABMAAAAAAAAAAAAAAABAAAAAAAAAAEAAACZloMKUAAAAAAAAAA8AAAAZAAAAGQAAAAAAAAAzMzMAAAAAABQAAAAUAAAAGQAAABkAAAAAAAAABcAAAAUAAAAAAAAANwIAAD/fwAA/38AAAAAAAAJAAAABAAAADw9Pv8eAAAAaAAAAAAAAAAAAAAAAAAAAAAAAAAAAAAAECcAABAnAAAAAAAAAAAAAAAAAAAAAAAAAAAAAAAAAAAAAAAAAAAAAAAAAAAAAAAAwMD/AAAAAABkAAAAMgAAAAAAAABkAAAAAAAAAH9/fwAKAAAAIgAAABgAAAAAAAAAAAAAAAAAAAAAAAAAAAAAAAAAAAAkAAAAJAAAAAAAAAAHAAAAAAAAAAAAAAAAAAAAAAAAAAAAAAAAAAAAf39/ACUAAABYAAAAAAAAAAAAAAAAAAAAAAAAAAAAAAAAAAAAAAAAAAAAAAAAAAAAAAAAAAAAAAA/AAAAAAAAAKCGAQAAAAAAAAAAAAAAAAAMAAAAAQAAAAAAAAAAAAAAAAAAAB8AAABUAAAAPD0+BP///wEAAAAAAAAAAAAAAAAAAAAAAAAAAAAAAAAAAAAAAAAAAAAAAAB/f38AmZaDA8zMzADAwP8Af39/AAAAAAAAAAAAAAAAAAAAAAAAAAAAIQAAABgAAAAUAAAAcAIAAKwnAAB8LAAAXCkAAAAgAAAmAAAACAAAAP//////////"/>
+                <pr:smNativeData xmlns:pr="smNativeData" xmlns="smNativeData" val="SMDATA_15_r8odaRMAAAAlAAAAEgAAAE8BAAAAkAAAAEgAAACQAAAASAAAAAAAAAAAAAAAAAAAAAEAAABQAAAAAAAAAAAA4D8AAAAAAADgPwAAAAAAAOA/AAAAAAAA4D8AAAAAAADgPwAAAAAAAOA/AAAAAAAA4D8AAAAAAADgPwAAAAAAAOA/AAAAAAAA4D8CAAAAjAAAAAAAAAAAAAAAPD0+C////wgAAAAAAAAAAAAAAAAAAAAAAAAAAAAAAAAAAAAAZAAAAAEAAABAAAAAAAAAAAAAAAAAAAAAAAAAAAAAAAAAAAAAAAAAAAAAAAAAAAAAAAAAAAAAAAAAAAAAAAAAAAAAAAAAAAAAAAAAAAAAAAAAAAAAAAAAAAAAAAAAAAAAFAAAADwAAAAAAAAAAAAAAAAAAAAUAAAAAQAAABQAAAAUAAAAFAAAAAEAAAAAAAAAZAAAAGQAAAAAAAAAZAAAAGQAAAAVAAAAYAAAAAAAAAAAAAAADwAAACADAAAAAAAAAAAAAAEAAACgMgAAVgcAAKr4//8BAAAAf39/AAEAAABkAAAAAAAAABQAAABAHwAAAAAAACYAAAAAAAAAwOD//wAAAAAmAAAAZAAAABYAAABMAAAAAAAAAAAAAAABAAAAAAAAAAEAAACZloMKUAAAAAAAAAA8AAAAZAAAAGQAAAAAAAAAzMzMAAAAAABQAAAAUAAAAGQAAABkAAAAAAAAABcAAAAUAAAAAAAAANwIAAD/fwAA/38AAAAAAAAJAAAABAAAADw9Pv8eAAAAaAAAAAAAAAAAAAAAAAAAAAAAAAAAAAAAECcAABAnAAAAAAAAAAAAAAAAAAAAAAAAAAAAAAAAAAAAAAAAAAAAAAAAAAAAAAAAwMD/AAAAAABkAAAAMgAAAAAAAABkAAAAAAAAAH9/fwAKAAAAIgAAABgAAAAAAAAAAAAAAAAAAAAAAAAAAAAAAAAAAAAkAAAAJAAAAAAAAAAHAAAAAAAAAAAAAAAAAAAAAAAAAAAAAAAAAAAAf39/ACUAAABYAAAAAAAAAAAAAAAAAAAAAAAAAAAAAAAAAAAAAAAAAAAAAAAAAAAAAAAAAAAAAAA/AAAAAAAAAKCGAQAAAAAAAAAAAAAAAAAMAAAAAQAAAAAAAAAAAAAAAAAAAB8AAABUAAAAPD0+BP///wEAAAAAAAAAAAAAAAAAAAAAAAAAAAAAAAAAAAAAAAAAAAAAAAB/f38AmZaDA8zMzADAwP8Af39/AAAAAAAAAAAAAAAAAAAAAAAAAAAAIQAAABgAAAAUAAAAcAIAAKwnAAB8LAAAXCkAAAAgAAAmAAAACAAAAP//////////"/>
               </a:ext>
             </a:extLst>
           </p:cNvSpPr>
@@ -11792,7 +11797,7 @@
             <a:spLocks noGrp="1" noChangeArrowheads="1"/>
             <a:extLst>
               <a:ext uri="smNativeData">
-                <pr:smNativeData xmlns:pr="smNativeData" xmlns="smNativeData" val="SMDATA_15_mcIdaRMAAAAlAAAAZAAAAE0AAAAAAAAAAAAAAAAAAAAAAAAAAAAAAAAAAAAAAAAAAAEAAABQAAAAAAAAAAAA4D8AAAAAAADgPwAAAAAAAOA/AAAAAAAA4D8AAAAAAADgPwAAAAAAAOA/AAAAAAAA4D8AAAAAAADgPwAAAAAAAOA/AAAAAAAA4D8CAAAAjAAAAAAAAAAAAAAA40oGDP///wgAAAAAAAAAAAAAAAAAAAAAAAAAAAAAAAAAAAAAZAAAAAEAAABAAAAAAAAAAAAAAAAAAAAAAAAAAAAAAAAAAAAAAAAAAAAAAAAAAAAAAAAAAAAAAAAAAAAAAAAAAAAAAAAAAAAAAAAAAAAAAAAAAAAAAAAAAAAAAAAAAAAAFAAAADwAAAAAAAAAAAAAAAAAAAkUAAAAAQAAABQAAAAUAAAAFAAAAAEAAAAAAAAAZAAAAGQAAAAAAAAAZAAAAGQAAAAVAAAAYAAAAAAAAAAAAAAADwAAACADAAAAAAAAAAAAAAEAAACgMgAAVgcAAKr4//8BAAAAf39/AAEAAABkAAAAAAAAABQAAABAHwAAAAAAACYAAAAAAAAAwOD//wAAAAAmAAAAZAAAABYAAABMAAAAAAAAAAAAAAAEAAAAAAAAAAEAAACZloMKAAAAACgAAAAoAAAAZAAAAGQAAAAAAAAAzMzMAAAAAABQAAAAUAAAAGQAAABkAAAAAAAAABcAAAAUAAAAAAAAAAAAAAD/fwAA/38AAAAAAAAJAAAABAAAAEgCAAAeAAAAaAAAAAAAAAAAAAAAAAAAAAAAAAAAAAAAECcAABAnAAAAAAAAAAAAAAAAAAAAAAAAAAAAAAAAAAAAAAAAAAAAABQAAAAAAAAAwMD/AAAAAABkAAAAMgAAAAAAAABkAAAAAAAAAH9/fwAKAAAAIgAAABgAAAAAAAAAAAAAAAAAAAAAAAAAAAAAAAAAAAAkAAAAJAAAAAAAAAAHAAAAAAAAAAAAAAAAAAAAAAAAAAAAAAAAAAAAf39/ACUAAABYAAAAAAAAAAAAAAAAAAAAAAAAAAAAAAAAAAAAAAAAAAAAAAAAAAAAAAAAAAAAAAA/AAAAAAAAAKCGAQAAAAAAAAAAAAAAAAAMAAAAAQAAAAAAAAAAAAAAAAAAAB8AAABUAAAA40oGBf///wEAAAAAAAAAAAAAAAAAAAAAAAAAAAAAAAAAAAAAAAAAAAAAAAJ/f38AmZaDA8zMzADAwP8Af39/AAAAAAAAAAAAAAAAAAAAAAAAAAAAIQAAABgAAAAUAAAA0AIAAKwXAADUHAAA4xwAABAgAAAmAAAACAAAAAEAAAAAAAAA"/>
+                <pr:smNativeData xmlns:pr="smNativeData" xmlns="smNativeData" val="SMDATA_15_r8odaRMAAAAlAAAAZAAAAE0AAAAAAAAAAAAAAAAAAAAAAAAAAAAAAAAAAAAAAAAAAAEAAABQAAAAAAAAAAAA4D8AAAAAAADgPwAAAAAAAOA/AAAAAAAA4D8AAAAAAADgPwAAAAAAAOA/AAAAAAAA4D8AAAAAAADgPwAAAAAAAOA/AAAAAAAA4D8CAAAAjAAAAAAAAAAAAAAA40oGDP///wgAAAAAAAAAAAAAAAAAAAAAAAAAAAAAAAAAAAAAZAAAAAEAAABAAAAAAAAAAAAAAAAAAAAAAAAAAAAAAAAAAAAAAAAAAAAAAAAAAAAAAAAAAAAAAAAAAAAAAAAAAAAAAAAAAAAAAAAAAAAAAAAAAAAAAAAAAAAAAAAAAAAAFAAAADwAAAAAAAAAAAAAAAAAAAkUAAAAAQAAABQAAAAUAAAAFAAAAAEAAAAAAAAAZAAAAGQAAAAAAAAAZAAAAGQAAAAVAAAAYAAAAAAAAAAAAAAADwAAACADAAAAAAAAAAAAAAEAAACgMgAAVgcAAKr4//8BAAAAf39/AAEAAABkAAAAAAAAABQAAABAHwAAAAAAACYAAAAAAAAAwOD//wAAAAAmAAAAZAAAABYAAABMAAAAAAAAAAAAAAAEAAAAAAAAAAEAAACZloMKAAAAACgAAAAoAAAAZAAAAGQAAAAAAAAAzMzMAAAAAABQAAAAUAAAAGQAAABkAAAAAAAAABcAAAAUAAAAAAAAAAAAAAD/fwAA/38AAAAAAAAJAAAABAAAAEgCAAAeAAAAaAAAAAAAAAAAAAAAAAAAAAAAAAAAAAAAECcAABAnAAAAAAAAAAAAAAAAAAAAAAAAAAAAAAAAAAAAAAAAAAAAABQAAAAAAAAAwMD/AAAAAABkAAAAMgAAAAAAAABkAAAAAAAAAH9/fwAKAAAAIgAAABgAAAAAAAAAAAAAAAAAAAAAAAAAAAAAAAAAAAAkAAAAJAAAAAAAAAAHAAAAAAAAAAAAAAAAAAAAAAAAAAAAAAAAAAAAf39/ACUAAABYAAAAAAAAAAAAAAAAAAAAAAAAAAAAAAAAAAAAAAAAAAAAAAAAAAAAAAAAAAAAAAA/AAAAAAAAAKCGAQAAAAAAAAAAAAAAAAAMAAAAAQAAAAAAAAAAAAAAAAAAAB8AAABUAAAA40oGBf///wEAAAAAAAAAAAAAAAAAAAAAAAAAAAAAAAAAAAAAAAAAAAAAAAJ/f38AmZaDA8zMzADAwP8Af39/AAAAAAAAAAAAAAAAAAAAAAAAAAAAIQAAABgAAAAUAAAA0AIAAKwXAADUHAAA4xwAABAgAAAmAAAACAAAAAEAAAAAAAAA"/>
               </a:ext>
             </a:extLst>
           </p:cNvSpPr>
@@ -11860,7 +11865,7 @@
             <a:spLocks noGrp="1" noChangeArrowheads="1"/>
             <a:extLst>
               <a:ext uri="smNativeData">
-                <pr:smNativeData xmlns:pr="smNativeData" xmlns="smNativeData" val="SMDATA_15_mcIdaRMAAAAlAAAAZAAAAA0AAAAAAAAAAAAAAAAAAAAAAAAAAAAAAAAAAAAAAAAAAAEAAABQAAAAAAAAAAAA4D8AAAAAAADgPwAAAAAAAOA/AAAAAAAA4D8AAAAAAADgPwAAAAAAAOA/AAAAAAAA4D8AAAAAAADgPwAAAAAAAOA/AAAAAAAA4D8CAAAAjAAAAAAAAAAAAAAA40oGDP///wgAAAAAAAAAAAAAAAAAAAAAAAAAAAAAAAAAAAAAZAAAAAEAAABAAAAAAAAAAAAAAAAAAAAAAAAAAAAAAAAAAAAAAAAAAAAAAAAAAAAAAAAAAAAAAAAAAAAAAAAAAAAAAAAAAAAAAAAAAAAAAAAAAAAAAAAAAAAAAAAAAAAAFAAAADwAAAAAAAAAAAAAAAAAAAkUAAAAAQAAABQAAAAUAAAAFAAAAAEAAAAAAAAAZAAAAGQAAAAAAAAAZAAAAGQAAAAVAAAAYAAAAAAAAAAAAAAADwAAACADAAAAAAAAAAAAAAEAAACgMgAAVgcAAKr4//8BAAAAf39/AAEAAABkAAAAAAAAABQAAABAHwAAAAAAACYAAAAAAAAAwOD//wAAAAAmAAAAZAAAABYAAABMAAAAAAAAAAAAAAAEAAAAAAAAAAEAAACZloMKAAAAACgAAAAoAAAAZAAAAGQAAAAAAAAAzMzMAAAAAABQAAAAUAAAAGQAAABkAAAAAAAAABcAAAAUAAAAAAAAAAAAAAD/fwAA/38AAAAAAAAJAAAABAAAAAEAAAEeAAAAaAAAAAAAAAAAAAAAAAAAAAAAAAAAAAAAECcAABAnAAAAAAAAAAAAAAAAAAAAAAAAAAAAAAAAAAAAAAAAAAAAABQAAAAAAAAAwMD/AAAAAABkAAAAMgAAAAAAAABkAAAAAAAAAH9/fwAKAAAAIgAAABgAAAAAAAAAAAAAAAAAAAAAAAAAAAAAAAAAAAAkAAAAJAAAAAAAAAAHAAAAAAAAAAAAAAAAAAAAAAAAAAAAAAAAAAAAf39/ACUAAABYAAAAAAAAAAAAAAAAAAAAAAAAAAAAAAAAAAAAAAAAAAAAAAAAAAAAAAAAAAAAAAA/AAAAAAAAAKCGAQAAAAAAAAAAAAAAAAAMAAAAAQAAAAAAAAAAAAAAAAAAAB8AAABUAAAA40oGBf///wEAAAAAAAAAAAAAAAAAAAAAAAAAAAAAAAAAAAAAAAAAAAAAAAJ/f38AmZaDA8zMzADAwP8Af39/AAAAAAAAAAAAAAAAAAAAAAAAAAAAIQAAABgAAAAUAAAA4gIAALAAAABeNQAABwYAABAAAAAmAAAACAAAAAEgAAAAAAAA"/>
+                <pr:smNativeData xmlns:pr="smNativeData" xmlns="smNativeData" val="SMDATA_15_r8odaRMAAAAlAAAAZAAAAA0AAAAAAAAAAAAAAAAAAAAAAAAAAAAAAAAAAAAAAAAAAAEAAABQAAAAAAAAAAAA4D8AAAAAAADgPwAAAAAAAOA/AAAAAAAA4D8AAAAAAADgPwAAAAAAAOA/AAAAAAAA4D8AAAAAAADgPwAAAAAAAOA/AAAAAAAA4D8CAAAAjAAAAAAAAAAAAAAA40oGDP///wgAAAAAAAAAAAAAAAAAAAAAAAAAAAAAAAAAAAAAZAAAAAEAAABAAAAAAAAAAAAAAAAAAAAAAAAAAAAAAAAAAAAAAAAAAAAAAAAAAAAAAAAAAAAAAAAAAAAAAAAAAAAAAAAAAAAAAAAAAAAAAAAAAAAAAAAAAAAAAAAAAAAAFAAAADwAAAAAAAAAAAAAAAAAAAkUAAAAAQAAABQAAAAUAAAAFAAAAAEAAAAAAAAAZAAAAGQAAAAAAAAAZAAAAGQAAAAVAAAAYAAAAAAAAAAAAAAADwAAACADAAAAAAAAAAAAAAEAAACgMgAAVgcAAKr4//8BAAAAf39/AAEAAABkAAAAAAAAABQAAABAHwAAAAAAACYAAAAAAAAAwOD//wAAAAAmAAAAZAAAABYAAABMAAAAAAAAAAAAAAAEAAAAAAAAAAEAAACZloMKAAAAACgAAAAoAAAAZAAAAGQAAAAAAAAAzMzMAAAAAABQAAAAUAAAAGQAAABkAAAAAAAAABcAAAAUAAAAAAAAAAAAAAD/fwAA/38AAAAAAAAJAAAABAAAAAEAAAEeAAAAaAAAAAAAAAAAAAAAAAAAAAAAAAAAAAAAECcAABAnAAAAAAAAAAAAAAAAAAAAAAAAAAAAAAAAAAAAAAAAAAAAABQAAAAAAAAAwMD/AAAAAABkAAAAMgAAAAAAAABkAAAAAAAAAH9/fwAKAAAAIgAAABgAAAAAAAAAAAAAAAAAAAAAAAAAAAAAAAAAAAAkAAAAJAAAAAAAAAAHAAAAAAAAAAAAAAAAAAAAAAAAAAAAAAAAAAAAf39/ACUAAABYAAAAAAAAAAAAAAAAAAAAAAAAAAAAAAAAAAAAAAAAAAAAAAAAAAAAAAAAAAAAAAA/AAAAAAAAAKCGAQAAAAAAAAAAAAAAAAAMAAAAAQAAAAAAAAAAAAAAAAAAAB8AAABUAAAA40oGBf///wEAAAAAAAAAAAAAAAAAAAAAAAAAAAAAAAAAAAAAAAAAAAAAAAJ/f38AmZaDA8zMzADAwP8Af39/AAAAAAAAAAAAAAAAAAAAAAAAAAAAIQAAABgAAAAUAAAA4gIAALAAAABeNQAABwYAABAAAAAmAAAACAAAAAEgAAAAAAAA"/>
               </a:ext>
             </a:extLst>
           </p:cNvSpPr>
@@ -11900,7 +11905,7 @@
             <a:spLocks noGrp="1" noChangeArrowheads="1"/>
             <a:extLst>
               <a:ext uri="smNativeData">
-                <pr:smNativeData xmlns:pr="smNativeData" xmlns="smNativeData" val="SMDATA_15_mcIdaRMAAAAlAAAAZAAAAA0AAAAAAAAAAAAAAAAAAAAAAAAAAAAAAAAAAAAAAAAAAAEAAABQAAAAAAAAAAAA4D8AAAAAAADgPwAAAAAAAOA/AAAAAAAA4D8AAAAAAADgPwAAAAAAAOA/AAAAAAAA4D8AAAAAAADgPwAAAAAAAOA/AAAAAAAA4D8CAAAAjAAAAAAAAAAAAAAA40oGDP///wgAAAAAAAAAAAAAAAAAAAAAAAAAAAAAAAAAAAAAZAAAAAEAAABAAAAAAAAAAAAAAAAAAAAAAAAAAAAAAAAAAAAAAAAAAAAAAAAAAAAAAAAAAAAAAAAAAAAAAAAAAAAAAAAAAAAAAAAAAAAAAAAAAAAAAAAAAAAAAAAAAAAAFAAAADwAAAAAAAAAAAAAAAAAAAkUAAAAAQAAABQAAAAUAAAAFAAAAAEAAAAAAAAAZAAAAGQAAAAAAAAAZAAAAGQAAAAVAAAAYAAAAAAAAAAAAAAADwAAACADAAAAAAAAAAAAAAEAAACgMgAAVgcAAKr4//8BAAAAf39/AAEAAABkAAAAAAAAABQAAABAHwAAAAAAACYAAAAAAAAAwOD//wAAAAAmAAAAZAAAABYAAABMAAAAAAAAAAAAAAAEAAAAAAAAAAEAAACZloMKAAAAACgAAAAoAAAAZAAAAGQAAAAAAAAAzMzMAAAAAABQAAAAUAAAAGQAAABkAAAAAAAAABcAAAAUAAAAAAAAAAAAAAD/fwAA/38AAAAAAAAJAAAABAAAAB8BAAAeAAAAaAAAAAAAAAAAAAAAAAAAAAAAAAAAAAAAECcAABAnAAAAAAAAAAAAAAAAAAAAAAAAAAAAAAAAAAAAAAAAAAAAABQAAAAAAAAAwMD/AAAAAABkAAAAMgAAAAAAAABkAAAAAAAAAH9/fwAKAAAAIgAAABgAAAAAAAAAAAAAAAAAAAAAAAAAAAAAAAAAAAAkAAAAJAAAAAAAAAAHAAAAAAAAAAAAAAAAAAAAAAAAAAAAAAAAAAAAf39/ACUAAABYAAAAAAAAAAAAAAAAAAAAAAAAAAAAAAAAAAAAAAAAAAAAAAAAAAAAAAAAAAAAAAA/AAAAAAAAAKCGAQAAAAAAAAAAAAAAAAAMAAAAAQAAAAAAAAAAAAAAAAAAAB8AAABUAAAA40oGBf///wEAAAAAAAAAAAAAAAAAAAAAAAAAAAAAAAAAAAAAAAAAAAAAAAJ/f38AmZaDA8zMzADAwP8Af39/AAAAAAAAAAAAAAAAAAAAAAAAAAAAIQAAABgAAAAUAAAAHAIAAJ8IAACPCQAAqBEAABAAAAAmAAAACAAAAIGgAAAAAAAA"/>
+                <pr:smNativeData xmlns:pr="smNativeData" xmlns="smNativeData" val="SMDATA_15_r8odaRMAAAAlAAAAZAAAAA0AAAAAAAAAAAAAAAAAAAAAAAAAAAAAAAAAAAAAAAAAAAEAAABQAAAAAAAAAAAA4D8AAAAAAADgPwAAAAAAAOA/AAAAAAAA4D8AAAAAAADgPwAAAAAAAOA/AAAAAAAA4D8AAAAAAADgPwAAAAAAAOA/AAAAAAAA4D8CAAAAjAAAAAAAAAAAAAAA40oGDP///wgAAAAAAAAAAAAAAAAAAAAAAAAAAAAAAAAAAAAAZAAAAAEAAABAAAAAAAAAAAAAAAAAAAAAAAAAAAAAAAAAAAAAAAAAAAAAAAAAAAAAAAAAAAAAAAAAAAAAAAAAAAAAAAAAAAAAAAAAAAAAAAAAAAAAAAAAAAAAAAAAAAAAFAAAADwAAAAAAAAAAAAAAAAAAAkUAAAAAQAAABQAAAAUAAAAFAAAAAEAAAAAAAAAZAAAAGQAAAAAAAAAZAAAAGQAAAAVAAAAYAAAAAAAAAAAAAAADwAAACADAAAAAAAAAAAAAAEAAACgMgAAVgcAAKr4//8BAAAAf39/AAEAAABkAAAAAAAAABQAAABAHwAAAAAAACYAAAAAAAAAwOD//wAAAAAmAAAAZAAAABYAAABMAAAAAAAAAAAAAAAEAAAAAAAAAAEAAACZloMKAAAAACgAAAAoAAAAZAAAAGQAAAAAAAAAzMzMAAAAAABQAAAAUAAAAGQAAABkAAAAAAAAABcAAAAUAAAAAAAAAAAAAAD/fwAA/38AAAAAAAAJAAAABAAAAB8BAAAeAAAAaAAAAAAAAAAAAAAAAAAAAAAAAAAAAAAAECcAABAnAAAAAAAAAAAAAAAAAAAAAAAAAAAAAAAAAAAAAAAAAAAAABQAAAAAAAAAwMD/AAAAAABkAAAAMgAAAAAAAABkAAAAAAAAAH9/fwAKAAAAIgAAABgAAAAAAAAAAAAAAAAAAAAAAAAAAAAAAAAAAAAkAAAAJAAAAAAAAAAHAAAAAAAAAAAAAAAAAAAAAAAAAAAAAAAAAAAAf39/ACUAAABYAAAAAAAAAAAAAAAAAAAAAAAAAAAAAAAAAAAAAAAAAAAAAAAAAAAAAAAAAAAAAAA/AAAAAAAAAKCGAQAAAAAAAAAAAAAAAAAMAAAAAQAAAAAAAAAAAAAAAAAAAB8AAABUAAAA40oGBf///wEAAAAAAAAAAAAAAAAAAAAAAAAAAAAAAAAAAAAAAAAAAAAAAAJ/f38AmZaDA8zMzADAwP8Af39/AAAAAAAAAAAAAAAAAAAAAAAAAAAAIQAAABgAAAAUAAAAHAIAAJ8IAACPCQAAqBEAABAAAAAmAAAACAAAAIGgAAAAAAAA"/>
               </a:ext>
             </a:extLst>
           </p:cNvSpPr>
@@ -11973,7 +11978,7 @@
             <a:spLocks noGrp="1" noChangeArrowheads="1"/>
             <a:extLst>
               <a:ext uri="smNativeData">
-                <pr:smNativeData xmlns:pr="smNativeData" xmlns="smNativeData" val="SMDATA_15_mcIdaRMAAAAlAAAAZAAAAA0AAAAAAAAAAAAAAAAAAAAAAAAAAAAAAAABAAAAAAAAAAEAAABQAAAAAAAAAAAA4D8AAAAAAADgPwAAAAAAAOA/AAAAAAAA4D8AAAAAAADgPwAAAAAAAOA/AAAAAAAA4D8AAAAAAADgPwAAAAAAAOA/AAAAAAAA4D8CAAAAjAAAAAEAAAAAAAAA40oGDP///wgAAAAAAAAAAAAAAAAAAAAAAAAAAAAAAAAAAAAAeAAAAAEAAABAAAAAAAAAAAAAAABaAAAAAAAAAAAAAAAAAAAAAAAAAAAAAAAAAAAAAAAAAAAAAAAAAAAAAAAAAAAAAAAAAAAAAAAAAAAAAAAAAAAAAAAAAAAAAAAAAAAAFAAAADwAAAABAAAAAAAAAONKBgwPAAAAAQAAACMAAAAjAAAAIwAAAB4AAAAAAAAAZAAAAGQAAAAAAAAAZAAAAGQAAAAVAAAAYAAAAAAAAAAAAAAADwAAACADAAAAAAAAAAAAAAEAAACgMgAAVgcAAKr4//8BAAAAf39/AAEAAABkAAAAAAAAABQAAABAHwAAAAAAACYAAAAAAAAAwOD//wAAAAAmAAAAZAAAABYAAABMAAAAAAAAAAAAAAAEAAAAAAAAAAEAAACZloMKAAAAACgAAAAoAAAAZAAAAGQAAAAAAAAAzMzMAAAAAABQAAAAUAAAAGQAAABkAAAAAAAAABcAAAAUAAAAAAAAAAAAAAD/fwAA/38AAAAAAAAJAAAABAAAAFcgAAAeAAAAaAAAAAAAAAAAAAAAAAAAAAAAAAAAAAAAECcAABAnAAAAAAAAAAAAAAAAAAAAAAAAAAAAAAAAAAAAAAAAAAAAABQAAAAAAAAAwMD/AAAAAABkAAAAMgAAAAAAAABkAAAAAAAAAH9/fwAKAAAAIgAAABgAAAAAAAAAAAAAAAAAAAAAAAAAAAAAAAAAAAAkAAAAJAAAAAAAAAAHAAAAAAAAAAAAAAAAAAAAAAAAAAAAAAAAAAAAf39/ACUAAABYAAAAAAAAAAAAAAAAAAAAAAAAAAAAAAAAAAAAAAAAAAAAAAAAAAAAAAAAAAAAAAA/AAAAAAAAAKCGAQAAAAAAAAAAAAAAAAAMAAAAAQAAAAAAAAAAAAAAAAAAAB8AAABUAAAAAAAABQAAAAEAAAAAAAAAAAAAAAAAAAAAAAAAAAAAAAAAAAAAAAAAAAAAAAV/f38AmZaDA8zMzADAwP8Af39/AAAAAAAAAAAAAAAAAAAAAAAAAAAAIQAAABgAAAAUAAAARAEAAAASAADhCQAA2xMAABAAAAAmAAAACAAAAAEAAAAAAAAA"/>
+                <pr:smNativeData xmlns:pr="smNativeData" xmlns="smNativeData" val="SMDATA_15_r8odaRMAAAAlAAAAZAAAAA0AAAAAAAAAAAAAAAAAAAAAAAAAAAAAAAABAAAAAAAAAAEAAABQAAAAAAAAAAAA4D8AAAAAAADgPwAAAAAAAOA/AAAAAAAA4D8AAAAAAADgPwAAAAAAAOA/AAAAAAAA4D8AAAAAAADgPwAAAAAAAOA/AAAAAAAA4D8CAAAAjAAAAAEAAAAAAAAA40oGDP///wgAAAAAAAAAAAAAAAAAAAAAAAAAAAAAAAAAAAAAeAAAAAEAAABAAAAAAAAAAAAAAABaAAAAAAAAAAAAAAAAAAAAAAAAAAAAAAAAAAAAAAAAAAAAAAAAAAAAAAAAAAAAAAAAAAAAAAAAAAAAAAAAAAAAAAAAAAAAAAAAAAAAFAAAADwAAAABAAAAAAAAAONKBgwPAAAAAQAAACMAAAAjAAAAIwAAAB4AAAAAAAAAZAAAAGQAAAAAAAAAZAAAAGQAAAAVAAAAYAAAAAAAAAAAAAAADwAAACADAAAAAAAAAAAAAAEAAACgMgAAVgcAAKr4//8BAAAAf39/AAEAAABkAAAAAAAAABQAAABAHwAAAAAAACYAAAAAAAAAwOD//wAAAAAmAAAAZAAAABYAAABMAAAAAAAAAAAAAAAEAAAAAAAAAAEAAACZloMKAAAAACgAAAAoAAAAZAAAAGQAAAAAAAAAzMzMAAAAAABQAAAAUAAAAGQAAABkAAAAAAAAABcAAAAUAAAAAAAAAAAAAAD/fwAA/38AAAAAAAAJAAAABAAAAFcgAAAeAAAAaAAAAAAAAAAAAAAAAAAAAAAAAAAAAAAAECcAABAnAAAAAAAAAAAAAAAAAAAAAAAAAAAAAAAAAAAAAAAAAAAAABQAAAAAAAAAwMD/AAAAAABkAAAAMgAAAAAAAABkAAAAAAAAAH9/fwAKAAAAIgAAABgAAAAAAAAAAAAAAAAAAAAAAAAAAAAAAAAAAAAkAAAAJAAAAAAAAAAHAAAAAAAAAAAAAAAAAAAAAAAAAAAAAAAAAAAAf39/ACUAAABYAAAAAAAAAAAAAAAAAAAAAAAAAAAAAAAAAAAAAAAAAAAAAAAAAAAAAAAAAAAAAAA/AAAAAAAAAKCGAQAAAAAAAAAAAAAAAAAMAAAAAQAAAAAAAAAAAAAAAAAAAB8AAABUAAAAAAAABQAAAAEAAAAAAAAAAAAAAAAAAAAAAAAAAAAAAAAAAAAAAAAAAAAAAAV/f38AmZaDA8zMzADAwP8Af39/AAAAAAAAAAAAAAAAAAAAAAAAAAAAIQAAABgAAAAUAAAARAEAAAASAADhCQAA2xMAABAAAAAmAAAACAAAAAEAAAAAAAAA"/>
               </a:ext>
             </a:extLst>
           </p:cNvSpPr>
@@ -12009,7 +12014,7 @@
             <a:spLocks noGrp="1" noChangeArrowheads="1"/>
             <a:extLst>
               <a:ext uri="smNativeData">
-                <pr:smNativeData xmlns:pr="smNativeData" xmlns="smNativeData" val="SMDATA_15_mcIdaRMAAAAlAAAAZAAAAA0AAAAAAAAAAAAAAAAAAAAAAAAAAAAAAAAAAAAAAAAAAAEAAABQAAAAAAAAAAAA4D8AAAAAAADgPwAAAAAAAOA/AAAAAAAA4D8AAAAAAADgPwAAAAAAAOA/AAAAAAAA4D8AAAAAAADgPwAAAAAAAOA/AAAAAAAA4D8CAAAAjAAAAAAAAAAAAAAA40oGDP///wgAAAAAAAAAAAAAAAAAAAAAAAAAAAAAAAAAAAAAZAAAAAEAAABAAAAAAAAAAAAAAAAAAAAAAAAAAAAAAAAAAAAAAAAAAAAAAAAAAAAAAAAAAAAAAAAAAAAAAAAAAAAAAAAAAAAAAAAAAAAAAAAAAAAAAAAAAAAAAAAAAAAAFAAAADwAAAAAAAAAAAAAAAAAAAkUAAAAAQAAABQAAAAUAAAAFAAAAAEAAAAAAAAAZAAAAGQAAAAAAAAAZAAAAGQAAAAVAAAAYAAAAAAAAAAAAAAADwAAACADAAAAAAAAAAAAAAEAAACgMgAAVgcAAKr4//8BAAAAf39/AAEAAABkAAAAAAAAABQAAABAHwAAAAAAACYAAAAAAAAAwOD//wAAAAAmAAAAZAAAABYAAABMAAAAAAAAAAAAAAAEAAAAAAAAAAEAAACZloMKAAAAACgAAAAoAAAAZAAAAGQAAAAAAAAAzMzMAAAAAABQAAAAUAAAAGQAAABkAAAAAAAAABcAAAAUAAAAAAAAAAAAAAD/fwAA/38AAAAAAAAJAAAABAAAABEEAQAeAAAAaAAAAAAAAAAAAAAAAAAAAAAAAAAAAAAAECcAABAnAAAAAAAAAAAAAAAAAAAAAAAAAAAAAAAAAAAAAAAAAAAAABQAAAAAAAAAwMD/AAAAAABkAAAAMgAAAAAAAABkAAAAAAAAAH9/fwAKAAAAIgAAABgAAAAAAAAAAAAAAAAAAAAAAAAAAAAAAAAAAAAkAAAAJAAAAAAAAAAHAAAAAAAAAAAAAAAAAAAAAAAAAAAAAAAAAAAAf39/ACUAAABYAAAAAAAAAAAAAAAAAAAAAAAAAAAAAAAAAAAAAAAAAAAAAAAAAAAAAAAAAAAAAAA/AAAAAAAAAKCGAQAAAAAAAAAAAAAAAAAMAAAAAQAAAAAAAAAAAAAAAAAAAB8AAABUAAAA40oGBf///wEAAAAAAAAAAAAAAAAAAAAAAAAAAAAAAAAAAAAAAAAAAAAAAAJ/f38AmZaDA8zMzADAwP8Af39/AAAAAAAAAAAAAAAAAAAAAAAAAAAAIQAAABgAAAAUAAAARAEAAEAUAADLCgAAlScAABAAAAAmAAAACAAAAIGAAAAAAAAA"/>
+                <pr:smNativeData xmlns:pr="smNativeData" xmlns="smNativeData" val="SMDATA_15_r8odaRMAAAAlAAAAZAAAAA0AAAAAAAAAAAAAAAAAAAAAAAAAAAAAAAAAAAAAAAAAAAEAAABQAAAAAAAAAAAA4D8AAAAAAADgPwAAAAAAAOA/AAAAAAAA4D8AAAAAAADgPwAAAAAAAOA/AAAAAAAA4D8AAAAAAADgPwAAAAAAAOA/AAAAAAAA4D8CAAAAjAAAAAAAAAAAAAAA40oGDP///wgAAAAAAAAAAAAAAAAAAAAAAAAAAAAAAAAAAAAAZAAAAAEAAABAAAAAAAAAAAAAAAAAAAAAAAAAAAAAAAAAAAAAAAAAAAAAAAAAAAAAAAAAAAAAAAAAAAAAAAAAAAAAAAAAAAAAAAAAAAAAAAAAAAAAAAAAAAAAAAAAAAAAFAAAADwAAAAAAAAAAAAAAAAAAAkUAAAAAQAAABQAAAAUAAAAFAAAAAEAAAAAAAAAZAAAAGQAAAAAAAAAZAAAAGQAAAAVAAAAYAAAAAAAAAAAAAAADwAAACADAAAAAAAAAAAAAAEAAACgMgAAVgcAAKr4//8BAAAAf39/AAEAAABkAAAAAAAAABQAAABAHwAAAAAAACYAAAAAAAAAwOD//wAAAAAmAAAAZAAAABYAAABMAAAAAAAAAAAAAAAEAAAAAAAAAAEAAACZloMKAAAAACgAAAAoAAAAZAAAAGQAAAAAAAAAzMzMAAAAAABQAAAAUAAAAGQAAABkAAAAAAAAABcAAAAUAAAAAAAAAAAAAAD/fwAA/38AAAAAAAAJAAAABAAAABEEAQAeAAAAaAAAAAAAAAAAAAAAAAAAAAAAAAAAAAAAECcAABAnAAAAAAAAAAAAAAAAAAAAAAAAAAAAAAAAAAAAAAAAAAAAABQAAAAAAAAAwMD/AAAAAABkAAAAMgAAAAAAAABkAAAAAAAAAH9/fwAKAAAAIgAAABgAAAAAAAAAAAAAAAAAAAAAAAAAAAAAAAAAAAAkAAAAJAAAAAAAAAAHAAAAAAAAAAAAAAAAAAAAAAAAAAAAAAAAAAAAf39/ACUAAABYAAAAAAAAAAAAAAAAAAAAAAAAAAAAAAAAAAAAAAAAAAAAAAAAAAAAAAAAAAAAAAA/AAAAAAAAAKCGAQAAAAAAAAAAAAAAAAAMAAAAAQAAAAAAAAAAAAAAAAAAAB8AAABUAAAA40oGBf///wEAAAAAAAAAAAAAAAAAAAAAAAAAAAAAAAAAAAAAAAAAAAAAAAJ/f38AmZaDA8zMzADAwP8Af39/AAAAAAAAAAAAAAAAAAAAAAAAAAAAIQAAABgAAAAUAAAARAEAAEAUAADLCgAAlScAABAAAAAmAAAACAAAAIGAAAAAAAAA"/>
               </a:ext>
             </a:extLst>
           </p:cNvSpPr>
@@ -12095,7 +12100,7 @@
             <a:spLocks noGrp="1" noChangeArrowheads="1"/>
             <a:extLst>
               <a:ext uri="smNativeData">
-                <pr:smNativeData xmlns:pr="smNativeData" xmlns="smNativeData" val="SMDATA_15_mcIdaRMAAAAlAAAAZAAAAA0AAAAAAAAAAAAAAAAAAAAAAAAAAAAAAAAAAAAAAAAAAAEAAABQAAAAAAAAAAAA4D8AAAAAAADgPwAAAAAAAOA/AAAAAAAA4D8AAAAAAADgPwAAAAAAAOA/AAAAAAAA4D8AAAAAAADgPwAAAAAAAOA/AAAAAAAA4D8CAAAAjAAAAAAAAAAAAAAA40oGDP///wgAAAAAAAAAAAAAAAAAAAAAAAAAAAAAAAAAAAAAZAAAAAEAAABAAAAAAAAAAAAAAAAAAAAAAAAAAAAAAAAAAAAAAAAAAAAAAAAAAAAAAAAAAAAAAAAAAAAAAAAAAAAAAAAAAAAAAAAAAAAAAAAAAAAAAAAAAAAAAAAAAAAAFAAAADwAAAAAAAAAAAAAAAAAAAkUAAAAAQAAABQAAAAUAAAAFAAAAAEAAAAAAAAAZAAAAGQAAAAAAAAAZAAAAGQAAAAVAAAAYAAAAAAAAAAAAAAADwAAACADAAAAAAAAAAAAAAEAAACgMgAAVgcAAKr4//8BAAAAf39/AAEAAABkAAAAAAAAABQAAABAHwAAAAAAACYAAAAAAAAAwOD//wAAAAAmAAAAZAAAABYAAABMAAAAAAAAAAAAAAAEAAAAAAAAAAEAAACZloMKAAAAACgAAAAoAAAAZAAAAGQAAAAAAAAAzMzMAAAAAABQAAAAUAAAAGQAAABkAAAAAAAAABcAAAAUAAAAAAAAAAAAAAD/fwAA/38AAAAAAAAJAAAABAAAAAAAAAAeAAAAaAAAAAAAAAAAAAAAAAAAAAAAAAAAAAAAECcAABAnAAAAAAAAAAAAAAAAAAAAAAAAAAAAAAAAAAAAAAAAAAAAABQAAAAAAAAAwMD/AAAAAABkAAAAMgAAAAAAAABkAAAAAAAAAH9/fwAKAAAAIgAAABgAAAAAAAAAAAAAAAAAAAAAAAAAAAAAAAAAAAAkAAAAJAAAAAAAAAAHAAAAAAAAAAAAAAAAAAAAAAAAAAAAAAAAAAAAf39/ACUAAABYAAAAAAAAAAAAAAAAAAAAAAAAAAAAAAAAAAAAAAAAAAAAAAAAAAAAAAAAAAAAAAA/AAAAAAAAAKCGAQAAAAAAAAAAAAAAAAAMAAAAAQAAAAAAAAAAAAAAAAAAAB8AAABUAAAA40oGBf///wEAAAAAAAAAAAAAAAAAAAAAAAAAAAAAAAAAAAAAAAAAAAAAAAJ/f38AmZaDA8zMzADAwP8Af39/AAAAAAAAAAAAAAAAAAAAAAAAAAAAIQAAABgAAAAUAAAAOAwAAJ8IAADUFAAAqBEAABAAAAAmAAAACAAAAIGAAAAAAAAA"/>
+                <pr:smNativeData xmlns:pr="smNativeData" xmlns="smNativeData" val="SMDATA_15_r8odaRMAAAAlAAAAZAAAAA0AAAAAAAAAAAAAAAAAAAAAAAAAAAAAAAAAAAAAAAAAAAEAAABQAAAAAAAAAAAA4D8AAAAAAADgPwAAAAAAAOA/AAAAAAAA4D8AAAAAAADgPwAAAAAAAOA/AAAAAAAA4D8AAAAAAADgPwAAAAAAAOA/AAAAAAAA4D8CAAAAjAAAAAAAAAAAAAAA40oGDP///wgAAAAAAAAAAAAAAAAAAAAAAAAAAAAAAAAAAAAAZAAAAAEAAABAAAAAAAAAAAAAAAAAAAAAAAAAAAAAAAAAAAAAAAAAAAAAAAAAAAAAAAAAAAAAAAAAAAAAAAAAAAAAAAAAAAAAAAAAAAAAAAAAAAAAAAAAAAAAAAAAAAAAFAAAADwAAAAAAAAAAAAAAAAAAAkUAAAAAQAAABQAAAAUAAAAFAAAAAEAAAAAAAAAZAAAAGQAAAAAAAAAZAAAAGQAAAAVAAAAYAAAAAAAAAAAAAAADwAAACADAAAAAAAAAAAAAAEAAACgMgAAVgcAAKr4//8BAAAAf39/AAEAAABkAAAAAAAAABQAAABAHwAAAAAAACYAAAAAAAAAwOD//wAAAAAmAAAAZAAAABYAAABMAAAAAAAAAAAAAAAEAAAAAAAAAAEAAACZloMKAAAAACgAAAAoAAAAZAAAAGQAAAAAAAAAzMzMAAAAAABQAAAAUAAAAGQAAABkAAAAAAAAABcAAAAUAAAAAAAAAAAAAAD/fwAA/38AAAAAAAAJAAAABAAAAAAAAAAeAAAAaAAAAAAAAAAAAAAAAAAAAAAAAAAAAAAAECcAABAnAAAAAAAAAAAAAAAAAAAAAAAAAAAAAAAAAAAAAAAAAAAAABQAAAAAAAAAwMD/AAAAAABkAAAAMgAAAAAAAABkAAAAAAAAAH9/fwAKAAAAIgAAABgAAAAAAAAAAAAAAAAAAAAAAAAAAAAAAAAAAAAkAAAAJAAAAAAAAAAHAAAAAAAAAAAAAAAAAAAAAAAAAAAAAAAAAAAAf39/ACUAAABYAAAAAAAAAAAAAAAAAAAAAAAAAAAAAAAAAAAAAAAAAAAAAAAAAAAAAAAAAAAAAAA/AAAAAAAAAKCGAQAAAAAAAAAAAAAAAAAMAAAAAQAAAAAAAAAAAAAAAAAAAB8AAABUAAAA40oGBf///wEAAAAAAAAAAAAAAAAAAAAAAAAAAAAAAAAAAAAAAAAAAAAAAAJ/f38AmZaDA8zMzADAwP8Af39/AAAAAAAAAAAAAAAAAAAAAAAAAAAAIQAAABgAAAAUAAAAOAwAAJ8IAADUFAAAqBEAABAAAAAmAAAACAAAAIGAAAAAAAAA"/>
               </a:ext>
             </a:extLst>
           </p:cNvSpPr>
@@ -12168,7 +12173,7 @@
             <a:spLocks noGrp="1" noChangeArrowheads="1"/>
             <a:extLst>
               <a:ext uri="smNativeData">
-                <pr:smNativeData xmlns:pr="smNativeData" xmlns="smNativeData" val="SMDATA_15_mcIdaRMAAAAlAAAAZAAAAA0AAAAAAAAAAAAAAAAAAAAAAAAAAAAAAAABAAAAAAAAAAEAAABQAAAAAAAAAAAA4D8AAAAAAADgPwAAAAAAAOA/AAAAAAAA4D8AAAAAAADgPwAAAAAAAOA/AAAAAAAA4D8AAAAAAADgPwAAAAAAAOA/AAAAAAAA4D8CAAAAjAAAAAEAAAAAAAAA40oGDP///wgAAAAAAAAAAAAAAAAAAAAAAAAAAAAAAAAAAAAAeAAAAAEAAABAAAAAAAAAAAAAAABaAAAAAAAAAAAAAAAAAAAAAAAAAAAAAAAAAAAAAAAAAAAAAAAAAAAAAAAAAAAAAAAAAAAAAAAAAAAAAAAAAAAAAAAAAAAAAAAAAAAAFAAAADwAAAABAAAAAAAAAONKBgwPAAAAAQAAACMAAAAjAAAAIwAAAB4AAAAAAAAAZAAAAGQAAAAAAAAAZAAAAGQAAAAVAAAAYAAAAAAAAAAAAAAADwAAACADAAAAAAAAAAAAAAEAAACgMgAAVgcAAKr4//8BAAAAf39/AAEAAABkAAAAAAAAABQAAABAHwAAAAAAACYAAAAAAAAAwOD//wAAAAAmAAAAZAAAABYAAABMAAAAAAAAAAAAAAAEAAAAAAAAAAEAAACZloMKAAAAACgAAAAoAAAAZAAAAGQAAAAAAAAAzMzMAAAAAABQAAAAUAAAAGQAAABkAAAAAAAAABcAAAAUAAAAAAAAAAAAAAD/fwAA/38AAAAAAAAJAAAABAAAAFcgAAAeAAAAaAAAAAAAAAAAAAAAAAAAAAAAAAAAAAAAECcAABAnAAAAAAAAAAAAAAAAAAAAAAAAAAAAAAAAAAAAAAAAAAAAABQAAAAAAAAAwMD/AAAAAABkAAAAMgAAAAAAAABkAAAAAAAAAH9/fwAKAAAAIgAAABgAAAAAAAAAAAAAAAAAAAAAAAAAAAAAAAAAAAAkAAAAJAAAAAAAAAAHAAAAAAAAAAAAAAAAAAAAAAAAAAAAAAAAAAAAf39/ACUAAABYAAAAAAAAAAAAAAAAAAAAAAAAAAAAAAAAAAAAAAAAAAAAAAAAAAAAAAAAAAAAAAA/AAAAAAAAAKCGAQAAAAAAAAAAAAAAAAAMAAAAAQAAAAAAAAAAAAAAAAAAAB8AAABUAAAAAAAABQAAAAEAAAAAAAAAAAAAAAAAAAAAAAAAAAAAAAAAAAAAAAAAAAAAAAV/f38AmZaDA8zMzADAwP8Af39/AAAAAAAAAAAAAAAAAAAAAAAAAAAAIQAAABgAAAAUAAAAOAwAAAASAADUFAAA2xMAABAAAAAmAAAACAAAAAEAAAAAAAAA"/>
+                <pr:smNativeData xmlns:pr="smNativeData" xmlns="smNativeData" val="SMDATA_15_r8odaRMAAAAlAAAAZAAAAA0AAAAAAAAAAAAAAAAAAAAAAAAAAAAAAAABAAAAAAAAAAEAAABQAAAAAAAAAAAA4D8AAAAAAADgPwAAAAAAAOA/AAAAAAAA4D8AAAAAAADgPwAAAAAAAOA/AAAAAAAA4D8AAAAAAADgPwAAAAAAAOA/AAAAAAAA4D8CAAAAjAAAAAEAAAAAAAAA40oGDP///wgAAAAAAAAAAAAAAAAAAAAAAAAAAAAAAAAAAAAAeAAAAAEAAABAAAAAAAAAAAAAAABaAAAAAAAAAAAAAAAAAAAAAAAAAAAAAAAAAAAAAAAAAAAAAAAAAAAAAAAAAAAAAAAAAAAAAAAAAAAAAAAAAAAAAAAAAAAAAAAAAAAAFAAAADwAAAABAAAAAAAAAONKBgwPAAAAAQAAACMAAAAjAAAAIwAAAB4AAAAAAAAAZAAAAGQAAAAAAAAAZAAAAGQAAAAVAAAAYAAAAAAAAAAAAAAADwAAACADAAAAAAAAAAAAAAEAAACgMgAAVgcAAKr4//8BAAAAf39/AAEAAABkAAAAAAAAABQAAABAHwAAAAAAACYAAAAAAAAAwOD//wAAAAAmAAAAZAAAABYAAABMAAAAAAAAAAAAAAAEAAAAAAAAAAEAAACZloMKAAAAACgAAAAoAAAAZAAAAGQAAAAAAAAAzMzMAAAAAABQAAAAUAAAAGQAAABkAAAAAAAAABcAAAAUAAAAAAAAAAAAAAD/fwAA/38AAAAAAAAJAAAABAAAAFcgAAAeAAAAaAAAAAAAAAAAAAAAAAAAAAAAAAAAAAAAECcAABAnAAAAAAAAAAAAAAAAAAAAAAAAAAAAAAAAAAAAAAAAAAAAABQAAAAAAAAAwMD/AAAAAABkAAAAMgAAAAAAAABkAAAAAAAAAH9/fwAKAAAAIgAAABgAAAAAAAAAAAAAAAAAAAAAAAAAAAAAAAAAAAAkAAAAJAAAAAAAAAAHAAAAAAAAAAAAAAAAAAAAAAAAAAAAAAAAAAAAf39/ACUAAABYAAAAAAAAAAAAAAAAAAAAAAAAAAAAAAAAAAAAAAAAAAAAAAAAAAAAAAAAAAAAAAA/AAAAAAAAAKCGAQAAAAAAAAAAAAAAAAAMAAAAAQAAAAAAAAAAAAAAAAAAAB8AAABUAAAAAAAABQAAAAEAAAAAAAAAAAAAAAAAAAAAAAAAAAAAAAAAAAAAAAAAAAAAAAV/f38AmZaDA8zMzADAwP8Af39/AAAAAAAAAAAAAAAAAAAAAAAAAAAAIQAAABgAAAAUAAAAOAwAAAASAADUFAAA2xMAABAAAAAmAAAACAAAAAEAAAAAAAAA"/>
               </a:ext>
             </a:extLst>
           </p:cNvSpPr>
@@ -12204,7 +12209,7 @@
             <a:spLocks noGrp="1" noChangeArrowheads="1"/>
             <a:extLst>
               <a:ext uri="smNativeData">
-                <pr:smNativeData xmlns:pr="smNativeData" xmlns="smNativeData" val="SMDATA_15_mcIdaRMAAAAlAAAAZAAAAA0AAAAAAAAAAAAAAAAAAAAAAAAAAAAAAAAAAAAAAAAAAAEAAABQAAAAAAAAAAAA4D8AAAAAAADgPwAAAAAAAOA/AAAAAAAA4D8AAAAAAADgPwAAAAAAAOA/AAAAAAAA4D8AAAAAAADgPwAAAAAAAOA/AAAAAAAA4D8CAAAAjAAAAAAAAAAAAAAA40oGDP///wgAAAAAAAAAAAAAAAAAAAAAAAAAAAAAAAAAAAAAZAAAAAEAAABAAAAAAAAAAAAAAAAAAAAAAAAAAAAAAAAAAAAAAAAAAAAAAAAAAAAAAAAAAAAAAAAAAAAAAAAAAAAAAAAAAAAAAAAAAAAAAAAAAAAAAAAAAAAAAAAAAAAAFAAAADwAAAAAAAAAAAAAAAAAAAkUAAAAAQAAABQAAAAUAAAAFAAAAAEAAAAAAAAAZAAAAGQAAAAAAAAAZAAAAGQAAAAVAAAAYAAAAAAAAAAAAAAADwAAACADAAAAAAAAAAAAAAEAAACgMgAAVgcAAKr4//8BAAAAf39/AAEAAABkAAAAAAAAABQAAABAHwAAAAAAACYAAAAAAAAAwOD//wAAAAAmAAAAZAAAABYAAABMAAAAAAAAAAAAAAAEAAAAAAAAAAEAAACZloMKAAAAACgAAAAoAAAAZAAAAGQAAAAAAAAAzMzMAAAAAABQAAAAUAAAAGQAAABkAAAAAAAAABcAAAAUAAAAAAAAAAAAAAD/fwAA/38AAAAAAAAJAAAABAAAAM4AAAAeAAAAaAAAAAAAAAAAAAAAAAAAAAAAAAAAAAAAECcAABAnAAAAAAAAAAAAAAAAAAAAAAAAAAAAAAAAAAAAAAAAAAAAABQAAAAAAAAAwMD/AAAAAABkAAAAMgAAAAAAAABkAAAAAAAAAH9/fwAKAAAAIgAAABgAAAAAAAAAAAAAAAAAAAAAAAAAAAAAAAAAAAAkAAAAJAAAAAAAAAAHAAAAAAAAAAAAAAAAAAAAAAAAAAAAAAAAAAAAf39/ACUAAABYAAAAAAAAAAAAAAAAAAAAAAAAAAAAAAAAAAAAAAAAAAAAAAAAAAAAAAAAAAAAAAA/AAAAAAAAAKCGAQAAAAAAAAAAAAAAAAAMAAAAAQAAAAAAAAAAAAAAAAAAAB8AAABUAAAA40oGBf///wEAAAAAAAAAAAAAAAAAAAAAAAAAAAAAAAAAAAAAAAAAAAAAAAJ/f38AmZaDA8zMzADAwP8Af39/AAAAAAAAAAAAAAAAAAAAAAAAAAAAIQAAABgAAAAUAAAAOAwAAEAUAAC+FQAAlScAABAAAAAmAAAACAAAAIGgAAAAAAAA"/>
+                <pr:smNativeData xmlns:pr="smNativeData" xmlns="smNativeData" val="SMDATA_15_r8odaRMAAAAlAAAAZAAAAA0AAAAAAAAAAAAAAAAAAAAAAAAAAAAAAAAAAAAAAAAAAAEAAABQAAAAAAAAAAAA4D8AAAAAAADgPwAAAAAAAOA/AAAAAAAA4D8AAAAAAADgPwAAAAAAAOA/AAAAAAAA4D8AAAAAAADgPwAAAAAAAOA/AAAAAAAA4D8CAAAAjAAAAAAAAAAAAAAA40oGDP///wgAAAAAAAAAAAAAAAAAAAAAAAAAAAAAAAAAAAAAZAAAAAEAAABAAAAAAAAAAAAAAAAAAAAAAAAAAAAAAAAAAAAAAAAAAAAAAAAAAAAAAAAAAAAAAAAAAAAAAAAAAAAAAAAAAAAAAAAAAAAAAAAAAAAAAAAAAAAAAAAAAAAAFAAAADwAAAAAAAAAAAAAAAAAAAkUAAAAAQAAABQAAAAUAAAAFAAAAAEAAAAAAAAAZAAAAGQAAAAAAAAAZAAAAGQAAAAVAAAAYAAAAAAAAAAAAAAADwAAACADAAAAAAAAAAAAAAEAAACgMgAAVgcAAKr4//8BAAAAf39/AAEAAABkAAAAAAAAABQAAABAHwAAAAAAACYAAAAAAAAAwOD//wAAAAAmAAAAZAAAABYAAABMAAAAAAAAAAAAAAAEAAAAAAAAAAEAAACZloMKAAAAACgAAAAoAAAAZAAAAGQAAAAAAAAAzMzMAAAAAABQAAAAUAAAAGQAAABkAAAAAAAAABcAAAAUAAAAAAAAAAAAAAD/fwAA/38AAAAAAAAJAAAABAAAAM4AAAAeAAAAaAAAAAAAAAAAAAAAAAAAAAAAAAAAAAAAECcAABAnAAAAAAAAAAAAAAAAAAAAAAAAAAAAAAAAAAAAAAAAAAAAABQAAAAAAAAAwMD/AAAAAABkAAAAMgAAAAAAAABkAAAAAAAAAH9/fwAKAAAAIgAAABgAAAAAAAAAAAAAAAAAAAAAAAAAAAAAAAAAAAAkAAAAJAAAAAAAAAAHAAAAAAAAAAAAAAAAAAAAAAAAAAAAAAAAAAAAf39/ACUAAABYAAAAAAAAAAAAAAAAAAAAAAAAAAAAAAAAAAAAAAAAAAAAAAAAAAAAAAAAAAAAAAA/AAAAAAAAAKCGAQAAAAAAAAAAAAAAAAAMAAAAAQAAAAAAAAAAAAAAAAAAAB8AAABUAAAA40oGBf///wEAAAAAAAAAAAAAAAAAAAAAAAAAAAAAAAAAAAAAAAAAAAAAAAJ/f38AmZaDA8zMzADAwP8Af39/AAAAAAAAAAAAAAAAAAAAAAAAAAAAIQAAABgAAAAUAAAAOAwAAEAUAAC+FQAAlScAABAAAAAmAAAACAAAAIGgAAAAAAAA"/>
               </a:ext>
             </a:extLst>
           </p:cNvSpPr>
@@ -12290,7 +12295,7 @@
             <a:spLocks noGrp="1" noChangeArrowheads="1"/>
             <a:extLst>
               <a:ext uri="smNativeData">
-                <pr:smNativeData xmlns:pr="smNativeData" xmlns="smNativeData" val="SMDATA_15_mcIdaRMAAAAlAAAAZAAAAA0AAAAAAAAAAAAAAAAAAAAAAAAAAAAAAAAAAAAAAAAAAAEAAABQAAAAAAAAAAAA4D8AAAAAAADgPwAAAAAAAOA/AAAAAAAA4D8AAAAAAADgPwAAAAAAAOA/AAAAAAAA4D8AAAAAAADgPwAAAAAAAOA/AAAAAAAA4D8CAAAAjAAAAAAAAAAAAAAA40oGDP///wgAAAAAAAAAAAAAAAAAAAAAAAAAAAAAAAAAAAAAZAAAAAEAAABAAAAAAAAAAAAAAAAAAAAAAAAAAAAAAAAAAAAAAAAAAAAAAAAAAAAAAAAAAAAAAAAAAAAAAAAAAAAAAAAAAAAAAAAAAAAAAAAAAAAAAAAAAAAAAAAAAAAAFAAAADwAAAAAAAAAAAAAAAAAAAkUAAAAAQAAABQAAAAUAAAAFAAAAAEAAAAAAAAAZAAAAGQAAAAAAAAAZAAAAGQAAAAVAAAAYAAAAAAAAAAAAAAADwAAACADAAAAAAAAAAAAAAEAAACgMgAAVgcAAKr4//8BAAAAf39/AAEAAABkAAAAAAAAABQAAABAHwAAAAAAACYAAAAAAAAAwOD//wAAAAAmAAAAZAAAABYAAABMAAAAAAAAAAAAAAAEAAAAAAAAAAEAAACZloMKAAAAACgAAAAoAAAAZAAAAGQAAAAAAAAAzMzMAAAAAABQAAAAUAAAAGQAAABkAAAAAAAAABcAAAAUAAAAAAAAAAAAAAD/fwAA/38AAAAAAAAJAAAABAAAAG0ZAAAeAAAAaAAAAAAAAAAAAAAAAAAAAAAAAAAAAAAAECcAABAnAAAAAAAAAAAAAAAAAAAAAAAAAAAAAAAAAAAAAAAAAAAAABQAAAAAAAAAwMD/AAAAAABkAAAAMgAAAAAAAABkAAAAAAAAAH9/fwAKAAAAIgAAABgAAAAAAAAAAAAAAAAAAAAAAAAAAAAAAAAAAAAkAAAAJAAAAAAAAAAHAAAAAAAAAAAAAAAAAAAAAAAAAAAAAAAAAAAAf39/ACUAAABYAAAAAAAAAAAAAAAAAAAAAAAAAAAAAAAAAAAAAAAAAAAAAAAAAAAAAAAAAAAAAAA/AAAAAAAAAKCGAQAAAAAAAAAAAAAAAAAMAAAAAQAAAAAAAAAAAAAAAAAAAB8AAABUAAAA40oGBf///wEAAAAAAAAAAAAAAAAAAAAAAAAAAAAAAAAAAAAAAAAAAAAAAAJ/f38AmZaDA8zMzADAwP8Af39/AAAAAAAAAAAAAAAAAAAAAAAAAAAAIQAAABgAAAAUAAAAfRcAAJ8IAACtHwAAqBEAABAAAAAmAAAACAAAAIGgAAAAAAAA"/>
+                <pr:smNativeData xmlns:pr="smNativeData" xmlns="smNativeData" val="SMDATA_15_r8odaRMAAAAlAAAAZAAAAA0AAAAAAAAAAAAAAAAAAAAAAAAAAAAAAAAAAAAAAAAAAAEAAABQAAAAAAAAAAAA4D8AAAAAAADgPwAAAAAAAOA/AAAAAAAA4D8AAAAAAADgPwAAAAAAAOA/AAAAAAAA4D8AAAAAAADgPwAAAAAAAOA/AAAAAAAA4D8CAAAAjAAAAAAAAAAAAAAA40oGDP///wgAAAAAAAAAAAAAAAAAAAAAAAAAAAAAAAAAAAAAZAAAAAEAAABAAAAAAAAAAAAAAAAAAAAAAAAAAAAAAAAAAAAAAAAAAAAAAAAAAAAAAAAAAAAAAAAAAAAAAAAAAAAAAAAAAAAAAAAAAAAAAAAAAAAAAAAAAAAAAAAAAAAAFAAAADwAAAAAAAAAAAAAAAAAAAkUAAAAAQAAABQAAAAUAAAAFAAAAAEAAAAAAAAAZAAAAGQAAAAAAAAAZAAAAGQAAAAVAAAAYAAAAAAAAAAAAAAADwAAACADAAAAAAAAAAAAAAEAAACgMgAAVgcAAKr4//8BAAAAf39/AAEAAABkAAAAAAAAABQAAABAHwAAAAAAACYAAAAAAAAAwOD//wAAAAAmAAAAZAAAABYAAABMAAAAAAAAAAAAAAAEAAAAAAAAAAEAAACZloMKAAAAACgAAAAoAAAAZAAAAGQAAAAAAAAAzMzMAAAAAABQAAAAUAAAAGQAAABkAAAAAAAAABcAAAAUAAAAAAAAAAAAAAD/fwAA/38AAAAAAAAJAAAABAAAAG0ZAAAeAAAAaAAAAAAAAAAAAAAAAAAAAAAAAAAAAAAAECcAABAnAAAAAAAAAAAAAAAAAAAAAAAAAAAAAAAAAAAAAAAAAAAAABQAAAAAAAAAwMD/AAAAAABkAAAAMgAAAAAAAABkAAAAAAAAAH9/fwAKAAAAIgAAABgAAAAAAAAAAAAAAAAAAAAAAAAAAAAAAAAAAAAkAAAAJAAAAAAAAAAHAAAAAAAAAAAAAAAAAAAAAAAAAAAAAAAAAAAAf39/ACUAAABYAAAAAAAAAAAAAAAAAAAAAAAAAAAAAAAAAAAAAAAAAAAAAAAAAAAAAAAAAAAAAAA/AAAAAAAAAKCGAQAAAAAAAAAAAAAAAAAMAAAAAQAAAAAAAAAAAAAAAAAAAB8AAABUAAAA40oGBf///wEAAAAAAAAAAAAAAAAAAAAAAAAAAAAAAAAAAAAAAAAAAAAAAAJ/f38AmZaDA8zMzADAwP8Af39/AAAAAAAAAAAAAAAAAAAAAAAAAAAAIQAAABgAAAAUAAAAfRcAAJ8IAACtHwAAqBEAABAAAAAmAAAACAAAAIGgAAAAAAAA"/>
               </a:ext>
             </a:extLst>
           </p:cNvSpPr>
@@ -12363,7 +12368,7 @@
             <a:spLocks noGrp="1" noChangeArrowheads="1"/>
             <a:extLst>
               <a:ext uri="smNativeData">
-                <pr:smNativeData xmlns:pr="smNativeData" xmlns="smNativeData" val="SMDATA_15_mcIdaRMAAAAlAAAAZAAAAA0AAAAAAAAAAAAAAAAAAAAAAAAAAAAAAAABAAAAAAAAAAEAAABQAAAAAAAAAAAA4D8AAAAAAADgPwAAAAAAAOA/AAAAAAAA4D8AAAAAAADgPwAAAAAAAOA/AAAAAAAA4D8AAAAAAADgPwAAAAAAAOA/AAAAAAAA4D8CAAAAjAAAAAEAAAAAAAAA40oGDP///wgAAAAAAAAAAAAAAAAAAAAAAAAAAAAAAAAAAAAAeAAAAAEAAABAAAAAAAAAAAAAAABaAAAAAAAAAAAAAAAAAAAAAAAAAAAAAAAAAAAAAAAAAAAAAAAAAAAAAAAAAAAAAAAAAAAAAAAAAAAAAAAAAAAAAAAAAAAAAAAAAAAAFAAAADwAAAABAAAAAAAAAONKBgwPAAAAAQAAACMAAAAjAAAAIwAAAB4AAAAAAAAAZAAAAGQAAAAAAAAAZAAAAGQAAAAVAAAAYAAAAAAAAAAAAAAADwAAACADAAAAAAAAAAAAAAEAAACgMgAAVgcAAKr4//8BAAAAf39/AAEAAABkAAAAAAAAABQAAABAHwAAAAAAACYAAAAAAAAAwOD//wAAAAAmAAAAZAAAABYAAABMAAAAAAAAAAAAAAAEAAAAAAAAAAEAAACZloMKAAAAACgAAAAoAAAAZAAAAGQAAAAAAAAAzMzMAAAAAABQAAAAUAAAAGQAAABkAAAAAAAAABcAAAAUAAAAAAAAAAAAAAD/fwAA/38AAAAAAAAJAAAABAAAAB0AAAAeAAAAaAAAAAAAAAAAAAAAAAAAAAAAAAAAAAAAECcAABAnAAAAAAAAAAAAAAAAAAAAAAAAAAAAAAAAAAAAAAAAAAAAABQAAAAAAAAAwMD/AAAAAABkAAAAMgAAAAAAAABkAAAAAAAAAH9/fwAKAAAAIgAAABgAAAAAAAAAAAAAAAAAAAAAAAAAAAAAAAAAAAAkAAAAJAAAAAAAAAAHAAAAAAAAAAAAAAAAAAAAAAAAAAAAAAAAAAAAf39/ACUAAABYAAAAAAAAAAAAAAAAAAAAAAAAAAAAAAAAAAAAAAAAAAAAAAAAAAAAAAAAAAAAAAA/AAAAAAAAAKCGAQAAAAAAAAAAAAAAAAAMAAAAAQAAAAAAAAAAAAAAAAAAAB8AAABUAAAAAAAABQAAAAEAAAAAAAAAAAAAAAAAAAAAAAAAAAAAAAAAAAAAAAAAAAAAAAV/f38AmZaDA8zMzADAwP8Af39/AAAAAAAAAAAAAAAAAAAAAAAAAAAAIQAAABgAAAAUAAAAEBcAAAASAACtHwAA2xMAABAAAAAmAAAACAAAAAEAAAAAAAAA"/>
+                <pr:smNativeData xmlns:pr="smNativeData" xmlns="smNativeData" val="SMDATA_15_r8odaRMAAAAlAAAAZAAAAA0AAAAAAAAAAAAAAAAAAAAAAAAAAAAAAAABAAAAAAAAAAEAAABQAAAAAAAAAAAA4D8AAAAAAADgPwAAAAAAAOA/AAAAAAAA4D8AAAAAAADgPwAAAAAAAOA/AAAAAAAA4D8AAAAAAADgPwAAAAAAAOA/AAAAAAAA4D8CAAAAjAAAAAEAAAAAAAAA40oGDP///wgAAAAAAAAAAAAAAAAAAAAAAAAAAAAAAAAAAAAAeAAAAAEAAABAAAAAAAAAAAAAAABaAAAAAAAAAAAAAAAAAAAAAAAAAAAAAAAAAAAAAAAAAAAAAAAAAAAAAAAAAAAAAAAAAAAAAAAAAAAAAAAAAAAAAAAAAAAAAAAAAAAAFAAAADwAAAABAAAAAAAAAONKBgwPAAAAAQAAACMAAAAjAAAAIwAAAB4AAAAAAAAAZAAAAGQAAAAAAAAAZAAAAGQAAAAVAAAAYAAAAAAAAAAAAAAADwAAACADAAAAAAAAAAAAAAEAAACgMgAAVgcAAKr4//8BAAAAf39/AAEAAABkAAAAAAAAABQAAABAHwAAAAAAACYAAAAAAAAAwOD//wAAAAAmAAAAZAAAABYAAABMAAAAAAAAAAAAAAAEAAAAAAAAAAEAAACZloMKAAAAACgAAAAoAAAAZAAAAGQAAAAAAAAAzMzMAAAAAABQAAAAUAAAAGQAAABkAAAAAAAAABcAAAAUAAAAAAAAAAAAAAD/fwAA/38AAAAAAAAJAAAABAAAAB0AAAAeAAAAaAAAAAAAAAAAAAAAAAAAAAAAAAAAAAAAECcAABAnAAAAAAAAAAAAAAAAAAAAAAAAAAAAAAAAAAAAAAAAAAAAABQAAAAAAAAAwMD/AAAAAABkAAAAMgAAAAAAAABkAAAAAAAAAH9/fwAKAAAAIgAAABgAAAAAAAAAAAAAAAAAAAAAAAAAAAAAAAAAAAAkAAAAJAAAAAAAAAAHAAAAAAAAAAAAAAAAAAAAAAAAAAAAAAAAAAAAf39/ACUAAABYAAAAAAAAAAAAAAAAAAAAAAAAAAAAAAAAAAAAAAAAAAAAAAAAAAAAAAAAAAAAAAA/AAAAAAAAAKCGAQAAAAAAAAAAAAAAAAAMAAAAAQAAAAAAAAAAAAAAAAAAAB8AAABUAAAAAAAABQAAAAEAAAAAAAAAAAAAAAAAAAAAAAAAAAAAAAAAAAAAAAAAAAAAAAV/f38AmZaDA8zMzADAwP8Af39/AAAAAAAAAAAAAAAAAAAAAAAAAAAAIQAAABgAAAAUAAAAEBcAAAASAACtHwAA2xMAABAAAAAmAAAACAAAAAEAAAAAAAAA"/>
               </a:ext>
             </a:extLst>
           </p:cNvSpPr>
@@ -12399,7 +12404,7 @@
             <a:spLocks noGrp="1" noChangeArrowheads="1"/>
             <a:extLst>
               <a:ext uri="smNativeData">
-                <pr:smNativeData xmlns:pr="smNativeData" xmlns="smNativeData" val="SMDATA_15_mcIdaRMAAAAlAAAAZAAAAA0AAAAAAAAAAAAAAAAAAAAAAAAAAAAAAAAAAAAAAAAAAAEAAABQAAAAAAAAAAAA4D8AAAAAAADgPwAAAAAAAOA/AAAAAAAA4D8AAAAAAADgPwAAAAAAAOA/AAAAAAAA4D8AAAAAAADgPwAAAAAAAOA/AAAAAAAA4D8CAAAAjAAAAAAAAAAAAAAA40oGDP///wgAAAAAAAAAAAAAAAAAAAAAAAAAAAAAAAAAAAAAZAAAAAEAAABAAAAAAAAAAAAAAAAAAAAAAAAAAAAAAAAAAAAAAAAAAAAAAAAAAAAAAAAAAAAAAAAAAAAAAAAAAAAAAAAAAAAAAAAAAAAAAAAAAAAAAAAAAAAAAAAAAAAAFAAAADwAAAAAAAAAAAAAAAAAAAkUAAAAAQAAABQAAAAUAAAAFAAAAAEAAAAAAAAAZAAAAGQAAAAAAAAAZAAAAGQAAAAVAAAAYAAAAAAAAAAAAAAADwAAACADAAAAAAAAAAAAAAEAAACgMgAAVgcAAKr4//8BAAAAf39/AAEAAABkAAAAAAAAABQAAABAHwAAAAAAACYAAAAAAAAAwOD//wAAAAAmAAAAZAAAABYAAABMAAAAAAAAAAAAAAAEAAAAAAAAAAEAAACZloMKAAAAACgAAAAoAAAAZAAAAGQAAAAAAAAAzMzMAAAAAABQAAAAUAAAAGQAAABkAAAAAAAAABcAAAAUAAAAAAAAAAAAAAD/fwAA/38AAAAAAAAJAAAABAAAAABAAEEeAAAAaAAAAAAAAAAAAAAAAAAAAAAAAAAAAAAAECcAABAnAAAAAAAAAAAAAAAAAAAAAAAAAAAAAAAAAAAAAAAAAAAAABQAAAAAAAAAwMD/AAAAAABkAAAAMgAAAAAAAABkAAAAAAAAAH9/fwAKAAAAIgAAABgAAAAAAAAAAAAAAAAAAAAAAAAAAAAAAAAAAAAkAAAAJAAAAAAAAAAHAAAAAAAAAAAAAAAAAAAAAAAAAAAAAAAAAAAAf39/ACUAAABYAAAAAAAAAAAAAAAAAAAAAAAAAAAAAAAAAAAAAAAAAAAAAAAAAAAAAAAAAAAAAAA/AAAAAAAAAKCGAQAAAAAAAAAAAAAAAAAMAAAAAQAAAAAAAAAAAAAAAAAAAB8AAABUAAAA40oGBf///wEAAAAAAAAAAAAAAAAAAAAAAAAAAAAAAAAAAAAAAAAAAAAAAAJ/f38AmZaDA8zMzADAwP8Af39/AAAAAAAAAAAAAAAAAAAAAAAAAAAAIQAAABgAAAAUAAAAEBcAAEAUAACXIAAAlScAABAAAAAmAAAACAAAAIGAAAAAAAAA"/>
+                <pr:smNativeData xmlns:pr="smNativeData" xmlns="smNativeData" val="SMDATA_15_r8odaRMAAAAlAAAAZAAAAA0AAAAAAAAAAAAAAAAAAAAAAAAAAAAAAAAAAAAAAAAAAAEAAABQAAAAAAAAAAAA4D8AAAAAAADgPwAAAAAAAOA/AAAAAAAA4D8AAAAAAADgPwAAAAAAAOA/AAAAAAAA4D8AAAAAAADgPwAAAAAAAOA/AAAAAAAA4D8CAAAAjAAAAAAAAAAAAAAA40oGDP///wgAAAAAAAAAAAAAAAAAAAAAAAAAAAAAAAAAAAAAZAAAAAEAAABAAAAAAAAAAAAAAAAAAAAAAAAAAAAAAAAAAAAAAAAAAAAAAAAAAAAAAAAAAAAAAAAAAAAAAAAAAAAAAAAAAAAAAAAAAAAAAAAAAAAAAAAAAAAAAAAAAAAAFAAAADwAAAAAAAAAAAAAAAAAAAkUAAAAAQAAABQAAAAUAAAAFAAAAAEAAAAAAAAAZAAAAGQAAAAAAAAAZAAAAGQAAAAVAAAAYAAAAAAAAAAAAAAADwAAACADAAAAAAAAAAAAAAEAAACgMgAAVgcAAKr4//8BAAAAf39/AAEAAABkAAAAAAAAABQAAABAHwAAAAAAACYAAAAAAAAAwOD//wAAAAAmAAAAZAAAABYAAABMAAAAAAAAAAAAAAAEAAAAAAAAAAEAAACZloMKAAAAACgAAAAoAAAAZAAAAGQAAAAAAAAAzMzMAAAAAABQAAAAUAAAAGQAAABkAAAAAAAAABcAAAAUAAAAAAAAAAAAAAD/fwAA/38AAAAAAAAJAAAABAAAAABAAEEeAAAAaAAAAAAAAAAAAAAAAAAAAAAAAAAAAAAAECcAABAnAAAAAAAAAAAAAAAAAAAAAAAAAAAAAAAAAAAAAAAAAAAAABQAAAAAAAAAwMD/AAAAAABkAAAAMgAAAAAAAABkAAAAAAAAAH9/fwAKAAAAIgAAABgAAAAAAAAAAAAAAAAAAAAAAAAAAAAAAAAAAAAkAAAAJAAAAAAAAAAHAAAAAAAAAAAAAAAAAAAAAAAAAAAAAAAAAAAAf39/ACUAAABYAAAAAAAAAAAAAAAAAAAAAAAAAAAAAAAAAAAAAAAAAAAAAAAAAAAAAAAAAAAAAAA/AAAAAAAAAKCGAQAAAAAAAAAAAAAAAAAMAAAAAQAAAAAAAAAAAAAAAAAAAB8AAABUAAAA40oGBf///wEAAAAAAAAAAAAAAAAAAAAAAAAAAAAAAAAAAAAAAAAAAAAAAAJ/f38AmZaDA8zMzADAwP8Af39/AAAAAAAAAAAAAAAAAAAAAAAAAAAAIQAAABgAAAAUAAAAEBcAAEAUAACXIAAAlScAABAAAAAmAAAACAAAAIGAAAAAAAAA"/>
               </a:ext>
             </a:extLst>
           </p:cNvSpPr>
@@ -12485,7 +12490,7 @@
             <a:spLocks noGrp="1" noChangeArrowheads="1"/>
             <a:extLst>
               <a:ext uri="smNativeData">
-                <pr:smNativeData xmlns:pr="smNativeData" xmlns="smNativeData" val="SMDATA_15_mcIdaRMAAAAlAAAAZAAAAA0AAAAAAAAAAAAAAAAAAAAAAAAAAAAAAAAAAAAAAAAAAAEAAABQAAAAAAAAAAAA4D8AAAAAAADgPwAAAAAAAOA/AAAAAAAA4D8AAAAAAADgPwAAAAAAAOA/AAAAAAAA4D8AAAAAAADgPwAAAAAAAOA/AAAAAAAA4D8CAAAAjAAAAAAAAAAAAAAA40oGDP///wgAAAAAAAAAAAAAAAAAAAAAAAAAAAAAAAAAAAAAZAAAAAEAAABAAAAAAAAAAAAAAAAAAAAAAAAAAAAAAAAAAAAAAAAAAAAAAAAAAAAAAAAAAAAAAAAAAAAAAAAAAAAAAAAAAAAAAAAAAAAAAAAAAAAAAAAAAAAAAAAAAAAAFAAAADwAAAAAAAAAAAAAAAAAAAkUAAAAAQAAABQAAAAUAAAAFAAAAAEAAAAAAAAAZAAAAGQAAAAAAAAAZAAAAGQAAAAVAAAAYAAAAAAAAAAAAAAADwAAACADAAAAAAAAAAAAAAEAAACgMgAAVgcAAKr4//8BAAAAf39/AAEAAABkAAAAAAAAABQAAABAHwAAAAAAACYAAAAAAAAAwOD//wAAAAAmAAAAZAAAABYAAABMAAAAAAAAAAAAAAAEAAAAAAAAAAEAAACZloMKAAAAACgAAAAoAAAAZAAAAGQAAAAAAAAAzMzMAAAAAABQAAAAUAAAAGQAAABkAAAAAAAAABcAAAAUAAAAAAAAAAAAAAD/fwAA/38AAAAAAAAJAAAABAAAAAAAAAAeAAAAaAAAAAAAAAAAAAAAAAAAAAAAAAAAAAAAECcAABAnAAAAAAAAAAAAAAAAAAAAAAAAAAAAAAAAAAAAAAAAAAAAABQAAAAAAAAAwMD/AAAAAABkAAAAMgAAAAAAAABkAAAAAAAAAH9/fwAKAAAAIgAAABgAAAAAAAAAAAAAAAAAAAAAAAAAAAAAAAAAAAAkAAAAJAAAAAAAAAAHAAAAAAAAAAAAAAAAAAAAAAAAAAAAAAAAAAAAf39/ACUAAABYAAAAAAAAAAAAAAAAAAAAAAAAAAAAAAAAAAAAAAAAAAAAAAAAAAAAAAAAAAAAAAA/AAAAAAAAAKCGAQAAAAAAAAAAAAAAAAAMAAAAAQAAAAAAAAAAAAAAAAAAAB8AAABUAAAA40oGBf///wEAAAAAAAAAAAAAAAAAAAAAAAAAAAAAAAAAAAAAAAAAAAAAAAJ/f38AmZaDA8zMzADAwP8Af39/AAAAAAAAAAAAAAAAAAAAAAAAAAAAIQAAABgAAAAUAAAA6CEAAJ8IAABqKgAAqBEAABAAAAAmAAAACAAAAIGgAAAAAAAA"/>
+                <pr:smNativeData xmlns:pr="smNativeData" xmlns="smNativeData" val="SMDATA_15_r8odaRMAAAAlAAAAZAAAAA0AAAAAAAAAAAAAAAAAAAAAAAAAAAAAAAAAAAAAAAAAAAEAAABQAAAAAAAAAAAA4D8AAAAAAADgPwAAAAAAAOA/AAAAAAAA4D8AAAAAAADgPwAAAAAAAOA/AAAAAAAA4D8AAAAAAADgPwAAAAAAAOA/AAAAAAAA4D8CAAAAjAAAAAAAAAAAAAAA40oGDP///wgAAAAAAAAAAAAAAAAAAAAAAAAAAAAAAAAAAAAAZAAAAAEAAABAAAAAAAAAAAAAAAAAAAAAAAAAAAAAAAAAAAAAAAAAAAAAAAAAAAAAAAAAAAAAAAAAAAAAAAAAAAAAAAAAAAAAAAAAAAAAAAAAAAAAAAAAAAAAAAAAAAAAFAAAADwAAAAAAAAAAAAAAAAAAAkUAAAAAQAAABQAAAAUAAAAFAAAAAEAAAAAAAAAZAAAAGQAAAAAAAAAZAAAAGQAAAAVAAAAYAAAAAAAAAAAAAAADwAAACADAAAAAAAAAAAAAAEAAACgMgAAVgcAAKr4//8BAAAAf39/AAEAAABkAAAAAAAAABQAAABAHwAAAAAAACYAAAAAAAAAwOD//wAAAAAmAAAAZAAAABYAAABMAAAAAAAAAAAAAAAEAAAAAAAAAAEAAACZloMKAAAAACgAAAAoAAAAZAAAAGQAAAAAAAAAzMzMAAAAAABQAAAAUAAAAGQAAABkAAAAAAAAABcAAAAUAAAAAAAAAAAAAAD/fwAA/38AAAAAAAAJAAAABAAAAAAAAAAeAAAAaAAAAAAAAAAAAAAAAAAAAAAAAAAAAAAAECcAABAnAAAAAAAAAAAAAAAAAAAAAAAAAAAAAAAAAAAAAAAAAAAAABQAAAAAAAAAwMD/AAAAAABkAAAAMgAAAAAAAABkAAAAAAAAAH9/fwAKAAAAIgAAABgAAAAAAAAAAAAAAAAAAAAAAAAAAAAAAAAAAAAkAAAAJAAAAAAAAAAHAAAAAAAAAAAAAAAAAAAAAAAAAAAAAAAAAAAAf39/ACUAAABYAAAAAAAAAAAAAAAAAAAAAAAAAAAAAAAAAAAAAAAAAAAAAAAAAAAAAAAAAAAAAAA/AAAAAAAAAKCGAQAAAAAAAAAAAAAAAAAMAAAAAQAAAAAAAAAAAAAAAAAAAB8AAABUAAAA40oGBf///wEAAAAAAAAAAAAAAAAAAAAAAAAAAAAAAAAAAAAAAAAAAAAAAAJ/f38AmZaDA8zMzADAwP8Af39/AAAAAAAAAAAAAAAAAAAAAAAAAAAAIQAAABgAAAAUAAAA6CEAAJ8IAABqKgAAqBEAABAAAAAmAAAACAAAAIGgAAAAAAAA"/>
               </a:ext>
             </a:extLst>
           </p:cNvSpPr>
@@ -12558,7 +12563,7 @@
             <a:spLocks noGrp="1" noChangeArrowheads="1"/>
             <a:extLst>
               <a:ext uri="smNativeData">
-                <pr:smNativeData xmlns:pr="smNativeData" xmlns="smNativeData" val="SMDATA_15_mcIdaRMAAAAlAAAAZAAAAA0AAAAAAAAAAAAAAAAAAAAAAAAAAAAAAAABAAAAAAAAAAEAAABQAAAAAAAAAAAA4D8AAAAAAADgPwAAAAAAAOA/AAAAAAAA4D8AAAAAAADgPwAAAAAAAOA/AAAAAAAA4D8AAAAAAADgPwAAAAAAAOA/AAAAAAAA4D8CAAAAjAAAAAEAAAAAAAAA40oGDP///wgAAAAAAAAAAAAAAAAAAAAAAAAAAAAAAAAAAAAAeAAAAAEAAABAAAAAAAAAAAAAAABaAAAAAAAAAAAAAAAAAAAAAAAAAAAAAAAAAAAAAAAAAAAAAAAAAAAAAAAAAAAAAAAAAAAAAAAAAAAAAAAAAAAAAAAAAAAAAAAAAAAAFAAAADwAAAABAAAAAAAAAONKBgwPAAAAAQAAACMAAAAjAAAAIwAAAB4AAAAAAAAAZAAAAGQAAAAAAAAAZAAAAGQAAAAVAAAAYAAAAAAAAAAAAAAADwAAACADAAAAAAAAAAAAAAEAAACgMgAAVgcAAKr4//8BAAAAf39/AAEAAABkAAAAAAAAABQAAABAHwAAAAAAACYAAAAAAAAAwOD//wAAAAAmAAAAZAAAABYAAABMAAAAAAAAAAAAAAAEAAAAAAAAAAEAAACZloMKAAAAACgAAAAoAAAAZAAAAGQAAAAAAAAAzMzMAAAAAABQAAAAUAAAAGQAAABkAAAAAAAAABcAAAAUAAAAAAAAAAAAAAD/fwAA/38AAAAAAAAJAAAABAAAAAc3BzgeAAAAaAAAAAAAAAAAAAAAAAAAAAAAAAAAAAAAECcAABAnAAAAAAAAAAAAAAAAAAAAAAAAAAAAAAAAAAAAAAAAAAAAABQAAAAAAAAAwMD/AAAAAABkAAAAMgAAAAAAAABkAAAAAAAAAH9/fwAKAAAAIgAAABgAAAAAAAAAAAAAAAAAAAAAAAAAAAAAAAAAAAAkAAAAJAAAAAAAAAAHAAAAAAAAAAAAAAAAAAAAAAAAAAAAAAAAAAAAf39/ACUAAABYAAAAAAAAAAAAAAAAAAAAAAAAAAAAAAAAAAAAAAAAAAAAAAAAAAAAAAAAAAAAAAA/AAAAAAAAAKCGAQAAAAAAAAAAAAAAAAAMAAAAAQAAAAAAAAAAAAAAAAAAAB8AAABUAAAAAAAABQAAAAEAAAAAAAAAAAAAAAAAAAAAAAAAAAAAAAAAAAAAAAAAAAAAAAV/f38AmZaDA8zMzADAwP8Af39/AAAAAAAAAAAAAAAAAAAAAAAAAAAAIQAAABgAAAAUAAAAzSEAAAASAABpKgAA2xMAABAAAAAmAAAACAAAAAEAAAAAAAAA"/>
+                <pr:smNativeData xmlns:pr="smNativeData" xmlns="smNativeData" val="SMDATA_15_r8odaRMAAAAlAAAAZAAAAA0AAAAAAAAAAAAAAAAAAAAAAAAAAAAAAAABAAAAAAAAAAEAAABQAAAAAAAAAAAA4D8AAAAAAADgPwAAAAAAAOA/AAAAAAAA4D8AAAAAAADgPwAAAAAAAOA/AAAAAAAA4D8AAAAAAADgPwAAAAAAAOA/AAAAAAAA4D8CAAAAjAAAAAEAAAAAAAAA40oGDP///wgAAAAAAAAAAAAAAAAAAAAAAAAAAAAAAAAAAAAAeAAAAAEAAABAAAAAAAAAAAAAAABaAAAAAAAAAAAAAAAAAAAAAAAAAAAAAAAAAAAAAAAAAAAAAAAAAAAAAAAAAAAAAAAAAAAAAAAAAAAAAAAAAAAAAAAAAAAAAAAAAAAAFAAAADwAAAABAAAAAAAAAONKBgwPAAAAAQAAACMAAAAjAAAAIwAAAB4AAAAAAAAAZAAAAGQAAAAAAAAAZAAAAGQAAAAVAAAAYAAAAAAAAAAAAAAADwAAACADAAAAAAAAAAAAAAEAAACgMgAAVgcAAKr4//8BAAAAf39/AAEAAABkAAAAAAAAABQAAABAHwAAAAAAACYAAAAAAAAAwOD//wAAAAAmAAAAZAAAABYAAABMAAAAAAAAAAAAAAAEAAAAAAAAAAEAAACZloMKAAAAACgAAAAoAAAAZAAAAGQAAAAAAAAAzMzMAAAAAABQAAAAUAAAAGQAAABkAAAAAAAAABcAAAAUAAAAAAAAAAAAAAD/fwAA/38AAAAAAAAJAAAABAAAAAc3BzgeAAAAaAAAAAAAAAAAAAAAAAAAAAAAAAAAAAAAECcAABAnAAAAAAAAAAAAAAAAAAAAAAAAAAAAAAAAAAAAAAAAAAAAABQAAAAAAAAAwMD/AAAAAABkAAAAMgAAAAAAAABkAAAAAAAAAH9/fwAKAAAAIgAAABgAAAAAAAAAAAAAAAAAAAAAAAAAAAAAAAAAAAAkAAAAJAAAAAAAAAAHAAAAAAAAAAAAAAAAAAAAAAAAAAAAAAAAAAAAf39/ACUAAABYAAAAAAAAAAAAAAAAAAAAAAAAAAAAAAAAAAAAAAAAAAAAAAAAAAAAAAAAAAAAAAA/AAAAAAAAAKCGAQAAAAAAAAAAAAAAAAAMAAAAAQAAAAAAAAAAAAAAAAAAAB8AAABUAAAAAAAABQAAAAEAAAAAAAAAAAAAAAAAAAAAAAAAAAAAAAAAAAAAAAAAAAAAAAV/f38AmZaDA8zMzADAwP8Af39/AAAAAAAAAAAAAAAAAAAAAAAAAAAAIQAAABgAAAAUAAAAzSEAAAASAABpKgAA2xMAABAAAAAmAAAACAAAAAEAAAAAAAAA"/>
               </a:ext>
             </a:extLst>
           </p:cNvSpPr>
@@ -12594,7 +12599,7 @@
             <a:spLocks noGrp="1" noChangeArrowheads="1"/>
             <a:extLst>
               <a:ext uri="smNativeData">
-                <pr:smNativeData xmlns:pr="smNativeData" xmlns="smNativeData" val="SMDATA_15_mcIdaRMAAAAlAAAAZAAAAA0AAAAAAAAAAAAAAAAAAAAAAAAAAAAAAAAAAAAAAAAAAAEAAABQAAAAAAAAAAAA4D8AAAAAAADgPwAAAAAAAOA/AAAAAAAA4D8AAAAAAADgPwAAAAAAAOA/AAAAAAAA4D8AAAAAAADgPwAAAAAAAOA/AAAAAAAA4D8CAAAAjAAAAAAAAAAAAAAA40oGDP///wgAAAAAAAAAAAAAAAAAAAAAAAAAAAAAAAAAAAAAZAAAAAEAAABAAAAAAAAAAAAAAAAAAAAAAAAAAAAAAAAAAAAAAAAAAAAAAAAAAAAAAAAAAAAAAAAAAAAAAAAAAAAAAAAAAAAAAAAAAAAAAAAAAAAAAAAAAAAAAAAAAAAAFAAAADwAAAAAAAAAAAAAAAAAAAkUAAAAAQAAABQAAAAUAAAAFAAAAAEAAAAAAAAAZAAAAGQAAAAAAAAAZAAAAGQAAAAVAAAAYAAAAAAAAAAAAAAADwAAACADAAAAAAAAAAAAAAEAAACgMgAAVgcAAKr4//8BAAAAf39/AAEAAABkAAAAAAAAABQAAABAHwAAAAAAACYAAAAAAAAAwOD//wAAAAAmAAAAZAAAABYAAABMAAAAAAAAAAAAAAAEAAAAAAAAAAEAAACZloMKAAAAACgAAAAoAAAAZAAAAGQAAAAAAAAAzMzMAAAAAABQAAAAUAAAAGQAAABkAAAAAAAAABcAAAAUAAAAAAAAAAAAAAD/fwAA/38AAAAAAAAJAAAABAAAAAAAAAAeAAAAaAAAAAAAAAAAAAAAAAAAAAAAAAAAAAAAECcAABAnAAAAAAAAAAAAAAAAAAAAAAAAAAAAAAAAAAAAAAAAAAAAABQAAAAAAAAAwMD/AAAAAABkAAAAMgAAAAAAAABkAAAAAAAAAH9/fwAKAAAAIgAAABgAAAAAAAAAAAAAAAAAAAAAAAAAAAAAAAAAAAAkAAAAJAAAAAAAAAAHAAAAAAAAAAAAAAAAAAAAAAAAAAAAAAAAAAAAf39/ACUAAABYAAAAAAAAAAAAAAAAAAAAAAAAAAAAAAAAAAAAAAAAAAAAAAAAAAAAAAAAAAAAAAA/AAAAAAAAAKCGAQAAAAAAAAAAAAAAAAAMAAAAAQAAAAAAAAAAAAAAAAAAAB8AAABUAAAA40oGBf///wEAAAAAAAAAAAAAAAAAAAAAAAAAAAAAAAAAAAAAAAAAAAAAAAJ/f38AmZaDA8zMzADAwP8Af39/AAAAAAAAAAAAAAAAAAAAAAAAAAAAIQAAABgAAAAUAAAAsSEAAEAUAAA4KwAAlScAABAAAAAmAAAACAAAAIGgAAAAAAAA"/>
+                <pr:smNativeData xmlns:pr="smNativeData" xmlns="smNativeData" val="SMDATA_15_r8odaRMAAAAlAAAAZAAAAA0AAAAAAAAAAAAAAAAAAAAAAAAAAAAAAAAAAAAAAAAAAAEAAABQAAAAAAAAAAAA4D8AAAAAAADgPwAAAAAAAOA/AAAAAAAA4D8AAAAAAADgPwAAAAAAAOA/AAAAAAAA4D8AAAAAAADgPwAAAAAAAOA/AAAAAAAA4D8CAAAAjAAAAAAAAAAAAAAA40oGDP///wgAAAAAAAAAAAAAAAAAAAAAAAAAAAAAAAAAAAAAZAAAAAEAAABAAAAAAAAAAAAAAAAAAAAAAAAAAAAAAAAAAAAAAAAAAAAAAAAAAAAAAAAAAAAAAAAAAAAAAAAAAAAAAAAAAAAAAAAAAAAAAAAAAAAAAAAAAAAAAAAAAAAAFAAAADwAAAAAAAAAAAAAAAAAAAkUAAAAAQAAABQAAAAUAAAAFAAAAAEAAAAAAAAAZAAAAGQAAAAAAAAAZAAAAGQAAAAVAAAAYAAAAAAAAAAAAAAADwAAACADAAAAAAAAAAAAAAEAAACgMgAAVgcAAKr4//8BAAAAf39/AAEAAABkAAAAAAAAABQAAABAHwAAAAAAACYAAAAAAAAAwOD//wAAAAAmAAAAZAAAABYAAABMAAAAAAAAAAAAAAAEAAAAAAAAAAEAAACZloMKAAAAACgAAAAoAAAAZAAAAGQAAAAAAAAAzMzMAAAAAABQAAAAUAAAAGQAAABkAAAAAAAAABcAAAAUAAAAAAAAAAAAAAD/fwAA/38AAAAAAAAJAAAABAAAAAAAAAAeAAAAaAAAAAAAAAAAAAAAAAAAAAAAAAAAAAAAECcAABAnAAAAAAAAAAAAAAAAAAAAAAAAAAAAAAAAAAAAAAAAAAAAABQAAAAAAAAAwMD/AAAAAABkAAAAMgAAAAAAAABkAAAAAAAAAH9/fwAKAAAAIgAAABgAAAAAAAAAAAAAAAAAAAAAAAAAAAAAAAAAAAAkAAAAJAAAAAAAAAAHAAAAAAAAAAAAAAAAAAAAAAAAAAAAAAAAAAAAf39/ACUAAABYAAAAAAAAAAAAAAAAAAAAAAAAAAAAAAAAAAAAAAAAAAAAAAAAAAAAAAAAAAAAAAA/AAAAAAAAAKCGAQAAAAAAAAAAAAAAAAAMAAAAAQAAAAAAAAAAAAAAAAAAAB8AAABUAAAA40oGBf///wEAAAAAAAAAAAAAAAAAAAAAAAAAAAAAAAAAAAAAAAAAAAAAAAJ/f38AmZaDA8zMzADAwP8Af39/AAAAAAAAAAAAAAAAAAAAAAAAAAAAIQAAABgAAAAUAAAAsSEAAEAUAAA4KwAAlScAABAAAAAmAAAACAAAAIGgAAAAAAAA"/>
               </a:ext>
             </a:extLst>
           </p:cNvSpPr>
@@ -12680,7 +12685,7 @@
             <a:spLocks noGrp="1" noChangeArrowheads="1"/>
             <a:extLst>
               <a:ext uri="smNativeData">
-                <pr:smNativeData xmlns:pr="smNativeData" xmlns="smNativeData" val="SMDATA_15_mcIdaRMAAAAlAAAAZAAAAA0AAAAAAAAAAAAAAAAAAAAAAAAAAAAAAAAAAAAAAAAAAAEAAABQAAAAAAAAAAAA4D8AAAAAAADgPwAAAAAAAOA/AAAAAAAA4D8AAAAAAADgPwAAAAAAAOA/AAAAAAAA4D8AAAAAAADgPwAAAAAAAOA/AAAAAAAA4D8CAAAAjAAAAAAAAAAAAAAA40oGDP///wgAAAAAAAAAAAAAAAAAAAAAAAAAAAAAAAAAAAAAZAAAAAEAAABAAAAAAAAAAAAAAAAAAAAAAAAAAAAAAAAAAAAAAAAAAAAAAAAAAAAAAAAAAAAAAAAAAAAAAAAAAAAAAAAAAAAAAAAAAAAAAAAAAAAAAAAAAAAAAAAAAAAAFAAAADwAAAAAAAAAAAAAAAAAAAkUAAAAAQAAABQAAAAUAAAAFAAAAAEAAAAAAAAAZAAAAGQAAAAAAAAAZAAAAGQAAAAVAAAAYAAAAAAAAAAAAAAADwAAACADAAAAAAAAAAAAAAEAAACgMgAAVgcAAKr4//8BAAAAf39/AAEAAABkAAAAAAAAABQAAABAHwAAAAAAACYAAAAAAAAAwOD//wAAAAAmAAAAZAAAABYAAABMAAAAAAAAAAAAAAAEAAAAAAAAAAEAAACZloMKAAAAACgAAAAoAAAAZAAAAGQAAAAAAAAAzMzMAAAAAABQAAAAUAAAAGQAAABkAAAAAAAAABcAAAAUAAAAAAAAAAAAAAD/fwAA/38AAAAAAAAJAAAABAAAAAAAAAAeAAAAaAAAAAAAAAAAAAAAAAAAAAAAAAAAAAAAECcAABAnAAAAAAAAAAAAAAAAAAAAAAAAAAAAAAAAAAAAAAAAAAAAABQAAAAAAAAAwMD/AAAAAABkAAAAMgAAAAAAAABkAAAAAAAAAH9/fwAKAAAAIgAAABgAAAAAAAAAAAAAAAAAAAAAAAAAAAAAAAAAAAAkAAAAJAAAAAAAAAAHAAAAAAAAAAAAAAAAAAAAAAAAAAAAAAAAAAAAf39/ACUAAABYAAAAAAAAAAAAAAAAAAAAAAAAAAAAAAAAAAAAAAAAAAAAAAAAAAAAAAAAAAAAAAA/AAAAAAAAAKCGAQAAAAAAAAAAAAAAAAAMAAAAAQAAAAAAAAAAAAAAAAAAAB8AAABUAAAA40oGBf///wEAAAAAAAAAAAAAAAAAAAAAAAAAAAAAAAAAAAAAAAAAAAAAAAJ/f38AmZaDA8zMzADAwP8Af39/AAAAAAAAAAAAAAAAAAAAAAAAAAAAIQAAABgAAAAUAAAAwCwAAJ8IAABeNQAAmxEAABAAAAAmAAAACAAAAIGgAAAAAAAA"/>
+                <pr:smNativeData xmlns:pr="smNativeData" xmlns="smNativeData" val="SMDATA_15_r8odaRMAAAAlAAAAZAAAAA0AAAAAAAAAAAAAAAAAAAAAAAAAAAAAAAAAAAAAAAAAAAEAAABQAAAAAAAAAAAA4D8AAAAAAADgPwAAAAAAAOA/AAAAAAAA4D8AAAAAAADgPwAAAAAAAOA/AAAAAAAA4D8AAAAAAADgPwAAAAAAAOA/AAAAAAAA4D8CAAAAjAAAAAAAAAAAAAAA40oGDP///wgAAAAAAAAAAAAAAAAAAAAAAAAAAAAAAAAAAAAAZAAAAAEAAABAAAAAAAAAAAAAAAAAAAAAAAAAAAAAAAAAAAAAAAAAAAAAAAAAAAAAAAAAAAAAAAAAAAAAAAAAAAAAAAAAAAAAAAAAAAAAAAAAAAAAAAAAAAAAAAAAAAAAFAAAADwAAAAAAAAAAAAAAAAAAAkUAAAAAQAAABQAAAAUAAAAFAAAAAEAAAAAAAAAZAAAAGQAAAAAAAAAZAAAAGQAAAAVAAAAYAAAAAAAAAAAAAAADwAAACADAAAAAAAAAAAAAAEAAACgMgAAVgcAAKr4//8BAAAAf39/AAEAAABkAAAAAAAAABQAAABAHwAAAAAAACYAAAAAAAAAwOD//wAAAAAmAAAAZAAAABYAAABMAAAAAAAAAAAAAAAEAAAAAAAAAAEAAACZloMKAAAAACgAAAAoAAAAZAAAAGQAAAAAAAAAzMzMAAAAAABQAAAAUAAAAGQAAABkAAAAAAAAABcAAAAUAAAAAAAAAAAAAAD/fwAA/38AAAAAAAAJAAAABAAAAAAAAAAeAAAAaAAAAAAAAAAAAAAAAAAAAAAAAAAAAAAAECcAABAnAAAAAAAAAAAAAAAAAAAAAAAAAAAAAAAAAAAAAAAAAAAAABQAAAAAAAAAwMD/AAAAAABkAAAAMgAAAAAAAABkAAAAAAAAAH9/fwAKAAAAIgAAABgAAAAAAAAAAAAAAAAAAAAAAAAAAAAAAAAAAAAkAAAAJAAAAAAAAAAHAAAAAAAAAAAAAAAAAAAAAAAAAAAAAAAAAAAAf39/ACUAAABYAAAAAAAAAAAAAAAAAAAAAAAAAAAAAAAAAAAAAAAAAAAAAAAAAAAAAAAAAAAAAAA/AAAAAAAAAKCGAQAAAAAAAAAAAAAAAAAMAAAAAQAAAAAAAAAAAAAAAAAAAB8AAABUAAAA40oGBf///wEAAAAAAAAAAAAAAAAAAAAAAAAAAAAAAAAAAAAAAAAAAAAAAAJ/f38AmZaDA8zMzADAwP8Af39/AAAAAAAAAAAAAAAAAAAAAAAAAAAAIQAAABgAAAAUAAAAwCwAAJ8IAABeNQAAmxEAABAAAAAmAAAACAAAAIGgAAAAAAAA"/>
               </a:ext>
             </a:extLst>
           </p:cNvSpPr>
@@ -12753,7 +12758,7 @@
             <a:spLocks noGrp="1" noChangeArrowheads="1"/>
             <a:extLst>
               <a:ext uri="smNativeData">
-                <pr:smNativeData xmlns:pr="smNativeData" xmlns="smNativeData" val="SMDATA_15_mcIdaRMAAAAlAAAAZAAAAA0AAAAAAAAAAAAAAAAAAAAAAAAAAAAAAAAAAAAAAAAAAAEAAABQAAAAAAAAAAAA4D8AAAAAAADgPwAAAAAAAOA/AAAAAAAA4D8AAAAAAADgPwAAAAAAAOA/AAAAAAAA4D8AAAAAAADgPwAAAAAAAOA/AAAAAAAA4D8CAAAAjAAAAAAAAAAAAAAA40oGDP///wgAAAAAAAAAAAAAAAAAAAAAAAAAAAAAAAAAAAAAZAAAAAEAAABAAAAAAAAAAAAAAAAAAAAAAAAAAAAAAAAAAAAAAAAAAAAAAAAAAAAAAAAAAAAAAAAAAAAAAAAAAAAAAAAAAAAAAAAAAAAAAAAAAAAAAAAAAAAAAAAAAAAAFAAAADwAAAAAAAAAAAAAAAAAAAkUAAAAAQAAABQAAAAUAAAAFAAAAAEAAAAAAAAAZAAAAGQAAAAAAAAAZAAAAGQAAAAVAAAAYAAAAAAAAAAAAAAADwAAACADAAAAAAAAAAAAAAEAAACgMgAAVgcAAKr4//8BAAAAf39/AAEAAABkAAAAAAAAABQAAABAHwAAAAAAACYAAAAAAAAAwOD//wAAAAAmAAAAZAAAABYAAABMAAAAAAAAAAAAAAAEAAAAAAAAAAEAAACZloMKAAAAACgAAAAoAAAAZAAAAGQAAAAAAAAAzMzMAAAAAABQAAAAUAAAAGQAAABkAAAAAAAAABcAAAAUAAAAAAAAAAAAAAD/fwAA/38AAAAAAAAJAAAABAAAAAAAAAAeAAAAaAAAAAAAAAAAAAAAAAAAAAAAAAAAAAAAECcAABAnAAAAAAAAAAAAAAAAAAAAAAAAAAAAAAAAAAAAAAAAAAAAABQAAAAAAAAAwMD/AAAAAABkAAAAMgAAAAAAAABkAAAAAAAAAH9/fwAKAAAAIgAAABgAAAAAAAAAAAAAAAAAAAAAAAAAAAAAAAAAAAAkAAAAJAAAAAAAAAAHAAAAAAAAAAAAAAAAAAAAAAAAAAAAAAAAAAAAf39/ACUAAABYAAAAAAAAAAAAAAAAAAAAAAAAAAAAAAAAAAAAAAAAAAAAAAAAAAAAAAAAAAAAAAA/AAAAAAAAAKCGAQAAAAAAAAAAAAAAAAAMAAAAAQAAAAAAAAAAAAAAAAAAAB8AAABUAAAA40oGBf///wEAAAAAAAAAAAAAAAAAAAAAAAAAAAAAAAAAAAAAAAAAAAAAAAJ/f38AmZaDA8zMzADAwP8Af39/AAAAAAAAAAAAAAAAAAAAAAAAAAAAIQAAABgAAAAUAAAATSwAAEEUAABeNQAAlicAABAAAAAmAAAACAAAAIGAAAAAAAAA"/>
+                <pr:smNativeData xmlns:pr="smNativeData" xmlns="smNativeData" val="SMDATA_15_r8odaRMAAAAlAAAAZAAAAA0AAAAAAAAAAAAAAAAAAAAAAAAAAAAAAAAAAAAAAAAAAAEAAABQAAAAAAAAAAAA4D8AAAAAAADgPwAAAAAAAOA/AAAAAAAA4D8AAAAAAADgPwAAAAAAAOA/AAAAAAAA4D8AAAAAAADgPwAAAAAAAOA/AAAAAAAA4D8CAAAAjAAAAAAAAAAAAAAA40oGDP///wgAAAAAAAAAAAAAAAAAAAAAAAAAAAAAAAAAAAAAZAAAAAEAAABAAAAAAAAAAAAAAAAAAAAAAAAAAAAAAAAAAAAAAAAAAAAAAAAAAAAAAAAAAAAAAAAAAAAAAAAAAAAAAAAAAAAAAAAAAAAAAAAAAAAAAAAAAAAAAAAAAAAAFAAAADwAAAAAAAAAAAAAAAAAAAkUAAAAAQAAABQAAAAUAAAAFAAAAAEAAAAAAAAAZAAAAGQAAAAAAAAAZAAAAGQAAAAVAAAAYAAAAAAAAAAAAAAADwAAACADAAAAAAAAAAAAAAEAAACgMgAAVgcAAKr4//8BAAAAf39/AAEAAABkAAAAAAAAABQAAABAHwAAAAAAACYAAAAAAAAAwOD//wAAAAAmAAAAZAAAABYAAABMAAAAAAAAAAAAAAAEAAAAAAAAAAEAAACZloMKAAAAACgAAAAoAAAAZAAAAGQAAAAAAAAAzMzMAAAAAABQAAAAUAAAAGQAAABkAAAAAAAAABcAAAAUAAAAAAAAAAAAAAD/fwAA/38AAAAAAAAJAAAABAAAAAAAAAAeAAAAaAAAAAAAAAAAAAAAAAAAAAAAAAAAAAAAECcAABAnAAAAAAAAAAAAAAAAAAAAAAAAAAAAAAAAAAAAAAAAAAAAABQAAAAAAAAAwMD/AAAAAABkAAAAMgAAAAAAAABkAAAAAAAAAH9/fwAKAAAAIgAAABgAAAAAAAAAAAAAAAAAAAAAAAAAAAAAAAAAAAAkAAAAJAAAAAAAAAAHAAAAAAAAAAAAAAAAAAAAAAAAAAAAAAAAAAAAf39/ACUAAABYAAAAAAAAAAAAAAAAAAAAAAAAAAAAAAAAAAAAAAAAAAAAAAAAAAAAAAAAAAAAAAA/AAAAAAAAAKCGAQAAAAAAAAAAAAAAAAAMAAAAAQAAAAAAAAAAAAAAAAAAAB8AAABUAAAA40oGBf///wEAAAAAAAAAAAAAAAAAAAAAAAAAAAAAAAAAAAAAAAAAAAAAAAJ/f38AmZaDA8zMzADAwP8Af39/AAAAAAAAAAAAAAAAAAAAAAAAAAAAIQAAABgAAAAUAAAATSwAAEEUAABeNQAAlicAABAAAAAmAAAACAAAAIGAAAAAAAAA"/>
               </a:ext>
             </a:extLst>
           </p:cNvSpPr>
@@ -12829,7 +12834,7 @@
             <a:spLocks noGrp="1" noChangeArrowheads="1"/>
             <a:extLst>
               <a:ext uri="smNativeData">
-                <pr:smNativeData xmlns:pr="smNativeData" xmlns="smNativeData" val="SMDATA_15_mcIdaRMAAAAlAAAAZAAAAA0AAAAAAAAAAAAAAAAAAAAAAAAAAAAAAAABAAAAAAAAAAEAAABQAAAAAAAAAAAA4D8AAAAAAADgPwAAAAAAAOA/AAAAAAAA4D8AAAAAAADgPwAAAAAAAOA/AAAAAAAA4D8AAAAAAADgPwAAAAAAAOA/AAAAAAAA4D8CAAAAjAAAAAEAAAAAAAAA40oGDP///wgAAAAAAAAAAAAAAAAAAAAAAAAAAAAAAAAAAAAAeAAAAAEAAABAAAAAAAAAAAAAAABaAAAAAAAAAAAAAAAAAAAAAAAAAAAAAAAAAAAAAAAAAAAAAAAAAAAAAAAAAAAAAAAAAAAAAAAAAAAAAAAAAAAAAAAAAAAAAAAAAAAAFAAAADwAAAABAAAAAAAAAONKBgwPAAAAAQAAACMAAAAjAAAAIwAAAB4AAAAAAAAAZAAAAGQAAAAAAAAAZAAAAGQAAAAVAAAAYAAAAAAAAAAAAAAADwAAACADAAAAAAAAAAAAAAEAAACgMgAAVgcAAKr4//8BAAAAf39/AAEAAABkAAAAAAAAABQAAABAHwAAAAAAACYAAAAAAAAAwOD//wAAAAAmAAAAZAAAABYAAABMAAAAAAAAAAAAAAAEAAAAAAAAAAEAAACZloMKAAAAACgAAAAoAAAAZAAAAGQAAAAAAAAAzMzMAAAAAABQAAAAUAAAAGQAAABkAAAAAAAAABcAAAAUAAAAAAAAAAAAAAD/fwAA/38AAAAAAAAJAAAABAAAAAAAAAAeAAAAaAAAAAAAAAAAAAAAAAAAAAAAAAAAAAAAECcAABAnAAAAAAAAAAAAAAAAAAAAAAAAAAAAAAAAAAAAAAAAAAAAABQAAAAAAAAAwMD/AAAAAABkAAAAMgAAAAAAAABkAAAAAAAAAH9/fwAKAAAAIgAAABgAAAAAAAAAAAAAAAAAAAAAAAAAAAAAAAAAAAAkAAAAJAAAAAAAAAAHAAAAAAAAAAAAAAAAAAAAAAAAAAAAAAAAAAAAf39/ACUAAABYAAAAAAAAAAAAAAAAAAAAAAAAAAAAAAAAAAAAAAAAAAAAAAAAAAAAAAAAAAAAAAA/AAAAAAAAAKCGAQAAAAAAAAAAAAAAAAAMAAAAAQAAAAAAAAAAAAAAAAAAAB8AAABUAAAAAAAABQAAAAEAAAAAAAAAAAAAAAAAAAAAAAAAAAAAAAAAAAAAAAAAAAAAAAV/f38AmZaDA8zMzADAwP8Af39/AAAAAAAAAAAAAAAAAAAAAAAAAAAAIQAAABgAAAAUAAAAaCwAAAASAAAGNQAA2xMAABAAAAAmAAAACAAAAAEAAAAAAAAA"/>
+                <pr:smNativeData xmlns:pr="smNativeData" xmlns="smNativeData" val="SMDATA_15_r8odaRMAAAAlAAAAZAAAAA0AAAAAAAAAAAAAAAAAAAAAAAAAAAAAAAABAAAAAAAAAAEAAABQAAAAAAAAAAAA4D8AAAAAAADgPwAAAAAAAOA/AAAAAAAA4D8AAAAAAADgPwAAAAAAAOA/AAAAAAAA4D8AAAAAAADgPwAAAAAAAOA/AAAAAAAA4D8CAAAAjAAAAAEAAAAAAAAA40oGDP///wgAAAAAAAAAAAAAAAAAAAAAAAAAAAAAAAAAAAAAeAAAAAEAAABAAAAAAAAAAAAAAABaAAAAAAAAAAAAAAAAAAAAAAAAAAAAAAAAAAAAAAAAAAAAAAAAAAAAAAAAAAAAAAAAAAAAAAAAAAAAAAAAAAAAAAAAAAAAAAAAAAAAFAAAADwAAAABAAAAAAAAAONKBgwPAAAAAQAAACMAAAAjAAAAIwAAAB4AAAAAAAAAZAAAAGQAAAAAAAAAZAAAAGQAAAAVAAAAYAAAAAAAAAAAAAAADwAAACADAAAAAAAAAAAAAAEAAACgMgAAVgcAAKr4//8BAAAAf39/AAEAAABkAAAAAAAAABQAAABAHwAAAAAAACYAAAAAAAAAwOD//wAAAAAmAAAAZAAAABYAAABMAAAAAAAAAAAAAAAEAAAAAAAAAAEAAACZloMKAAAAACgAAAAoAAAAZAAAAGQAAAAAAAAAzMzMAAAAAABQAAAAUAAAAGQAAABkAAAAAAAAABcAAAAUAAAAAAAAAAAAAAD/fwAA/38AAAAAAAAJAAAABAAAAAAAAAAeAAAAaAAAAAAAAAAAAAAAAAAAAAAAAAAAAAAAECcAABAnAAAAAAAAAAAAAAAAAAAAAAAAAAAAAAAAAAAAAAAAAAAAABQAAAAAAAAAwMD/AAAAAABkAAAAMgAAAAAAAABkAAAAAAAAAH9/fwAKAAAAIgAAABgAAAAAAAAAAAAAAAAAAAAAAAAAAAAAAAAAAAAkAAAAJAAAAAAAAAAHAAAAAAAAAAAAAAAAAAAAAAAAAAAAAAAAAAAAf39/ACUAAABYAAAAAAAAAAAAAAAAAAAAAAAAAAAAAAAAAAAAAAAAAAAAAAAAAAAAAAAAAAAAAAA/AAAAAAAAAKCGAQAAAAAAAAAAAAAAAAAMAAAAAQAAAAAAAAAAAAAAAAAAAB8AAABUAAAAAAAABQAAAAEAAAAAAAAAAAAAAAAAAAAAAAAAAAAAAAAAAAAAAAAAAAAAAAV/f38AmZaDA8zMzADAwP8Af39/AAAAAAAAAAAAAAAAAAAAAAAAAAAAIQAAABgAAAAUAAAAaCwAAAASAAAGNQAA2xMAABAAAAAmAAAACAAAAAEAAAAAAAAA"/>
               </a:ext>
             </a:extLst>
           </p:cNvSpPr>
@@ -12897,7 +12902,7 @@
             <a:spLocks noGrp="1" noChangeArrowheads="1"/>
             <a:extLst>
               <a:ext uri="smNativeData">
-                <pr:smNativeData xmlns:pr="smNativeData" xmlns="smNativeData" val="SMDATA_15_mcIdaRMAAAAlAAAAZAAAAA0AAAAAAAAAAAAAAAAAAAAAAAAAAAAAAAAAAAAAAAAAAAEAAABQAAAAAAAAAAAA4D8AAAAAAADgPwAAAAAAAOA/AAAAAAAA4D8AAAAAAADgPwAAAAAAAOA/AAAAAAAA4D8AAAAAAADgPwAAAAAAAOA/AAAAAAAA4D8CAAAAjAAAAAAAAAAAAAAA40oGDP///wgAAAAAAAAAAAAAAAAAAAAAAAAAAAAAAAAAAAAAZAAAAAEAAABAAAAAAAAAAAAAAAAAAAAAAAAAAAAAAAAAAAAAAAAAAAAAAAAAAAAAAAAAAAAAAAAAAAAAAAAAAAAAAAAAAAAAAAAAAAAAAAAAAAAAAAAAAAAAAAAAAAAAFAAAADwAAAAAAAAAAAAAAAAAAAkUAAAAAQAAABQAAAAUAAAAFAAAAAEAAAAAAAAAZAAAAGQAAAAAAAAAZAAAAGQAAAAVAAAAYAAAAAAAAAAAAAAADwAAACADAAAAAAAAAAAAAAEAAACgMgAAVgcAAKr4//8BAAAAf39/AAEAAABkAAAAAAAAABQAAABAHwAAAAAAACYAAAAAAAAAwOD//wAAAAAmAAAAZAAAABYAAABMAAAAAAAAAAAAAAAEAAAAAAAAAAEAAACZloMKAAAAACgAAAAoAAAAZAAAAGQAAAAAAAAAzMzMAAAAAABQAAAAUAAAAGQAAABkAAAAAAAAABcAAAAUAAAAAAAAAAAAAAD/fwAA/38AAAAAAAAJAAAABAAAAAEAAAEeAAAAaAAAAAAAAAAAAAAAAAAAAAAAAAAAAAAAECcAABAnAAAAAAAAAAAAAAAAAAAAAAAAAAAAAAAAAAAAAAAAAAAAABQAAAAAAAAAwMD/AAAAAABkAAAAMgAAAAAAAABkAAAAAAAAAH9/fwAKAAAAIgAAABgAAAAAAAAAAAAAAAAAAAAAAAAAAAAAAAAAAAAkAAAAJAAAAAAAAAAHAAAAAAAAAAAAAAAAAAAAAAAAAAAAAAAAAAAAf39/ACUAAABYAAAAAAAAAAAAAAAAAAAAAAAAAAAAAAAAAAAAAAAAAAAAAAAAAAAAAAAAAAAAAAA/AAAAAAAAAKCGAQAAAAAAAAAAAAAAAAAMAAAAAQAAAAAAAAAAAAAAAAAAAB8AAABUAAAA40oGBf///wEAAAAAAAAAAAAAAAAAAAAAAAAAAAAAAAAAAAAAAAAAAAAAAAJ/f38AmZaDA8zMzADAwP8Af39/AAAAAAAAAAAAAAAAAAAAAAAAAAAAIQAAABgAAAAUAAAA0AIAADgEAABjFgAAAiYAABAAAAAmAAAACAAAAAEAAAAAAAAA"/>
+                <pr:smNativeData xmlns:pr="smNativeData" xmlns="smNativeData" val="SMDATA_15_r8odaRMAAAAlAAAAZAAAAA0AAAAAAAAAAAAAAAAAAAAAAAAAAAAAAAAAAAAAAAAAAAEAAABQAAAAAAAAAAAA4D8AAAAAAADgPwAAAAAAAOA/AAAAAAAA4D8AAAAAAADgPwAAAAAAAOA/AAAAAAAA4D8AAAAAAADgPwAAAAAAAOA/AAAAAAAA4D8CAAAAjAAAAAAAAAAAAAAA40oGDP///wgAAAAAAAAAAAAAAAAAAAAAAAAAAAAAAAAAAAAAZAAAAAEAAABAAAAAAAAAAAAAAAAAAAAAAAAAAAAAAAAAAAAAAAAAAAAAAAAAAAAAAAAAAAAAAAAAAAAAAAAAAAAAAAAAAAAAAAAAAAAAAAAAAAAAAAAAAAAAAAAAAAAAFAAAADwAAAAAAAAAAAAAAAAAAAkUAAAAAQAAABQAAAAUAAAAFAAAAAEAAAAAAAAAZAAAAGQAAAAAAAAAZAAAAGQAAAAVAAAAYAAAAAAAAAAAAAAADwAAACADAAAAAAAAAAAAAAEAAACgMgAAVgcAAKr4//8BAAAAf39/AAEAAABkAAAAAAAAABQAAABAHwAAAAAAACYAAAAAAAAAwOD//wAAAAAmAAAAZAAAABYAAABMAAAAAAAAAAAAAAAEAAAAAAAAAAEAAACZloMKAAAAACgAAAAoAAAAZAAAAGQAAAAAAAAAzMzMAAAAAABQAAAAUAAAAGQAAABkAAAAAAAAABcAAAAUAAAAAAAAAAAAAAD/fwAA/38AAAAAAAAJAAAABAAAAAEAAAEeAAAAaAAAAAAAAAAAAAAAAAAAAAAAAAAAAAAAECcAABAnAAAAAAAAAAAAAAAAAAAAAAAAAAAAAAAAAAAAAAAAAAAAABQAAAAAAAAAwMD/AAAAAABkAAAAMgAAAAAAAABkAAAAAAAAAH9/fwAKAAAAIgAAABgAAAAAAAAAAAAAAAAAAAAAAAAAAAAAAAAAAAAkAAAAJAAAAAAAAAAHAAAAAAAAAAAAAAAAAAAAAAAAAAAAAAAAAAAAf39/ACUAAABYAAAAAAAAAAAAAAAAAAAAAAAAAAAAAAAAAAAAAAAAAAAAAAAAAAAAAAAAAAAAAAA/AAAAAAAAAKCGAQAAAAAAAAAAAAAAAAAMAAAAAQAAAAAAAAAAAAAAAAAAAB8AAABUAAAA40oGBf///wEAAAAAAAAAAAAAAAAAAAAAAAAAAAAAAAAAAAAAAAAAAAAAAAJ/f38AmZaDA8zMzADAwP8Af39/AAAAAAAAAAAAAAAAAAAAAAAAAAAAIQAAABgAAAAUAAAA0AIAADgEAABjFgAAAiYAABAAAAAmAAAACAAAAAEAAAAAAAAA"/>
               </a:ext>
             </a:extLst>
           </p:cNvSpPr>
@@ -12933,7 +12938,7 @@
             <a:spLocks noGrp="1" noChangeArrowheads="1"/>
             <a:extLst>
               <a:ext uri="smNativeData">
-                <pr:smNativeData xmlns:pr="smNativeData" xmlns="smNativeData" val="SMDATA_15_mcIdaRMAAAAlAAAAZAAAAA0AAAAAAAAAAAAAAAAAAAAAAAAAAAAAAAAAAAAAAAAAAAEAAABQAAAAAAAAAAAA4D8AAAAAAADgPwAAAAAAAOA/AAAAAAAA4D8AAAAAAADgPwAAAAAAAOA/AAAAAAAA4D8AAAAAAADgPwAAAAAAAOA/AAAAAAAA4D8CAAAAjAAAAAAAAAAAAAAA40oGDP///wgAAAAAAAAAAAAAAAAAAAAAAAAAAAAAAAAAAAAAZAAAAAEAAABAAAAAAAAAAAAAAAAAAAAAAAAAAAAAAAAAAAAAAAAAAAAAAAAAAAAAAAAAAAAAAAAAAAAAAAAAAAAAAAAAAAAAAAAAAAAAAAAAAAAAAAAAAAAAAAAAAAAAFAAAADwAAAAAAAAAAAAAAAAAAAkUAAAAAQAAABQAAAAUAAAAFAAAAAEAAAAAAAAAZAAAAGQAAAAAAAAAZAAAAGQAAAAVAAAAYAAAAAAAAAAAAAAADwAAACADAAAAAAAAAAAAAAEAAACgMgAAVgcAAKr4//8BAAAAf39/AAEAAABkAAAAAAAAABQAAABAHwAAAAAAACYAAAAAAAAAwOD//wAAAAAmAAAAZAAAABYAAABMAAAAAAAAAAAAAAAEAAAAAAAAAAEAAACZloMKAAAAACgAAAAoAAAAZAAAAGQAAAAAAAAAzMzMAAAAAABQAAAAUAAAAGQAAABkAAAAAAAAABcAAAAUAAAAAAAAAAAAAAD/fwAA/38AAAAAAAAJAAAABAAAAD7o2aweAAAAaAAAAAAAAAAAAAAAAAAAAAAAAAAAAAAAECcAABAnAAAAAAAAAAAAAAAAAAAAAAAAAAAAAAAAAAAAAAAAAAAAABQAAAAAAAAAwMD/AAAAAABkAAAAMgAAAAAAAABkAAAAAAAAAH9/fwAKAAAAIgAAABgAAAAAAAAAAAAAAAAAAAAAAAAAAAAAAAAAAAAkAAAAJAAAAAAAAAAHAAAAAAAAAAAAAAAAAAAAAAAAAAAAAAAAAAAAf39/ACUAAABYAAAAAAAAAAAAAAAAAAAAAAAAAAAAAAAAAAAAAAAAAAAAAAAAAAAAAAAAAAAAAAA/AAAAAAAAAKCGAQAAAAAAAAAAAAAAAAAMAAAAAQAAAAAAAAAAAAAAAAAAAB8AAABUAAAA40oGBf///wEAAAAAAAAAAAAAAAAAAAAAAAAAAAAAAAAAAAAAAAAAAAAAAAJ/f38AmZaDA8zMzADAwP8Af39/AAAAAAAAAAAAAAAAAAAAAAAAAAAAIQAAABgAAAAUAAAAjhcAADgEAABwNQAAAiYAABAAAAAmAAAACAAAAAGAAAAAAAAA"/>
+                <pr:smNativeData xmlns:pr="smNativeData" xmlns="smNativeData" val="SMDATA_15_r8odaRMAAAAlAAAAZAAAAA0AAAAAAAAAAAAAAAAAAAAAAAAAAAAAAAAAAAAAAAAAAAEAAABQAAAAAAAAAAAA4D8AAAAAAADgPwAAAAAAAOA/AAAAAAAA4D8AAAAAAADgPwAAAAAAAOA/AAAAAAAA4D8AAAAAAADgPwAAAAAAAOA/AAAAAAAA4D8CAAAAjAAAAAAAAAAAAAAA40oGDP///wgAAAAAAAAAAAAAAAAAAAAAAAAAAAAAAAAAAAAAZAAAAAEAAABAAAAAAAAAAAAAAAAAAAAAAAAAAAAAAAAAAAAAAAAAAAAAAAAAAAAAAAAAAAAAAAAAAAAAAAAAAAAAAAAAAAAAAAAAAAAAAAAAAAAAAAAAAAAAAAAAAAAAFAAAADwAAAAAAAAAAAAAAAAAAAkUAAAAAQAAABQAAAAUAAAAFAAAAAEAAAAAAAAAZAAAAGQAAAAAAAAAZAAAAGQAAAAVAAAAYAAAAAAAAAAAAAAADwAAACADAAAAAAAAAAAAAAEAAACgMgAAVgcAAKr4//8BAAAAf39/AAEAAABkAAAAAAAAABQAAABAHwAAAAAAACYAAAAAAAAAwOD//wAAAAAmAAAAZAAAABYAAABMAAAAAAAAAAAAAAAEAAAAAAAAAAEAAACZloMKAAAAACgAAAAoAAAAZAAAAGQAAAAAAAAAzMzMAAAAAABQAAAAUAAAAGQAAABkAAAAAAAAABcAAAAUAAAAAAAAAAAAAAD/fwAA/38AAAAAAAAJAAAABAAAAD7o2aweAAAAaAAAAAAAAAAAAAAAAAAAAAAAAAAAAAAAECcAABAnAAAAAAAAAAAAAAAAAAAAAAAAAAAAAAAAAAAAAAAAAAAAABQAAAAAAAAAwMD/AAAAAABkAAAAMgAAAAAAAABkAAAAAAAAAH9/fwAKAAAAIgAAABgAAAAAAAAAAAAAAAAAAAAAAAAAAAAAAAAAAAAkAAAAJAAAAAAAAAAHAAAAAAAAAAAAAAAAAAAAAAAAAAAAAAAAAAAAf39/ACUAAABYAAAAAAAAAAAAAAAAAAAAAAAAAAAAAAAAAAAAAAAAAAAAAAAAAAAAAAAAAAAAAAA/AAAAAAAAAKCGAQAAAAAAAAAAAAAAAAAMAAAAAQAAAAAAAAAAAAAAAAAAAB8AAABUAAAA40oGBf///wEAAAAAAAAAAAAAAAAAAAAAAAAAAAAAAAAAAAAAAAAAAAAAAAJ/f38AmZaDA8zMzADAwP8Af39/AAAAAAAAAAAAAAAAAAAAAAAAAAAAIQAAABgAAAAUAAAAjhcAADgEAABwNQAAAiYAAAAAAAAmAAAACAAAAAGAAAAAAAAA"/>
               </a:ext>
             </a:extLst>
           </p:cNvSpPr>
@@ -12952,13 +12957,27 @@
           <a:lstStyle/>
           <a:p>
             <a:pPr lvl="2">
-              <a:defRPr lang="en-us"/>
-            </a:pPr>
-            <a:r>
-              <a:rPr lang="pt-br" kern="1" cap="none"/>
-              <a:t>Use esse tamanho de fonte e ocupe apenas esse bloco</a:t>
-            </a:r>
-            <a:endParaRPr lang="pt-br" kern="1" cap="none"/>
+              <a:defRPr lang="pt-br" kern="1" cap="none"/>
+            </a:pPr>
+            <a:r>
+              <a:t>Nas bases que obti, tentei procurar por colunas com valores similares, tais como timestamps, varchars, inteiros e floats. Contudo, apesar das bases já terem um excelente pré-processamento, ainda sim tive que adaptar os valores das colunas para a análise que gostaria de fazer. Após esse passo, ficou muito mais fácil executar um GROUP BY, MERGE, JOIN ou CONCAT com as bases. Além disso, como o número de bases e seus tamanhos eram muito grandes, tive que realizar uma leitura e um processamento em chunks, para evitar uma sobrecarga na minha máquina.</a:t>
+            </a:r>
+          </a:p>
+          <a:p>
+            <a:pPr lvl="2">
+              <a:defRPr lang="pt-br" kern="1" cap="none"/>
+            </a:pPr>
+            <a:r>
+              <a:t>A maioria das bases que obtive foram retiradas de sites governamentais (ou baseadas nesses sites) e instituições privedas de alta confiança, sempre seguindo a LGPD. Além disso, os dados são de consulta púbica e são atualizados constantemente, sempre mantendo o padrão apropriado. Por fim, as transformações que fiz foram mínimas (strip, conversão para datetime e leitura de planilhas).</a:t>
+            </a:r>
+          </a:p>
+          <a:p>
+            <a:pPr lvl="2">
+              <a:defRPr lang="pt-br" kern="1" cap="none"/>
+            </a:pPr>
+            <a:r>
+              <a:t>Por fim, os dados são variados, apresentando tanto o contexto marítimo quanto o contexto geral do mundo, do Brasil e da cidade do Rio de Janeiro. Como os dados são históricos e atualizados a cada mês (ou próximo disso), demoraria muito tempo para a obsolecência dos dados. Além disso, é importante saber que os dados não podem ser conectados tão diretamente, pois devemos alterar alguns nomes para as análises darem certo.</a:t>
+            </a:r>
           </a:p>
         </p:txBody>
       </p:sp>
@@ -12969,7 +12988,7 @@
             <a:spLocks noGrp="1" noChangeArrowheads="1"/>
             <a:extLst>
               <a:ext uri="smNativeData">
-                <pr:smNativeData xmlns:pr="smNativeData" xmlns="smNativeData" val="SMDATA_15_mcIdaRMAAAAlAAAAZAAAAA0AAAAAAAAAAAAAAAAAAAAAAAAAAAAAAAAAAAAAAAAAAAEAAABQAAAAAAAAAAAA4D8AAAAAAADgPwAAAAAAAOA/AAAAAAAA4D8AAAAAAADgPwAAAAAAAOA/AAAAAAAA4D8AAAAAAADgPwAAAAAAAOA/AAAAAAAA4D8CAAAAjAAAAAAAAAAAAAAA40oGDP///wgAAAAAAAAAAAAAAAAAAAAAAAAAAAAAAAAAAAAAZAAAAAEAAABAAAAAAAAAAAAAAAAAAAAAAAAAAAAAAAAAAAAAAAAAAAAAAAAAAAAAAAAAAAAAAAAAAAAAAAAAAAAAAAAAAAAAAAAAAAAAAAAAAAAAAAAAAAAAAAAAAAAAFAAAADwAAAAAAAAAAAAAAAAAAAkUAAAAAQAAABQAAAAUAAAAFAAAAAEAAAAAAAAAZAAAAGQAAAAAAAAAZAAAAGQAAAAVAAAAYAAAAAAAAAAAAAAADwAAACADAAAAAAAAAAAAAAEAAACgMgAAVgcAAKr4//8BAAAAf39/AAEAAABkAAAAAAAAABQAAABAHwAAAAAAACYAAAAAAAAAwOD//wAAAAAmAAAAZAAAABYAAABMAAAAAAAAAAAAAAAEAAAAAAAAAAEAAACZloMKAAAAACgAAAAoAAAAZAAAAGQAAAAAAAAAzMzMAAAAAABQAAAAUAAAAGQAAABkAAAAAAAAABcAAAAUAAAAAAAAAAAAAAD/fwAA/38AAAAAAAAJAAAABAAAAAAAAAAeAAAAaAAAAAAAAAAAAAAAAAAAAAAAAAAAAAAAECcAABAnAAAAAAAAAAAAAAAAAAAAAAAAAAAAAAAAAAAAAAAAAAAAABQAAAAAAAAAwMD/AAAAAABkAAAAMgAAAAAAAABkAAAAAAAAAH9/fwAKAAAAIgAAABgAAAAAAAAAAAAAAAAAAAAAAAAAAAAAAAAAAAAkAAAAJAAAAAAAAAAHAAAAAAAAAAAAAAAAAAAAAAAAAAAAAAAAAAAAf39/ACUAAABYAAAAAAAAAAAAAAAAAAAAAAAAAAAAAAAAAAAAAAAAAAAAAAAAAAAAAAAAAAAAAAA/AAAAAAAAAKCGAQAAAAAAAAAAAAAAAAAMAAAAAQAAAAAAAAAAAAAAAAAAAB8AAABUAAAA40oGBf///wEAAAAAAAAAAAAAAAAAAAAAAAAAAAAAAAAAAAAAAAAAAAAAAAJ/f38AmZaDA8zMzADAwP8Af39/AAAAAAAAAAAAAAAAAAAAAAAAAAAAIQAAABgAAAAUAAAAAQgAAGonAAB1MQAAMCoAABAAAAAmAAAACAAAAAAAAAAAAAAA"/>
+                <pr:smNativeData xmlns:pr="smNativeData" xmlns="smNativeData" val="SMDATA_15_r8odaRMAAAAlAAAAZAAAAA0AAAAAAAAAAAAAAAAAAAAAAAAAAAAAAAAAAAAAAAAAAAEAAABQAAAAAAAAAAAA4D8AAAAAAADgPwAAAAAAAOA/AAAAAAAA4D8AAAAAAADgPwAAAAAAAOA/AAAAAAAA4D8AAAAAAADgPwAAAAAAAOA/AAAAAAAA4D8CAAAAjAAAAAAAAAAAAAAA40oGDP///wgAAAAAAAAAAAAAAAAAAAAAAAAAAAAAAAAAAAAAZAAAAAEAAABAAAAAAAAAAAAAAAAAAAAAAAAAAAAAAAAAAAAAAAAAAAAAAAAAAAAAAAAAAAAAAAAAAAAAAAAAAAAAAAAAAAAAAAAAAAAAAAAAAAAAAAAAAAAAAAAAAAAAFAAAADwAAAAAAAAAAAAAAAAAAAkUAAAAAQAAABQAAAAUAAAAFAAAAAEAAAAAAAAAZAAAAGQAAAAAAAAAZAAAAGQAAAAVAAAAYAAAAAAAAAAAAAAADwAAACADAAAAAAAAAAAAAAEAAACgMgAAVgcAAKr4//8BAAAAf39/AAEAAABkAAAAAAAAABQAAABAHwAAAAAAACYAAAAAAAAAwOD//wAAAAAmAAAAZAAAABYAAABMAAAAAAAAAAAAAAAEAAAAAAAAAAEAAACZloMKAAAAACgAAAAoAAAAZAAAAGQAAAAAAAAAzMzMAAAAAABQAAAAUAAAAGQAAABkAAAAAAAAABcAAAAUAAAAAAAAAAAAAAD/fwAA/38AAAAAAAAJAAAABAAAAAAAAAAeAAAAaAAAAAAAAAAAAAAAAAAAAAAAAAAAAAAAECcAABAnAAAAAAAAAAAAAAAAAAAAAAAAAAAAAAAAAAAAAAAAAAAAABQAAAAAAAAAwMD/AAAAAABkAAAAMgAAAAAAAABkAAAAAAAAAH9/fwAKAAAAIgAAABgAAAAAAAAAAAAAAAAAAAAAAAAAAAAAAAAAAAAkAAAAJAAAAAAAAAAHAAAAAAAAAAAAAAAAAAAAAAAAAAAAAAAAAAAAf39/ACUAAABYAAAAAAAAAAAAAAAAAAAAAAAAAAAAAAAAAAAAAAAAAAAAAAAAAAAAAAAAAAAAAAA/AAAAAAAAAKCGAQAAAAAAAAAAAAAAAAAMAAAAAQAAAAAAAAAAAAAAAAAAAB8AAABUAAAA40oGBf///wEAAAAAAAAAAAAAAAAAAAAAAAAAAAAAAAAAAAAAAAAAAAAAAAJ/f38AmZaDA8zMzADAwP8Af39/AAAAAAAAAAAAAAAAAAAAAAAAAAAAIQAAABgAAAAUAAAAAQgAAGonAAB1MQAAMCoAABAAAAAmAAAACAAAAAAAAAAAAAAA"/>
               </a:ext>
             </a:extLst>
           </p:cNvSpPr>
